--- a/report/data_cluster/sample_sizes_slides.pptx
+++ b/report/data_cluster/sample_sizes_slides.pptx
@@ -4450,7 +4450,7 @@
                 </a:solidFill>
                 <a:latin typeface="Garamond"/>
               </a:rPr>
-              <a:t>1,230,200</a:t>
+              <a:t>385,573</a:t>
             </a:r>
           </a:p>
         </p:txBody>
@@ -4590,7 +4590,7 @@
                 </a:solidFill>
                 <a:latin typeface="Garamond"/>
               </a:rPr>
-              <a:t>1,221,832</a:t>
+              <a:t>382,007</a:t>
             </a:r>
           </a:p>
         </p:txBody>
@@ -4730,7 +4730,7 @@
                 </a:solidFill>
                 <a:latin typeface="Garamond"/>
               </a:rPr>
-              <a:t>1,211,261</a:t>
+              <a:t>377,803</a:t>
             </a:r>
           </a:p>
         </p:txBody>
@@ -4870,7 +4870,7 @@
                 </a:solidFill>
                 <a:latin typeface="Garamond"/>
               </a:rPr>
-              <a:t>1,209,862</a:t>
+              <a:t>376,110</a:t>
             </a:r>
           </a:p>
         </p:txBody>
@@ -5010,7 +5010,7 @@
                 </a:solidFill>
                 <a:latin typeface="Garamond"/>
               </a:rPr>
-              <a:t>1,226,441</a:t>
+              <a:t>379,674</a:t>
             </a:r>
           </a:p>
         </p:txBody>
@@ -5150,7 +5150,7 @@
                 </a:solidFill>
                 <a:latin typeface="Garamond"/>
               </a:rPr>
-              <a:t>1,230,780</a:t>
+              <a:t>381,708</a:t>
             </a:r>
           </a:p>
         </p:txBody>
@@ -5290,7 +5290,7 @@
                 </a:solidFill>
                 <a:latin typeface="Garamond"/>
               </a:rPr>
-              <a:t>1,221,274</a:t>
+              <a:t>379,927</a:t>
             </a:r>
           </a:p>
         </p:txBody>
@@ -5678,7 +5678,7 @@
                 </a:solidFill>
                 <a:latin typeface="Garamond"/>
               </a:rPr>
-              <a:t>1,215,614</a:t>
+              <a:t>378,498</a:t>
             </a:r>
           </a:p>
         </p:txBody>
@@ -5818,7 +5818,7 @@
                 </a:solidFill>
                 <a:latin typeface="Garamond"/>
               </a:rPr>
-              <a:t>1,210,672</a:t>
+              <a:t>378,505</a:t>
             </a:r>
           </a:p>
         </p:txBody>
@@ -5958,7 +5958,7 @@
                 </a:solidFill>
                 <a:latin typeface="Garamond"/>
               </a:rPr>
-              <a:t>1,218,742</a:t>
+              <a:t>387,617</a:t>
             </a:r>
           </a:p>
         </p:txBody>
@@ -6098,7 +6098,7 @@
                 </a:solidFill>
                 <a:latin typeface="Garamond"/>
               </a:rPr>
-              <a:t>1,203,862</a:t>
+              <a:t>381,968</a:t>
             </a:r>
           </a:p>
         </p:txBody>
@@ -6238,7 +6238,7 @@
                 </a:solidFill>
                 <a:latin typeface="Garamond"/>
               </a:rPr>
-              <a:t>1,202,067</a:t>
+              <a:t>381,159</a:t>
             </a:r>
           </a:p>
         </p:txBody>
@@ -6378,7 +6378,7 @@
                 </a:solidFill>
                 <a:latin typeface="Garamond"/>
               </a:rPr>
-              <a:t>1,186,031</a:t>
+              <a:t>376,197</a:t>
             </a:r>
           </a:p>
         </p:txBody>
@@ -6518,7 +6518,7 @@
                 </a:solidFill>
                 <a:latin typeface="Garamond"/>
               </a:rPr>
-              <a:t>1,150,355</a:t>
+              <a:t>366,072</a:t>
             </a:r>
           </a:p>
         </p:txBody>
@@ -6658,7 +6658,7 @@
                 </a:solidFill>
                 <a:latin typeface="Garamond"/>
               </a:rPr>
-              <a:t>1,112,619</a:t>
+              <a:t>356,027</a:t>
             </a:r>
           </a:p>
         </p:txBody>
@@ -6798,7 +6798,7 @@
                 </a:solidFill>
                 <a:latin typeface="Garamond"/>
               </a:rPr>
-              <a:t>1,001,837</a:t>
+              <a:t>335,867</a:t>
             </a:r>
           </a:p>
         </p:txBody>
@@ -6938,7 +6938,7 @@
                 </a:solidFill>
                 <a:latin typeface="Garamond"/>
               </a:rPr>
-              <a:t>1,006,676</a:t>
+              <a:t>331,439</a:t>
             </a:r>
           </a:p>
         </p:txBody>
@@ -7078,7 +7078,7 @@
                 </a:solidFill>
                 <a:latin typeface="Garamond"/>
               </a:rPr>
-              <a:t>964,927</a:t>
+              <a:t>317,729</a:t>
             </a:r>
           </a:p>
         </p:txBody>
@@ -7218,7 +7218,7 @@
                 </a:solidFill>
                 <a:latin typeface="Garamond"/>
               </a:rPr>
-              <a:t>948,329</a:t>
+              <a:t>312,873</a:t>
             </a:r>
           </a:p>
         </p:txBody>
@@ -7358,7 +7358,7 @@
                 </a:solidFill>
                 <a:latin typeface="Garamond"/>
               </a:rPr>
-              <a:t>944,897</a:t>
+              <a:t>310,239</a:t>
             </a:r>
           </a:p>
         </p:txBody>
@@ -7498,7 +7498,7 @@
                 </a:solidFill>
                 <a:latin typeface="Garamond"/>
               </a:rPr>
-              <a:t>833,766*</a:t>
+              <a:t>302,652*</a:t>
             </a:r>
           </a:p>
         </p:txBody>
@@ -7569,7 +7569,7 @@
                 </a:solidFill>
                 <a:latin typeface="Garamond"/>
               </a:rPr>
-              <a:t>Total   3,607,763 adults, 103,820 teachers (ASEC);  22,918,278 monthly interviews (2005–24)</a:t>
+              <a:t>Total (ASEC)   3,607,763 adults, 103,820 teachers</a:t>
             </a:r>
           </a:p>
         </p:txBody>
@@ -7604,7 +7604,7 @@
                 </a:solidFill>
                 <a:latin typeface="Garamond"/>
               </a:rPr>
-              <a:t>Adults (18+), the analysis universe; with children the ASEC files hold 5.0 million records. All 12 months: adult interviews in that year's basic monthly files (cached from 2005; * 2025: eleven months).</a:t>
+              <a:t>Distinct adults (18+) in both columns. The supplement interviews each person once; the basic survey interviews each adult about three times a year (0.9–1.2 million interviews), so we keep about one person in three and one interview in eight (monthly files cached from 2005; * 2025: eleven months).</a:t>
             </a:r>
           </a:p>
         </p:txBody>

--- a/report/data_cluster/sample_sizes_slides.pptx
+++ b/report/data_cluster/sample_sizes_slides.pptx
@@ -7896,8 +7896,8 @@
         </p:nvCxnSpPr>
         <p:spPr>
           <a:xfrm>
-            <a:off x="1554480" y="1252728"/>
-            <a:ext cx="8046719" cy="0"/>
+            <a:off x="731520" y="1143000"/>
+            <a:ext cx="8275320" cy="0"/>
           </a:xfrm>
           <a:prstGeom prst="line">
             <a:avLst/>
@@ -7932,21 +7932,21 @@
         </p:nvSpPr>
         <p:spPr>
           <a:xfrm>
-            <a:off x="4389120" y="1298448"/>
-            <a:ext cx="1417320" cy="237744"/>
-          </a:xfrm>
-          <a:prstGeom prst="rect">
-            <a:avLst/>
-          </a:prstGeom>
-          <a:noFill/>
-        </p:spPr>
-        <p:txBody>
-          <a:bodyPr wrap="square" lIns="0" rIns="0" tIns="0" bIns="0">
-            <a:spAutoFit/>
-          </a:bodyPr>
-          <a:lstStyle/>
-          <a:p>
-            <a:pPr algn="r"/>
+            <a:off x="2148840" y="1188720"/>
+            <a:ext cx="2029967" cy="237744"/>
+          </a:xfrm>
+          <a:prstGeom prst="rect">
+            <a:avLst/>
+          </a:prstGeom>
+          <a:noFill/>
+        </p:spPr>
+        <p:txBody>
+          <a:bodyPr wrap="square" lIns="0" rIns="0" tIns="0" bIns="0">
+            <a:spAutoFit/>
+          </a:bodyPr>
+          <a:lstStyle/>
+          <a:p>
+            <a:pPr algn="ctr"/>
             <a:r>
               <a:rPr sz="1300" b="1" i="0">
                 <a:solidFill>
@@ -7967,21 +7967,91 @@
         </p:nvSpPr>
         <p:spPr>
           <a:xfrm>
-            <a:off x="6126479" y="1298448"/>
-            <a:ext cx="1417320" cy="237744"/>
-          </a:xfrm>
-          <a:prstGeom prst="rect">
-            <a:avLst/>
-          </a:prstGeom>
-          <a:noFill/>
-        </p:spPr>
-        <p:txBody>
-          <a:bodyPr wrap="square" lIns="0" rIns="0" tIns="0" bIns="0">
-            <a:spAutoFit/>
-          </a:bodyPr>
-          <a:lstStyle/>
-          <a:p>
-            <a:pPr algn="r"/>
+            <a:off x="2148840" y="1463040"/>
+            <a:ext cx="914400" cy="210312"/>
+          </a:xfrm>
+          <a:prstGeom prst="rect">
+            <a:avLst/>
+          </a:prstGeom>
+          <a:noFill/>
+        </p:spPr>
+        <p:txBody>
+          <a:bodyPr wrap="square" lIns="0" rIns="0" tIns="0" bIns="0">
+            <a:spAutoFit/>
+          </a:bodyPr>
+          <a:lstStyle/>
+          <a:p>
+            <a:pPr algn="r"/>
+            <a:r>
+              <a:rPr sz="1150" b="1" i="0">
+                <a:solidFill>
+                  <a:srgbClr val="6B7480"/>
+                </a:solidFill>
+                <a:latin typeface="Garamond"/>
+              </a:rPr>
+              <a:t>New</a:t>
+            </a:r>
+          </a:p>
+        </p:txBody>
+      </p:sp>
+      <p:sp>
+        <p:nvSpPr>
+          <p:cNvPr id="6" name="TextBox 5"/>
+          <p:cNvSpPr txBox="1"/>
+          <p:nvPr/>
+        </p:nvSpPr>
+        <p:spPr>
+          <a:xfrm>
+            <a:off x="3063240" y="1463040"/>
+            <a:ext cx="1115568" cy="210312"/>
+          </a:xfrm>
+          <a:prstGeom prst="rect">
+            <a:avLst/>
+          </a:prstGeom>
+          <a:noFill/>
+        </p:spPr>
+        <p:txBody>
+          <a:bodyPr wrap="square" lIns="0" rIns="0" tIns="0" bIns="0">
+            <a:spAutoFit/>
+          </a:bodyPr>
+          <a:lstStyle/>
+          <a:p>
+            <a:pPr algn="r"/>
+            <a:r>
+              <a:rPr sz="1150" b="1" i="0">
+                <a:solidFill>
+                  <a:srgbClr val="6B7480"/>
+                </a:solidFill>
+                <a:latin typeface="Garamond"/>
+              </a:rPr>
+              <a:t>Seen before</a:t>
+            </a:r>
+          </a:p>
+        </p:txBody>
+      </p:sp>
+      <p:sp>
+        <p:nvSpPr>
+          <p:cNvPr id="7" name="TextBox 6"/>
+          <p:cNvSpPr txBox="1"/>
+          <p:nvPr/>
+        </p:nvSpPr>
+        <p:spPr>
+          <a:xfrm>
+            <a:off x="4562856" y="1188720"/>
+            <a:ext cx="2029967" cy="237744"/>
+          </a:xfrm>
+          <a:prstGeom prst="rect">
+            <a:avLst/>
+          </a:prstGeom>
+          <a:noFill/>
+        </p:spPr>
+        <p:txBody>
+          <a:bodyPr wrap="square" lIns="0" rIns="0" tIns="0" bIns="0">
+            <a:spAutoFit/>
+          </a:bodyPr>
+          <a:lstStyle/>
+          <a:p>
+            <a:pPr algn="ctr"/>
             <a:r>
               <a:rPr sz="1300" b="1" i="0">
                 <a:solidFill>
@@ -7996,27 +8066,97 @@
       </p:sp>
       <p:sp>
         <p:nvSpPr>
-          <p:cNvPr id="6" name="TextBox 5"/>
-          <p:cNvSpPr txBox="1"/>
-          <p:nvPr/>
-        </p:nvSpPr>
-        <p:spPr>
-          <a:xfrm>
-            <a:off x="7863840" y="1298448"/>
-            <a:ext cx="1417320" cy="237744"/>
-          </a:xfrm>
-          <a:prstGeom prst="rect">
-            <a:avLst/>
-          </a:prstGeom>
-          <a:noFill/>
-        </p:spPr>
-        <p:txBody>
-          <a:bodyPr wrap="square" lIns="0" rIns="0" tIns="0" bIns="0">
-            <a:spAutoFit/>
-          </a:bodyPr>
-          <a:lstStyle/>
-          <a:p>
-            <a:pPr algn="r"/>
+          <p:cNvPr id="8" name="TextBox 7"/>
+          <p:cNvSpPr txBox="1"/>
+          <p:nvPr/>
+        </p:nvSpPr>
+        <p:spPr>
+          <a:xfrm>
+            <a:off x="4562856" y="1463040"/>
+            <a:ext cx="914400" cy="210312"/>
+          </a:xfrm>
+          <a:prstGeom prst="rect">
+            <a:avLst/>
+          </a:prstGeom>
+          <a:noFill/>
+        </p:spPr>
+        <p:txBody>
+          <a:bodyPr wrap="square" lIns="0" rIns="0" tIns="0" bIns="0">
+            <a:spAutoFit/>
+          </a:bodyPr>
+          <a:lstStyle/>
+          <a:p>
+            <a:pPr algn="r"/>
+            <a:r>
+              <a:rPr sz="1150" b="1" i="0">
+                <a:solidFill>
+                  <a:srgbClr val="6B7480"/>
+                </a:solidFill>
+                <a:latin typeface="Garamond"/>
+              </a:rPr>
+              <a:t>New</a:t>
+            </a:r>
+          </a:p>
+        </p:txBody>
+      </p:sp>
+      <p:sp>
+        <p:nvSpPr>
+          <p:cNvPr id="9" name="TextBox 8"/>
+          <p:cNvSpPr txBox="1"/>
+          <p:nvPr/>
+        </p:nvSpPr>
+        <p:spPr>
+          <a:xfrm>
+            <a:off x="5477256" y="1463040"/>
+            <a:ext cx="1115568" cy="210312"/>
+          </a:xfrm>
+          <a:prstGeom prst="rect">
+            <a:avLst/>
+          </a:prstGeom>
+          <a:noFill/>
+        </p:spPr>
+        <p:txBody>
+          <a:bodyPr wrap="square" lIns="0" rIns="0" tIns="0" bIns="0">
+            <a:spAutoFit/>
+          </a:bodyPr>
+          <a:lstStyle/>
+          <a:p>
+            <a:pPr algn="r"/>
+            <a:r>
+              <a:rPr sz="1150" b="1" i="0">
+                <a:solidFill>
+                  <a:srgbClr val="6B7480"/>
+                </a:solidFill>
+                <a:latin typeface="Garamond"/>
+              </a:rPr>
+              <a:t>Seen before</a:t>
+            </a:r>
+          </a:p>
+        </p:txBody>
+      </p:sp>
+      <p:sp>
+        <p:nvSpPr>
+          <p:cNvPr id="10" name="TextBox 9"/>
+          <p:cNvSpPr txBox="1"/>
+          <p:nvPr/>
+        </p:nvSpPr>
+        <p:spPr>
+          <a:xfrm>
+            <a:off x="6976871" y="1188720"/>
+            <a:ext cx="2029967" cy="237744"/>
+          </a:xfrm>
+          <a:prstGeom prst="rect">
+            <a:avLst/>
+          </a:prstGeom>
+          <a:noFill/>
+        </p:spPr>
+        <p:txBody>
+          <a:bodyPr wrap="square" lIns="0" rIns="0" tIns="0" bIns="0">
+            <a:spAutoFit/>
+          </a:bodyPr>
+          <a:lstStyle/>
+          <a:p>
+            <a:pPr algn="ctr"/>
             <a:r>
               <a:rPr sz="1300" b="1" i="0">
                 <a:solidFill>
@@ -8025,20 +8165,90 @@
                 <a:latin typeface="Garamond"/>
               </a:rPr>
               <a:t>2024</a:t>
+            </a:r>
+          </a:p>
+        </p:txBody>
+      </p:sp>
+      <p:sp>
+        <p:nvSpPr>
+          <p:cNvPr id="11" name="TextBox 10"/>
+          <p:cNvSpPr txBox="1"/>
+          <p:nvPr/>
+        </p:nvSpPr>
+        <p:spPr>
+          <a:xfrm>
+            <a:off x="6976871" y="1463040"/>
+            <a:ext cx="914400" cy="210312"/>
+          </a:xfrm>
+          <a:prstGeom prst="rect">
+            <a:avLst/>
+          </a:prstGeom>
+          <a:noFill/>
+        </p:spPr>
+        <p:txBody>
+          <a:bodyPr wrap="square" lIns="0" rIns="0" tIns="0" bIns="0">
+            <a:spAutoFit/>
+          </a:bodyPr>
+          <a:lstStyle/>
+          <a:p>
+            <a:pPr algn="r"/>
+            <a:r>
+              <a:rPr sz="1150" b="1" i="0">
+                <a:solidFill>
+                  <a:srgbClr val="6B7480"/>
+                </a:solidFill>
+                <a:latin typeface="Garamond"/>
+              </a:rPr>
+              <a:t>New</a:t>
+            </a:r>
+          </a:p>
+        </p:txBody>
+      </p:sp>
+      <p:sp>
+        <p:nvSpPr>
+          <p:cNvPr id="12" name="TextBox 11"/>
+          <p:cNvSpPr txBox="1"/>
+          <p:nvPr/>
+        </p:nvSpPr>
+        <p:spPr>
+          <a:xfrm>
+            <a:off x="7891271" y="1463040"/>
+            <a:ext cx="1115568" cy="210312"/>
+          </a:xfrm>
+          <a:prstGeom prst="rect">
+            <a:avLst/>
+          </a:prstGeom>
+          <a:noFill/>
+        </p:spPr>
+        <p:txBody>
+          <a:bodyPr wrap="square" lIns="0" rIns="0" tIns="0" bIns="0">
+            <a:spAutoFit/>
+          </a:bodyPr>
+          <a:lstStyle/>
+          <a:p>
+            <a:pPr algn="r"/>
+            <a:r>
+              <a:rPr sz="1150" b="1" i="0">
+                <a:solidFill>
+                  <a:srgbClr val="6B7480"/>
+                </a:solidFill>
+                <a:latin typeface="Garamond"/>
+              </a:rPr>
+              <a:t>Seen before</a:t>
             </a:r>
           </a:p>
         </p:txBody>
       </p:sp>
       <p:cxnSp>
         <p:nvCxnSpPr>
-          <p:cNvPr id="7" name="Connector 6"/>
+          <p:cNvPr id="13" name="Connector 12"/>
           <p:cNvCxnSpPr/>
           <p:nvPr/>
         </p:nvCxnSpPr>
         <p:spPr>
           <a:xfrm>
-            <a:off x="1554480" y="1554480"/>
-            <a:ext cx="8046719" cy="0"/>
+            <a:off x="731520" y="1719072"/>
+            <a:ext cx="8275320" cy="0"/>
           </a:xfrm>
           <a:prstGeom prst="line">
             <a:avLst/>
@@ -8067,14 +8277,14 @@
       </p:cxnSp>
       <p:sp>
         <p:nvSpPr>
-          <p:cNvPr id="8" name="TextBox 7"/>
-          <p:cNvSpPr txBox="1"/>
-          <p:nvPr/>
-        </p:nvSpPr>
-        <p:spPr>
-          <a:xfrm>
-            <a:off x="1554480" y="1627631"/>
-            <a:ext cx="2834640" cy="228600"/>
+          <p:cNvPr id="14" name="TextBox 13"/>
+          <p:cNvSpPr txBox="1"/>
+          <p:nvPr/>
+        </p:nvSpPr>
+        <p:spPr>
+          <a:xfrm>
+            <a:off x="731520" y="1792224"/>
+            <a:ext cx="1417320" cy="210312"/>
           </a:xfrm>
           <a:prstGeom prst="rect">
             <a:avLst/>
@@ -8089,7 +8299,7 @@
           <a:p>
             <a:pPr algn="l"/>
             <a:r>
-              <a:rPr sz="1250" b="0" i="0">
+              <a:rPr sz="1150" b="0" i="0">
                 <a:solidFill>
                   <a:srgbClr val="212529"/>
                 </a:solidFill>
@@ -8102,119 +8312,224 @@
       </p:sp>
       <p:sp>
         <p:nvSpPr>
-          <p:cNvPr id="9" name="TextBox 8"/>
-          <p:cNvSpPr txBox="1"/>
-          <p:nvPr/>
-        </p:nvSpPr>
-        <p:spPr>
-          <a:xfrm>
-            <a:off x="4389120" y="1627631"/>
-            <a:ext cx="1417320" cy="228600"/>
-          </a:xfrm>
-          <a:prstGeom prst="rect">
-            <a:avLst/>
-          </a:prstGeom>
-          <a:noFill/>
-        </p:spPr>
-        <p:txBody>
-          <a:bodyPr wrap="square" lIns="0" rIns="0" tIns="0" bIns="0">
-            <a:spAutoFit/>
-          </a:bodyPr>
-          <a:lstStyle/>
-          <a:p>
-            <a:pPr algn="r"/>
-            <a:r>
-              <a:rPr sz="1250" b="0" i="0">
-                <a:solidFill>
-                  <a:srgbClr val="212529"/>
-                </a:solidFill>
-                <a:latin typeface="Garamond"/>
-              </a:rPr>
-              <a:t>101,943</a:t>
-            </a:r>
-          </a:p>
-        </p:txBody>
-      </p:sp>
-      <p:sp>
-        <p:nvSpPr>
-          <p:cNvPr id="10" name="TextBox 9"/>
-          <p:cNvSpPr txBox="1"/>
-          <p:nvPr/>
-        </p:nvSpPr>
-        <p:spPr>
-          <a:xfrm>
-            <a:off x="6126479" y="1627631"/>
-            <a:ext cx="1417320" cy="228600"/>
-          </a:xfrm>
-          <a:prstGeom prst="rect">
-            <a:avLst/>
-          </a:prstGeom>
-          <a:noFill/>
-        </p:spPr>
-        <p:txBody>
-          <a:bodyPr wrap="square" lIns="0" rIns="0" tIns="0" bIns="0">
-            <a:spAutoFit/>
-          </a:bodyPr>
-          <a:lstStyle/>
-          <a:p>
-            <a:pPr algn="r"/>
-            <a:r>
-              <a:rPr sz="1250" b="0" i="0">
-                <a:solidFill>
-                  <a:srgbClr val="212529"/>
-                </a:solidFill>
-                <a:latin typeface="Garamond"/>
-              </a:rPr>
-              <a:t>102,441</a:t>
-            </a:r>
-          </a:p>
-        </p:txBody>
-      </p:sp>
-      <p:sp>
-        <p:nvSpPr>
-          <p:cNvPr id="11" name="TextBox 10"/>
-          <p:cNvSpPr txBox="1"/>
-          <p:nvPr/>
-        </p:nvSpPr>
-        <p:spPr>
-          <a:xfrm>
-            <a:off x="7863840" y="1627631"/>
-            <a:ext cx="1417320" cy="228600"/>
-          </a:xfrm>
-          <a:prstGeom prst="rect">
-            <a:avLst/>
-          </a:prstGeom>
-          <a:noFill/>
-        </p:spPr>
-        <p:txBody>
-          <a:bodyPr wrap="square" lIns="0" rIns="0" tIns="0" bIns="0">
-            <a:spAutoFit/>
-          </a:bodyPr>
-          <a:lstStyle/>
-          <a:p>
-            <a:pPr algn="r"/>
-            <a:r>
-              <a:rPr sz="1250" b="0" i="0">
-                <a:solidFill>
-                  <a:srgbClr val="212529"/>
-                </a:solidFill>
-                <a:latin typeface="Garamond"/>
-              </a:rPr>
-              <a:t>78,769</a:t>
-            </a:r>
-          </a:p>
-        </p:txBody>
-      </p:sp>
-      <p:sp>
-        <p:nvSpPr>
-          <p:cNvPr id="12" name="TextBox 11"/>
-          <p:cNvSpPr txBox="1"/>
-          <p:nvPr/>
-        </p:nvSpPr>
-        <p:spPr>
-          <a:xfrm>
-            <a:off x="1554480" y="1888236"/>
-            <a:ext cx="2834640" cy="228600"/>
+          <p:cNvPr id="15" name="TextBox 14"/>
+          <p:cNvSpPr txBox="1"/>
+          <p:nvPr/>
+        </p:nvSpPr>
+        <p:spPr>
+          <a:xfrm>
+            <a:off x="2148840" y="1792224"/>
+            <a:ext cx="914400" cy="210312"/>
+          </a:xfrm>
+          <a:prstGeom prst="rect">
+            <a:avLst/>
+          </a:prstGeom>
+          <a:noFill/>
+        </p:spPr>
+        <p:txBody>
+          <a:bodyPr wrap="square" lIns="0" rIns="0" tIns="0" bIns="0">
+            <a:spAutoFit/>
+          </a:bodyPr>
+          <a:lstStyle/>
+          <a:p>
+            <a:pPr algn="r"/>
+            <a:r>
+              <a:rPr sz="1150" b="0" i="0">
+                <a:solidFill>
+                  <a:srgbClr val="212529"/>
+                </a:solidFill>
+                <a:latin typeface="Garamond"/>
+              </a:rPr>
+              <a:t>17,455</a:t>
+            </a:r>
+          </a:p>
+        </p:txBody>
+      </p:sp>
+      <p:sp>
+        <p:nvSpPr>
+          <p:cNvPr id="16" name="TextBox 15"/>
+          <p:cNvSpPr txBox="1"/>
+          <p:nvPr/>
+        </p:nvSpPr>
+        <p:spPr>
+          <a:xfrm>
+            <a:off x="3063240" y="1792224"/>
+            <a:ext cx="1115568" cy="210312"/>
+          </a:xfrm>
+          <a:prstGeom prst="rect">
+            <a:avLst/>
+          </a:prstGeom>
+          <a:noFill/>
+        </p:spPr>
+        <p:txBody>
+          <a:bodyPr wrap="square" lIns="0" rIns="0" tIns="0" bIns="0">
+            <a:spAutoFit/>
+          </a:bodyPr>
+          <a:lstStyle/>
+          <a:p>
+            <a:pPr algn="r"/>
+            <a:r>
+              <a:rPr sz="1150" b="0" i="0">
+                <a:solidFill>
+                  <a:srgbClr val="212529"/>
+                </a:solidFill>
+                <a:latin typeface="Garamond"/>
+              </a:rPr>
+              <a:t>84,488</a:t>
+            </a:r>
+          </a:p>
+        </p:txBody>
+      </p:sp>
+      <p:sp>
+        <p:nvSpPr>
+          <p:cNvPr id="17" name="TextBox 16"/>
+          <p:cNvSpPr txBox="1"/>
+          <p:nvPr/>
+        </p:nvSpPr>
+        <p:spPr>
+          <a:xfrm>
+            <a:off x="4562856" y="1792224"/>
+            <a:ext cx="914400" cy="210312"/>
+          </a:xfrm>
+          <a:prstGeom prst="rect">
+            <a:avLst/>
+          </a:prstGeom>
+          <a:noFill/>
+        </p:spPr>
+        <p:txBody>
+          <a:bodyPr wrap="square" lIns="0" rIns="0" tIns="0" bIns="0">
+            <a:spAutoFit/>
+          </a:bodyPr>
+          <a:lstStyle/>
+          <a:p>
+            <a:pPr algn="r"/>
+            <a:r>
+              <a:rPr sz="1150" b="0" i="0">
+                <a:solidFill>
+                  <a:srgbClr val="212529"/>
+                </a:solidFill>
+                <a:latin typeface="Garamond"/>
+              </a:rPr>
+              <a:t>19,653</a:t>
+            </a:r>
+          </a:p>
+        </p:txBody>
+      </p:sp>
+      <p:sp>
+        <p:nvSpPr>
+          <p:cNvPr id="18" name="TextBox 17"/>
+          <p:cNvSpPr txBox="1"/>
+          <p:nvPr/>
+        </p:nvSpPr>
+        <p:spPr>
+          <a:xfrm>
+            <a:off x="5477256" y="1792224"/>
+            <a:ext cx="1115568" cy="210312"/>
+          </a:xfrm>
+          <a:prstGeom prst="rect">
+            <a:avLst/>
+          </a:prstGeom>
+          <a:noFill/>
+        </p:spPr>
+        <p:txBody>
+          <a:bodyPr wrap="square" lIns="0" rIns="0" tIns="0" bIns="0">
+            <a:spAutoFit/>
+          </a:bodyPr>
+          <a:lstStyle/>
+          <a:p>
+            <a:pPr algn="r"/>
+            <a:r>
+              <a:rPr sz="1150" b="0" i="0">
+                <a:solidFill>
+                  <a:srgbClr val="212529"/>
+                </a:solidFill>
+                <a:latin typeface="Garamond"/>
+              </a:rPr>
+              <a:t>82,788</a:t>
+            </a:r>
+          </a:p>
+        </p:txBody>
+      </p:sp>
+      <p:sp>
+        <p:nvSpPr>
+          <p:cNvPr id="19" name="TextBox 18"/>
+          <p:cNvSpPr txBox="1"/>
+          <p:nvPr/>
+        </p:nvSpPr>
+        <p:spPr>
+          <a:xfrm>
+            <a:off x="6976871" y="1792224"/>
+            <a:ext cx="914400" cy="210312"/>
+          </a:xfrm>
+          <a:prstGeom prst="rect">
+            <a:avLst/>
+          </a:prstGeom>
+          <a:noFill/>
+        </p:spPr>
+        <p:txBody>
+          <a:bodyPr wrap="square" lIns="0" rIns="0" tIns="0" bIns="0">
+            <a:spAutoFit/>
+          </a:bodyPr>
+          <a:lstStyle/>
+          <a:p>
+            <a:pPr algn="r"/>
+            <a:r>
+              <a:rPr sz="1150" b="0" i="0">
+                <a:solidFill>
+                  <a:srgbClr val="212529"/>
+                </a:solidFill>
+                <a:latin typeface="Garamond"/>
+              </a:rPr>
+              <a:t>14,052</a:t>
+            </a:r>
+          </a:p>
+        </p:txBody>
+      </p:sp>
+      <p:sp>
+        <p:nvSpPr>
+          <p:cNvPr id="20" name="TextBox 19"/>
+          <p:cNvSpPr txBox="1"/>
+          <p:nvPr/>
+        </p:nvSpPr>
+        <p:spPr>
+          <a:xfrm>
+            <a:off x="7891271" y="1792224"/>
+            <a:ext cx="1115568" cy="210312"/>
+          </a:xfrm>
+          <a:prstGeom prst="rect">
+            <a:avLst/>
+          </a:prstGeom>
+          <a:noFill/>
+        </p:spPr>
+        <p:txBody>
+          <a:bodyPr wrap="square" lIns="0" rIns="0" tIns="0" bIns="0">
+            <a:spAutoFit/>
+          </a:bodyPr>
+          <a:lstStyle/>
+          <a:p>
+            <a:pPr algn="r"/>
+            <a:r>
+              <a:rPr sz="1150" b="0" i="0">
+                <a:solidFill>
+                  <a:srgbClr val="212529"/>
+                </a:solidFill>
+                <a:latin typeface="Garamond"/>
+              </a:rPr>
+              <a:t>64,717</a:t>
+            </a:r>
+          </a:p>
+        </p:txBody>
+      </p:sp>
+      <p:sp>
+        <p:nvSpPr>
+          <p:cNvPr id="21" name="TextBox 20"/>
+          <p:cNvSpPr txBox="1"/>
+          <p:nvPr/>
+        </p:nvSpPr>
+        <p:spPr>
+          <a:xfrm>
+            <a:off x="731520" y="2022652"/>
+            <a:ext cx="1417320" cy="210312"/>
           </a:xfrm>
           <a:prstGeom prst="rect">
             <a:avLst/>
@@ -8229,7 +8544,7 @@
           <a:p>
             <a:pPr algn="l"/>
             <a:r>
-              <a:rPr sz="1250" b="0" i="0">
+              <a:rPr sz="1150" b="0" i="0">
                 <a:solidFill>
                   <a:srgbClr val="212529"/>
                 </a:solidFill>
@@ -8242,119 +8557,224 @@
       </p:sp>
       <p:sp>
         <p:nvSpPr>
-          <p:cNvPr id="13" name="TextBox 12"/>
-          <p:cNvSpPr txBox="1"/>
-          <p:nvPr/>
-        </p:nvSpPr>
-        <p:spPr>
-          <a:xfrm>
-            <a:off x="4389120" y="1888236"/>
-            <a:ext cx="1417320" cy="228600"/>
-          </a:xfrm>
-          <a:prstGeom prst="rect">
-            <a:avLst/>
-          </a:prstGeom>
-          <a:noFill/>
-        </p:spPr>
-        <p:txBody>
-          <a:bodyPr wrap="square" lIns="0" rIns="0" tIns="0" bIns="0">
-            <a:spAutoFit/>
-          </a:bodyPr>
-          <a:lstStyle/>
-          <a:p>
-            <a:pPr algn="r"/>
-            <a:r>
-              <a:rPr sz="1250" b="0" i="0">
-                <a:solidFill>
-                  <a:srgbClr val="212529"/>
-                </a:solidFill>
-                <a:latin typeface="Garamond"/>
-              </a:rPr>
-              <a:t>101,479</a:t>
-            </a:r>
-          </a:p>
-        </p:txBody>
-      </p:sp>
-      <p:sp>
-        <p:nvSpPr>
-          <p:cNvPr id="14" name="TextBox 13"/>
-          <p:cNvSpPr txBox="1"/>
-          <p:nvPr/>
-        </p:nvSpPr>
-        <p:spPr>
-          <a:xfrm>
-            <a:off x="6126479" y="1888236"/>
-            <a:ext cx="1417320" cy="228600"/>
-          </a:xfrm>
-          <a:prstGeom prst="rect">
-            <a:avLst/>
-          </a:prstGeom>
-          <a:noFill/>
-        </p:spPr>
-        <p:txBody>
-          <a:bodyPr wrap="square" lIns="0" rIns="0" tIns="0" bIns="0">
-            <a:spAutoFit/>
-          </a:bodyPr>
-          <a:lstStyle/>
-          <a:p>
-            <a:pPr algn="r"/>
-            <a:r>
-              <a:rPr sz="1250" b="0" i="0">
-                <a:solidFill>
-                  <a:srgbClr val="212529"/>
-                </a:solidFill>
-                <a:latin typeface="Garamond"/>
-              </a:rPr>
-              <a:t>100,857</a:t>
-            </a:r>
-          </a:p>
-        </p:txBody>
-      </p:sp>
-      <p:sp>
-        <p:nvSpPr>
-          <p:cNvPr id="15" name="TextBox 14"/>
-          <p:cNvSpPr txBox="1"/>
-          <p:nvPr/>
-        </p:nvSpPr>
-        <p:spPr>
-          <a:xfrm>
-            <a:off x="7863840" y="1888236"/>
-            <a:ext cx="1417320" cy="228600"/>
-          </a:xfrm>
-          <a:prstGeom prst="rect">
-            <a:avLst/>
-          </a:prstGeom>
-          <a:noFill/>
-        </p:spPr>
-        <p:txBody>
-          <a:bodyPr wrap="square" lIns="0" rIns="0" tIns="0" bIns="0">
-            <a:spAutoFit/>
-          </a:bodyPr>
-          <a:lstStyle/>
-          <a:p>
-            <a:pPr algn="r"/>
-            <a:r>
-              <a:rPr sz="1250" b="0" i="0">
-                <a:solidFill>
-                  <a:srgbClr val="212529"/>
-                </a:solidFill>
-                <a:latin typeface="Garamond"/>
-              </a:rPr>
-              <a:t>78,988</a:t>
-            </a:r>
-          </a:p>
-        </p:txBody>
-      </p:sp>
-      <p:sp>
-        <p:nvSpPr>
-          <p:cNvPr id="16" name="TextBox 15"/>
-          <p:cNvSpPr txBox="1"/>
-          <p:nvPr/>
-        </p:nvSpPr>
-        <p:spPr>
-          <a:xfrm>
-            <a:off x="1554480" y="2148840"/>
-            <a:ext cx="2834640" cy="228600"/>
+          <p:cNvPr id="22" name="TextBox 21"/>
+          <p:cNvSpPr txBox="1"/>
+          <p:nvPr/>
+        </p:nvSpPr>
+        <p:spPr>
+          <a:xfrm>
+            <a:off x="2148840" y="2022652"/>
+            <a:ext cx="914400" cy="210312"/>
+          </a:xfrm>
+          <a:prstGeom prst="rect">
+            <a:avLst/>
+          </a:prstGeom>
+          <a:noFill/>
+        </p:spPr>
+        <p:txBody>
+          <a:bodyPr wrap="square" lIns="0" rIns="0" tIns="0" bIns="0">
+            <a:spAutoFit/>
+          </a:bodyPr>
+          <a:lstStyle/>
+          <a:p>
+            <a:pPr algn="r"/>
+            <a:r>
+              <a:rPr sz="1150" b="0" i="0">
+                <a:solidFill>
+                  <a:srgbClr val="212529"/>
+                </a:solidFill>
+                <a:latin typeface="Garamond"/>
+              </a:rPr>
+              <a:t>17,165</a:t>
+            </a:r>
+          </a:p>
+        </p:txBody>
+      </p:sp>
+      <p:sp>
+        <p:nvSpPr>
+          <p:cNvPr id="23" name="TextBox 22"/>
+          <p:cNvSpPr txBox="1"/>
+          <p:nvPr/>
+        </p:nvSpPr>
+        <p:spPr>
+          <a:xfrm>
+            <a:off x="3063240" y="2022652"/>
+            <a:ext cx="1115568" cy="210312"/>
+          </a:xfrm>
+          <a:prstGeom prst="rect">
+            <a:avLst/>
+          </a:prstGeom>
+          <a:noFill/>
+        </p:spPr>
+        <p:txBody>
+          <a:bodyPr wrap="square" lIns="0" rIns="0" tIns="0" bIns="0">
+            <a:spAutoFit/>
+          </a:bodyPr>
+          <a:lstStyle/>
+          <a:p>
+            <a:pPr algn="r"/>
+            <a:r>
+              <a:rPr sz="1150" b="0" i="0">
+                <a:solidFill>
+                  <a:srgbClr val="212529"/>
+                </a:solidFill>
+                <a:latin typeface="Garamond"/>
+              </a:rPr>
+              <a:t>84,314</a:t>
+            </a:r>
+          </a:p>
+        </p:txBody>
+      </p:sp>
+      <p:sp>
+        <p:nvSpPr>
+          <p:cNvPr id="24" name="TextBox 23"/>
+          <p:cNvSpPr txBox="1"/>
+          <p:nvPr/>
+        </p:nvSpPr>
+        <p:spPr>
+          <a:xfrm>
+            <a:off x="4562856" y="2022652"/>
+            <a:ext cx="914400" cy="210312"/>
+          </a:xfrm>
+          <a:prstGeom prst="rect">
+            <a:avLst/>
+          </a:prstGeom>
+          <a:noFill/>
+        </p:spPr>
+        <p:txBody>
+          <a:bodyPr wrap="square" lIns="0" rIns="0" tIns="0" bIns="0">
+            <a:spAutoFit/>
+          </a:bodyPr>
+          <a:lstStyle/>
+          <a:p>
+            <a:pPr algn="r"/>
+            <a:r>
+              <a:rPr sz="1150" b="0" i="0">
+                <a:solidFill>
+                  <a:srgbClr val="212529"/>
+                </a:solidFill>
+                <a:latin typeface="Garamond"/>
+              </a:rPr>
+              <a:t>18,402</a:t>
+            </a:r>
+          </a:p>
+        </p:txBody>
+      </p:sp>
+      <p:sp>
+        <p:nvSpPr>
+          <p:cNvPr id="25" name="TextBox 24"/>
+          <p:cNvSpPr txBox="1"/>
+          <p:nvPr/>
+        </p:nvSpPr>
+        <p:spPr>
+          <a:xfrm>
+            <a:off x="5477256" y="2022652"/>
+            <a:ext cx="1115568" cy="210312"/>
+          </a:xfrm>
+          <a:prstGeom prst="rect">
+            <a:avLst/>
+          </a:prstGeom>
+          <a:noFill/>
+        </p:spPr>
+        <p:txBody>
+          <a:bodyPr wrap="square" lIns="0" rIns="0" tIns="0" bIns="0">
+            <a:spAutoFit/>
+          </a:bodyPr>
+          <a:lstStyle/>
+          <a:p>
+            <a:pPr algn="r"/>
+            <a:r>
+              <a:rPr sz="1150" b="0" i="0">
+                <a:solidFill>
+                  <a:srgbClr val="212529"/>
+                </a:solidFill>
+                <a:latin typeface="Garamond"/>
+              </a:rPr>
+              <a:t>82,455</a:t>
+            </a:r>
+          </a:p>
+        </p:txBody>
+      </p:sp>
+      <p:sp>
+        <p:nvSpPr>
+          <p:cNvPr id="26" name="TextBox 25"/>
+          <p:cNvSpPr txBox="1"/>
+          <p:nvPr/>
+        </p:nvSpPr>
+        <p:spPr>
+          <a:xfrm>
+            <a:off x="6976871" y="2022652"/>
+            <a:ext cx="914400" cy="210312"/>
+          </a:xfrm>
+          <a:prstGeom prst="rect">
+            <a:avLst/>
+          </a:prstGeom>
+          <a:noFill/>
+        </p:spPr>
+        <p:txBody>
+          <a:bodyPr wrap="square" lIns="0" rIns="0" tIns="0" bIns="0">
+            <a:spAutoFit/>
+          </a:bodyPr>
+          <a:lstStyle/>
+          <a:p>
+            <a:pPr algn="r"/>
+            <a:r>
+              <a:rPr sz="1150" b="0" i="0">
+                <a:solidFill>
+                  <a:srgbClr val="212529"/>
+                </a:solidFill>
+                <a:latin typeface="Garamond"/>
+              </a:rPr>
+              <a:t>15,049</a:t>
+            </a:r>
+          </a:p>
+        </p:txBody>
+      </p:sp>
+      <p:sp>
+        <p:nvSpPr>
+          <p:cNvPr id="27" name="TextBox 26"/>
+          <p:cNvSpPr txBox="1"/>
+          <p:nvPr/>
+        </p:nvSpPr>
+        <p:spPr>
+          <a:xfrm>
+            <a:off x="7891271" y="2022652"/>
+            <a:ext cx="1115568" cy="210312"/>
+          </a:xfrm>
+          <a:prstGeom prst="rect">
+            <a:avLst/>
+          </a:prstGeom>
+          <a:noFill/>
+        </p:spPr>
+        <p:txBody>
+          <a:bodyPr wrap="square" lIns="0" rIns="0" tIns="0" bIns="0">
+            <a:spAutoFit/>
+          </a:bodyPr>
+          <a:lstStyle/>
+          <a:p>
+            <a:pPr algn="r"/>
+            <a:r>
+              <a:rPr sz="1150" b="0" i="0">
+                <a:solidFill>
+                  <a:srgbClr val="212529"/>
+                </a:solidFill>
+                <a:latin typeface="Garamond"/>
+              </a:rPr>
+              <a:t>63,939</a:t>
+            </a:r>
+          </a:p>
+        </p:txBody>
+      </p:sp>
+      <p:sp>
+        <p:nvSpPr>
+          <p:cNvPr id="28" name="TextBox 27"/>
+          <p:cNvSpPr txBox="1"/>
+          <p:nvPr/>
+        </p:nvSpPr>
+        <p:spPr>
+          <a:xfrm>
+            <a:off x="731520" y="2253081"/>
+            <a:ext cx="1417320" cy="210312"/>
           </a:xfrm>
           <a:prstGeom prst="rect">
             <a:avLst/>
@@ -8369,7 +8789,7 @@
           <a:p>
             <a:pPr algn="l"/>
             <a:r>
-              <a:rPr sz="1250" b="1" i="0">
+              <a:rPr sz="1150" b="1" i="0">
                 <a:solidFill>
                   <a:srgbClr val="102D5E"/>
                 </a:solidFill>
@@ -8382,119 +8802,224 @@
       </p:sp>
       <p:sp>
         <p:nvSpPr>
-          <p:cNvPr id="17" name="TextBox 16"/>
-          <p:cNvSpPr txBox="1"/>
-          <p:nvPr/>
-        </p:nvSpPr>
-        <p:spPr>
-          <a:xfrm>
-            <a:off x="4389120" y="2148840"/>
-            <a:ext cx="1417320" cy="228600"/>
-          </a:xfrm>
-          <a:prstGeom prst="rect">
-            <a:avLst/>
-          </a:prstGeom>
-          <a:noFill/>
-        </p:spPr>
-        <p:txBody>
-          <a:bodyPr wrap="square" lIns="0" rIns="0" tIns="0" bIns="0">
-            <a:spAutoFit/>
-          </a:bodyPr>
-          <a:lstStyle/>
-          <a:p>
-            <a:pPr algn="r"/>
-            <a:r>
-              <a:rPr sz="1250" b="1" i="0">
+          <p:cNvPr id="29" name="TextBox 28"/>
+          <p:cNvSpPr txBox="1"/>
+          <p:nvPr/>
+        </p:nvSpPr>
+        <p:spPr>
+          <a:xfrm>
+            <a:off x="2148840" y="2253081"/>
+            <a:ext cx="914400" cy="210312"/>
+          </a:xfrm>
+          <a:prstGeom prst="rect">
+            <a:avLst/>
+          </a:prstGeom>
+          <a:noFill/>
+        </p:spPr>
+        <p:txBody>
+          <a:bodyPr wrap="square" lIns="0" rIns="0" tIns="0" bIns="0">
+            <a:spAutoFit/>
+          </a:bodyPr>
+          <a:lstStyle/>
+          <a:p>
+            <a:pPr algn="r"/>
+            <a:r>
+              <a:rPr sz="1150" b="1" i="0">
                 <a:solidFill>
                   <a:srgbClr val="102D5E"/>
                 </a:solidFill>
                 <a:latin typeface="Garamond"/>
               </a:rPr>
-              <a:t>100,527</a:t>
-            </a:r>
-          </a:p>
-        </p:txBody>
-      </p:sp>
-      <p:sp>
-        <p:nvSpPr>
-          <p:cNvPr id="18" name="TextBox 17"/>
-          <p:cNvSpPr txBox="1"/>
-          <p:nvPr/>
-        </p:nvSpPr>
-        <p:spPr>
-          <a:xfrm>
-            <a:off x="6126479" y="2148840"/>
-            <a:ext cx="1417320" cy="228600"/>
-          </a:xfrm>
-          <a:prstGeom prst="rect">
-            <a:avLst/>
-          </a:prstGeom>
-          <a:noFill/>
-        </p:spPr>
-        <p:txBody>
-          <a:bodyPr wrap="square" lIns="0" rIns="0" tIns="0" bIns="0">
-            <a:spAutoFit/>
-          </a:bodyPr>
-          <a:lstStyle/>
-          <a:p>
-            <a:pPr algn="r"/>
-            <a:r>
-              <a:rPr sz="1250" b="1" i="0">
+              <a:t>16,785</a:t>
+            </a:r>
+          </a:p>
+        </p:txBody>
+      </p:sp>
+      <p:sp>
+        <p:nvSpPr>
+          <p:cNvPr id="30" name="TextBox 29"/>
+          <p:cNvSpPr txBox="1"/>
+          <p:nvPr/>
+        </p:nvSpPr>
+        <p:spPr>
+          <a:xfrm>
+            <a:off x="3063240" y="2253081"/>
+            <a:ext cx="1115568" cy="210312"/>
+          </a:xfrm>
+          <a:prstGeom prst="rect">
+            <a:avLst/>
+          </a:prstGeom>
+          <a:noFill/>
+        </p:spPr>
+        <p:txBody>
+          <a:bodyPr wrap="square" lIns="0" rIns="0" tIns="0" bIns="0">
+            <a:spAutoFit/>
+          </a:bodyPr>
+          <a:lstStyle/>
+          <a:p>
+            <a:pPr algn="r"/>
+            <a:r>
+              <a:rPr sz="1150" b="1" i="0">
                 <a:solidFill>
                   <a:srgbClr val="102D5E"/>
                 </a:solidFill>
                 <a:latin typeface="Garamond"/>
               </a:rPr>
-              <a:t>99,581</a:t>
-            </a:r>
-          </a:p>
-        </p:txBody>
-      </p:sp>
-      <p:sp>
-        <p:nvSpPr>
-          <p:cNvPr id="19" name="TextBox 18"/>
-          <p:cNvSpPr txBox="1"/>
-          <p:nvPr/>
-        </p:nvSpPr>
-        <p:spPr>
-          <a:xfrm>
-            <a:off x="7863840" y="2148840"/>
-            <a:ext cx="1417320" cy="228600"/>
-          </a:xfrm>
-          <a:prstGeom prst="rect">
-            <a:avLst/>
-          </a:prstGeom>
-          <a:noFill/>
-        </p:spPr>
-        <p:txBody>
-          <a:bodyPr wrap="square" lIns="0" rIns="0" tIns="0" bIns="0">
-            <a:spAutoFit/>
-          </a:bodyPr>
-          <a:lstStyle/>
-          <a:p>
-            <a:pPr algn="r"/>
-            <a:r>
-              <a:rPr sz="1250" b="1" i="0">
+              <a:t>83,742</a:t>
+            </a:r>
+          </a:p>
+        </p:txBody>
+      </p:sp>
+      <p:sp>
+        <p:nvSpPr>
+          <p:cNvPr id="31" name="TextBox 30"/>
+          <p:cNvSpPr txBox="1"/>
+          <p:nvPr/>
+        </p:nvSpPr>
+        <p:spPr>
+          <a:xfrm>
+            <a:off x="4562856" y="2253081"/>
+            <a:ext cx="914400" cy="210312"/>
+          </a:xfrm>
+          <a:prstGeom prst="rect">
+            <a:avLst/>
+          </a:prstGeom>
+          <a:noFill/>
+        </p:spPr>
+        <p:txBody>
+          <a:bodyPr wrap="square" lIns="0" rIns="0" tIns="0" bIns="0">
+            <a:spAutoFit/>
+          </a:bodyPr>
+          <a:lstStyle/>
+          <a:p>
+            <a:pPr algn="r"/>
+            <a:r>
+              <a:rPr sz="1150" b="1" i="0">
                 <a:solidFill>
                   <a:srgbClr val="102D5E"/>
                 </a:solidFill>
                 <a:latin typeface="Garamond"/>
               </a:rPr>
-              <a:t>75,982</a:t>
-            </a:r>
-          </a:p>
-        </p:txBody>
-      </p:sp>
-      <p:sp>
-        <p:nvSpPr>
-          <p:cNvPr id="20" name="TextBox 19"/>
-          <p:cNvSpPr txBox="1"/>
-          <p:nvPr/>
-        </p:nvSpPr>
-        <p:spPr>
-          <a:xfrm>
-            <a:off x="1554480" y="2409444"/>
-            <a:ext cx="2834640" cy="228600"/>
+              <a:t>18,705</a:t>
+            </a:r>
+          </a:p>
+        </p:txBody>
+      </p:sp>
+      <p:sp>
+        <p:nvSpPr>
+          <p:cNvPr id="32" name="TextBox 31"/>
+          <p:cNvSpPr txBox="1"/>
+          <p:nvPr/>
+        </p:nvSpPr>
+        <p:spPr>
+          <a:xfrm>
+            <a:off x="5477256" y="2253081"/>
+            <a:ext cx="1115568" cy="210312"/>
+          </a:xfrm>
+          <a:prstGeom prst="rect">
+            <a:avLst/>
+          </a:prstGeom>
+          <a:noFill/>
+        </p:spPr>
+        <p:txBody>
+          <a:bodyPr wrap="square" lIns="0" rIns="0" tIns="0" bIns="0">
+            <a:spAutoFit/>
+          </a:bodyPr>
+          <a:lstStyle/>
+          <a:p>
+            <a:pPr algn="r"/>
+            <a:r>
+              <a:rPr sz="1150" b="1" i="0">
+                <a:solidFill>
+                  <a:srgbClr val="102D5E"/>
+                </a:solidFill>
+                <a:latin typeface="Garamond"/>
+              </a:rPr>
+              <a:t>80,876</a:t>
+            </a:r>
+          </a:p>
+        </p:txBody>
+      </p:sp>
+      <p:sp>
+        <p:nvSpPr>
+          <p:cNvPr id="33" name="TextBox 32"/>
+          <p:cNvSpPr txBox="1"/>
+          <p:nvPr/>
+        </p:nvSpPr>
+        <p:spPr>
+          <a:xfrm>
+            <a:off x="6976871" y="2253081"/>
+            <a:ext cx="914400" cy="210312"/>
+          </a:xfrm>
+          <a:prstGeom prst="rect">
+            <a:avLst/>
+          </a:prstGeom>
+          <a:noFill/>
+        </p:spPr>
+        <p:txBody>
+          <a:bodyPr wrap="square" lIns="0" rIns="0" tIns="0" bIns="0">
+            <a:spAutoFit/>
+          </a:bodyPr>
+          <a:lstStyle/>
+          <a:p>
+            <a:pPr algn="r"/>
+            <a:r>
+              <a:rPr sz="1150" b="1" i="0">
+                <a:solidFill>
+                  <a:srgbClr val="102D5E"/>
+                </a:solidFill>
+                <a:latin typeface="Garamond"/>
+              </a:rPr>
+              <a:t>13,399</a:t>
+            </a:r>
+          </a:p>
+        </p:txBody>
+      </p:sp>
+      <p:sp>
+        <p:nvSpPr>
+          <p:cNvPr id="34" name="TextBox 33"/>
+          <p:cNvSpPr txBox="1"/>
+          <p:nvPr/>
+        </p:nvSpPr>
+        <p:spPr>
+          <a:xfrm>
+            <a:off x="7891271" y="2253081"/>
+            <a:ext cx="1115568" cy="210312"/>
+          </a:xfrm>
+          <a:prstGeom prst="rect">
+            <a:avLst/>
+          </a:prstGeom>
+          <a:noFill/>
+        </p:spPr>
+        <p:txBody>
+          <a:bodyPr wrap="square" lIns="0" rIns="0" tIns="0" bIns="0">
+            <a:spAutoFit/>
+          </a:bodyPr>
+          <a:lstStyle/>
+          <a:p>
+            <a:pPr algn="r"/>
+            <a:r>
+              <a:rPr sz="1150" b="1" i="0">
+                <a:solidFill>
+                  <a:srgbClr val="102D5E"/>
+                </a:solidFill>
+                <a:latin typeface="Garamond"/>
+              </a:rPr>
+              <a:t>62,583</a:t>
+            </a:r>
+          </a:p>
+        </p:txBody>
+      </p:sp>
+      <p:sp>
+        <p:nvSpPr>
+          <p:cNvPr id="35" name="TextBox 34"/>
+          <p:cNvSpPr txBox="1"/>
+          <p:nvPr/>
+        </p:nvSpPr>
+        <p:spPr>
+          <a:xfrm>
+            <a:off x="731520" y="2483510"/>
+            <a:ext cx="1417320" cy="210312"/>
           </a:xfrm>
           <a:prstGeom prst="rect">
             <a:avLst/>
@@ -8509,7 +9034,7 @@
           <a:p>
             <a:pPr algn="l"/>
             <a:r>
-              <a:rPr sz="1250" b="0" i="0">
+              <a:rPr sz="1150" b="0" i="0">
                 <a:solidFill>
                   <a:srgbClr val="212529"/>
                 </a:solidFill>
@@ -8522,119 +9047,224 @@
       </p:sp>
       <p:sp>
         <p:nvSpPr>
-          <p:cNvPr id="21" name="TextBox 20"/>
-          <p:cNvSpPr txBox="1"/>
-          <p:nvPr/>
-        </p:nvSpPr>
-        <p:spPr>
-          <a:xfrm>
-            <a:off x="4389120" y="2409444"/>
-            <a:ext cx="1417320" cy="228600"/>
-          </a:xfrm>
-          <a:prstGeom prst="rect">
-            <a:avLst/>
-          </a:prstGeom>
-          <a:noFill/>
-        </p:spPr>
-        <p:txBody>
-          <a:bodyPr wrap="square" lIns="0" rIns="0" tIns="0" bIns="0">
-            <a:spAutoFit/>
-          </a:bodyPr>
-          <a:lstStyle/>
-          <a:p>
-            <a:pPr algn="r"/>
-            <a:r>
-              <a:rPr sz="1250" b="0" i="0">
-                <a:solidFill>
-                  <a:srgbClr val="212529"/>
-                </a:solidFill>
-                <a:latin typeface="Garamond"/>
-              </a:rPr>
-              <a:t>101,714</a:t>
-            </a:r>
-          </a:p>
-        </p:txBody>
-      </p:sp>
-      <p:sp>
-        <p:nvSpPr>
-          <p:cNvPr id="22" name="TextBox 21"/>
-          <p:cNvSpPr txBox="1"/>
-          <p:nvPr/>
-        </p:nvSpPr>
-        <p:spPr>
-          <a:xfrm>
-            <a:off x="6126479" y="2409444"/>
-            <a:ext cx="1417320" cy="228600"/>
-          </a:xfrm>
-          <a:prstGeom prst="rect">
-            <a:avLst/>
-          </a:prstGeom>
-          <a:noFill/>
-        </p:spPr>
-        <p:txBody>
-          <a:bodyPr wrap="square" lIns="0" rIns="0" tIns="0" bIns="0">
-            <a:spAutoFit/>
-          </a:bodyPr>
-          <a:lstStyle/>
-          <a:p>
-            <a:pPr algn="r"/>
-            <a:r>
-              <a:rPr sz="1250" b="0" i="0">
-                <a:solidFill>
-                  <a:srgbClr val="212529"/>
-                </a:solidFill>
-                <a:latin typeface="Garamond"/>
-              </a:rPr>
-              <a:t>101,417</a:t>
-            </a:r>
-          </a:p>
-        </p:txBody>
-      </p:sp>
-      <p:sp>
-        <p:nvSpPr>
-          <p:cNvPr id="23" name="TextBox 22"/>
-          <p:cNvSpPr txBox="1"/>
-          <p:nvPr/>
-        </p:nvSpPr>
-        <p:spPr>
-          <a:xfrm>
-            <a:off x="7863840" y="2409444"/>
-            <a:ext cx="1417320" cy="228600"/>
-          </a:xfrm>
-          <a:prstGeom prst="rect">
-            <a:avLst/>
-          </a:prstGeom>
-          <a:noFill/>
-        </p:spPr>
-        <p:txBody>
-          <a:bodyPr wrap="square" lIns="0" rIns="0" tIns="0" bIns="0">
-            <a:spAutoFit/>
-          </a:bodyPr>
-          <a:lstStyle/>
-          <a:p>
-            <a:pPr algn="r"/>
-            <a:r>
-              <a:rPr sz="1250" b="0" i="0">
-                <a:solidFill>
-                  <a:srgbClr val="212529"/>
-                </a:solidFill>
-                <a:latin typeface="Garamond"/>
-              </a:rPr>
-              <a:t>78,906</a:t>
-            </a:r>
-          </a:p>
-        </p:txBody>
-      </p:sp>
-      <p:sp>
-        <p:nvSpPr>
-          <p:cNvPr id="24" name="TextBox 23"/>
-          <p:cNvSpPr txBox="1"/>
-          <p:nvPr/>
-        </p:nvSpPr>
-        <p:spPr>
-          <a:xfrm>
-            <a:off x="1554480" y="2670048"/>
-            <a:ext cx="2834640" cy="228600"/>
+          <p:cNvPr id="36" name="TextBox 35"/>
+          <p:cNvSpPr txBox="1"/>
+          <p:nvPr/>
+        </p:nvSpPr>
+        <p:spPr>
+          <a:xfrm>
+            <a:off x="2148840" y="2483510"/>
+            <a:ext cx="914400" cy="210312"/>
+          </a:xfrm>
+          <a:prstGeom prst="rect">
+            <a:avLst/>
+          </a:prstGeom>
+          <a:noFill/>
+        </p:spPr>
+        <p:txBody>
+          <a:bodyPr wrap="square" lIns="0" rIns="0" tIns="0" bIns="0">
+            <a:spAutoFit/>
+          </a:bodyPr>
+          <a:lstStyle/>
+          <a:p>
+            <a:pPr algn="r"/>
+            <a:r>
+              <a:rPr sz="1150" b="0" i="0">
+                <a:solidFill>
+                  <a:srgbClr val="212529"/>
+                </a:solidFill>
+                <a:latin typeface="Garamond"/>
+              </a:rPr>
+              <a:t>16,815</a:t>
+            </a:r>
+          </a:p>
+        </p:txBody>
+      </p:sp>
+      <p:sp>
+        <p:nvSpPr>
+          <p:cNvPr id="37" name="TextBox 36"/>
+          <p:cNvSpPr txBox="1"/>
+          <p:nvPr/>
+        </p:nvSpPr>
+        <p:spPr>
+          <a:xfrm>
+            <a:off x="3063240" y="2483510"/>
+            <a:ext cx="1115568" cy="210312"/>
+          </a:xfrm>
+          <a:prstGeom prst="rect">
+            <a:avLst/>
+          </a:prstGeom>
+          <a:noFill/>
+        </p:spPr>
+        <p:txBody>
+          <a:bodyPr wrap="square" lIns="0" rIns="0" tIns="0" bIns="0">
+            <a:spAutoFit/>
+          </a:bodyPr>
+          <a:lstStyle/>
+          <a:p>
+            <a:pPr algn="r"/>
+            <a:r>
+              <a:rPr sz="1150" b="0" i="0">
+                <a:solidFill>
+                  <a:srgbClr val="212529"/>
+                </a:solidFill>
+                <a:latin typeface="Garamond"/>
+              </a:rPr>
+              <a:t>84,899</a:t>
+            </a:r>
+          </a:p>
+        </p:txBody>
+      </p:sp>
+      <p:sp>
+        <p:nvSpPr>
+          <p:cNvPr id="38" name="TextBox 37"/>
+          <p:cNvSpPr txBox="1"/>
+          <p:nvPr/>
+        </p:nvSpPr>
+        <p:spPr>
+          <a:xfrm>
+            <a:off x="4562856" y="2483510"/>
+            <a:ext cx="914400" cy="210312"/>
+          </a:xfrm>
+          <a:prstGeom prst="rect">
+            <a:avLst/>
+          </a:prstGeom>
+          <a:noFill/>
+        </p:spPr>
+        <p:txBody>
+          <a:bodyPr wrap="square" lIns="0" rIns="0" tIns="0" bIns="0">
+            <a:spAutoFit/>
+          </a:bodyPr>
+          <a:lstStyle/>
+          <a:p>
+            <a:pPr algn="r"/>
+            <a:r>
+              <a:rPr sz="1150" b="0" i="0">
+                <a:solidFill>
+                  <a:srgbClr val="212529"/>
+                </a:solidFill>
+                <a:latin typeface="Garamond"/>
+              </a:rPr>
+              <a:t>19,024</a:t>
+            </a:r>
+          </a:p>
+        </p:txBody>
+      </p:sp>
+      <p:sp>
+        <p:nvSpPr>
+          <p:cNvPr id="39" name="TextBox 38"/>
+          <p:cNvSpPr txBox="1"/>
+          <p:nvPr/>
+        </p:nvSpPr>
+        <p:spPr>
+          <a:xfrm>
+            <a:off x="5477256" y="2483510"/>
+            <a:ext cx="1115568" cy="210312"/>
+          </a:xfrm>
+          <a:prstGeom prst="rect">
+            <a:avLst/>
+          </a:prstGeom>
+          <a:noFill/>
+        </p:spPr>
+        <p:txBody>
+          <a:bodyPr wrap="square" lIns="0" rIns="0" tIns="0" bIns="0">
+            <a:spAutoFit/>
+          </a:bodyPr>
+          <a:lstStyle/>
+          <a:p>
+            <a:pPr algn="r"/>
+            <a:r>
+              <a:rPr sz="1150" b="0" i="0">
+                <a:solidFill>
+                  <a:srgbClr val="212529"/>
+                </a:solidFill>
+                <a:latin typeface="Garamond"/>
+              </a:rPr>
+              <a:t>82,393</a:t>
+            </a:r>
+          </a:p>
+        </p:txBody>
+      </p:sp>
+      <p:sp>
+        <p:nvSpPr>
+          <p:cNvPr id="40" name="TextBox 39"/>
+          <p:cNvSpPr txBox="1"/>
+          <p:nvPr/>
+        </p:nvSpPr>
+        <p:spPr>
+          <a:xfrm>
+            <a:off x="6976871" y="2483510"/>
+            <a:ext cx="914400" cy="210312"/>
+          </a:xfrm>
+          <a:prstGeom prst="rect">
+            <a:avLst/>
+          </a:prstGeom>
+          <a:noFill/>
+        </p:spPr>
+        <p:txBody>
+          <a:bodyPr wrap="square" lIns="0" rIns="0" tIns="0" bIns="0">
+            <a:spAutoFit/>
+          </a:bodyPr>
+          <a:lstStyle/>
+          <a:p>
+            <a:pPr algn="r"/>
+            <a:r>
+              <a:rPr sz="1150" b="0" i="0">
+                <a:solidFill>
+                  <a:srgbClr val="212529"/>
+                </a:solidFill>
+                <a:latin typeface="Garamond"/>
+              </a:rPr>
+              <a:t>14,209</a:t>
+            </a:r>
+          </a:p>
+        </p:txBody>
+      </p:sp>
+      <p:sp>
+        <p:nvSpPr>
+          <p:cNvPr id="41" name="TextBox 40"/>
+          <p:cNvSpPr txBox="1"/>
+          <p:nvPr/>
+        </p:nvSpPr>
+        <p:spPr>
+          <a:xfrm>
+            <a:off x="7891271" y="2483510"/>
+            <a:ext cx="1115568" cy="210312"/>
+          </a:xfrm>
+          <a:prstGeom prst="rect">
+            <a:avLst/>
+          </a:prstGeom>
+          <a:noFill/>
+        </p:spPr>
+        <p:txBody>
+          <a:bodyPr wrap="square" lIns="0" rIns="0" tIns="0" bIns="0">
+            <a:spAutoFit/>
+          </a:bodyPr>
+          <a:lstStyle/>
+          <a:p>
+            <a:pPr algn="r"/>
+            <a:r>
+              <a:rPr sz="1150" b="0" i="0">
+                <a:solidFill>
+                  <a:srgbClr val="212529"/>
+                </a:solidFill>
+                <a:latin typeface="Garamond"/>
+              </a:rPr>
+              <a:t>64,697</a:t>
+            </a:r>
+          </a:p>
+        </p:txBody>
+      </p:sp>
+      <p:sp>
+        <p:nvSpPr>
+          <p:cNvPr id="42" name="TextBox 41"/>
+          <p:cNvSpPr txBox="1"/>
+          <p:nvPr/>
+        </p:nvSpPr>
+        <p:spPr>
+          <a:xfrm>
+            <a:off x="731520" y="2713939"/>
+            <a:ext cx="1417320" cy="210312"/>
           </a:xfrm>
           <a:prstGeom prst="rect">
             <a:avLst/>
@@ -8649,7 +9279,7 @@
           <a:p>
             <a:pPr algn="l"/>
             <a:r>
-              <a:rPr sz="1250" b="0" i="0">
+              <a:rPr sz="1150" b="0" i="0">
                 <a:solidFill>
                   <a:srgbClr val="212529"/>
                 </a:solidFill>
@@ -8662,119 +9292,224 @@
       </p:sp>
       <p:sp>
         <p:nvSpPr>
-          <p:cNvPr id="25" name="TextBox 24"/>
-          <p:cNvSpPr txBox="1"/>
-          <p:nvPr/>
-        </p:nvSpPr>
-        <p:spPr>
-          <a:xfrm>
-            <a:off x="4389120" y="2670048"/>
-            <a:ext cx="1417320" cy="228600"/>
-          </a:xfrm>
-          <a:prstGeom prst="rect">
-            <a:avLst/>
-          </a:prstGeom>
-          <a:noFill/>
-        </p:spPr>
-        <p:txBody>
-          <a:bodyPr wrap="square" lIns="0" rIns="0" tIns="0" bIns="0">
-            <a:spAutoFit/>
-          </a:bodyPr>
-          <a:lstStyle/>
-          <a:p>
-            <a:pPr algn="r"/>
-            <a:r>
-              <a:rPr sz="1250" b="0" i="0">
-                <a:solidFill>
-                  <a:srgbClr val="212529"/>
-                </a:solidFill>
-                <a:latin typeface="Garamond"/>
-              </a:rPr>
-              <a:t>101,426</a:t>
-            </a:r>
-          </a:p>
-        </p:txBody>
-      </p:sp>
-      <p:sp>
-        <p:nvSpPr>
-          <p:cNvPr id="26" name="TextBox 25"/>
-          <p:cNvSpPr txBox="1"/>
-          <p:nvPr/>
-        </p:nvSpPr>
-        <p:spPr>
-          <a:xfrm>
-            <a:off x="6126479" y="2670048"/>
-            <a:ext cx="1417320" cy="228600"/>
-          </a:xfrm>
-          <a:prstGeom prst="rect">
-            <a:avLst/>
-          </a:prstGeom>
-          <a:noFill/>
-        </p:spPr>
-        <p:txBody>
-          <a:bodyPr wrap="square" lIns="0" rIns="0" tIns="0" bIns="0">
-            <a:spAutoFit/>
-          </a:bodyPr>
-          <a:lstStyle/>
-          <a:p>
-            <a:pPr algn="r"/>
-            <a:r>
-              <a:rPr sz="1250" b="0" i="0">
-                <a:solidFill>
-                  <a:srgbClr val="212529"/>
-                </a:solidFill>
-                <a:latin typeface="Garamond"/>
-              </a:rPr>
-              <a:t>100,803</a:t>
-            </a:r>
-          </a:p>
-        </p:txBody>
-      </p:sp>
-      <p:sp>
-        <p:nvSpPr>
-          <p:cNvPr id="27" name="TextBox 26"/>
-          <p:cNvSpPr txBox="1"/>
-          <p:nvPr/>
-        </p:nvSpPr>
-        <p:spPr>
-          <a:xfrm>
-            <a:off x="7863840" y="2670048"/>
-            <a:ext cx="1417320" cy="228600"/>
-          </a:xfrm>
-          <a:prstGeom prst="rect">
-            <a:avLst/>
-          </a:prstGeom>
-          <a:noFill/>
-        </p:spPr>
-        <p:txBody>
-          <a:bodyPr wrap="square" lIns="0" rIns="0" tIns="0" bIns="0">
-            <a:spAutoFit/>
-          </a:bodyPr>
-          <a:lstStyle/>
-          <a:p>
-            <a:pPr algn="r"/>
-            <a:r>
-              <a:rPr sz="1250" b="0" i="0">
-                <a:solidFill>
-                  <a:srgbClr val="212529"/>
-                </a:solidFill>
-                <a:latin typeface="Garamond"/>
-              </a:rPr>
-              <a:t>79,350</a:t>
-            </a:r>
-          </a:p>
-        </p:txBody>
-      </p:sp>
-      <p:sp>
-        <p:nvSpPr>
-          <p:cNvPr id="28" name="TextBox 27"/>
-          <p:cNvSpPr txBox="1"/>
-          <p:nvPr/>
-        </p:nvSpPr>
-        <p:spPr>
-          <a:xfrm>
-            <a:off x="1554480" y="2930652"/>
-            <a:ext cx="2834640" cy="228600"/>
+          <p:cNvPr id="43" name="TextBox 42"/>
+          <p:cNvSpPr txBox="1"/>
+          <p:nvPr/>
+        </p:nvSpPr>
+        <p:spPr>
+          <a:xfrm>
+            <a:off x="2148840" y="2713939"/>
+            <a:ext cx="914400" cy="210312"/>
+          </a:xfrm>
+          <a:prstGeom prst="rect">
+            <a:avLst/>
+          </a:prstGeom>
+          <a:noFill/>
+        </p:spPr>
+        <p:txBody>
+          <a:bodyPr wrap="square" lIns="0" rIns="0" tIns="0" bIns="0">
+            <a:spAutoFit/>
+          </a:bodyPr>
+          <a:lstStyle/>
+          <a:p>
+            <a:pPr algn="r"/>
+            <a:r>
+              <a:rPr sz="1150" b="0" i="0">
+                <a:solidFill>
+                  <a:srgbClr val="212529"/>
+                </a:solidFill>
+                <a:latin typeface="Garamond"/>
+              </a:rPr>
+              <a:t>16,826</a:t>
+            </a:r>
+          </a:p>
+        </p:txBody>
+      </p:sp>
+      <p:sp>
+        <p:nvSpPr>
+          <p:cNvPr id="44" name="TextBox 43"/>
+          <p:cNvSpPr txBox="1"/>
+          <p:nvPr/>
+        </p:nvSpPr>
+        <p:spPr>
+          <a:xfrm>
+            <a:off x="3063240" y="2713939"/>
+            <a:ext cx="1115568" cy="210312"/>
+          </a:xfrm>
+          <a:prstGeom prst="rect">
+            <a:avLst/>
+          </a:prstGeom>
+          <a:noFill/>
+        </p:spPr>
+        <p:txBody>
+          <a:bodyPr wrap="square" lIns="0" rIns="0" tIns="0" bIns="0">
+            <a:spAutoFit/>
+          </a:bodyPr>
+          <a:lstStyle/>
+          <a:p>
+            <a:pPr algn="r"/>
+            <a:r>
+              <a:rPr sz="1150" b="0" i="0">
+                <a:solidFill>
+                  <a:srgbClr val="212529"/>
+                </a:solidFill>
+                <a:latin typeface="Garamond"/>
+              </a:rPr>
+              <a:t>84,600</a:t>
+            </a:r>
+          </a:p>
+        </p:txBody>
+      </p:sp>
+      <p:sp>
+        <p:nvSpPr>
+          <p:cNvPr id="45" name="TextBox 44"/>
+          <p:cNvSpPr txBox="1"/>
+          <p:nvPr/>
+        </p:nvSpPr>
+        <p:spPr>
+          <a:xfrm>
+            <a:off x="4562856" y="2713939"/>
+            <a:ext cx="914400" cy="210312"/>
+          </a:xfrm>
+          <a:prstGeom prst="rect">
+            <a:avLst/>
+          </a:prstGeom>
+          <a:noFill/>
+        </p:spPr>
+        <p:txBody>
+          <a:bodyPr wrap="square" lIns="0" rIns="0" tIns="0" bIns="0">
+            <a:spAutoFit/>
+          </a:bodyPr>
+          <a:lstStyle/>
+          <a:p>
+            <a:pPr algn="r"/>
+            <a:r>
+              <a:rPr sz="1150" b="0" i="0">
+                <a:solidFill>
+                  <a:srgbClr val="212529"/>
+                </a:solidFill>
+                <a:latin typeface="Garamond"/>
+              </a:rPr>
+              <a:t>18,832</a:t>
+            </a:r>
+          </a:p>
+        </p:txBody>
+      </p:sp>
+      <p:sp>
+        <p:nvSpPr>
+          <p:cNvPr id="46" name="TextBox 45"/>
+          <p:cNvSpPr txBox="1"/>
+          <p:nvPr/>
+        </p:nvSpPr>
+        <p:spPr>
+          <a:xfrm>
+            <a:off x="5477256" y="2713939"/>
+            <a:ext cx="1115568" cy="210312"/>
+          </a:xfrm>
+          <a:prstGeom prst="rect">
+            <a:avLst/>
+          </a:prstGeom>
+          <a:noFill/>
+        </p:spPr>
+        <p:txBody>
+          <a:bodyPr wrap="square" lIns="0" rIns="0" tIns="0" bIns="0">
+            <a:spAutoFit/>
+          </a:bodyPr>
+          <a:lstStyle/>
+          <a:p>
+            <a:pPr algn="r"/>
+            <a:r>
+              <a:rPr sz="1150" b="0" i="0">
+                <a:solidFill>
+                  <a:srgbClr val="212529"/>
+                </a:solidFill>
+                <a:latin typeface="Garamond"/>
+              </a:rPr>
+              <a:t>81,971</a:t>
+            </a:r>
+          </a:p>
+        </p:txBody>
+      </p:sp>
+      <p:sp>
+        <p:nvSpPr>
+          <p:cNvPr id="47" name="TextBox 46"/>
+          <p:cNvSpPr txBox="1"/>
+          <p:nvPr/>
+        </p:nvSpPr>
+        <p:spPr>
+          <a:xfrm>
+            <a:off x="6976871" y="2713939"/>
+            <a:ext cx="914400" cy="210312"/>
+          </a:xfrm>
+          <a:prstGeom prst="rect">
+            <a:avLst/>
+          </a:prstGeom>
+          <a:noFill/>
+        </p:spPr>
+        <p:txBody>
+          <a:bodyPr wrap="square" lIns="0" rIns="0" tIns="0" bIns="0">
+            <a:spAutoFit/>
+          </a:bodyPr>
+          <a:lstStyle/>
+          <a:p>
+            <a:pPr algn="r"/>
+            <a:r>
+              <a:rPr sz="1150" b="0" i="0">
+                <a:solidFill>
+                  <a:srgbClr val="212529"/>
+                </a:solidFill>
+                <a:latin typeface="Garamond"/>
+              </a:rPr>
+              <a:t>14,023</a:t>
+            </a:r>
+          </a:p>
+        </p:txBody>
+      </p:sp>
+      <p:sp>
+        <p:nvSpPr>
+          <p:cNvPr id="48" name="TextBox 47"/>
+          <p:cNvSpPr txBox="1"/>
+          <p:nvPr/>
+        </p:nvSpPr>
+        <p:spPr>
+          <a:xfrm>
+            <a:off x="7891271" y="2713939"/>
+            <a:ext cx="1115568" cy="210312"/>
+          </a:xfrm>
+          <a:prstGeom prst="rect">
+            <a:avLst/>
+          </a:prstGeom>
+          <a:noFill/>
+        </p:spPr>
+        <p:txBody>
+          <a:bodyPr wrap="square" lIns="0" rIns="0" tIns="0" bIns="0">
+            <a:spAutoFit/>
+          </a:bodyPr>
+          <a:lstStyle/>
+          <a:p>
+            <a:pPr algn="r"/>
+            <a:r>
+              <a:rPr sz="1150" b="0" i="0">
+                <a:solidFill>
+                  <a:srgbClr val="212529"/>
+                </a:solidFill>
+                <a:latin typeface="Garamond"/>
+              </a:rPr>
+              <a:t>65,327</a:t>
+            </a:r>
+          </a:p>
+        </p:txBody>
+      </p:sp>
+      <p:sp>
+        <p:nvSpPr>
+          <p:cNvPr id="49" name="TextBox 48"/>
+          <p:cNvSpPr txBox="1"/>
+          <p:nvPr/>
+        </p:nvSpPr>
+        <p:spPr>
+          <a:xfrm>
+            <a:off x="731520" y="2944367"/>
+            <a:ext cx="1417320" cy="210312"/>
           </a:xfrm>
           <a:prstGeom prst="rect">
             <a:avLst/>
@@ -8789,7 +9524,7 @@
           <a:p>
             <a:pPr algn="l"/>
             <a:r>
-              <a:rPr sz="1250" b="0" i="0">
+              <a:rPr sz="1150" b="0" i="0">
                 <a:solidFill>
                   <a:srgbClr val="212529"/>
                 </a:solidFill>
@@ -8802,119 +9537,224 @@
       </p:sp>
       <p:sp>
         <p:nvSpPr>
-          <p:cNvPr id="29" name="TextBox 28"/>
-          <p:cNvSpPr txBox="1"/>
-          <p:nvPr/>
-        </p:nvSpPr>
-        <p:spPr>
-          <a:xfrm>
-            <a:off x="4389120" y="2930652"/>
-            <a:ext cx="1417320" cy="228600"/>
-          </a:xfrm>
-          <a:prstGeom prst="rect">
-            <a:avLst/>
-          </a:prstGeom>
-          <a:noFill/>
-        </p:spPr>
-        <p:txBody>
-          <a:bodyPr wrap="square" lIns="0" rIns="0" tIns="0" bIns="0">
-            <a:spAutoFit/>
-          </a:bodyPr>
-          <a:lstStyle/>
-          <a:p>
-            <a:pPr algn="r"/>
-            <a:r>
-              <a:rPr sz="1250" b="0" i="0">
-                <a:solidFill>
-                  <a:srgbClr val="212529"/>
-                </a:solidFill>
-                <a:latin typeface="Garamond"/>
-              </a:rPr>
-              <a:t>101,494</a:t>
-            </a:r>
-          </a:p>
-        </p:txBody>
-      </p:sp>
-      <p:sp>
-        <p:nvSpPr>
-          <p:cNvPr id="30" name="TextBox 29"/>
-          <p:cNvSpPr txBox="1"/>
-          <p:nvPr/>
-        </p:nvSpPr>
-        <p:spPr>
-          <a:xfrm>
-            <a:off x="6126479" y="2930652"/>
-            <a:ext cx="1417320" cy="228600"/>
-          </a:xfrm>
-          <a:prstGeom prst="rect">
-            <a:avLst/>
-          </a:prstGeom>
-          <a:noFill/>
-        </p:spPr>
-        <p:txBody>
-          <a:bodyPr wrap="square" lIns="0" rIns="0" tIns="0" bIns="0">
-            <a:spAutoFit/>
-          </a:bodyPr>
-          <a:lstStyle/>
-          <a:p>
-            <a:pPr algn="r"/>
-            <a:r>
-              <a:rPr sz="1250" b="0" i="0">
-                <a:solidFill>
-                  <a:srgbClr val="212529"/>
-                </a:solidFill>
-                <a:latin typeface="Garamond"/>
-              </a:rPr>
-              <a:t>99,308</a:t>
-            </a:r>
-          </a:p>
-        </p:txBody>
-      </p:sp>
-      <p:sp>
-        <p:nvSpPr>
-          <p:cNvPr id="31" name="TextBox 30"/>
-          <p:cNvSpPr txBox="1"/>
-          <p:nvPr/>
-        </p:nvSpPr>
-        <p:spPr>
-          <a:xfrm>
-            <a:off x="7863840" y="2930652"/>
-            <a:ext cx="1417320" cy="228600"/>
-          </a:xfrm>
-          <a:prstGeom prst="rect">
-            <a:avLst/>
-          </a:prstGeom>
-          <a:noFill/>
-        </p:spPr>
-        <p:txBody>
-          <a:bodyPr wrap="square" lIns="0" rIns="0" tIns="0" bIns="0">
-            <a:spAutoFit/>
-          </a:bodyPr>
-          <a:lstStyle/>
-          <a:p>
-            <a:pPr algn="r"/>
-            <a:r>
-              <a:rPr sz="1250" b="0" i="0">
-                <a:solidFill>
-                  <a:srgbClr val="212529"/>
-                </a:solidFill>
-                <a:latin typeface="Garamond"/>
-              </a:rPr>
-              <a:t>78,480</a:t>
-            </a:r>
-          </a:p>
-        </p:txBody>
-      </p:sp>
-      <p:sp>
-        <p:nvSpPr>
-          <p:cNvPr id="32" name="TextBox 31"/>
-          <p:cNvSpPr txBox="1"/>
-          <p:nvPr/>
-        </p:nvSpPr>
-        <p:spPr>
-          <a:xfrm>
-            <a:off x="1554480" y="3191256"/>
-            <a:ext cx="2834640" cy="228600"/>
+          <p:cNvPr id="50" name="TextBox 49"/>
+          <p:cNvSpPr txBox="1"/>
+          <p:nvPr/>
+        </p:nvSpPr>
+        <p:spPr>
+          <a:xfrm>
+            <a:off x="2148840" y="2944367"/>
+            <a:ext cx="914400" cy="210312"/>
+          </a:xfrm>
+          <a:prstGeom prst="rect">
+            <a:avLst/>
+          </a:prstGeom>
+          <a:noFill/>
+        </p:spPr>
+        <p:txBody>
+          <a:bodyPr wrap="square" lIns="0" rIns="0" tIns="0" bIns="0">
+            <a:spAutoFit/>
+          </a:bodyPr>
+          <a:lstStyle/>
+          <a:p>
+            <a:pPr algn="r"/>
+            <a:r>
+              <a:rPr sz="1150" b="0" i="0">
+                <a:solidFill>
+                  <a:srgbClr val="212529"/>
+                </a:solidFill>
+                <a:latin typeface="Garamond"/>
+              </a:rPr>
+              <a:t>16,910</a:t>
+            </a:r>
+          </a:p>
+        </p:txBody>
+      </p:sp>
+      <p:sp>
+        <p:nvSpPr>
+          <p:cNvPr id="51" name="TextBox 50"/>
+          <p:cNvSpPr txBox="1"/>
+          <p:nvPr/>
+        </p:nvSpPr>
+        <p:spPr>
+          <a:xfrm>
+            <a:off x="3063240" y="2944367"/>
+            <a:ext cx="1115568" cy="210312"/>
+          </a:xfrm>
+          <a:prstGeom prst="rect">
+            <a:avLst/>
+          </a:prstGeom>
+          <a:noFill/>
+        </p:spPr>
+        <p:txBody>
+          <a:bodyPr wrap="square" lIns="0" rIns="0" tIns="0" bIns="0">
+            <a:spAutoFit/>
+          </a:bodyPr>
+          <a:lstStyle/>
+          <a:p>
+            <a:pPr algn="r"/>
+            <a:r>
+              <a:rPr sz="1150" b="0" i="0">
+                <a:solidFill>
+                  <a:srgbClr val="212529"/>
+                </a:solidFill>
+                <a:latin typeface="Garamond"/>
+              </a:rPr>
+              <a:t>84,584</a:t>
+            </a:r>
+          </a:p>
+        </p:txBody>
+      </p:sp>
+      <p:sp>
+        <p:nvSpPr>
+          <p:cNvPr id="52" name="TextBox 51"/>
+          <p:cNvSpPr txBox="1"/>
+          <p:nvPr/>
+        </p:nvSpPr>
+        <p:spPr>
+          <a:xfrm>
+            <a:off x="4562856" y="2944367"/>
+            <a:ext cx="914400" cy="210312"/>
+          </a:xfrm>
+          <a:prstGeom prst="rect">
+            <a:avLst/>
+          </a:prstGeom>
+          <a:noFill/>
+        </p:spPr>
+        <p:txBody>
+          <a:bodyPr wrap="square" lIns="0" rIns="0" tIns="0" bIns="0">
+            <a:spAutoFit/>
+          </a:bodyPr>
+          <a:lstStyle/>
+          <a:p>
+            <a:pPr algn="r"/>
+            <a:r>
+              <a:rPr sz="1150" b="0" i="0">
+                <a:solidFill>
+                  <a:srgbClr val="212529"/>
+                </a:solidFill>
+                <a:latin typeface="Garamond"/>
+              </a:rPr>
+              <a:t>18,127</a:t>
+            </a:r>
+          </a:p>
+        </p:txBody>
+      </p:sp>
+      <p:sp>
+        <p:nvSpPr>
+          <p:cNvPr id="53" name="TextBox 52"/>
+          <p:cNvSpPr txBox="1"/>
+          <p:nvPr/>
+        </p:nvSpPr>
+        <p:spPr>
+          <a:xfrm>
+            <a:off x="5477256" y="2944367"/>
+            <a:ext cx="1115568" cy="210312"/>
+          </a:xfrm>
+          <a:prstGeom prst="rect">
+            <a:avLst/>
+          </a:prstGeom>
+          <a:noFill/>
+        </p:spPr>
+        <p:txBody>
+          <a:bodyPr wrap="square" lIns="0" rIns="0" tIns="0" bIns="0">
+            <a:spAutoFit/>
+          </a:bodyPr>
+          <a:lstStyle/>
+          <a:p>
+            <a:pPr algn="r"/>
+            <a:r>
+              <a:rPr sz="1150" b="0" i="0">
+                <a:solidFill>
+                  <a:srgbClr val="212529"/>
+                </a:solidFill>
+                <a:latin typeface="Garamond"/>
+              </a:rPr>
+              <a:t>81,181</a:t>
+            </a:r>
+          </a:p>
+        </p:txBody>
+      </p:sp>
+      <p:sp>
+        <p:nvSpPr>
+          <p:cNvPr id="54" name="TextBox 53"/>
+          <p:cNvSpPr txBox="1"/>
+          <p:nvPr/>
+        </p:nvSpPr>
+        <p:spPr>
+          <a:xfrm>
+            <a:off x="6976871" y="2944367"/>
+            <a:ext cx="914400" cy="210312"/>
+          </a:xfrm>
+          <a:prstGeom prst="rect">
+            <a:avLst/>
+          </a:prstGeom>
+          <a:noFill/>
+        </p:spPr>
+        <p:txBody>
+          <a:bodyPr wrap="square" lIns="0" rIns="0" tIns="0" bIns="0">
+            <a:spAutoFit/>
+          </a:bodyPr>
+          <a:lstStyle/>
+          <a:p>
+            <a:pPr algn="r"/>
+            <a:r>
+              <a:rPr sz="1150" b="0" i="0">
+                <a:solidFill>
+                  <a:srgbClr val="212529"/>
+                </a:solidFill>
+                <a:latin typeface="Garamond"/>
+              </a:rPr>
+              <a:t>13,471</a:t>
+            </a:r>
+          </a:p>
+        </p:txBody>
+      </p:sp>
+      <p:sp>
+        <p:nvSpPr>
+          <p:cNvPr id="55" name="TextBox 54"/>
+          <p:cNvSpPr txBox="1"/>
+          <p:nvPr/>
+        </p:nvSpPr>
+        <p:spPr>
+          <a:xfrm>
+            <a:off x="7891271" y="2944367"/>
+            <a:ext cx="1115568" cy="210312"/>
+          </a:xfrm>
+          <a:prstGeom prst="rect">
+            <a:avLst/>
+          </a:prstGeom>
+          <a:noFill/>
+        </p:spPr>
+        <p:txBody>
+          <a:bodyPr wrap="square" lIns="0" rIns="0" tIns="0" bIns="0">
+            <a:spAutoFit/>
+          </a:bodyPr>
+          <a:lstStyle/>
+          <a:p>
+            <a:pPr algn="r"/>
+            <a:r>
+              <a:rPr sz="1150" b="0" i="0">
+                <a:solidFill>
+                  <a:srgbClr val="212529"/>
+                </a:solidFill>
+                <a:latin typeface="Garamond"/>
+              </a:rPr>
+              <a:t>65,009</a:t>
+            </a:r>
+          </a:p>
+        </p:txBody>
+      </p:sp>
+      <p:sp>
+        <p:nvSpPr>
+          <p:cNvPr id="56" name="TextBox 55"/>
+          <p:cNvSpPr txBox="1"/>
+          <p:nvPr/>
+        </p:nvSpPr>
+        <p:spPr>
+          <a:xfrm>
+            <a:off x="731520" y="3174796"/>
+            <a:ext cx="1417320" cy="210312"/>
           </a:xfrm>
           <a:prstGeom prst="rect">
             <a:avLst/>
@@ -8929,7 +9769,7 @@
           <a:p>
             <a:pPr algn="l"/>
             <a:r>
-              <a:rPr sz="1250" b="0" i="0">
+              <a:rPr sz="1150" b="0" i="0">
                 <a:solidFill>
                   <a:srgbClr val="212529"/>
                 </a:solidFill>
@@ -8942,119 +9782,224 @@
       </p:sp>
       <p:sp>
         <p:nvSpPr>
-          <p:cNvPr id="33" name="TextBox 32"/>
-          <p:cNvSpPr txBox="1"/>
-          <p:nvPr/>
-        </p:nvSpPr>
-        <p:spPr>
-          <a:xfrm>
-            <a:off x="4389120" y="3191256"/>
-            <a:ext cx="1417320" cy="228600"/>
-          </a:xfrm>
-          <a:prstGeom prst="rect">
-            <a:avLst/>
-          </a:prstGeom>
-          <a:noFill/>
-        </p:spPr>
-        <p:txBody>
-          <a:bodyPr wrap="square" lIns="0" rIns="0" tIns="0" bIns="0">
-            <a:spAutoFit/>
-          </a:bodyPr>
-          <a:lstStyle/>
-          <a:p>
-            <a:pPr algn="r"/>
-            <a:r>
-              <a:rPr sz="1250" b="0" i="0">
-                <a:solidFill>
-                  <a:srgbClr val="212529"/>
-                </a:solidFill>
-                <a:latin typeface="Garamond"/>
-              </a:rPr>
-              <a:t>102,295</a:t>
-            </a:r>
-          </a:p>
-        </p:txBody>
-      </p:sp>
-      <p:sp>
-        <p:nvSpPr>
-          <p:cNvPr id="34" name="TextBox 33"/>
-          <p:cNvSpPr txBox="1"/>
-          <p:nvPr/>
-        </p:nvSpPr>
-        <p:spPr>
-          <a:xfrm>
-            <a:off x="6126479" y="3191256"/>
-            <a:ext cx="1417320" cy="228600"/>
-          </a:xfrm>
-          <a:prstGeom prst="rect">
-            <a:avLst/>
-          </a:prstGeom>
-          <a:noFill/>
-        </p:spPr>
-        <p:txBody>
-          <a:bodyPr wrap="square" lIns="0" rIns="0" tIns="0" bIns="0">
-            <a:spAutoFit/>
-          </a:bodyPr>
-          <a:lstStyle/>
-          <a:p>
-            <a:pPr algn="r"/>
-            <a:r>
-              <a:rPr sz="1250" b="0" i="0">
-                <a:solidFill>
-                  <a:srgbClr val="212529"/>
-                </a:solidFill>
-                <a:latin typeface="Garamond"/>
-              </a:rPr>
-              <a:t>99,233</a:t>
-            </a:r>
-          </a:p>
-        </p:txBody>
-      </p:sp>
-      <p:sp>
-        <p:nvSpPr>
-          <p:cNvPr id="35" name="TextBox 34"/>
-          <p:cNvSpPr txBox="1"/>
-          <p:nvPr/>
-        </p:nvSpPr>
-        <p:spPr>
-          <a:xfrm>
-            <a:off x="7863840" y="3191256"/>
-            <a:ext cx="1417320" cy="228600"/>
-          </a:xfrm>
-          <a:prstGeom prst="rect">
-            <a:avLst/>
-          </a:prstGeom>
-          <a:noFill/>
-        </p:spPr>
-        <p:txBody>
-          <a:bodyPr wrap="square" lIns="0" rIns="0" tIns="0" bIns="0">
-            <a:spAutoFit/>
-          </a:bodyPr>
-          <a:lstStyle/>
-          <a:p>
-            <a:pPr algn="r"/>
-            <a:r>
-              <a:rPr sz="1250" b="0" i="0">
-                <a:solidFill>
-                  <a:srgbClr val="212529"/>
-                </a:solidFill>
-                <a:latin typeface="Garamond"/>
-              </a:rPr>
-              <a:t>78,952</a:t>
-            </a:r>
-          </a:p>
-        </p:txBody>
-      </p:sp>
-      <p:sp>
-        <p:nvSpPr>
-          <p:cNvPr id="36" name="TextBox 35"/>
-          <p:cNvSpPr txBox="1"/>
-          <p:nvPr/>
-        </p:nvSpPr>
-        <p:spPr>
-          <a:xfrm>
-            <a:off x="1554480" y="3451860"/>
-            <a:ext cx="2834640" cy="228600"/>
+          <p:cNvPr id="57" name="TextBox 56"/>
+          <p:cNvSpPr txBox="1"/>
+          <p:nvPr/>
+        </p:nvSpPr>
+        <p:spPr>
+          <a:xfrm>
+            <a:off x="2148840" y="3174796"/>
+            <a:ext cx="914400" cy="210312"/>
+          </a:xfrm>
+          <a:prstGeom prst="rect">
+            <a:avLst/>
+          </a:prstGeom>
+          <a:noFill/>
+        </p:spPr>
+        <p:txBody>
+          <a:bodyPr wrap="square" lIns="0" rIns="0" tIns="0" bIns="0">
+            <a:spAutoFit/>
+          </a:bodyPr>
+          <a:lstStyle/>
+          <a:p>
+            <a:pPr algn="r"/>
+            <a:r>
+              <a:rPr sz="1150" b="0" i="0">
+                <a:solidFill>
+                  <a:srgbClr val="212529"/>
+                </a:solidFill>
+                <a:latin typeface="Garamond"/>
+              </a:rPr>
+              <a:t>17,087</a:t>
+            </a:r>
+          </a:p>
+        </p:txBody>
+      </p:sp>
+      <p:sp>
+        <p:nvSpPr>
+          <p:cNvPr id="58" name="TextBox 57"/>
+          <p:cNvSpPr txBox="1"/>
+          <p:nvPr/>
+        </p:nvSpPr>
+        <p:spPr>
+          <a:xfrm>
+            <a:off x="3063240" y="3174796"/>
+            <a:ext cx="1115568" cy="210312"/>
+          </a:xfrm>
+          <a:prstGeom prst="rect">
+            <a:avLst/>
+          </a:prstGeom>
+          <a:noFill/>
+        </p:spPr>
+        <p:txBody>
+          <a:bodyPr wrap="square" lIns="0" rIns="0" tIns="0" bIns="0">
+            <a:spAutoFit/>
+          </a:bodyPr>
+          <a:lstStyle/>
+          <a:p>
+            <a:pPr algn="r"/>
+            <a:r>
+              <a:rPr sz="1150" b="0" i="0">
+                <a:solidFill>
+                  <a:srgbClr val="212529"/>
+                </a:solidFill>
+                <a:latin typeface="Garamond"/>
+              </a:rPr>
+              <a:t>85,208</a:t>
+            </a:r>
+          </a:p>
+        </p:txBody>
+      </p:sp>
+      <p:sp>
+        <p:nvSpPr>
+          <p:cNvPr id="59" name="TextBox 58"/>
+          <p:cNvSpPr txBox="1"/>
+          <p:nvPr/>
+        </p:nvSpPr>
+        <p:spPr>
+          <a:xfrm>
+            <a:off x="4562856" y="3174796"/>
+            <a:ext cx="914400" cy="210312"/>
+          </a:xfrm>
+          <a:prstGeom prst="rect">
+            <a:avLst/>
+          </a:prstGeom>
+          <a:noFill/>
+        </p:spPr>
+        <p:txBody>
+          <a:bodyPr wrap="square" lIns="0" rIns="0" tIns="0" bIns="0">
+            <a:spAutoFit/>
+          </a:bodyPr>
+          <a:lstStyle/>
+          <a:p>
+            <a:pPr algn="r"/>
+            <a:r>
+              <a:rPr sz="1150" b="0" i="0">
+                <a:solidFill>
+                  <a:srgbClr val="212529"/>
+                </a:solidFill>
+                <a:latin typeface="Garamond"/>
+              </a:rPr>
+              <a:t>19,046</a:t>
+            </a:r>
+          </a:p>
+        </p:txBody>
+      </p:sp>
+      <p:sp>
+        <p:nvSpPr>
+          <p:cNvPr id="60" name="TextBox 59"/>
+          <p:cNvSpPr txBox="1"/>
+          <p:nvPr/>
+        </p:nvSpPr>
+        <p:spPr>
+          <a:xfrm>
+            <a:off x="5477256" y="3174796"/>
+            <a:ext cx="1115568" cy="210312"/>
+          </a:xfrm>
+          <a:prstGeom prst="rect">
+            <a:avLst/>
+          </a:prstGeom>
+          <a:noFill/>
+        </p:spPr>
+        <p:txBody>
+          <a:bodyPr wrap="square" lIns="0" rIns="0" tIns="0" bIns="0">
+            <a:spAutoFit/>
+          </a:bodyPr>
+          <a:lstStyle/>
+          <a:p>
+            <a:pPr algn="r"/>
+            <a:r>
+              <a:rPr sz="1150" b="0" i="0">
+                <a:solidFill>
+                  <a:srgbClr val="212529"/>
+                </a:solidFill>
+                <a:latin typeface="Garamond"/>
+              </a:rPr>
+              <a:t>80,187</a:t>
+            </a:r>
+          </a:p>
+        </p:txBody>
+      </p:sp>
+      <p:sp>
+        <p:nvSpPr>
+          <p:cNvPr id="61" name="TextBox 60"/>
+          <p:cNvSpPr txBox="1"/>
+          <p:nvPr/>
+        </p:nvSpPr>
+        <p:spPr>
+          <a:xfrm>
+            <a:off x="6976871" y="3174796"/>
+            <a:ext cx="914400" cy="210312"/>
+          </a:xfrm>
+          <a:prstGeom prst="rect">
+            <a:avLst/>
+          </a:prstGeom>
+          <a:noFill/>
+        </p:spPr>
+        <p:txBody>
+          <a:bodyPr wrap="square" lIns="0" rIns="0" tIns="0" bIns="0">
+            <a:spAutoFit/>
+          </a:bodyPr>
+          <a:lstStyle/>
+          <a:p>
+            <a:pPr algn="r"/>
+            <a:r>
+              <a:rPr sz="1150" b="0" i="0">
+                <a:solidFill>
+                  <a:srgbClr val="212529"/>
+                </a:solidFill>
+                <a:latin typeface="Garamond"/>
+              </a:rPr>
+              <a:t>14,061</a:t>
+            </a:r>
+          </a:p>
+        </p:txBody>
+      </p:sp>
+      <p:sp>
+        <p:nvSpPr>
+          <p:cNvPr id="62" name="TextBox 61"/>
+          <p:cNvSpPr txBox="1"/>
+          <p:nvPr/>
+        </p:nvSpPr>
+        <p:spPr>
+          <a:xfrm>
+            <a:off x="7891271" y="3174796"/>
+            <a:ext cx="1115568" cy="210312"/>
+          </a:xfrm>
+          <a:prstGeom prst="rect">
+            <a:avLst/>
+          </a:prstGeom>
+          <a:noFill/>
+        </p:spPr>
+        <p:txBody>
+          <a:bodyPr wrap="square" lIns="0" rIns="0" tIns="0" bIns="0">
+            <a:spAutoFit/>
+          </a:bodyPr>
+          <a:lstStyle/>
+          <a:p>
+            <a:pPr algn="r"/>
+            <a:r>
+              <a:rPr sz="1150" b="0" i="0">
+                <a:solidFill>
+                  <a:srgbClr val="212529"/>
+                </a:solidFill>
+                <a:latin typeface="Garamond"/>
+              </a:rPr>
+              <a:t>64,891</a:t>
+            </a:r>
+          </a:p>
+        </p:txBody>
+      </p:sp>
+      <p:sp>
+        <p:nvSpPr>
+          <p:cNvPr id="63" name="TextBox 62"/>
+          <p:cNvSpPr txBox="1"/>
+          <p:nvPr/>
+        </p:nvSpPr>
+        <p:spPr>
+          <a:xfrm>
+            <a:off x="731520" y="3405225"/>
+            <a:ext cx="1417320" cy="210312"/>
           </a:xfrm>
           <a:prstGeom prst="rect">
             <a:avLst/>
@@ -9069,7 +10014,7 @@
           <a:p>
             <a:pPr algn="l"/>
             <a:r>
-              <a:rPr sz="1250" b="0" i="0">
+              <a:rPr sz="1150" b="0" i="0">
                 <a:solidFill>
                   <a:srgbClr val="212529"/>
                 </a:solidFill>
@@ -9082,119 +10027,224 @@
       </p:sp>
       <p:sp>
         <p:nvSpPr>
-          <p:cNvPr id="37" name="TextBox 36"/>
-          <p:cNvSpPr txBox="1"/>
-          <p:nvPr/>
-        </p:nvSpPr>
-        <p:spPr>
-          <a:xfrm>
-            <a:off x="4389120" y="3451860"/>
-            <a:ext cx="1417320" cy="228600"/>
-          </a:xfrm>
-          <a:prstGeom prst="rect">
-            <a:avLst/>
-          </a:prstGeom>
-          <a:noFill/>
-        </p:spPr>
-        <p:txBody>
-          <a:bodyPr wrap="square" lIns="0" rIns="0" tIns="0" bIns="0">
-            <a:spAutoFit/>
-          </a:bodyPr>
-          <a:lstStyle/>
-          <a:p>
-            <a:pPr algn="r"/>
-            <a:r>
-              <a:rPr sz="1250" b="0" i="0">
-                <a:solidFill>
-                  <a:srgbClr val="212529"/>
-                </a:solidFill>
-                <a:latin typeface="Garamond"/>
-              </a:rPr>
-              <a:t>102,937</a:t>
-            </a:r>
-          </a:p>
-        </p:txBody>
-      </p:sp>
-      <p:sp>
-        <p:nvSpPr>
-          <p:cNvPr id="38" name="TextBox 37"/>
-          <p:cNvSpPr txBox="1"/>
-          <p:nvPr/>
-        </p:nvSpPr>
-        <p:spPr>
-          <a:xfrm>
-            <a:off x="6126479" y="3451860"/>
-            <a:ext cx="1417320" cy="228600"/>
-          </a:xfrm>
-          <a:prstGeom prst="rect">
-            <a:avLst/>
-          </a:prstGeom>
-          <a:noFill/>
-        </p:spPr>
-        <p:txBody>
-          <a:bodyPr wrap="square" lIns="0" rIns="0" tIns="0" bIns="0">
-            <a:spAutoFit/>
-          </a:bodyPr>
-          <a:lstStyle/>
-          <a:p>
-            <a:pPr algn="r"/>
-            <a:r>
-              <a:rPr sz="1250" b="0" i="0">
-                <a:solidFill>
-                  <a:srgbClr val="212529"/>
-                </a:solidFill>
-                <a:latin typeface="Garamond"/>
-              </a:rPr>
-              <a:t>99,894</a:t>
-            </a:r>
-          </a:p>
-        </p:txBody>
-      </p:sp>
-      <p:sp>
-        <p:nvSpPr>
-          <p:cNvPr id="39" name="TextBox 38"/>
-          <p:cNvSpPr txBox="1"/>
-          <p:nvPr/>
-        </p:nvSpPr>
-        <p:spPr>
-          <a:xfrm>
-            <a:off x="7863840" y="3451860"/>
-            <a:ext cx="1417320" cy="228600"/>
-          </a:xfrm>
-          <a:prstGeom prst="rect">
-            <a:avLst/>
-          </a:prstGeom>
-          <a:noFill/>
-        </p:spPr>
-        <p:txBody>
-          <a:bodyPr wrap="square" lIns="0" rIns="0" tIns="0" bIns="0">
-            <a:spAutoFit/>
-          </a:bodyPr>
-          <a:lstStyle/>
-          <a:p>
-            <a:pPr algn="r"/>
-            <a:r>
-              <a:rPr sz="1250" b="0" i="0">
-                <a:solidFill>
-                  <a:srgbClr val="212529"/>
-                </a:solidFill>
-                <a:latin typeface="Garamond"/>
-              </a:rPr>
-              <a:t>79,714</a:t>
-            </a:r>
-          </a:p>
-        </p:txBody>
-      </p:sp>
-      <p:sp>
-        <p:nvSpPr>
-          <p:cNvPr id="40" name="TextBox 39"/>
-          <p:cNvSpPr txBox="1"/>
-          <p:nvPr/>
-        </p:nvSpPr>
-        <p:spPr>
-          <a:xfrm>
-            <a:off x="1554480" y="3712464"/>
-            <a:ext cx="2834640" cy="228600"/>
+          <p:cNvPr id="64" name="TextBox 63"/>
+          <p:cNvSpPr txBox="1"/>
+          <p:nvPr/>
+        </p:nvSpPr>
+        <p:spPr>
+          <a:xfrm>
+            <a:off x="2148840" y="3405225"/>
+            <a:ext cx="914400" cy="210312"/>
+          </a:xfrm>
+          <a:prstGeom prst="rect">
+            <a:avLst/>
+          </a:prstGeom>
+          <a:noFill/>
+        </p:spPr>
+        <p:txBody>
+          <a:bodyPr wrap="square" lIns="0" rIns="0" tIns="0" bIns="0">
+            <a:spAutoFit/>
+          </a:bodyPr>
+          <a:lstStyle/>
+          <a:p>
+            <a:pPr algn="r"/>
+            <a:r>
+              <a:rPr sz="1150" b="0" i="0">
+                <a:solidFill>
+                  <a:srgbClr val="212529"/>
+                </a:solidFill>
+                <a:latin typeface="Garamond"/>
+              </a:rPr>
+              <a:t>17,366</a:t>
+            </a:r>
+          </a:p>
+        </p:txBody>
+      </p:sp>
+      <p:sp>
+        <p:nvSpPr>
+          <p:cNvPr id="65" name="TextBox 64"/>
+          <p:cNvSpPr txBox="1"/>
+          <p:nvPr/>
+        </p:nvSpPr>
+        <p:spPr>
+          <a:xfrm>
+            <a:off x="3063240" y="3405225"/>
+            <a:ext cx="1115568" cy="210312"/>
+          </a:xfrm>
+          <a:prstGeom prst="rect">
+            <a:avLst/>
+          </a:prstGeom>
+          <a:noFill/>
+        </p:spPr>
+        <p:txBody>
+          <a:bodyPr wrap="square" lIns="0" rIns="0" tIns="0" bIns="0">
+            <a:spAutoFit/>
+          </a:bodyPr>
+          <a:lstStyle/>
+          <a:p>
+            <a:pPr algn="r"/>
+            <a:r>
+              <a:rPr sz="1150" b="0" i="0">
+                <a:solidFill>
+                  <a:srgbClr val="212529"/>
+                </a:solidFill>
+                <a:latin typeface="Garamond"/>
+              </a:rPr>
+              <a:t>85,571</a:t>
+            </a:r>
+          </a:p>
+        </p:txBody>
+      </p:sp>
+      <p:sp>
+        <p:nvSpPr>
+          <p:cNvPr id="66" name="TextBox 65"/>
+          <p:cNvSpPr txBox="1"/>
+          <p:nvPr/>
+        </p:nvSpPr>
+        <p:spPr>
+          <a:xfrm>
+            <a:off x="4562856" y="3405225"/>
+            <a:ext cx="914400" cy="210312"/>
+          </a:xfrm>
+          <a:prstGeom prst="rect">
+            <a:avLst/>
+          </a:prstGeom>
+          <a:noFill/>
+        </p:spPr>
+        <p:txBody>
+          <a:bodyPr wrap="square" lIns="0" rIns="0" tIns="0" bIns="0">
+            <a:spAutoFit/>
+          </a:bodyPr>
+          <a:lstStyle/>
+          <a:p>
+            <a:pPr algn="r"/>
+            <a:r>
+              <a:rPr sz="1150" b="0" i="0">
+                <a:solidFill>
+                  <a:srgbClr val="212529"/>
+                </a:solidFill>
+                <a:latin typeface="Garamond"/>
+              </a:rPr>
+              <a:t>16,976</a:t>
+            </a:r>
+          </a:p>
+        </p:txBody>
+      </p:sp>
+      <p:sp>
+        <p:nvSpPr>
+          <p:cNvPr id="67" name="TextBox 66"/>
+          <p:cNvSpPr txBox="1"/>
+          <p:nvPr/>
+        </p:nvSpPr>
+        <p:spPr>
+          <a:xfrm>
+            <a:off x="5477256" y="3405225"/>
+            <a:ext cx="1115568" cy="210312"/>
+          </a:xfrm>
+          <a:prstGeom prst="rect">
+            <a:avLst/>
+          </a:prstGeom>
+          <a:noFill/>
+        </p:spPr>
+        <p:txBody>
+          <a:bodyPr wrap="square" lIns="0" rIns="0" tIns="0" bIns="0">
+            <a:spAutoFit/>
+          </a:bodyPr>
+          <a:lstStyle/>
+          <a:p>
+            <a:pPr algn="r"/>
+            <a:r>
+              <a:rPr sz="1150" b="0" i="0">
+                <a:solidFill>
+                  <a:srgbClr val="212529"/>
+                </a:solidFill>
+                <a:latin typeface="Garamond"/>
+              </a:rPr>
+              <a:t>82,918</a:t>
+            </a:r>
+          </a:p>
+        </p:txBody>
+      </p:sp>
+      <p:sp>
+        <p:nvSpPr>
+          <p:cNvPr id="68" name="TextBox 67"/>
+          <p:cNvSpPr txBox="1"/>
+          <p:nvPr/>
+        </p:nvSpPr>
+        <p:spPr>
+          <a:xfrm>
+            <a:off x="6976871" y="3405225"/>
+            <a:ext cx="914400" cy="210312"/>
+          </a:xfrm>
+          <a:prstGeom prst="rect">
+            <a:avLst/>
+          </a:prstGeom>
+          <a:noFill/>
+        </p:spPr>
+        <p:txBody>
+          <a:bodyPr wrap="square" lIns="0" rIns="0" tIns="0" bIns="0">
+            <a:spAutoFit/>
+          </a:bodyPr>
+          <a:lstStyle/>
+          <a:p>
+            <a:pPr algn="r"/>
+            <a:r>
+              <a:rPr sz="1150" b="0" i="0">
+                <a:solidFill>
+                  <a:srgbClr val="212529"/>
+                </a:solidFill>
+                <a:latin typeface="Garamond"/>
+              </a:rPr>
+              <a:t>14,493</a:t>
+            </a:r>
+          </a:p>
+        </p:txBody>
+      </p:sp>
+      <p:sp>
+        <p:nvSpPr>
+          <p:cNvPr id="69" name="TextBox 68"/>
+          <p:cNvSpPr txBox="1"/>
+          <p:nvPr/>
+        </p:nvSpPr>
+        <p:spPr>
+          <a:xfrm>
+            <a:off x="7891271" y="3405225"/>
+            <a:ext cx="1115568" cy="210312"/>
+          </a:xfrm>
+          <a:prstGeom prst="rect">
+            <a:avLst/>
+          </a:prstGeom>
+          <a:noFill/>
+        </p:spPr>
+        <p:txBody>
+          <a:bodyPr wrap="square" lIns="0" rIns="0" tIns="0" bIns="0">
+            <a:spAutoFit/>
+          </a:bodyPr>
+          <a:lstStyle/>
+          <a:p>
+            <a:pPr algn="r"/>
+            <a:r>
+              <a:rPr sz="1150" b="0" i="0">
+                <a:solidFill>
+                  <a:srgbClr val="212529"/>
+                </a:solidFill>
+                <a:latin typeface="Garamond"/>
+              </a:rPr>
+              <a:t>65,221</a:t>
+            </a:r>
+          </a:p>
+        </p:txBody>
+      </p:sp>
+      <p:sp>
+        <p:nvSpPr>
+          <p:cNvPr id="70" name="TextBox 69"/>
+          <p:cNvSpPr txBox="1"/>
+          <p:nvPr/>
+        </p:nvSpPr>
+        <p:spPr>
+          <a:xfrm>
+            <a:off x="731520" y="3635654"/>
+            <a:ext cx="1417320" cy="210312"/>
           </a:xfrm>
           <a:prstGeom prst="rect">
             <a:avLst/>
@@ -9209,7 +10259,7 @@
           <a:p>
             <a:pPr algn="l"/>
             <a:r>
-              <a:rPr sz="1250" b="0" i="0">
+              <a:rPr sz="1150" b="0" i="0">
                 <a:solidFill>
                   <a:srgbClr val="212529"/>
                 </a:solidFill>
@@ -9222,119 +10272,224 @@
       </p:sp>
       <p:sp>
         <p:nvSpPr>
-          <p:cNvPr id="41" name="TextBox 40"/>
-          <p:cNvSpPr txBox="1"/>
-          <p:nvPr/>
-        </p:nvSpPr>
-        <p:spPr>
-          <a:xfrm>
-            <a:off x="4389120" y="3712464"/>
-            <a:ext cx="1417320" cy="228600"/>
-          </a:xfrm>
-          <a:prstGeom prst="rect">
-            <a:avLst/>
-          </a:prstGeom>
-          <a:noFill/>
-        </p:spPr>
-        <p:txBody>
-          <a:bodyPr wrap="square" lIns="0" rIns="0" tIns="0" bIns="0">
-            <a:spAutoFit/>
-          </a:bodyPr>
-          <a:lstStyle/>
-          <a:p>
-            <a:pPr algn="r"/>
-            <a:r>
-              <a:rPr sz="1250" b="0" i="0">
-                <a:solidFill>
-                  <a:srgbClr val="212529"/>
-                </a:solidFill>
-                <a:latin typeface="Garamond"/>
-              </a:rPr>
-              <a:t>102,209</a:t>
-            </a:r>
-          </a:p>
-        </p:txBody>
-      </p:sp>
-      <p:sp>
-        <p:nvSpPr>
-          <p:cNvPr id="42" name="TextBox 41"/>
-          <p:cNvSpPr txBox="1"/>
-          <p:nvPr/>
-        </p:nvSpPr>
-        <p:spPr>
-          <a:xfrm>
-            <a:off x="6126479" y="3712464"/>
-            <a:ext cx="1417320" cy="228600"/>
-          </a:xfrm>
-          <a:prstGeom prst="rect">
-            <a:avLst/>
-          </a:prstGeom>
-          <a:noFill/>
-        </p:spPr>
-        <p:txBody>
-          <a:bodyPr wrap="square" lIns="0" rIns="0" tIns="0" bIns="0">
-            <a:spAutoFit/>
-          </a:bodyPr>
-          <a:lstStyle/>
-          <a:p>
-            <a:pPr algn="r"/>
-            <a:r>
-              <a:rPr sz="1250" b="0" i="0">
-                <a:solidFill>
-                  <a:srgbClr val="212529"/>
-                </a:solidFill>
-                <a:latin typeface="Garamond"/>
-              </a:rPr>
-              <a:t>99,807</a:t>
-            </a:r>
-          </a:p>
-        </p:txBody>
-      </p:sp>
-      <p:sp>
-        <p:nvSpPr>
-          <p:cNvPr id="43" name="TextBox 42"/>
-          <p:cNvSpPr txBox="1"/>
-          <p:nvPr/>
-        </p:nvSpPr>
-        <p:spPr>
-          <a:xfrm>
-            <a:off x="7863840" y="3712464"/>
-            <a:ext cx="1417320" cy="228600"/>
-          </a:xfrm>
-          <a:prstGeom prst="rect">
-            <a:avLst/>
-          </a:prstGeom>
-          <a:noFill/>
-        </p:spPr>
-        <p:txBody>
-          <a:bodyPr wrap="square" lIns="0" rIns="0" tIns="0" bIns="0">
-            <a:spAutoFit/>
-          </a:bodyPr>
-          <a:lstStyle/>
-          <a:p>
-            <a:pPr algn="r"/>
-            <a:r>
-              <a:rPr sz="1250" b="0" i="0">
-                <a:solidFill>
-                  <a:srgbClr val="212529"/>
-                </a:solidFill>
-                <a:latin typeface="Garamond"/>
-              </a:rPr>
-              <a:t>79,087</a:t>
-            </a:r>
-          </a:p>
-        </p:txBody>
-      </p:sp>
-      <p:sp>
-        <p:nvSpPr>
-          <p:cNvPr id="44" name="TextBox 43"/>
-          <p:cNvSpPr txBox="1"/>
-          <p:nvPr/>
-        </p:nvSpPr>
-        <p:spPr>
-          <a:xfrm>
-            <a:off x="1554480" y="3973068"/>
-            <a:ext cx="2834640" cy="228600"/>
+          <p:cNvPr id="71" name="TextBox 70"/>
+          <p:cNvSpPr txBox="1"/>
+          <p:nvPr/>
+        </p:nvSpPr>
+        <p:spPr>
+          <a:xfrm>
+            <a:off x="2148840" y="3635654"/>
+            <a:ext cx="914400" cy="210312"/>
+          </a:xfrm>
+          <a:prstGeom prst="rect">
+            <a:avLst/>
+          </a:prstGeom>
+          <a:noFill/>
+        </p:spPr>
+        <p:txBody>
+          <a:bodyPr wrap="square" lIns="0" rIns="0" tIns="0" bIns="0">
+            <a:spAutoFit/>
+          </a:bodyPr>
+          <a:lstStyle/>
+          <a:p>
+            <a:pPr algn="r"/>
+            <a:r>
+              <a:rPr sz="1150" b="0" i="0">
+                <a:solidFill>
+                  <a:srgbClr val="212529"/>
+                </a:solidFill>
+                <a:latin typeface="Garamond"/>
+              </a:rPr>
+              <a:t>17,096</a:t>
+            </a:r>
+          </a:p>
+        </p:txBody>
+      </p:sp>
+      <p:sp>
+        <p:nvSpPr>
+          <p:cNvPr id="72" name="TextBox 71"/>
+          <p:cNvSpPr txBox="1"/>
+          <p:nvPr/>
+        </p:nvSpPr>
+        <p:spPr>
+          <a:xfrm>
+            <a:off x="3063240" y="3635654"/>
+            <a:ext cx="1115568" cy="210312"/>
+          </a:xfrm>
+          <a:prstGeom prst="rect">
+            <a:avLst/>
+          </a:prstGeom>
+          <a:noFill/>
+        </p:spPr>
+        <p:txBody>
+          <a:bodyPr wrap="square" lIns="0" rIns="0" tIns="0" bIns="0">
+            <a:spAutoFit/>
+          </a:bodyPr>
+          <a:lstStyle/>
+          <a:p>
+            <a:pPr algn="r"/>
+            <a:r>
+              <a:rPr sz="1150" b="0" i="0">
+                <a:solidFill>
+                  <a:srgbClr val="212529"/>
+                </a:solidFill>
+                <a:latin typeface="Garamond"/>
+              </a:rPr>
+              <a:t>85,113</a:t>
+            </a:r>
+          </a:p>
+        </p:txBody>
+      </p:sp>
+      <p:sp>
+        <p:nvSpPr>
+          <p:cNvPr id="73" name="TextBox 72"/>
+          <p:cNvSpPr txBox="1"/>
+          <p:nvPr/>
+        </p:nvSpPr>
+        <p:spPr>
+          <a:xfrm>
+            <a:off x="4562856" y="3635654"/>
+            <a:ext cx="914400" cy="210312"/>
+          </a:xfrm>
+          <a:prstGeom prst="rect">
+            <a:avLst/>
+          </a:prstGeom>
+          <a:noFill/>
+        </p:spPr>
+        <p:txBody>
+          <a:bodyPr wrap="square" lIns="0" rIns="0" tIns="0" bIns="0">
+            <a:spAutoFit/>
+          </a:bodyPr>
+          <a:lstStyle/>
+          <a:p>
+            <a:pPr algn="r"/>
+            <a:r>
+              <a:rPr sz="1150" b="0" i="0">
+                <a:solidFill>
+                  <a:srgbClr val="212529"/>
+                </a:solidFill>
+                <a:latin typeface="Garamond"/>
+              </a:rPr>
+              <a:t>16,829</a:t>
+            </a:r>
+          </a:p>
+        </p:txBody>
+      </p:sp>
+      <p:sp>
+        <p:nvSpPr>
+          <p:cNvPr id="74" name="TextBox 73"/>
+          <p:cNvSpPr txBox="1"/>
+          <p:nvPr/>
+        </p:nvSpPr>
+        <p:spPr>
+          <a:xfrm>
+            <a:off x="5477256" y="3635654"/>
+            <a:ext cx="1115568" cy="210312"/>
+          </a:xfrm>
+          <a:prstGeom prst="rect">
+            <a:avLst/>
+          </a:prstGeom>
+          <a:noFill/>
+        </p:spPr>
+        <p:txBody>
+          <a:bodyPr wrap="square" lIns="0" rIns="0" tIns="0" bIns="0">
+            <a:spAutoFit/>
+          </a:bodyPr>
+          <a:lstStyle/>
+          <a:p>
+            <a:pPr algn="r"/>
+            <a:r>
+              <a:rPr sz="1150" b="0" i="0">
+                <a:solidFill>
+                  <a:srgbClr val="212529"/>
+                </a:solidFill>
+                <a:latin typeface="Garamond"/>
+              </a:rPr>
+              <a:t>82,978</a:t>
+            </a:r>
+          </a:p>
+        </p:txBody>
+      </p:sp>
+      <p:sp>
+        <p:nvSpPr>
+          <p:cNvPr id="75" name="TextBox 74"/>
+          <p:cNvSpPr txBox="1"/>
+          <p:nvPr/>
+        </p:nvSpPr>
+        <p:spPr>
+          <a:xfrm>
+            <a:off x="6976871" y="3635654"/>
+            <a:ext cx="914400" cy="210312"/>
+          </a:xfrm>
+          <a:prstGeom prst="rect">
+            <a:avLst/>
+          </a:prstGeom>
+          <a:noFill/>
+        </p:spPr>
+        <p:txBody>
+          <a:bodyPr wrap="square" lIns="0" rIns="0" tIns="0" bIns="0">
+            <a:spAutoFit/>
+          </a:bodyPr>
+          <a:lstStyle/>
+          <a:p>
+            <a:pPr algn="r"/>
+            <a:r>
+              <a:rPr sz="1150" b="0" i="0">
+                <a:solidFill>
+                  <a:srgbClr val="212529"/>
+                </a:solidFill>
+                <a:latin typeface="Garamond"/>
+              </a:rPr>
+              <a:t>13,788</a:t>
+            </a:r>
+          </a:p>
+        </p:txBody>
+      </p:sp>
+      <p:sp>
+        <p:nvSpPr>
+          <p:cNvPr id="76" name="TextBox 75"/>
+          <p:cNvSpPr txBox="1"/>
+          <p:nvPr/>
+        </p:nvSpPr>
+        <p:spPr>
+          <a:xfrm>
+            <a:off x="7891271" y="3635654"/>
+            <a:ext cx="1115568" cy="210312"/>
+          </a:xfrm>
+          <a:prstGeom prst="rect">
+            <a:avLst/>
+          </a:prstGeom>
+          <a:noFill/>
+        </p:spPr>
+        <p:txBody>
+          <a:bodyPr wrap="square" lIns="0" rIns="0" tIns="0" bIns="0">
+            <a:spAutoFit/>
+          </a:bodyPr>
+          <a:lstStyle/>
+          <a:p>
+            <a:pPr algn="r"/>
+            <a:r>
+              <a:rPr sz="1150" b="0" i="0">
+                <a:solidFill>
+                  <a:srgbClr val="212529"/>
+                </a:solidFill>
+                <a:latin typeface="Garamond"/>
+              </a:rPr>
+              <a:t>65,299</a:t>
+            </a:r>
+          </a:p>
+        </p:txBody>
+      </p:sp>
+      <p:sp>
+        <p:nvSpPr>
+          <p:cNvPr id="77" name="TextBox 76"/>
+          <p:cNvSpPr txBox="1"/>
+          <p:nvPr/>
+        </p:nvSpPr>
+        <p:spPr>
+          <a:xfrm>
+            <a:off x="731520" y="3866083"/>
+            <a:ext cx="1417320" cy="210312"/>
           </a:xfrm>
           <a:prstGeom prst="rect">
             <a:avLst/>
@@ -9349,7 +10504,7 @@
           <a:p>
             <a:pPr algn="l"/>
             <a:r>
-              <a:rPr sz="1250" b="0" i="0">
+              <a:rPr sz="1150" b="0" i="0">
                 <a:solidFill>
                   <a:srgbClr val="212529"/>
                 </a:solidFill>
@@ -9362,119 +10517,224 @@
       </p:sp>
       <p:sp>
         <p:nvSpPr>
-          <p:cNvPr id="45" name="TextBox 44"/>
-          <p:cNvSpPr txBox="1"/>
-          <p:nvPr/>
-        </p:nvSpPr>
-        <p:spPr>
-          <a:xfrm>
-            <a:off x="4389120" y="3973068"/>
-            <a:ext cx="1417320" cy="228600"/>
-          </a:xfrm>
-          <a:prstGeom prst="rect">
-            <a:avLst/>
-          </a:prstGeom>
-          <a:noFill/>
-        </p:spPr>
-        <p:txBody>
-          <a:bodyPr wrap="square" lIns="0" rIns="0" tIns="0" bIns="0">
-            <a:spAutoFit/>
-          </a:bodyPr>
-          <a:lstStyle/>
-          <a:p>
-            <a:pPr algn="r"/>
-            <a:r>
-              <a:rPr sz="1250" b="0" i="0">
-                <a:solidFill>
-                  <a:srgbClr val="212529"/>
-                </a:solidFill>
-                <a:latin typeface="Garamond"/>
-              </a:rPr>
-              <a:t>102,181</a:t>
-            </a:r>
-          </a:p>
-        </p:txBody>
-      </p:sp>
-      <p:sp>
-        <p:nvSpPr>
-          <p:cNvPr id="46" name="TextBox 45"/>
-          <p:cNvSpPr txBox="1"/>
-          <p:nvPr/>
-        </p:nvSpPr>
-        <p:spPr>
-          <a:xfrm>
-            <a:off x="6126479" y="3973068"/>
-            <a:ext cx="1417320" cy="228600"/>
-          </a:xfrm>
-          <a:prstGeom prst="rect">
-            <a:avLst/>
-          </a:prstGeom>
-          <a:noFill/>
-        </p:spPr>
-        <p:txBody>
-          <a:bodyPr wrap="square" lIns="0" rIns="0" tIns="0" bIns="0">
-            <a:spAutoFit/>
-          </a:bodyPr>
-          <a:lstStyle/>
-          <a:p>
-            <a:pPr algn="r"/>
-            <a:r>
-              <a:rPr sz="1250" b="0" i="0">
-                <a:solidFill>
-                  <a:srgbClr val="212529"/>
-                </a:solidFill>
-                <a:latin typeface="Garamond"/>
-              </a:rPr>
-              <a:t>100,437</a:t>
-            </a:r>
-          </a:p>
-        </p:txBody>
-      </p:sp>
-      <p:sp>
-        <p:nvSpPr>
-          <p:cNvPr id="47" name="TextBox 46"/>
-          <p:cNvSpPr txBox="1"/>
-          <p:nvPr/>
-        </p:nvSpPr>
-        <p:spPr>
-          <a:xfrm>
-            <a:off x="7863840" y="3973068"/>
-            <a:ext cx="1417320" cy="228600"/>
-          </a:xfrm>
-          <a:prstGeom prst="rect">
-            <a:avLst/>
-          </a:prstGeom>
-          <a:noFill/>
-        </p:spPr>
-        <p:txBody>
-          <a:bodyPr wrap="square" lIns="0" rIns="0" tIns="0" bIns="0">
-            <a:spAutoFit/>
-          </a:bodyPr>
-          <a:lstStyle/>
-          <a:p>
-            <a:pPr algn="r"/>
-            <a:r>
-              <a:rPr sz="1250" b="0" i="0">
-                <a:solidFill>
-                  <a:srgbClr val="212529"/>
-                </a:solidFill>
-                <a:latin typeface="Garamond"/>
-              </a:rPr>
-              <a:t>79,058</a:t>
-            </a:r>
-          </a:p>
-        </p:txBody>
-      </p:sp>
-      <p:sp>
-        <p:nvSpPr>
-          <p:cNvPr id="48" name="TextBox 47"/>
-          <p:cNvSpPr txBox="1"/>
-          <p:nvPr/>
-        </p:nvSpPr>
-        <p:spPr>
-          <a:xfrm>
-            <a:off x="1554480" y="4233672"/>
-            <a:ext cx="2834640" cy="228600"/>
+          <p:cNvPr id="78" name="TextBox 77"/>
+          <p:cNvSpPr txBox="1"/>
+          <p:nvPr/>
+        </p:nvSpPr>
+        <p:spPr>
+          <a:xfrm>
+            <a:off x="2148840" y="3866083"/>
+            <a:ext cx="914400" cy="210312"/>
+          </a:xfrm>
+          <a:prstGeom prst="rect">
+            <a:avLst/>
+          </a:prstGeom>
+          <a:noFill/>
+        </p:spPr>
+        <p:txBody>
+          <a:bodyPr wrap="square" lIns="0" rIns="0" tIns="0" bIns="0">
+            <a:spAutoFit/>
+          </a:bodyPr>
+          <a:lstStyle/>
+          <a:p>
+            <a:pPr algn="r"/>
+            <a:r>
+              <a:rPr sz="1150" b="0" i="0">
+                <a:solidFill>
+                  <a:srgbClr val="212529"/>
+                </a:solidFill>
+                <a:latin typeface="Garamond"/>
+              </a:rPr>
+              <a:t>16,920</a:t>
+            </a:r>
+          </a:p>
+        </p:txBody>
+      </p:sp>
+      <p:sp>
+        <p:nvSpPr>
+          <p:cNvPr id="79" name="TextBox 78"/>
+          <p:cNvSpPr txBox="1"/>
+          <p:nvPr/>
+        </p:nvSpPr>
+        <p:spPr>
+          <a:xfrm>
+            <a:off x="3063240" y="3866083"/>
+            <a:ext cx="1115568" cy="210312"/>
+          </a:xfrm>
+          <a:prstGeom prst="rect">
+            <a:avLst/>
+          </a:prstGeom>
+          <a:noFill/>
+        </p:spPr>
+        <p:txBody>
+          <a:bodyPr wrap="square" lIns="0" rIns="0" tIns="0" bIns="0">
+            <a:spAutoFit/>
+          </a:bodyPr>
+          <a:lstStyle/>
+          <a:p>
+            <a:pPr algn="r"/>
+            <a:r>
+              <a:rPr sz="1150" b="0" i="0">
+                <a:solidFill>
+                  <a:srgbClr val="212529"/>
+                </a:solidFill>
+                <a:latin typeface="Garamond"/>
+              </a:rPr>
+              <a:t>85,261</a:t>
+            </a:r>
+          </a:p>
+        </p:txBody>
+      </p:sp>
+      <p:sp>
+        <p:nvSpPr>
+          <p:cNvPr id="80" name="TextBox 79"/>
+          <p:cNvSpPr txBox="1"/>
+          <p:nvPr/>
+        </p:nvSpPr>
+        <p:spPr>
+          <a:xfrm>
+            <a:off x="4562856" y="3866083"/>
+            <a:ext cx="914400" cy="210312"/>
+          </a:xfrm>
+          <a:prstGeom prst="rect">
+            <a:avLst/>
+          </a:prstGeom>
+          <a:noFill/>
+        </p:spPr>
+        <p:txBody>
+          <a:bodyPr wrap="square" lIns="0" rIns="0" tIns="0" bIns="0">
+            <a:spAutoFit/>
+          </a:bodyPr>
+          <a:lstStyle/>
+          <a:p>
+            <a:pPr algn="r"/>
+            <a:r>
+              <a:rPr sz="1150" b="0" i="0">
+                <a:solidFill>
+                  <a:srgbClr val="212529"/>
+                </a:solidFill>
+                <a:latin typeface="Garamond"/>
+              </a:rPr>
+              <a:t>17,124</a:t>
+            </a:r>
+          </a:p>
+        </p:txBody>
+      </p:sp>
+      <p:sp>
+        <p:nvSpPr>
+          <p:cNvPr id="81" name="TextBox 80"/>
+          <p:cNvSpPr txBox="1"/>
+          <p:nvPr/>
+        </p:nvSpPr>
+        <p:spPr>
+          <a:xfrm>
+            <a:off x="5477256" y="3866083"/>
+            <a:ext cx="1115568" cy="210312"/>
+          </a:xfrm>
+          <a:prstGeom prst="rect">
+            <a:avLst/>
+          </a:prstGeom>
+          <a:noFill/>
+        </p:spPr>
+        <p:txBody>
+          <a:bodyPr wrap="square" lIns="0" rIns="0" tIns="0" bIns="0">
+            <a:spAutoFit/>
+          </a:bodyPr>
+          <a:lstStyle/>
+          <a:p>
+            <a:pPr algn="r"/>
+            <a:r>
+              <a:rPr sz="1150" b="0" i="0">
+                <a:solidFill>
+                  <a:srgbClr val="212529"/>
+                </a:solidFill>
+                <a:latin typeface="Garamond"/>
+              </a:rPr>
+              <a:t>83,313</a:t>
+            </a:r>
+          </a:p>
+        </p:txBody>
+      </p:sp>
+      <p:sp>
+        <p:nvSpPr>
+          <p:cNvPr id="82" name="TextBox 81"/>
+          <p:cNvSpPr txBox="1"/>
+          <p:nvPr/>
+        </p:nvSpPr>
+        <p:spPr>
+          <a:xfrm>
+            <a:off x="6976871" y="3866083"/>
+            <a:ext cx="914400" cy="210312"/>
+          </a:xfrm>
+          <a:prstGeom prst="rect">
+            <a:avLst/>
+          </a:prstGeom>
+          <a:noFill/>
+        </p:spPr>
+        <p:txBody>
+          <a:bodyPr wrap="square" lIns="0" rIns="0" tIns="0" bIns="0">
+            <a:spAutoFit/>
+          </a:bodyPr>
+          <a:lstStyle/>
+          <a:p>
+            <a:pPr algn="r"/>
+            <a:r>
+              <a:rPr sz="1150" b="0" i="0">
+                <a:solidFill>
+                  <a:srgbClr val="212529"/>
+                </a:solidFill>
+                <a:latin typeface="Garamond"/>
+              </a:rPr>
+              <a:t>13,670</a:t>
+            </a:r>
+          </a:p>
+        </p:txBody>
+      </p:sp>
+      <p:sp>
+        <p:nvSpPr>
+          <p:cNvPr id="83" name="TextBox 82"/>
+          <p:cNvSpPr txBox="1"/>
+          <p:nvPr/>
+        </p:nvSpPr>
+        <p:spPr>
+          <a:xfrm>
+            <a:off x="7891271" y="3866083"/>
+            <a:ext cx="1115568" cy="210312"/>
+          </a:xfrm>
+          <a:prstGeom prst="rect">
+            <a:avLst/>
+          </a:prstGeom>
+          <a:noFill/>
+        </p:spPr>
+        <p:txBody>
+          <a:bodyPr wrap="square" lIns="0" rIns="0" tIns="0" bIns="0">
+            <a:spAutoFit/>
+          </a:bodyPr>
+          <a:lstStyle/>
+          <a:p>
+            <a:pPr algn="r"/>
+            <a:r>
+              <a:rPr sz="1150" b="0" i="0">
+                <a:solidFill>
+                  <a:srgbClr val="212529"/>
+                </a:solidFill>
+                <a:latin typeface="Garamond"/>
+              </a:rPr>
+              <a:t>65,388</a:t>
+            </a:r>
+          </a:p>
+        </p:txBody>
+      </p:sp>
+      <p:sp>
+        <p:nvSpPr>
+          <p:cNvPr id="84" name="TextBox 83"/>
+          <p:cNvSpPr txBox="1"/>
+          <p:nvPr/>
+        </p:nvSpPr>
+        <p:spPr>
+          <a:xfrm>
+            <a:off x="731520" y="4096511"/>
+            <a:ext cx="1417320" cy="210312"/>
           </a:xfrm>
           <a:prstGeom prst="rect">
             <a:avLst/>
@@ -9489,7 +10749,7 @@
           <a:p>
             <a:pPr algn="l"/>
             <a:r>
-              <a:rPr sz="1250" b="0" i="0">
+              <a:rPr sz="1150" b="0" i="0">
                 <a:solidFill>
                   <a:srgbClr val="212529"/>
                 </a:solidFill>
@@ -9502,119 +10762,224 @@
       </p:sp>
       <p:sp>
         <p:nvSpPr>
-          <p:cNvPr id="49" name="TextBox 48"/>
-          <p:cNvSpPr txBox="1"/>
-          <p:nvPr/>
-        </p:nvSpPr>
-        <p:spPr>
-          <a:xfrm>
-            <a:off x="4389120" y="4233672"/>
-            <a:ext cx="1417320" cy="228600"/>
-          </a:xfrm>
-          <a:prstGeom prst="rect">
-            <a:avLst/>
-          </a:prstGeom>
-          <a:noFill/>
-        </p:spPr>
-        <p:txBody>
-          <a:bodyPr wrap="square" lIns="0" rIns="0" tIns="0" bIns="0">
-            <a:spAutoFit/>
-          </a:bodyPr>
-          <a:lstStyle/>
-          <a:p>
-            <a:pPr algn="r"/>
-            <a:r>
-              <a:rPr sz="1250" b="0" i="0">
-                <a:solidFill>
-                  <a:srgbClr val="212529"/>
-                </a:solidFill>
-                <a:latin typeface="Garamond"/>
-              </a:rPr>
-              <a:t>102,110</a:t>
-            </a:r>
-          </a:p>
-        </p:txBody>
-      </p:sp>
-      <p:sp>
-        <p:nvSpPr>
-          <p:cNvPr id="50" name="TextBox 49"/>
-          <p:cNvSpPr txBox="1"/>
-          <p:nvPr/>
-        </p:nvSpPr>
-        <p:spPr>
-          <a:xfrm>
-            <a:off x="6126479" y="4233672"/>
-            <a:ext cx="1417320" cy="228600"/>
-          </a:xfrm>
-          <a:prstGeom prst="rect">
-            <a:avLst/>
-          </a:prstGeom>
-          <a:noFill/>
-        </p:spPr>
-        <p:txBody>
-          <a:bodyPr wrap="square" lIns="0" rIns="0" tIns="0" bIns="0">
-            <a:spAutoFit/>
-          </a:bodyPr>
-          <a:lstStyle/>
-          <a:p>
-            <a:pPr algn="r"/>
-            <a:r>
-              <a:rPr sz="1250" b="0" i="0">
-                <a:solidFill>
-                  <a:srgbClr val="212529"/>
-                </a:solidFill>
-                <a:latin typeface="Garamond"/>
-              </a:rPr>
-              <a:t>100,497</a:t>
-            </a:r>
-          </a:p>
-        </p:txBody>
-      </p:sp>
-      <p:sp>
-        <p:nvSpPr>
-          <p:cNvPr id="51" name="TextBox 50"/>
-          <p:cNvSpPr txBox="1"/>
-          <p:nvPr/>
-        </p:nvSpPr>
-        <p:spPr>
-          <a:xfrm>
-            <a:off x="7863840" y="4233672"/>
-            <a:ext cx="1417320" cy="228600"/>
-          </a:xfrm>
-          <a:prstGeom prst="rect">
-            <a:avLst/>
-          </a:prstGeom>
-          <a:noFill/>
-        </p:spPr>
-        <p:txBody>
-          <a:bodyPr wrap="square" lIns="0" rIns="0" tIns="0" bIns="0">
-            <a:spAutoFit/>
-          </a:bodyPr>
-          <a:lstStyle/>
-          <a:p>
-            <a:pPr algn="r"/>
-            <a:r>
-              <a:rPr sz="1250" b="0" i="0">
-                <a:solidFill>
-                  <a:srgbClr val="212529"/>
-                </a:solidFill>
-                <a:latin typeface="Garamond"/>
-              </a:rPr>
-              <a:t>78,982</a:t>
-            </a:r>
-          </a:p>
-        </p:txBody>
-      </p:sp>
-      <p:sp>
-        <p:nvSpPr>
-          <p:cNvPr id="52" name="TextBox 51"/>
-          <p:cNvSpPr txBox="1"/>
-          <p:nvPr/>
-        </p:nvSpPr>
-        <p:spPr>
-          <a:xfrm>
-            <a:off x="1554480" y="4494276"/>
-            <a:ext cx="2834640" cy="228600"/>
+          <p:cNvPr id="85" name="TextBox 84"/>
+          <p:cNvSpPr txBox="1"/>
+          <p:nvPr/>
+        </p:nvSpPr>
+        <p:spPr>
+          <a:xfrm>
+            <a:off x="2148840" y="4096511"/>
+            <a:ext cx="914400" cy="210312"/>
+          </a:xfrm>
+          <a:prstGeom prst="rect">
+            <a:avLst/>
+          </a:prstGeom>
+          <a:noFill/>
+        </p:spPr>
+        <p:txBody>
+          <a:bodyPr wrap="square" lIns="0" rIns="0" tIns="0" bIns="0">
+            <a:spAutoFit/>
+          </a:bodyPr>
+          <a:lstStyle/>
+          <a:p>
+            <a:pPr algn="r"/>
+            <a:r>
+              <a:rPr sz="1150" b="0" i="0">
+                <a:solidFill>
+                  <a:srgbClr val="212529"/>
+                </a:solidFill>
+                <a:latin typeface="Garamond"/>
+              </a:rPr>
+              <a:t>16,985</a:t>
+            </a:r>
+          </a:p>
+        </p:txBody>
+      </p:sp>
+      <p:sp>
+        <p:nvSpPr>
+          <p:cNvPr id="86" name="TextBox 85"/>
+          <p:cNvSpPr txBox="1"/>
+          <p:nvPr/>
+        </p:nvSpPr>
+        <p:spPr>
+          <a:xfrm>
+            <a:off x="3063240" y="4096511"/>
+            <a:ext cx="1115568" cy="210312"/>
+          </a:xfrm>
+          <a:prstGeom prst="rect">
+            <a:avLst/>
+          </a:prstGeom>
+          <a:noFill/>
+        </p:spPr>
+        <p:txBody>
+          <a:bodyPr wrap="square" lIns="0" rIns="0" tIns="0" bIns="0">
+            <a:spAutoFit/>
+          </a:bodyPr>
+          <a:lstStyle/>
+          <a:p>
+            <a:pPr algn="r"/>
+            <a:r>
+              <a:rPr sz="1150" b="0" i="0">
+                <a:solidFill>
+                  <a:srgbClr val="212529"/>
+                </a:solidFill>
+                <a:latin typeface="Garamond"/>
+              </a:rPr>
+              <a:t>85,125</a:t>
+            </a:r>
+          </a:p>
+        </p:txBody>
+      </p:sp>
+      <p:sp>
+        <p:nvSpPr>
+          <p:cNvPr id="87" name="TextBox 86"/>
+          <p:cNvSpPr txBox="1"/>
+          <p:nvPr/>
+        </p:nvSpPr>
+        <p:spPr>
+          <a:xfrm>
+            <a:off x="4562856" y="4096511"/>
+            <a:ext cx="914400" cy="210312"/>
+          </a:xfrm>
+          <a:prstGeom prst="rect">
+            <a:avLst/>
+          </a:prstGeom>
+          <a:noFill/>
+        </p:spPr>
+        <p:txBody>
+          <a:bodyPr wrap="square" lIns="0" rIns="0" tIns="0" bIns="0">
+            <a:spAutoFit/>
+          </a:bodyPr>
+          <a:lstStyle/>
+          <a:p>
+            <a:pPr algn="r"/>
+            <a:r>
+              <a:rPr sz="1150" b="0" i="0">
+                <a:solidFill>
+                  <a:srgbClr val="212529"/>
+                </a:solidFill>
+                <a:latin typeface="Garamond"/>
+              </a:rPr>
+              <a:t>16,805</a:t>
+            </a:r>
+          </a:p>
+        </p:txBody>
+      </p:sp>
+      <p:sp>
+        <p:nvSpPr>
+          <p:cNvPr id="88" name="TextBox 87"/>
+          <p:cNvSpPr txBox="1"/>
+          <p:nvPr/>
+        </p:nvSpPr>
+        <p:spPr>
+          <a:xfrm>
+            <a:off x="5477256" y="4096511"/>
+            <a:ext cx="1115568" cy="210312"/>
+          </a:xfrm>
+          <a:prstGeom prst="rect">
+            <a:avLst/>
+          </a:prstGeom>
+          <a:noFill/>
+        </p:spPr>
+        <p:txBody>
+          <a:bodyPr wrap="square" lIns="0" rIns="0" tIns="0" bIns="0">
+            <a:spAutoFit/>
+          </a:bodyPr>
+          <a:lstStyle/>
+          <a:p>
+            <a:pPr algn="r"/>
+            <a:r>
+              <a:rPr sz="1150" b="0" i="0">
+                <a:solidFill>
+                  <a:srgbClr val="212529"/>
+                </a:solidFill>
+                <a:latin typeface="Garamond"/>
+              </a:rPr>
+              <a:t>83,692</a:t>
+            </a:r>
+          </a:p>
+        </p:txBody>
+      </p:sp>
+      <p:sp>
+        <p:nvSpPr>
+          <p:cNvPr id="89" name="TextBox 88"/>
+          <p:cNvSpPr txBox="1"/>
+          <p:nvPr/>
+        </p:nvSpPr>
+        <p:spPr>
+          <a:xfrm>
+            <a:off x="6976871" y="4096511"/>
+            <a:ext cx="914400" cy="210312"/>
+          </a:xfrm>
+          <a:prstGeom prst="rect">
+            <a:avLst/>
+          </a:prstGeom>
+          <a:noFill/>
+        </p:spPr>
+        <p:txBody>
+          <a:bodyPr wrap="square" lIns="0" rIns="0" tIns="0" bIns="0">
+            <a:spAutoFit/>
+          </a:bodyPr>
+          <a:lstStyle/>
+          <a:p>
+            <a:pPr algn="r"/>
+            <a:r>
+              <a:rPr sz="1150" b="0" i="0">
+                <a:solidFill>
+                  <a:srgbClr val="212529"/>
+                </a:solidFill>
+                <a:latin typeface="Garamond"/>
+              </a:rPr>
+              <a:t>13,830</a:t>
+            </a:r>
+          </a:p>
+        </p:txBody>
+      </p:sp>
+      <p:sp>
+        <p:nvSpPr>
+          <p:cNvPr id="90" name="TextBox 89"/>
+          <p:cNvSpPr txBox="1"/>
+          <p:nvPr/>
+        </p:nvSpPr>
+        <p:spPr>
+          <a:xfrm>
+            <a:off x="7891271" y="4096511"/>
+            <a:ext cx="1115568" cy="210312"/>
+          </a:xfrm>
+          <a:prstGeom prst="rect">
+            <a:avLst/>
+          </a:prstGeom>
+          <a:noFill/>
+        </p:spPr>
+        <p:txBody>
+          <a:bodyPr wrap="square" lIns="0" rIns="0" tIns="0" bIns="0">
+            <a:spAutoFit/>
+          </a:bodyPr>
+          <a:lstStyle/>
+          <a:p>
+            <a:pPr algn="r"/>
+            <a:r>
+              <a:rPr sz="1150" b="0" i="0">
+                <a:solidFill>
+                  <a:srgbClr val="212529"/>
+                </a:solidFill>
+                <a:latin typeface="Garamond"/>
+              </a:rPr>
+              <a:t>65,152</a:t>
+            </a:r>
+          </a:p>
+        </p:txBody>
+      </p:sp>
+      <p:sp>
+        <p:nvSpPr>
+          <p:cNvPr id="91" name="TextBox 90"/>
+          <p:cNvSpPr txBox="1"/>
+          <p:nvPr/>
+        </p:nvSpPr>
+        <p:spPr>
+          <a:xfrm>
+            <a:off x="731520" y="4326940"/>
+            <a:ext cx="1417320" cy="210312"/>
           </a:xfrm>
           <a:prstGeom prst="rect">
             <a:avLst/>
@@ -9629,7 +10994,7 @@
           <a:p>
             <a:pPr algn="l"/>
             <a:r>
-              <a:rPr sz="1250" b="0" i="0">
+              <a:rPr sz="1150" b="0" i="0">
                 <a:solidFill>
                   <a:srgbClr val="212529"/>
                 </a:solidFill>
@@ -9642,119 +11007,224 @@
       </p:sp>
       <p:sp>
         <p:nvSpPr>
-          <p:cNvPr id="53" name="TextBox 52"/>
-          <p:cNvSpPr txBox="1"/>
-          <p:nvPr/>
-        </p:nvSpPr>
-        <p:spPr>
-          <a:xfrm>
-            <a:off x="4389120" y="4494276"/>
-            <a:ext cx="1417320" cy="228600"/>
-          </a:xfrm>
-          <a:prstGeom prst="rect">
-            <a:avLst/>
-          </a:prstGeom>
-          <a:noFill/>
-        </p:spPr>
-        <p:txBody>
-          <a:bodyPr wrap="square" lIns="0" rIns="0" tIns="0" bIns="0">
-            <a:spAutoFit/>
-          </a:bodyPr>
-          <a:lstStyle/>
-          <a:p>
-            <a:pPr algn="r"/>
-            <a:r>
-              <a:rPr sz="1250" b="0" i="0">
-                <a:solidFill>
-                  <a:srgbClr val="212529"/>
-                </a:solidFill>
-                <a:latin typeface="Garamond"/>
-              </a:rPr>
-              <a:t>101,517</a:t>
-            </a:r>
-          </a:p>
-        </p:txBody>
-      </p:sp>
-      <p:sp>
-        <p:nvSpPr>
-          <p:cNvPr id="54" name="TextBox 53"/>
-          <p:cNvSpPr txBox="1"/>
-          <p:nvPr/>
-        </p:nvSpPr>
-        <p:spPr>
-          <a:xfrm>
-            <a:off x="6126479" y="4494276"/>
-            <a:ext cx="1417320" cy="228600"/>
-          </a:xfrm>
-          <a:prstGeom prst="rect">
-            <a:avLst/>
-          </a:prstGeom>
-          <a:noFill/>
-        </p:spPr>
-        <p:txBody>
-          <a:bodyPr wrap="square" lIns="0" rIns="0" tIns="0" bIns="0">
-            <a:spAutoFit/>
-          </a:bodyPr>
-          <a:lstStyle/>
-          <a:p>
-            <a:pPr algn="r"/>
-            <a:r>
-              <a:rPr sz="1250" b="0" i="0">
-                <a:solidFill>
-                  <a:srgbClr val="212529"/>
-                </a:solidFill>
-                <a:latin typeface="Garamond"/>
-              </a:rPr>
-              <a:t>99,587</a:t>
-            </a:r>
-          </a:p>
-        </p:txBody>
-      </p:sp>
-      <p:sp>
-        <p:nvSpPr>
-          <p:cNvPr id="55" name="TextBox 54"/>
-          <p:cNvSpPr txBox="1"/>
-          <p:nvPr/>
-        </p:nvSpPr>
-        <p:spPr>
-          <a:xfrm>
-            <a:off x="7863840" y="4494276"/>
-            <a:ext cx="1417320" cy="228600"/>
-          </a:xfrm>
-          <a:prstGeom prst="rect">
-            <a:avLst/>
-          </a:prstGeom>
-          <a:noFill/>
-        </p:spPr>
-        <p:txBody>
-          <a:bodyPr wrap="square" lIns="0" rIns="0" tIns="0" bIns="0">
-            <a:spAutoFit/>
-          </a:bodyPr>
-          <a:lstStyle/>
-          <a:p>
-            <a:pPr algn="r"/>
-            <a:r>
-              <a:rPr sz="1250" b="0" i="0">
-                <a:solidFill>
-                  <a:srgbClr val="212529"/>
-                </a:solidFill>
-                <a:latin typeface="Garamond"/>
-              </a:rPr>
-              <a:t>78,629</a:t>
+          <p:cNvPr id="92" name="TextBox 91"/>
+          <p:cNvSpPr txBox="1"/>
+          <p:nvPr/>
+        </p:nvSpPr>
+        <p:spPr>
+          <a:xfrm>
+            <a:off x="2148840" y="4326940"/>
+            <a:ext cx="914400" cy="210312"/>
+          </a:xfrm>
+          <a:prstGeom prst="rect">
+            <a:avLst/>
+          </a:prstGeom>
+          <a:noFill/>
+        </p:spPr>
+        <p:txBody>
+          <a:bodyPr wrap="square" lIns="0" rIns="0" tIns="0" bIns="0">
+            <a:spAutoFit/>
+          </a:bodyPr>
+          <a:lstStyle/>
+          <a:p>
+            <a:pPr algn="r"/>
+            <a:r>
+              <a:rPr sz="1150" b="0" i="0">
+                <a:solidFill>
+                  <a:srgbClr val="212529"/>
+                </a:solidFill>
+                <a:latin typeface="Garamond"/>
+              </a:rPr>
+              <a:t>16,410</a:t>
+            </a:r>
+          </a:p>
+        </p:txBody>
+      </p:sp>
+      <p:sp>
+        <p:nvSpPr>
+          <p:cNvPr id="93" name="TextBox 92"/>
+          <p:cNvSpPr txBox="1"/>
+          <p:nvPr/>
+        </p:nvSpPr>
+        <p:spPr>
+          <a:xfrm>
+            <a:off x="3063240" y="4326940"/>
+            <a:ext cx="1115568" cy="210312"/>
+          </a:xfrm>
+          <a:prstGeom prst="rect">
+            <a:avLst/>
+          </a:prstGeom>
+          <a:noFill/>
+        </p:spPr>
+        <p:txBody>
+          <a:bodyPr wrap="square" lIns="0" rIns="0" tIns="0" bIns="0">
+            <a:spAutoFit/>
+          </a:bodyPr>
+          <a:lstStyle/>
+          <a:p>
+            <a:pPr algn="r"/>
+            <a:r>
+              <a:rPr sz="1150" b="0" i="0">
+                <a:solidFill>
+                  <a:srgbClr val="212529"/>
+                </a:solidFill>
+                <a:latin typeface="Garamond"/>
+              </a:rPr>
+              <a:t>85,107</a:t>
+            </a:r>
+          </a:p>
+        </p:txBody>
+      </p:sp>
+      <p:sp>
+        <p:nvSpPr>
+          <p:cNvPr id="94" name="TextBox 93"/>
+          <p:cNvSpPr txBox="1"/>
+          <p:nvPr/>
+        </p:nvSpPr>
+        <p:spPr>
+          <a:xfrm>
+            <a:off x="4562856" y="4326940"/>
+            <a:ext cx="914400" cy="210312"/>
+          </a:xfrm>
+          <a:prstGeom prst="rect">
+            <a:avLst/>
+          </a:prstGeom>
+          <a:noFill/>
+        </p:spPr>
+        <p:txBody>
+          <a:bodyPr wrap="square" lIns="0" rIns="0" tIns="0" bIns="0">
+            <a:spAutoFit/>
+          </a:bodyPr>
+          <a:lstStyle/>
+          <a:p>
+            <a:pPr algn="r"/>
+            <a:r>
+              <a:rPr sz="1150" b="0" i="0">
+                <a:solidFill>
+                  <a:srgbClr val="212529"/>
+                </a:solidFill>
+                <a:latin typeface="Garamond"/>
+              </a:rPr>
+              <a:t>16,607</a:t>
+            </a:r>
+          </a:p>
+        </p:txBody>
+      </p:sp>
+      <p:sp>
+        <p:nvSpPr>
+          <p:cNvPr id="95" name="TextBox 94"/>
+          <p:cNvSpPr txBox="1"/>
+          <p:nvPr/>
+        </p:nvSpPr>
+        <p:spPr>
+          <a:xfrm>
+            <a:off x="5477256" y="4326940"/>
+            <a:ext cx="1115568" cy="210312"/>
+          </a:xfrm>
+          <a:prstGeom prst="rect">
+            <a:avLst/>
+          </a:prstGeom>
+          <a:noFill/>
+        </p:spPr>
+        <p:txBody>
+          <a:bodyPr wrap="square" lIns="0" rIns="0" tIns="0" bIns="0">
+            <a:spAutoFit/>
+          </a:bodyPr>
+          <a:lstStyle/>
+          <a:p>
+            <a:pPr algn="r"/>
+            <a:r>
+              <a:rPr sz="1150" b="0" i="0">
+                <a:solidFill>
+                  <a:srgbClr val="212529"/>
+                </a:solidFill>
+                <a:latin typeface="Garamond"/>
+              </a:rPr>
+              <a:t>82,980</a:t>
+            </a:r>
+          </a:p>
+        </p:txBody>
+      </p:sp>
+      <p:sp>
+        <p:nvSpPr>
+          <p:cNvPr id="96" name="TextBox 95"/>
+          <p:cNvSpPr txBox="1"/>
+          <p:nvPr/>
+        </p:nvSpPr>
+        <p:spPr>
+          <a:xfrm>
+            <a:off x="6976871" y="4326940"/>
+            <a:ext cx="914400" cy="210312"/>
+          </a:xfrm>
+          <a:prstGeom prst="rect">
+            <a:avLst/>
+          </a:prstGeom>
+          <a:noFill/>
+        </p:spPr>
+        <p:txBody>
+          <a:bodyPr wrap="square" lIns="0" rIns="0" tIns="0" bIns="0">
+            <a:spAutoFit/>
+          </a:bodyPr>
+          <a:lstStyle/>
+          <a:p>
+            <a:pPr algn="r"/>
+            <a:r>
+              <a:rPr sz="1150" b="0" i="0">
+                <a:solidFill>
+                  <a:srgbClr val="212529"/>
+                </a:solidFill>
+                <a:latin typeface="Garamond"/>
+              </a:rPr>
+              <a:t>13,564</a:t>
+            </a:r>
+          </a:p>
+        </p:txBody>
+      </p:sp>
+      <p:sp>
+        <p:nvSpPr>
+          <p:cNvPr id="97" name="TextBox 96"/>
+          <p:cNvSpPr txBox="1"/>
+          <p:nvPr/>
+        </p:nvSpPr>
+        <p:spPr>
+          <a:xfrm>
+            <a:off x="7891271" y="4326940"/>
+            <a:ext cx="1115568" cy="210312"/>
+          </a:xfrm>
+          <a:prstGeom prst="rect">
+            <a:avLst/>
+          </a:prstGeom>
+          <a:noFill/>
+        </p:spPr>
+        <p:txBody>
+          <a:bodyPr wrap="square" lIns="0" rIns="0" tIns="0" bIns="0">
+            <a:spAutoFit/>
+          </a:bodyPr>
+          <a:lstStyle/>
+          <a:p>
+            <a:pPr algn="r"/>
+            <a:r>
+              <a:rPr sz="1150" b="0" i="0">
+                <a:solidFill>
+                  <a:srgbClr val="212529"/>
+                </a:solidFill>
+                <a:latin typeface="Garamond"/>
+              </a:rPr>
+              <a:t>65,065</a:t>
             </a:r>
           </a:p>
         </p:txBody>
       </p:sp>
       <p:cxnSp>
         <p:nvCxnSpPr>
-          <p:cNvPr id="56" name="Connector 55"/>
+          <p:cNvPr id="98" name="Connector 97"/>
           <p:cNvCxnSpPr/>
           <p:nvPr/>
         </p:nvCxnSpPr>
         <p:spPr>
           <a:xfrm>
-            <a:off x="1554480" y="4773168"/>
-            <a:ext cx="8046719" cy="0"/>
+            <a:off x="731520" y="4575657"/>
+            <a:ext cx="8275320" cy="0"/>
           </a:xfrm>
           <a:prstGeom prst="line">
             <a:avLst/>
@@ -9783,14 +11253,14 @@
       </p:cxnSp>
       <p:sp>
         <p:nvSpPr>
-          <p:cNvPr id="57" name="TextBox 56"/>
-          <p:cNvSpPr txBox="1"/>
-          <p:nvPr/>
-        </p:nvSpPr>
-        <p:spPr>
-          <a:xfrm>
-            <a:off x="1554480" y="4846320"/>
-            <a:ext cx="2834640" cy="228600"/>
+          <p:cNvPr id="99" name="TextBox 98"/>
+          <p:cNvSpPr txBox="1"/>
+          <p:nvPr/>
+        </p:nvSpPr>
+        <p:spPr>
+          <a:xfrm>
+            <a:off x="731520" y="4639665"/>
+            <a:ext cx="1417320" cy="210312"/>
           </a:xfrm>
           <a:prstGeom prst="rect">
             <a:avLst/>
@@ -9805,7 +11275,392 @@
           <a:p>
             <a:pPr algn="l"/>
             <a:r>
-              <a:rPr sz="1250" b="1" i="0">
+              <a:rPr sz="1150" b="1" i="0">
+                <a:solidFill>
+                  <a:srgbClr val="212529"/>
+                </a:solidFill>
+                <a:latin typeface="Garamond"/>
+              </a:rPr>
+              <a:t>Sum</a:t>
+            </a:r>
+          </a:p>
+        </p:txBody>
+      </p:sp>
+      <p:sp>
+        <p:nvSpPr>
+          <p:cNvPr id="100" name="TextBox 99"/>
+          <p:cNvSpPr txBox="1"/>
+          <p:nvPr/>
+        </p:nvSpPr>
+        <p:spPr>
+          <a:xfrm>
+            <a:off x="2148840" y="4639665"/>
+            <a:ext cx="914400" cy="210312"/>
+          </a:xfrm>
+          <a:prstGeom prst="rect">
+            <a:avLst/>
+          </a:prstGeom>
+          <a:noFill/>
+        </p:spPr>
+        <p:txBody>
+          <a:bodyPr wrap="square" lIns="0" rIns="0" tIns="0" bIns="0">
+            <a:spAutoFit/>
+          </a:bodyPr>
+          <a:lstStyle/>
+          <a:p>
+            <a:pPr algn="r"/>
+            <a:r>
+              <a:rPr sz="1150" b="1" i="0">
+                <a:solidFill>
+                  <a:srgbClr val="212529"/>
+                </a:solidFill>
+                <a:latin typeface="Garamond"/>
+              </a:rPr>
+              <a:t>203,820</a:t>
+            </a:r>
+          </a:p>
+        </p:txBody>
+      </p:sp>
+      <p:sp>
+        <p:nvSpPr>
+          <p:cNvPr id="101" name="TextBox 100"/>
+          <p:cNvSpPr txBox="1"/>
+          <p:nvPr/>
+        </p:nvSpPr>
+        <p:spPr>
+          <a:xfrm>
+            <a:off x="3063240" y="4639665"/>
+            <a:ext cx="1115568" cy="210312"/>
+          </a:xfrm>
+          <a:prstGeom prst="rect">
+            <a:avLst/>
+          </a:prstGeom>
+          <a:noFill/>
+        </p:spPr>
+        <p:txBody>
+          <a:bodyPr wrap="square" lIns="0" rIns="0" tIns="0" bIns="0">
+            <a:spAutoFit/>
+          </a:bodyPr>
+          <a:lstStyle/>
+          <a:p>
+            <a:pPr algn="r"/>
+            <a:r>
+              <a:rPr sz="1150" b="1" i="0">
+                <a:solidFill>
+                  <a:srgbClr val="212529"/>
+                </a:solidFill>
+                <a:latin typeface="Garamond"/>
+              </a:rPr>
+              <a:t>1,018,012</a:t>
+            </a:r>
+          </a:p>
+        </p:txBody>
+      </p:sp>
+      <p:sp>
+        <p:nvSpPr>
+          <p:cNvPr id="102" name="TextBox 101"/>
+          <p:cNvSpPr txBox="1"/>
+          <p:nvPr/>
+        </p:nvSpPr>
+        <p:spPr>
+          <a:xfrm>
+            <a:off x="4562856" y="4639665"/>
+            <a:ext cx="914400" cy="210312"/>
+          </a:xfrm>
+          <a:prstGeom prst="rect">
+            <a:avLst/>
+          </a:prstGeom>
+          <a:noFill/>
+        </p:spPr>
+        <p:txBody>
+          <a:bodyPr wrap="square" lIns="0" rIns="0" tIns="0" bIns="0">
+            <a:spAutoFit/>
+          </a:bodyPr>
+          <a:lstStyle/>
+          <a:p>
+            <a:pPr algn="r"/>
+            <a:r>
+              <a:rPr sz="1150" b="1" i="0">
+                <a:solidFill>
+                  <a:srgbClr val="212529"/>
+                </a:solidFill>
+                <a:latin typeface="Garamond"/>
+              </a:rPr>
+              <a:t>216,130</a:t>
+            </a:r>
+          </a:p>
+        </p:txBody>
+      </p:sp>
+      <p:sp>
+        <p:nvSpPr>
+          <p:cNvPr id="103" name="TextBox 102"/>
+          <p:cNvSpPr txBox="1"/>
+          <p:nvPr/>
+        </p:nvSpPr>
+        <p:spPr>
+          <a:xfrm>
+            <a:off x="5477256" y="4639665"/>
+            <a:ext cx="1115568" cy="210312"/>
+          </a:xfrm>
+          <a:prstGeom prst="rect">
+            <a:avLst/>
+          </a:prstGeom>
+          <a:noFill/>
+        </p:spPr>
+        <p:txBody>
+          <a:bodyPr wrap="square" lIns="0" rIns="0" tIns="0" bIns="0">
+            <a:spAutoFit/>
+          </a:bodyPr>
+          <a:lstStyle/>
+          <a:p>
+            <a:pPr algn="r"/>
+            <a:r>
+              <a:rPr sz="1150" b="1" i="0">
+                <a:solidFill>
+                  <a:srgbClr val="212529"/>
+                </a:solidFill>
+                <a:latin typeface="Garamond"/>
+              </a:rPr>
+              <a:t>987,732</a:t>
+            </a:r>
+          </a:p>
+        </p:txBody>
+      </p:sp>
+      <p:sp>
+        <p:nvSpPr>
+          <p:cNvPr id="104" name="TextBox 103"/>
+          <p:cNvSpPr txBox="1"/>
+          <p:nvPr/>
+        </p:nvSpPr>
+        <p:spPr>
+          <a:xfrm>
+            <a:off x="6976871" y="4639665"/>
+            <a:ext cx="914400" cy="210312"/>
+          </a:xfrm>
+          <a:prstGeom prst="rect">
+            <a:avLst/>
+          </a:prstGeom>
+          <a:noFill/>
+        </p:spPr>
+        <p:txBody>
+          <a:bodyPr wrap="square" lIns="0" rIns="0" tIns="0" bIns="0">
+            <a:spAutoFit/>
+          </a:bodyPr>
+          <a:lstStyle/>
+          <a:p>
+            <a:pPr algn="r"/>
+            <a:r>
+              <a:rPr sz="1150" b="1" i="0">
+                <a:solidFill>
+                  <a:srgbClr val="212529"/>
+                </a:solidFill>
+                <a:latin typeface="Garamond"/>
+              </a:rPr>
+              <a:t>167,609</a:t>
+            </a:r>
+          </a:p>
+        </p:txBody>
+      </p:sp>
+      <p:sp>
+        <p:nvSpPr>
+          <p:cNvPr id="105" name="TextBox 104"/>
+          <p:cNvSpPr txBox="1"/>
+          <p:nvPr/>
+        </p:nvSpPr>
+        <p:spPr>
+          <a:xfrm>
+            <a:off x="7891271" y="4639665"/>
+            <a:ext cx="1115568" cy="210312"/>
+          </a:xfrm>
+          <a:prstGeom prst="rect">
+            <a:avLst/>
+          </a:prstGeom>
+          <a:noFill/>
+        </p:spPr>
+        <p:txBody>
+          <a:bodyPr wrap="square" lIns="0" rIns="0" tIns="0" bIns="0">
+            <a:spAutoFit/>
+          </a:bodyPr>
+          <a:lstStyle/>
+          <a:p>
+            <a:pPr algn="r"/>
+            <a:r>
+              <a:rPr sz="1150" b="1" i="0">
+                <a:solidFill>
+                  <a:srgbClr val="212529"/>
+                </a:solidFill>
+                <a:latin typeface="Garamond"/>
+              </a:rPr>
+              <a:t>777,288</a:t>
+            </a:r>
+          </a:p>
+        </p:txBody>
+      </p:sp>
+      <p:sp>
+        <p:nvSpPr>
+          <p:cNvPr id="106" name="TextBox 105"/>
+          <p:cNvSpPr txBox="1"/>
+          <p:nvPr/>
+        </p:nvSpPr>
+        <p:spPr>
+          <a:xfrm>
+            <a:off x="731520" y="4886553"/>
+            <a:ext cx="2331720" cy="210312"/>
+          </a:xfrm>
+          <a:prstGeom prst="rect">
+            <a:avLst/>
+          </a:prstGeom>
+          <a:noFill/>
+        </p:spPr>
+        <p:txBody>
+          <a:bodyPr wrap="square" lIns="0" rIns="0" tIns="0" bIns="0">
+            <a:spAutoFit/>
+          </a:bodyPr>
+          <a:lstStyle/>
+          <a:p>
+            <a:pPr algn="l"/>
+            <a:r>
+              <a:rPr sz="1150" b="1" i="0">
+                <a:solidFill>
+                  <a:srgbClr val="212529"/>
+                </a:solidFill>
+                <a:latin typeface="Garamond"/>
+              </a:rPr>
+              <a:t>Distinct persons</a:t>
+            </a:r>
+          </a:p>
+        </p:txBody>
+      </p:sp>
+      <p:sp>
+        <p:nvSpPr>
+          <p:cNvPr id="107" name="TextBox 106"/>
+          <p:cNvSpPr txBox="1"/>
+          <p:nvPr/>
+        </p:nvSpPr>
+        <p:spPr>
+          <a:xfrm>
+            <a:off x="2148840" y="4886553"/>
+            <a:ext cx="2029967" cy="210312"/>
+          </a:xfrm>
+          <a:prstGeom prst="rect">
+            <a:avLst/>
+          </a:prstGeom>
+          <a:noFill/>
+        </p:spPr>
+        <p:txBody>
+          <a:bodyPr wrap="square" lIns="0" rIns="0" tIns="0" bIns="0">
+            <a:spAutoFit/>
+          </a:bodyPr>
+          <a:lstStyle/>
+          <a:p>
+            <a:pPr algn="r"/>
+            <a:r>
+              <a:rPr sz="1150" b="1" i="0">
+                <a:solidFill>
+                  <a:srgbClr val="212529"/>
+                </a:solidFill>
+                <a:latin typeface="Garamond"/>
+              </a:rPr>
+              <a:t>382,007</a:t>
+            </a:r>
+          </a:p>
+        </p:txBody>
+      </p:sp>
+      <p:sp>
+        <p:nvSpPr>
+          <p:cNvPr id="108" name="TextBox 107"/>
+          <p:cNvSpPr txBox="1"/>
+          <p:nvPr/>
+        </p:nvSpPr>
+        <p:spPr>
+          <a:xfrm>
+            <a:off x="4562856" y="4886553"/>
+            <a:ext cx="2029967" cy="210312"/>
+          </a:xfrm>
+          <a:prstGeom prst="rect">
+            <a:avLst/>
+          </a:prstGeom>
+          <a:noFill/>
+        </p:spPr>
+        <p:txBody>
+          <a:bodyPr wrap="square" lIns="0" rIns="0" tIns="0" bIns="0">
+            <a:spAutoFit/>
+          </a:bodyPr>
+          <a:lstStyle/>
+          <a:p>
+            <a:pPr algn="r"/>
+            <a:r>
+              <a:rPr sz="1150" b="1" i="0">
+                <a:solidFill>
+                  <a:srgbClr val="212529"/>
+                </a:solidFill>
+                <a:latin typeface="Garamond"/>
+              </a:rPr>
+              <a:t>381,968</a:t>
+            </a:r>
+          </a:p>
+        </p:txBody>
+      </p:sp>
+      <p:sp>
+        <p:nvSpPr>
+          <p:cNvPr id="109" name="TextBox 108"/>
+          <p:cNvSpPr txBox="1"/>
+          <p:nvPr/>
+        </p:nvSpPr>
+        <p:spPr>
+          <a:xfrm>
+            <a:off x="6976871" y="4886553"/>
+            <a:ext cx="2029967" cy="210312"/>
+          </a:xfrm>
+          <a:prstGeom prst="rect">
+            <a:avLst/>
+          </a:prstGeom>
+          <a:noFill/>
+        </p:spPr>
+        <p:txBody>
+          <a:bodyPr wrap="square" lIns="0" rIns="0" tIns="0" bIns="0">
+            <a:spAutoFit/>
+          </a:bodyPr>
+          <a:lstStyle/>
+          <a:p>
+            <a:pPr algn="r"/>
+            <a:r>
+              <a:rPr sz="1150" b="1" i="0">
+                <a:solidFill>
+                  <a:srgbClr val="212529"/>
+                </a:solidFill>
+                <a:latin typeface="Garamond"/>
+              </a:rPr>
+              <a:t>310,239</a:t>
+            </a:r>
+          </a:p>
+        </p:txBody>
+      </p:sp>
+      <p:sp>
+        <p:nvSpPr>
+          <p:cNvPr id="110" name="TextBox 109"/>
+          <p:cNvSpPr txBox="1"/>
+          <p:nvPr/>
+        </p:nvSpPr>
+        <p:spPr>
+          <a:xfrm>
+            <a:off x="731520" y="5133441"/>
+            <a:ext cx="2880360" cy="210312"/>
+          </a:xfrm>
+          <a:prstGeom prst="rect">
+            <a:avLst/>
+          </a:prstGeom>
+          <a:noFill/>
+        </p:spPr>
+        <p:txBody>
+          <a:bodyPr wrap="square" lIns="0" rIns="0" tIns="0" bIns="0">
+            <a:spAutoFit/>
+          </a:bodyPr>
+          <a:lstStyle/>
+          <a:p>
+            <a:pPr algn="l"/>
+            <a:r>
+              <a:rPr sz="1150" b="1" i="0">
                 <a:solidFill>
                   <a:srgbClr val="102D5E"/>
                 </a:solidFill>
@@ -9818,29 +11673,29 @@
       </p:sp>
       <p:sp>
         <p:nvSpPr>
-          <p:cNvPr id="58" name="TextBox 57"/>
-          <p:cNvSpPr txBox="1"/>
-          <p:nvPr/>
-        </p:nvSpPr>
-        <p:spPr>
-          <a:xfrm>
-            <a:off x="4389120" y="4846320"/>
-            <a:ext cx="1417320" cy="228600"/>
-          </a:xfrm>
-          <a:prstGeom prst="rect">
-            <a:avLst/>
-          </a:prstGeom>
-          <a:noFill/>
-        </p:spPr>
-        <p:txBody>
-          <a:bodyPr wrap="square" lIns="0" rIns="0" tIns="0" bIns="0">
-            <a:spAutoFit/>
-          </a:bodyPr>
-          <a:lstStyle/>
-          <a:p>
-            <a:pPr algn="r"/>
-            <a:r>
-              <a:rPr sz="1250" b="1" i="0">
+          <p:cNvPr id="111" name="TextBox 110"/>
+          <p:cNvSpPr txBox="1"/>
+          <p:nvPr/>
+        </p:nvSpPr>
+        <p:spPr>
+          <a:xfrm>
+            <a:off x="2148840" y="5133441"/>
+            <a:ext cx="2029967" cy="210312"/>
+          </a:xfrm>
+          <a:prstGeom prst="rect">
+            <a:avLst/>
+          </a:prstGeom>
+          <a:noFill/>
+        </p:spPr>
+        <p:txBody>
+          <a:bodyPr wrap="square" lIns="0" rIns="0" tIns="0" bIns="0">
+            <a:spAutoFit/>
+          </a:bodyPr>
+          <a:lstStyle/>
+          <a:p>
+            <a:pPr algn="r"/>
+            <a:r>
+              <a:rPr sz="1150" b="1" i="0">
                 <a:solidFill>
                   <a:srgbClr val="102D5E"/>
                 </a:solidFill>
@@ -9853,29 +11708,29 @@
       </p:sp>
       <p:sp>
         <p:nvSpPr>
-          <p:cNvPr id="59" name="TextBox 58"/>
-          <p:cNvSpPr txBox="1"/>
-          <p:nvPr/>
-        </p:nvSpPr>
-        <p:spPr>
-          <a:xfrm>
-            <a:off x="6126479" y="4846320"/>
-            <a:ext cx="1417320" cy="228600"/>
-          </a:xfrm>
-          <a:prstGeom prst="rect">
-            <a:avLst/>
-          </a:prstGeom>
-          <a:noFill/>
-        </p:spPr>
-        <p:txBody>
-          <a:bodyPr wrap="square" lIns="0" rIns="0" tIns="0" bIns="0">
-            <a:spAutoFit/>
-          </a:bodyPr>
-          <a:lstStyle/>
-          <a:p>
-            <a:pPr algn="r"/>
-            <a:r>
-              <a:rPr sz="1250" b="1" i="0">
+          <p:cNvPr id="112" name="TextBox 111"/>
+          <p:cNvSpPr txBox="1"/>
+          <p:nvPr/>
+        </p:nvSpPr>
+        <p:spPr>
+          <a:xfrm>
+            <a:off x="4562856" y="5133441"/>
+            <a:ext cx="2029967" cy="210312"/>
+          </a:xfrm>
+          <a:prstGeom prst="rect">
+            <a:avLst/>
+          </a:prstGeom>
+          <a:noFill/>
+        </p:spPr>
+        <p:txBody>
+          <a:bodyPr wrap="square" lIns="0" rIns="0" tIns="0" bIns="0">
+            <a:spAutoFit/>
+          </a:bodyPr>
+          <a:lstStyle/>
+          <a:p>
+            <a:pPr algn="r"/>
+            <a:r>
+              <a:rPr sz="1150" b="1" i="0">
                 <a:solidFill>
                   <a:srgbClr val="102D5E"/>
                 </a:solidFill>
@@ -9888,29 +11743,29 @@
       </p:sp>
       <p:sp>
         <p:nvSpPr>
-          <p:cNvPr id="60" name="TextBox 59"/>
-          <p:cNvSpPr txBox="1"/>
-          <p:nvPr/>
-        </p:nvSpPr>
-        <p:spPr>
-          <a:xfrm>
-            <a:off x="7863840" y="4846320"/>
-            <a:ext cx="1417320" cy="228600"/>
-          </a:xfrm>
-          <a:prstGeom prst="rect">
-            <a:avLst/>
-          </a:prstGeom>
-          <a:noFill/>
-        </p:spPr>
-        <p:txBody>
-          <a:bodyPr wrap="square" lIns="0" rIns="0" tIns="0" bIns="0">
-            <a:spAutoFit/>
-          </a:bodyPr>
-          <a:lstStyle/>
-          <a:p>
-            <a:pPr algn="r"/>
-            <a:r>
-              <a:rPr sz="1250" b="1" i="0">
+          <p:cNvPr id="113" name="TextBox 112"/>
+          <p:cNvSpPr txBox="1"/>
+          <p:nvPr/>
+        </p:nvSpPr>
+        <p:spPr>
+          <a:xfrm>
+            <a:off x="6976871" y="5133441"/>
+            <a:ext cx="2029967" cy="210312"/>
+          </a:xfrm>
+          <a:prstGeom prst="rect">
+            <a:avLst/>
+          </a:prstGeom>
+          <a:noFill/>
+        </p:spPr>
+        <p:txBody>
+          <a:bodyPr wrap="square" lIns="0" rIns="0" tIns="0" bIns="0">
+            <a:spAutoFit/>
+          </a:bodyPr>
+          <a:lstStyle/>
+          <a:p>
+            <a:pPr algn="r"/>
+            <a:r>
+              <a:rPr sz="1150" b="1" i="0">
                 <a:solidFill>
                   <a:srgbClr val="102D5E"/>
                 </a:solidFill>
@@ -9923,14 +11778,14 @@
       </p:sp>
       <p:cxnSp>
         <p:nvCxnSpPr>
-          <p:cNvPr id="61" name="Connector 60"/>
+          <p:cNvPr id="114" name="Connector 113"/>
           <p:cNvCxnSpPr/>
           <p:nvPr/>
         </p:nvCxnSpPr>
         <p:spPr>
           <a:xfrm>
-            <a:off x="1554480" y="5120640"/>
-            <a:ext cx="8046719" cy="0"/>
+            <a:off x="731520" y="5380329"/>
+            <a:ext cx="8275320" cy="0"/>
           </a:xfrm>
           <a:prstGeom prst="line">
             <a:avLst/>
@@ -9959,14 +11814,14 @@
       </p:cxnSp>
       <p:sp>
         <p:nvSpPr>
-          <p:cNvPr id="62" name="TextBox 61"/>
-          <p:cNvSpPr txBox="1"/>
-          <p:nvPr/>
-        </p:nvSpPr>
-        <p:spPr>
-          <a:xfrm>
-            <a:off x="1554480" y="5257800"/>
-            <a:ext cx="8778240" cy="192024"/>
+          <p:cNvPr id="115" name="TextBox 114"/>
+          <p:cNvSpPr txBox="1"/>
+          <p:nvPr/>
+        </p:nvSpPr>
+        <p:spPr>
+          <a:xfrm>
+            <a:off x="731520" y="5517489"/>
+            <a:ext cx="10607040" cy="182880"/>
           </a:xfrm>
           <a:prstGeom prst="rect">
             <a:avLst/>
@@ -9981,20 +11836,20 @@
           <a:p>
             <a:pPr algn="l"/>
             <a:r>
-              <a:rPr sz="1050" b="0" i="0">
+              <a:rPr sz="1000" b="0" i="0">
                 <a:solidFill>
                   <a:srgbClr val="6B7480"/>
                 </a:solidFill>
                 <a:latin typeface="Garamond"/>
               </a:rPr>
-              <a:t>Adults (18+) per file, basic monthly interviews. The March supplement contains the March basic respondents plus additional households, mostly from the February and April rotations (the SCHIP expansion) — about 1.45× a single March.</a:t>
-            </a:r>
-          </a:p>
-        </p:txBody>
-      </p:sp>
-      <p:sp>
-        <p:nvSpPr>
-          <p:cNvPr id="63" name="Rounded Rectangle 62">
+              <a:t>Adults (18+). New: first interview ever; seen before: interviewed in an earlier month or in the previous year (each household is interviewed in eight months over two years). New + seen before = that month's interviews; the year's new entrants plus those carried over from the previous year give the distinct persons. The ASEC interviews each person once: the March respondents plus the February–April oversamples, 1.45× a single March.</a:t>
+            </a:r>
+          </a:p>
+        </p:txBody>
+      </p:sp>
+      <p:sp>
+        <p:nvSpPr>
+          <p:cNvPr id="116" name="Rounded Rectangle 115">
             <a:hlinkClick action="ppaction://hlinksldjump" r:id="rId2"/>
           </p:cNvPr>
           <p:cNvSpPr/>

--- a/report/data_cluster/sample_sizes_slides.pptx
+++ b/report/data_cluster/sample_sizes_slides.pptx
@@ -7896,8 +7896,8 @@
         </p:nvCxnSpPr>
         <p:spPr>
           <a:xfrm>
-            <a:off x="731520" y="1143000"/>
-            <a:ext cx="8275320" cy="0"/>
+            <a:off x="502920" y="1143000"/>
+            <a:ext cx="9217152" cy="0"/>
           </a:xfrm>
           <a:prstGeom prst="line">
             <a:avLst/>
@@ -7932,8 +7932,8 @@
         </p:nvSpPr>
         <p:spPr>
           <a:xfrm>
-            <a:off x="2148840" y="1188720"/>
-            <a:ext cx="2029967" cy="237744"/>
+            <a:off x="1691640" y="1188720"/>
+            <a:ext cx="2468880" cy="228600"/>
           </a:xfrm>
           <a:prstGeom prst="rect">
             <a:avLst/>
@@ -7948,7 +7948,7 @@
           <a:p>
             <a:pPr algn="ctr"/>
             <a:r>
-              <a:rPr sz="1300" b="1" i="0">
+              <a:rPr sz="1250" b="1" i="0">
                 <a:solidFill>
                   <a:srgbClr val="212529"/>
                 </a:solidFill>
@@ -7967,23 +7967,23 @@
         </p:nvSpPr>
         <p:spPr>
           <a:xfrm>
-            <a:off x="2148840" y="1463040"/>
-            <a:ext cx="914400" cy="210312"/>
-          </a:xfrm>
-          <a:prstGeom prst="rect">
-            <a:avLst/>
-          </a:prstGeom>
-          <a:noFill/>
-        </p:spPr>
-        <p:txBody>
-          <a:bodyPr wrap="square" lIns="0" rIns="0" tIns="0" bIns="0">
-            <a:spAutoFit/>
-          </a:bodyPr>
-          <a:lstStyle/>
-          <a:p>
-            <a:pPr algn="r"/>
-            <a:r>
-              <a:rPr sz="1150" b="1" i="0">
+            <a:off x="1691640" y="1444752"/>
+            <a:ext cx="731520" cy="182880"/>
+          </a:xfrm>
+          <a:prstGeom prst="rect">
+            <a:avLst/>
+          </a:prstGeom>
+          <a:noFill/>
+        </p:spPr>
+        <p:txBody>
+          <a:bodyPr wrap="square" lIns="0" rIns="0" tIns="0" bIns="0">
+            <a:spAutoFit/>
+          </a:bodyPr>
+          <a:lstStyle/>
+          <a:p>
+            <a:pPr algn="r"/>
+            <a:r>
+              <a:rPr sz="1000" b="1" i="0">
                 <a:solidFill>
                   <a:srgbClr val="6B7480"/>
                 </a:solidFill>
@@ -8002,29 +8002,30 @@
         </p:nvSpPr>
         <p:spPr>
           <a:xfrm>
-            <a:off x="3063240" y="1463040"/>
-            <a:ext cx="1115568" cy="210312"/>
-          </a:xfrm>
-          <a:prstGeom prst="rect">
-            <a:avLst/>
-          </a:prstGeom>
-          <a:noFill/>
-        </p:spPr>
-        <p:txBody>
-          <a:bodyPr wrap="square" lIns="0" rIns="0" tIns="0" bIns="0">
-            <a:spAutoFit/>
-          </a:bodyPr>
-          <a:lstStyle/>
-          <a:p>
-            <a:pPr algn="r"/>
-            <a:r>
-              <a:rPr sz="1150" b="1" i="0">
+            <a:off x="2423160" y="1444752"/>
+            <a:ext cx="868680" cy="182880"/>
+          </a:xfrm>
+          <a:prstGeom prst="rect">
+            <a:avLst/>
+          </a:prstGeom>
+          <a:noFill/>
+        </p:spPr>
+        <p:txBody>
+          <a:bodyPr wrap="square" lIns="0" rIns="0" tIns="0" bIns="0">
+            <a:spAutoFit/>
+          </a:bodyPr>
+          <a:lstStyle/>
+          <a:p>
+            <a:pPr algn="r"/>
+            <a:r>
+              <a:rPr sz="1000" b="1" i="0">
                 <a:solidFill>
                   <a:srgbClr val="6B7480"/>
                 </a:solidFill>
                 <a:latin typeface="Garamond"/>
               </a:rPr>
-              <a:t>Seen before</a:t>
+              <a:t>From last
+year</a:t>
             </a:r>
           </a:p>
         </p:txBody>
@@ -8037,8 +8038,44 @@
         </p:nvSpPr>
         <p:spPr>
           <a:xfrm>
-            <a:off x="4562856" y="1188720"/>
-            <a:ext cx="2029967" cy="237744"/>
+            <a:off x="3291840" y="1444752"/>
+            <a:ext cx="868680" cy="182880"/>
+          </a:xfrm>
+          <a:prstGeom prst="rect">
+            <a:avLst/>
+          </a:prstGeom>
+          <a:noFill/>
+        </p:spPr>
+        <p:txBody>
+          <a:bodyPr wrap="square" lIns="0" rIns="0" tIns="0" bIns="0">
+            <a:spAutoFit/>
+          </a:bodyPr>
+          <a:lstStyle/>
+          <a:p>
+            <a:pPr algn="r"/>
+            <a:r>
+              <a:rPr sz="1000" b="1" i="0">
+                <a:solidFill>
+                  <a:srgbClr val="6B7480"/>
+                </a:solidFill>
+                <a:latin typeface="Garamond"/>
+              </a:rPr>
+              <a:t>From this
+year</a:t>
+            </a:r>
+          </a:p>
+        </p:txBody>
+      </p:sp>
+      <p:sp>
+        <p:nvSpPr>
+          <p:cNvPr id="8" name="TextBox 7"/>
+          <p:cNvSpPr txBox="1"/>
+          <p:nvPr/>
+        </p:nvSpPr>
+        <p:spPr>
+          <a:xfrm>
+            <a:off x="4471416" y="1188720"/>
+            <a:ext cx="2468880" cy="228600"/>
           </a:xfrm>
           <a:prstGeom prst="rect">
             <a:avLst/>
@@ -8053,7 +8090,7 @@
           <a:p>
             <a:pPr algn="ctr"/>
             <a:r>
-              <a:rPr sz="1300" b="1" i="0">
+              <a:rPr sz="1250" b="1" i="0">
                 <a:solidFill>
                   <a:srgbClr val="212529"/>
                 </a:solidFill>
@@ -8066,29 +8103,29 @@
       </p:sp>
       <p:sp>
         <p:nvSpPr>
-          <p:cNvPr id="8" name="TextBox 7"/>
-          <p:cNvSpPr txBox="1"/>
-          <p:nvPr/>
-        </p:nvSpPr>
-        <p:spPr>
-          <a:xfrm>
-            <a:off x="4562856" y="1463040"/>
-            <a:ext cx="914400" cy="210312"/>
-          </a:xfrm>
-          <a:prstGeom prst="rect">
-            <a:avLst/>
-          </a:prstGeom>
-          <a:noFill/>
-        </p:spPr>
-        <p:txBody>
-          <a:bodyPr wrap="square" lIns="0" rIns="0" tIns="0" bIns="0">
-            <a:spAutoFit/>
-          </a:bodyPr>
-          <a:lstStyle/>
-          <a:p>
-            <a:pPr algn="r"/>
-            <a:r>
-              <a:rPr sz="1150" b="1" i="0">
+          <p:cNvPr id="9" name="TextBox 8"/>
+          <p:cNvSpPr txBox="1"/>
+          <p:nvPr/>
+        </p:nvSpPr>
+        <p:spPr>
+          <a:xfrm>
+            <a:off x="4471416" y="1444752"/>
+            <a:ext cx="731520" cy="182880"/>
+          </a:xfrm>
+          <a:prstGeom prst="rect">
+            <a:avLst/>
+          </a:prstGeom>
+          <a:noFill/>
+        </p:spPr>
+        <p:txBody>
+          <a:bodyPr wrap="square" lIns="0" rIns="0" tIns="0" bIns="0">
+            <a:spAutoFit/>
+          </a:bodyPr>
+          <a:lstStyle/>
+          <a:p>
+            <a:pPr algn="r"/>
+            <a:r>
+              <a:rPr sz="1000" b="1" i="0">
                 <a:solidFill>
                   <a:srgbClr val="6B7480"/>
                 </a:solidFill>
@@ -8101,49 +8138,86 @@
       </p:sp>
       <p:sp>
         <p:nvSpPr>
-          <p:cNvPr id="9" name="TextBox 8"/>
-          <p:cNvSpPr txBox="1"/>
-          <p:nvPr/>
-        </p:nvSpPr>
-        <p:spPr>
-          <a:xfrm>
-            <a:off x="5477256" y="1463040"/>
-            <a:ext cx="1115568" cy="210312"/>
-          </a:xfrm>
-          <a:prstGeom prst="rect">
-            <a:avLst/>
-          </a:prstGeom>
-          <a:noFill/>
-        </p:spPr>
-        <p:txBody>
-          <a:bodyPr wrap="square" lIns="0" rIns="0" tIns="0" bIns="0">
-            <a:spAutoFit/>
-          </a:bodyPr>
-          <a:lstStyle/>
-          <a:p>
-            <a:pPr algn="r"/>
-            <a:r>
-              <a:rPr sz="1150" b="1" i="0">
+          <p:cNvPr id="10" name="TextBox 9"/>
+          <p:cNvSpPr txBox="1"/>
+          <p:nvPr/>
+        </p:nvSpPr>
+        <p:spPr>
+          <a:xfrm>
+            <a:off x="5202936" y="1444752"/>
+            <a:ext cx="868680" cy="182880"/>
+          </a:xfrm>
+          <a:prstGeom prst="rect">
+            <a:avLst/>
+          </a:prstGeom>
+          <a:noFill/>
+        </p:spPr>
+        <p:txBody>
+          <a:bodyPr wrap="square" lIns="0" rIns="0" tIns="0" bIns="0">
+            <a:spAutoFit/>
+          </a:bodyPr>
+          <a:lstStyle/>
+          <a:p>
+            <a:pPr algn="r"/>
+            <a:r>
+              <a:rPr sz="1000" b="1" i="0">
                 <a:solidFill>
                   <a:srgbClr val="6B7480"/>
                 </a:solidFill>
                 <a:latin typeface="Garamond"/>
               </a:rPr>
-              <a:t>Seen before</a:t>
-            </a:r>
-          </a:p>
-        </p:txBody>
-      </p:sp>
-      <p:sp>
-        <p:nvSpPr>
-          <p:cNvPr id="10" name="TextBox 9"/>
-          <p:cNvSpPr txBox="1"/>
-          <p:nvPr/>
-        </p:nvSpPr>
-        <p:spPr>
-          <a:xfrm>
-            <a:off x="6976871" y="1188720"/>
-            <a:ext cx="2029967" cy="237744"/>
+              <a:t>From last
+year</a:t>
+            </a:r>
+          </a:p>
+        </p:txBody>
+      </p:sp>
+      <p:sp>
+        <p:nvSpPr>
+          <p:cNvPr id="11" name="TextBox 10"/>
+          <p:cNvSpPr txBox="1"/>
+          <p:nvPr/>
+        </p:nvSpPr>
+        <p:spPr>
+          <a:xfrm>
+            <a:off x="6071616" y="1444752"/>
+            <a:ext cx="868680" cy="182880"/>
+          </a:xfrm>
+          <a:prstGeom prst="rect">
+            <a:avLst/>
+          </a:prstGeom>
+          <a:noFill/>
+        </p:spPr>
+        <p:txBody>
+          <a:bodyPr wrap="square" lIns="0" rIns="0" tIns="0" bIns="0">
+            <a:spAutoFit/>
+          </a:bodyPr>
+          <a:lstStyle/>
+          <a:p>
+            <a:pPr algn="r"/>
+            <a:r>
+              <a:rPr sz="1000" b="1" i="0">
+                <a:solidFill>
+                  <a:srgbClr val="6B7480"/>
+                </a:solidFill>
+                <a:latin typeface="Garamond"/>
+              </a:rPr>
+              <a:t>From this
+year</a:t>
+            </a:r>
+          </a:p>
+        </p:txBody>
+      </p:sp>
+      <p:sp>
+        <p:nvSpPr>
+          <p:cNvPr id="12" name="TextBox 11"/>
+          <p:cNvSpPr txBox="1"/>
+          <p:nvPr/>
+        </p:nvSpPr>
+        <p:spPr>
+          <a:xfrm>
+            <a:off x="7251192" y="1188720"/>
+            <a:ext cx="2468880" cy="228600"/>
           </a:xfrm>
           <a:prstGeom prst="rect">
             <a:avLst/>
@@ -8158,7 +8232,7 @@
           <a:p>
             <a:pPr algn="ctr"/>
             <a:r>
-              <a:rPr sz="1300" b="1" i="0">
+              <a:rPr sz="1250" b="1" i="0">
                 <a:solidFill>
                   <a:srgbClr val="212529"/>
                 </a:solidFill>
@@ -8171,29 +8245,29 @@
       </p:sp>
       <p:sp>
         <p:nvSpPr>
-          <p:cNvPr id="11" name="TextBox 10"/>
-          <p:cNvSpPr txBox="1"/>
-          <p:nvPr/>
-        </p:nvSpPr>
-        <p:spPr>
-          <a:xfrm>
-            <a:off x="6976871" y="1463040"/>
-            <a:ext cx="914400" cy="210312"/>
-          </a:xfrm>
-          <a:prstGeom prst="rect">
-            <a:avLst/>
-          </a:prstGeom>
-          <a:noFill/>
-        </p:spPr>
-        <p:txBody>
-          <a:bodyPr wrap="square" lIns="0" rIns="0" tIns="0" bIns="0">
-            <a:spAutoFit/>
-          </a:bodyPr>
-          <a:lstStyle/>
-          <a:p>
-            <a:pPr algn="r"/>
-            <a:r>
-              <a:rPr sz="1150" b="1" i="0">
+          <p:cNvPr id="13" name="TextBox 12"/>
+          <p:cNvSpPr txBox="1"/>
+          <p:nvPr/>
+        </p:nvSpPr>
+        <p:spPr>
+          <a:xfrm>
+            <a:off x="7251192" y="1444752"/>
+            <a:ext cx="731520" cy="182880"/>
+          </a:xfrm>
+          <a:prstGeom prst="rect">
+            <a:avLst/>
+          </a:prstGeom>
+          <a:noFill/>
+        </p:spPr>
+        <p:txBody>
+          <a:bodyPr wrap="square" lIns="0" rIns="0" tIns="0" bIns="0">
+            <a:spAutoFit/>
+          </a:bodyPr>
+          <a:lstStyle/>
+          <a:p>
+            <a:pPr algn="r"/>
+            <a:r>
+              <a:rPr sz="1000" b="1" i="0">
                 <a:solidFill>
                   <a:srgbClr val="6B7480"/>
                 </a:solidFill>
@@ -8206,49 +8280,86 @@
       </p:sp>
       <p:sp>
         <p:nvSpPr>
-          <p:cNvPr id="12" name="TextBox 11"/>
-          <p:cNvSpPr txBox="1"/>
-          <p:nvPr/>
-        </p:nvSpPr>
-        <p:spPr>
-          <a:xfrm>
-            <a:off x="7891271" y="1463040"/>
-            <a:ext cx="1115568" cy="210312"/>
-          </a:xfrm>
-          <a:prstGeom prst="rect">
-            <a:avLst/>
-          </a:prstGeom>
-          <a:noFill/>
-        </p:spPr>
-        <p:txBody>
-          <a:bodyPr wrap="square" lIns="0" rIns="0" tIns="0" bIns="0">
-            <a:spAutoFit/>
-          </a:bodyPr>
-          <a:lstStyle/>
-          <a:p>
-            <a:pPr algn="r"/>
-            <a:r>
-              <a:rPr sz="1150" b="1" i="0">
+          <p:cNvPr id="14" name="TextBox 13"/>
+          <p:cNvSpPr txBox="1"/>
+          <p:nvPr/>
+        </p:nvSpPr>
+        <p:spPr>
+          <a:xfrm>
+            <a:off x="7982712" y="1444752"/>
+            <a:ext cx="868680" cy="182880"/>
+          </a:xfrm>
+          <a:prstGeom prst="rect">
+            <a:avLst/>
+          </a:prstGeom>
+          <a:noFill/>
+        </p:spPr>
+        <p:txBody>
+          <a:bodyPr wrap="square" lIns="0" rIns="0" tIns="0" bIns="0">
+            <a:spAutoFit/>
+          </a:bodyPr>
+          <a:lstStyle/>
+          <a:p>
+            <a:pPr algn="r"/>
+            <a:r>
+              <a:rPr sz="1000" b="1" i="0">
                 <a:solidFill>
                   <a:srgbClr val="6B7480"/>
                 </a:solidFill>
                 <a:latin typeface="Garamond"/>
               </a:rPr>
-              <a:t>Seen before</a:t>
+              <a:t>From last
+year</a:t>
+            </a:r>
+          </a:p>
+        </p:txBody>
+      </p:sp>
+      <p:sp>
+        <p:nvSpPr>
+          <p:cNvPr id="15" name="TextBox 14"/>
+          <p:cNvSpPr txBox="1"/>
+          <p:nvPr/>
+        </p:nvSpPr>
+        <p:spPr>
+          <a:xfrm>
+            <a:off x="8851392" y="1444752"/>
+            <a:ext cx="868680" cy="182880"/>
+          </a:xfrm>
+          <a:prstGeom prst="rect">
+            <a:avLst/>
+          </a:prstGeom>
+          <a:noFill/>
+        </p:spPr>
+        <p:txBody>
+          <a:bodyPr wrap="square" lIns="0" rIns="0" tIns="0" bIns="0">
+            <a:spAutoFit/>
+          </a:bodyPr>
+          <a:lstStyle/>
+          <a:p>
+            <a:pPr algn="r"/>
+            <a:r>
+              <a:rPr sz="1000" b="1" i="0">
+                <a:solidFill>
+                  <a:srgbClr val="6B7480"/>
+                </a:solidFill>
+                <a:latin typeface="Garamond"/>
+              </a:rPr>
+              <a:t>From this
+year</a:t>
             </a:r>
           </a:p>
         </p:txBody>
       </p:sp>
       <p:cxnSp>
         <p:nvCxnSpPr>
-          <p:cNvPr id="13" name="Connector 12"/>
+          <p:cNvPr id="16" name="Connector 15"/>
           <p:cNvCxnSpPr/>
           <p:nvPr/>
         </p:nvCxnSpPr>
         <p:spPr>
           <a:xfrm>
-            <a:off x="731520" y="1719072"/>
-            <a:ext cx="8275320" cy="0"/>
+            <a:off x="502920" y="1901952"/>
+            <a:ext cx="9217152" cy="0"/>
           </a:xfrm>
           <a:prstGeom prst="line">
             <a:avLst/>
@@ -8277,14 +8388,14 @@
       </p:cxnSp>
       <p:sp>
         <p:nvSpPr>
-          <p:cNvPr id="14" name="TextBox 13"/>
-          <p:cNvSpPr txBox="1"/>
-          <p:nvPr/>
-        </p:nvSpPr>
-        <p:spPr>
-          <a:xfrm>
-            <a:off x="731520" y="1792224"/>
-            <a:ext cx="1417320" cy="210312"/>
+          <p:cNvPr id="17" name="TextBox 16"/>
+          <p:cNvSpPr txBox="1"/>
+          <p:nvPr/>
+        </p:nvSpPr>
+        <p:spPr>
+          <a:xfrm>
+            <a:off x="502920" y="1975104"/>
+            <a:ext cx="1188720" cy="192024"/>
           </a:xfrm>
           <a:prstGeom prst="rect">
             <a:avLst/>
@@ -8299,7 +8410,7 @@
           <a:p>
             <a:pPr algn="l"/>
             <a:r>
-              <a:rPr sz="1150" b="0" i="0">
+              <a:rPr sz="1050" b="0" i="0">
                 <a:solidFill>
                   <a:srgbClr val="212529"/>
                 </a:solidFill>
@@ -8312,29 +8423,29 @@
       </p:sp>
       <p:sp>
         <p:nvSpPr>
-          <p:cNvPr id="15" name="TextBox 14"/>
-          <p:cNvSpPr txBox="1"/>
-          <p:nvPr/>
-        </p:nvSpPr>
-        <p:spPr>
-          <a:xfrm>
-            <a:off x="2148840" y="1792224"/>
-            <a:ext cx="914400" cy="210312"/>
-          </a:xfrm>
-          <a:prstGeom prst="rect">
-            <a:avLst/>
-          </a:prstGeom>
-          <a:noFill/>
-        </p:spPr>
-        <p:txBody>
-          <a:bodyPr wrap="square" lIns="0" rIns="0" tIns="0" bIns="0">
-            <a:spAutoFit/>
-          </a:bodyPr>
-          <a:lstStyle/>
-          <a:p>
-            <a:pPr algn="r"/>
-            <a:r>
-              <a:rPr sz="1150" b="0" i="0">
+          <p:cNvPr id="18" name="TextBox 17"/>
+          <p:cNvSpPr txBox="1"/>
+          <p:nvPr/>
+        </p:nvSpPr>
+        <p:spPr>
+          <a:xfrm>
+            <a:off x="1691640" y="1975104"/>
+            <a:ext cx="731520" cy="192024"/>
+          </a:xfrm>
+          <a:prstGeom prst="rect">
+            <a:avLst/>
+          </a:prstGeom>
+          <a:noFill/>
+        </p:spPr>
+        <p:txBody>
+          <a:bodyPr wrap="square" lIns="0" rIns="0" tIns="0" bIns="0">
+            <a:spAutoFit/>
+          </a:bodyPr>
+          <a:lstStyle/>
+          <a:p>
+            <a:pPr algn="r"/>
+            <a:r>
+              <a:rPr sz="1050" b="0" i="0">
                 <a:solidFill>
                   <a:srgbClr val="212529"/>
                 </a:solidFill>
@@ -8347,29 +8458,29 @@
       </p:sp>
       <p:sp>
         <p:nvSpPr>
-          <p:cNvPr id="16" name="TextBox 15"/>
-          <p:cNvSpPr txBox="1"/>
-          <p:nvPr/>
-        </p:nvSpPr>
-        <p:spPr>
-          <a:xfrm>
-            <a:off x="3063240" y="1792224"/>
-            <a:ext cx="1115568" cy="210312"/>
-          </a:xfrm>
-          <a:prstGeom prst="rect">
-            <a:avLst/>
-          </a:prstGeom>
-          <a:noFill/>
-        </p:spPr>
-        <p:txBody>
-          <a:bodyPr wrap="square" lIns="0" rIns="0" tIns="0" bIns="0">
-            <a:spAutoFit/>
-          </a:bodyPr>
-          <a:lstStyle/>
-          <a:p>
-            <a:pPr algn="r"/>
-            <a:r>
-              <a:rPr sz="1150" b="0" i="0">
+          <p:cNvPr id="19" name="TextBox 18"/>
+          <p:cNvSpPr txBox="1"/>
+          <p:nvPr/>
+        </p:nvSpPr>
+        <p:spPr>
+          <a:xfrm>
+            <a:off x="2423160" y="1975104"/>
+            <a:ext cx="868680" cy="192024"/>
+          </a:xfrm>
+          <a:prstGeom prst="rect">
+            <a:avLst/>
+          </a:prstGeom>
+          <a:noFill/>
+        </p:spPr>
+        <p:txBody>
+          <a:bodyPr wrap="square" lIns="0" rIns="0" tIns="0" bIns="0">
+            <a:spAutoFit/>
+          </a:bodyPr>
+          <a:lstStyle/>
+          <a:p>
+            <a:pPr algn="r"/>
+            <a:r>
+              <a:rPr sz="1050" b="0" i="0">
                 <a:solidFill>
                   <a:srgbClr val="212529"/>
                 </a:solidFill>
@@ -8382,29 +8493,64 @@
       </p:sp>
       <p:sp>
         <p:nvSpPr>
-          <p:cNvPr id="17" name="TextBox 16"/>
-          <p:cNvSpPr txBox="1"/>
-          <p:nvPr/>
-        </p:nvSpPr>
-        <p:spPr>
-          <a:xfrm>
-            <a:off x="4562856" y="1792224"/>
-            <a:ext cx="914400" cy="210312"/>
-          </a:xfrm>
-          <a:prstGeom prst="rect">
-            <a:avLst/>
-          </a:prstGeom>
-          <a:noFill/>
-        </p:spPr>
-        <p:txBody>
-          <a:bodyPr wrap="square" lIns="0" rIns="0" tIns="0" bIns="0">
-            <a:spAutoFit/>
-          </a:bodyPr>
-          <a:lstStyle/>
-          <a:p>
-            <a:pPr algn="r"/>
-            <a:r>
-              <a:rPr sz="1150" b="0" i="0">
+          <p:cNvPr id="20" name="TextBox 19"/>
+          <p:cNvSpPr txBox="1"/>
+          <p:nvPr/>
+        </p:nvSpPr>
+        <p:spPr>
+          <a:xfrm>
+            <a:off x="3291840" y="1975104"/>
+            <a:ext cx="868680" cy="192024"/>
+          </a:xfrm>
+          <a:prstGeom prst="rect">
+            <a:avLst/>
+          </a:prstGeom>
+          <a:noFill/>
+        </p:spPr>
+        <p:txBody>
+          <a:bodyPr wrap="square" lIns="0" rIns="0" tIns="0" bIns="0">
+            <a:spAutoFit/>
+          </a:bodyPr>
+          <a:lstStyle/>
+          <a:p>
+            <a:pPr algn="r"/>
+            <a:r>
+              <a:rPr sz="1050" b="0" i="0">
+                <a:solidFill>
+                  <a:srgbClr val="212529"/>
+                </a:solidFill>
+                <a:latin typeface="Garamond"/>
+              </a:rPr>
+              <a:t>0</a:t>
+            </a:r>
+          </a:p>
+        </p:txBody>
+      </p:sp>
+      <p:sp>
+        <p:nvSpPr>
+          <p:cNvPr id="21" name="TextBox 20"/>
+          <p:cNvSpPr txBox="1"/>
+          <p:nvPr/>
+        </p:nvSpPr>
+        <p:spPr>
+          <a:xfrm>
+            <a:off x="4471416" y="1975104"/>
+            <a:ext cx="731520" cy="192024"/>
+          </a:xfrm>
+          <a:prstGeom prst="rect">
+            <a:avLst/>
+          </a:prstGeom>
+          <a:noFill/>
+        </p:spPr>
+        <p:txBody>
+          <a:bodyPr wrap="square" lIns="0" rIns="0" tIns="0" bIns="0">
+            <a:spAutoFit/>
+          </a:bodyPr>
+          <a:lstStyle/>
+          <a:p>
+            <a:pPr algn="r"/>
+            <a:r>
+              <a:rPr sz="1050" b="0" i="0">
                 <a:solidFill>
                   <a:srgbClr val="212529"/>
                 </a:solidFill>
@@ -8417,29 +8563,29 @@
       </p:sp>
       <p:sp>
         <p:nvSpPr>
-          <p:cNvPr id="18" name="TextBox 17"/>
-          <p:cNvSpPr txBox="1"/>
-          <p:nvPr/>
-        </p:nvSpPr>
-        <p:spPr>
-          <a:xfrm>
-            <a:off x="5477256" y="1792224"/>
-            <a:ext cx="1115568" cy="210312"/>
-          </a:xfrm>
-          <a:prstGeom prst="rect">
-            <a:avLst/>
-          </a:prstGeom>
-          <a:noFill/>
-        </p:spPr>
-        <p:txBody>
-          <a:bodyPr wrap="square" lIns="0" rIns="0" tIns="0" bIns="0">
-            <a:spAutoFit/>
-          </a:bodyPr>
-          <a:lstStyle/>
-          <a:p>
-            <a:pPr algn="r"/>
-            <a:r>
-              <a:rPr sz="1150" b="0" i="0">
+          <p:cNvPr id="22" name="TextBox 21"/>
+          <p:cNvSpPr txBox="1"/>
+          <p:nvPr/>
+        </p:nvSpPr>
+        <p:spPr>
+          <a:xfrm>
+            <a:off x="5202936" y="1975104"/>
+            <a:ext cx="868680" cy="192024"/>
+          </a:xfrm>
+          <a:prstGeom prst="rect">
+            <a:avLst/>
+          </a:prstGeom>
+          <a:noFill/>
+        </p:spPr>
+        <p:txBody>
+          <a:bodyPr wrap="square" lIns="0" rIns="0" tIns="0" bIns="0">
+            <a:spAutoFit/>
+          </a:bodyPr>
+          <a:lstStyle/>
+          <a:p>
+            <a:pPr algn="r"/>
+            <a:r>
+              <a:rPr sz="1050" b="0" i="0">
                 <a:solidFill>
                   <a:srgbClr val="212529"/>
                 </a:solidFill>
@@ -8452,29 +8598,64 @@
       </p:sp>
       <p:sp>
         <p:nvSpPr>
-          <p:cNvPr id="19" name="TextBox 18"/>
-          <p:cNvSpPr txBox="1"/>
-          <p:nvPr/>
-        </p:nvSpPr>
-        <p:spPr>
-          <a:xfrm>
-            <a:off x="6976871" y="1792224"/>
-            <a:ext cx="914400" cy="210312"/>
-          </a:xfrm>
-          <a:prstGeom prst="rect">
-            <a:avLst/>
-          </a:prstGeom>
-          <a:noFill/>
-        </p:spPr>
-        <p:txBody>
-          <a:bodyPr wrap="square" lIns="0" rIns="0" tIns="0" bIns="0">
-            <a:spAutoFit/>
-          </a:bodyPr>
-          <a:lstStyle/>
-          <a:p>
-            <a:pPr algn="r"/>
-            <a:r>
-              <a:rPr sz="1150" b="0" i="0">
+          <p:cNvPr id="23" name="TextBox 22"/>
+          <p:cNvSpPr txBox="1"/>
+          <p:nvPr/>
+        </p:nvSpPr>
+        <p:spPr>
+          <a:xfrm>
+            <a:off x="6071616" y="1975104"/>
+            <a:ext cx="868680" cy="192024"/>
+          </a:xfrm>
+          <a:prstGeom prst="rect">
+            <a:avLst/>
+          </a:prstGeom>
+          <a:noFill/>
+        </p:spPr>
+        <p:txBody>
+          <a:bodyPr wrap="square" lIns="0" rIns="0" tIns="0" bIns="0">
+            <a:spAutoFit/>
+          </a:bodyPr>
+          <a:lstStyle/>
+          <a:p>
+            <a:pPr algn="r"/>
+            <a:r>
+              <a:rPr sz="1050" b="0" i="0">
+                <a:solidFill>
+                  <a:srgbClr val="212529"/>
+                </a:solidFill>
+                <a:latin typeface="Garamond"/>
+              </a:rPr>
+              <a:t>0</a:t>
+            </a:r>
+          </a:p>
+        </p:txBody>
+      </p:sp>
+      <p:sp>
+        <p:nvSpPr>
+          <p:cNvPr id="24" name="TextBox 23"/>
+          <p:cNvSpPr txBox="1"/>
+          <p:nvPr/>
+        </p:nvSpPr>
+        <p:spPr>
+          <a:xfrm>
+            <a:off x="7251192" y="1975104"/>
+            <a:ext cx="731520" cy="192024"/>
+          </a:xfrm>
+          <a:prstGeom prst="rect">
+            <a:avLst/>
+          </a:prstGeom>
+          <a:noFill/>
+        </p:spPr>
+        <p:txBody>
+          <a:bodyPr wrap="square" lIns="0" rIns="0" tIns="0" bIns="0">
+            <a:spAutoFit/>
+          </a:bodyPr>
+          <a:lstStyle/>
+          <a:p>
+            <a:pPr algn="r"/>
+            <a:r>
+              <a:rPr sz="1050" b="0" i="0">
                 <a:solidFill>
                   <a:srgbClr val="212529"/>
                 </a:solidFill>
@@ -8487,29 +8668,29 @@
       </p:sp>
       <p:sp>
         <p:nvSpPr>
-          <p:cNvPr id="20" name="TextBox 19"/>
-          <p:cNvSpPr txBox="1"/>
-          <p:nvPr/>
-        </p:nvSpPr>
-        <p:spPr>
-          <a:xfrm>
-            <a:off x="7891271" y="1792224"/>
-            <a:ext cx="1115568" cy="210312"/>
-          </a:xfrm>
-          <a:prstGeom prst="rect">
-            <a:avLst/>
-          </a:prstGeom>
-          <a:noFill/>
-        </p:spPr>
-        <p:txBody>
-          <a:bodyPr wrap="square" lIns="0" rIns="0" tIns="0" bIns="0">
-            <a:spAutoFit/>
-          </a:bodyPr>
-          <a:lstStyle/>
-          <a:p>
-            <a:pPr algn="r"/>
-            <a:r>
-              <a:rPr sz="1150" b="0" i="0">
+          <p:cNvPr id="25" name="TextBox 24"/>
+          <p:cNvSpPr txBox="1"/>
+          <p:nvPr/>
+        </p:nvSpPr>
+        <p:spPr>
+          <a:xfrm>
+            <a:off x="7982712" y="1975104"/>
+            <a:ext cx="868680" cy="192024"/>
+          </a:xfrm>
+          <a:prstGeom prst="rect">
+            <a:avLst/>
+          </a:prstGeom>
+          <a:noFill/>
+        </p:spPr>
+        <p:txBody>
+          <a:bodyPr wrap="square" lIns="0" rIns="0" tIns="0" bIns="0">
+            <a:spAutoFit/>
+          </a:bodyPr>
+          <a:lstStyle/>
+          <a:p>
+            <a:pPr algn="r"/>
+            <a:r>
+              <a:rPr sz="1050" b="0" i="0">
                 <a:solidFill>
                   <a:srgbClr val="212529"/>
                 </a:solidFill>
@@ -8522,14 +8703,49 @@
       </p:sp>
       <p:sp>
         <p:nvSpPr>
-          <p:cNvPr id="21" name="TextBox 20"/>
-          <p:cNvSpPr txBox="1"/>
-          <p:nvPr/>
-        </p:nvSpPr>
-        <p:spPr>
-          <a:xfrm>
-            <a:off x="731520" y="2022652"/>
-            <a:ext cx="1417320" cy="210312"/>
+          <p:cNvPr id="26" name="TextBox 25"/>
+          <p:cNvSpPr txBox="1"/>
+          <p:nvPr/>
+        </p:nvSpPr>
+        <p:spPr>
+          <a:xfrm>
+            <a:off x="8851392" y="1975104"/>
+            <a:ext cx="868680" cy="192024"/>
+          </a:xfrm>
+          <a:prstGeom prst="rect">
+            <a:avLst/>
+          </a:prstGeom>
+          <a:noFill/>
+        </p:spPr>
+        <p:txBody>
+          <a:bodyPr wrap="square" lIns="0" rIns="0" tIns="0" bIns="0">
+            <a:spAutoFit/>
+          </a:bodyPr>
+          <a:lstStyle/>
+          <a:p>
+            <a:pPr algn="r"/>
+            <a:r>
+              <a:rPr sz="1050" b="0" i="0">
+                <a:solidFill>
+                  <a:srgbClr val="212529"/>
+                </a:solidFill>
+                <a:latin typeface="Garamond"/>
+              </a:rPr>
+              <a:t>0</a:t>
+            </a:r>
+          </a:p>
+        </p:txBody>
+      </p:sp>
+      <p:sp>
+        <p:nvSpPr>
+          <p:cNvPr id="27" name="TextBox 26"/>
+          <p:cNvSpPr txBox="1"/>
+          <p:nvPr/>
+        </p:nvSpPr>
+        <p:spPr>
+          <a:xfrm>
+            <a:off x="502920" y="2192731"/>
+            <a:ext cx="1188720" cy="192024"/>
           </a:xfrm>
           <a:prstGeom prst="rect">
             <a:avLst/>
@@ -8544,7 +8760,7 @@
           <a:p>
             <a:pPr algn="l"/>
             <a:r>
-              <a:rPr sz="1150" b="0" i="0">
+              <a:rPr sz="1050" b="0" i="0">
                 <a:solidFill>
                   <a:srgbClr val="212529"/>
                 </a:solidFill>
@@ -8557,29 +8773,29 @@
       </p:sp>
       <p:sp>
         <p:nvSpPr>
-          <p:cNvPr id="22" name="TextBox 21"/>
-          <p:cNvSpPr txBox="1"/>
-          <p:nvPr/>
-        </p:nvSpPr>
-        <p:spPr>
-          <a:xfrm>
-            <a:off x="2148840" y="2022652"/>
-            <a:ext cx="914400" cy="210312"/>
-          </a:xfrm>
-          <a:prstGeom prst="rect">
-            <a:avLst/>
-          </a:prstGeom>
-          <a:noFill/>
-        </p:spPr>
-        <p:txBody>
-          <a:bodyPr wrap="square" lIns="0" rIns="0" tIns="0" bIns="0">
-            <a:spAutoFit/>
-          </a:bodyPr>
-          <a:lstStyle/>
-          <a:p>
-            <a:pPr algn="r"/>
-            <a:r>
-              <a:rPr sz="1150" b="0" i="0">
+          <p:cNvPr id="28" name="TextBox 27"/>
+          <p:cNvSpPr txBox="1"/>
+          <p:nvPr/>
+        </p:nvSpPr>
+        <p:spPr>
+          <a:xfrm>
+            <a:off x="1691640" y="2192731"/>
+            <a:ext cx="731520" cy="192024"/>
+          </a:xfrm>
+          <a:prstGeom prst="rect">
+            <a:avLst/>
+          </a:prstGeom>
+          <a:noFill/>
+        </p:spPr>
+        <p:txBody>
+          <a:bodyPr wrap="square" lIns="0" rIns="0" tIns="0" bIns="0">
+            <a:spAutoFit/>
+          </a:bodyPr>
+          <a:lstStyle/>
+          <a:p>
+            <a:pPr algn="r"/>
+            <a:r>
+              <a:rPr sz="1050" b="0" i="0">
                 <a:solidFill>
                   <a:srgbClr val="212529"/>
                 </a:solidFill>
@@ -8592,64 +8808,99 @@
       </p:sp>
       <p:sp>
         <p:nvSpPr>
-          <p:cNvPr id="23" name="TextBox 22"/>
-          <p:cNvSpPr txBox="1"/>
-          <p:nvPr/>
-        </p:nvSpPr>
-        <p:spPr>
-          <a:xfrm>
-            <a:off x="3063240" y="2022652"/>
-            <a:ext cx="1115568" cy="210312"/>
-          </a:xfrm>
-          <a:prstGeom prst="rect">
-            <a:avLst/>
-          </a:prstGeom>
-          <a:noFill/>
-        </p:spPr>
-        <p:txBody>
-          <a:bodyPr wrap="square" lIns="0" rIns="0" tIns="0" bIns="0">
-            <a:spAutoFit/>
-          </a:bodyPr>
-          <a:lstStyle/>
-          <a:p>
-            <a:pPr algn="r"/>
-            <a:r>
-              <a:rPr sz="1150" b="0" i="0">
-                <a:solidFill>
-                  <a:srgbClr val="212529"/>
-                </a:solidFill>
-                <a:latin typeface="Garamond"/>
-              </a:rPr>
-              <a:t>84,314</a:t>
-            </a:r>
-          </a:p>
-        </p:txBody>
-      </p:sp>
-      <p:sp>
-        <p:nvSpPr>
-          <p:cNvPr id="24" name="TextBox 23"/>
-          <p:cNvSpPr txBox="1"/>
-          <p:nvPr/>
-        </p:nvSpPr>
-        <p:spPr>
-          <a:xfrm>
-            <a:off x="4562856" y="2022652"/>
-            <a:ext cx="914400" cy="210312"/>
-          </a:xfrm>
-          <a:prstGeom prst="rect">
-            <a:avLst/>
-          </a:prstGeom>
-          <a:noFill/>
-        </p:spPr>
-        <p:txBody>
-          <a:bodyPr wrap="square" lIns="0" rIns="0" tIns="0" bIns="0">
-            <a:spAutoFit/>
-          </a:bodyPr>
-          <a:lstStyle/>
-          <a:p>
-            <a:pPr algn="r"/>
-            <a:r>
-              <a:rPr sz="1150" b="0" i="0">
+          <p:cNvPr id="29" name="TextBox 28"/>
+          <p:cNvSpPr txBox="1"/>
+          <p:nvPr/>
+        </p:nvSpPr>
+        <p:spPr>
+          <a:xfrm>
+            <a:off x="2423160" y="2192731"/>
+            <a:ext cx="868680" cy="192024"/>
+          </a:xfrm>
+          <a:prstGeom prst="rect">
+            <a:avLst/>
+          </a:prstGeom>
+          <a:noFill/>
+        </p:spPr>
+        <p:txBody>
+          <a:bodyPr wrap="square" lIns="0" rIns="0" tIns="0" bIns="0">
+            <a:spAutoFit/>
+          </a:bodyPr>
+          <a:lstStyle/>
+          <a:p>
+            <a:pPr algn="r"/>
+            <a:r>
+              <a:rPr sz="1050" b="0" i="0">
+                <a:solidFill>
+                  <a:srgbClr val="212529"/>
+                </a:solidFill>
+                <a:latin typeface="Garamond"/>
+              </a:rPr>
+              <a:t>11,921</a:t>
+            </a:r>
+          </a:p>
+        </p:txBody>
+      </p:sp>
+      <p:sp>
+        <p:nvSpPr>
+          <p:cNvPr id="30" name="TextBox 29"/>
+          <p:cNvSpPr txBox="1"/>
+          <p:nvPr/>
+        </p:nvSpPr>
+        <p:spPr>
+          <a:xfrm>
+            <a:off x="3291840" y="2192731"/>
+            <a:ext cx="868680" cy="192024"/>
+          </a:xfrm>
+          <a:prstGeom prst="rect">
+            <a:avLst/>
+          </a:prstGeom>
+          <a:noFill/>
+        </p:spPr>
+        <p:txBody>
+          <a:bodyPr wrap="square" lIns="0" rIns="0" tIns="0" bIns="0">
+            <a:spAutoFit/>
+          </a:bodyPr>
+          <a:lstStyle/>
+          <a:p>
+            <a:pPr algn="r"/>
+            <a:r>
+              <a:rPr sz="1050" b="0" i="0">
+                <a:solidFill>
+                  <a:srgbClr val="212529"/>
+                </a:solidFill>
+                <a:latin typeface="Garamond"/>
+              </a:rPr>
+              <a:t>72,393</a:t>
+            </a:r>
+          </a:p>
+        </p:txBody>
+      </p:sp>
+      <p:sp>
+        <p:nvSpPr>
+          <p:cNvPr id="31" name="TextBox 30"/>
+          <p:cNvSpPr txBox="1"/>
+          <p:nvPr/>
+        </p:nvSpPr>
+        <p:spPr>
+          <a:xfrm>
+            <a:off x="4471416" y="2192731"/>
+            <a:ext cx="731520" cy="192024"/>
+          </a:xfrm>
+          <a:prstGeom prst="rect">
+            <a:avLst/>
+          </a:prstGeom>
+          <a:noFill/>
+        </p:spPr>
+        <p:txBody>
+          <a:bodyPr wrap="square" lIns="0" rIns="0" tIns="0" bIns="0">
+            <a:spAutoFit/>
+          </a:bodyPr>
+          <a:lstStyle/>
+          <a:p>
+            <a:pPr algn="r"/>
+            <a:r>
+              <a:rPr sz="1050" b="0" i="0">
                 <a:solidFill>
                   <a:srgbClr val="212529"/>
                 </a:solidFill>
@@ -8662,64 +8913,99 @@
       </p:sp>
       <p:sp>
         <p:nvSpPr>
-          <p:cNvPr id="25" name="TextBox 24"/>
-          <p:cNvSpPr txBox="1"/>
-          <p:nvPr/>
-        </p:nvSpPr>
-        <p:spPr>
-          <a:xfrm>
-            <a:off x="5477256" y="2022652"/>
-            <a:ext cx="1115568" cy="210312"/>
-          </a:xfrm>
-          <a:prstGeom prst="rect">
-            <a:avLst/>
-          </a:prstGeom>
-          <a:noFill/>
-        </p:spPr>
-        <p:txBody>
-          <a:bodyPr wrap="square" lIns="0" rIns="0" tIns="0" bIns="0">
-            <a:spAutoFit/>
-          </a:bodyPr>
-          <a:lstStyle/>
-          <a:p>
-            <a:pPr algn="r"/>
-            <a:r>
-              <a:rPr sz="1150" b="0" i="0">
-                <a:solidFill>
-                  <a:srgbClr val="212529"/>
-                </a:solidFill>
-                <a:latin typeface="Garamond"/>
-              </a:rPr>
-              <a:t>82,455</a:t>
-            </a:r>
-          </a:p>
-        </p:txBody>
-      </p:sp>
-      <p:sp>
-        <p:nvSpPr>
-          <p:cNvPr id="26" name="TextBox 25"/>
-          <p:cNvSpPr txBox="1"/>
-          <p:nvPr/>
-        </p:nvSpPr>
-        <p:spPr>
-          <a:xfrm>
-            <a:off x="6976871" y="2022652"/>
-            <a:ext cx="914400" cy="210312"/>
-          </a:xfrm>
-          <a:prstGeom prst="rect">
-            <a:avLst/>
-          </a:prstGeom>
-          <a:noFill/>
-        </p:spPr>
-        <p:txBody>
-          <a:bodyPr wrap="square" lIns="0" rIns="0" tIns="0" bIns="0">
-            <a:spAutoFit/>
-          </a:bodyPr>
-          <a:lstStyle/>
-          <a:p>
-            <a:pPr algn="r"/>
-            <a:r>
-              <a:rPr sz="1150" b="0" i="0">
+          <p:cNvPr id="32" name="TextBox 31"/>
+          <p:cNvSpPr txBox="1"/>
+          <p:nvPr/>
+        </p:nvSpPr>
+        <p:spPr>
+          <a:xfrm>
+            <a:off x="5202936" y="2192731"/>
+            <a:ext cx="868680" cy="192024"/>
+          </a:xfrm>
+          <a:prstGeom prst="rect">
+            <a:avLst/>
+          </a:prstGeom>
+          <a:noFill/>
+        </p:spPr>
+        <p:txBody>
+          <a:bodyPr wrap="square" lIns="0" rIns="0" tIns="0" bIns="0">
+            <a:spAutoFit/>
+          </a:bodyPr>
+          <a:lstStyle/>
+          <a:p>
+            <a:pPr algn="r"/>
+            <a:r>
+              <a:rPr sz="1050" b="0" i="0">
+                <a:solidFill>
+                  <a:srgbClr val="212529"/>
+                </a:solidFill>
+                <a:latin typeface="Garamond"/>
+              </a:rPr>
+              <a:t>10,291</a:t>
+            </a:r>
+          </a:p>
+        </p:txBody>
+      </p:sp>
+      <p:sp>
+        <p:nvSpPr>
+          <p:cNvPr id="33" name="TextBox 32"/>
+          <p:cNvSpPr txBox="1"/>
+          <p:nvPr/>
+        </p:nvSpPr>
+        <p:spPr>
+          <a:xfrm>
+            <a:off x="6071616" y="2192731"/>
+            <a:ext cx="868680" cy="192024"/>
+          </a:xfrm>
+          <a:prstGeom prst="rect">
+            <a:avLst/>
+          </a:prstGeom>
+          <a:noFill/>
+        </p:spPr>
+        <p:txBody>
+          <a:bodyPr wrap="square" lIns="0" rIns="0" tIns="0" bIns="0">
+            <a:spAutoFit/>
+          </a:bodyPr>
+          <a:lstStyle/>
+          <a:p>
+            <a:pPr algn="r"/>
+            <a:r>
+              <a:rPr sz="1050" b="0" i="0">
+                <a:solidFill>
+                  <a:srgbClr val="212529"/>
+                </a:solidFill>
+                <a:latin typeface="Garamond"/>
+              </a:rPr>
+              <a:t>72,164</a:t>
+            </a:r>
+          </a:p>
+        </p:txBody>
+      </p:sp>
+      <p:sp>
+        <p:nvSpPr>
+          <p:cNvPr id="34" name="TextBox 33"/>
+          <p:cNvSpPr txBox="1"/>
+          <p:nvPr/>
+        </p:nvSpPr>
+        <p:spPr>
+          <a:xfrm>
+            <a:off x="7251192" y="2192731"/>
+            <a:ext cx="731520" cy="192024"/>
+          </a:xfrm>
+          <a:prstGeom prst="rect">
+            <a:avLst/>
+          </a:prstGeom>
+          <a:noFill/>
+        </p:spPr>
+        <p:txBody>
+          <a:bodyPr wrap="square" lIns="0" rIns="0" tIns="0" bIns="0">
+            <a:spAutoFit/>
+          </a:bodyPr>
+          <a:lstStyle/>
+          <a:p>
+            <a:pPr algn="r"/>
+            <a:r>
+              <a:rPr sz="1050" b="0" i="0">
                 <a:solidFill>
                   <a:srgbClr val="212529"/>
                 </a:solidFill>
@@ -8732,49 +9018,84 @@
       </p:sp>
       <p:sp>
         <p:nvSpPr>
-          <p:cNvPr id="27" name="TextBox 26"/>
-          <p:cNvSpPr txBox="1"/>
-          <p:nvPr/>
-        </p:nvSpPr>
-        <p:spPr>
-          <a:xfrm>
-            <a:off x="7891271" y="2022652"/>
-            <a:ext cx="1115568" cy="210312"/>
-          </a:xfrm>
-          <a:prstGeom prst="rect">
-            <a:avLst/>
-          </a:prstGeom>
-          <a:noFill/>
-        </p:spPr>
-        <p:txBody>
-          <a:bodyPr wrap="square" lIns="0" rIns="0" tIns="0" bIns="0">
-            <a:spAutoFit/>
-          </a:bodyPr>
-          <a:lstStyle/>
-          <a:p>
-            <a:pPr algn="r"/>
-            <a:r>
-              <a:rPr sz="1150" b="0" i="0">
-                <a:solidFill>
-                  <a:srgbClr val="212529"/>
-                </a:solidFill>
-                <a:latin typeface="Garamond"/>
-              </a:rPr>
-              <a:t>63,939</a:t>
-            </a:r>
-          </a:p>
-        </p:txBody>
-      </p:sp>
-      <p:sp>
-        <p:nvSpPr>
-          <p:cNvPr id="28" name="TextBox 27"/>
-          <p:cNvSpPr txBox="1"/>
-          <p:nvPr/>
-        </p:nvSpPr>
-        <p:spPr>
-          <a:xfrm>
-            <a:off x="731520" y="2253081"/>
-            <a:ext cx="1417320" cy="210312"/>
+          <p:cNvPr id="35" name="TextBox 34"/>
+          <p:cNvSpPr txBox="1"/>
+          <p:nvPr/>
+        </p:nvSpPr>
+        <p:spPr>
+          <a:xfrm>
+            <a:off x="7982712" y="2192731"/>
+            <a:ext cx="868680" cy="192024"/>
+          </a:xfrm>
+          <a:prstGeom prst="rect">
+            <a:avLst/>
+          </a:prstGeom>
+          <a:noFill/>
+        </p:spPr>
+        <p:txBody>
+          <a:bodyPr wrap="square" lIns="0" rIns="0" tIns="0" bIns="0">
+            <a:spAutoFit/>
+          </a:bodyPr>
+          <a:lstStyle/>
+          <a:p>
+            <a:pPr algn="r"/>
+            <a:r>
+              <a:rPr sz="1050" b="0" i="0">
+                <a:solidFill>
+                  <a:srgbClr val="212529"/>
+                </a:solidFill>
+                <a:latin typeface="Garamond"/>
+              </a:rPr>
+              <a:t>10,610</a:t>
+            </a:r>
+          </a:p>
+        </p:txBody>
+      </p:sp>
+      <p:sp>
+        <p:nvSpPr>
+          <p:cNvPr id="36" name="TextBox 35"/>
+          <p:cNvSpPr txBox="1"/>
+          <p:nvPr/>
+        </p:nvSpPr>
+        <p:spPr>
+          <a:xfrm>
+            <a:off x="8851392" y="2192731"/>
+            <a:ext cx="868680" cy="192024"/>
+          </a:xfrm>
+          <a:prstGeom prst="rect">
+            <a:avLst/>
+          </a:prstGeom>
+          <a:noFill/>
+        </p:spPr>
+        <p:txBody>
+          <a:bodyPr wrap="square" lIns="0" rIns="0" tIns="0" bIns="0">
+            <a:spAutoFit/>
+          </a:bodyPr>
+          <a:lstStyle/>
+          <a:p>
+            <a:pPr algn="r"/>
+            <a:r>
+              <a:rPr sz="1050" b="0" i="0">
+                <a:solidFill>
+                  <a:srgbClr val="212529"/>
+                </a:solidFill>
+                <a:latin typeface="Garamond"/>
+              </a:rPr>
+              <a:t>53,329</a:t>
+            </a:r>
+          </a:p>
+        </p:txBody>
+      </p:sp>
+      <p:sp>
+        <p:nvSpPr>
+          <p:cNvPr id="37" name="TextBox 36"/>
+          <p:cNvSpPr txBox="1"/>
+          <p:nvPr/>
+        </p:nvSpPr>
+        <p:spPr>
+          <a:xfrm>
+            <a:off x="502920" y="2410358"/>
+            <a:ext cx="1188720" cy="192024"/>
           </a:xfrm>
           <a:prstGeom prst="rect">
             <a:avLst/>
@@ -8789,7 +9110,7 @@
           <a:p>
             <a:pPr algn="l"/>
             <a:r>
-              <a:rPr sz="1150" b="1" i="0">
+              <a:rPr sz="1050" b="1" i="0">
                 <a:solidFill>
                   <a:srgbClr val="102D5E"/>
                 </a:solidFill>
@@ -8802,29 +9123,29 @@
       </p:sp>
       <p:sp>
         <p:nvSpPr>
-          <p:cNvPr id="29" name="TextBox 28"/>
-          <p:cNvSpPr txBox="1"/>
-          <p:nvPr/>
-        </p:nvSpPr>
-        <p:spPr>
-          <a:xfrm>
-            <a:off x="2148840" y="2253081"/>
-            <a:ext cx="914400" cy="210312"/>
-          </a:xfrm>
-          <a:prstGeom prst="rect">
-            <a:avLst/>
-          </a:prstGeom>
-          <a:noFill/>
-        </p:spPr>
-        <p:txBody>
-          <a:bodyPr wrap="square" lIns="0" rIns="0" tIns="0" bIns="0">
-            <a:spAutoFit/>
-          </a:bodyPr>
-          <a:lstStyle/>
-          <a:p>
-            <a:pPr algn="r"/>
-            <a:r>
-              <a:rPr sz="1150" b="1" i="0">
+          <p:cNvPr id="38" name="TextBox 37"/>
+          <p:cNvSpPr txBox="1"/>
+          <p:nvPr/>
+        </p:nvSpPr>
+        <p:spPr>
+          <a:xfrm>
+            <a:off x="1691640" y="2410358"/>
+            <a:ext cx="731520" cy="192024"/>
+          </a:xfrm>
+          <a:prstGeom prst="rect">
+            <a:avLst/>
+          </a:prstGeom>
+          <a:noFill/>
+        </p:spPr>
+        <p:txBody>
+          <a:bodyPr wrap="square" lIns="0" rIns="0" tIns="0" bIns="0">
+            <a:spAutoFit/>
+          </a:bodyPr>
+          <a:lstStyle/>
+          <a:p>
+            <a:pPr algn="r"/>
+            <a:r>
+              <a:rPr sz="1050" b="1" i="0">
                 <a:solidFill>
                   <a:srgbClr val="102D5E"/>
                 </a:solidFill>
@@ -8837,69 +9158,104 @@
       </p:sp>
       <p:sp>
         <p:nvSpPr>
-          <p:cNvPr id="30" name="TextBox 29"/>
-          <p:cNvSpPr txBox="1"/>
-          <p:nvPr/>
-        </p:nvSpPr>
-        <p:spPr>
-          <a:xfrm>
-            <a:off x="3063240" y="2253081"/>
-            <a:ext cx="1115568" cy="210312"/>
-          </a:xfrm>
-          <a:prstGeom prst="rect">
-            <a:avLst/>
-          </a:prstGeom>
-          <a:noFill/>
-        </p:spPr>
-        <p:txBody>
-          <a:bodyPr wrap="square" lIns="0" rIns="0" tIns="0" bIns="0">
-            <a:spAutoFit/>
-          </a:bodyPr>
-          <a:lstStyle/>
-          <a:p>
-            <a:pPr algn="r"/>
-            <a:r>
-              <a:rPr sz="1150" b="1" i="0">
+          <p:cNvPr id="39" name="TextBox 38"/>
+          <p:cNvSpPr txBox="1"/>
+          <p:nvPr/>
+        </p:nvSpPr>
+        <p:spPr>
+          <a:xfrm>
+            <a:off x="2423160" y="2410358"/>
+            <a:ext cx="868680" cy="192024"/>
+          </a:xfrm>
+          <a:prstGeom prst="rect">
+            <a:avLst/>
+          </a:prstGeom>
+          <a:noFill/>
+        </p:spPr>
+        <p:txBody>
+          <a:bodyPr wrap="square" lIns="0" rIns="0" tIns="0" bIns="0">
+            <a:spAutoFit/>
+          </a:bodyPr>
+          <a:lstStyle/>
+          <a:p>
+            <a:pPr algn="r"/>
+            <a:r>
+              <a:rPr sz="1050" b="1" i="0">
                 <a:solidFill>
                   <a:srgbClr val="102D5E"/>
                 </a:solidFill>
                 <a:latin typeface="Garamond"/>
               </a:rPr>
-              <a:t>83,742</a:t>
-            </a:r>
-          </a:p>
-        </p:txBody>
-      </p:sp>
-      <p:sp>
-        <p:nvSpPr>
-          <p:cNvPr id="31" name="TextBox 30"/>
-          <p:cNvSpPr txBox="1"/>
-          <p:nvPr/>
-        </p:nvSpPr>
-        <p:spPr>
-          <a:xfrm>
-            <a:off x="4562856" y="2253081"/>
-            <a:ext cx="914400" cy="210312"/>
-          </a:xfrm>
-          <a:prstGeom prst="rect">
-            <a:avLst/>
-          </a:prstGeom>
-          <a:noFill/>
-        </p:spPr>
-        <p:txBody>
-          <a:bodyPr wrap="square" lIns="0" rIns="0" tIns="0" bIns="0">
-            <a:spAutoFit/>
-          </a:bodyPr>
-          <a:lstStyle/>
-          <a:p>
-            <a:pPr algn="r"/>
-            <a:r>
-              <a:rPr sz="1150" b="1" i="0">
+              <a:t>11,070</a:t>
+            </a:r>
+          </a:p>
+        </p:txBody>
+      </p:sp>
+      <p:sp>
+        <p:nvSpPr>
+          <p:cNvPr id="40" name="TextBox 39"/>
+          <p:cNvSpPr txBox="1"/>
+          <p:nvPr/>
+        </p:nvSpPr>
+        <p:spPr>
+          <a:xfrm>
+            <a:off x="3291840" y="2410358"/>
+            <a:ext cx="868680" cy="192024"/>
+          </a:xfrm>
+          <a:prstGeom prst="rect">
+            <a:avLst/>
+          </a:prstGeom>
+          <a:noFill/>
+        </p:spPr>
+        <p:txBody>
+          <a:bodyPr wrap="square" lIns="0" rIns="0" tIns="0" bIns="0">
+            <a:spAutoFit/>
+          </a:bodyPr>
+          <a:lstStyle/>
+          <a:p>
+            <a:pPr algn="r"/>
+            <a:r>
+              <a:rPr sz="1050" b="1" i="0">
                 <a:solidFill>
                   <a:srgbClr val="102D5E"/>
                 </a:solidFill>
                 <a:latin typeface="Garamond"/>
               </a:rPr>
+              <a:t>72,672</a:t>
+            </a:r>
+          </a:p>
+        </p:txBody>
+      </p:sp>
+      <p:sp>
+        <p:nvSpPr>
+          <p:cNvPr id="41" name="TextBox 40"/>
+          <p:cNvSpPr txBox="1"/>
+          <p:nvPr/>
+        </p:nvSpPr>
+        <p:spPr>
+          <a:xfrm>
+            <a:off x="4471416" y="2410358"/>
+            <a:ext cx="731520" cy="192024"/>
+          </a:xfrm>
+          <a:prstGeom prst="rect">
+            <a:avLst/>
+          </a:prstGeom>
+          <a:noFill/>
+        </p:spPr>
+        <p:txBody>
+          <a:bodyPr wrap="square" lIns="0" rIns="0" tIns="0" bIns="0">
+            <a:spAutoFit/>
+          </a:bodyPr>
+          <a:lstStyle/>
+          <a:p>
+            <a:pPr algn="r"/>
+            <a:r>
+              <a:rPr sz="1050" b="1" i="0">
+                <a:solidFill>
+                  <a:srgbClr val="102D5E"/>
+                </a:solidFill>
+                <a:latin typeface="Garamond"/>
+              </a:rPr>
               <a:t>18,705</a:t>
             </a:r>
           </a:p>
@@ -8907,69 +9263,104 @@
       </p:sp>
       <p:sp>
         <p:nvSpPr>
-          <p:cNvPr id="32" name="TextBox 31"/>
-          <p:cNvSpPr txBox="1"/>
-          <p:nvPr/>
-        </p:nvSpPr>
-        <p:spPr>
-          <a:xfrm>
-            <a:off x="5477256" y="2253081"/>
-            <a:ext cx="1115568" cy="210312"/>
-          </a:xfrm>
-          <a:prstGeom prst="rect">
-            <a:avLst/>
-          </a:prstGeom>
-          <a:noFill/>
-        </p:spPr>
-        <p:txBody>
-          <a:bodyPr wrap="square" lIns="0" rIns="0" tIns="0" bIns="0">
-            <a:spAutoFit/>
-          </a:bodyPr>
-          <a:lstStyle/>
-          <a:p>
-            <a:pPr algn="r"/>
-            <a:r>
-              <a:rPr sz="1150" b="1" i="0">
+          <p:cNvPr id="42" name="TextBox 41"/>
+          <p:cNvSpPr txBox="1"/>
+          <p:nvPr/>
+        </p:nvSpPr>
+        <p:spPr>
+          <a:xfrm>
+            <a:off x="5202936" y="2410358"/>
+            <a:ext cx="868680" cy="192024"/>
+          </a:xfrm>
+          <a:prstGeom prst="rect">
+            <a:avLst/>
+          </a:prstGeom>
+          <a:noFill/>
+        </p:spPr>
+        <p:txBody>
+          <a:bodyPr wrap="square" lIns="0" rIns="0" tIns="0" bIns="0">
+            <a:spAutoFit/>
+          </a:bodyPr>
+          <a:lstStyle/>
+          <a:p>
+            <a:pPr algn="r"/>
+            <a:r>
+              <a:rPr sz="1050" b="1" i="0">
                 <a:solidFill>
                   <a:srgbClr val="102D5E"/>
                 </a:solidFill>
                 <a:latin typeface="Garamond"/>
               </a:rPr>
-              <a:t>80,876</a:t>
-            </a:r>
-          </a:p>
-        </p:txBody>
-      </p:sp>
-      <p:sp>
-        <p:nvSpPr>
-          <p:cNvPr id="33" name="TextBox 32"/>
-          <p:cNvSpPr txBox="1"/>
-          <p:nvPr/>
-        </p:nvSpPr>
-        <p:spPr>
-          <a:xfrm>
-            <a:off x="6976871" y="2253081"/>
-            <a:ext cx="914400" cy="210312"/>
-          </a:xfrm>
-          <a:prstGeom prst="rect">
-            <a:avLst/>
-          </a:prstGeom>
-          <a:noFill/>
-        </p:spPr>
-        <p:txBody>
-          <a:bodyPr wrap="square" lIns="0" rIns="0" tIns="0" bIns="0">
-            <a:spAutoFit/>
-          </a:bodyPr>
-          <a:lstStyle/>
-          <a:p>
-            <a:pPr algn="r"/>
-            <a:r>
-              <a:rPr sz="1150" b="1" i="0">
+              <a:t>9,461</a:t>
+            </a:r>
+          </a:p>
+        </p:txBody>
+      </p:sp>
+      <p:sp>
+        <p:nvSpPr>
+          <p:cNvPr id="43" name="TextBox 42"/>
+          <p:cNvSpPr txBox="1"/>
+          <p:nvPr/>
+        </p:nvSpPr>
+        <p:spPr>
+          <a:xfrm>
+            <a:off x="6071616" y="2410358"/>
+            <a:ext cx="868680" cy="192024"/>
+          </a:xfrm>
+          <a:prstGeom prst="rect">
+            <a:avLst/>
+          </a:prstGeom>
+          <a:noFill/>
+        </p:spPr>
+        <p:txBody>
+          <a:bodyPr wrap="square" lIns="0" rIns="0" tIns="0" bIns="0">
+            <a:spAutoFit/>
+          </a:bodyPr>
+          <a:lstStyle/>
+          <a:p>
+            <a:pPr algn="r"/>
+            <a:r>
+              <a:rPr sz="1050" b="1" i="0">
                 <a:solidFill>
                   <a:srgbClr val="102D5E"/>
                 </a:solidFill>
                 <a:latin typeface="Garamond"/>
               </a:rPr>
+              <a:t>71,415</a:t>
+            </a:r>
+          </a:p>
+        </p:txBody>
+      </p:sp>
+      <p:sp>
+        <p:nvSpPr>
+          <p:cNvPr id="44" name="TextBox 43"/>
+          <p:cNvSpPr txBox="1"/>
+          <p:nvPr/>
+        </p:nvSpPr>
+        <p:spPr>
+          <a:xfrm>
+            <a:off x="7251192" y="2410358"/>
+            <a:ext cx="731520" cy="192024"/>
+          </a:xfrm>
+          <a:prstGeom prst="rect">
+            <a:avLst/>
+          </a:prstGeom>
+          <a:noFill/>
+        </p:spPr>
+        <p:txBody>
+          <a:bodyPr wrap="square" lIns="0" rIns="0" tIns="0" bIns="0">
+            <a:spAutoFit/>
+          </a:bodyPr>
+          <a:lstStyle/>
+          <a:p>
+            <a:pPr algn="r"/>
+            <a:r>
+              <a:rPr sz="1050" b="1" i="0">
+                <a:solidFill>
+                  <a:srgbClr val="102D5E"/>
+                </a:solidFill>
+                <a:latin typeface="Garamond"/>
+              </a:rPr>
               <a:t>13,399</a:t>
             </a:r>
           </a:p>
@@ -8977,49 +9368,84 @@
       </p:sp>
       <p:sp>
         <p:nvSpPr>
-          <p:cNvPr id="34" name="TextBox 33"/>
-          <p:cNvSpPr txBox="1"/>
-          <p:nvPr/>
-        </p:nvSpPr>
-        <p:spPr>
-          <a:xfrm>
-            <a:off x="7891271" y="2253081"/>
-            <a:ext cx="1115568" cy="210312"/>
-          </a:xfrm>
-          <a:prstGeom prst="rect">
-            <a:avLst/>
-          </a:prstGeom>
-          <a:noFill/>
-        </p:spPr>
-        <p:txBody>
-          <a:bodyPr wrap="square" lIns="0" rIns="0" tIns="0" bIns="0">
-            <a:spAutoFit/>
-          </a:bodyPr>
-          <a:lstStyle/>
-          <a:p>
-            <a:pPr algn="r"/>
-            <a:r>
-              <a:rPr sz="1150" b="1" i="0">
+          <p:cNvPr id="45" name="TextBox 44"/>
+          <p:cNvSpPr txBox="1"/>
+          <p:nvPr/>
+        </p:nvSpPr>
+        <p:spPr>
+          <a:xfrm>
+            <a:off x="7982712" y="2410358"/>
+            <a:ext cx="868680" cy="192024"/>
+          </a:xfrm>
+          <a:prstGeom prst="rect">
+            <a:avLst/>
+          </a:prstGeom>
+          <a:noFill/>
+        </p:spPr>
+        <p:txBody>
+          <a:bodyPr wrap="square" lIns="0" rIns="0" tIns="0" bIns="0">
+            <a:spAutoFit/>
+          </a:bodyPr>
+          <a:lstStyle/>
+          <a:p>
+            <a:pPr algn="r"/>
+            <a:r>
+              <a:rPr sz="1050" b="1" i="0">
                 <a:solidFill>
                   <a:srgbClr val="102D5E"/>
                 </a:solidFill>
                 <a:latin typeface="Garamond"/>
               </a:rPr>
-              <a:t>62,583</a:t>
-            </a:r>
-          </a:p>
-        </p:txBody>
-      </p:sp>
-      <p:sp>
-        <p:nvSpPr>
-          <p:cNvPr id="35" name="TextBox 34"/>
-          <p:cNvSpPr txBox="1"/>
-          <p:nvPr/>
-        </p:nvSpPr>
-        <p:spPr>
-          <a:xfrm>
-            <a:off x="731520" y="2483510"/>
-            <a:ext cx="1417320" cy="210312"/>
+              <a:t>8,506</a:t>
+            </a:r>
+          </a:p>
+        </p:txBody>
+      </p:sp>
+      <p:sp>
+        <p:nvSpPr>
+          <p:cNvPr id="46" name="TextBox 45"/>
+          <p:cNvSpPr txBox="1"/>
+          <p:nvPr/>
+        </p:nvSpPr>
+        <p:spPr>
+          <a:xfrm>
+            <a:off x="8851392" y="2410358"/>
+            <a:ext cx="868680" cy="192024"/>
+          </a:xfrm>
+          <a:prstGeom prst="rect">
+            <a:avLst/>
+          </a:prstGeom>
+          <a:noFill/>
+        </p:spPr>
+        <p:txBody>
+          <a:bodyPr wrap="square" lIns="0" rIns="0" tIns="0" bIns="0">
+            <a:spAutoFit/>
+          </a:bodyPr>
+          <a:lstStyle/>
+          <a:p>
+            <a:pPr algn="r"/>
+            <a:r>
+              <a:rPr sz="1050" b="1" i="0">
+                <a:solidFill>
+                  <a:srgbClr val="102D5E"/>
+                </a:solidFill>
+                <a:latin typeface="Garamond"/>
+              </a:rPr>
+              <a:t>54,077</a:t>
+            </a:r>
+          </a:p>
+        </p:txBody>
+      </p:sp>
+      <p:sp>
+        <p:nvSpPr>
+          <p:cNvPr id="47" name="TextBox 46"/>
+          <p:cNvSpPr txBox="1"/>
+          <p:nvPr/>
+        </p:nvSpPr>
+        <p:spPr>
+          <a:xfrm>
+            <a:off x="502920" y="2627985"/>
+            <a:ext cx="1188720" cy="192024"/>
           </a:xfrm>
           <a:prstGeom prst="rect">
             <a:avLst/>
@@ -9034,7 +9460,7 @@
           <a:p>
             <a:pPr algn="l"/>
             <a:r>
-              <a:rPr sz="1150" b="0" i="0">
+              <a:rPr sz="1050" b="0" i="0">
                 <a:solidFill>
                   <a:srgbClr val="212529"/>
                 </a:solidFill>
@@ -9047,29 +9473,29 @@
       </p:sp>
       <p:sp>
         <p:nvSpPr>
-          <p:cNvPr id="36" name="TextBox 35"/>
-          <p:cNvSpPr txBox="1"/>
-          <p:nvPr/>
-        </p:nvSpPr>
-        <p:spPr>
-          <a:xfrm>
-            <a:off x="2148840" y="2483510"/>
-            <a:ext cx="914400" cy="210312"/>
-          </a:xfrm>
-          <a:prstGeom prst="rect">
-            <a:avLst/>
-          </a:prstGeom>
-          <a:noFill/>
-        </p:spPr>
-        <p:txBody>
-          <a:bodyPr wrap="square" lIns="0" rIns="0" tIns="0" bIns="0">
-            <a:spAutoFit/>
-          </a:bodyPr>
-          <a:lstStyle/>
-          <a:p>
-            <a:pPr algn="r"/>
-            <a:r>
-              <a:rPr sz="1150" b="0" i="0">
+          <p:cNvPr id="48" name="TextBox 47"/>
+          <p:cNvSpPr txBox="1"/>
+          <p:nvPr/>
+        </p:nvSpPr>
+        <p:spPr>
+          <a:xfrm>
+            <a:off x="1691640" y="2627985"/>
+            <a:ext cx="731520" cy="192024"/>
+          </a:xfrm>
+          <a:prstGeom prst="rect">
+            <a:avLst/>
+          </a:prstGeom>
+          <a:noFill/>
+        </p:spPr>
+        <p:txBody>
+          <a:bodyPr wrap="square" lIns="0" rIns="0" tIns="0" bIns="0">
+            <a:spAutoFit/>
+          </a:bodyPr>
+          <a:lstStyle/>
+          <a:p>
+            <a:pPr algn="r"/>
+            <a:r>
+              <a:rPr sz="1050" b="0" i="0">
                 <a:solidFill>
                   <a:srgbClr val="212529"/>
                 </a:solidFill>
@@ -9082,64 +9508,99 @@
       </p:sp>
       <p:sp>
         <p:nvSpPr>
-          <p:cNvPr id="37" name="TextBox 36"/>
-          <p:cNvSpPr txBox="1"/>
-          <p:nvPr/>
-        </p:nvSpPr>
-        <p:spPr>
-          <a:xfrm>
-            <a:off x="3063240" y="2483510"/>
-            <a:ext cx="1115568" cy="210312"/>
-          </a:xfrm>
-          <a:prstGeom prst="rect">
-            <a:avLst/>
-          </a:prstGeom>
-          <a:noFill/>
-        </p:spPr>
-        <p:txBody>
-          <a:bodyPr wrap="square" lIns="0" rIns="0" tIns="0" bIns="0">
-            <a:spAutoFit/>
-          </a:bodyPr>
-          <a:lstStyle/>
-          <a:p>
-            <a:pPr algn="r"/>
-            <a:r>
-              <a:rPr sz="1150" b="0" i="0">
-                <a:solidFill>
-                  <a:srgbClr val="212529"/>
-                </a:solidFill>
-                <a:latin typeface="Garamond"/>
-              </a:rPr>
-              <a:t>84,899</a:t>
-            </a:r>
-          </a:p>
-        </p:txBody>
-      </p:sp>
-      <p:sp>
-        <p:nvSpPr>
-          <p:cNvPr id="38" name="TextBox 37"/>
-          <p:cNvSpPr txBox="1"/>
-          <p:nvPr/>
-        </p:nvSpPr>
-        <p:spPr>
-          <a:xfrm>
-            <a:off x="4562856" y="2483510"/>
-            <a:ext cx="914400" cy="210312"/>
-          </a:xfrm>
-          <a:prstGeom prst="rect">
-            <a:avLst/>
-          </a:prstGeom>
-          <a:noFill/>
-        </p:spPr>
-        <p:txBody>
-          <a:bodyPr wrap="square" lIns="0" rIns="0" tIns="0" bIns="0">
-            <a:spAutoFit/>
-          </a:bodyPr>
-          <a:lstStyle/>
-          <a:p>
-            <a:pPr algn="r"/>
-            <a:r>
-              <a:rPr sz="1150" b="0" i="0">
+          <p:cNvPr id="49" name="TextBox 48"/>
+          <p:cNvSpPr txBox="1"/>
+          <p:nvPr/>
+        </p:nvSpPr>
+        <p:spPr>
+          <a:xfrm>
+            <a:off x="2423160" y="2627985"/>
+            <a:ext cx="868680" cy="192024"/>
+          </a:xfrm>
+          <a:prstGeom prst="rect">
+            <a:avLst/>
+          </a:prstGeom>
+          <a:noFill/>
+        </p:spPr>
+        <p:txBody>
+          <a:bodyPr wrap="square" lIns="0" rIns="0" tIns="0" bIns="0">
+            <a:spAutoFit/>
+          </a:bodyPr>
+          <a:lstStyle/>
+          <a:p>
+            <a:pPr algn="r"/>
+            <a:r>
+              <a:rPr sz="1050" b="0" i="0">
+                <a:solidFill>
+                  <a:srgbClr val="212529"/>
+                </a:solidFill>
+                <a:latin typeface="Garamond"/>
+              </a:rPr>
+              <a:t>11,560</a:t>
+            </a:r>
+          </a:p>
+        </p:txBody>
+      </p:sp>
+      <p:sp>
+        <p:nvSpPr>
+          <p:cNvPr id="50" name="TextBox 49"/>
+          <p:cNvSpPr txBox="1"/>
+          <p:nvPr/>
+        </p:nvSpPr>
+        <p:spPr>
+          <a:xfrm>
+            <a:off x="3291840" y="2627985"/>
+            <a:ext cx="868680" cy="192024"/>
+          </a:xfrm>
+          <a:prstGeom prst="rect">
+            <a:avLst/>
+          </a:prstGeom>
+          <a:noFill/>
+        </p:spPr>
+        <p:txBody>
+          <a:bodyPr wrap="square" lIns="0" rIns="0" tIns="0" bIns="0">
+            <a:spAutoFit/>
+          </a:bodyPr>
+          <a:lstStyle/>
+          <a:p>
+            <a:pPr algn="r"/>
+            <a:r>
+              <a:rPr sz="1050" b="0" i="0">
+                <a:solidFill>
+                  <a:srgbClr val="212529"/>
+                </a:solidFill>
+                <a:latin typeface="Garamond"/>
+              </a:rPr>
+              <a:t>73,339</a:t>
+            </a:r>
+          </a:p>
+        </p:txBody>
+      </p:sp>
+      <p:sp>
+        <p:nvSpPr>
+          <p:cNvPr id="51" name="TextBox 50"/>
+          <p:cNvSpPr txBox="1"/>
+          <p:nvPr/>
+        </p:nvSpPr>
+        <p:spPr>
+          <a:xfrm>
+            <a:off x="4471416" y="2627985"/>
+            <a:ext cx="731520" cy="192024"/>
+          </a:xfrm>
+          <a:prstGeom prst="rect">
+            <a:avLst/>
+          </a:prstGeom>
+          <a:noFill/>
+        </p:spPr>
+        <p:txBody>
+          <a:bodyPr wrap="square" lIns="0" rIns="0" tIns="0" bIns="0">
+            <a:spAutoFit/>
+          </a:bodyPr>
+          <a:lstStyle/>
+          <a:p>
+            <a:pPr algn="r"/>
+            <a:r>
+              <a:rPr sz="1050" b="0" i="0">
                 <a:solidFill>
                   <a:srgbClr val="212529"/>
                 </a:solidFill>
@@ -9152,64 +9613,99 @@
       </p:sp>
       <p:sp>
         <p:nvSpPr>
-          <p:cNvPr id="39" name="TextBox 38"/>
-          <p:cNvSpPr txBox="1"/>
-          <p:nvPr/>
-        </p:nvSpPr>
-        <p:spPr>
-          <a:xfrm>
-            <a:off x="5477256" y="2483510"/>
-            <a:ext cx="1115568" cy="210312"/>
-          </a:xfrm>
-          <a:prstGeom prst="rect">
-            <a:avLst/>
-          </a:prstGeom>
-          <a:noFill/>
-        </p:spPr>
-        <p:txBody>
-          <a:bodyPr wrap="square" lIns="0" rIns="0" tIns="0" bIns="0">
-            <a:spAutoFit/>
-          </a:bodyPr>
-          <a:lstStyle/>
-          <a:p>
-            <a:pPr algn="r"/>
-            <a:r>
-              <a:rPr sz="1150" b="0" i="0">
-                <a:solidFill>
-                  <a:srgbClr val="212529"/>
-                </a:solidFill>
-                <a:latin typeface="Garamond"/>
-              </a:rPr>
-              <a:t>82,393</a:t>
-            </a:r>
-          </a:p>
-        </p:txBody>
-      </p:sp>
-      <p:sp>
-        <p:nvSpPr>
-          <p:cNvPr id="40" name="TextBox 39"/>
-          <p:cNvSpPr txBox="1"/>
-          <p:nvPr/>
-        </p:nvSpPr>
-        <p:spPr>
-          <a:xfrm>
-            <a:off x="6976871" y="2483510"/>
-            <a:ext cx="914400" cy="210312"/>
-          </a:xfrm>
-          <a:prstGeom prst="rect">
-            <a:avLst/>
-          </a:prstGeom>
-          <a:noFill/>
-        </p:spPr>
-        <p:txBody>
-          <a:bodyPr wrap="square" lIns="0" rIns="0" tIns="0" bIns="0">
-            <a:spAutoFit/>
-          </a:bodyPr>
-          <a:lstStyle/>
-          <a:p>
-            <a:pPr algn="r"/>
-            <a:r>
-              <a:rPr sz="1150" b="0" i="0">
+          <p:cNvPr id="52" name="TextBox 51"/>
+          <p:cNvSpPr txBox="1"/>
+          <p:nvPr/>
+        </p:nvSpPr>
+        <p:spPr>
+          <a:xfrm>
+            <a:off x="5202936" y="2627985"/>
+            <a:ext cx="868680" cy="192024"/>
+          </a:xfrm>
+          <a:prstGeom prst="rect">
+            <a:avLst/>
+          </a:prstGeom>
+          <a:noFill/>
+        </p:spPr>
+        <p:txBody>
+          <a:bodyPr wrap="square" lIns="0" rIns="0" tIns="0" bIns="0">
+            <a:spAutoFit/>
+          </a:bodyPr>
+          <a:lstStyle/>
+          <a:p>
+            <a:pPr algn="r"/>
+            <a:r>
+              <a:rPr sz="1050" b="0" i="0">
+                <a:solidFill>
+                  <a:srgbClr val="212529"/>
+                </a:solidFill>
+                <a:latin typeface="Garamond"/>
+              </a:rPr>
+              <a:t>9,736</a:t>
+            </a:r>
+          </a:p>
+        </p:txBody>
+      </p:sp>
+      <p:sp>
+        <p:nvSpPr>
+          <p:cNvPr id="53" name="TextBox 52"/>
+          <p:cNvSpPr txBox="1"/>
+          <p:nvPr/>
+        </p:nvSpPr>
+        <p:spPr>
+          <a:xfrm>
+            <a:off x="6071616" y="2627985"/>
+            <a:ext cx="868680" cy="192024"/>
+          </a:xfrm>
+          <a:prstGeom prst="rect">
+            <a:avLst/>
+          </a:prstGeom>
+          <a:noFill/>
+        </p:spPr>
+        <p:txBody>
+          <a:bodyPr wrap="square" lIns="0" rIns="0" tIns="0" bIns="0">
+            <a:spAutoFit/>
+          </a:bodyPr>
+          <a:lstStyle/>
+          <a:p>
+            <a:pPr algn="r"/>
+            <a:r>
+              <a:rPr sz="1050" b="0" i="0">
+                <a:solidFill>
+                  <a:srgbClr val="212529"/>
+                </a:solidFill>
+                <a:latin typeface="Garamond"/>
+              </a:rPr>
+              <a:t>72,657</a:t>
+            </a:r>
+          </a:p>
+        </p:txBody>
+      </p:sp>
+      <p:sp>
+        <p:nvSpPr>
+          <p:cNvPr id="54" name="TextBox 53"/>
+          <p:cNvSpPr txBox="1"/>
+          <p:nvPr/>
+        </p:nvSpPr>
+        <p:spPr>
+          <a:xfrm>
+            <a:off x="7251192" y="2627985"/>
+            <a:ext cx="731520" cy="192024"/>
+          </a:xfrm>
+          <a:prstGeom prst="rect">
+            <a:avLst/>
+          </a:prstGeom>
+          <a:noFill/>
+        </p:spPr>
+        <p:txBody>
+          <a:bodyPr wrap="square" lIns="0" rIns="0" tIns="0" bIns="0">
+            <a:spAutoFit/>
+          </a:bodyPr>
+          <a:lstStyle/>
+          <a:p>
+            <a:pPr algn="r"/>
+            <a:r>
+              <a:rPr sz="1050" b="0" i="0">
                 <a:solidFill>
                   <a:srgbClr val="212529"/>
                 </a:solidFill>
@@ -9222,49 +9718,84 @@
       </p:sp>
       <p:sp>
         <p:nvSpPr>
-          <p:cNvPr id="41" name="TextBox 40"/>
-          <p:cNvSpPr txBox="1"/>
-          <p:nvPr/>
-        </p:nvSpPr>
-        <p:spPr>
-          <a:xfrm>
-            <a:off x="7891271" y="2483510"/>
-            <a:ext cx="1115568" cy="210312"/>
-          </a:xfrm>
-          <a:prstGeom prst="rect">
-            <a:avLst/>
-          </a:prstGeom>
-          <a:noFill/>
-        </p:spPr>
-        <p:txBody>
-          <a:bodyPr wrap="square" lIns="0" rIns="0" tIns="0" bIns="0">
-            <a:spAutoFit/>
-          </a:bodyPr>
-          <a:lstStyle/>
-          <a:p>
-            <a:pPr algn="r"/>
-            <a:r>
-              <a:rPr sz="1150" b="0" i="0">
-                <a:solidFill>
-                  <a:srgbClr val="212529"/>
-                </a:solidFill>
-                <a:latin typeface="Garamond"/>
-              </a:rPr>
-              <a:t>64,697</a:t>
-            </a:r>
-          </a:p>
-        </p:txBody>
-      </p:sp>
-      <p:sp>
-        <p:nvSpPr>
-          <p:cNvPr id="42" name="TextBox 41"/>
-          <p:cNvSpPr txBox="1"/>
-          <p:nvPr/>
-        </p:nvSpPr>
-        <p:spPr>
-          <a:xfrm>
-            <a:off x="731520" y="2713939"/>
-            <a:ext cx="1417320" cy="210312"/>
+          <p:cNvPr id="55" name="TextBox 54"/>
+          <p:cNvSpPr txBox="1"/>
+          <p:nvPr/>
+        </p:nvSpPr>
+        <p:spPr>
+          <a:xfrm>
+            <a:off x="7982712" y="2627985"/>
+            <a:ext cx="868680" cy="192024"/>
+          </a:xfrm>
+          <a:prstGeom prst="rect">
+            <a:avLst/>
+          </a:prstGeom>
+          <a:noFill/>
+        </p:spPr>
+        <p:txBody>
+          <a:bodyPr wrap="square" lIns="0" rIns="0" tIns="0" bIns="0">
+            <a:spAutoFit/>
+          </a:bodyPr>
+          <a:lstStyle/>
+          <a:p>
+            <a:pPr algn="r"/>
+            <a:r>
+              <a:rPr sz="1050" b="0" i="0">
+                <a:solidFill>
+                  <a:srgbClr val="212529"/>
+                </a:solidFill>
+                <a:latin typeface="Garamond"/>
+              </a:rPr>
+              <a:t>9,653</a:t>
+            </a:r>
+          </a:p>
+        </p:txBody>
+      </p:sp>
+      <p:sp>
+        <p:nvSpPr>
+          <p:cNvPr id="56" name="TextBox 55"/>
+          <p:cNvSpPr txBox="1"/>
+          <p:nvPr/>
+        </p:nvSpPr>
+        <p:spPr>
+          <a:xfrm>
+            <a:off x="8851392" y="2627985"/>
+            <a:ext cx="868680" cy="192024"/>
+          </a:xfrm>
+          <a:prstGeom prst="rect">
+            <a:avLst/>
+          </a:prstGeom>
+          <a:noFill/>
+        </p:spPr>
+        <p:txBody>
+          <a:bodyPr wrap="square" lIns="0" rIns="0" tIns="0" bIns="0">
+            <a:spAutoFit/>
+          </a:bodyPr>
+          <a:lstStyle/>
+          <a:p>
+            <a:pPr algn="r"/>
+            <a:r>
+              <a:rPr sz="1050" b="0" i="0">
+                <a:solidFill>
+                  <a:srgbClr val="212529"/>
+                </a:solidFill>
+                <a:latin typeface="Garamond"/>
+              </a:rPr>
+              <a:t>55,044</a:t>
+            </a:r>
+          </a:p>
+        </p:txBody>
+      </p:sp>
+      <p:sp>
+        <p:nvSpPr>
+          <p:cNvPr id="57" name="TextBox 56"/>
+          <p:cNvSpPr txBox="1"/>
+          <p:nvPr/>
+        </p:nvSpPr>
+        <p:spPr>
+          <a:xfrm>
+            <a:off x="502920" y="2845612"/>
+            <a:ext cx="1188720" cy="192024"/>
           </a:xfrm>
           <a:prstGeom prst="rect">
             <a:avLst/>
@@ -9279,7 +9810,7 @@
           <a:p>
             <a:pPr algn="l"/>
             <a:r>
-              <a:rPr sz="1150" b="0" i="0">
+              <a:rPr sz="1050" b="0" i="0">
                 <a:solidFill>
                   <a:srgbClr val="212529"/>
                 </a:solidFill>
@@ -9292,29 +9823,29 @@
       </p:sp>
       <p:sp>
         <p:nvSpPr>
-          <p:cNvPr id="43" name="TextBox 42"/>
-          <p:cNvSpPr txBox="1"/>
-          <p:nvPr/>
-        </p:nvSpPr>
-        <p:spPr>
-          <a:xfrm>
-            <a:off x="2148840" y="2713939"/>
-            <a:ext cx="914400" cy="210312"/>
-          </a:xfrm>
-          <a:prstGeom prst="rect">
-            <a:avLst/>
-          </a:prstGeom>
-          <a:noFill/>
-        </p:spPr>
-        <p:txBody>
-          <a:bodyPr wrap="square" lIns="0" rIns="0" tIns="0" bIns="0">
-            <a:spAutoFit/>
-          </a:bodyPr>
-          <a:lstStyle/>
-          <a:p>
-            <a:pPr algn="r"/>
-            <a:r>
-              <a:rPr sz="1150" b="0" i="0">
+          <p:cNvPr id="58" name="TextBox 57"/>
+          <p:cNvSpPr txBox="1"/>
+          <p:nvPr/>
+        </p:nvSpPr>
+        <p:spPr>
+          <a:xfrm>
+            <a:off x="1691640" y="2845612"/>
+            <a:ext cx="731520" cy="192024"/>
+          </a:xfrm>
+          <a:prstGeom prst="rect">
+            <a:avLst/>
+          </a:prstGeom>
+          <a:noFill/>
+        </p:spPr>
+        <p:txBody>
+          <a:bodyPr wrap="square" lIns="0" rIns="0" tIns="0" bIns="0">
+            <a:spAutoFit/>
+          </a:bodyPr>
+          <a:lstStyle/>
+          <a:p>
+            <a:pPr algn="r"/>
+            <a:r>
+              <a:rPr sz="1050" b="0" i="0">
                 <a:solidFill>
                   <a:srgbClr val="212529"/>
                 </a:solidFill>
@@ -9327,64 +9858,99 @@
       </p:sp>
       <p:sp>
         <p:nvSpPr>
-          <p:cNvPr id="44" name="TextBox 43"/>
-          <p:cNvSpPr txBox="1"/>
-          <p:nvPr/>
-        </p:nvSpPr>
-        <p:spPr>
-          <a:xfrm>
-            <a:off x="3063240" y="2713939"/>
-            <a:ext cx="1115568" cy="210312"/>
-          </a:xfrm>
-          <a:prstGeom prst="rect">
-            <a:avLst/>
-          </a:prstGeom>
-          <a:noFill/>
-        </p:spPr>
-        <p:txBody>
-          <a:bodyPr wrap="square" lIns="0" rIns="0" tIns="0" bIns="0">
-            <a:spAutoFit/>
-          </a:bodyPr>
-          <a:lstStyle/>
-          <a:p>
-            <a:pPr algn="r"/>
-            <a:r>
-              <a:rPr sz="1150" b="0" i="0">
-                <a:solidFill>
-                  <a:srgbClr val="212529"/>
-                </a:solidFill>
-                <a:latin typeface="Garamond"/>
-              </a:rPr>
-              <a:t>84,600</a:t>
-            </a:r>
-          </a:p>
-        </p:txBody>
-      </p:sp>
-      <p:sp>
-        <p:nvSpPr>
-          <p:cNvPr id="45" name="TextBox 44"/>
-          <p:cNvSpPr txBox="1"/>
-          <p:nvPr/>
-        </p:nvSpPr>
-        <p:spPr>
-          <a:xfrm>
-            <a:off x="4562856" y="2713939"/>
-            <a:ext cx="914400" cy="210312"/>
-          </a:xfrm>
-          <a:prstGeom prst="rect">
-            <a:avLst/>
-          </a:prstGeom>
-          <a:noFill/>
-        </p:spPr>
-        <p:txBody>
-          <a:bodyPr wrap="square" lIns="0" rIns="0" tIns="0" bIns="0">
-            <a:spAutoFit/>
-          </a:bodyPr>
-          <a:lstStyle/>
-          <a:p>
-            <a:pPr algn="r"/>
-            <a:r>
-              <a:rPr sz="1150" b="0" i="0">
+          <p:cNvPr id="59" name="TextBox 58"/>
+          <p:cNvSpPr txBox="1"/>
+          <p:nvPr/>
+        </p:nvSpPr>
+        <p:spPr>
+          <a:xfrm>
+            <a:off x="2423160" y="2845612"/>
+            <a:ext cx="868680" cy="192024"/>
+          </a:xfrm>
+          <a:prstGeom prst="rect">
+            <a:avLst/>
+          </a:prstGeom>
+          <a:noFill/>
+        </p:spPr>
+        <p:txBody>
+          <a:bodyPr wrap="square" lIns="0" rIns="0" tIns="0" bIns="0">
+            <a:spAutoFit/>
+          </a:bodyPr>
+          <a:lstStyle/>
+          <a:p>
+            <a:pPr algn="r"/>
+            <a:r>
+              <a:rPr sz="1050" b="0" i="0">
+                <a:solidFill>
+                  <a:srgbClr val="212529"/>
+                </a:solidFill>
+                <a:latin typeface="Garamond"/>
+              </a:rPr>
+              <a:t>11,511</a:t>
+            </a:r>
+          </a:p>
+        </p:txBody>
+      </p:sp>
+      <p:sp>
+        <p:nvSpPr>
+          <p:cNvPr id="60" name="TextBox 59"/>
+          <p:cNvSpPr txBox="1"/>
+          <p:nvPr/>
+        </p:nvSpPr>
+        <p:spPr>
+          <a:xfrm>
+            <a:off x="3291840" y="2845612"/>
+            <a:ext cx="868680" cy="192024"/>
+          </a:xfrm>
+          <a:prstGeom prst="rect">
+            <a:avLst/>
+          </a:prstGeom>
+          <a:noFill/>
+        </p:spPr>
+        <p:txBody>
+          <a:bodyPr wrap="square" lIns="0" rIns="0" tIns="0" bIns="0">
+            <a:spAutoFit/>
+          </a:bodyPr>
+          <a:lstStyle/>
+          <a:p>
+            <a:pPr algn="r"/>
+            <a:r>
+              <a:rPr sz="1050" b="0" i="0">
+                <a:solidFill>
+                  <a:srgbClr val="212529"/>
+                </a:solidFill>
+                <a:latin typeface="Garamond"/>
+              </a:rPr>
+              <a:t>73,089</a:t>
+            </a:r>
+          </a:p>
+        </p:txBody>
+      </p:sp>
+      <p:sp>
+        <p:nvSpPr>
+          <p:cNvPr id="61" name="TextBox 60"/>
+          <p:cNvSpPr txBox="1"/>
+          <p:nvPr/>
+        </p:nvSpPr>
+        <p:spPr>
+          <a:xfrm>
+            <a:off x="4471416" y="2845612"/>
+            <a:ext cx="731520" cy="192024"/>
+          </a:xfrm>
+          <a:prstGeom prst="rect">
+            <a:avLst/>
+          </a:prstGeom>
+          <a:noFill/>
+        </p:spPr>
+        <p:txBody>
+          <a:bodyPr wrap="square" lIns="0" rIns="0" tIns="0" bIns="0">
+            <a:spAutoFit/>
+          </a:bodyPr>
+          <a:lstStyle/>
+          <a:p>
+            <a:pPr algn="r"/>
+            <a:r>
+              <a:rPr sz="1050" b="0" i="0">
                 <a:solidFill>
                   <a:srgbClr val="212529"/>
                 </a:solidFill>
@@ -9397,64 +9963,99 @@
       </p:sp>
       <p:sp>
         <p:nvSpPr>
-          <p:cNvPr id="46" name="TextBox 45"/>
-          <p:cNvSpPr txBox="1"/>
-          <p:nvPr/>
-        </p:nvSpPr>
-        <p:spPr>
-          <a:xfrm>
-            <a:off x="5477256" y="2713939"/>
-            <a:ext cx="1115568" cy="210312"/>
-          </a:xfrm>
-          <a:prstGeom prst="rect">
-            <a:avLst/>
-          </a:prstGeom>
-          <a:noFill/>
-        </p:spPr>
-        <p:txBody>
-          <a:bodyPr wrap="square" lIns="0" rIns="0" tIns="0" bIns="0">
-            <a:spAutoFit/>
-          </a:bodyPr>
-          <a:lstStyle/>
-          <a:p>
-            <a:pPr algn="r"/>
-            <a:r>
-              <a:rPr sz="1150" b="0" i="0">
-                <a:solidFill>
-                  <a:srgbClr val="212529"/>
-                </a:solidFill>
-                <a:latin typeface="Garamond"/>
-              </a:rPr>
-              <a:t>81,971</a:t>
-            </a:r>
-          </a:p>
-        </p:txBody>
-      </p:sp>
-      <p:sp>
-        <p:nvSpPr>
-          <p:cNvPr id="47" name="TextBox 46"/>
-          <p:cNvSpPr txBox="1"/>
-          <p:nvPr/>
-        </p:nvSpPr>
-        <p:spPr>
-          <a:xfrm>
-            <a:off x="6976871" y="2713939"/>
-            <a:ext cx="914400" cy="210312"/>
-          </a:xfrm>
-          <a:prstGeom prst="rect">
-            <a:avLst/>
-          </a:prstGeom>
-          <a:noFill/>
-        </p:spPr>
-        <p:txBody>
-          <a:bodyPr wrap="square" lIns="0" rIns="0" tIns="0" bIns="0">
-            <a:spAutoFit/>
-          </a:bodyPr>
-          <a:lstStyle/>
-          <a:p>
-            <a:pPr algn="r"/>
-            <a:r>
-              <a:rPr sz="1150" b="0" i="0">
+          <p:cNvPr id="62" name="TextBox 61"/>
+          <p:cNvSpPr txBox="1"/>
+          <p:nvPr/>
+        </p:nvSpPr>
+        <p:spPr>
+          <a:xfrm>
+            <a:off x="5202936" y="2845612"/>
+            <a:ext cx="868680" cy="192024"/>
+          </a:xfrm>
+          <a:prstGeom prst="rect">
+            <a:avLst/>
+          </a:prstGeom>
+          <a:noFill/>
+        </p:spPr>
+        <p:txBody>
+          <a:bodyPr wrap="square" lIns="0" rIns="0" tIns="0" bIns="0">
+            <a:spAutoFit/>
+          </a:bodyPr>
+          <a:lstStyle/>
+          <a:p>
+            <a:pPr algn="r"/>
+            <a:r>
+              <a:rPr sz="1050" b="0" i="0">
+                <a:solidFill>
+                  <a:srgbClr val="212529"/>
+                </a:solidFill>
+                <a:latin typeface="Garamond"/>
+              </a:rPr>
+              <a:t>9,692</a:t>
+            </a:r>
+          </a:p>
+        </p:txBody>
+      </p:sp>
+      <p:sp>
+        <p:nvSpPr>
+          <p:cNvPr id="63" name="TextBox 62"/>
+          <p:cNvSpPr txBox="1"/>
+          <p:nvPr/>
+        </p:nvSpPr>
+        <p:spPr>
+          <a:xfrm>
+            <a:off x="6071616" y="2845612"/>
+            <a:ext cx="868680" cy="192024"/>
+          </a:xfrm>
+          <a:prstGeom prst="rect">
+            <a:avLst/>
+          </a:prstGeom>
+          <a:noFill/>
+        </p:spPr>
+        <p:txBody>
+          <a:bodyPr wrap="square" lIns="0" rIns="0" tIns="0" bIns="0">
+            <a:spAutoFit/>
+          </a:bodyPr>
+          <a:lstStyle/>
+          <a:p>
+            <a:pPr algn="r"/>
+            <a:r>
+              <a:rPr sz="1050" b="0" i="0">
+                <a:solidFill>
+                  <a:srgbClr val="212529"/>
+                </a:solidFill>
+                <a:latin typeface="Garamond"/>
+              </a:rPr>
+              <a:t>72,279</a:t>
+            </a:r>
+          </a:p>
+        </p:txBody>
+      </p:sp>
+      <p:sp>
+        <p:nvSpPr>
+          <p:cNvPr id="64" name="TextBox 63"/>
+          <p:cNvSpPr txBox="1"/>
+          <p:nvPr/>
+        </p:nvSpPr>
+        <p:spPr>
+          <a:xfrm>
+            <a:off x="7251192" y="2845612"/>
+            <a:ext cx="731520" cy="192024"/>
+          </a:xfrm>
+          <a:prstGeom prst="rect">
+            <a:avLst/>
+          </a:prstGeom>
+          <a:noFill/>
+        </p:spPr>
+        <p:txBody>
+          <a:bodyPr wrap="square" lIns="0" rIns="0" tIns="0" bIns="0">
+            <a:spAutoFit/>
+          </a:bodyPr>
+          <a:lstStyle/>
+          <a:p>
+            <a:pPr algn="r"/>
+            <a:r>
+              <a:rPr sz="1050" b="0" i="0">
                 <a:solidFill>
                   <a:srgbClr val="212529"/>
                 </a:solidFill>
@@ -9467,49 +10068,84 @@
       </p:sp>
       <p:sp>
         <p:nvSpPr>
-          <p:cNvPr id="48" name="TextBox 47"/>
-          <p:cNvSpPr txBox="1"/>
-          <p:nvPr/>
-        </p:nvSpPr>
-        <p:spPr>
-          <a:xfrm>
-            <a:off x="7891271" y="2713939"/>
-            <a:ext cx="1115568" cy="210312"/>
-          </a:xfrm>
-          <a:prstGeom prst="rect">
-            <a:avLst/>
-          </a:prstGeom>
-          <a:noFill/>
-        </p:spPr>
-        <p:txBody>
-          <a:bodyPr wrap="square" lIns="0" rIns="0" tIns="0" bIns="0">
-            <a:spAutoFit/>
-          </a:bodyPr>
-          <a:lstStyle/>
-          <a:p>
-            <a:pPr algn="r"/>
-            <a:r>
-              <a:rPr sz="1150" b="0" i="0">
-                <a:solidFill>
-                  <a:srgbClr val="212529"/>
-                </a:solidFill>
-                <a:latin typeface="Garamond"/>
-              </a:rPr>
-              <a:t>65,327</a:t>
-            </a:r>
-          </a:p>
-        </p:txBody>
-      </p:sp>
-      <p:sp>
-        <p:nvSpPr>
-          <p:cNvPr id="49" name="TextBox 48"/>
-          <p:cNvSpPr txBox="1"/>
-          <p:nvPr/>
-        </p:nvSpPr>
-        <p:spPr>
-          <a:xfrm>
-            <a:off x="731520" y="2944367"/>
-            <a:ext cx="1417320" cy="210312"/>
+          <p:cNvPr id="65" name="TextBox 64"/>
+          <p:cNvSpPr txBox="1"/>
+          <p:nvPr/>
+        </p:nvSpPr>
+        <p:spPr>
+          <a:xfrm>
+            <a:off x="7982712" y="2845612"/>
+            <a:ext cx="868680" cy="192024"/>
+          </a:xfrm>
+          <a:prstGeom prst="rect">
+            <a:avLst/>
+          </a:prstGeom>
+          <a:noFill/>
+        </p:spPr>
+        <p:txBody>
+          <a:bodyPr wrap="square" lIns="0" rIns="0" tIns="0" bIns="0">
+            <a:spAutoFit/>
+          </a:bodyPr>
+          <a:lstStyle/>
+          <a:p>
+            <a:pPr algn="r"/>
+            <a:r>
+              <a:rPr sz="1050" b="0" i="0">
+                <a:solidFill>
+                  <a:srgbClr val="212529"/>
+                </a:solidFill>
+                <a:latin typeface="Garamond"/>
+              </a:rPr>
+              <a:t>9,412</a:t>
+            </a:r>
+          </a:p>
+        </p:txBody>
+      </p:sp>
+      <p:sp>
+        <p:nvSpPr>
+          <p:cNvPr id="66" name="TextBox 65"/>
+          <p:cNvSpPr txBox="1"/>
+          <p:nvPr/>
+        </p:nvSpPr>
+        <p:spPr>
+          <a:xfrm>
+            <a:off x="8851392" y="2845612"/>
+            <a:ext cx="868680" cy="192024"/>
+          </a:xfrm>
+          <a:prstGeom prst="rect">
+            <a:avLst/>
+          </a:prstGeom>
+          <a:noFill/>
+        </p:spPr>
+        <p:txBody>
+          <a:bodyPr wrap="square" lIns="0" rIns="0" tIns="0" bIns="0">
+            <a:spAutoFit/>
+          </a:bodyPr>
+          <a:lstStyle/>
+          <a:p>
+            <a:pPr algn="r"/>
+            <a:r>
+              <a:rPr sz="1050" b="0" i="0">
+                <a:solidFill>
+                  <a:srgbClr val="212529"/>
+                </a:solidFill>
+                <a:latin typeface="Garamond"/>
+              </a:rPr>
+              <a:t>55,915</a:t>
+            </a:r>
+          </a:p>
+        </p:txBody>
+      </p:sp>
+      <p:sp>
+        <p:nvSpPr>
+          <p:cNvPr id="67" name="TextBox 66"/>
+          <p:cNvSpPr txBox="1"/>
+          <p:nvPr/>
+        </p:nvSpPr>
+        <p:spPr>
+          <a:xfrm>
+            <a:off x="502920" y="3063240"/>
+            <a:ext cx="1188720" cy="192024"/>
           </a:xfrm>
           <a:prstGeom prst="rect">
             <a:avLst/>
@@ -9524,7 +10160,7 @@
           <a:p>
             <a:pPr algn="l"/>
             <a:r>
-              <a:rPr sz="1150" b="0" i="0">
+              <a:rPr sz="1050" b="0" i="0">
                 <a:solidFill>
                   <a:srgbClr val="212529"/>
                 </a:solidFill>
@@ -9537,29 +10173,29 @@
       </p:sp>
       <p:sp>
         <p:nvSpPr>
-          <p:cNvPr id="50" name="TextBox 49"/>
-          <p:cNvSpPr txBox="1"/>
-          <p:nvPr/>
-        </p:nvSpPr>
-        <p:spPr>
-          <a:xfrm>
-            <a:off x="2148840" y="2944367"/>
-            <a:ext cx="914400" cy="210312"/>
-          </a:xfrm>
-          <a:prstGeom prst="rect">
-            <a:avLst/>
-          </a:prstGeom>
-          <a:noFill/>
-        </p:spPr>
-        <p:txBody>
-          <a:bodyPr wrap="square" lIns="0" rIns="0" tIns="0" bIns="0">
-            <a:spAutoFit/>
-          </a:bodyPr>
-          <a:lstStyle/>
-          <a:p>
-            <a:pPr algn="r"/>
-            <a:r>
-              <a:rPr sz="1150" b="0" i="0">
+          <p:cNvPr id="68" name="TextBox 67"/>
+          <p:cNvSpPr txBox="1"/>
+          <p:nvPr/>
+        </p:nvSpPr>
+        <p:spPr>
+          <a:xfrm>
+            <a:off x="1691640" y="3063240"/>
+            <a:ext cx="731520" cy="192024"/>
+          </a:xfrm>
+          <a:prstGeom prst="rect">
+            <a:avLst/>
+          </a:prstGeom>
+          <a:noFill/>
+        </p:spPr>
+        <p:txBody>
+          <a:bodyPr wrap="square" lIns="0" rIns="0" tIns="0" bIns="0">
+            <a:spAutoFit/>
+          </a:bodyPr>
+          <a:lstStyle/>
+          <a:p>
+            <a:pPr algn="r"/>
+            <a:r>
+              <a:rPr sz="1050" b="0" i="0">
                 <a:solidFill>
                   <a:srgbClr val="212529"/>
                 </a:solidFill>
@@ -9572,64 +10208,99 @@
       </p:sp>
       <p:sp>
         <p:nvSpPr>
-          <p:cNvPr id="51" name="TextBox 50"/>
-          <p:cNvSpPr txBox="1"/>
-          <p:nvPr/>
-        </p:nvSpPr>
-        <p:spPr>
-          <a:xfrm>
-            <a:off x="3063240" y="2944367"/>
-            <a:ext cx="1115568" cy="210312"/>
-          </a:xfrm>
-          <a:prstGeom prst="rect">
-            <a:avLst/>
-          </a:prstGeom>
-          <a:noFill/>
-        </p:spPr>
-        <p:txBody>
-          <a:bodyPr wrap="square" lIns="0" rIns="0" tIns="0" bIns="0">
-            <a:spAutoFit/>
-          </a:bodyPr>
-          <a:lstStyle/>
-          <a:p>
-            <a:pPr algn="r"/>
-            <a:r>
-              <a:rPr sz="1150" b="0" i="0">
-                <a:solidFill>
-                  <a:srgbClr val="212529"/>
-                </a:solidFill>
-                <a:latin typeface="Garamond"/>
-              </a:rPr>
-              <a:t>84,584</a:t>
-            </a:r>
-          </a:p>
-        </p:txBody>
-      </p:sp>
-      <p:sp>
-        <p:nvSpPr>
-          <p:cNvPr id="52" name="TextBox 51"/>
-          <p:cNvSpPr txBox="1"/>
-          <p:nvPr/>
-        </p:nvSpPr>
-        <p:spPr>
-          <a:xfrm>
-            <a:off x="4562856" y="2944367"/>
-            <a:ext cx="914400" cy="210312"/>
-          </a:xfrm>
-          <a:prstGeom prst="rect">
-            <a:avLst/>
-          </a:prstGeom>
-          <a:noFill/>
-        </p:spPr>
-        <p:txBody>
-          <a:bodyPr wrap="square" lIns="0" rIns="0" tIns="0" bIns="0">
-            <a:spAutoFit/>
-          </a:bodyPr>
-          <a:lstStyle/>
-          <a:p>
-            <a:pPr algn="r"/>
-            <a:r>
-              <a:rPr sz="1150" b="0" i="0">
+          <p:cNvPr id="69" name="TextBox 68"/>
+          <p:cNvSpPr txBox="1"/>
+          <p:nvPr/>
+        </p:nvSpPr>
+        <p:spPr>
+          <a:xfrm>
+            <a:off x="2423160" y="3063240"/>
+            <a:ext cx="868680" cy="192024"/>
+          </a:xfrm>
+          <a:prstGeom prst="rect">
+            <a:avLst/>
+          </a:prstGeom>
+          <a:noFill/>
+        </p:spPr>
+        <p:txBody>
+          <a:bodyPr wrap="square" lIns="0" rIns="0" tIns="0" bIns="0">
+            <a:spAutoFit/>
+          </a:bodyPr>
+          <a:lstStyle/>
+          <a:p>
+            <a:pPr algn="r"/>
+            <a:r>
+              <a:rPr sz="1050" b="0" i="0">
+                <a:solidFill>
+                  <a:srgbClr val="212529"/>
+                </a:solidFill>
+                <a:latin typeface="Garamond"/>
+              </a:rPr>
+              <a:t>11,598</a:t>
+            </a:r>
+          </a:p>
+        </p:txBody>
+      </p:sp>
+      <p:sp>
+        <p:nvSpPr>
+          <p:cNvPr id="70" name="TextBox 69"/>
+          <p:cNvSpPr txBox="1"/>
+          <p:nvPr/>
+        </p:nvSpPr>
+        <p:spPr>
+          <a:xfrm>
+            <a:off x="3291840" y="3063240"/>
+            <a:ext cx="868680" cy="192024"/>
+          </a:xfrm>
+          <a:prstGeom prst="rect">
+            <a:avLst/>
+          </a:prstGeom>
+          <a:noFill/>
+        </p:spPr>
+        <p:txBody>
+          <a:bodyPr wrap="square" lIns="0" rIns="0" tIns="0" bIns="0">
+            <a:spAutoFit/>
+          </a:bodyPr>
+          <a:lstStyle/>
+          <a:p>
+            <a:pPr algn="r"/>
+            <a:r>
+              <a:rPr sz="1050" b="0" i="0">
+                <a:solidFill>
+                  <a:srgbClr val="212529"/>
+                </a:solidFill>
+                <a:latin typeface="Garamond"/>
+              </a:rPr>
+              <a:t>72,986</a:t>
+            </a:r>
+          </a:p>
+        </p:txBody>
+      </p:sp>
+      <p:sp>
+        <p:nvSpPr>
+          <p:cNvPr id="71" name="TextBox 70"/>
+          <p:cNvSpPr txBox="1"/>
+          <p:nvPr/>
+        </p:nvSpPr>
+        <p:spPr>
+          <a:xfrm>
+            <a:off x="4471416" y="3063240"/>
+            <a:ext cx="731520" cy="192024"/>
+          </a:xfrm>
+          <a:prstGeom prst="rect">
+            <a:avLst/>
+          </a:prstGeom>
+          <a:noFill/>
+        </p:spPr>
+        <p:txBody>
+          <a:bodyPr wrap="square" lIns="0" rIns="0" tIns="0" bIns="0">
+            <a:spAutoFit/>
+          </a:bodyPr>
+          <a:lstStyle/>
+          <a:p>
+            <a:pPr algn="r"/>
+            <a:r>
+              <a:rPr sz="1050" b="0" i="0">
                 <a:solidFill>
                   <a:srgbClr val="212529"/>
                 </a:solidFill>
@@ -9642,64 +10313,99 @@
       </p:sp>
       <p:sp>
         <p:nvSpPr>
-          <p:cNvPr id="53" name="TextBox 52"/>
-          <p:cNvSpPr txBox="1"/>
-          <p:nvPr/>
-        </p:nvSpPr>
-        <p:spPr>
-          <a:xfrm>
-            <a:off x="5477256" y="2944367"/>
-            <a:ext cx="1115568" cy="210312"/>
-          </a:xfrm>
-          <a:prstGeom prst="rect">
-            <a:avLst/>
-          </a:prstGeom>
-          <a:noFill/>
-        </p:spPr>
-        <p:txBody>
-          <a:bodyPr wrap="square" lIns="0" rIns="0" tIns="0" bIns="0">
-            <a:spAutoFit/>
-          </a:bodyPr>
-          <a:lstStyle/>
-          <a:p>
-            <a:pPr algn="r"/>
-            <a:r>
-              <a:rPr sz="1150" b="0" i="0">
-                <a:solidFill>
-                  <a:srgbClr val="212529"/>
-                </a:solidFill>
-                <a:latin typeface="Garamond"/>
-              </a:rPr>
-              <a:t>81,181</a:t>
-            </a:r>
-          </a:p>
-        </p:txBody>
-      </p:sp>
-      <p:sp>
-        <p:nvSpPr>
-          <p:cNvPr id="54" name="TextBox 53"/>
-          <p:cNvSpPr txBox="1"/>
-          <p:nvPr/>
-        </p:nvSpPr>
-        <p:spPr>
-          <a:xfrm>
-            <a:off x="6976871" y="2944367"/>
-            <a:ext cx="914400" cy="210312"/>
-          </a:xfrm>
-          <a:prstGeom prst="rect">
-            <a:avLst/>
-          </a:prstGeom>
-          <a:noFill/>
-        </p:spPr>
-        <p:txBody>
-          <a:bodyPr wrap="square" lIns="0" rIns="0" tIns="0" bIns="0">
-            <a:spAutoFit/>
-          </a:bodyPr>
-          <a:lstStyle/>
-          <a:p>
-            <a:pPr algn="r"/>
-            <a:r>
-              <a:rPr sz="1150" b="0" i="0">
+          <p:cNvPr id="72" name="TextBox 71"/>
+          <p:cNvSpPr txBox="1"/>
+          <p:nvPr/>
+        </p:nvSpPr>
+        <p:spPr>
+          <a:xfrm>
+            <a:off x="5202936" y="3063240"/>
+            <a:ext cx="868680" cy="192024"/>
+          </a:xfrm>
+          <a:prstGeom prst="rect">
+            <a:avLst/>
+          </a:prstGeom>
+          <a:noFill/>
+        </p:spPr>
+        <p:txBody>
+          <a:bodyPr wrap="square" lIns="0" rIns="0" tIns="0" bIns="0">
+            <a:spAutoFit/>
+          </a:bodyPr>
+          <a:lstStyle/>
+          <a:p>
+            <a:pPr algn="r"/>
+            <a:r>
+              <a:rPr sz="1050" b="0" i="0">
+                <a:solidFill>
+                  <a:srgbClr val="212529"/>
+                </a:solidFill>
+                <a:latin typeface="Garamond"/>
+              </a:rPr>
+              <a:t>9,466</a:t>
+            </a:r>
+          </a:p>
+        </p:txBody>
+      </p:sp>
+      <p:sp>
+        <p:nvSpPr>
+          <p:cNvPr id="73" name="TextBox 72"/>
+          <p:cNvSpPr txBox="1"/>
+          <p:nvPr/>
+        </p:nvSpPr>
+        <p:spPr>
+          <a:xfrm>
+            <a:off x="6071616" y="3063240"/>
+            <a:ext cx="868680" cy="192024"/>
+          </a:xfrm>
+          <a:prstGeom prst="rect">
+            <a:avLst/>
+          </a:prstGeom>
+          <a:noFill/>
+        </p:spPr>
+        <p:txBody>
+          <a:bodyPr wrap="square" lIns="0" rIns="0" tIns="0" bIns="0">
+            <a:spAutoFit/>
+          </a:bodyPr>
+          <a:lstStyle/>
+          <a:p>
+            <a:pPr algn="r"/>
+            <a:r>
+              <a:rPr sz="1050" b="0" i="0">
+                <a:solidFill>
+                  <a:srgbClr val="212529"/>
+                </a:solidFill>
+                <a:latin typeface="Garamond"/>
+              </a:rPr>
+              <a:t>71,715</a:t>
+            </a:r>
+          </a:p>
+        </p:txBody>
+      </p:sp>
+      <p:sp>
+        <p:nvSpPr>
+          <p:cNvPr id="74" name="TextBox 73"/>
+          <p:cNvSpPr txBox="1"/>
+          <p:nvPr/>
+        </p:nvSpPr>
+        <p:spPr>
+          <a:xfrm>
+            <a:off x="7251192" y="3063240"/>
+            <a:ext cx="731520" cy="192024"/>
+          </a:xfrm>
+          <a:prstGeom prst="rect">
+            <a:avLst/>
+          </a:prstGeom>
+          <a:noFill/>
+        </p:spPr>
+        <p:txBody>
+          <a:bodyPr wrap="square" lIns="0" rIns="0" tIns="0" bIns="0">
+            <a:spAutoFit/>
+          </a:bodyPr>
+          <a:lstStyle/>
+          <a:p>
+            <a:pPr algn="r"/>
+            <a:r>
+              <a:rPr sz="1050" b="0" i="0">
                 <a:solidFill>
                   <a:srgbClr val="212529"/>
                 </a:solidFill>
@@ -9712,49 +10418,84 @@
       </p:sp>
       <p:sp>
         <p:nvSpPr>
-          <p:cNvPr id="55" name="TextBox 54"/>
-          <p:cNvSpPr txBox="1"/>
-          <p:nvPr/>
-        </p:nvSpPr>
-        <p:spPr>
-          <a:xfrm>
-            <a:off x="7891271" y="2944367"/>
-            <a:ext cx="1115568" cy="210312"/>
-          </a:xfrm>
-          <a:prstGeom prst="rect">
-            <a:avLst/>
-          </a:prstGeom>
-          <a:noFill/>
-        </p:spPr>
-        <p:txBody>
-          <a:bodyPr wrap="square" lIns="0" rIns="0" tIns="0" bIns="0">
-            <a:spAutoFit/>
-          </a:bodyPr>
-          <a:lstStyle/>
-          <a:p>
-            <a:pPr algn="r"/>
-            <a:r>
-              <a:rPr sz="1150" b="0" i="0">
-                <a:solidFill>
-                  <a:srgbClr val="212529"/>
-                </a:solidFill>
-                <a:latin typeface="Garamond"/>
-              </a:rPr>
-              <a:t>65,009</a:t>
-            </a:r>
-          </a:p>
-        </p:txBody>
-      </p:sp>
-      <p:sp>
-        <p:nvSpPr>
-          <p:cNvPr id="56" name="TextBox 55"/>
-          <p:cNvSpPr txBox="1"/>
-          <p:nvPr/>
-        </p:nvSpPr>
-        <p:spPr>
-          <a:xfrm>
-            <a:off x="731520" y="3174796"/>
-            <a:ext cx="1417320" cy="210312"/>
+          <p:cNvPr id="75" name="TextBox 74"/>
+          <p:cNvSpPr txBox="1"/>
+          <p:nvPr/>
+        </p:nvSpPr>
+        <p:spPr>
+          <a:xfrm>
+            <a:off x="7982712" y="3063240"/>
+            <a:ext cx="868680" cy="192024"/>
+          </a:xfrm>
+          <a:prstGeom prst="rect">
+            <a:avLst/>
+          </a:prstGeom>
+          <a:noFill/>
+        </p:spPr>
+        <p:txBody>
+          <a:bodyPr wrap="square" lIns="0" rIns="0" tIns="0" bIns="0">
+            <a:spAutoFit/>
+          </a:bodyPr>
+          <a:lstStyle/>
+          <a:p>
+            <a:pPr algn="r"/>
+            <a:r>
+              <a:rPr sz="1050" b="0" i="0">
+                <a:solidFill>
+                  <a:srgbClr val="212529"/>
+                </a:solidFill>
+                <a:latin typeface="Garamond"/>
+              </a:rPr>
+              <a:t>9,300</a:t>
+            </a:r>
+          </a:p>
+        </p:txBody>
+      </p:sp>
+      <p:sp>
+        <p:nvSpPr>
+          <p:cNvPr id="76" name="TextBox 75"/>
+          <p:cNvSpPr txBox="1"/>
+          <p:nvPr/>
+        </p:nvSpPr>
+        <p:spPr>
+          <a:xfrm>
+            <a:off x="8851392" y="3063240"/>
+            <a:ext cx="868680" cy="192024"/>
+          </a:xfrm>
+          <a:prstGeom prst="rect">
+            <a:avLst/>
+          </a:prstGeom>
+          <a:noFill/>
+        </p:spPr>
+        <p:txBody>
+          <a:bodyPr wrap="square" lIns="0" rIns="0" tIns="0" bIns="0">
+            <a:spAutoFit/>
+          </a:bodyPr>
+          <a:lstStyle/>
+          <a:p>
+            <a:pPr algn="r"/>
+            <a:r>
+              <a:rPr sz="1050" b="0" i="0">
+                <a:solidFill>
+                  <a:srgbClr val="212529"/>
+                </a:solidFill>
+                <a:latin typeface="Garamond"/>
+              </a:rPr>
+              <a:t>55,709</a:t>
+            </a:r>
+          </a:p>
+        </p:txBody>
+      </p:sp>
+      <p:sp>
+        <p:nvSpPr>
+          <p:cNvPr id="77" name="TextBox 76"/>
+          <p:cNvSpPr txBox="1"/>
+          <p:nvPr/>
+        </p:nvSpPr>
+        <p:spPr>
+          <a:xfrm>
+            <a:off x="502920" y="3280867"/>
+            <a:ext cx="1188720" cy="192024"/>
           </a:xfrm>
           <a:prstGeom prst="rect">
             <a:avLst/>
@@ -9769,7 +10510,7 @@
           <a:p>
             <a:pPr algn="l"/>
             <a:r>
-              <a:rPr sz="1150" b="0" i="0">
+              <a:rPr sz="1050" b="0" i="0">
                 <a:solidFill>
                   <a:srgbClr val="212529"/>
                 </a:solidFill>
@@ -9782,29 +10523,29 @@
       </p:sp>
       <p:sp>
         <p:nvSpPr>
-          <p:cNvPr id="57" name="TextBox 56"/>
-          <p:cNvSpPr txBox="1"/>
-          <p:nvPr/>
-        </p:nvSpPr>
-        <p:spPr>
-          <a:xfrm>
-            <a:off x="2148840" y="3174796"/>
-            <a:ext cx="914400" cy="210312"/>
-          </a:xfrm>
-          <a:prstGeom prst="rect">
-            <a:avLst/>
-          </a:prstGeom>
-          <a:noFill/>
-        </p:spPr>
-        <p:txBody>
-          <a:bodyPr wrap="square" lIns="0" rIns="0" tIns="0" bIns="0">
-            <a:spAutoFit/>
-          </a:bodyPr>
-          <a:lstStyle/>
-          <a:p>
-            <a:pPr algn="r"/>
-            <a:r>
-              <a:rPr sz="1150" b="0" i="0">
+          <p:cNvPr id="78" name="TextBox 77"/>
+          <p:cNvSpPr txBox="1"/>
+          <p:nvPr/>
+        </p:nvSpPr>
+        <p:spPr>
+          <a:xfrm>
+            <a:off x="1691640" y="3280867"/>
+            <a:ext cx="731520" cy="192024"/>
+          </a:xfrm>
+          <a:prstGeom prst="rect">
+            <a:avLst/>
+          </a:prstGeom>
+          <a:noFill/>
+        </p:spPr>
+        <p:txBody>
+          <a:bodyPr wrap="square" lIns="0" rIns="0" tIns="0" bIns="0">
+            <a:spAutoFit/>
+          </a:bodyPr>
+          <a:lstStyle/>
+          <a:p>
+            <a:pPr algn="r"/>
+            <a:r>
+              <a:rPr sz="1050" b="0" i="0">
                 <a:solidFill>
                   <a:srgbClr val="212529"/>
                 </a:solidFill>
@@ -9817,64 +10558,99 @@
       </p:sp>
       <p:sp>
         <p:nvSpPr>
-          <p:cNvPr id="58" name="TextBox 57"/>
-          <p:cNvSpPr txBox="1"/>
-          <p:nvPr/>
-        </p:nvSpPr>
-        <p:spPr>
-          <a:xfrm>
-            <a:off x="3063240" y="3174796"/>
-            <a:ext cx="1115568" cy="210312"/>
-          </a:xfrm>
-          <a:prstGeom prst="rect">
-            <a:avLst/>
-          </a:prstGeom>
-          <a:noFill/>
-        </p:spPr>
-        <p:txBody>
-          <a:bodyPr wrap="square" lIns="0" rIns="0" tIns="0" bIns="0">
-            <a:spAutoFit/>
-          </a:bodyPr>
-          <a:lstStyle/>
-          <a:p>
-            <a:pPr algn="r"/>
-            <a:r>
-              <a:rPr sz="1150" b="0" i="0">
-                <a:solidFill>
-                  <a:srgbClr val="212529"/>
-                </a:solidFill>
-                <a:latin typeface="Garamond"/>
-              </a:rPr>
-              <a:t>85,208</a:t>
-            </a:r>
-          </a:p>
-        </p:txBody>
-      </p:sp>
-      <p:sp>
-        <p:nvSpPr>
-          <p:cNvPr id="59" name="TextBox 58"/>
-          <p:cNvSpPr txBox="1"/>
-          <p:nvPr/>
-        </p:nvSpPr>
-        <p:spPr>
-          <a:xfrm>
-            <a:off x="4562856" y="3174796"/>
-            <a:ext cx="914400" cy="210312"/>
-          </a:xfrm>
-          <a:prstGeom prst="rect">
-            <a:avLst/>
-          </a:prstGeom>
-          <a:noFill/>
-        </p:spPr>
-        <p:txBody>
-          <a:bodyPr wrap="square" lIns="0" rIns="0" tIns="0" bIns="0">
-            <a:spAutoFit/>
-          </a:bodyPr>
-          <a:lstStyle/>
-          <a:p>
-            <a:pPr algn="r"/>
-            <a:r>
-              <a:rPr sz="1150" b="0" i="0">
+          <p:cNvPr id="79" name="TextBox 78"/>
+          <p:cNvSpPr txBox="1"/>
+          <p:nvPr/>
+        </p:nvSpPr>
+        <p:spPr>
+          <a:xfrm>
+            <a:off x="2423160" y="3280867"/>
+            <a:ext cx="868680" cy="192024"/>
+          </a:xfrm>
+          <a:prstGeom prst="rect">
+            <a:avLst/>
+          </a:prstGeom>
+          <a:noFill/>
+        </p:spPr>
+        <p:txBody>
+          <a:bodyPr wrap="square" lIns="0" rIns="0" tIns="0" bIns="0">
+            <a:spAutoFit/>
+          </a:bodyPr>
+          <a:lstStyle/>
+          <a:p>
+            <a:pPr algn="r"/>
+            <a:r>
+              <a:rPr sz="1050" b="0" i="0">
+                <a:solidFill>
+                  <a:srgbClr val="212529"/>
+                </a:solidFill>
+                <a:latin typeface="Garamond"/>
+              </a:rPr>
+              <a:t>11,617</a:t>
+            </a:r>
+          </a:p>
+        </p:txBody>
+      </p:sp>
+      <p:sp>
+        <p:nvSpPr>
+          <p:cNvPr id="80" name="TextBox 79"/>
+          <p:cNvSpPr txBox="1"/>
+          <p:nvPr/>
+        </p:nvSpPr>
+        <p:spPr>
+          <a:xfrm>
+            <a:off x="3291840" y="3280867"/>
+            <a:ext cx="868680" cy="192024"/>
+          </a:xfrm>
+          <a:prstGeom prst="rect">
+            <a:avLst/>
+          </a:prstGeom>
+          <a:noFill/>
+        </p:spPr>
+        <p:txBody>
+          <a:bodyPr wrap="square" lIns="0" rIns="0" tIns="0" bIns="0">
+            <a:spAutoFit/>
+          </a:bodyPr>
+          <a:lstStyle/>
+          <a:p>
+            <a:pPr algn="r"/>
+            <a:r>
+              <a:rPr sz="1050" b="0" i="0">
+                <a:solidFill>
+                  <a:srgbClr val="212529"/>
+                </a:solidFill>
+                <a:latin typeface="Garamond"/>
+              </a:rPr>
+              <a:t>73,591</a:t>
+            </a:r>
+          </a:p>
+        </p:txBody>
+      </p:sp>
+      <p:sp>
+        <p:nvSpPr>
+          <p:cNvPr id="81" name="TextBox 80"/>
+          <p:cNvSpPr txBox="1"/>
+          <p:nvPr/>
+        </p:nvSpPr>
+        <p:spPr>
+          <a:xfrm>
+            <a:off x="4471416" y="3280867"/>
+            <a:ext cx="731520" cy="192024"/>
+          </a:xfrm>
+          <a:prstGeom prst="rect">
+            <a:avLst/>
+          </a:prstGeom>
+          <a:noFill/>
+        </p:spPr>
+        <p:txBody>
+          <a:bodyPr wrap="square" lIns="0" rIns="0" tIns="0" bIns="0">
+            <a:spAutoFit/>
+          </a:bodyPr>
+          <a:lstStyle/>
+          <a:p>
+            <a:pPr algn="r"/>
+            <a:r>
+              <a:rPr sz="1050" b="0" i="0">
                 <a:solidFill>
                   <a:srgbClr val="212529"/>
                 </a:solidFill>
@@ -9887,64 +10663,99 @@
       </p:sp>
       <p:sp>
         <p:nvSpPr>
-          <p:cNvPr id="60" name="TextBox 59"/>
-          <p:cNvSpPr txBox="1"/>
-          <p:nvPr/>
-        </p:nvSpPr>
-        <p:spPr>
-          <a:xfrm>
-            <a:off x="5477256" y="3174796"/>
-            <a:ext cx="1115568" cy="210312"/>
-          </a:xfrm>
-          <a:prstGeom prst="rect">
-            <a:avLst/>
-          </a:prstGeom>
-          <a:noFill/>
-        </p:spPr>
-        <p:txBody>
-          <a:bodyPr wrap="square" lIns="0" rIns="0" tIns="0" bIns="0">
-            <a:spAutoFit/>
-          </a:bodyPr>
-          <a:lstStyle/>
-          <a:p>
-            <a:pPr algn="r"/>
-            <a:r>
-              <a:rPr sz="1150" b="0" i="0">
-                <a:solidFill>
-                  <a:srgbClr val="212529"/>
-                </a:solidFill>
-                <a:latin typeface="Garamond"/>
-              </a:rPr>
-              <a:t>80,187</a:t>
-            </a:r>
-          </a:p>
-        </p:txBody>
-      </p:sp>
-      <p:sp>
-        <p:nvSpPr>
-          <p:cNvPr id="61" name="TextBox 60"/>
-          <p:cNvSpPr txBox="1"/>
-          <p:nvPr/>
-        </p:nvSpPr>
-        <p:spPr>
-          <a:xfrm>
-            <a:off x="6976871" y="3174796"/>
-            <a:ext cx="914400" cy="210312"/>
-          </a:xfrm>
-          <a:prstGeom prst="rect">
-            <a:avLst/>
-          </a:prstGeom>
-          <a:noFill/>
-        </p:spPr>
-        <p:txBody>
-          <a:bodyPr wrap="square" lIns="0" rIns="0" tIns="0" bIns="0">
-            <a:spAutoFit/>
-          </a:bodyPr>
-          <a:lstStyle/>
-          <a:p>
-            <a:pPr algn="r"/>
-            <a:r>
-              <a:rPr sz="1150" b="0" i="0">
+          <p:cNvPr id="82" name="TextBox 81"/>
+          <p:cNvSpPr txBox="1"/>
+          <p:nvPr/>
+        </p:nvSpPr>
+        <p:spPr>
+          <a:xfrm>
+            <a:off x="5202936" y="3280867"/>
+            <a:ext cx="868680" cy="192024"/>
+          </a:xfrm>
+          <a:prstGeom prst="rect">
+            <a:avLst/>
+          </a:prstGeom>
+          <a:noFill/>
+        </p:spPr>
+        <p:txBody>
+          <a:bodyPr wrap="square" lIns="0" rIns="0" tIns="0" bIns="0">
+            <a:spAutoFit/>
+          </a:bodyPr>
+          <a:lstStyle/>
+          <a:p>
+            <a:pPr algn="r"/>
+            <a:r>
+              <a:rPr sz="1050" b="0" i="0">
+                <a:solidFill>
+                  <a:srgbClr val="212529"/>
+                </a:solidFill>
+                <a:latin typeface="Garamond"/>
+              </a:rPr>
+              <a:t>9,677</a:t>
+            </a:r>
+          </a:p>
+        </p:txBody>
+      </p:sp>
+      <p:sp>
+        <p:nvSpPr>
+          <p:cNvPr id="83" name="TextBox 82"/>
+          <p:cNvSpPr txBox="1"/>
+          <p:nvPr/>
+        </p:nvSpPr>
+        <p:spPr>
+          <a:xfrm>
+            <a:off x="6071616" y="3280867"/>
+            <a:ext cx="868680" cy="192024"/>
+          </a:xfrm>
+          <a:prstGeom prst="rect">
+            <a:avLst/>
+          </a:prstGeom>
+          <a:noFill/>
+        </p:spPr>
+        <p:txBody>
+          <a:bodyPr wrap="square" lIns="0" rIns="0" tIns="0" bIns="0">
+            <a:spAutoFit/>
+          </a:bodyPr>
+          <a:lstStyle/>
+          <a:p>
+            <a:pPr algn="r"/>
+            <a:r>
+              <a:rPr sz="1050" b="0" i="0">
+                <a:solidFill>
+                  <a:srgbClr val="212529"/>
+                </a:solidFill>
+                <a:latin typeface="Garamond"/>
+              </a:rPr>
+              <a:t>70,510</a:t>
+            </a:r>
+          </a:p>
+        </p:txBody>
+      </p:sp>
+      <p:sp>
+        <p:nvSpPr>
+          <p:cNvPr id="84" name="TextBox 83"/>
+          <p:cNvSpPr txBox="1"/>
+          <p:nvPr/>
+        </p:nvSpPr>
+        <p:spPr>
+          <a:xfrm>
+            <a:off x="7251192" y="3280867"/>
+            <a:ext cx="731520" cy="192024"/>
+          </a:xfrm>
+          <a:prstGeom prst="rect">
+            <a:avLst/>
+          </a:prstGeom>
+          <a:noFill/>
+        </p:spPr>
+        <p:txBody>
+          <a:bodyPr wrap="square" lIns="0" rIns="0" tIns="0" bIns="0">
+            <a:spAutoFit/>
+          </a:bodyPr>
+          <a:lstStyle/>
+          <a:p>
+            <a:pPr algn="r"/>
+            <a:r>
+              <a:rPr sz="1050" b="0" i="0">
                 <a:solidFill>
                   <a:srgbClr val="212529"/>
                 </a:solidFill>
@@ -9957,49 +10768,84 @@
       </p:sp>
       <p:sp>
         <p:nvSpPr>
-          <p:cNvPr id="62" name="TextBox 61"/>
-          <p:cNvSpPr txBox="1"/>
-          <p:nvPr/>
-        </p:nvSpPr>
-        <p:spPr>
-          <a:xfrm>
-            <a:off x="7891271" y="3174796"/>
-            <a:ext cx="1115568" cy="210312"/>
-          </a:xfrm>
-          <a:prstGeom prst="rect">
-            <a:avLst/>
-          </a:prstGeom>
-          <a:noFill/>
-        </p:spPr>
-        <p:txBody>
-          <a:bodyPr wrap="square" lIns="0" rIns="0" tIns="0" bIns="0">
-            <a:spAutoFit/>
-          </a:bodyPr>
-          <a:lstStyle/>
-          <a:p>
-            <a:pPr algn="r"/>
-            <a:r>
-              <a:rPr sz="1150" b="0" i="0">
-                <a:solidFill>
-                  <a:srgbClr val="212529"/>
-                </a:solidFill>
-                <a:latin typeface="Garamond"/>
-              </a:rPr>
-              <a:t>64,891</a:t>
-            </a:r>
-          </a:p>
-        </p:txBody>
-      </p:sp>
-      <p:sp>
-        <p:nvSpPr>
-          <p:cNvPr id="63" name="TextBox 62"/>
-          <p:cNvSpPr txBox="1"/>
-          <p:nvPr/>
-        </p:nvSpPr>
-        <p:spPr>
-          <a:xfrm>
-            <a:off x="731520" y="3405225"/>
-            <a:ext cx="1417320" cy="210312"/>
+          <p:cNvPr id="85" name="TextBox 84"/>
+          <p:cNvSpPr txBox="1"/>
+          <p:nvPr/>
+        </p:nvSpPr>
+        <p:spPr>
+          <a:xfrm>
+            <a:off x="7982712" y="3280867"/>
+            <a:ext cx="868680" cy="192024"/>
+          </a:xfrm>
+          <a:prstGeom prst="rect">
+            <a:avLst/>
+          </a:prstGeom>
+          <a:noFill/>
+        </p:spPr>
+        <p:txBody>
+          <a:bodyPr wrap="square" lIns="0" rIns="0" tIns="0" bIns="0">
+            <a:spAutoFit/>
+          </a:bodyPr>
+          <a:lstStyle/>
+          <a:p>
+            <a:pPr algn="r"/>
+            <a:r>
+              <a:rPr sz="1050" b="0" i="0">
+                <a:solidFill>
+                  <a:srgbClr val="212529"/>
+                </a:solidFill>
+                <a:latin typeface="Garamond"/>
+              </a:rPr>
+              <a:t>9,406</a:t>
+            </a:r>
+          </a:p>
+        </p:txBody>
+      </p:sp>
+      <p:sp>
+        <p:nvSpPr>
+          <p:cNvPr id="86" name="TextBox 85"/>
+          <p:cNvSpPr txBox="1"/>
+          <p:nvPr/>
+        </p:nvSpPr>
+        <p:spPr>
+          <a:xfrm>
+            <a:off x="8851392" y="3280867"/>
+            <a:ext cx="868680" cy="192024"/>
+          </a:xfrm>
+          <a:prstGeom prst="rect">
+            <a:avLst/>
+          </a:prstGeom>
+          <a:noFill/>
+        </p:spPr>
+        <p:txBody>
+          <a:bodyPr wrap="square" lIns="0" rIns="0" tIns="0" bIns="0">
+            <a:spAutoFit/>
+          </a:bodyPr>
+          <a:lstStyle/>
+          <a:p>
+            <a:pPr algn="r"/>
+            <a:r>
+              <a:rPr sz="1050" b="0" i="0">
+                <a:solidFill>
+                  <a:srgbClr val="212529"/>
+                </a:solidFill>
+                <a:latin typeface="Garamond"/>
+              </a:rPr>
+              <a:t>55,485</a:t>
+            </a:r>
+          </a:p>
+        </p:txBody>
+      </p:sp>
+      <p:sp>
+        <p:nvSpPr>
+          <p:cNvPr id="87" name="TextBox 86"/>
+          <p:cNvSpPr txBox="1"/>
+          <p:nvPr/>
+        </p:nvSpPr>
+        <p:spPr>
+          <a:xfrm>
+            <a:off x="502920" y="3498494"/>
+            <a:ext cx="1188720" cy="192024"/>
           </a:xfrm>
           <a:prstGeom prst="rect">
             <a:avLst/>
@@ -10014,7 +10860,7 @@
           <a:p>
             <a:pPr algn="l"/>
             <a:r>
-              <a:rPr sz="1150" b="0" i="0">
+              <a:rPr sz="1050" b="0" i="0">
                 <a:solidFill>
                   <a:srgbClr val="212529"/>
                 </a:solidFill>
@@ -10027,29 +10873,29 @@
       </p:sp>
       <p:sp>
         <p:nvSpPr>
-          <p:cNvPr id="64" name="TextBox 63"/>
-          <p:cNvSpPr txBox="1"/>
-          <p:nvPr/>
-        </p:nvSpPr>
-        <p:spPr>
-          <a:xfrm>
-            <a:off x="2148840" y="3405225"/>
-            <a:ext cx="914400" cy="210312"/>
-          </a:xfrm>
-          <a:prstGeom prst="rect">
-            <a:avLst/>
-          </a:prstGeom>
-          <a:noFill/>
-        </p:spPr>
-        <p:txBody>
-          <a:bodyPr wrap="square" lIns="0" rIns="0" tIns="0" bIns="0">
-            <a:spAutoFit/>
-          </a:bodyPr>
-          <a:lstStyle/>
-          <a:p>
-            <a:pPr algn="r"/>
-            <a:r>
-              <a:rPr sz="1150" b="0" i="0">
+          <p:cNvPr id="88" name="TextBox 87"/>
+          <p:cNvSpPr txBox="1"/>
+          <p:nvPr/>
+        </p:nvSpPr>
+        <p:spPr>
+          <a:xfrm>
+            <a:off x="1691640" y="3498494"/>
+            <a:ext cx="731520" cy="192024"/>
+          </a:xfrm>
+          <a:prstGeom prst="rect">
+            <a:avLst/>
+          </a:prstGeom>
+          <a:noFill/>
+        </p:spPr>
+        <p:txBody>
+          <a:bodyPr wrap="square" lIns="0" rIns="0" tIns="0" bIns="0">
+            <a:spAutoFit/>
+          </a:bodyPr>
+          <a:lstStyle/>
+          <a:p>
+            <a:pPr algn="r"/>
+            <a:r>
+              <a:rPr sz="1050" b="0" i="0">
                 <a:solidFill>
                   <a:srgbClr val="212529"/>
                 </a:solidFill>
@@ -10062,64 +10908,99 @@
       </p:sp>
       <p:sp>
         <p:nvSpPr>
-          <p:cNvPr id="65" name="TextBox 64"/>
-          <p:cNvSpPr txBox="1"/>
-          <p:nvPr/>
-        </p:nvSpPr>
-        <p:spPr>
-          <a:xfrm>
-            <a:off x="3063240" y="3405225"/>
-            <a:ext cx="1115568" cy="210312"/>
-          </a:xfrm>
-          <a:prstGeom prst="rect">
-            <a:avLst/>
-          </a:prstGeom>
-          <a:noFill/>
-        </p:spPr>
-        <p:txBody>
-          <a:bodyPr wrap="square" lIns="0" rIns="0" tIns="0" bIns="0">
-            <a:spAutoFit/>
-          </a:bodyPr>
-          <a:lstStyle/>
-          <a:p>
-            <a:pPr algn="r"/>
-            <a:r>
-              <a:rPr sz="1150" b="0" i="0">
-                <a:solidFill>
-                  <a:srgbClr val="212529"/>
-                </a:solidFill>
-                <a:latin typeface="Garamond"/>
-              </a:rPr>
-              <a:t>85,571</a:t>
-            </a:r>
-          </a:p>
-        </p:txBody>
-      </p:sp>
-      <p:sp>
-        <p:nvSpPr>
-          <p:cNvPr id="66" name="TextBox 65"/>
-          <p:cNvSpPr txBox="1"/>
-          <p:nvPr/>
-        </p:nvSpPr>
-        <p:spPr>
-          <a:xfrm>
-            <a:off x="4562856" y="3405225"/>
-            <a:ext cx="914400" cy="210312"/>
-          </a:xfrm>
-          <a:prstGeom prst="rect">
-            <a:avLst/>
-          </a:prstGeom>
-          <a:noFill/>
-        </p:spPr>
-        <p:txBody>
-          <a:bodyPr wrap="square" lIns="0" rIns="0" tIns="0" bIns="0">
-            <a:spAutoFit/>
-          </a:bodyPr>
-          <a:lstStyle/>
-          <a:p>
-            <a:pPr algn="r"/>
-            <a:r>
-              <a:rPr sz="1150" b="0" i="0">
+          <p:cNvPr id="89" name="TextBox 88"/>
+          <p:cNvSpPr txBox="1"/>
+          <p:nvPr/>
+        </p:nvSpPr>
+        <p:spPr>
+          <a:xfrm>
+            <a:off x="2423160" y="3498494"/>
+            <a:ext cx="868680" cy="192024"/>
+          </a:xfrm>
+          <a:prstGeom prst="rect">
+            <a:avLst/>
+          </a:prstGeom>
+          <a:noFill/>
+        </p:spPr>
+        <p:txBody>
+          <a:bodyPr wrap="square" lIns="0" rIns="0" tIns="0" bIns="0">
+            <a:spAutoFit/>
+          </a:bodyPr>
+          <a:lstStyle/>
+          <a:p>
+            <a:pPr algn="r"/>
+            <a:r>
+              <a:rPr sz="1050" b="0" i="0">
+                <a:solidFill>
+                  <a:srgbClr val="212529"/>
+                </a:solidFill>
+                <a:latin typeface="Garamond"/>
+              </a:rPr>
+              <a:t>11,393</a:t>
+            </a:r>
+          </a:p>
+        </p:txBody>
+      </p:sp>
+      <p:sp>
+        <p:nvSpPr>
+          <p:cNvPr id="90" name="TextBox 89"/>
+          <p:cNvSpPr txBox="1"/>
+          <p:nvPr/>
+        </p:nvSpPr>
+        <p:spPr>
+          <a:xfrm>
+            <a:off x="3291840" y="3498494"/>
+            <a:ext cx="868680" cy="192024"/>
+          </a:xfrm>
+          <a:prstGeom prst="rect">
+            <a:avLst/>
+          </a:prstGeom>
+          <a:noFill/>
+        </p:spPr>
+        <p:txBody>
+          <a:bodyPr wrap="square" lIns="0" rIns="0" tIns="0" bIns="0">
+            <a:spAutoFit/>
+          </a:bodyPr>
+          <a:lstStyle/>
+          <a:p>
+            <a:pPr algn="r"/>
+            <a:r>
+              <a:rPr sz="1050" b="0" i="0">
+                <a:solidFill>
+                  <a:srgbClr val="212529"/>
+                </a:solidFill>
+                <a:latin typeface="Garamond"/>
+              </a:rPr>
+              <a:t>74,178</a:t>
+            </a:r>
+          </a:p>
+        </p:txBody>
+      </p:sp>
+      <p:sp>
+        <p:nvSpPr>
+          <p:cNvPr id="91" name="TextBox 90"/>
+          <p:cNvSpPr txBox="1"/>
+          <p:nvPr/>
+        </p:nvSpPr>
+        <p:spPr>
+          <a:xfrm>
+            <a:off x="4471416" y="3498494"/>
+            <a:ext cx="731520" cy="192024"/>
+          </a:xfrm>
+          <a:prstGeom prst="rect">
+            <a:avLst/>
+          </a:prstGeom>
+          <a:noFill/>
+        </p:spPr>
+        <p:txBody>
+          <a:bodyPr wrap="square" lIns="0" rIns="0" tIns="0" bIns="0">
+            <a:spAutoFit/>
+          </a:bodyPr>
+          <a:lstStyle/>
+          <a:p>
+            <a:pPr algn="r"/>
+            <a:r>
+              <a:rPr sz="1050" b="0" i="0">
                 <a:solidFill>
                   <a:srgbClr val="212529"/>
                 </a:solidFill>
@@ -10132,64 +11013,99 @@
       </p:sp>
       <p:sp>
         <p:nvSpPr>
-          <p:cNvPr id="67" name="TextBox 66"/>
-          <p:cNvSpPr txBox="1"/>
-          <p:nvPr/>
-        </p:nvSpPr>
-        <p:spPr>
-          <a:xfrm>
-            <a:off x="5477256" y="3405225"/>
-            <a:ext cx="1115568" cy="210312"/>
-          </a:xfrm>
-          <a:prstGeom prst="rect">
-            <a:avLst/>
-          </a:prstGeom>
-          <a:noFill/>
-        </p:spPr>
-        <p:txBody>
-          <a:bodyPr wrap="square" lIns="0" rIns="0" tIns="0" bIns="0">
-            <a:spAutoFit/>
-          </a:bodyPr>
-          <a:lstStyle/>
-          <a:p>
-            <a:pPr algn="r"/>
-            <a:r>
-              <a:rPr sz="1150" b="0" i="0">
-                <a:solidFill>
-                  <a:srgbClr val="212529"/>
-                </a:solidFill>
-                <a:latin typeface="Garamond"/>
-              </a:rPr>
-              <a:t>82,918</a:t>
-            </a:r>
-          </a:p>
-        </p:txBody>
-      </p:sp>
-      <p:sp>
-        <p:nvSpPr>
-          <p:cNvPr id="68" name="TextBox 67"/>
-          <p:cNvSpPr txBox="1"/>
-          <p:nvPr/>
-        </p:nvSpPr>
-        <p:spPr>
-          <a:xfrm>
-            <a:off x="6976871" y="3405225"/>
-            <a:ext cx="914400" cy="210312"/>
-          </a:xfrm>
-          <a:prstGeom prst="rect">
-            <a:avLst/>
-          </a:prstGeom>
-          <a:noFill/>
-        </p:spPr>
-        <p:txBody>
-          <a:bodyPr wrap="square" lIns="0" rIns="0" tIns="0" bIns="0">
-            <a:spAutoFit/>
-          </a:bodyPr>
-          <a:lstStyle/>
-          <a:p>
-            <a:pPr algn="r"/>
-            <a:r>
-              <a:rPr sz="1150" b="0" i="0">
+          <p:cNvPr id="92" name="TextBox 91"/>
+          <p:cNvSpPr txBox="1"/>
+          <p:nvPr/>
+        </p:nvSpPr>
+        <p:spPr>
+          <a:xfrm>
+            <a:off x="5202936" y="3498494"/>
+            <a:ext cx="868680" cy="192024"/>
+          </a:xfrm>
+          <a:prstGeom prst="rect">
+            <a:avLst/>
+          </a:prstGeom>
+          <a:noFill/>
+        </p:spPr>
+        <p:txBody>
+          <a:bodyPr wrap="square" lIns="0" rIns="0" tIns="0" bIns="0">
+            <a:spAutoFit/>
+          </a:bodyPr>
+          <a:lstStyle/>
+          <a:p>
+            <a:pPr algn="r"/>
+            <a:r>
+              <a:rPr sz="1050" b="0" i="0">
+                <a:solidFill>
+                  <a:srgbClr val="212529"/>
+                </a:solidFill>
+                <a:latin typeface="Garamond"/>
+              </a:rPr>
+              <a:t>11,330</a:t>
+            </a:r>
+          </a:p>
+        </p:txBody>
+      </p:sp>
+      <p:sp>
+        <p:nvSpPr>
+          <p:cNvPr id="93" name="TextBox 92"/>
+          <p:cNvSpPr txBox="1"/>
+          <p:nvPr/>
+        </p:nvSpPr>
+        <p:spPr>
+          <a:xfrm>
+            <a:off x="6071616" y="3498494"/>
+            <a:ext cx="868680" cy="192024"/>
+          </a:xfrm>
+          <a:prstGeom prst="rect">
+            <a:avLst/>
+          </a:prstGeom>
+          <a:noFill/>
+        </p:spPr>
+        <p:txBody>
+          <a:bodyPr wrap="square" lIns="0" rIns="0" tIns="0" bIns="0">
+            <a:spAutoFit/>
+          </a:bodyPr>
+          <a:lstStyle/>
+          <a:p>
+            <a:pPr algn="r"/>
+            <a:r>
+              <a:rPr sz="1050" b="0" i="0">
+                <a:solidFill>
+                  <a:srgbClr val="212529"/>
+                </a:solidFill>
+                <a:latin typeface="Garamond"/>
+              </a:rPr>
+              <a:t>71,588</a:t>
+            </a:r>
+          </a:p>
+        </p:txBody>
+      </p:sp>
+      <p:sp>
+        <p:nvSpPr>
+          <p:cNvPr id="94" name="TextBox 93"/>
+          <p:cNvSpPr txBox="1"/>
+          <p:nvPr/>
+        </p:nvSpPr>
+        <p:spPr>
+          <a:xfrm>
+            <a:off x="7251192" y="3498494"/>
+            <a:ext cx="731520" cy="192024"/>
+          </a:xfrm>
+          <a:prstGeom prst="rect">
+            <a:avLst/>
+          </a:prstGeom>
+          <a:noFill/>
+        </p:spPr>
+        <p:txBody>
+          <a:bodyPr wrap="square" lIns="0" rIns="0" tIns="0" bIns="0">
+            <a:spAutoFit/>
+          </a:bodyPr>
+          <a:lstStyle/>
+          <a:p>
+            <a:pPr algn="r"/>
+            <a:r>
+              <a:rPr sz="1050" b="0" i="0">
                 <a:solidFill>
                   <a:srgbClr val="212529"/>
                 </a:solidFill>
@@ -10202,49 +11118,84 @@
       </p:sp>
       <p:sp>
         <p:nvSpPr>
-          <p:cNvPr id="69" name="TextBox 68"/>
-          <p:cNvSpPr txBox="1"/>
-          <p:nvPr/>
-        </p:nvSpPr>
-        <p:spPr>
-          <a:xfrm>
-            <a:off x="7891271" y="3405225"/>
-            <a:ext cx="1115568" cy="210312"/>
-          </a:xfrm>
-          <a:prstGeom prst="rect">
-            <a:avLst/>
-          </a:prstGeom>
-          <a:noFill/>
-        </p:spPr>
-        <p:txBody>
-          <a:bodyPr wrap="square" lIns="0" rIns="0" tIns="0" bIns="0">
-            <a:spAutoFit/>
-          </a:bodyPr>
-          <a:lstStyle/>
-          <a:p>
-            <a:pPr algn="r"/>
-            <a:r>
-              <a:rPr sz="1150" b="0" i="0">
-                <a:solidFill>
-                  <a:srgbClr val="212529"/>
-                </a:solidFill>
-                <a:latin typeface="Garamond"/>
-              </a:rPr>
-              <a:t>65,221</a:t>
-            </a:r>
-          </a:p>
-        </p:txBody>
-      </p:sp>
-      <p:sp>
-        <p:nvSpPr>
-          <p:cNvPr id="70" name="TextBox 69"/>
-          <p:cNvSpPr txBox="1"/>
-          <p:nvPr/>
-        </p:nvSpPr>
-        <p:spPr>
-          <a:xfrm>
-            <a:off x="731520" y="3635654"/>
-            <a:ext cx="1417320" cy="210312"/>
+          <p:cNvPr id="95" name="TextBox 94"/>
+          <p:cNvSpPr txBox="1"/>
+          <p:nvPr/>
+        </p:nvSpPr>
+        <p:spPr>
+          <a:xfrm>
+            <a:off x="7982712" y="3498494"/>
+            <a:ext cx="868680" cy="192024"/>
+          </a:xfrm>
+          <a:prstGeom prst="rect">
+            <a:avLst/>
+          </a:prstGeom>
+          <a:noFill/>
+        </p:spPr>
+        <p:txBody>
+          <a:bodyPr wrap="square" lIns="0" rIns="0" tIns="0" bIns="0">
+            <a:spAutoFit/>
+          </a:bodyPr>
+          <a:lstStyle/>
+          <a:p>
+            <a:pPr algn="r"/>
+            <a:r>
+              <a:rPr sz="1050" b="0" i="0">
+                <a:solidFill>
+                  <a:srgbClr val="212529"/>
+                </a:solidFill>
+                <a:latin typeface="Garamond"/>
+              </a:rPr>
+              <a:t>9,493</a:t>
+            </a:r>
+          </a:p>
+        </p:txBody>
+      </p:sp>
+      <p:sp>
+        <p:nvSpPr>
+          <p:cNvPr id="96" name="TextBox 95"/>
+          <p:cNvSpPr txBox="1"/>
+          <p:nvPr/>
+        </p:nvSpPr>
+        <p:spPr>
+          <a:xfrm>
+            <a:off x="8851392" y="3498494"/>
+            <a:ext cx="868680" cy="192024"/>
+          </a:xfrm>
+          <a:prstGeom prst="rect">
+            <a:avLst/>
+          </a:prstGeom>
+          <a:noFill/>
+        </p:spPr>
+        <p:txBody>
+          <a:bodyPr wrap="square" lIns="0" rIns="0" tIns="0" bIns="0">
+            <a:spAutoFit/>
+          </a:bodyPr>
+          <a:lstStyle/>
+          <a:p>
+            <a:pPr algn="r"/>
+            <a:r>
+              <a:rPr sz="1050" b="0" i="0">
+                <a:solidFill>
+                  <a:srgbClr val="212529"/>
+                </a:solidFill>
+                <a:latin typeface="Garamond"/>
+              </a:rPr>
+              <a:t>55,728</a:t>
+            </a:r>
+          </a:p>
+        </p:txBody>
+      </p:sp>
+      <p:sp>
+        <p:nvSpPr>
+          <p:cNvPr id="97" name="TextBox 96"/>
+          <p:cNvSpPr txBox="1"/>
+          <p:nvPr/>
+        </p:nvSpPr>
+        <p:spPr>
+          <a:xfrm>
+            <a:off x="502920" y="3716121"/>
+            <a:ext cx="1188720" cy="192024"/>
           </a:xfrm>
           <a:prstGeom prst="rect">
             <a:avLst/>
@@ -10259,7 +11210,7 @@
           <a:p>
             <a:pPr algn="l"/>
             <a:r>
-              <a:rPr sz="1150" b="0" i="0">
+              <a:rPr sz="1050" b="0" i="0">
                 <a:solidFill>
                   <a:srgbClr val="212529"/>
                 </a:solidFill>
@@ -10272,29 +11223,29 @@
       </p:sp>
       <p:sp>
         <p:nvSpPr>
-          <p:cNvPr id="71" name="TextBox 70"/>
-          <p:cNvSpPr txBox="1"/>
-          <p:nvPr/>
-        </p:nvSpPr>
-        <p:spPr>
-          <a:xfrm>
-            <a:off x="2148840" y="3635654"/>
-            <a:ext cx="914400" cy="210312"/>
-          </a:xfrm>
-          <a:prstGeom prst="rect">
-            <a:avLst/>
-          </a:prstGeom>
-          <a:noFill/>
-        </p:spPr>
-        <p:txBody>
-          <a:bodyPr wrap="square" lIns="0" rIns="0" tIns="0" bIns="0">
-            <a:spAutoFit/>
-          </a:bodyPr>
-          <a:lstStyle/>
-          <a:p>
-            <a:pPr algn="r"/>
-            <a:r>
-              <a:rPr sz="1150" b="0" i="0">
+          <p:cNvPr id="98" name="TextBox 97"/>
+          <p:cNvSpPr txBox="1"/>
+          <p:nvPr/>
+        </p:nvSpPr>
+        <p:spPr>
+          <a:xfrm>
+            <a:off x="1691640" y="3716121"/>
+            <a:ext cx="731520" cy="192024"/>
+          </a:xfrm>
+          <a:prstGeom prst="rect">
+            <a:avLst/>
+          </a:prstGeom>
+          <a:noFill/>
+        </p:spPr>
+        <p:txBody>
+          <a:bodyPr wrap="square" lIns="0" rIns="0" tIns="0" bIns="0">
+            <a:spAutoFit/>
+          </a:bodyPr>
+          <a:lstStyle/>
+          <a:p>
+            <a:pPr algn="r"/>
+            <a:r>
+              <a:rPr sz="1050" b="0" i="0">
                 <a:solidFill>
                   <a:srgbClr val="212529"/>
                 </a:solidFill>
@@ -10307,64 +11258,99 @@
       </p:sp>
       <p:sp>
         <p:nvSpPr>
-          <p:cNvPr id="72" name="TextBox 71"/>
-          <p:cNvSpPr txBox="1"/>
-          <p:nvPr/>
-        </p:nvSpPr>
-        <p:spPr>
-          <a:xfrm>
-            <a:off x="3063240" y="3635654"/>
-            <a:ext cx="1115568" cy="210312"/>
-          </a:xfrm>
-          <a:prstGeom prst="rect">
-            <a:avLst/>
-          </a:prstGeom>
-          <a:noFill/>
-        </p:spPr>
-        <p:txBody>
-          <a:bodyPr wrap="square" lIns="0" rIns="0" tIns="0" bIns="0">
-            <a:spAutoFit/>
-          </a:bodyPr>
-          <a:lstStyle/>
-          <a:p>
-            <a:pPr algn="r"/>
-            <a:r>
-              <a:rPr sz="1150" b="0" i="0">
-                <a:solidFill>
-                  <a:srgbClr val="212529"/>
-                </a:solidFill>
-                <a:latin typeface="Garamond"/>
-              </a:rPr>
-              <a:t>85,113</a:t>
-            </a:r>
-          </a:p>
-        </p:txBody>
-      </p:sp>
-      <p:sp>
-        <p:nvSpPr>
-          <p:cNvPr id="73" name="TextBox 72"/>
-          <p:cNvSpPr txBox="1"/>
-          <p:nvPr/>
-        </p:nvSpPr>
-        <p:spPr>
-          <a:xfrm>
-            <a:off x="4562856" y="3635654"/>
-            <a:ext cx="914400" cy="210312"/>
-          </a:xfrm>
-          <a:prstGeom prst="rect">
-            <a:avLst/>
-          </a:prstGeom>
-          <a:noFill/>
-        </p:spPr>
-        <p:txBody>
-          <a:bodyPr wrap="square" lIns="0" rIns="0" tIns="0" bIns="0">
-            <a:spAutoFit/>
-          </a:bodyPr>
-          <a:lstStyle/>
-          <a:p>
-            <a:pPr algn="r"/>
-            <a:r>
-              <a:rPr sz="1150" b="0" i="0">
+          <p:cNvPr id="99" name="TextBox 98"/>
+          <p:cNvSpPr txBox="1"/>
+          <p:nvPr/>
+        </p:nvSpPr>
+        <p:spPr>
+          <a:xfrm>
+            <a:off x="2423160" y="3716121"/>
+            <a:ext cx="868680" cy="192024"/>
+          </a:xfrm>
+          <a:prstGeom prst="rect">
+            <a:avLst/>
+          </a:prstGeom>
+          <a:noFill/>
+        </p:spPr>
+        <p:txBody>
+          <a:bodyPr wrap="square" lIns="0" rIns="0" tIns="0" bIns="0">
+            <a:spAutoFit/>
+          </a:bodyPr>
+          <a:lstStyle/>
+          <a:p>
+            <a:pPr algn="r"/>
+            <a:r>
+              <a:rPr sz="1050" b="0" i="0">
+                <a:solidFill>
+                  <a:srgbClr val="212529"/>
+                </a:solidFill>
+                <a:latin typeface="Garamond"/>
+              </a:rPr>
+              <a:t>11,383</a:t>
+            </a:r>
+          </a:p>
+        </p:txBody>
+      </p:sp>
+      <p:sp>
+        <p:nvSpPr>
+          <p:cNvPr id="100" name="TextBox 99"/>
+          <p:cNvSpPr txBox="1"/>
+          <p:nvPr/>
+        </p:nvSpPr>
+        <p:spPr>
+          <a:xfrm>
+            <a:off x="3291840" y="3716121"/>
+            <a:ext cx="868680" cy="192024"/>
+          </a:xfrm>
+          <a:prstGeom prst="rect">
+            <a:avLst/>
+          </a:prstGeom>
+          <a:noFill/>
+        </p:spPr>
+        <p:txBody>
+          <a:bodyPr wrap="square" lIns="0" rIns="0" tIns="0" bIns="0">
+            <a:spAutoFit/>
+          </a:bodyPr>
+          <a:lstStyle/>
+          <a:p>
+            <a:pPr algn="r"/>
+            <a:r>
+              <a:rPr sz="1050" b="0" i="0">
+                <a:solidFill>
+                  <a:srgbClr val="212529"/>
+                </a:solidFill>
+                <a:latin typeface="Garamond"/>
+              </a:rPr>
+              <a:t>73,730</a:t>
+            </a:r>
+          </a:p>
+        </p:txBody>
+      </p:sp>
+      <p:sp>
+        <p:nvSpPr>
+          <p:cNvPr id="101" name="TextBox 100"/>
+          <p:cNvSpPr txBox="1"/>
+          <p:nvPr/>
+        </p:nvSpPr>
+        <p:spPr>
+          <a:xfrm>
+            <a:off x="4471416" y="3716121"/>
+            <a:ext cx="731520" cy="192024"/>
+          </a:xfrm>
+          <a:prstGeom prst="rect">
+            <a:avLst/>
+          </a:prstGeom>
+          <a:noFill/>
+        </p:spPr>
+        <p:txBody>
+          <a:bodyPr wrap="square" lIns="0" rIns="0" tIns="0" bIns="0">
+            <a:spAutoFit/>
+          </a:bodyPr>
+          <a:lstStyle/>
+          <a:p>
+            <a:pPr algn="r"/>
+            <a:r>
+              <a:rPr sz="1050" b="0" i="0">
                 <a:solidFill>
                   <a:srgbClr val="212529"/>
                 </a:solidFill>
@@ -10377,64 +11363,99 @@
       </p:sp>
       <p:sp>
         <p:nvSpPr>
-          <p:cNvPr id="74" name="TextBox 73"/>
-          <p:cNvSpPr txBox="1"/>
-          <p:nvPr/>
-        </p:nvSpPr>
-        <p:spPr>
-          <a:xfrm>
-            <a:off x="5477256" y="3635654"/>
-            <a:ext cx="1115568" cy="210312"/>
-          </a:xfrm>
-          <a:prstGeom prst="rect">
-            <a:avLst/>
-          </a:prstGeom>
-          <a:noFill/>
-        </p:spPr>
-        <p:txBody>
-          <a:bodyPr wrap="square" lIns="0" rIns="0" tIns="0" bIns="0">
-            <a:spAutoFit/>
-          </a:bodyPr>
-          <a:lstStyle/>
-          <a:p>
-            <a:pPr algn="r"/>
-            <a:r>
-              <a:rPr sz="1150" b="0" i="0">
-                <a:solidFill>
-                  <a:srgbClr val="212529"/>
-                </a:solidFill>
-                <a:latin typeface="Garamond"/>
-              </a:rPr>
-              <a:t>82,978</a:t>
-            </a:r>
-          </a:p>
-        </p:txBody>
-      </p:sp>
-      <p:sp>
-        <p:nvSpPr>
-          <p:cNvPr id="75" name="TextBox 74"/>
-          <p:cNvSpPr txBox="1"/>
-          <p:nvPr/>
-        </p:nvSpPr>
-        <p:spPr>
-          <a:xfrm>
-            <a:off x="6976871" y="3635654"/>
-            <a:ext cx="914400" cy="210312"/>
-          </a:xfrm>
-          <a:prstGeom prst="rect">
-            <a:avLst/>
-          </a:prstGeom>
-          <a:noFill/>
-        </p:spPr>
-        <p:txBody>
-          <a:bodyPr wrap="square" lIns="0" rIns="0" tIns="0" bIns="0">
-            <a:spAutoFit/>
-          </a:bodyPr>
-          <a:lstStyle/>
-          <a:p>
-            <a:pPr algn="r"/>
-            <a:r>
-              <a:rPr sz="1150" b="0" i="0">
+          <p:cNvPr id="102" name="TextBox 101"/>
+          <p:cNvSpPr txBox="1"/>
+          <p:nvPr/>
+        </p:nvSpPr>
+        <p:spPr>
+          <a:xfrm>
+            <a:off x="5202936" y="3716121"/>
+            <a:ext cx="868680" cy="192024"/>
+          </a:xfrm>
+          <a:prstGeom prst="rect">
+            <a:avLst/>
+          </a:prstGeom>
+          <a:noFill/>
+        </p:spPr>
+        <p:txBody>
+          <a:bodyPr wrap="square" lIns="0" rIns="0" tIns="0" bIns="0">
+            <a:spAutoFit/>
+          </a:bodyPr>
+          <a:lstStyle/>
+          <a:p>
+            <a:pPr algn="r"/>
+            <a:r>
+              <a:rPr sz="1050" b="0" i="0">
+                <a:solidFill>
+                  <a:srgbClr val="212529"/>
+                </a:solidFill>
+                <a:latin typeface="Garamond"/>
+              </a:rPr>
+              <a:t>11,284</a:t>
+            </a:r>
+          </a:p>
+        </p:txBody>
+      </p:sp>
+      <p:sp>
+        <p:nvSpPr>
+          <p:cNvPr id="103" name="TextBox 102"/>
+          <p:cNvSpPr txBox="1"/>
+          <p:nvPr/>
+        </p:nvSpPr>
+        <p:spPr>
+          <a:xfrm>
+            <a:off x="6071616" y="3716121"/>
+            <a:ext cx="868680" cy="192024"/>
+          </a:xfrm>
+          <a:prstGeom prst="rect">
+            <a:avLst/>
+          </a:prstGeom>
+          <a:noFill/>
+        </p:spPr>
+        <p:txBody>
+          <a:bodyPr wrap="square" lIns="0" rIns="0" tIns="0" bIns="0">
+            <a:spAutoFit/>
+          </a:bodyPr>
+          <a:lstStyle/>
+          <a:p>
+            <a:pPr algn="r"/>
+            <a:r>
+              <a:rPr sz="1050" b="0" i="0">
+                <a:solidFill>
+                  <a:srgbClr val="212529"/>
+                </a:solidFill>
+                <a:latin typeface="Garamond"/>
+              </a:rPr>
+              <a:t>71,694</a:t>
+            </a:r>
+          </a:p>
+        </p:txBody>
+      </p:sp>
+      <p:sp>
+        <p:nvSpPr>
+          <p:cNvPr id="104" name="TextBox 103"/>
+          <p:cNvSpPr txBox="1"/>
+          <p:nvPr/>
+        </p:nvSpPr>
+        <p:spPr>
+          <a:xfrm>
+            <a:off x="7251192" y="3716121"/>
+            <a:ext cx="731520" cy="192024"/>
+          </a:xfrm>
+          <a:prstGeom prst="rect">
+            <a:avLst/>
+          </a:prstGeom>
+          <a:noFill/>
+        </p:spPr>
+        <p:txBody>
+          <a:bodyPr wrap="square" lIns="0" rIns="0" tIns="0" bIns="0">
+            <a:spAutoFit/>
+          </a:bodyPr>
+          <a:lstStyle/>
+          <a:p>
+            <a:pPr algn="r"/>
+            <a:r>
+              <a:rPr sz="1050" b="0" i="0">
                 <a:solidFill>
                   <a:srgbClr val="212529"/>
                 </a:solidFill>
@@ -10447,49 +11468,84 @@
       </p:sp>
       <p:sp>
         <p:nvSpPr>
-          <p:cNvPr id="76" name="TextBox 75"/>
-          <p:cNvSpPr txBox="1"/>
-          <p:nvPr/>
-        </p:nvSpPr>
-        <p:spPr>
-          <a:xfrm>
-            <a:off x="7891271" y="3635654"/>
-            <a:ext cx="1115568" cy="210312"/>
-          </a:xfrm>
-          <a:prstGeom prst="rect">
-            <a:avLst/>
-          </a:prstGeom>
-          <a:noFill/>
-        </p:spPr>
-        <p:txBody>
-          <a:bodyPr wrap="square" lIns="0" rIns="0" tIns="0" bIns="0">
-            <a:spAutoFit/>
-          </a:bodyPr>
-          <a:lstStyle/>
-          <a:p>
-            <a:pPr algn="r"/>
-            <a:r>
-              <a:rPr sz="1150" b="0" i="0">
-                <a:solidFill>
-                  <a:srgbClr val="212529"/>
-                </a:solidFill>
-                <a:latin typeface="Garamond"/>
-              </a:rPr>
-              <a:t>65,299</a:t>
-            </a:r>
-          </a:p>
-        </p:txBody>
-      </p:sp>
-      <p:sp>
-        <p:nvSpPr>
-          <p:cNvPr id="77" name="TextBox 76"/>
-          <p:cNvSpPr txBox="1"/>
-          <p:nvPr/>
-        </p:nvSpPr>
-        <p:spPr>
-          <a:xfrm>
-            <a:off x="731520" y="3866083"/>
-            <a:ext cx="1417320" cy="210312"/>
+          <p:cNvPr id="105" name="TextBox 104"/>
+          <p:cNvSpPr txBox="1"/>
+          <p:nvPr/>
+        </p:nvSpPr>
+        <p:spPr>
+          <a:xfrm>
+            <a:off x="7982712" y="3716121"/>
+            <a:ext cx="868680" cy="192024"/>
+          </a:xfrm>
+          <a:prstGeom prst="rect">
+            <a:avLst/>
+          </a:prstGeom>
+          <a:noFill/>
+        </p:spPr>
+        <p:txBody>
+          <a:bodyPr wrap="square" lIns="0" rIns="0" tIns="0" bIns="0">
+            <a:spAutoFit/>
+          </a:bodyPr>
+          <a:lstStyle/>
+          <a:p>
+            <a:pPr algn="r"/>
+            <a:r>
+              <a:rPr sz="1050" b="0" i="0">
+                <a:solidFill>
+                  <a:srgbClr val="212529"/>
+                </a:solidFill>
+                <a:latin typeface="Garamond"/>
+              </a:rPr>
+              <a:t>9,206</a:t>
+            </a:r>
+          </a:p>
+        </p:txBody>
+      </p:sp>
+      <p:sp>
+        <p:nvSpPr>
+          <p:cNvPr id="106" name="TextBox 105"/>
+          <p:cNvSpPr txBox="1"/>
+          <p:nvPr/>
+        </p:nvSpPr>
+        <p:spPr>
+          <a:xfrm>
+            <a:off x="8851392" y="3716121"/>
+            <a:ext cx="868680" cy="192024"/>
+          </a:xfrm>
+          <a:prstGeom prst="rect">
+            <a:avLst/>
+          </a:prstGeom>
+          <a:noFill/>
+        </p:spPr>
+        <p:txBody>
+          <a:bodyPr wrap="square" lIns="0" rIns="0" tIns="0" bIns="0">
+            <a:spAutoFit/>
+          </a:bodyPr>
+          <a:lstStyle/>
+          <a:p>
+            <a:pPr algn="r"/>
+            <a:r>
+              <a:rPr sz="1050" b="0" i="0">
+                <a:solidFill>
+                  <a:srgbClr val="212529"/>
+                </a:solidFill>
+                <a:latin typeface="Garamond"/>
+              </a:rPr>
+              <a:t>56,093</a:t>
+            </a:r>
+          </a:p>
+        </p:txBody>
+      </p:sp>
+      <p:sp>
+        <p:nvSpPr>
+          <p:cNvPr id="107" name="TextBox 106"/>
+          <p:cNvSpPr txBox="1"/>
+          <p:nvPr/>
+        </p:nvSpPr>
+        <p:spPr>
+          <a:xfrm>
+            <a:off x="502920" y="3933748"/>
+            <a:ext cx="1188720" cy="192024"/>
           </a:xfrm>
           <a:prstGeom prst="rect">
             <a:avLst/>
@@ -10504,7 +11560,7 @@
           <a:p>
             <a:pPr algn="l"/>
             <a:r>
-              <a:rPr sz="1150" b="0" i="0">
+              <a:rPr sz="1050" b="0" i="0">
                 <a:solidFill>
                   <a:srgbClr val="212529"/>
                 </a:solidFill>
@@ -10517,29 +11573,29 @@
       </p:sp>
       <p:sp>
         <p:nvSpPr>
-          <p:cNvPr id="78" name="TextBox 77"/>
-          <p:cNvSpPr txBox="1"/>
-          <p:nvPr/>
-        </p:nvSpPr>
-        <p:spPr>
-          <a:xfrm>
-            <a:off x="2148840" y="3866083"/>
-            <a:ext cx="914400" cy="210312"/>
-          </a:xfrm>
-          <a:prstGeom prst="rect">
-            <a:avLst/>
-          </a:prstGeom>
-          <a:noFill/>
-        </p:spPr>
-        <p:txBody>
-          <a:bodyPr wrap="square" lIns="0" rIns="0" tIns="0" bIns="0">
-            <a:spAutoFit/>
-          </a:bodyPr>
-          <a:lstStyle/>
-          <a:p>
-            <a:pPr algn="r"/>
-            <a:r>
-              <a:rPr sz="1150" b="0" i="0">
+          <p:cNvPr id="108" name="TextBox 107"/>
+          <p:cNvSpPr txBox="1"/>
+          <p:nvPr/>
+        </p:nvSpPr>
+        <p:spPr>
+          <a:xfrm>
+            <a:off x="1691640" y="3933748"/>
+            <a:ext cx="731520" cy="192024"/>
+          </a:xfrm>
+          <a:prstGeom prst="rect">
+            <a:avLst/>
+          </a:prstGeom>
+          <a:noFill/>
+        </p:spPr>
+        <p:txBody>
+          <a:bodyPr wrap="square" lIns="0" rIns="0" tIns="0" bIns="0">
+            <a:spAutoFit/>
+          </a:bodyPr>
+          <a:lstStyle/>
+          <a:p>
+            <a:pPr algn="r"/>
+            <a:r>
+              <a:rPr sz="1050" b="0" i="0">
                 <a:solidFill>
                   <a:srgbClr val="212529"/>
                 </a:solidFill>
@@ -10552,64 +11608,99 @@
       </p:sp>
       <p:sp>
         <p:nvSpPr>
-          <p:cNvPr id="79" name="TextBox 78"/>
-          <p:cNvSpPr txBox="1"/>
-          <p:nvPr/>
-        </p:nvSpPr>
-        <p:spPr>
-          <a:xfrm>
-            <a:off x="3063240" y="3866083"/>
-            <a:ext cx="1115568" cy="210312"/>
-          </a:xfrm>
-          <a:prstGeom prst="rect">
-            <a:avLst/>
-          </a:prstGeom>
-          <a:noFill/>
-        </p:spPr>
-        <p:txBody>
-          <a:bodyPr wrap="square" lIns="0" rIns="0" tIns="0" bIns="0">
-            <a:spAutoFit/>
-          </a:bodyPr>
-          <a:lstStyle/>
-          <a:p>
-            <a:pPr algn="r"/>
-            <a:r>
-              <a:rPr sz="1150" b="0" i="0">
-                <a:solidFill>
-                  <a:srgbClr val="212529"/>
-                </a:solidFill>
-                <a:latin typeface="Garamond"/>
-              </a:rPr>
-              <a:t>85,261</a:t>
-            </a:r>
-          </a:p>
-        </p:txBody>
-      </p:sp>
-      <p:sp>
-        <p:nvSpPr>
-          <p:cNvPr id="80" name="TextBox 79"/>
-          <p:cNvSpPr txBox="1"/>
-          <p:nvPr/>
-        </p:nvSpPr>
-        <p:spPr>
-          <a:xfrm>
-            <a:off x="4562856" y="3866083"/>
-            <a:ext cx="914400" cy="210312"/>
-          </a:xfrm>
-          <a:prstGeom prst="rect">
-            <a:avLst/>
-          </a:prstGeom>
-          <a:noFill/>
-        </p:spPr>
-        <p:txBody>
-          <a:bodyPr wrap="square" lIns="0" rIns="0" tIns="0" bIns="0">
-            <a:spAutoFit/>
-          </a:bodyPr>
-          <a:lstStyle/>
-          <a:p>
-            <a:pPr algn="r"/>
-            <a:r>
-              <a:rPr sz="1150" b="0" i="0">
+          <p:cNvPr id="109" name="TextBox 108"/>
+          <p:cNvSpPr txBox="1"/>
+          <p:nvPr/>
+        </p:nvSpPr>
+        <p:spPr>
+          <a:xfrm>
+            <a:off x="2423160" y="3933748"/>
+            <a:ext cx="868680" cy="192024"/>
+          </a:xfrm>
+          <a:prstGeom prst="rect">
+            <a:avLst/>
+          </a:prstGeom>
+          <a:noFill/>
+        </p:spPr>
+        <p:txBody>
+          <a:bodyPr wrap="square" lIns="0" rIns="0" tIns="0" bIns="0">
+            <a:spAutoFit/>
+          </a:bodyPr>
+          <a:lstStyle/>
+          <a:p>
+            <a:pPr algn="r"/>
+            <a:r>
+              <a:rPr sz="1050" b="0" i="0">
+                <a:solidFill>
+                  <a:srgbClr val="212529"/>
+                </a:solidFill>
+                <a:latin typeface="Garamond"/>
+              </a:rPr>
+              <a:t>951</a:t>
+            </a:r>
+          </a:p>
+        </p:txBody>
+      </p:sp>
+      <p:sp>
+        <p:nvSpPr>
+          <p:cNvPr id="110" name="TextBox 109"/>
+          <p:cNvSpPr txBox="1"/>
+          <p:nvPr/>
+        </p:nvSpPr>
+        <p:spPr>
+          <a:xfrm>
+            <a:off x="3291840" y="3933748"/>
+            <a:ext cx="868680" cy="192024"/>
+          </a:xfrm>
+          <a:prstGeom prst="rect">
+            <a:avLst/>
+          </a:prstGeom>
+          <a:noFill/>
+        </p:spPr>
+        <p:txBody>
+          <a:bodyPr wrap="square" lIns="0" rIns="0" tIns="0" bIns="0">
+            <a:spAutoFit/>
+          </a:bodyPr>
+          <a:lstStyle/>
+          <a:p>
+            <a:pPr algn="r"/>
+            <a:r>
+              <a:rPr sz="1050" b="0" i="0">
+                <a:solidFill>
+                  <a:srgbClr val="212529"/>
+                </a:solidFill>
+                <a:latin typeface="Garamond"/>
+              </a:rPr>
+              <a:t>84,310</a:t>
+            </a:r>
+          </a:p>
+        </p:txBody>
+      </p:sp>
+      <p:sp>
+        <p:nvSpPr>
+          <p:cNvPr id="111" name="TextBox 110"/>
+          <p:cNvSpPr txBox="1"/>
+          <p:nvPr/>
+        </p:nvSpPr>
+        <p:spPr>
+          <a:xfrm>
+            <a:off x="4471416" y="3933748"/>
+            <a:ext cx="731520" cy="192024"/>
+          </a:xfrm>
+          <a:prstGeom prst="rect">
+            <a:avLst/>
+          </a:prstGeom>
+          <a:noFill/>
+        </p:spPr>
+        <p:txBody>
+          <a:bodyPr wrap="square" lIns="0" rIns="0" tIns="0" bIns="0">
+            <a:spAutoFit/>
+          </a:bodyPr>
+          <a:lstStyle/>
+          <a:p>
+            <a:pPr algn="r"/>
+            <a:r>
+              <a:rPr sz="1050" b="0" i="0">
                 <a:solidFill>
                   <a:srgbClr val="212529"/>
                 </a:solidFill>
@@ -10622,64 +11713,99 @@
       </p:sp>
       <p:sp>
         <p:nvSpPr>
-          <p:cNvPr id="81" name="TextBox 80"/>
-          <p:cNvSpPr txBox="1"/>
-          <p:nvPr/>
-        </p:nvSpPr>
-        <p:spPr>
-          <a:xfrm>
-            <a:off x="5477256" y="3866083"/>
-            <a:ext cx="1115568" cy="210312"/>
-          </a:xfrm>
-          <a:prstGeom prst="rect">
-            <a:avLst/>
-          </a:prstGeom>
-          <a:noFill/>
-        </p:spPr>
-        <p:txBody>
-          <a:bodyPr wrap="square" lIns="0" rIns="0" tIns="0" bIns="0">
-            <a:spAutoFit/>
-          </a:bodyPr>
-          <a:lstStyle/>
-          <a:p>
-            <a:pPr algn="r"/>
-            <a:r>
-              <a:rPr sz="1150" b="0" i="0">
-                <a:solidFill>
-                  <a:srgbClr val="212529"/>
-                </a:solidFill>
-                <a:latin typeface="Garamond"/>
-              </a:rPr>
-              <a:t>83,313</a:t>
-            </a:r>
-          </a:p>
-        </p:txBody>
-      </p:sp>
-      <p:sp>
-        <p:nvSpPr>
-          <p:cNvPr id="82" name="TextBox 81"/>
-          <p:cNvSpPr txBox="1"/>
-          <p:nvPr/>
-        </p:nvSpPr>
-        <p:spPr>
-          <a:xfrm>
-            <a:off x="6976871" y="3866083"/>
-            <a:ext cx="914400" cy="210312"/>
-          </a:xfrm>
-          <a:prstGeom prst="rect">
-            <a:avLst/>
-          </a:prstGeom>
-          <a:noFill/>
-        </p:spPr>
-        <p:txBody>
-          <a:bodyPr wrap="square" lIns="0" rIns="0" tIns="0" bIns="0">
-            <a:spAutoFit/>
-          </a:bodyPr>
-          <a:lstStyle/>
-          <a:p>
-            <a:pPr algn="r"/>
-            <a:r>
-              <a:rPr sz="1150" b="0" i="0">
+          <p:cNvPr id="112" name="TextBox 111"/>
+          <p:cNvSpPr txBox="1"/>
+          <p:nvPr/>
+        </p:nvSpPr>
+        <p:spPr>
+          <a:xfrm>
+            <a:off x="5202936" y="3933748"/>
+            <a:ext cx="868680" cy="192024"/>
+          </a:xfrm>
+          <a:prstGeom prst="rect">
+            <a:avLst/>
+          </a:prstGeom>
+          <a:noFill/>
+        </p:spPr>
+        <p:txBody>
+          <a:bodyPr wrap="square" lIns="0" rIns="0" tIns="0" bIns="0">
+            <a:spAutoFit/>
+          </a:bodyPr>
+          <a:lstStyle/>
+          <a:p>
+            <a:pPr algn="r"/>
+            <a:r>
+              <a:rPr sz="1050" b="0" i="0">
+                <a:solidFill>
+                  <a:srgbClr val="212529"/>
+                </a:solidFill>
+                <a:latin typeface="Garamond"/>
+              </a:rPr>
+              <a:t>1,292</a:t>
+            </a:r>
+          </a:p>
+        </p:txBody>
+      </p:sp>
+      <p:sp>
+        <p:nvSpPr>
+          <p:cNvPr id="113" name="TextBox 112"/>
+          <p:cNvSpPr txBox="1"/>
+          <p:nvPr/>
+        </p:nvSpPr>
+        <p:spPr>
+          <a:xfrm>
+            <a:off x="6071616" y="3933748"/>
+            <a:ext cx="868680" cy="192024"/>
+          </a:xfrm>
+          <a:prstGeom prst="rect">
+            <a:avLst/>
+          </a:prstGeom>
+          <a:noFill/>
+        </p:spPr>
+        <p:txBody>
+          <a:bodyPr wrap="square" lIns="0" rIns="0" tIns="0" bIns="0">
+            <a:spAutoFit/>
+          </a:bodyPr>
+          <a:lstStyle/>
+          <a:p>
+            <a:pPr algn="r"/>
+            <a:r>
+              <a:rPr sz="1050" b="0" i="0">
+                <a:solidFill>
+                  <a:srgbClr val="212529"/>
+                </a:solidFill>
+                <a:latin typeface="Garamond"/>
+              </a:rPr>
+              <a:t>82,021</a:t>
+            </a:r>
+          </a:p>
+        </p:txBody>
+      </p:sp>
+      <p:sp>
+        <p:nvSpPr>
+          <p:cNvPr id="114" name="TextBox 113"/>
+          <p:cNvSpPr txBox="1"/>
+          <p:nvPr/>
+        </p:nvSpPr>
+        <p:spPr>
+          <a:xfrm>
+            <a:off x="7251192" y="3933748"/>
+            <a:ext cx="731520" cy="192024"/>
+          </a:xfrm>
+          <a:prstGeom prst="rect">
+            <a:avLst/>
+          </a:prstGeom>
+          <a:noFill/>
+        </p:spPr>
+        <p:txBody>
+          <a:bodyPr wrap="square" lIns="0" rIns="0" tIns="0" bIns="0">
+            <a:spAutoFit/>
+          </a:bodyPr>
+          <a:lstStyle/>
+          <a:p>
+            <a:pPr algn="r"/>
+            <a:r>
+              <a:rPr sz="1050" b="0" i="0">
                 <a:solidFill>
                   <a:srgbClr val="212529"/>
                 </a:solidFill>
@@ -10692,49 +11818,84 @@
       </p:sp>
       <p:sp>
         <p:nvSpPr>
-          <p:cNvPr id="83" name="TextBox 82"/>
-          <p:cNvSpPr txBox="1"/>
-          <p:nvPr/>
-        </p:nvSpPr>
-        <p:spPr>
-          <a:xfrm>
-            <a:off x="7891271" y="3866083"/>
-            <a:ext cx="1115568" cy="210312"/>
-          </a:xfrm>
-          <a:prstGeom prst="rect">
-            <a:avLst/>
-          </a:prstGeom>
-          <a:noFill/>
-        </p:spPr>
-        <p:txBody>
-          <a:bodyPr wrap="square" lIns="0" rIns="0" tIns="0" bIns="0">
-            <a:spAutoFit/>
-          </a:bodyPr>
-          <a:lstStyle/>
-          <a:p>
-            <a:pPr algn="r"/>
-            <a:r>
-              <a:rPr sz="1150" b="0" i="0">
-                <a:solidFill>
-                  <a:srgbClr val="212529"/>
-                </a:solidFill>
-                <a:latin typeface="Garamond"/>
-              </a:rPr>
-              <a:t>65,388</a:t>
-            </a:r>
-          </a:p>
-        </p:txBody>
-      </p:sp>
-      <p:sp>
-        <p:nvSpPr>
-          <p:cNvPr id="84" name="TextBox 83"/>
-          <p:cNvSpPr txBox="1"/>
-          <p:nvPr/>
-        </p:nvSpPr>
-        <p:spPr>
-          <a:xfrm>
-            <a:off x="731520" y="4096511"/>
-            <a:ext cx="1417320" cy="210312"/>
+          <p:cNvPr id="115" name="TextBox 114"/>
+          <p:cNvSpPr txBox="1"/>
+          <p:nvPr/>
+        </p:nvSpPr>
+        <p:spPr>
+          <a:xfrm>
+            <a:off x="7982712" y="3933748"/>
+            <a:ext cx="868680" cy="192024"/>
+          </a:xfrm>
+          <a:prstGeom prst="rect">
+            <a:avLst/>
+          </a:prstGeom>
+          <a:noFill/>
+        </p:spPr>
+        <p:txBody>
+          <a:bodyPr wrap="square" lIns="0" rIns="0" tIns="0" bIns="0">
+            <a:spAutoFit/>
+          </a:bodyPr>
+          <a:lstStyle/>
+          <a:p>
+            <a:pPr algn="r"/>
+            <a:r>
+              <a:rPr sz="1050" b="0" i="0">
+                <a:solidFill>
+                  <a:srgbClr val="212529"/>
+                </a:solidFill>
+                <a:latin typeface="Garamond"/>
+              </a:rPr>
+              <a:t>1,364</a:t>
+            </a:r>
+          </a:p>
+        </p:txBody>
+      </p:sp>
+      <p:sp>
+        <p:nvSpPr>
+          <p:cNvPr id="116" name="TextBox 115"/>
+          <p:cNvSpPr txBox="1"/>
+          <p:nvPr/>
+        </p:nvSpPr>
+        <p:spPr>
+          <a:xfrm>
+            <a:off x="8851392" y="3933748"/>
+            <a:ext cx="868680" cy="192024"/>
+          </a:xfrm>
+          <a:prstGeom prst="rect">
+            <a:avLst/>
+          </a:prstGeom>
+          <a:noFill/>
+        </p:spPr>
+        <p:txBody>
+          <a:bodyPr wrap="square" lIns="0" rIns="0" tIns="0" bIns="0">
+            <a:spAutoFit/>
+          </a:bodyPr>
+          <a:lstStyle/>
+          <a:p>
+            <a:pPr algn="r"/>
+            <a:r>
+              <a:rPr sz="1050" b="0" i="0">
+                <a:solidFill>
+                  <a:srgbClr val="212529"/>
+                </a:solidFill>
+                <a:latin typeface="Garamond"/>
+              </a:rPr>
+              <a:t>64,024</a:t>
+            </a:r>
+          </a:p>
+        </p:txBody>
+      </p:sp>
+      <p:sp>
+        <p:nvSpPr>
+          <p:cNvPr id="117" name="TextBox 116"/>
+          <p:cNvSpPr txBox="1"/>
+          <p:nvPr/>
+        </p:nvSpPr>
+        <p:spPr>
+          <a:xfrm>
+            <a:off x="502920" y="4151375"/>
+            <a:ext cx="1188720" cy="192024"/>
           </a:xfrm>
           <a:prstGeom prst="rect">
             <a:avLst/>
@@ -10749,7 +11910,7 @@
           <a:p>
             <a:pPr algn="l"/>
             <a:r>
-              <a:rPr sz="1150" b="0" i="0">
+              <a:rPr sz="1050" b="0" i="0">
                 <a:solidFill>
                   <a:srgbClr val="212529"/>
                 </a:solidFill>
@@ -10762,29 +11923,29 @@
       </p:sp>
       <p:sp>
         <p:nvSpPr>
-          <p:cNvPr id="85" name="TextBox 84"/>
-          <p:cNvSpPr txBox="1"/>
-          <p:nvPr/>
-        </p:nvSpPr>
-        <p:spPr>
-          <a:xfrm>
-            <a:off x="2148840" y="4096511"/>
-            <a:ext cx="914400" cy="210312"/>
-          </a:xfrm>
-          <a:prstGeom prst="rect">
-            <a:avLst/>
-          </a:prstGeom>
-          <a:noFill/>
-        </p:spPr>
-        <p:txBody>
-          <a:bodyPr wrap="square" lIns="0" rIns="0" tIns="0" bIns="0">
-            <a:spAutoFit/>
-          </a:bodyPr>
-          <a:lstStyle/>
-          <a:p>
-            <a:pPr algn="r"/>
-            <a:r>
-              <a:rPr sz="1150" b="0" i="0">
+          <p:cNvPr id="118" name="TextBox 117"/>
+          <p:cNvSpPr txBox="1"/>
+          <p:nvPr/>
+        </p:nvSpPr>
+        <p:spPr>
+          <a:xfrm>
+            <a:off x="1691640" y="4151375"/>
+            <a:ext cx="731520" cy="192024"/>
+          </a:xfrm>
+          <a:prstGeom prst="rect">
+            <a:avLst/>
+          </a:prstGeom>
+          <a:noFill/>
+        </p:spPr>
+        <p:txBody>
+          <a:bodyPr wrap="square" lIns="0" rIns="0" tIns="0" bIns="0">
+            <a:spAutoFit/>
+          </a:bodyPr>
+          <a:lstStyle/>
+          <a:p>
+            <a:pPr algn="r"/>
+            <a:r>
+              <a:rPr sz="1050" b="0" i="0">
                 <a:solidFill>
                   <a:srgbClr val="212529"/>
                 </a:solidFill>
@@ -10797,64 +11958,99 @@
       </p:sp>
       <p:sp>
         <p:nvSpPr>
-          <p:cNvPr id="86" name="TextBox 85"/>
-          <p:cNvSpPr txBox="1"/>
-          <p:nvPr/>
-        </p:nvSpPr>
-        <p:spPr>
-          <a:xfrm>
-            <a:off x="3063240" y="4096511"/>
-            <a:ext cx="1115568" cy="210312"/>
-          </a:xfrm>
-          <a:prstGeom prst="rect">
-            <a:avLst/>
-          </a:prstGeom>
-          <a:noFill/>
-        </p:spPr>
-        <p:txBody>
-          <a:bodyPr wrap="square" lIns="0" rIns="0" tIns="0" bIns="0">
-            <a:spAutoFit/>
-          </a:bodyPr>
-          <a:lstStyle/>
-          <a:p>
-            <a:pPr algn="r"/>
-            <a:r>
-              <a:rPr sz="1150" b="0" i="0">
-                <a:solidFill>
-                  <a:srgbClr val="212529"/>
-                </a:solidFill>
-                <a:latin typeface="Garamond"/>
-              </a:rPr>
-              <a:t>85,125</a:t>
-            </a:r>
-          </a:p>
-        </p:txBody>
-      </p:sp>
-      <p:sp>
-        <p:nvSpPr>
-          <p:cNvPr id="87" name="TextBox 86"/>
-          <p:cNvSpPr txBox="1"/>
-          <p:nvPr/>
-        </p:nvSpPr>
-        <p:spPr>
-          <a:xfrm>
-            <a:off x="4562856" y="4096511"/>
-            <a:ext cx="914400" cy="210312"/>
-          </a:xfrm>
-          <a:prstGeom prst="rect">
-            <a:avLst/>
-          </a:prstGeom>
-          <a:noFill/>
-        </p:spPr>
-        <p:txBody>
-          <a:bodyPr wrap="square" lIns="0" rIns="0" tIns="0" bIns="0">
-            <a:spAutoFit/>
-          </a:bodyPr>
-          <a:lstStyle/>
-          <a:p>
-            <a:pPr algn="r"/>
-            <a:r>
-              <a:rPr sz="1150" b="0" i="0">
+          <p:cNvPr id="119" name="TextBox 118"/>
+          <p:cNvSpPr txBox="1"/>
+          <p:nvPr/>
+        </p:nvSpPr>
+        <p:spPr>
+          <a:xfrm>
+            <a:off x="2423160" y="4151375"/>
+            <a:ext cx="868680" cy="192024"/>
+          </a:xfrm>
+          <a:prstGeom prst="rect">
+            <a:avLst/>
+          </a:prstGeom>
+          <a:noFill/>
+        </p:spPr>
+        <p:txBody>
+          <a:bodyPr wrap="square" lIns="0" rIns="0" tIns="0" bIns="0">
+            <a:spAutoFit/>
+          </a:bodyPr>
+          <a:lstStyle/>
+          <a:p>
+            <a:pPr algn="r"/>
+            <a:r>
+              <a:rPr sz="1050" b="0" i="0">
+                <a:solidFill>
+                  <a:srgbClr val="212529"/>
+                </a:solidFill>
+                <a:latin typeface="Garamond"/>
+              </a:rPr>
+              <a:t>494</a:t>
+            </a:r>
+          </a:p>
+        </p:txBody>
+      </p:sp>
+      <p:sp>
+        <p:nvSpPr>
+          <p:cNvPr id="120" name="TextBox 119"/>
+          <p:cNvSpPr txBox="1"/>
+          <p:nvPr/>
+        </p:nvSpPr>
+        <p:spPr>
+          <a:xfrm>
+            <a:off x="3291840" y="4151375"/>
+            <a:ext cx="868680" cy="192024"/>
+          </a:xfrm>
+          <a:prstGeom prst="rect">
+            <a:avLst/>
+          </a:prstGeom>
+          <a:noFill/>
+        </p:spPr>
+        <p:txBody>
+          <a:bodyPr wrap="square" lIns="0" rIns="0" tIns="0" bIns="0">
+            <a:spAutoFit/>
+          </a:bodyPr>
+          <a:lstStyle/>
+          <a:p>
+            <a:pPr algn="r"/>
+            <a:r>
+              <a:rPr sz="1050" b="0" i="0">
+                <a:solidFill>
+                  <a:srgbClr val="212529"/>
+                </a:solidFill>
+                <a:latin typeface="Garamond"/>
+              </a:rPr>
+              <a:t>84,631</a:t>
+            </a:r>
+          </a:p>
+        </p:txBody>
+      </p:sp>
+      <p:sp>
+        <p:nvSpPr>
+          <p:cNvPr id="121" name="TextBox 120"/>
+          <p:cNvSpPr txBox="1"/>
+          <p:nvPr/>
+        </p:nvSpPr>
+        <p:spPr>
+          <a:xfrm>
+            <a:off x="4471416" y="4151375"/>
+            <a:ext cx="731520" cy="192024"/>
+          </a:xfrm>
+          <a:prstGeom prst="rect">
+            <a:avLst/>
+          </a:prstGeom>
+          <a:noFill/>
+        </p:spPr>
+        <p:txBody>
+          <a:bodyPr wrap="square" lIns="0" rIns="0" tIns="0" bIns="0">
+            <a:spAutoFit/>
+          </a:bodyPr>
+          <a:lstStyle/>
+          <a:p>
+            <a:pPr algn="r"/>
+            <a:r>
+              <a:rPr sz="1050" b="0" i="0">
                 <a:solidFill>
                   <a:srgbClr val="212529"/>
                 </a:solidFill>
@@ -10867,64 +12063,99 @@
       </p:sp>
       <p:sp>
         <p:nvSpPr>
-          <p:cNvPr id="88" name="TextBox 87"/>
-          <p:cNvSpPr txBox="1"/>
-          <p:nvPr/>
-        </p:nvSpPr>
-        <p:spPr>
-          <a:xfrm>
-            <a:off x="5477256" y="4096511"/>
-            <a:ext cx="1115568" cy="210312"/>
-          </a:xfrm>
-          <a:prstGeom prst="rect">
-            <a:avLst/>
-          </a:prstGeom>
-          <a:noFill/>
-        </p:spPr>
-        <p:txBody>
-          <a:bodyPr wrap="square" lIns="0" rIns="0" tIns="0" bIns="0">
-            <a:spAutoFit/>
-          </a:bodyPr>
-          <a:lstStyle/>
-          <a:p>
-            <a:pPr algn="r"/>
-            <a:r>
-              <a:rPr sz="1150" b="0" i="0">
-                <a:solidFill>
-                  <a:srgbClr val="212529"/>
-                </a:solidFill>
-                <a:latin typeface="Garamond"/>
-              </a:rPr>
-              <a:t>83,692</a:t>
-            </a:r>
-          </a:p>
-        </p:txBody>
-      </p:sp>
-      <p:sp>
-        <p:nvSpPr>
-          <p:cNvPr id="89" name="TextBox 88"/>
-          <p:cNvSpPr txBox="1"/>
-          <p:nvPr/>
-        </p:nvSpPr>
-        <p:spPr>
-          <a:xfrm>
-            <a:off x="6976871" y="4096511"/>
-            <a:ext cx="914400" cy="210312"/>
-          </a:xfrm>
-          <a:prstGeom prst="rect">
-            <a:avLst/>
-          </a:prstGeom>
-          <a:noFill/>
-        </p:spPr>
-        <p:txBody>
-          <a:bodyPr wrap="square" lIns="0" rIns="0" tIns="0" bIns="0">
-            <a:spAutoFit/>
-          </a:bodyPr>
-          <a:lstStyle/>
-          <a:p>
-            <a:pPr algn="r"/>
-            <a:r>
-              <a:rPr sz="1150" b="0" i="0">
+          <p:cNvPr id="122" name="TextBox 121"/>
+          <p:cNvSpPr txBox="1"/>
+          <p:nvPr/>
+        </p:nvSpPr>
+        <p:spPr>
+          <a:xfrm>
+            <a:off x="5202936" y="4151375"/>
+            <a:ext cx="868680" cy="192024"/>
+          </a:xfrm>
+          <a:prstGeom prst="rect">
+            <a:avLst/>
+          </a:prstGeom>
+          <a:noFill/>
+        </p:spPr>
+        <p:txBody>
+          <a:bodyPr wrap="square" lIns="0" rIns="0" tIns="0" bIns="0">
+            <a:spAutoFit/>
+          </a:bodyPr>
+          <a:lstStyle/>
+          <a:p>
+            <a:pPr algn="r"/>
+            <a:r>
+              <a:rPr sz="1050" b="0" i="0">
+                <a:solidFill>
+                  <a:srgbClr val="212529"/>
+                </a:solidFill>
+                <a:latin typeface="Garamond"/>
+              </a:rPr>
+              <a:t>571</a:t>
+            </a:r>
+          </a:p>
+        </p:txBody>
+      </p:sp>
+      <p:sp>
+        <p:nvSpPr>
+          <p:cNvPr id="123" name="TextBox 122"/>
+          <p:cNvSpPr txBox="1"/>
+          <p:nvPr/>
+        </p:nvSpPr>
+        <p:spPr>
+          <a:xfrm>
+            <a:off x="6071616" y="4151375"/>
+            <a:ext cx="868680" cy="192024"/>
+          </a:xfrm>
+          <a:prstGeom prst="rect">
+            <a:avLst/>
+          </a:prstGeom>
+          <a:noFill/>
+        </p:spPr>
+        <p:txBody>
+          <a:bodyPr wrap="square" lIns="0" rIns="0" tIns="0" bIns="0">
+            <a:spAutoFit/>
+          </a:bodyPr>
+          <a:lstStyle/>
+          <a:p>
+            <a:pPr algn="r"/>
+            <a:r>
+              <a:rPr sz="1050" b="0" i="0">
+                <a:solidFill>
+                  <a:srgbClr val="212529"/>
+                </a:solidFill>
+                <a:latin typeface="Garamond"/>
+              </a:rPr>
+              <a:t>83,121</a:t>
+            </a:r>
+          </a:p>
+        </p:txBody>
+      </p:sp>
+      <p:sp>
+        <p:nvSpPr>
+          <p:cNvPr id="124" name="TextBox 123"/>
+          <p:cNvSpPr txBox="1"/>
+          <p:nvPr/>
+        </p:nvSpPr>
+        <p:spPr>
+          <a:xfrm>
+            <a:off x="7251192" y="4151375"/>
+            <a:ext cx="731520" cy="192024"/>
+          </a:xfrm>
+          <a:prstGeom prst="rect">
+            <a:avLst/>
+          </a:prstGeom>
+          <a:noFill/>
+        </p:spPr>
+        <p:txBody>
+          <a:bodyPr wrap="square" lIns="0" rIns="0" tIns="0" bIns="0">
+            <a:spAutoFit/>
+          </a:bodyPr>
+          <a:lstStyle/>
+          <a:p>
+            <a:pPr algn="r"/>
+            <a:r>
+              <a:rPr sz="1050" b="0" i="0">
                 <a:solidFill>
                   <a:srgbClr val="212529"/>
                 </a:solidFill>
@@ -10937,49 +12168,84 @@
       </p:sp>
       <p:sp>
         <p:nvSpPr>
-          <p:cNvPr id="90" name="TextBox 89"/>
-          <p:cNvSpPr txBox="1"/>
-          <p:nvPr/>
-        </p:nvSpPr>
-        <p:spPr>
-          <a:xfrm>
-            <a:off x="7891271" y="4096511"/>
-            <a:ext cx="1115568" cy="210312"/>
-          </a:xfrm>
-          <a:prstGeom prst="rect">
-            <a:avLst/>
-          </a:prstGeom>
-          <a:noFill/>
-        </p:spPr>
-        <p:txBody>
-          <a:bodyPr wrap="square" lIns="0" rIns="0" tIns="0" bIns="0">
-            <a:spAutoFit/>
-          </a:bodyPr>
-          <a:lstStyle/>
-          <a:p>
-            <a:pPr algn="r"/>
-            <a:r>
-              <a:rPr sz="1150" b="0" i="0">
-                <a:solidFill>
-                  <a:srgbClr val="212529"/>
-                </a:solidFill>
-                <a:latin typeface="Garamond"/>
-              </a:rPr>
-              <a:t>65,152</a:t>
-            </a:r>
-          </a:p>
-        </p:txBody>
-      </p:sp>
-      <p:sp>
-        <p:nvSpPr>
-          <p:cNvPr id="91" name="TextBox 90"/>
-          <p:cNvSpPr txBox="1"/>
-          <p:nvPr/>
-        </p:nvSpPr>
-        <p:spPr>
-          <a:xfrm>
-            <a:off x="731520" y="4326940"/>
-            <a:ext cx="1417320" cy="210312"/>
+          <p:cNvPr id="125" name="TextBox 124"/>
+          <p:cNvSpPr txBox="1"/>
+          <p:nvPr/>
+        </p:nvSpPr>
+        <p:spPr>
+          <a:xfrm>
+            <a:off x="7982712" y="4151375"/>
+            <a:ext cx="868680" cy="192024"/>
+          </a:xfrm>
+          <a:prstGeom prst="rect">
+            <a:avLst/>
+          </a:prstGeom>
+          <a:noFill/>
+        </p:spPr>
+        <p:txBody>
+          <a:bodyPr wrap="square" lIns="0" rIns="0" tIns="0" bIns="0">
+            <a:spAutoFit/>
+          </a:bodyPr>
+          <a:lstStyle/>
+          <a:p>
+            <a:pPr algn="r"/>
+            <a:r>
+              <a:rPr sz="1050" b="0" i="0">
+                <a:solidFill>
+                  <a:srgbClr val="212529"/>
+                </a:solidFill>
+                <a:latin typeface="Garamond"/>
+              </a:rPr>
+              <a:t>659</a:t>
+            </a:r>
+          </a:p>
+        </p:txBody>
+      </p:sp>
+      <p:sp>
+        <p:nvSpPr>
+          <p:cNvPr id="126" name="TextBox 125"/>
+          <p:cNvSpPr txBox="1"/>
+          <p:nvPr/>
+        </p:nvSpPr>
+        <p:spPr>
+          <a:xfrm>
+            <a:off x="8851392" y="4151375"/>
+            <a:ext cx="868680" cy="192024"/>
+          </a:xfrm>
+          <a:prstGeom prst="rect">
+            <a:avLst/>
+          </a:prstGeom>
+          <a:noFill/>
+        </p:spPr>
+        <p:txBody>
+          <a:bodyPr wrap="square" lIns="0" rIns="0" tIns="0" bIns="0">
+            <a:spAutoFit/>
+          </a:bodyPr>
+          <a:lstStyle/>
+          <a:p>
+            <a:pPr algn="r"/>
+            <a:r>
+              <a:rPr sz="1050" b="0" i="0">
+                <a:solidFill>
+                  <a:srgbClr val="212529"/>
+                </a:solidFill>
+                <a:latin typeface="Garamond"/>
+              </a:rPr>
+              <a:t>64,493</a:t>
+            </a:r>
+          </a:p>
+        </p:txBody>
+      </p:sp>
+      <p:sp>
+        <p:nvSpPr>
+          <p:cNvPr id="127" name="TextBox 126"/>
+          <p:cNvSpPr txBox="1"/>
+          <p:nvPr/>
+        </p:nvSpPr>
+        <p:spPr>
+          <a:xfrm>
+            <a:off x="502920" y="4369003"/>
+            <a:ext cx="1188720" cy="192024"/>
           </a:xfrm>
           <a:prstGeom prst="rect">
             <a:avLst/>
@@ -10994,7 +12260,7 @@
           <a:p>
             <a:pPr algn="l"/>
             <a:r>
-              <a:rPr sz="1150" b="0" i="0">
+              <a:rPr sz="1050" b="0" i="0">
                 <a:solidFill>
                   <a:srgbClr val="212529"/>
                 </a:solidFill>
@@ -11007,29 +12273,29 @@
       </p:sp>
       <p:sp>
         <p:nvSpPr>
-          <p:cNvPr id="92" name="TextBox 91"/>
-          <p:cNvSpPr txBox="1"/>
-          <p:nvPr/>
-        </p:nvSpPr>
-        <p:spPr>
-          <a:xfrm>
-            <a:off x="2148840" y="4326940"/>
-            <a:ext cx="914400" cy="210312"/>
-          </a:xfrm>
-          <a:prstGeom prst="rect">
-            <a:avLst/>
-          </a:prstGeom>
-          <a:noFill/>
-        </p:spPr>
-        <p:txBody>
-          <a:bodyPr wrap="square" lIns="0" rIns="0" tIns="0" bIns="0">
-            <a:spAutoFit/>
-          </a:bodyPr>
-          <a:lstStyle/>
-          <a:p>
-            <a:pPr algn="r"/>
-            <a:r>
-              <a:rPr sz="1150" b="0" i="0">
+          <p:cNvPr id="128" name="TextBox 127"/>
+          <p:cNvSpPr txBox="1"/>
+          <p:nvPr/>
+        </p:nvSpPr>
+        <p:spPr>
+          <a:xfrm>
+            <a:off x="1691640" y="4369003"/>
+            <a:ext cx="731520" cy="192024"/>
+          </a:xfrm>
+          <a:prstGeom prst="rect">
+            <a:avLst/>
+          </a:prstGeom>
+          <a:noFill/>
+        </p:spPr>
+        <p:txBody>
+          <a:bodyPr wrap="square" lIns="0" rIns="0" tIns="0" bIns="0">
+            <a:spAutoFit/>
+          </a:bodyPr>
+          <a:lstStyle/>
+          <a:p>
+            <a:pPr algn="r"/>
+            <a:r>
+              <a:rPr sz="1050" b="0" i="0">
                 <a:solidFill>
                   <a:srgbClr val="212529"/>
                 </a:solidFill>
@@ -11042,64 +12308,99 @@
       </p:sp>
       <p:sp>
         <p:nvSpPr>
-          <p:cNvPr id="93" name="TextBox 92"/>
-          <p:cNvSpPr txBox="1"/>
-          <p:nvPr/>
-        </p:nvSpPr>
-        <p:spPr>
-          <a:xfrm>
-            <a:off x="3063240" y="4326940"/>
-            <a:ext cx="1115568" cy="210312"/>
-          </a:xfrm>
-          <a:prstGeom prst="rect">
-            <a:avLst/>
-          </a:prstGeom>
-          <a:noFill/>
-        </p:spPr>
-        <p:txBody>
-          <a:bodyPr wrap="square" lIns="0" rIns="0" tIns="0" bIns="0">
-            <a:spAutoFit/>
-          </a:bodyPr>
-          <a:lstStyle/>
-          <a:p>
-            <a:pPr algn="r"/>
-            <a:r>
-              <a:rPr sz="1150" b="0" i="0">
-                <a:solidFill>
-                  <a:srgbClr val="212529"/>
-                </a:solidFill>
-                <a:latin typeface="Garamond"/>
-              </a:rPr>
-              <a:t>85,107</a:t>
-            </a:r>
-          </a:p>
-        </p:txBody>
-      </p:sp>
-      <p:sp>
-        <p:nvSpPr>
-          <p:cNvPr id="94" name="TextBox 93"/>
-          <p:cNvSpPr txBox="1"/>
-          <p:nvPr/>
-        </p:nvSpPr>
-        <p:spPr>
-          <a:xfrm>
-            <a:off x="4562856" y="4326940"/>
-            <a:ext cx="914400" cy="210312"/>
-          </a:xfrm>
-          <a:prstGeom prst="rect">
-            <a:avLst/>
-          </a:prstGeom>
-          <a:noFill/>
-        </p:spPr>
-        <p:txBody>
-          <a:bodyPr wrap="square" lIns="0" rIns="0" tIns="0" bIns="0">
-            <a:spAutoFit/>
-          </a:bodyPr>
-          <a:lstStyle/>
-          <a:p>
-            <a:pPr algn="r"/>
-            <a:r>
-              <a:rPr sz="1150" b="0" i="0">
+          <p:cNvPr id="129" name="TextBox 128"/>
+          <p:cNvSpPr txBox="1"/>
+          <p:nvPr/>
+        </p:nvSpPr>
+        <p:spPr>
+          <a:xfrm>
+            <a:off x="2423160" y="4369003"/>
+            <a:ext cx="868680" cy="192024"/>
+          </a:xfrm>
+          <a:prstGeom prst="rect">
+            <a:avLst/>
+          </a:prstGeom>
+          <a:noFill/>
+        </p:spPr>
+        <p:txBody>
+          <a:bodyPr wrap="square" lIns="0" rIns="0" tIns="0" bIns="0">
+            <a:spAutoFit/>
+          </a:bodyPr>
+          <a:lstStyle/>
+          <a:p>
+            <a:pPr algn="r"/>
+            <a:r>
+              <a:rPr sz="1050" b="0" i="0">
+                <a:solidFill>
+                  <a:srgbClr val="212529"/>
+                </a:solidFill>
+                <a:latin typeface="Garamond"/>
+              </a:rPr>
+              <a:t>201</a:t>
+            </a:r>
+          </a:p>
+        </p:txBody>
+      </p:sp>
+      <p:sp>
+        <p:nvSpPr>
+          <p:cNvPr id="130" name="TextBox 129"/>
+          <p:cNvSpPr txBox="1"/>
+          <p:nvPr/>
+        </p:nvSpPr>
+        <p:spPr>
+          <a:xfrm>
+            <a:off x="3291840" y="4369003"/>
+            <a:ext cx="868680" cy="192024"/>
+          </a:xfrm>
+          <a:prstGeom prst="rect">
+            <a:avLst/>
+          </a:prstGeom>
+          <a:noFill/>
+        </p:spPr>
+        <p:txBody>
+          <a:bodyPr wrap="square" lIns="0" rIns="0" tIns="0" bIns="0">
+            <a:spAutoFit/>
+          </a:bodyPr>
+          <a:lstStyle/>
+          <a:p>
+            <a:pPr algn="r"/>
+            <a:r>
+              <a:rPr sz="1050" b="0" i="0">
+                <a:solidFill>
+                  <a:srgbClr val="212529"/>
+                </a:solidFill>
+                <a:latin typeface="Garamond"/>
+              </a:rPr>
+              <a:t>84,906</a:t>
+            </a:r>
+          </a:p>
+        </p:txBody>
+      </p:sp>
+      <p:sp>
+        <p:nvSpPr>
+          <p:cNvPr id="131" name="TextBox 130"/>
+          <p:cNvSpPr txBox="1"/>
+          <p:nvPr/>
+        </p:nvSpPr>
+        <p:spPr>
+          <a:xfrm>
+            <a:off x="4471416" y="4369003"/>
+            <a:ext cx="731520" cy="192024"/>
+          </a:xfrm>
+          <a:prstGeom prst="rect">
+            <a:avLst/>
+          </a:prstGeom>
+          <a:noFill/>
+        </p:spPr>
+        <p:txBody>
+          <a:bodyPr wrap="square" lIns="0" rIns="0" tIns="0" bIns="0">
+            <a:spAutoFit/>
+          </a:bodyPr>
+          <a:lstStyle/>
+          <a:p>
+            <a:pPr algn="r"/>
+            <a:r>
+              <a:rPr sz="1050" b="0" i="0">
                 <a:solidFill>
                   <a:srgbClr val="212529"/>
                 </a:solidFill>
@@ -11112,64 +12413,99 @@
       </p:sp>
       <p:sp>
         <p:nvSpPr>
-          <p:cNvPr id="95" name="TextBox 94"/>
-          <p:cNvSpPr txBox="1"/>
-          <p:nvPr/>
-        </p:nvSpPr>
-        <p:spPr>
-          <a:xfrm>
-            <a:off x="5477256" y="4326940"/>
-            <a:ext cx="1115568" cy="210312"/>
-          </a:xfrm>
-          <a:prstGeom prst="rect">
-            <a:avLst/>
-          </a:prstGeom>
-          <a:noFill/>
-        </p:spPr>
-        <p:txBody>
-          <a:bodyPr wrap="square" lIns="0" rIns="0" tIns="0" bIns="0">
-            <a:spAutoFit/>
-          </a:bodyPr>
-          <a:lstStyle/>
-          <a:p>
-            <a:pPr algn="r"/>
-            <a:r>
-              <a:rPr sz="1150" b="0" i="0">
-                <a:solidFill>
-                  <a:srgbClr val="212529"/>
-                </a:solidFill>
-                <a:latin typeface="Garamond"/>
-              </a:rPr>
-              <a:t>82,980</a:t>
-            </a:r>
-          </a:p>
-        </p:txBody>
-      </p:sp>
-      <p:sp>
-        <p:nvSpPr>
-          <p:cNvPr id="96" name="TextBox 95"/>
-          <p:cNvSpPr txBox="1"/>
-          <p:nvPr/>
-        </p:nvSpPr>
-        <p:spPr>
-          <a:xfrm>
-            <a:off x="6976871" y="4326940"/>
-            <a:ext cx="914400" cy="210312"/>
-          </a:xfrm>
-          <a:prstGeom prst="rect">
-            <a:avLst/>
-          </a:prstGeom>
-          <a:noFill/>
-        </p:spPr>
-        <p:txBody>
-          <a:bodyPr wrap="square" lIns="0" rIns="0" tIns="0" bIns="0">
-            <a:spAutoFit/>
-          </a:bodyPr>
-          <a:lstStyle/>
-          <a:p>
-            <a:pPr algn="r"/>
-            <a:r>
-              <a:rPr sz="1150" b="0" i="0">
+          <p:cNvPr id="132" name="TextBox 131"/>
+          <p:cNvSpPr txBox="1"/>
+          <p:nvPr/>
+        </p:nvSpPr>
+        <p:spPr>
+          <a:xfrm>
+            <a:off x="5202936" y="4369003"/>
+            <a:ext cx="868680" cy="192024"/>
+          </a:xfrm>
+          <a:prstGeom prst="rect">
+            <a:avLst/>
+          </a:prstGeom>
+          <a:noFill/>
+        </p:spPr>
+        <p:txBody>
+          <a:bodyPr wrap="square" lIns="0" rIns="0" tIns="0" bIns="0">
+            <a:spAutoFit/>
+          </a:bodyPr>
+          <a:lstStyle/>
+          <a:p>
+            <a:pPr algn="r"/>
+            <a:r>
+              <a:rPr sz="1050" b="0" i="0">
+                <a:solidFill>
+                  <a:srgbClr val="212529"/>
+                </a:solidFill>
+                <a:latin typeface="Garamond"/>
+              </a:rPr>
+              <a:t>250</a:t>
+            </a:r>
+          </a:p>
+        </p:txBody>
+      </p:sp>
+      <p:sp>
+        <p:nvSpPr>
+          <p:cNvPr id="133" name="TextBox 132"/>
+          <p:cNvSpPr txBox="1"/>
+          <p:nvPr/>
+        </p:nvSpPr>
+        <p:spPr>
+          <a:xfrm>
+            <a:off x="6071616" y="4369003"/>
+            <a:ext cx="868680" cy="192024"/>
+          </a:xfrm>
+          <a:prstGeom prst="rect">
+            <a:avLst/>
+          </a:prstGeom>
+          <a:noFill/>
+        </p:spPr>
+        <p:txBody>
+          <a:bodyPr wrap="square" lIns="0" rIns="0" tIns="0" bIns="0">
+            <a:spAutoFit/>
+          </a:bodyPr>
+          <a:lstStyle/>
+          <a:p>
+            <a:pPr algn="r"/>
+            <a:r>
+              <a:rPr sz="1050" b="0" i="0">
+                <a:solidFill>
+                  <a:srgbClr val="212529"/>
+                </a:solidFill>
+                <a:latin typeface="Garamond"/>
+              </a:rPr>
+              <a:t>82,730</a:t>
+            </a:r>
+          </a:p>
+        </p:txBody>
+      </p:sp>
+      <p:sp>
+        <p:nvSpPr>
+          <p:cNvPr id="134" name="TextBox 133"/>
+          <p:cNvSpPr txBox="1"/>
+          <p:nvPr/>
+        </p:nvSpPr>
+        <p:spPr>
+          <a:xfrm>
+            <a:off x="7251192" y="4369003"/>
+            <a:ext cx="731520" cy="192024"/>
+          </a:xfrm>
+          <a:prstGeom prst="rect">
+            <a:avLst/>
+          </a:prstGeom>
+          <a:noFill/>
+        </p:spPr>
+        <p:txBody>
+          <a:bodyPr wrap="square" lIns="0" rIns="0" tIns="0" bIns="0">
+            <a:spAutoFit/>
+          </a:bodyPr>
+          <a:lstStyle/>
+          <a:p>
+            <a:pPr algn="r"/>
+            <a:r>
+              <a:rPr sz="1050" b="0" i="0">
                 <a:solidFill>
                   <a:srgbClr val="212529"/>
                 </a:solidFill>
@@ -11182,49 +12518,84 @@
       </p:sp>
       <p:sp>
         <p:nvSpPr>
-          <p:cNvPr id="97" name="TextBox 96"/>
-          <p:cNvSpPr txBox="1"/>
-          <p:nvPr/>
-        </p:nvSpPr>
-        <p:spPr>
-          <a:xfrm>
-            <a:off x="7891271" y="4326940"/>
-            <a:ext cx="1115568" cy="210312"/>
-          </a:xfrm>
-          <a:prstGeom prst="rect">
-            <a:avLst/>
-          </a:prstGeom>
-          <a:noFill/>
-        </p:spPr>
-        <p:txBody>
-          <a:bodyPr wrap="square" lIns="0" rIns="0" tIns="0" bIns="0">
-            <a:spAutoFit/>
-          </a:bodyPr>
-          <a:lstStyle/>
-          <a:p>
-            <a:pPr algn="r"/>
-            <a:r>
-              <a:rPr sz="1150" b="0" i="0">
-                <a:solidFill>
-                  <a:srgbClr val="212529"/>
-                </a:solidFill>
-                <a:latin typeface="Garamond"/>
-              </a:rPr>
-              <a:t>65,065</a:t>
+          <p:cNvPr id="135" name="TextBox 134"/>
+          <p:cNvSpPr txBox="1"/>
+          <p:nvPr/>
+        </p:nvSpPr>
+        <p:spPr>
+          <a:xfrm>
+            <a:off x="7982712" y="4369003"/>
+            <a:ext cx="868680" cy="192024"/>
+          </a:xfrm>
+          <a:prstGeom prst="rect">
+            <a:avLst/>
+          </a:prstGeom>
+          <a:noFill/>
+        </p:spPr>
+        <p:txBody>
+          <a:bodyPr wrap="square" lIns="0" rIns="0" tIns="0" bIns="0">
+            <a:spAutoFit/>
+          </a:bodyPr>
+          <a:lstStyle/>
+          <a:p>
+            <a:pPr algn="r"/>
+            <a:r>
+              <a:rPr sz="1050" b="0" i="0">
+                <a:solidFill>
+                  <a:srgbClr val="212529"/>
+                </a:solidFill>
+                <a:latin typeface="Garamond"/>
+              </a:rPr>
+              <a:t>304</a:t>
+            </a:r>
+          </a:p>
+        </p:txBody>
+      </p:sp>
+      <p:sp>
+        <p:nvSpPr>
+          <p:cNvPr id="136" name="TextBox 135"/>
+          <p:cNvSpPr txBox="1"/>
+          <p:nvPr/>
+        </p:nvSpPr>
+        <p:spPr>
+          <a:xfrm>
+            <a:off x="8851392" y="4369003"/>
+            <a:ext cx="868680" cy="192024"/>
+          </a:xfrm>
+          <a:prstGeom prst="rect">
+            <a:avLst/>
+          </a:prstGeom>
+          <a:noFill/>
+        </p:spPr>
+        <p:txBody>
+          <a:bodyPr wrap="square" lIns="0" rIns="0" tIns="0" bIns="0">
+            <a:spAutoFit/>
+          </a:bodyPr>
+          <a:lstStyle/>
+          <a:p>
+            <a:pPr algn="r"/>
+            <a:r>
+              <a:rPr sz="1050" b="0" i="0">
+                <a:solidFill>
+                  <a:srgbClr val="212529"/>
+                </a:solidFill>
+                <a:latin typeface="Garamond"/>
+              </a:rPr>
+              <a:t>64,761</a:t>
             </a:r>
           </a:p>
         </p:txBody>
       </p:sp>
       <p:cxnSp>
         <p:nvCxnSpPr>
-          <p:cNvPr id="98" name="Connector 97"/>
+          <p:cNvPr id="137" name="Connector 136"/>
           <p:cNvCxnSpPr/>
           <p:nvPr/>
         </p:nvCxnSpPr>
         <p:spPr>
           <a:xfrm>
-            <a:off x="731520" y="4575657"/>
-            <a:ext cx="8275320" cy="0"/>
+            <a:off x="502920" y="4604918"/>
+            <a:ext cx="9217152" cy="0"/>
           </a:xfrm>
           <a:prstGeom prst="line">
             <a:avLst/>
@@ -11253,14 +12624,14 @@
       </p:cxnSp>
       <p:sp>
         <p:nvSpPr>
-          <p:cNvPr id="99" name="TextBox 98"/>
-          <p:cNvSpPr txBox="1"/>
-          <p:nvPr/>
-        </p:nvSpPr>
-        <p:spPr>
-          <a:xfrm>
-            <a:off x="731520" y="4639665"/>
-            <a:ext cx="1417320" cy="210312"/>
+          <p:cNvPr id="138" name="TextBox 137"/>
+          <p:cNvSpPr txBox="1"/>
+          <p:nvPr/>
+        </p:nvSpPr>
+        <p:spPr>
+          <a:xfrm>
+            <a:off x="502920" y="4659782"/>
+            <a:ext cx="1188720" cy="192024"/>
           </a:xfrm>
           <a:prstGeom prst="rect">
             <a:avLst/>
@@ -11275,7 +12646,7 @@
           <a:p>
             <a:pPr algn="l"/>
             <a:r>
-              <a:rPr sz="1150" b="1" i="0">
+              <a:rPr sz="1050" b="1" i="0">
                 <a:solidFill>
                   <a:srgbClr val="212529"/>
                 </a:solidFill>
@@ -11288,29 +12659,29 @@
       </p:sp>
       <p:sp>
         <p:nvSpPr>
-          <p:cNvPr id="100" name="TextBox 99"/>
-          <p:cNvSpPr txBox="1"/>
-          <p:nvPr/>
-        </p:nvSpPr>
-        <p:spPr>
-          <a:xfrm>
-            <a:off x="2148840" y="4639665"/>
-            <a:ext cx="914400" cy="210312"/>
-          </a:xfrm>
-          <a:prstGeom prst="rect">
-            <a:avLst/>
-          </a:prstGeom>
-          <a:noFill/>
-        </p:spPr>
-        <p:txBody>
-          <a:bodyPr wrap="square" lIns="0" rIns="0" tIns="0" bIns="0">
-            <a:spAutoFit/>
-          </a:bodyPr>
-          <a:lstStyle/>
-          <a:p>
-            <a:pPr algn="r"/>
-            <a:r>
-              <a:rPr sz="1150" b="1" i="0">
+          <p:cNvPr id="139" name="TextBox 138"/>
+          <p:cNvSpPr txBox="1"/>
+          <p:nvPr/>
+        </p:nvSpPr>
+        <p:spPr>
+          <a:xfrm>
+            <a:off x="1691640" y="4659782"/>
+            <a:ext cx="731520" cy="192024"/>
+          </a:xfrm>
+          <a:prstGeom prst="rect">
+            <a:avLst/>
+          </a:prstGeom>
+          <a:noFill/>
+        </p:spPr>
+        <p:txBody>
+          <a:bodyPr wrap="square" lIns="0" rIns="0" tIns="0" bIns="0">
+            <a:spAutoFit/>
+          </a:bodyPr>
+          <a:lstStyle/>
+          <a:p>
+            <a:pPr algn="r"/>
+            <a:r>
+              <a:rPr sz="1050" b="1" i="0">
                 <a:solidFill>
                   <a:srgbClr val="212529"/>
                 </a:solidFill>
@@ -11323,64 +12694,99 @@
       </p:sp>
       <p:sp>
         <p:nvSpPr>
-          <p:cNvPr id="101" name="TextBox 100"/>
-          <p:cNvSpPr txBox="1"/>
-          <p:nvPr/>
-        </p:nvSpPr>
-        <p:spPr>
-          <a:xfrm>
-            <a:off x="3063240" y="4639665"/>
-            <a:ext cx="1115568" cy="210312"/>
-          </a:xfrm>
-          <a:prstGeom prst="rect">
-            <a:avLst/>
-          </a:prstGeom>
-          <a:noFill/>
-        </p:spPr>
-        <p:txBody>
-          <a:bodyPr wrap="square" lIns="0" rIns="0" tIns="0" bIns="0">
-            <a:spAutoFit/>
-          </a:bodyPr>
-          <a:lstStyle/>
-          <a:p>
-            <a:pPr algn="r"/>
-            <a:r>
-              <a:rPr sz="1150" b="1" i="0">
-                <a:solidFill>
-                  <a:srgbClr val="212529"/>
-                </a:solidFill>
-                <a:latin typeface="Garamond"/>
-              </a:rPr>
-              <a:t>1,018,012</a:t>
-            </a:r>
-          </a:p>
-        </p:txBody>
-      </p:sp>
-      <p:sp>
-        <p:nvSpPr>
-          <p:cNvPr id="102" name="TextBox 101"/>
-          <p:cNvSpPr txBox="1"/>
-          <p:nvPr/>
-        </p:nvSpPr>
-        <p:spPr>
-          <a:xfrm>
-            <a:off x="4562856" y="4639665"/>
-            <a:ext cx="914400" cy="210312"/>
-          </a:xfrm>
-          <a:prstGeom prst="rect">
-            <a:avLst/>
-          </a:prstGeom>
-          <a:noFill/>
-        </p:spPr>
-        <p:txBody>
-          <a:bodyPr wrap="square" lIns="0" rIns="0" tIns="0" bIns="0">
-            <a:spAutoFit/>
-          </a:bodyPr>
-          <a:lstStyle/>
-          <a:p>
-            <a:pPr algn="r"/>
-            <a:r>
-              <a:rPr sz="1150" b="1" i="0">
+          <p:cNvPr id="140" name="TextBox 139"/>
+          <p:cNvSpPr txBox="1"/>
+          <p:nvPr/>
+        </p:nvSpPr>
+        <p:spPr>
+          <a:xfrm>
+            <a:off x="2423160" y="4659782"/>
+            <a:ext cx="868680" cy="192024"/>
+          </a:xfrm>
+          <a:prstGeom prst="rect">
+            <a:avLst/>
+          </a:prstGeom>
+          <a:noFill/>
+        </p:spPr>
+        <p:txBody>
+          <a:bodyPr wrap="square" lIns="0" rIns="0" tIns="0" bIns="0">
+            <a:spAutoFit/>
+          </a:bodyPr>
+          <a:lstStyle/>
+          <a:p>
+            <a:pPr algn="r"/>
+            <a:r>
+              <a:rPr sz="1050" b="1" i="0">
+                <a:solidFill>
+                  <a:srgbClr val="212529"/>
+                </a:solidFill>
+                <a:latin typeface="Garamond"/>
+              </a:rPr>
+              <a:t>178,187</a:t>
+            </a:r>
+          </a:p>
+        </p:txBody>
+      </p:sp>
+      <p:sp>
+        <p:nvSpPr>
+          <p:cNvPr id="141" name="TextBox 140"/>
+          <p:cNvSpPr txBox="1"/>
+          <p:nvPr/>
+        </p:nvSpPr>
+        <p:spPr>
+          <a:xfrm>
+            <a:off x="3291840" y="4659782"/>
+            <a:ext cx="868680" cy="192024"/>
+          </a:xfrm>
+          <a:prstGeom prst="rect">
+            <a:avLst/>
+          </a:prstGeom>
+          <a:noFill/>
+        </p:spPr>
+        <p:txBody>
+          <a:bodyPr wrap="square" lIns="0" rIns="0" tIns="0" bIns="0">
+            <a:spAutoFit/>
+          </a:bodyPr>
+          <a:lstStyle/>
+          <a:p>
+            <a:pPr algn="r"/>
+            <a:r>
+              <a:rPr sz="1050" b="1" i="0">
+                <a:solidFill>
+                  <a:srgbClr val="212529"/>
+                </a:solidFill>
+                <a:latin typeface="Garamond"/>
+              </a:rPr>
+              <a:t>839,825</a:t>
+            </a:r>
+          </a:p>
+        </p:txBody>
+      </p:sp>
+      <p:sp>
+        <p:nvSpPr>
+          <p:cNvPr id="142" name="TextBox 141"/>
+          <p:cNvSpPr txBox="1"/>
+          <p:nvPr/>
+        </p:nvSpPr>
+        <p:spPr>
+          <a:xfrm>
+            <a:off x="4471416" y="4659782"/>
+            <a:ext cx="731520" cy="192024"/>
+          </a:xfrm>
+          <a:prstGeom prst="rect">
+            <a:avLst/>
+          </a:prstGeom>
+          <a:noFill/>
+        </p:spPr>
+        <p:txBody>
+          <a:bodyPr wrap="square" lIns="0" rIns="0" tIns="0" bIns="0">
+            <a:spAutoFit/>
+          </a:bodyPr>
+          <a:lstStyle/>
+          <a:p>
+            <a:pPr algn="r"/>
+            <a:r>
+              <a:rPr sz="1050" b="1" i="0">
                 <a:solidFill>
                   <a:srgbClr val="212529"/>
                 </a:solidFill>
@@ -11393,64 +12799,99 @@
       </p:sp>
       <p:sp>
         <p:nvSpPr>
-          <p:cNvPr id="103" name="TextBox 102"/>
-          <p:cNvSpPr txBox="1"/>
-          <p:nvPr/>
-        </p:nvSpPr>
-        <p:spPr>
-          <a:xfrm>
-            <a:off x="5477256" y="4639665"/>
-            <a:ext cx="1115568" cy="210312"/>
-          </a:xfrm>
-          <a:prstGeom prst="rect">
-            <a:avLst/>
-          </a:prstGeom>
-          <a:noFill/>
-        </p:spPr>
-        <p:txBody>
-          <a:bodyPr wrap="square" lIns="0" rIns="0" tIns="0" bIns="0">
-            <a:spAutoFit/>
-          </a:bodyPr>
-          <a:lstStyle/>
-          <a:p>
-            <a:pPr algn="r"/>
-            <a:r>
-              <a:rPr sz="1150" b="1" i="0">
-                <a:solidFill>
-                  <a:srgbClr val="212529"/>
-                </a:solidFill>
-                <a:latin typeface="Garamond"/>
-              </a:rPr>
-              <a:t>987,732</a:t>
-            </a:r>
-          </a:p>
-        </p:txBody>
-      </p:sp>
-      <p:sp>
-        <p:nvSpPr>
-          <p:cNvPr id="104" name="TextBox 103"/>
-          <p:cNvSpPr txBox="1"/>
-          <p:nvPr/>
-        </p:nvSpPr>
-        <p:spPr>
-          <a:xfrm>
-            <a:off x="6976871" y="4639665"/>
-            <a:ext cx="914400" cy="210312"/>
-          </a:xfrm>
-          <a:prstGeom prst="rect">
-            <a:avLst/>
-          </a:prstGeom>
-          <a:noFill/>
-        </p:spPr>
-        <p:txBody>
-          <a:bodyPr wrap="square" lIns="0" rIns="0" tIns="0" bIns="0">
-            <a:spAutoFit/>
-          </a:bodyPr>
-          <a:lstStyle/>
-          <a:p>
-            <a:pPr algn="r"/>
-            <a:r>
-              <a:rPr sz="1150" b="1" i="0">
+          <p:cNvPr id="143" name="TextBox 142"/>
+          <p:cNvSpPr txBox="1"/>
+          <p:nvPr/>
+        </p:nvSpPr>
+        <p:spPr>
+          <a:xfrm>
+            <a:off x="5202936" y="4659782"/>
+            <a:ext cx="868680" cy="192024"/>
+          </a:xfrm>
+          <a:prstGeom prst="rect">
+            <a:avLst/>
+          </a:prstGeom>
+          <a:noFill/>
+        </p:spPr>
+        <p:txBody>
+          <a:bodyPr wrap="square" lIns="0" rIns="0" tIns="0" bIns="0">
+            <a:spAutoFit/>
+          </a:bodyPr>
+          <a:lstStyle/>
+          <a:p>
+            <a:pPr algn="r"/>
+            <a:r>
+              <a:rPr sz="1050" b="1" i="0">
+                <a:solidFill>
+                  <a:srgbClr val="212529"/>
+                </a:solidFill>
+                <a:latin typeface="Garamond"/>
+              </a:rPr>
+              <a:t>165,838</a:t>
+            </a:r>
+          </a:p>
+        </p:txBody>
+      </p:sp>
+      <p:sp>
+        <p:nvSpPr>
+          <p:cNvPr id="144" name="TextBox 143"/>
+          <p:cNvSpPr txBox="1"/>
+          <p:nvPr/>
+        </p:nvSpPr>
+        <p:spPr>
+          <a:xfrm>
+            <a:off x="6071616" y="4659782"/>
+            <a:ext cx="868680" cy="192024"/>
+          </a:xfrm>
+          <a:prstGeom prst="rect">
+            <a:avLst/>
+          </a:prstGeom>
+          <a:noFill/>
+        </p:spPr>
+        <p:txBody>
+          <a:bodyPr wrap="square" lIns="0" rIns="0" tIns="0" bIns="0">
+            <a:spAutoFit/>
+          </a:bodyPr>
+          <a:lstStyle/>
+          <a:p>
+            <a:pPr algn="r"/>
+            <a:r>
+              <a:rPr sz="1050" b="1" i="0">
+                <a:solidFill>
+                  <a:srgbClr val="212529"/>
+                </a:solidFill>
+                <a:latin typeface="Garamond"/>
+              </a:rPr>
+              <a:t>821,894</a:t>
+            </a:r>
+          </a:p>
+        </p:txBody>
+      </p:sp>
+      <p:sp>
+        <p:nvSpPr>
+          <p:cNvPr id="145" name="TextBox 144"/>
+          <p:cNvSpPr txBox="1"/>
+          <p:nvPr/>
+        </p:nvSpPr>
+        <p:spPr>
+          <a:xfrm>
+            <a:off x="7251192" y="4659782"/>
+            <a:ext cx="731520" cy="192024"/>
+          </a:xfrm>
+          <a:prstGeom prst="rect">
+            <a:avLst/>
+          </a:prstGeom>
+          <a:noFill/>
+        </p:spPr>
+        <p:txBody>
+          <a:bodyPr wrap="square" lIns="0" rIns="0" tIns="0" bIns="0">
+            <a:spAutoFit/>
+          </a:bodyPr>
+          <a:lstStyle/>
+          <a:p>
+            <a:pPr algn="r"/>
+            <a:r>
+              <a:rPr sz="1050" b="1" i="0">
                 <a:solidFill>
                   <a:srgbClr val="212529"/>
                 </a:solidFill>
@@ -11463,49 +12904,84 @@
       </p:sp>
       <p:sp>
         <p:nvSpPr>
-          <p:cNvPr id="105" name="TextBox 104"/>
-          <p:cNvSpPr txBox="1"/>
-          <p:nvPr/>
-        </p:nvSpPr>
-        <p:spPr>
-          <a:xfrm>
-            <a:off x="7891271" y="4639665"/>
-            <a:ext cx="1115568" cy="210312"/>
-          </a:xfrm>
-          <a:prstGeom prst="rect">
-            <a:avLst/>
-          </a:prstGeom>
-          <a:noFill/>
-        </p:spPr>
-        <p:txBody>
-          <a:bodyPr wrap="square" lIns="0" rIns="0" tIns="0" bIns="0">
-            <a:spAutoFit/>
-          </a:bodyPr>
-          <a:lstStyle/>
-          <a:p>
-            <a:pPr algn="r"/>
-            <a:r>
-              <a:rPr sz="1150" b="1" i="0">
-                <a:solidFill>
-                  <a:srgbClr val="212529"/>
-                </a:solidFill>
-                <a:latin typeface="Garamond"/>
-              </a:rPr>
-              <a:t>777,288</a:t>
-            </a:r>
-          </a:p>
-        </p:txBody>
-      </p:sp>
-      <p:sp>
-        <p:nvSpPr>
-          <p:cNvPr id="106" name="TextBox 105"/>
-          <p:cNvSpPr txBox="1"/>
-          <p:nvPr/>
-        </p:nvSpPr>
-        <p:spPr>
-          <a:xfrm>
-            <a:off x="731520" y="4886553"/>
-            <a:ext cx="2331720" cy="210312"/>
+          <p:cNvPr id="146" name="TextBox 145"/>
+          <p:cNvSpPr txBox="1"/>
+          <p:nvPr/>
+        </p:nvSpPr>
+        <p:spPr>
+          <a:xfrm>
+            <a:off x="7982712" y="4659782"/>
+            <a:ext cx="868680" cy="192024"/>
+          </a:xfrm>
+          <a:prstGeom prst="rect">
+            <a:avLst/>
+          </a:prstGeom>
+          <a:noFill/>
+        </p:spPr>
+        <p:txBody>
+          <a:bodyPr wrap="square" lIns="0" rIns="0" tIns="0" bIns="0">
+            <a:spAutoFit/>
+          </a:bodyPr>
+          <a:lstStyle/>
+          <a:p>
+            <a:pPr algn="r"/>
+            <a:r>
+              <a:rPr sz="1050" b="1" i="0">
+                <a:solidFill>
+                  <a:srgbClr val="212529"/>
+                </a:solidFill>
+                <a:latin typeface="Garamond"/>
+              </a:rPr>
+              <a:t>142,630</a:t>
+            </a:r>
+          </a:p>
+        </p:txBody>
+      </p:sp>
+      <p:sp>
+        <p:nvSpPr>
+          <p:cNvPr id="147" name="TextBox 146"/>
+          <p:cNvSpPr txBox="1"/>
+          <p:nvPr/>
+        </p:nvSpPr>
+        <p:spPr>
+          <a:xfrm>
+            <a:off x="8851392" y="4659782"/>
+            <a:ext cx="868680" cy="192024"/>
+          </a:xfrm>
+          <a:prstGeom prst="rect">
+            <a:avLst/>
+          </a:prstGeom>
+          <a:noFill/>
+        </p:spPr>
+        <p:txBody>
+          <a:bodyPr wrap="square" lIns="0" rIns="0" tIns="0" bIns="0">
+            <a:spAutoFit/>
+          </a:bodyPr>
+          <a:lstStyle/>
+          <a:p>
+            <a:pPr algn="r"/>
+            <a:r>
+              <a:rPr sz="1050" b="1" i="0">
+                <a:solidFill>
+                  <a:srgbClr val="212529"/>
+                </a:solidFill>
+                <a:latin typeface="Garamond"/>
+              </a:rPr>
+              <a:t>634,658</a:t>
+            </a:r>
+          </a:p>
+        </p:txBody>
+      </p:sp>
+      <p:sp>
+        <p:nvSpPr>
+          <p:cNvPr id="148" name="TextBox 147"/>
+          <p:cNvSpPr txBox="1"/>
+          <p:nvPr/>
+        </p:nvSpPr>
+        <p:spPr>
+          <a:xfrm>
+            <a:off x="502920" y="4897526"/>
+            <a:ext cx="3200400" cy="192024"/>
           </a:xfrm>
           <a:prstGeom prst="rect">
             <a:avLst/>
@@ -11520,42 +12996,42 @@
           <a:p>
             <a:pPr algn="l"/>
             <a:r>
-              <a:rPr sz="1150" b="1" i="0">
-                <a:solidFill>
-                  <a:srgbClr val="212529"/>
-                </a:solidFill>
-                <a:latin typeface="Garamond"/>
-              </a:rPr>
-              <a:t>Distinct persons</a:t>
-            </a:r>
-          </a:p>
-        </p:txBody>
-      </p:sp>
-      <p:sp>
-        <p:nvSpPr>
-          <p:cNvPr id="107" name="TextBox 106"/>
-          <p:cNvSpPr txBox="1"/>
-          <p:nvPr/>
-        </p:nvSpPr>
-        <p:spPr>
-          <a:xfrm>
-            <a:off x="2148840" y="4886553"/>
-            <a:ext cx="2029967" cy="210312"/>
-          </a:xfrm>
-          <a:prstGeom prst="rect">
-            <a:avLst/>
-          </a:prstGeom>
-          <a:noFill/>
-        </p:spPr>
-        <p:txBody>
-          <a:bodyPr wrap="square" lIns="0" rIns="0" tIns="0" bIns="0">
-            <a:spAutoFit/>
-          </a:bodyPr>
-          <a:lstStyle/>
-          <a:p>
-            <a:pPr algn="r"/>
-            <a:r>
-              <a:rPr sz="1150" b="1" i="0">
+              <a:rPr sz="1050" b="1" i="0">
+                <a:solidFill>
+                  <a:srgbClr val="212529"/>
+                </a:solidFill>
+                <a:latin typeface="Garamond"/>
+              </a:rPr>
+              <a:t>Distinct persons (new + from last year)</a:t>
+            </a:r>
+          </a:p>
+        </p:txBody>
+      </p:sp>
+      <p:sp>
+        <p:nvSpPr>
+          <p:cNvPr id="149" name="TextBox 148"/>
+          <p:cNvSpPr txBox="1"/>
+          <p:nvPr/>
+        </p:nvSpPr>
+        <p:spPr>
+          <a:xfrm>
+            <a:off x="1691640" y="4897526"/>
+            <a:ext cx="2468880" cy="192024"/>
+          </a:xfrm>
+          <a:prstGeom prst="rect">
+            <a:avLst/>
+          </a:prstGeom>
+          <a:noFill/>
+        </p:spPr>
+        <p:txBody>
+          <a:bodyPr wrap="square" lIns="0" rIns="0" tIns="0" bIns="0">
+            <a:spAutoFit/>
+          </a:bodyPr>
+          <a:lstStyle/>
+          <a:p>
+            <a:pPr algn="r"/>
+            <a:r>
+              <a:rPr sz="1050" b="1" i="0">
                 <a:solidFill>
                   <a:srgbClr val="212529"/>
                 </a:solidFill>
@@ -11568,29 +13044,29 @@
       </p:sp>
       <p:sp>
         <p:nvSpPr>
-          <p:cNvPr id="108" name="TextBox 107"/>
-          <p:cNvSpPr txBox="1"/>
-          <p:nvPr/>
-        </p:nvSpPr>
-        <p:spPr>
-          <a:xfrm>
-            <a:off x="4562856" y="4886553"/>
-            <a:ext cx="2029967" cy="210312"/>
-          </a:xfrm>
-          <a:prstGeom prst="rect">
-            <a:avLst/>
-          </a:prstGeom>
-          <a:noFill/>
-        </p:spPr>
-        <p:txBody>
-          <a:bodyPr wrap="square" lIns="0" rIns="0" tIns="0" bIns="0">
-            <a:spAutoFit/>
-          </a:bodyPr>
-          <a:lstStyle/>
-          <a:p>
-            <a:pPr algn="r"/>
-            <a:r>
-              <a:rPr sz="1150" b="1" i="0">
+          <p:cNvPr id="150" name="TextBox 149"/>
+          <p:cNvSpPr txBox="1"/>
+          <p:nvPr/>
+        </p:nvSpPr>
+        <p:spPr>
+          <a:xfrm>
+            <a:off x="4471416" y="4897526"/>
+            <a:ext cx="2468880" cy="192024"/>
+          </a:xfrm>
+          <a:prstGeom prst="rect">
+            <a:avLst/>
+          </a:prstGeom>
+          <a:noFill/>
+        </p:spPr>
+        <p:txBody>
+          <a:bodyPr wrap="square" lIns="0" rIns="0" tIns="0" bIns="0">
+            <a:spAutoFit/>
+          </a:bodyPr>
+          <a:lstStyle/>
+          <a:p>
+            <a:pPr algn="r"/>
+            <a:r>
+              <a:rPr sz="1050" b="1" i="0">
                 <a:solidFill>
                   <a:srgbClr val="212529"/>
                 </a:solidFill>
@@ -11603,29 +13079,29 @@
       </p:sp>
       <p:sp>
         <p:nvSpPr>
-          <p:cNvPr id="109" name="TextBox 108"/>
-          <p:cNvSpPr txBox="1"/>
-          <p:nvPr/>
-        </p:nvSpPr>
-        <p:spPr>
-          <a:xfrm>
-            <a:off x="6976871" y="4886553"/>
-            <a:ext cx="2029967" cy="210312"/>
-          </a:xfrm>
-          <a:prstGeom prst="rect">
-            <a:avLst/>
-          </a:prstGeom>
-          <a:noFill/>
-        </p:spPr>
-        <p:txBody>
-          <a:bodyPr wrap="square" lIns="0" rIns="0" tIns="0" bIns="0">
-            <a:spAutoFit/>
-          </a:bodyPr>
-          <a:lstStyle/>
-          <a:p>
-            <a:pPr algn="r"/>
-            <a:r>
-              <a:rPr sz="1150" b="1" i="0">
+          <p:cNvPr id="151" name="TextBox 150"/>
+          <p:cNvSpPr txBox="1"/>
+          <p:nvPr/>
+        </p:nvSpPr>
+        <p:spPr>
+          <a:xfrm>
+            <a:off x="7251192" y="4897526"/>
+            <a:ext cx="2468880" cy="192024"/>
+          </a:xfrm>
+          <a:prstGeom prst="rect">
+            <a:avLst/>
+          </a:prstGeom>
+          <a:noFill/>
+        </p:spPr>
+        <p:txBody>
+          <a:bodyPr wrap="square" lIns="0" rIns="0" tIns="0" bIns="0">
+            <a:spAutoFit/>
+          </a:bodyPr>
+          <a:lstStyle/>
+          <a:p>
+            <a:pPr algn="r"/>
+            <a:r>
+              <a:rPr sz="1050" b="1" i="0">
                 <a:solidFill>
                   <a:srgbClr val="212529"/>
                 </a:solidFill>
@@ -11638,14 +13114,14 @@
       </p:sp>
       <p:sp>
         <p:nvSpPr>
-          <p:cNvPr id="110" name="TextBox 109"/>
-          <p:cNvSpPr txBox="1"/>
-          <p:nvPr/>
-        </p:nvSpPr>
-        <p:spPr>
-          <a:xfrm>
-            <a:off x="731520" y="5133441"/>
-            <a:ext cx="2880360" cy="210312"/>
+          <p:cNvPr id="152" name="TextBox 151"/>
+          <p:cNvSpPr txBox="1"/>
+          <p:nvPr/>
+        </p:nvSpPr>
+        <p:spPr>
+          <a:xfrm>
+            <a:off x="502920" y="5135270"/>
+            <a:ext cx="3200400" cy="192024"/>
           </a:xfrm>
           <a:prstGeom prst="rect">
             <a:avLst/>
@@ -11660,7 +13136,7 @@
           <a:p>
             <a:pPr algn="l"/>
             <a:r>
-              <a:rPr sz="1150" b="1" i="0">
+              <a:rPr sz="1050" b="1" i="0">
                 <a:solidFill>
                   <a:srgbClr val="102D5E"/>
                 </a:solidFill>
@@ -11673,29 +13149,29 @@
       </p:sp>
       <p:sp>
         <p:nvSpPr>
-          <p:cNvPr id="111" name="TextBox 110"/>
-          <p:cNvSpPr txBox="1"/>
-          <p:nvPr/>
-        </p:nvSpPr>
-        <p:spPr>
-          <a:xfrm>
-            <a:off x="2148840" y="5133441"/>
-            <a:ext cx="2029967" cy="210312"/>
-          </a:xfrm>
-          <a:prstGeom prst="rect">
-            <a:avLst/>
-          </a:prstGeom>
-          <a:noFill/>
-        </p:spPr>
-        <p:txBody>
-          <a:bodyPr wrap="square" lIns="0" rIns="0" tIns="0" bIns="0">
-            <a:spAutoFit/>
-          </a:bodyPr>
-          <a:lstStyle/>
-          <a:p>
-            <a:pPr algn="r"/>
-            <a:r>
-              <a:rPr sz="1150" b="1" i="0">
+          <p:cNvPr id="153" name="TextBox 152"/>
+          <p:cNvSpPr txBox="1"/>
+          <p:nvPr/>
+        </p:nvSpPr>
+        <p:spPr>
+          <a:xfrm>
+            <a:off x="1691640" y="5135270"/>
+            <a:ext cx="2468880" cy="192024"/>
+          </a:xfrm>
+          <a:prstGeom prst="rect">
+            <a:avLst/>
+          </a:prstGeom>
+          <a:noFill/>
+        </p:spPr>
+        <p:txBody>
+          <a:bodyPr wrap="square" lIns="0" rIns="0" tIns="0" bIns="0">
+            <a:spAutoFit/>
+          </a:bodyPr>
+          <a:lstStyle/>
+          <a:p>
+            <a:pPr algn="r"/>
+            <a:r>
+              <a:rPr sz="1050" b="1" i="0">
                 <a:solidFill>
                   <a:srgbClr val="102D5E"/>
                 </a:solidFill>
@@ -11708,29 +13184,29 @@
       </p:sp>
       <p:sp>
         <p:nvSpPr>
-          <p:cNvPr id="112" name="TextBox 111"/>
-          <p:cNvSpPr txBox="1"/>
-          <p:nvPr/>
-        </p:nvSpPr>
-        <p:spPr>
-          <a:xfrm>
-            <a:off x="4562856" y="5133441"/>
-            <a:ext cx="2029967" cy="210312"/>
-          </a:xfrm>
-          <a:prstGeom prst="rect">
-            <a:avLst/>
-          </a:prstGeom>
-          <a:noFill/>
-        </p:spPr>
-        <p:txBody>
-          <a:bodyPr wrap="square" lIns="0" rIns="0" tIns="0" bIns="0">
-            <a:spAutoFit/>
-          </a:bodyPr>
-          <a:lstStyle/>
-          <a:p>
-            <a:pPr algn="r"/>
-            <a:r>
-              <a:rPr sz="1150" b="1" i="0">
+          <p:cNvPr id="154" name="TextBox 153"/>
+          <p:cNvSpPr txBox="1"/>
+          <p:nvPr/>
+        </p:nvSpPr>
+        <p:spPr>
+          <a:xfrm>
+            <a:off x="4471416" y="5135270"/>
+            <a:ext cx="2468880" cy="192024"/>
+          </a:xfrm>
+          <a:prstGeom prst="rect">
+            <a:avLst/>
+          </a:prstGeom>
+          <a:noFill/>
+        </p:spPr>
+        <p:txBody>
+          <a:bodyPr wrap="square" lIns="0" rIns="0" tIns="0" bIns="0">
+            <a:spAutoFit/>
+          </a:bodyPr>
+          <a:lstStyle/>
+          <a:p>
+            <a:pPr algn="r"/>
+            <a:r>
+              <a:rPr sz="1050" b="1" i="0">
                 <a:solidFill>
                   <a:srgbClr val="102D5E"/>
                 </a:solidFill>
@@ -11743,29 +13219,29 @@
       </p:sp>
       <p:sp>
         <p:nvSpPr>
-          <p:cNvPr id="113" name="TextBox 112"/>
-          <p:cNvSpPr txBox="1"/>
-          <p:nvPr/>
-        </p:nvSpPr>
-        <p:spPr>
-          <a:xfrm>
-            <a:off x="6976871" y="5133441"/>
-            <a:ext cx="2029967" cy="210312"/>
-          </a:xfrm>
-          <a:prstGeom prst="rect">
-            <a:avLst/>
-          </a:prstGeom>
-          <a:noFill/>
-        </p:spPr>
-        <p:txBody>
-          <a:bodyPr wrap="square" lIns="0" rIns="0" tIns="0" bIns="0">
-            <a:spAutoFit/>
-          </a:bodyPr>
-          <a:lstStyle/>
-          <a:p>
-            <a:pPr algn="r"/>
-            <a:r>
-              <a:rPr sz="1150" b="1" i="0">
+          <p:cNvPr id="155" name="TextBox 154"/>
+          <p:cNvSpPr txBox="1"/>
+          <p:nvPr/>
+        </p:nvSpPr>
+        <p:spPr>
+          <a:xfrm>
+            <a:off x="7251192" y="5135270"/>
+            <a:ext cx="2468880" cy="192024"/>
+          </a:xfrm>
+          <a:prstGeom prst="rect">
+            <a:avLst/>
+          </a:prstGeom>
+          <a:noFill/>
+        </p:spPr>
+        <p:txBody>
+          <a:bodyPr wrap="square" lIns="0" rIns="0" tIns="0" bIns="0">
+            <a:spAutoFit/>
+          </a:bodyPr>
+          <a:lstStyle/>
+          <a:p>
+            <a:pPr algn="r"/>
+            <a:r>
+              <a:rPr sz="1050" b="1" i="0">
                 <a:solidFill>
                   <a:srgbClr val="102D5E"/>
                 </a:solidFill>
@@ -11778,14 +13254,14 @@
       </p:sp>
       <p:cxnSp>
         <p:nvCxnSpPr>
-          <p:cNvPr id="114" name="Connector 113"/>
+          <p:cNvPr id="156" name="Connector 155"/>
           <p:cNvCxnSpPr/>
           <p:nvPr/>
         </p:nvCxnSpPr>
         <p:spPr>
           <a:xfrm>
-            <a:off x="731520" y="5380329"/>
-            <a:ext cx="8275320" cy="0"/>
+            <a:off x="502920" y="5373014"/>
+            <a:ext cx="9217152" cy="0"/>
           </a:xfrm>
           <a:prstGeom prst="line">
             <a:avLst/>
@@ -11814,14 +13290,14 @@
       </p:cxnSp>
       <p:sp>
         <p:nvSpPr>
-          <p:cNvPr id="115" name="TextBox 114"/>
-          <p:cNvSpPr txBox="1"/>
-          <p:nvPr/>
-        </p:nvSpPr>
-        <p:spPr>
-          <a:xfrm>
-            <a:off x="731520" y="5517489"/>
-            <a:ext cx="10607040" cy="182880"/>
+          <p:cNvPr id="157" name="TextBox 156"/>
+          <p:cNvSpPr txBox="1"/>
+          <p:nvPr/>
+        </p:nvSpPr>
+        <p:spPr>
+          <a:xfrm>
+            <a:off x="502920" y="5501030"/>
+            <a:ext cx="10972800" cy="173736"/>
           </a:xfrm>
           <a:prstGeom prst="rect">
             <a:avLst/>
@@ -11836,20 +13312,20 @@
           <a:p>
             <a:pPr algn="l"/>
             <a:r>
-              <a:rPr sz="1000" b="0" i="0">
+              <a:rPr sz="950" b="0" i="0">
                 <a:solidFill>
                   <a:srgbClr val="6B7480"/>
                 </a:solidFill>
                 <a:latin typeface="Garamond"/>
               </a:rPr>
-              <a:t>Adults (18+). New: first interview ever; seen before: interviewed in an earlier month or in the previous year (each household is interviewed in eight months over two years). New + seen before = that month's interviews; the year's new entrants plus those carried over from the previous year give the distinct persons. The ASEC interviews each person once: the March respondents plus the February–April oversamples, 1.45× a single March.</a:t>
-            </a:r>
-          </a:p>
-        </p:txBody>
-      </p:sp>
-      <p:sp>
-        <p:nvSpPr>
-          <p:cNvPr id="116" name="Rounded Rectangle 115">
+              <a:t>Adults (18+). New: first interview ever. From last year: back after being interviewed the previous year (first time this year). From this year: already interviewed in an earlier month of the year. Each distinct person is counted once in New or From last year, so those two sums give the year's distinct persons; adding the From-this-year repeats gives the interviews. The ASEC interviews each person once: the March respondents plus the February–April oversamples, 1.45× a single March.</a:t>
+            </a:r>
+          </a:p>
+        </p:txBody>
+      </p:sp>
+      <p:sp>
+        <p:nvSpPr>
+          <p:cNvPr id="158" name="Rounded Rectangle 157">
             <a:hlinkClick action="ppaction://hlinksldjump" r:id="rId2"/>
           </p:cNvPr>
           <p:cNvSpPr/>

--- a/report/data_cluster/sample_sizes_slides.pptx
+++ b/report/data_cluster/sample_sizes_slides.pptx
@@ -7896,8 +7896,8 @@
         </p:nvCxnSpPr>
         <p:spPr>
           <a:xfrm>
-            <a:off x="502920" y="1143000"/>
-            <a:ext cx="9217152" cy="0"/>
+            <a:off x="457200" y="1106424"/>
+            <a:ext cx="10680191" cy="0"/>
           </a:xfrm>
           <a:prstGeom prst="line">
             <a:avLst/>
@@ -7932,8 +7932,8 @@
         </p:nvSpPr>
         <p:spPr>
           <a:xfrm>
-            <a:off x="1691640" y="1188720"/>
-            <a:ext cx="2468880" cy="228600"/>
+            <a:off x="1371600" y="1152144"/>
+            <a:ext cx="3108960" cy="219456"/>
           </a:xfrm>
           <a:prstGeom prst="rect">
             <a:avLst/>
@@ -7948,7 +7948,7 @@
           <a:p>
             <a:pPr algn="ctr"/>
             <a:r>
-              <a:rPr sz="1250" b="1" i="0">
+              <a:rPr sz="1200" b="1" i="0">
                 <a:solidFill>
                   <a:srgbClr val="212529"/>
                 </a:solidFill>
@@ -7967,23 +7967,23 @@
         </p:nvSpPr>
         <p:spPr>
           <a:xfrm>
-            <a:off x="1691640" y="1444752"/>
-            <a:ext cx="731520" cy="182880"/>
-          </a:xfrm>
-          <a:prstGeom prst="rect">
-            <a:avLst/>
-          </a:prstGeom>
-          <a:noFill/>
-        </p:spPr>
-        <p:txBody>
-          <a:bodyPr wrap="square" lIns="0" rIns="0" tIns="0" bIns="0">
-            <a:spAutoFit/>
-          </a:bodyPr>
-          <a:lstStyle/>
-          <a:p>
-            <a:pPr algn="r"/>
-            <a:r>
-              <a:rPr sz="1000" b="1" i="0">
+            <a:off x="1371600" y="1399032"/>
+            <a:ext cx="694944" cy="164592"/>
+          </a:xfrm>
+          <a:prstGeom prst="rect">
+            <a:avLst/>
+          </a:prstGeom>
+          <a:noFill/>
+        </p:spPr>
+        <p:txBody>
+          <a:bodyPr wrap="square" lIns="0" rIns="0" tIns="0" bIns="0">
+            <a:spAutoFit/>
+          </a:bodyPr>
+          <a:lstStyle/>
+          <a:p>
+            <a:pPr algn="r"/>
+            <a:r>
+              <a:rPr sz="900" b="1" i="0">
                 <a:solidFill>
                   <a:srgbClr val="6B7480"/>
                 </a:solidFill>
@@ -8002,29 +8002,65 @@
         </p:nvSpPr>
         <p:spPr>
           <a:xfrm>
-            <a:off x="2423160" y="1444752"/>
-            <a:ext cx="868680" cy="182880"/>
-          </a:xfrm>
-          <a:prstGeom prst="rect">
-            <a:avLst/>
-          </a:prstGeom>
-          <a:noFill/>
-        </p:spPr>
-        <p:txBody>
-          <a:bodyPr wrap="square" lIns="0" rIns="0" tIns="0" bIns="0">
-            <a:spAutoFit/>
-          </a:bodyPr>
-          <a:lstStyle/>
-          <a:p>
-            <a:pPr algn="r"/>
-            <a:r>
-              <a:rPr sz="1000" b="1" i="0">
+            <a:off x="2066543" y="1399032"/>
+            <a:ext cx="841248" cy="164592"/>
+          </a:xfrm>
+          <a:prstGeom prst="rect">
+            <a:avLst/>
+          </a:prstGeom>
+          <a:noFill/>
+        </p:spPr>
+        <p:txBody>
+          <a:bodyPr wrap="square" lIns="0" rIns="0" tIns="0" bIns="0">
+            <a:spAutoFit/>
+          </a:bodyPr>
+          <a:lstStyle/>
+          <a:p>
+            <a:pPr algn="r"/>
+            <a:r>
+              <a:rPr sz="900" b="1" i="0">
                 <a:solidFill>
                   <a:srgbClr val="6B7480"/>
                 </a:solidFill>
                 <a:latin typeface="Garamond"/>
               </a:rPr>
-              <a:t>From last
+              <a:t>Earlier
+this year</a:t>
+            </a:r>
+          </a:p>
+        </p:txBody>
+      </p:sp>
+      <p:sp>
+        <p:nvSpPr>
+          <p:cNvPr id="7" name="TextBox 6"/>
+          <p:cNvSpPr txBox="1"/>
+          <p:nvPr/>
+        </p:nvSpPr>
+        <p:spPr>
+          <a:xfrm>
+            <a:off x="2907791" y="1399032"/>
+            <a:ext cx="786384" cy="164592"/>
+          </a:xfrm>
+          <a:prstGeom prst="rect">
+            <a:avLst/>
+          </a:prstGeom>
+          <a:noFill/>
+        </p:spPr>
+        <p:txBody>
+          <a:bodyPr wrap="square" lIns="0" rIns="0" tIns="0" bIns="0">
+            <a:spAutoFit/>
+          </a:bodyPr>
+          <a:lstStyle/>
+          <a:p>
+            <a:pPr algn="r"/>
+            <a:r>
+              <a:rPr sz="900" b="1" i="0">
+                <a:solidFill>
+                  <a:srgbClr val="6B7480"/>
+                </a:solidFill>
+                <a:latin typeface="Garamond"/>
+              </a:rPr>
+              <a:t>Last
 year</a:t>
             </a:r>
           </a:p>
@@ -8032,35 +8068,176 @@
       </p:sp>
       <p:sp>
         <p:nvSpPr>
-          <p:cNvPr id="7" name="TextBox 6"/>
-          <p:cNvSpPr txBox="1"/>
-          <p:nvPr/>
-        </p:nvSpPr>
-        <p:spPr>
-          <a:xfrm>
-            <a:off x="3291840" y="1444752"/>
-            <a:ext cx="868680" cy="182880"/>
-          </a:xfrm>
-          <a:prstGeom prst="rect">
-            <a:avLst/>
-          </a:prstGeom>
-          <a:noFill/>
-        </p:spPr>
-        <p:txBody>
-          <a:bodyPr wrap="square" lIns="0" rIns="0" tIns="0" bIns="0">
-            <a:spAutoFit/>
-          </a:bodyPr>
-          <a:lstStyle/>
-          <a:p>
-            <a:pPr algn="r"/>
-            <a:r>
-              <a:rPr sz="1000" b="1" i="0">
+          <p:cNvPr id="8" name="TextBox 7"/>
+          <p:cNvSpPr txBox="1"/>
+          <p:nvPr/>
+        </p:nvSpPr>
+        <p:spPr>
+          <a:xfrm>
+            <a:off x="3694176" y="1399032"/>
+            <a:ext cx="786384" cy="164592"/>
+          </a:xfrm>
+          <a:prstGeom prst="rect">
+            <a:avLst/>
+          </a:prstGeom>
+          <a:noFill/>
+        </p:spPr>
+        <p:txBody>
+          <a:bodyPr wrap="square" lIns="0" rIns="0" tIns="0" bIns="0">
+            <a:spAutoFit/>
+          </a:bodyPr>
+          <a:lstStyle/>
+          <a:p>
+            <a:pPr algn="r"/>
+            <a:r>
+              <a:rPr sz="900" b="1" i="0">
                 <a:solidFill>
                   <a:srgbClr val="6B7480"/>
                 </a:solidFill>
                 <a:latin typeface="Garamond"/>
               </a:rPr>
-              <a:t>From this
+              <a:t>Total</a:t>
+            </a:r>
+          </a:p>
+        </p:txBody>
+      </p:sp>
+      <p:sp>
+        <p:nvSpPr>
+          <p:cNvPr id="9" name="TextBox 8"/>
+          <p:cNvSpPr txBox="1"/>
+          <p:nvPr/>
+        </p:nvSpPr>
+        <p:spPr>
+          <a:xfrm>
+            <a:off x="4700016" y="1152144"/>
+            <a:ext cx="3108960" cy="219456"/>
+          </a:xfrm>
+          <a:prstGeom prst="rect">
+            <a:avLst/>
+          </a:prstGeom>
+          <a:noFill/>
+        </p:spPr>
+        <p:txBody>
+          <a:bodyPr wrap="square" lIns="0" rIns="0" tIns="0" bIns="0">
+            <a:spAutoFit/>
+          </a:bodyPr>
+          <a:lstStyle/>
+          <a:p>
+            <a:pPr algn="ctr"/>
+            <a:r>
+              <a:rPr sz="1200" b="1" i="0">
+                <a:solidFill>
+                  <a:srgbClr val="212529"/>
+                </a:solidFill>
+                <a:latin typeface="Garamond"/>
+              </a:rPr>
+              <a:t>2015</a:t>
+            </a:r>
+          </a:p>
+        </p:txBody>
+      </p:sp>
+      <p:sp>
+        <p:nvSpPr>
+          <p:cNvPr id="10" name="TextBox 9"/>
+          <p:cNvSpPr txBox="1"/>
+          <p:nvPr/>
+        </p:nvSpPr>
+        <p:spPr>
+          <a:xfrm>
+            <a:off x="4700016" y="1399032"/>
+            <a:ext cx="694944" cy="164592"/>
+          </a:xfrm>
+          <a:prstGeom prst="rect">
+            <a:avLst/>
+          </a:prstGeom>
+          <a:noFill/>
+        </p:spPr>
+        <p:txBody>
+          <a:bodyPr wrap="square" lIns="0" rIns="0" tIns="0" bIns="0">
+            <a:spAutoFit/>
+          </a:bodyPr>
+          <a:lstStyle/>
+          <a:p>
+            <a:pPr algn="r"/>
+            <a:r>
+              <a:rPr sz="900" b="1" i="0">
+                <a:solidFill>
+                  <a:srgbClr val="6B7480"/>
+                </a:solidFill>
+                <a:latin typeface="Garamond"/>
+              </a:rPr>
+              <a:t>New</a:t>
+            </a:r>
+          </a:p>
+        </p:txBody>
+      </p:sp>
+      <p:sp>
+        <p:nvSpPr>
+          <p:cNvPr id="11" name="TextBox 10"/>
+          <p:cNvSpPr txBox="1"/>
+          <p:nvPr/>
+        </p:nvSpPr>
+        <p:spPr>
+          <a:xfrm>
+            <a:off x="5394959" y="1399032"/>
+            <a:ext cx="841248" cy="164592"/>
+          </a:xfrm>
+          <a:prstGeom prst="rect">
+            <a:avLst/>
+          </a:prstGeom>
+          <a:noFill/>
+        </p:spPr>
+        <p:txBody>
+          <a:bodyPr wrap="square" lIns="0" rIns="0" tIns="0" bIns="0">
+            <a:spAutoFit/>
+          </a:bodyPr>
+          <a:lstStyle/>
+          <a:p>
+            <a:pPr algn="r"/>
+            <a:r>
+              <a:rPr sz="900" b="1" i="0">
+                <a:solidFill>
+                  <a:srgbClr val="6B7480"/>
+                </a:solidFill>
+                <a:latin typeface="Garamond"/>
+              </a:rPr>
+              <a:t>Earlier
+this year</a:t>
+            </a:r>
+          </a:p>
+        </p:txBody>
+      </p:sp>
+      <p:sp>
+        <p:nvSpPr>
+          <p:cNvPr id="12" name="TextBox 11"/>
+          <p:cNvSpPr txBox="1"/>
+          <p:nvPr/>
+        </p:nvSpPr>
+        <p:spPr>
+          <a:xfrm>
+            <a:off x="6236207" y="1399032"/>
+            <a:ext cx="786384" cy="164592"/>
+          </a:xfrm>
+          <a:prstGeom prst="rect">
+            <a:avLst/>
+          </a:prstGeom>
+          <a:noFill/>
+        </p:spPr>
+        <p:txBody>
+          <a:bodyPr wrap="square" lIns="0" rIns="0" tIns="0" bIns="0">
+            <a:spAutoFit/>
+          </a:bodyPr>
+          <a:lstStyle/>
+          <a:p>
+            <a:pPr algn="r"/>
+            <a:r>
+              <a:rPr sz="900" b="1" i="0">
+                <a:solidFill>
+                  <a:srgbClr val="6B7480"/>
+                </a:solidFill>
+                <a:latin typeface="Garamond"/>
+              </a:rPr>
+              <a:t>Last
 year</a:t>
             </a:r>
           </a:p>
@@ -8068,14 +8245,49 @@
       </p:sp>
       <p:sp>
         <p:nvSpPr>
-          <p:cNvPr id="8" name="TextBox 7"/>
-          <p:cNvSpPr txBox="1"/>
-          <p:nvPr/>
-        </p:nvSpPr>
-        <p:spPr>
-          <a:xfrm>
-            <a:off x="4471416" y="1188720"/>
-            <a:ext cx="2468880" cy="228600"/>
+          <p:cNvPr id="13" name="TextBox 12"/>
+          <p:cNvSpPr txBox="1"/>
+          <p:nvPr/>
+        </p:nvSpPr>
+        <p:spPr>
+          <a:xfrm>
+            <a:off x="7022592" y="1399032"/>
+            <a:ext cx="786384" cy="164592"/>
+          </a:xfrm>
+          <a:prstGeom prst="rect">
+            <a:avLst/>
+          </a:prstGeom>
+          <a:noFill/>
+        </p:spPr>
+        <p:txBody>
+          <a:bodyPr wrap="square" lIns="0" rIns="0" tIns="0" bIns="0">
+            <a:spAutoFit/>
+          </a:bodyPr>
+          <a:lstStyle/>
+          <a:p>
+            <a:pPr algn="r"/>
+            <a:r>
+              <a:rPr sz="900" b="1" i="0">
+                <a:solidFill>
+                  <a:srgbClr val="6B7480"/>
+                </a:solidFill>
+                <a:latin typeface="Garamond"/>
+              </a:rPr>
+              <a:t>Total</a:t>
+            </a:r>
+          </a:p>
+        </p:txBody>
+      </p:sp>
+      <p:sp>
+        <p:nvSpPr>
+          <p:cNvPr id="14" name="TextBox 13"/>
+          <p:cNvSpPr txBox="1"/>
+          <p:nvPr/>
+        </p:nvSpPr>
+        <p:spPr>
+          <a:xfrm>
+            <a:off x="8028431" y="1152144"/>
+            <a:ext cx="3108960" cy="219456"/>
           </a:xfrm>
           <a:prstGeom prst="rect">
             <a:avLst/>
@@ -8090,42 +8302,42 @@
           <a:p>
             <a:pPr algn="ctr"/>
             <a:r>
-              <a:rPr sz="1250" b="1" i="0">
-                <a:solidFill>
-                  <a:srgbClr val="212529"/>
-                </a:solidFill>
-                <a:latin typeface="Garamond"/>
-              </a:rPr>
-              <a:t>2015</a:t>
-            </a:r>
-          </a:p>
-        </p:txBody>
-      </p:sp>
-      <p:sp>
-        <p:nvSpPr>
-          <p:cNvPr id="9" name="TextBox 8"/>
-          <p:cNvSpPr txBox="1"/>
-          <p:nvPr/>
-        </p:nvSpPr>
-        <p:spPr>
-          <a:xfrm>
-            <a:off x="4471416" y="1444752"/>
-            <a:ext cx="731520" cy="182880"/>
-          </a:xfrm>
-          <a:prstGeom prst="rect">
-            <a:avLst/>
-          </a:prstGeom>
-          <a:noFill/>
-        </p:spPr>
-        <p:txBody>
-          <a:bodyPr wrap="square" lIns="0" rIns="0" tIns="0" bIns="0">
-            <a:spAutoFit/>
-          </a:bodyPr>
-          <a:lstStyle/>
-          <a:p>
-            <a:pPr algn="r"/>
-            <a:r>
-              <a:rPr sz="1000" b="1" i="0">
+              <a:rPr sz="1200" b="1" i="0">
+                <a:solidFill>
+                  <a:srgbClr val="212529"/>
+                </a:solidFill>
+                <a:latin typeface="Garamond"/>
+              </a:rPr>
+              <a:t>2024</a:t>
+            </a:r>
+          </a:p>
+        </p:txBody>
+      </p:sp>
+      <p:sp>
+        <p:nvSpPr>
+          <p:cNvPr id="15" name="TextBox 14"/>
+          <p:cNvSpPr txBox="1"/>
+          <p:nvPr/>
+        </p:nvSpPr>
+        <p:spPr>
+          <a:xfrm>
+            <a:off x="8028431" y="1399032"/>
+            <a:ext cx="694944" cy="164592"/>
+          </a:xfrm>
+          <a:prstGeom prst="rect">
+            <a:avLst/>
+          </a:prstGeom>
+          <a:noFill/>
+        </p:spPr>
+        <p:txBody>
+          <a:bodyPr wrap="square" lIns="0" rIns="0" tIns="0" bIns="0">
+            <a:spAutoFit/>
+          </a:bodyPr>
+          <a:lstStyle/>
+          <a:p>
+            <a:pPr algn="r"/>
+            <a:r>
+              <a:rPr sz="900" b="1" i="0">
                 <a:solidFill>
                   <a:srgbClr val="6B7480"/>
                 </a:solidFill>
@@ -8138,35 +8350,71 @@
       </p:sp>
       <p:sp>
         <p:nvSpPr>
-          <p:cNvPr id="10" name="TextBox 9"/>
-          <p:cNvSpPr txBox="1"/>
-          <p:nvPr/>
-        </p:nvSpPr>
-        <p:spPr>
-          <a:xfrm>
-            <a:off x="5202936" y="1444752"/>
-            <a:ext cx="868680" cy="182880"/>
-          </a:xfrm>
-          <a:prstGeom prst="rect">
-            <a:avLst/>
-          </a:prstGeom>
-          <a:noFill/>
-        </p:spPr>
-        <p:txBody>
-          <a:bodyPr wrap="square" lIns="0" rIns="0" tIns="0" bIns="0">
-            <a:spAutoFit/>
-          </a:bodyPr>
-          <a:lstStyle/>
-          <a:p>
-            <a:pPr algn="r"/>
-            <a:r>
-              <a:rPr sz="1000" b="1" i="0">
+          <p:cNvPr id="16" name="TextBox 15"/>
+          <p:cNvSpPr txBox="1"/>
+          <p:nvPr/>
+        </p:nvSpPr>
+        <p:spPr>
+          <a:xfrm>
+            <a:off x="8723376" y="1399032"/>
+            <a:ext cx="841248" cy="164592"/>
+          </a:xfrm>
+          <a:prstGeom prst="rect">
+            <a:avLst/>
+          </a:prstGeom>
+          <a:noFill/>
+        </p:spPr>
+        <p:txBody>
+          <a:bodyPr wrap="square" lIns="0" rIns="0" tIns="0" bIns="0">
+            <a:spAutoFit/>
+          </a:bodyPr>
+          <a:lstStyle/>
+          <a:p>
+            <a:pPr algn="r"/>
+            <a:r>
+              <a:rPr sz="900" b="1" i="0">
                 <a:solidFill>
                   <a:srgbClr val="6B7480"/>
                 </a:solidFill>
                 <a:latin typeface="Garamond"/>
               </a:rPr>
-              <a:t>From last
+              <a:t>Earlier
+this year</a:t>
+            </a:r>
+          </a:p>
+        </p:txBody>
+      </p:sp>
+      <p:sp>
+        <p:nvSpPr>
+          <p:cNvPr id="17" name="TextBox 16"/>
+          <p:cNvSpPr txBox="1"/>
+          <p:nvPr/>
+        </p:nvSpPr>
+        <p:spPr>
+          <a:xfrm>
+            <a:off x="9564624" y="1399032"/>
+            <a:ext cx="786384" cy="164592"/>
+          </a:xfrm>
+          <a:prstGeom prst="rect">
+            <a:avLst/>
+          </a:prstGeom>
+          <a:noFill/>
+        </p:spPr>
+        <p:txBody>
+          <a:bodyPr wrap="square" lIns="0" rIns="0" tIns="0" bIns="0">
+            <a:spAutoFit/>
+          </a:bodyPr>
+          <a:lstStyle/>
+          <a:p>
+            <a:pPr algn="r"/>
+            <a:r>
+              <a:rPr sz="900" b="1" i="0">
+                <a:solidFill>
+                  <a:srgbClr val="6B7480"/>
+                </a:solidFill>
+                <a:latin typeface="Garamond"/>
+              </a:rPr>
+              <a:t>Last
 year</a:t>
             </a:r>
           </a:p>
@@ -8174,192 +8422,49 @@
       </p:sp>
       <p:sp>
         <p:nvSpPr>
-          <p:cNvPr id="11" name="TextBox 10"/>
-          <p:cNvSpPr txBox="1"/>
-          <p:nvPr/>
-        </p:nvSpPr>
-        <p:spPr>
-          <a:xfrm>
-            <a:off x="6071616" y="1444752"/>
-            <a:ext cx="868680" cy="182880"/>
-          </a:xfrm>
-          <a:prstGeom prst="rect">
-            <a:avLst/>
-          </a:prstGeom>
-          <a:noFill/>
-        </p:spPr>
-        <p:txBody>
-          <a:bodyPr wrap="square" lIns="0" rIns="0" tIns="0" bIns="0">
-            <a:spAutoFit/>
-          </a:bodyPr>
-          <a:lstStyle/>
-          <a:p>
-            <a:pPr algn="r"/>
-            <a:r>
-              <a:rPr sz="1000" b="1" i="0">
+          <p:cNvPr id="18" name="TextBox 17"/>
+          <p:cNvSpPr txBox="1"/>
+          <p:nvPr/>
+        </p:nvSpPr>
+        <p:spPr>
+          <a:xfrm>
+            <a:off x="10351007" y="1399032"/>
+            <a:ext cx="786384" cy="164592"/>
+          </a:xfrm>
+          <a:prstGeom prst="rect">
+            <a:avLst/>
+          </a:prstGeom>
+          <a:noFill/>
+        </p:spPr>
+        <p:txBody>
+          <a:bodyPr wrap="square" lIns="0" rIns="0" tIns="0" bIns="0">
+            <a:spAutoFit/>
+          </a:bodyPr>
+          <a:lstStyle/>
+          <a:p>
+            <a:pPr algn="r"/>
+            <a:r>
+              <a:rPr sz="900" b="1" i="0">
                 <a:solidFill>
                   <a:srgbClr val="6B7480"/>
                 </a:solidFill>
                 <a:latin typeface="Garamond"/>
               </a:rPr>
-              <a:t>From this
-year</a:t>
-            </a:r>
-          </a:p>
-        </p:txBody>
-      </p:sp>
-      <p:sp>
-        <p:nvSpPr>
-          <p:cNvPr id="12" name="TextBox 11"/>
-          <p:cNvSpPr txBox="1"/>
-          <p:nvPr/>
-        </p:nvSpPr>
-        <p:spPr>
-          <a:xfrm>
-            <a:off x="7251192" y="1188720"/>
-            <a:ext cx="2468880" cy="228600"/>
-          </a:xfrm>
-          <a:prstGeom prst="rect">
-            <a:avLst/>
-          </a:prstGeom>
-          <a:noFill/>
-        </p:spPr>
-        <p:txBody>
-          <a:bodyPr wrap="square" lIns="0" rIns="0" tIns="0" bIns="0">
-            <a:spAutoFit/>
-          </a:bodyPr>
-          <a:lstStyle/>
-          <a:p>
-            <a:pPr algn="ctr"/>
-            <a:r>
-              <a:rPr sz="1250" b="1" i="0">
-                <a:solidFill>
-                  <a:srgbClr val="212529"/>
-                </a:solidFill>
-                <a:latin typeface="Garamond"/>
-              </a:rPr>
-              <a:t>2024</a:t>
-            </a:r>
-          </a:p>
-        </p:txBody>
-      </p:sp>
-      <p:sp>
-        <p:nvSpPr>
-          <p:cNvPr id="13" name="TextBox 12"/>
-          <p:cNvSpPr txBox="1"/>
-          <p:nvPr/>
-        </p:nvSpPr>
-        <p:spPr>
-          <a:xfrm>
-            <a:off x="7251192" y="1444752"/>
-            <a:ext cx="731520" cy="182880"/>
-          </a:xfrm>
-          <a:prstGeom prst="rect">
-            <a:avLst/>
-          </a:prstGeom>
-          <a:noFill/>
-        </p:spPr>
-        <p:txBody>
-          <a:bodyPr wrap="square" lIns="0" rIns="0" tIns="0" bIns="0">
-            <a:spAutoFit/>
-          </a:bodyPr>
-          <a:lstStyle/>
-          <a:p>
-            <a:pPr algn="r"/>
-            <a:r>
-              <a:rPr sz="1000" b="1" i="0">
-                <a:solidFill>
-                  <a:srgbClr val="6B7480"/>
-                </a:solidFill>
-                <a:latin typeface="Garamond"/>
-              </a:rPr>
-              <a:t>New</a:t>
-            </a:r>
-          </a:p>
-        </p:txBody>
-      </p:sp>
-      <p:sp>
-        <p:nvSpPr>
-          <p:cNvPr id="14" name="TextBox 13"/>
-          <p:cNvSpPr txBox="1"/>
-          <p:nvPr/>
-        </p:nvSpPr>
-        <p:spPr>
-          <a:xfrm>
-            <a:off x="7982712" y="1444752"/>
-            <a:ext cx="868680" cy="182880"/>
-          </a:xfrm>
-          <a:prstGeom prst="rect">
-            <a:avLst/>
-          </a:prstGeom>
-          <a:noFill/>
-        </p:spPr>
-        <p:txBody>
-          <a:bodyPr wrap="square" lIns="0" rIns="0" tIns="0" bIns="0">
-            <a:spAutoFit/>
-          </a:bodyPr>
-          <a:lstStyle/>
-          <a:p>
-            <a:pPr algn="r"/>
-            <a:r>
-              <a:rPr sz="1000" b="1" i="0">
-                <a:solidFill>
-                  <a:srgbClr val="6B7480"/>
-                </a:solidFill>
-                <a:latin typeface="Garamond"/>
-              </a:rPr>
-              <a:t>From last
-year</a:t>
-            </a:r>
-          </a:p>
-        </p:txBody>
-      </p:sp>
-      <p:sp>
-        <p:nvSpPr>
-          <p:cNvPr id="15" name="TextBox 14"/>
-          <p:cNvSpPr txBox="1"/>
-          <p:nvPr/>
-        </p:nvSpPr>
-        <p:spPr>
-          <a:xfrm>
-            <a:off x="8851392" y="1444752"/>
-            <a:ext cx="868680" cy="182880"/>
-          </a:xfrm>
-          <a:prstGeom prst="rect">
-            <a:avLst/>
-          </a:prstGeom>
-          <a:noFill/>
-        </p:spPr>
-        <p:txBody>
-          <a:bodyPr wrap="square" lIns="0" rIns="0" tIns="0" bIns="0">
-            <a:spAutoFit/>
-          </a:bodyPr>
-          <a:lstStyle/>
-          <a:p>
-            <a:pPr algn="r"/>
-            <a:r>
-              <a:rPr sz="1000" b="1" i="0">
-                <a:solidFill>
-                  <a:srgbClr val="6B7480"/>
-                </a:solidFill>
-                <a:latin typeface="Garamond"/>
-              </a:rPr>
-              <a:t>From this
-year</a:t>
+              <a:t>Total</a:t>
             </a:r>
           </a:p>
         </p:txBody>
       </p:sp>
       <p:cxnSp>
         <p:nvCxnSpPr>
-          <p:cNvPr id="16" name="Connector 15"/>
+          <p:cNvPr id="19" name="Connector 18"/>
           <p:cNvCxnSpPr/>
           <p:nvPr/>
         </p:nvCxnSpPr>
         <p:spPr>
           <a:xfrm>
-            <a:off x="502920" y="1901952"/>
-            <a:ext cx="9217152" cy="0"/>
+            <a:off x="457200" y="1828800"/>
+            <a:ext cx="10680191" cy="0"/>
           </a:xfrm>
           <a:prstGeom prst="line">
             <a:avLst/>
@@ -8388,14 +8493,14 @@
       </p:cxnSp>
       <p:sp>
         <p:nvSpPr>
-          <p:cNvPr id="17" name="TextBox 16"/>
-          <p:cNvSpPr txBox="1"/>
-          <p:nvPr/>
-        </p:nvSpPr>
-        <p:spPr>
-          <a:xfrm>
-            <a:off x="502920" y="1975104"/>
-            <a:ext cx="1188720" cy="192024"/>
+          <p:cNvPr id="20" name="TextBox 19"/>
+          <p:cNvSpPr txBox="1"/>
+          <p:nvPr/>
+        </p:nvSpPr>
+        <p:spPr>
+          <a:xfrm>
+            <a:off x="457200" y="1901952"/>
+            <a:ext cx="914400" cy="173736"/>
           </a:xfrm>
           <a:prstGeom prst="rect">
             <a:avLst/>
@@ -8410,7 +8515,7 @@
           <a:p>
             <a:pPr algn="l"/>
             <a:r>
-              <a:rPr sz="1050" b="0" i="0">
+              <a:rPr sz="950" b="0" i="0">
                 <a:solidFill>
                   <a:srgbClr val="212529"/>
                 </a:solidFill>
@@ -8423,29 +8528,29 @@
       </p:sp>
       <p:sp>
         <p:nvSpPr>
-          <p:cNvPr id="18" name="TextBox 17"/>
-          <p:cNvSpPr txBox="1"/>
-          <p:nvPr/>
-        </p:nvSpPr>
-        <p:spPr>
-          <a:xfrm>
-            <a:off x="1691640" y="1975104"/>
-            <a:ext cx="731520" cy="192024"/>
-          </a:xfrm>
-          <a:prstGeom prst="rect">
-            <a:avLst/>
-          </a:prstGeom>
-          <a:noFill/>
-        </p:spPr>
-        <p:txBody>
-          <a:bodyPr wrap="square" lIns="0" rIns="0" tIns="0" bIns="0">
-            <a:spAutoFit/>
-          </a:bodyPr>
-          <a:lstStyle/>
-          <a:p>
-            <a:pPr algn="r"/>
-            <a:r>
-              <a:rPr sz="1050" b="0" i="0">
+          <p:cNvPr id="21" name="TextBox 20"/>
+          <p:cNvSpPr txBox="1"/>
+          <p:nvPr/>
+        </p:nvSpPr>
+        <p:spPr>
+          <a:xfrm>
+            <a:off x="1371600" y="1901952"/>
+            <a:ext cx="694944" cy="173736"/>
+          </a:xfrm>
+          <a:prstGeom prst="rect">
+            <a:avLst/>
+          </a:prstGeom>
+          <a:noFill/>
+        </p:spPr>
+        <p:txBody>
+          <a:bodyPr wrap="square" lIns="0" rIns="0" tIns="0" bIns="0">
+            <a:spAutoFit/>
+          </a:bodyPr>
+          <a:lstStyle/>
+          <a:p>
+            <a:pPr algn="r"/>
+            <a:r>
+              <a:rPr sz="950" b="0" i="0">
                 <a:solidFill>
                   <a:srgbClr val="212529"/>
                 </a:solidFill>
@@ -8458,29 +8563,64 @@
       </p:sp>
       <p:sp>
         <p:nvSpPr>
-          <p:cNvPr id="19" name="TextBox 18"/>
-          <p:cNvSpPr txBox="1"/>
-          <p:nvPr/>
-        </p:nvSpPr>
-        <p:spPr>
-          <a:xfrm>
-            <a:off x="2423160" y="1975104"/>
-            <a:ext cx="868680" cy="192024"/>
-          </a:xfrm>
-          <a:prstGeom prst="rect">
-            <a:avLst/>
-          </a:prstGeom>
-          <a:noFill/>
-        </p:spPr>
-        <p:txBody>
-          <a:bodyPr wrap="square" lIns="0" rIns="0" tIns="0" bIns="0">
-            <a:spAutoFit/>
-          </a:bodyPr>
-          <a:lstStyle/>
-          <a:p>
-            <a:pPr algn="r"/>
-            <a:r>
-              <a:rPr sz="1050" b="0" i="0">
+          <p:cNvPr id="22" name="TextBox 21"/>
+          <p:cNvSpPr txBox="1"/>
+          <p:nvPr/>
+        </p:nvSpPr>
+        <p:spPr>
+          <a:xfrm>
+            <a:off x="2066543" y="1901952"/>
+            <a:ext cx="841248" cy="173736"/>
+          </a:xfrm>
+          <a:prstGeom prst="rect">
+            <a:avLst/>
+          </a:prstGeom>
+          <a:noFill/>
+        </p:spPr>
+        <p:txBody>
+          <a:bodyPr wrap="square" lIns="0" rIns="0" tIns="0" bIns="0">
+            <a:spAutoFit/>
+          </a:bodyPr>
+          <a:lstStyle/>
+          <a:p>
+            <a:pPr algn="r"/>
+            <a:r>
+              <a:rPr sz="950" b="0" i="0">
+                <a:solidFill>
+                  <a:srgbClr val="212529"/>
+                </a:solidFill>
+                <a:latin typeface="Garamond"/>
+              </a:rPr>
+              <a:t>0</a:t>
+            </a:r>
+          </a:p>
+        </p:txBody>
+      </p:sp>
+      <p:sp>
+        <p:nvSpPr>
+          <p:cNvPr id="23" name="TextBox 22"/>
+          <p:cNvSpPr txBox="1"/>
+          <p:nvPr/>
+        </p:nvSpPr>
+        <p:spPr>
+          <a:xfrm>
+            <a:off x="2907791" y="1901952"/>
+            <a:ext cx="786384" cy="173736"/>
+          </a:xfrm>
+          <a:prstGeom prst="rect">
+            <a:avLst/>
+          </a:prstGeom>
+          <a:noFill/>
+        </p:spPr>
+        <p:txBody>
+          <a:bodyPr wrap="square" lIns="0" rIns="0" tIns="0" bIns="0">
+            <a:spAutoFit/>
+          </a:bodyPr>
+          <a:lstStyle/>
+          <a:p>
+            <a:pPr algn="r"/>
+            <a:r>
+              <a:rPr sz="950" b="0" i="0">
                 <a:solidFill>
                   <a:srgbClr val="212529"/>
                 </a:solidFill>
@@ -8493,29 +8633,99 @@
       </p:sp>
       <p:sp>
         <p:nvSpPr>
-          <p:cNvPr id="20" name="TextBox 19"/>
-          <p:cNvSpPr txBox="1"/>
-          <p:nvPr/>
-        </p:nvSpPr>
-        <p:spPr>
-          <a:xfrm>
-            <a:off x="3291840" y="1975104"/>
-            <a:ext cx="868680" cy="192024"/>
-          </a:xfrm>
-          <a:prstGeom prst="rect">
-            <a:avLst/>
-          </a:prstGeom>
-          <a:noFill/>
-        </p:spPr>
-        <p:txBody>
-          <a:bodyPr wrap="square" lIns="0" rIns="0" tIns="0" bIns="0">
-            <a:spAutoFit/>
-          </a:bodyPr>
-          <a:lstStyle/>
-          <a:p>
-            <a:pPr algn="r"/>
-            <a:r>
-              <a:rPr sz="1050" b="0" i="0">
+          <p:cNvPr id="24" name="TextBox 23"/>
+          <p:cNvSpPr txBox="1"/>
+          <p:nvPr/>
+        </p:nvSpPr>
+        <p:spPr>
+          <a:xfrm>
+            <a:off x="3694176" y="1901952"/>
+            <a:ext cx="786384" cy="173736"/>
+          </a:xfrm>
+          <a:prstGeom prst="rect">
+            <a:avLst/>
+          </a:prstGeom>
+          <a:noFill/>
+        </p:spPr>
+        <p:txBody>
+          <a:bodyPr wrap="square" lIns="0" rIns="0" tIns="0" bIns="0">
+            <a:spAutoFit/>
+          </a:bodyPr>
+          <a:lstStyle/>
+          <a:p>
+            <a:pPr algn="r"/>
+            <a:r>
+              <a:rPr sz="950" b="0" i="0">
+                <a:solidFill>
+                  <a:srgbClr val="212529"/>
+                </a:solidFill>
+                <a:latin typeface="Garamond"/>
+              </a:rPr>
+              <a:t>101,943</a:t>
+            </a:r>
+          </a:p>
+        </p:txBody>
+      </p:sp>
+      <p:sp>
+        <p:nvSpPr>
+          <p:cNvPr id="25" name="TextBox 24"/>
+          <p:cNvSpPr txBox="1"/>
+          <p:nvPr/>
+        </p:nvSpPr>
+        <p:spPr>
+          <a:xfrm>
+            <a:off x="4700016" y="1901952"/>
+            <a:ext cx="694944" cy="173736"/>
+          </a:xfrm>
+          <a:prstGeom prst="rect">
+            <a:avLst/>
+          </a:prstGeom>
+          <a:noFill/>
+        </p:spPr>
+        <p:txBody>
+          <a:bodyPr wrap="square" lIns="0" rIns="0" tIns="0" bIns="0">
+            <a:spAutoFit/>
+          </a:bodyPr>
+          <a:lstStyle/>
+          <a:p>
+            <a:pPr algn="r"/>
+            <a:r>
+              <a:rPr sz="950" b="0" i="0">
+                <a:solidFill>
+                  <a:srgbClr val="212529"/>
+                </a:solidFill>
+                <a:latin typeface="Garamond"/>
+              </a:rPr>
+              <a:t>19,653</a:t>
+            </a:r>
+          </a:p>
+        </p:txBody>
+      </p:sp>
+      <p:sp>
+        <p:nvSpPr>
+          <p:cNvPr id="26" name="TextBox 25"/>
+          <p:cNvSpPr txBox="1"/>
+          <p:nvPr/>
+        </p:nvSpPr>
+        <p:spPr>
+          <a:xfrm>
+            <a:off x="5394959" y="1901952"/>
+            <a:ext cx="841248" cy="173736"/>
+          </a:xfrm>
+          <a:prstGeom prst="rect">
+            <a:avLst/>
+          </a:prstGeom>
+          <a:noFill/>
+        </p:spPr>
+        <p:txBody>
+          <a:bodyPr wrap="square" lIns="0" rIns="0" tIns="0" bIns="0">
+            <a:spAutoFit/>
+          </a:bodyPr>
+          <a:lstStyle/>
+          <a:p>
+            <a:pPr algn="r"/>
+            <a:r>
+              <a:rPr sz="950" b="0" i="0">
                 <a:solidFill>
                   <a:srgbClr val="212529"/>
                 </a:solidFill>
@@ -8528,64 +8738,29 @@
       </p:sp>
       <p:sp>
         <p:nvSpPr>
-          <p:cNvPr id="21" name="TextBox 20"/>
-          <p:cNvSpPr txBox="1"/>
-          <p:nvPr/>
-        </p:nvSpPr>
-        <p:spPr>
-          <a:xfrm>
-            <a:off x="4471416" y="1975104"/>
-            <a:ext cx="731520" cy="192024"/>
-          </a:xfrm>
-          <a:prstGeom prst="rect">
-            <a:avLst/>
-          </a:prstGeom>
-          <a:noFill/>
-        </p:spPr>
-        <p:txBody>
-          <a:bodyPr wrap="square" lIns="0" rIns="0" tIns="0" bIns="0">
-            <a:spAutoFit/>
-          </a:bodyPr>
-          <a:lstStyle/>
-          <a:p>
-            <a:pPr algn="r"/>
-            <a:r>
-              <a:rPr sz="1050" b="0" i="0">
-                <a:solidFill>
-                  <a:srgbClr val="212529"/>
-                </a:solidFill>
-                <a:latin typeface="Garamond"/>
-              </a:rPr>
-              <a:t>19,653</a:t>
-            </a:r>
-          </a:p>
-        </p:txBody>
-      </p:sp>
-      <p:sp>
-        <p:nvSpPr>
-          <p:cNvPr id="22" name="TextBox 21"/>
-          <p:cNvSpPr txBox="1"/>
-          <p:nvPr/>
-        </p:nvSpPr>
-        <p:spPr>
-          <a:xfrm>
-            <a:off x="5202936" y="1975104"/>
-            <a:ext cx="868680" cy="192024"/>
-          </a:xfrm>
-          <a:prstGeom prst="rect">
-            <a:avLst/>
-          </a:prstGeom>
-          <a:noFill/>
-        </p:spPr>
-        <p:txBody>
-          <a:bodyPr wrap="square" lIns="0" rIns="0" tIns="0" bIns="0">
-            <a:spAutoFit/>
-          </a:bodyPr>
-          <a:lstStyle/>
-          <a:p>
-            <a:pPr algn="r"/>
-            <a:r>
-              <a:rPr sz="1050" b="0" i="0">
+          <p:cNvPr id="27" name="TextBox 26"/>
+          <p:cNvSpPr txBox="1"/>
+          <p:nvPr/>
+        </p:nvSpPr>
+        <p:spPr>
+          <a:xfrm>
+            <a:off x="6236207" y="1901952"/>
+            <a:ext cx="786384" cy="173736"/>
+          </a:xfrm>
+          <a:prstGeom prst="rect">
+            <a:avLst/>
+          </a:prstGeom>
+          <a:noFill/>
+        </p:spPr>
+        <p:txBody>
+          <a:bodyPr wrap="square" lIns="0" rIns="0" tIns="0" bIns="0">
+            <a:spAutoFit/>
+          </a:bodyPr>
+          <a:lstStyle/>
+          <a:p>
+            <a:pPr algn="r"/>
+            <a:r>
+              <a:rPr sz="950" b="0" i="0">
                 <a:solidFill>
                   <a:srgbClr val="212529"/>
                 </a:solidFill>
@@ -8598,29 +8773,99 @@
       </p:sp>
       <p:sp>
         <p:nvSpPr>
-          <p:cNvPr id="23" name="TextBox 22"/>
-          <p:cNvSpPr txBox="1"/>
-          <p:nvPr/>
-        </p:nvSpPr>
-        <p:spPr>
-          <a:xfrm>
-            <a:off x="6071616" y="1975104"/>
-            <a:ext cx="868680" cy="192024"/>
-          </a:xfrm>
-          <a:prstGeom prst="rect">
-            <a:avLst/>
-          </a:prstGeom>
-          <a:noFill/>
-        </p:spPr>
-        <p:txBody>
-          <a:bodyPr wrap="square" lIns="0" rIns="0" tIns="0" bIns="0">
-            <a:spAutoFit/>
-          </a:bodyPr>
-          <a:lstStyle/>
-          <a:p>
-            <a:pPr algn="r"/>
-            <a:r>
-              <a:rPr sz="1050" b="0" i="0">
+          <p:cNvPr id="28" name="TextBox 27"/>
+          <p:cNvSpPr txBox="1"/>
+          <p:nvPr/>
+        </p:nvSpPr>
+        <p:spPr>
+          <a:xfrm>
+            <a:off x="7022592" y="1901952"/>
+            <a:ext cx="786384" cy="173736"/>
+          </a:xfrm>
+          <a:prstGeom prst="rect">
+            <a:avLst/>
+          </a:prstGeom>
+          <a:noFill/>
+        </p:spPr>
+        <p:txBody>
+          <a:bodyPr wrap="square" lIns="0" rIns="0" tIns="0" bIns="0">
+            <a:spAutoFit/>
+          </a:bodyPr>
+          <a:lstStyle/>
+          <a:p>
+            <a:pPr algn="r"/>
+            <a:r>
+              <a:rPr sz="950" b="0" i="0">
+                <a:solidFill>
+                  <a:srgbClr val="212529"/>
+                </a:solidFill>
+                <a:latin typeface="Garamond"/>
+              </a:rPr>
+              <a:t>102,441</a:t>
+            </a:r>
+          </a:p>
+        </p:txBody>
+      </p:sp>
+      <p:sp>
+        <p:nvSpPr>
+          <p:cNvPr id="29" name="TextBox 28"/>
+          <p:cNvSpPr txBox="1"/>
+          <p:nvPr/>
+        </p:nvSpPr>
+        <p:spPr>
+          <a:xfrm>
+            <a:off x="8028431" y="1901952"/>
+            <a:ext cx="694944" cy="173736"/>
+          </a:xfrm>
+          <a:prstGeom prst="rect">
+            <a:avLst/>
+          </a:prstGeom>
+          <a:noFill/>
+        </p:spPr>
+        <p:txBody>
+          <a:bodyPr wrap="square" lIns="0" rIns="0" tIns="0" bIns="0">
+            <a:spAutoFit/>
+          </a:bodyPr>
+          <a:lstStyle/>
+          <a:p>
+            <a:pPr algn="r"/>
+            <a:r>
+              <a:rPr sz="950" b="0" i="0">
+                <a:solidFill>
+                  <a:srgbClr val="212529"/>
+                </a:solidFill>
+                <a:latin typeface="Garamond"/>
+              </a:rPr>
+              <a:t>14,052</a:t>
+            </a:r>
+          </a:p>
+        </p:txBody>
+      </p:sp>
+      <p:sp>
+        <p:nvSpPr>
+          <p:cNvPr id="30" name="TextBox 29"/>
+          <p:cNvSpPr txBox="1"/>
+          <p:nvPr/>
+        </p:nvSpPr>
+        <p:spPr>
+          <a:xfrm>
+            <a:off x="8723376" y="1901952"/>
+            <a:ext cx="841248" cy="173736"/>
+          </a:xfrm>
+          <a:prstGeom prst="rect">
+            <a:avLst/>
+          </a:prstGeom>
+          <a:noFill/>
+        </p:spPr>
+        <p:txBody>
+          <a:bodyPr wrap="square" lIns="0" rIns="0" tIns="0" bIns="0">
+            <a:spAutoFit/>
+          </a:bodyPr>
+          <a:lstStyle/>
+          <a:p>
+            <a:pPr algn="r"/>
+            <a:r>
+              <a:rPr sz="950" b="0" i="0">
                 <a:solidFill>
                   <a:srgbClr val="212529"/>
                 </a:solidFill>
@@ -8633,64 +8878,29 @@
       </p:sp>
       <p:sp>
         <p:nvSpPr>
-          <p:cNvPr id="24" name="TextBox 23"/>
-          <p:cNvSpPr txBox="1"/>
-          <p:nvPr/>
-        </p:nvSpPr>
-        <p:spPr>
-          <a:xfrm>
-            <a:off x="7251192" y="1975104"/>
-            <a:ext cx="731520" cy="192024"/>
-          </a:xfrm>
-          <a:prstGeom prst="rect">
-            <a:avLst/>
-          </a:prstGeom>
-          <a:noFill/>
-        </p:spPr>
-        <p:txBody>
-          <a:bodyPr wrap="square" lIns="0" rIns="0" tIns="0" bIns="0">
-            <a:spAutoFit/>
-          </a:bodyPr>
-          <a:lstStyle/>
-          <a:p>
-            <a:pPr algn="r"/>
-            <a:r>
-              <a:rPr sz="1050" b="0" i="0">
-                <a:solidFill>
-                  <a:srgbClr val="212529"/>
-                </a:solidFill>
-                <a:latin typeface="Garamond"/>
-              </a:rPr>
-              <a:t>14,052</a:t>
-            </a:r>
-          </a:p>
-        </p:txBody>
-      </p:sp>
-      <p:sp>
-        <p:nvSpPr>
-          <p:cNvPr id="25" name="TextBox 24"/>
-          <p:cNvSpPr txBox="1"/>
-          <p:nvPr/>
-        </p:nvSpPr>
-        <p:spPr>
-          <a:xfrm>
-            <a:off x="7982712" y="1975104"/>
-            <a:ext cx="868680" cy="192024"/>
-          </a:xfrm>
-          <a:prstGeom prst="rect">
-            <a:avLst/>
-          </a:prstGeom>
-          <a:noFill/>
-        </p:spPr>
-        <p:txBody>
-          <a:bodyPr wrap="square" lIns="0" rIns="0" tIns="0" bIns="0">
-            <a:spAutoFit/>
-          </a:bodyPr>
-          <a:lstStyle/>
-          <a:p>
-            <a:pPr algn="r"/>
-            <a:r>
-              <a:rPr sz="1050" b="0" i="0">
+          <p:cNvPr id="31" name="TextBox 30"/>
+          <p:cNvSpPr txBox="1"/>
+          <p:nvPr/>
+        </p:nvSpPr>
+        <p:spPr>
+          <a:xfrm>
+            <a:off x="9564624" y="1901952"/>
+            <a:ext cx="786384" cy="173736"/>
+          </a:xfrm>
+          <a:prstGeom prst="rect">
+            <a:avLst/>
+          </a:prstGeom>
+          <a:noFill/>
+        </p:spPr>
+        <p:txBody>
+          <a:bodyPr wrap="square" lIns="0" rIns="0" tIns="0" bIns="0">
+            <a:spAutoFit/>
+          </a:bodyPr>
+          <a:lstStyle/>
+          <a:p>
+            <a:pPr algn="r"/>
+            <a:r>
+              <a:rPr sz="950" b="0" i="0">
                 <a:solidFill>
                   <a:srgbClr val="212529"/>
                 </a:solidFill>
@@ -8703,49 +8913,49 @@
       </p:sp>
       <p:sp>
         <p:nvSpPr>
-          <p:cNvPr id="26" name="TextBox 25"/>
-          <p:cNvSpPr txBox="1"/>
-          <p:nvPr/>
-        </p:nvSpPr>
-        <p:spPr>
-          <a:xfrm>
-            <a:off x="8851392" y="1975104"/>
-            <a:ext cx="868680" cy="192024"/>
-          </a:xfrm>
-          <a:prstGeom prst="rect">
-            <a:avLst/>
-          </a:prstGeom>
-          <a:noFill/>
-        </p:spPr>
-        <p:txBody>
-          <a:bodyPr wrap="square" lIns="0" rIns="0" tIns="0" bIns="0">
-            <a:spAutoFit/>
-          </a:bodyPr>
-          <a:lstStyle/>
-          <a:p>
-            <a:pPr algn="r"/>
-            <a:r>
-              <a:rPr sz="1050" b="0" i="0">
-                <a:solidFill>
-                  <a:srgbClr val="212529"/>
-                </a:solidFill>
-                <a:latin typeface="Garamond"/>
-              </a:rPr>
-              <a:t>0</a:t>
-            </a:r>
-          </a:p>
-        </p:txBody>
-      </p:sp>
-      <p:sp>
-        <p:nvSpPr>
-          <p:cNvPr id="27" name="TextBox 26"/>
-          <p:cNvSpPr txBox="1"/>
-          <p:nvPr/>
-        </p:nvSpPr>
-        <p:spPr>
-          <a:xfrm>
-            <a:off x="502920" y="2192731"/>
-            <a:ext cx="1188720" cy="192024"/>
+          <p:cNvPr id="32" name="TextBox 31"/>
+          <p:cNvSpPr txBox="1"/>
+          <p:nvPr/>
+        </p:nvSpPr>
+        <p:spPr>
+          <a:xfrm>
+            <a:off x="10351007" y="1901952"/>
+            <a:ext cx="786384" cy="173736"/>
+          </a:xfrm>
+          <a:prstGeom prst="rect">
+            <a:avLst/>
+          </a:prstGeom>
+          <a:noFill/>
+        </p:spPr>
+        <p:txBody>
+          <a:bodyPr wrap="square" lIns="0" rIns="0" tIns="0" bIns="0">
+            <a:spAutoFit/>
+          </a:bodyPr>
+          <a:lstStyle/>
+          <a:p>
+            <a:pPr algn="r"/>
+            <a:r>
+              <a:rPr sz="950" b="0" i="0">
+                <a:solidFill>
+                  <a:srgbClr val="212529"/>
+                </a:solidFill>
+                <a:latin typeface="Garamond"/>
+              </a:rPr>
+              <a:t>78,769</a:t>
+            </a:r>
+          </a:p>
+        </p:txBody>
+      </p:sp>
+      <p:sp>
+        <p:nvSpPr>
+          <p:cNvPr id="33" name="TextBox 32"/>
+          <p:cNvSpPr txBox="1"/>
+          <p:nvPr/>
+        </p:nvSpPr>
+        <p:spPr>
+          <a:xfrm>
+            <a:off x="457200" y="2114092"/>
+            <a:ext cx="914400" cy="173736"/>
           </a:xfrm>
           <a:prstGeom prst="rect">
             <a:avLst/>
@@ -8760,7 +8970,7 @@
           <a:p>
             <a:pPr algn="l"/>
             <a:r>
-              <a:rPr sz="1050" b="0" i="0">
+              <a:rPr sz="950" b="0" i="0">
                 <a:solidFill>
                   <a:srgbClr val="212529"/>
                 </a:solidFill>
@@ -8773,29 +8983,29 @@
       </p:sp>
       <p:sp>
         <p:nvSpPr>
-          <p:cNvPr id="28" name="TextBox 27"/>
-          <p:cNvSpPr txBox="1"/>
-          <p:nvPr/>
-        </p:nvSpPr>
-        <p:spPr>
-          <a:xfrm>
-            <a:off x="1691640" y="2192731"/>
-            <a:ext cx="731520" cy="192024"/>
-          </a:xfrm>
-          <a:prstGeom prst="rect">
-            <a:avLst/>
-          </a:prstGeom>
-          <a:noFill/>
-        </p:spPr>
-        <p:txBody>
-          <a:bodyPr wrap="square" lIns="0" rIns="0" tIns="0" bIns="0">
-            <a:spAutoFit/>
-          </a:bodyPr>
-          <a:lstStyle/>
-          <a:p>
-            <a:pPr algn="r"/>
-            <a:r>
-              <a:rPr sz="1050" b="0" i="0">
+          <p:cNvPr id="34" name="TextBox 33"/>
+          <p:cNvSpPr txBox="1"/>
+          <p:nvPr/>
+        </p:nvSpPr>
+        <p:spPr>
+          <a:xfrm>
+            <a:off x="1371600" y="2114092"/>
+            <a:ext cx="694944" cy="173736"/>
+          </a:xfrm>
+          <a:prstGeom prst="rect">
+            <a:avLst/>
+          </a:prstGeom>
+          <a:noFill/>
+        </p:spPr>
+        <p:txBody>
+          <a:bodyPr wrap="square" lIns="0" rIns="0" tIns="0" bIns="0">
+            <a:spAutoFit/>
+          </a:bodyPr>
+          <a:lstStyle/>
+          <a:p>
+            <a:pPr algn="r"/>
+            <a:r>
+              <a:rPr sz="950" b="0" i="0">
                 <a:solidFill>
                   <a:srgbClr val="212529"/>
                 </a:solidFill>
@@ -8808,29 +9018,64 @@
       </p:sp>
       <p:sp>
         <p:nvSpPr>
-          <p:cNvPr id="29" name="TextBox 28"/>
-          <p:cNvSpPr txBox="1"/>
-          <p:nvPr/>
-        </p:nvSpPr>
-        <p:spPr>
-          <a:xfrm>
-            <a:off x="2423160" y="2192731"/>
-            <a:ext cx="868680" cy="192024"/>
-          </a:xfrm>
-          <a:prstGeom prst="rect">
-            <a:avLst/>
-          </a:prstGeom>
-          <a:noFill/>
-        </p:spPr>
-        <p:txBody>
-          <a:bodyPr wrap="square" lIns="0" rIns="0" tIns="0" bIns="0">
-            <a:spAutoFit/>
-          </a:bodyPr>
-          <a:lstStyle/>
-          <a:p>
-            <a:pPr algn="r"/>
-            <a:r>
-              <a:rPr sz="1050" b="0" i="0">
+          <p:cNvPr id="35" name="TextBox 34"/>
+          <p:cNvSpPr txBox="1"/>
+          <p:nvPr/>
+        </p:nvSpPr>
+        <p:spPr>
+          <a:xfrm>
+            <a:off x="2066543" y="2114092"/>
+            <a:ext cx="841248" cy="173736"/>
+          </a:xfrm>
+          <a:prstGeom prst="rect">
+            <a:avLst/>
+          </a:prstGeom>
+          <a:noFill/>
+        </p:spPr>
+        <p:txBody>
+          <a:bodyPr wrap="square" lIns="0" rIns="0" tIns="0" bIns="0">
+            <a:spAutoFit/>
+          </a:bodyPr>
+          <a:lstStyle/>
+          <a:p>
+            <a:pPr algn="r"/>
+            <a:r>
+              <a:rPr sz="950" b="0" i="0">
+                <a:solidFill>
+                  <a:srgbClr val="212529"/>
+                </a:solidFill>
+                <a:latin typeface="Garamond"/>
+              </a:rPr>
+              <a:t>72,393</a:t>
+            </a:r>
+          </a:p>
+        </p:txBody>
+      </p:sp>
+      <p:sp>
+        <p:nvSpPr>
+          <p:cNvPr id="36" name="TextBox 35"/>
+          <p:cNvSpPr txBox="1"/>
+          <p:nvPr/>
+        </p:nvSpPr>
+        <p:spPr>
+          <a:xfrm>
+            <a:off x="2907791" y="2114092"/>
+            <a:ext cx="786384" cy="173736"/>
+          </a:xfrm>
+          <a:prstGeom prst="rect">
+            <a:avLst/>
+          </a:prstGeom>
+          <a:noFill/>
+        </p:spPr>
+        <p:txBody>
+          <a:bodyPr wrap="square" lIns="0" rIns="0" tIns="0" bIns="0">
+            <a:spAutoFit/>
+          </a:bodyPr>
+          <a:lstStyle/>
+          <a:p>
+            <a:pPr algn="r"/>
+            <a:r>
+              <a:rPr sz="950" b="0" i="0">
                 <a:solidFill>
                   <a:srgbClr val="212529"/>
                 </a:solidFill>
@@ -8843,64 +9088,64 @@
       </p:sp>
       <p:sp>
         <p:nvSpPr>
-          <p:cNvPr id="30" name="TextBox 29"/>
-          <p:cNvSpPr txBox="1"/>
-          <p:nvPr/>
-        </p:nvSpPr>
-        <p:spPr>
-          <a:xfrm>
-            <a:off x="3291840" y="2192731"/>
-            <a:ext cx="868680" cy="192024"/>
-          </a:xfrm>
-          <a:prstGeom prst="rect">
-            <a:avLst/>
-          </a:prstGeom>
-          <a:noFill/>
-        </p:spPr>
-        <p:txBody>
-          <a:bodyPr wrap="square" lIns="0" rIns="0" tIns="0" bIns="0">
-            <a:spAutoFit/>
-          </a:bodyPr>
-          <a:lstStyle/>
-          <a:p>
-            <a:pPr algn="r"/>
-            <a:r>
-              <a:rPr sz="1050" b="0" i="0">
-                <a:solidFill>
-                  <a:srgbClr val="212529"/>
-                </a:solidFill>
-                <a:latin typeface="Garamond"/>
-              </a:rPr>
-              <a:t>72,393</a:t>
-            </a:r>
-          </a:p>
-        </p:txBody>
-      </p:sp>
-      <p:sp>
-        <p:nvSpPr>
-          <p:cNvPr id="31" name="TextBox 30"/>
-          <p:cNvSpPr txBox="1"/>
-          <p:nvPr/>
-        </p:nvSpPr>
-        <p:spPr>
-          <a:xfrm>
-            <a:off x="4471416" y="2192731"/>
-            <a:ext cx="731520" cy="192024"/>
-          </a:xfrm>
-          <a:prstGeom prst="rect">
-            <a:avLst/>
-          </a:prstGeom>
-          <a:noFill/>
-        </p:spPr>
-        <p:txBody>
-          <a:bodyPr wrap="square" lIns="0" rIns="0" tIns="0" bIns="0">
-            <a:spAutoFit/>
-          </a:bodyPr>
-          <a:lstStyle/>
-          <a:p>
-            <a:pPr algn="r"/>
-            <a:r>
-              <a:rPr sz="1050" b="0" i="0">
+          <p:cNvPr id="37" name="TextBox 36"/>
+          <p:cNvSpPr txBox="1"/>
+          <p:nvPr/>
+        </p:nvSpPr>
+        <p:spPr>
+          <a:xfrm>
+            <a:off x="3694176" y="2114092"/>
+            <a:ext cx="786384" cy="173736"/>
+          </a:xfrm>
+          <a:prstGeom prst="rect">
+            <a:avLst/>
+          </a:prstGeom>
+          <a:noFill/>
+        </p:spPr>
+        <p:txBody>
+          <a:bodyPr wrap="square" lIns="0" rIns="0" tIns="0" bIns="0">
+            <a:spAutoFit/>
+          </a:bodyPr>
+          <a:lstStyle/>
+          <a:p>
+            <a:pPr algn="r"/>
+            <a:r>
+              <a:rPr sz="950" b="0" i="0">
+                <a:solidFill>
+                  <a:srgbClr val="212529"/>
+                </a:solidFill>
+                <a:latin typeface="Garamond"/>
+              </a:rPr>
+              <a:t>101,479</a:t>
+            </a:r>
+          </a:p>
+        </p:txBody>
+      </p:sp>
+      <p:sp>
+        <p:nvSpPr>
+          <p:cNvPr id="38" name="TextBox 37"/>
+          <p:cNvSpPr txBox="1"/>
+          <p:nvPr/>
+        </p:nvSpPr>
+        <p:spPr>
+          <a:xfrm>
+            <a:off x="4700016" y="2114092"/>
+            <a:ext cx="694944" cy="173736"/>
+          </a:xfrm>
+          <a:prstGeom prst="rect">
+            <a:avLst/>
+          </a:prstGeom>
+          <a:noFill/>
+        </p:spPr>
+        <p:txBody>
+          <a:bodyPr wrap="square" lIns="0" rIns="0" tIns="0" bIns="0">
+            <a:spAutoFit/>
+          </a:bodyPr>
+          <a:lstStyle/>
+          <a:p>
+            <a:pPr algn="r"/>
+            <a:r>
+              <a:rPr sz="950" b="0" i="0">
                 <a:solidFill>
                   <a:srgbClr val="212529"/>
                 </a:solidFill>
@@ -8913,29 +9158,64 @@
       </p:sp>
       <p:sp>
         <p:nvSpPr>
-          <p:cNvPr id="32" name="TextBox 31"/>
-          <p:cNvSpPr txBox="1"/>
-          <p:nvPr/>
-        </p:nvSpPr>
-        <p:spPr>
-          <a:xfrm>
-            <a:off x="5202936" y="2192731"/>
-            <a:ext cx="868680" cy="192024"/>
-          </a:xfrm>
-          <a:prstGeom prst="rect">
-            <a:avLst/>
-          </a:prstGeom>
-          <a:noFill/>
-        </p:spPr>
-        <p:txBody>
-          <a:bodyPr wrap="square" lIns="0" rIns="0" tIns="0" bIns="0">
-            <a:spAutoFit/>
-          </a:bodyPr>
-          <a:lstStyle/>
-          <a:p>
-            <a:pPr algn="r"/>
-            <a:r>
-              <a:rPr sz="1050" b="0" i="0">
+          <p:cNvPr id="39" name="TextBox 38"/>
+          <p:cNvSpPr txBox="1"/>
+          <p:nvPr/>
+        </p:nvSpPr>
+        <p:spPr>
+          <a:xfrm>
+            <a:off x="5394959" y="2114092"/>
+            <a:ext cx="841248" cy="173736"/>
+          </a:xfrm>
+          <a:prstGeom prst="rect">
+            <a:avLst/>
+          </a:prstGeom>
+          <a:noFill/>
+        </p:spPr>
+        <p:txBody>
+          <a:bodyPr wrap="square" lIns="0" rIns="0" tIns="0" bIns="0">
+            <a:spAutoFit/>
+          </a:bodyPr>
+          <a:lstStyle/>
+          <a:p>
+            <a:pPr algn="r"/>
+            <a:r>
+              <a:rPr sz="950" b="0" i="0">
+                <a:solidFill>
+                  <a:srgbClr val="212529"/>
+                </a:solidFill>
+                <a:latin typeface="Garamond"/>
+              </a:rPr>
+              <a:t>72,164</a:t>
+            </a:r>
+          </a:p>
+        </p:txBody>
+      </p:sp>
+      <p:sp>
+        <p:nvSpPr>
+          <p:cNvPr id="40" name="TextBox 39"/>
+          <p:cNvSpPr txBox="1"/>
+          <p:nvPr/>
+        </p:nvSpPr>
+        <p:spPr>
+          <a:xfrm>
+            <a:off x="6236207" y="2114092"/>
+            <a:ext cx="786384" cy="173736"/>
+          </a:xfrm>
+          <a:prstGeom prst="rect">
+            <a:avLst/>
+          </a:prstGeom>
+          <a:noFill/>
+        </p:spPr>
+        <p:txBody>
+          <a:bodyPr wrap="square" lIns="0" rIns="0" tIns="0" bIns="0">
+            <a:spAutoFit/>
+          </a:bodyPr>
+          <a:lstStyle/>
+          <a:p>
+            <a:pPr algn="r"/>
+            <a:r>
+              <a:rPr sz="950" b="0" i="0">
                 <a:solidFill>
                   <a:srgbClr val="212529"/>
                 </a:solidFill>
@@ -8948,64 +9228,64 @@
       </p:sp>
       <p:sp>
         <p:nvSpPr>
-          <p:cNvPr id="33" name="TextBox 32"/>
-          <p:cNvSpPr txBox="1"/>
-          <p:nvPr/>
-        </p:nvSpPr>
-        <p:spPr>
-          <a:xfrm>
-            <a:off x="6071616" y="2192731"/>
-            <a:ext cx="868680" cy="192024"/>
-          </a:xfrm>
-          <a:prstGeom prst="rect">
-            <a:avLst/>
-          </a:prstGeom>
-          <a:noFill/>
-        </p:spPr>
-        <p:txBody>
-          <a:bodyPr wrap="square" lIns="0" rIns="0" tIns="0" bIns="0">
-            <a:spAutoFit/>
-          </a:bodyPr>
-          <a:lstStyle/>
-          <a:p>
-            <a:pPr algn="r"/>
-            <a:r>
-              <a:rPr sz="1050" b="0" i="0">
-                <a:solidFill>
-                  <a:srgbClr val="212529"/>
-                </a:solidFill>
-                <a:latin typeface="Garamond"/>
-              </a:rPr>
-              <a:t>72,164</a:t>
-            </a:r>
-          </a:p>
-        </p:txBody>
-      </p:sp>
-      <p:sp>
-        <p:nvSpPr>
-          <p:cNvPr id="34" name="TextBox 33"/>
-          <p:cNvSpPr txBox="1"/>
-          <p:nvPr/>
-        </p:nvSpPr>
-        <p:spPr>
-          <a:xfrm>
-            <a:off x="7251192" y="2192731"/>
-            <a:ext cx="731520" cy="192024"/>
-          </a:xfrm>
-          <a:prstGeom prst="rect">
-            <a:avLst/>
-          </a:prstGeom>
-          <a:noFill/>
-        </p:spPr>
-        <p:txBody>
-          <a:bodyPr wrap="square" lIns="0" rIns="0" tIns="0" bIns="0">
-            <a:spAutoFit/>
-          </a:bodyPr>
-          <a:lstStyle/>
-          <a:p>
-            <a:pPr algn="r"/>
-            <a:r>
-              <a:rPr sz="1050" b="0" i="0">
+          <p:cNvPr id="41" name="TextBox 40"/>
+          <p:cNvSpPr txBox="1"/>
+          <p:nvPr/>
+        </p:nvSpPr>
+        <p:spPr>
+          <a:xfrm>
+            <a:off x="7022592" y="2114092"/>
+            <a:ext cx="786384" cy="173736"/>
+          </a:xfrm>
+          <a:prstGeom prst="rect">
+            <a:avLst/>
+          </a:prstGeom>
+          <a:noFill/>
+        </p:spPr>
+        <p:txBody>
+          <a:bodyPr wrap="square" lIns="0" rIns="0" tIns="0" bIns="0">
+            <a:spAutoFit/>
+          </a:bodyPr>
+          <a:lstStyle/>
+          <a:p>
+            <a:pPr algn="r"/>
+            <a:r>
+              <a:rPr sz="950" b="0" i="0">
+                <a:solidFill>
+                  <a:srgbClr val="212529"/>
+                </a:solidFill>
+                <a:latin typeface="Garamond"/>
+              </a:rPr>
+              <a:t>100,857</a:t>
+            </a:r>
+          </a:p>
+        </p:txBody>
+      </p:sp>
+      <p:sp>
+        <p:nvSpPr>
+          <p:cNvPr id="42" name="TextBox 41"/>
+          <p:cNvSpPr txBox="1"/>
+          <p:nvPr/>
+        </p:nvSpPr>
+        <p:spPr>
+          <a:xfrm>
+            <a:off x="8028431" y="2114092"/>
+            <a:ext cx="694944" cy="173736"/>
+          </a:xfrm>
+          <a:prstGeom prst="rect">
+            <a:avLst/>
+          </a:prstGeom>
+          <a:noFill/>
+        </p:spPr>
+        <p:txBody>
+          <a:bodyPr wrap="square" lIns="0" rIns="0" tIns="0" bIns="0">
+            <a:spAutoFit/>
+          </a:bodyPr>
+          <a:lstStyle/>
+          <a:p>
+            <a:pPr algn="r"/>
+            <a:r>
+              <a:rPr sz="950" b="0" i="0">
                 <a:solidFill>
                   <a:srgbClr val="212529"/>
                 </a:solidFill>
@@ -9018,29 +9298,64 @@
       </p:sp>
       <p:sp>
         <p:nvSpPr>
-          <p:cNvPr id="35" name="TextBox 34"/>
-          <p:cNvSpPr txBox="1"/>
-          <p:nvPr/>
-        </p:nvSpPr>
-        <p:spPr>
-          <a:xfrm>
-            <a:off x="7982712" y="2192731"/>
-            <a:ext cx="868680" cy="192024"/>
-          </a:xfrm>
-          <a:prstGeom prst="rect">
-            <a:avLst/>
-          </a:prstGeom>
-          <a:noFill/>
-        </p:spPr>
-        <p:txBody>
-          <a:bodyPr wrap="square" lIns="0" rIns="0" tIns="0" bIns="0">
-            <a:spAutoFit/>
-          </a:bodyPr>
-          <a:lstStyle/>
-          <a:p>
-            <a:pPr algn="r"/>
-            <a:r>
-              <a:rPr sz="1050" b="0" i="0">
+          <p:cNvPr id="43" name="TextBox 42"/>
+          <p:cNvSpPr txBox="1"/>
+          <p:nvPr/>
+        </p:nvSpPr>
+        <p:spPr>
+          <a:xfrm>
+            <a:off x="8723376" y="2114092"/>
+            <a:ext cx="841248" cy="173736"/>
+          </a:xfrm>
+          <a:prstGeom prst="rect">
+            <a:avLst/>
+          </a:prstGeom>
+          <a:noFill/>
+        </p:spPr>
+        <p:txBody>
+          <a:bodyPr wrap="square" lIns="0" rIns="0" tIns="0" bIns="0">
+            <a:spAutoFit/>
+          </a:bodyPr>
+          <a:lstStyle/>
+          <a:p>
+            <a:pPr algn="r"/>
+            <a:r>
+              <a:rPr sz="950" b="0" i="0">
+                <a:solidFill>
+                  <a:srgbClr val="212529"/>
+                </a:solidFill>
+                <a:latin typeface="Garamond"/>
+              </a:rPr>
+              <a:t>53,329</a:t>
+            </a:r>
+          </a:p>
+        </p:txBody>
+      </p:sp>
+      <p:sp>
+        <p:nvSpPr>
+          <p:cNvPr id="44" name="TextBox 43"/>
+          <p:cNvSpPr txBox="1"/>
+          <p:nvPr/>
+        </p:nvSpPr>
+        <p:spPr>
+          <a:xfrm>
+            <a:off x="9564624" y="2114092"/>
+            <a:ext cx="786384" cy="173736"/>
+          </a:xfrm>
+          <a:prstGeom prst="rect">
+            <a:avLst/>
+          </a:prstGeom>
+          <a:noFill/>
+        </p:spPr>
+        <p:txBody>
+          <a:bodyPr wrap="square" lIns="0" rIns="0" tIns="0" bIns="0">
+            <a:spAutoFit/>
+          </a:bodyPr>
+          <a:lstStyle/>
+          <a:p>
+            <a:pPr algn="r"/>
+            <a:r>
+              <a:rPr sz="950" b="0" i="0">
                 <a:solidFill>
                   <a:srgbClr val="212529"/>
                 </a:solidFill>
@@ -9053,49 +9368,49 @@
       </p:sp>
       <p:sp>
         <p:nvSpPr>
-          <p:cNvPr id="36" name="TextBox 35"/>
-          <p:cNvSpPr txBox="1"/>
-          <p:nvPr/>
-        </p:nvSpPr>
-        <p:spPr>
-          <a:xfrm>
-            <a:off x="8851392" y="2192731"/>
-            <a:ext cx="868680" cy="192024"/>
-          </a:xfrm>
-          <a:prstGeom prst="rect">
-            <a:avLst/>
-          </a:prstGeom>
-          <a:noFill/>
-        </p:spPr>
-        <p:txBody>
-          <a:bodyPr wrap="square" lIns="0" rIns="0" tIns="0" bIns="0">
-            <a:spAutoFit/>
-          </a:bodyPr>
-          <a:lstStyle/>
-          <a:p>
-            <a:pPr algn="r"/>
-            <a:r>
-              <a:rPr sz="1050" b="0" i="0">
-                <a:solidFill>
-                  <a:srgbClr val="212529"/>
-                </a:solidFill>
-                <a:latin typeface="Garamond"/>
-              </a:rPr>
-              <a:t>53,329</a:t>
-            </a:r>
-          </a:p>
-        </p:txBody>
-      </p:sp>
-      <p:sp>
-        <p:nvSpPr>
-          <p:cNvPr id="37" name="TextBox 36"/>
-          <p:cNvSpPr txBox="1"/>
-          <p:nvPr/>
-        </p:nvSpPr>
-        <p:spPr>
-          <a:xfrm>
-            <a:off x="502920" y="2410358"/>
-            <a:ext cx="1188720" cy="192024"/>
+          <p:cNvPr id="45" name="TextBox 44"/>
+          <p:cNvSpPr txBox="1"/>
+          <p:nvPr/>
+        </p:nvSpPr>
+        <p:spPr>
+          <a:xfrm>
+            <a:off x="10351007" y="2114092"/>
+            <a:ext cx="786384" cy="173736"/>
+          </a:xfrm>
+          <a:prstGeom prst="rect">
+            <a:avLst/>
+          </a:prstGeom>
+          <a:noFill/>
+        </p:spPr>
+        <p:txBody>
+          <a:bodyPr wrap="square" lIns="0" rIns="0" tIns="0" bIns="0">
+            <a:spAutoFit/>
+          </a:bodyPr>
+          <a:lstStyle/>
+          <a:p>
+            <a:pPr algn="r"/>
+            <a:r>
+              <a:rPr sz="950" b="0" i="0">
+                <a:solidFill>
+                  <a:srgbClr val="212529"/>
+                </a:solidFill>
+                <a:latin typeface="Garamond"/>
+              </a:rPr>
+              <a:t>78,988</a:t>
+            </a:r>
+          </a:p>
+        </p:txBody>
+      </p:sp>
+      <p:sp>
+        <p:nvSpPr>
+          <p:cNvPr id="46" name="TextBox 45"/>
+          <p:cNvSpPr txBox="1"/>
+          <p:nvPr/>
+        </p:nvSpPr>
+        <p:spPr>
+          <a:xfrm>
+            <a:off x="457200" y="2326233"/>
+            <a:ext cx="914400" cy="173736"/>
           </a:xfrm>
           <a:prstGeom prst="rect">
             <a:avLst/>
@@ -9110,7 +9425,7 @@
           <a:p>
             <a:pPr algn="l"/>
             <a:r>
-              <a:rPr sz="1050" b="1" i="0">
+              <a:rPr sz="950" b="1" i="0">
                 <a:solidFill>
                   <a:srgbClr val="102D5E"/>
                 </a:solidFill>
@@ -9123,29 +9438,29 @@
       </p:sp>
       <p:sp>
         <p:nvSpPr>
-          <p:cNvPr id="38" name="TextBox 37"/>
-          <p:cNvSpPr txBox="1"/>
-          <p:nvPr/>
-        </p:nvSpPr>
-        <p:spPr>
-          <a:xfrm>
-            <a:off x="1691640" y="2410358"/>
-            <a:ext cx="731520" cy="192024"/>
-          </a:xfrm>
-          <a:prstGeom prst="rect">
-            <a:avLst/>
-          </a:prstGeom>
-          <a:noFill/>
-        </p:spPr>
-        <p:txBody>
-          <a:bodyPr wrap="square" lIns="0" rIns="0" tIns="0" bIns="0">
-            <a:spAutoFit/>
-          </a:bodyPr>
-          <a:lstStyle/>
-          <a:p>
-            <a:pPr algn="r"/>
-            <a:r>
-              <a:rPr sz="1050" b="1" i="0">
+          <p:cNvPr id="47" name="TextBox 46"/>
+          <p:cNvSpPr txBox="1"/>
+          <p:nvPr/>
+        </p:nvSpPr>
+        <p:spPr>
+          <a:xfrm>
+            <a:off x="1371600" y="2326233"/>
+            <a:ext cx="694944" cy="173736"/>
+          </a:xfrm>
+          <a:prstGeom prst="rect">
+            <a:avLst/>
+          </a:prstGeom>
+          <a:noFill/>
+        </p:spPr>
+        <p:txBody>
+          <a:bodyPr wrap="square" lIns="0" rIns="0" tIns="0" bIns="0">
+            <a:spAutoFit/>
+          </a:bodyPr>
+          <a:lstStyle/>
+          <a:p>
+            <a:pPr algn="r"/>
+            <a:r>
+              <a:rPr sz="950" b="1" i="0">
                 <a:solidFill>
                   <a:srgbClr val="102D5E"/>
                 </a:solidFill>
@@ -9158,34 +9473,69 @@
       </p:sp>
       <p:sp>
         <p:nvSpPr>
-          <p:cNvPr id="39" name="TextBox 38"/>
-          <p:cNvSpPr txBox="1"/>
-          <p:nvPr/>
-        </p:nvSpPr>
-        <p:spPr>
-          <a:xfrm>
-            <a:off x="2423160" y="2410358"/>
-            <a:ext cx="868680" cy="192024"/>
-          </a:xfrm>
-          <a:prstGeom prst="rect">
-            <a:avLst/>
-          </a:prstGeom>
-          <a:noFill/>
-        </p:spPr>
-        <p:txBody>
-          <a:bodyPr wrap="square" lIns="0" rIns="0" tIns="0" bIns="0">
-            <a:spAutoFit/>
-          </a:bodyPr>
-          <a:lstStyle/>
-          <a:p>
-            <a:pPr algn="r"/>
-            <a:r>
-              <a:rPr sz="1050" b="1" i="0">
+          <p:cNvPr id="48" name="TextBox 47"/>
+          <p:cNvSpPr txBox="1"/>
+          <p:nvPr/>
+        </p:nvSpPr>
+        <p:spPr>
+          <a:xfrm>
+            <a:off x="2066543" y="2326233"/>
+            <a:ext cx="841248" cy="173736"/>
+          </a:xfrm>
+          <a:prstGeom prst="rect">
+            <a:avLst/>
+          </a:prstGeom>
+          <a:noFill/>
+        </p:spPr>
+        <p:txBody>
+          <a:bodyPr wrap="square" lIns="0" rIns="0" tIns="0" bIns="0">
+            <a:spAutoFit/>
+          </a:bodyPr>
+          <a:lstStyle/>
+          <a:p>
+            <a:pPr algn="r"/>
+            <a:r>
+              <a:rPr sz="950" b="1" i="0">
                 <a:solidFill>
                   <a:srgbClr val="102D5E"/>
                 </a:solidFill>
                 <a:latin typeface="Garamond"/>
               </a:rPr>
+              <a:t>72,672</a:t>
+            </a:r>
+          </a:p>
+        </p:txBody>
+      </p:sp>
+      <p:sp>
+        <p:nvSpPr>
+          <p:cNvPr id="49" name="TextBox 48"/>
+          <p:cNvSpPr txBox="1"/>
+          <p:nvPr/>
+        </p:nvSpPr>
+        <p:spPr>
+          <a:xfrm>
+            <a:off x="2907791" y="2326233"/>
+            <a:ext cx="786384" cy="173736"/>
+          </a:xfrm>
+          <a:prstGeom prst="rect">
+            <a:avLst/>
+          </a:prstGeom>
+          <a:noFill/>
+        </p:spPr>
+        <p:txBody>
+          <a:bodyPr wrap="square" lIns="0" rIns="0" tIns="0" bIns="0">
+            <a:spAutoFit/>
+          </a:bodyPr>
+          <a:lstStyle/>
+          <a:p>
+            <a:pPr algn="r"/>
+            <a:r>
+              <a:rPr sz="950" b="1" i="0">
+                <a:solidFill>
+                  <a:srgbClr val="102D5E"/>
+                </a:solidFill>
+                <a:latin typeface="Garamond"/>
+              </a:rPr>
               <a:t>11,070</a:t>
             </a:r>
           </a:p>
@@ -9193,64 +9543,64 @@
       </p:sp>
       <p:sp>
         <p:nvSpPr>
-          <p:cNvPr id="40" name="TextBox 39"/>
-          <p:cNvSpPr txBox="1"/>
-          <p:nvPr/>
-        </p:nvSpPr>
-        <p:spPr>
-          <a:xfrm>
-            <a:off x="3291840" y="2410358"/>
-            <a:ext cx="868680" cy="192024"/>
-          </a:xfrm>
-          <a:prstGeom prst="rect">
-            <a:avLst/>
-          </a:prstGeom>
-          <a:noFill/>
-        </p:spPr>
-        <p:txBody>
-          <a:bodyPr wrap="square" lIns="0" rIns="0" tIns="0" bIns="0">
-            <a:spAutoFit/>
-          </a:bodyPr>
-          <a:lstStyle/>
-          <a:p>
-            <a:pPr algn="r"/>
-            <a:r>
-              <a:rPr sz="1050" b="1" i="0">
+          <p:cNvPr id="50" name="TextBox 49"/>
+          <p:cNvSpPr txBox="1"/>
+          <p:nvPr/>
+        </p:nvSpPr>
+        <p:spPr>
+          <a:xfrm>
+            <a:off x="3694176" y="2326233"/>
+            <a:ext cx="786384" cy="173736"/>
+          </a:xfrm>
+          <a:prstGeom prst="rect">
+            <a:avLst/>
+          </a:prstGeom>
+          <a:noFill/>
+        </p:spPr>
+        <p:txBody>
+          <a:bodyPr wrap="square" lIns="0" rIns="0" tIns="0" bIns="0">
+            <a:spAutoFit/>
+          </a:bodyPr>
+          <a:lstStyle/>
+          <a:p>
+            <a:pPr algn="r"/>
+            <a:r>
+              <a:rPr sz="950" b="1" i="0">
                 <a:solidFill>
                   <a:srgbClr val="102D5E"/>
                 </a:solidFill>
                 <a:latin typeface="Garamond"/>
               </a:rPr>
-              <a:t>72,672</a:t>
-            </a:r>
-          </a:p>
-        </p:txBody>
-      </p:sp>
-      <p:sp>
-        <p:nvSpPr>
-          <p:cNvPr id="41" name="TextBox 40"/>
-          <p:cNvSpPr txBox="1"/>
-          <p:nvPr/>
-        </p:nvSpPr>
-        <p:spPr>
-          <a:xfrm>
-            <a:off x="4471416" y="2410358"/>
-            <a:ext cx="731520" cy="192024"/>
-          </a:xfrm>
-          <a:prstGeom prst="rect">
-            <a:avLst/>
-          </a:prstGeom>
-          <a:noFill/>
-        </p:spPr>
-        <p:txBody>
-          <a:bodyPr wrap="square" lIns="0" rIns="0" tIns="0" bIns="0">
-            <a:spAutoFit/>
-          </a:bodyPr>
-          <a:lstStyle/>
-          <a:p>
-            <a:pPr algn="r"/>
-            <a:r>
-              <a:rPr sz="1050" b="1" i="0">
+              <a:t>100,527</a:t>
+            </a:r>
+          </a:p>
+        </p:txBody>
+      </p:sp>
+      <p:sp>
+        <p:nvSpPr>
+          <p:cNvPr id="51" name="TextBox 50"/>
+          <p:cNvSpPr txBox="1"/>
+          <p:nvPr/>
+        </p:nvSpPr>
+        <p:spPr>
+          <a:xfrm>
+            <a:off x="4700016" y="2326233"/>
+            <a:ext cx="694944" cy="173736"/>
+          </a:xfrm>
+          <a:prstGeom prst="rect">
+            <a:avLst/>
+          </a:prstGeom>
+          <a:noFill/>
+        </p:spPr>
+        <p:txBody>
+          <a:bodyPr wrap="square" lIns="0" rIns="0" tIns="0" bIns="0">
+            <a:spAutoFit/>
+          </a:bodyPr>
+          <a:lstStyle/>
+          <a:p>
+            <a:pPr algn="r"/>
+            <a:r>
+              <a:rPr sz="950" b="1" i="0">
                 <a:solidFill>
                   <a:srgbClr val="102D5E"/>
                 </a:solidFill>
@@ -9263,34 +9613,69 @@
       </p:sp>
       <p:sp>
         <p:nvSpPr>
-          <p:cNvPr id="42" name="TextBox 41"/>
-          <p:cNvSpPr txBox="1"/>
-          <p:nvPr/>
-        </p:nvSpPr>
-        <p:spPr>
-          <a:xfrm>
-            <a:off x="5202936" y="2410358"/>
-            <a:ext cx="868680" cy="192024"/>
-          </a:xfrm>
-          <a:prstGeom prst="rect">
-            <a:avLst/>
-          </a:prstGeom>
-          <a:noFill/>
-        </p:spPr>
-        <p:txBody>
-          <a:bodyPr wrap="square" lIns="0" rIns="0" tIns="0" bIns="0">
-            <a:spAutoFit/>
-          </a:bodyPr>
-          <a:lstStyle/>
-          <a:p>
-            <a:pPr algn="r"/>
-            <a:r>
-              <a:rPr sz="1050" b="1" i="0">
+          <p:cNvPr id="52" name="TextBox 51"/>
+          <p:cNvSpPr txBox="1"/>
+          <p:nvPr/>
+        </p:nvSpPr>
+        <p:spPr>
+          <a:xfrm>
+            <a:off x="5394959" y="2326233"/>
+            <a:ext cx="841248" cy="173736"/>
+          </a:xfrm>
+          <a:prstGeom prst="rect">
+            <a:avLst/>
+          </a:prstGeom>
+          <a:noFill/>
+        </p:spPr>
+        <p:txBody>
+          <a:bodyPr wrap="square" lIns="0" rIns="0" tIns="0" bIns="0">
+            <a:spAutoFit/>
+          </a:bodyPr>
+          <a:lstStyle/>
+          <a:p>
+            <a:pPr algn="r"/>
+            <a:r>
+              <a:rPr sz="950" b="1" i="0">
                 <a:solidFill>
                   <a:srgbClr val="102D5E"/>
                 </a:solidFill>
                 <a:latin typeface="Garamond"/>
               </a:rPr>
+              <a:t>71,415</a:t>
+            </a:r>
+          </a:p>
+        </p:txBody>
+      </p:sp>
+      <p:sp>
+        <p:nvSpPr>
+          <p:cNvPr id="53" name="TextBox 52"/>
+          <p:cNvSpPr txBox="1"/>
+          <p:nvPr/>
+        </p:nvSpPr>
+        <p:spPr>
+          <a:xfrm>
+            <a:off x="6236207" y="2326233"/>
+            <a:ext cx="786384" cy="173736"/>
+          </a:xfrm>
+          <a:prstGeom prst="rect">
+            <a:avLst/>
+          </a:prstGeom>
+          <a:noFill/>
+        </p:spPr>
+        <p:txBody>
+          <a:bodyPr wrap="square" lIns="0" rIns="0" tIns="0" bIns="0">
+            <a:spAutoFit/>
+          </a:bodyPr>
+          <a:lstStyle/>
+          <a:p>
+            <a:pPr algn="r"/>
+            <a:r>
+              <a:rPr sz="950" b="1" i="0">
+                <a:solidFill>
+                  <a:srgbClr val="102D5E"/>
+                </a:solidFill>
+                <a:latin typeface="Garamond"/>
+              </a:rPr>
               <a:t>9,461</a:t>
             </a:r>
           </a:p>
@@ -9298,64 +9683,64 @@
       </p:sp>
       <p:sp>
         <p:nvSpPr>
-          <p:cNvPr id="43" name="TextBox 42"/>
-          <p:cNvSpPr txBox="1"/>
-          <p:nvPr/>
-        </p:nvSpPr>
-        <p:spPr>
-          <a:xfrm>
-            <a:off x="6071616" y="2410358"/>
-            <a:ext cx="868680" cy="192024"/>
-          </a:xfrm>
-          <a:prstGeom prst="rect">
-            <a:avLst/>
-          </a:prstGeom>
-          <a:noFill/>
-        </p:spPr>
-        <p:txBody>
-          <a:bodyPr wrap="square" lIns="0" rIns="0" tIns="0" bIns="0">
-            <a:spAutoFit/>
-          </a:bodyPr>
-          <a:lstStyle/>
-          <a:p>
-            <a:pPr algn="r"/>
-            <a:r>
-              <a:rPr sz="1050" b="1" i="0">
+          <p:cNvPr id="54" name="TextBox 53"/>
+          <p:cNvSpPr txBox="1"/>
+          <p:nvPr/>
+        </p:nvSpPr>
+        <p:spPr>
+          <a:xfrm>
+            <a:off x="7022592" y="2326233"/>
+            <a:ext cx="786384" cy="173736"/>
+          </a:xfrm>
+          <a:prstGeom prst="rect">
+            <a:avLst/>
+          </a:prstGeom>
+          <a:noFill/>
+        </p:spPr>
+        <p:txBody>
+          <a:bodyPr wrap="square" lIns="0" rIns="0" tIns="0" bIns="0">
+            <a:spAutoFit/>
+          </a:bodyPr>
+          <a:lstStyle/>
+          <a:p>
+            <a:pPr algn="r"/>
+            <a:r>
+              <a:rPr sz="950" b="1" i="0">
                 <a:solidFill>
                   <a:srgbClr val="102D5E"/>
                 </a:solidFill>
                 <a:latin typeface="Garamond"/>
               </a:rPr>
-              <a:t>71,415</a:t>
-            </a:r>
-          </a:p>
-        </p:txBody>
-      </p:sp>
-      <p:sp>
-        <p:nvSpPr>
-          <p:cNvPr id="44" name="TextBox 43"/>
-          <p:cNvSpPr txBox="1"/>
-          <p:nvPr/>
-        </p:nvSpPr>
-        <p:spPr>
-          <a:xfrm>
-            <a:off x="7251192" y="2410358"/>
-            <a:ext cx="731520" cy="192024"/>
-          </a:xfrm>
-          <a:prstGeom prst="rect">
-            <a:avLst/>
-          </a:prstGeom>
-          <a:noFill/>
-        </p:spPr>
-        <p:txBody>
-          <a:bodyPr wrap="square" lIns="0" rIns="0" tIns="0" bIns="0">
-            <a:spAutoFit/>
-          </a:bodyPr>
-          <a:lstStyle/>
-          <a:p>
-            <a:pPr algn="r"/>
-            <a:r>
-              <a:rPr sz="1050" b="1" i="0">
+              <a:t>99,581</a:t>
+            </a:r>
+          </a:p>
+        </p:txBody>
+      </p:sp>
+      <p:sp>
+        <p:nvSpPr>
+          <p:cNvPr id="55" name="TextBox 54"/>
+          <p:cNvSpPr txBox="1"/>
+          <p:nvPr/>
+        </p:nvSpPr>
+        <p:spPr>
+          <a:xfrm>
+            <a:off x="8028431" y="2326233"/>
+            <a:ext cx="694944" cy="173736"/>
+          </a:xfrm>
+          <a:prstGeom prst="rect">
+            <a:avLst/>
+          </a:prstGeom>
+          <a:noFill/>
+        </p:spPr>
+        <p:txBody>
+          <a:bodyPr wrap="square" lIns="0" rIns="0" tIns="0" bIns="0">
+            <a:spAutoFit/>
+          </a:bodyPr>
+          <a:lstStyle/>
+          <a:p>
+            <a:pPr algn="r"/>
+            <a:r>
+              <a:rPr sz="950" b="1" i="0">
                 <a:solidFill>
                   <a:srgbClr val="102D5E"/>
                 </a:solidFill>
@@ -9368,34 +9753,69 @@
       </p:sp>
       <p:sp>
         <p:nvSpPr>
-          <p:cNvPr id="45" name="TextBox 44"/>
-          <p:cNvSpPr txBox="1"/>
-          <p:nvPr/>
-        </p:nvSpPr>
-        <p:spPr>
-          <a:xfrm>
-            <a:off x="7982712" y="2410358"/>
-            <a:ext cx="868680" cy="192024"/>
-          </a:xfrm>
-          <a:prstGeom prst="rect">
-            <a:avLst/>
-          </a:prstGeom>
-          <a:noFill/>
-        </p:spPr>
-        <p:txBody>
-          <a:bodyPr wrap="square" lIns="0" rIns="0" tIns="0" bIns="0">
-            <a:spAutoFit/>
-          </a:bodyPr>
-          <a:lstStyle/>
-          <a:p>
-            <a:pPr algn="r"/>
-            <a:r>
-              <a:rPr sz="1050" b="1" i="0">
+          <p:cNvPr id="56" name="TextBox 55"/>
+          <p:cNvSpPr txBox="1"/>
+          <p:nvPr/>
+        </p:nvSpPr>
+        <p:spPr>
+          <a:xfrm>
+            <a:off x="8723376" y="2326233"/>
+            <a:ext cx="841248" cy="173736"/>
+          </a:xfrm>
+          <a:prstGeom prst="rect">
+            <a:avLst/>
+          </a:prstGeom>
+          <a:noFill/>
+        </p:spPr>
+        <p:txBody>
+          <a:bodyPr wrap="square" lIns="0" rIns="0" tIns="0" bIns="0">
+            <a:spAutoFit/>
+          </a:bodyPr>
+          <a:lstStyle/>
+          <a:p>
+            <a:pPr algn="r"/>
+            <a:r>
+              <a:rPr sz="950" b="1" i="0">
                 <a:solidFill>
                   <a:srgbClr val="102D5E"/>
                 </a:solidFill>
                 <a:latin typeface="Garamond"/>
               </a:rPr>
+              <a:t>54,077</a:t>
+            </a:r>
+          </a:p>
+        </p:txBody>
+      </p:sp>
+      <p:sp>
+        <p:nvSpPr>
+          <p:cNvPr id="57" name="TextBox 56"/>
+          <p:cNvSpPr txBox="1"/>
+          <p:nvPr/>
+        </p:nvSpPr>
+        <p:spPr>
+          <a:xfrm>
+            <a:off x="9564624" y="2326233"/>
+            <a:ext cx="786384" cy="173736"/>
+          </a:xfrm>
+          <a:prstGeom prst="rect">
+            <a:avLst/>
+          </a:prstGeom>
+          <a:noFill/>
+        </p:spPr>
+        <p:txBody>
+          <a:bodyPr wrap="square" lIns="0" rIns="0" tIns="0" bIns="0">
+            <a:spAutoFit/>
+          </a:bodyPr>
+          <a:lstStyle/>
+          <a:p>
+            <a:pPr algn="r"/>
+            <a:r>
+              <a:rPr sz="950" b="1" i="0">
+                <a:solidFill>
+                  <a:srgbClr val="102D5E"/>
+                </a:solidFill>
+                <a:latin typeface="Garamond"/>
+              </a:rPr>
               <a:t>8,506</a:t>
             </a:r>
           </a:p>
@@ -9403,49 +9823,49 @@
       </p:sp>
       <p:sp>
         <p:nvSpPr>
-          <p:cNvPr id="46" name="TextBox 45"/>
-          <p:cNvSpPr txBox="1"/>
-          <p:nvPr/>
-        </p:nvSpPr>
-        <p:spPr>
-          <a:xfrm>
-            <a:off x="8851392" y="2410358"/>
-            <a:ext cx="868680" cy="192024"/>
-          </a:xfrm>
-          <a:prstGeom prst="rect">
-            <a:avLst/>
-          </a:prstGeom>
-          <a:noFill/>
-        </p:spPr>
-        <p:txBody>
-          <a:bodyPr wrap="square" lIns="0" rIns="0" tIns="0" bIns="0">
-            <a:spAutoFit/>
-          </a:bodyPr>
-          <a:lstStyle/>
-          <a:p>
-            <a:pPr algn="r"/>
-            <a:r>
-              <a:rPr sz="1050" b="1" i="0">
+          <p:cNvPr id="58" name="TextBox 57"/>
+          <p:cNvSpPr txBox="1"/>
+          <p:nvPr/>
+        </p:nvSpPr>
+        <p:spPr>
+          <a:xfrm>
+            <a:off x="10351007" y="2326233"/>
+            <a:ext cx="786384" cy="173736"/>
+          </a:xfrm>
+          <a:prstGeom prst="rect">
+            <a:avLst/>
+          </a:prstGeom>
+          <a:noFill/>
+        </p:spPr>
+        <p:txBody>
+          <a:bodyPr wrap="square" lIns="0" rIns="0" tIns="0" bIns="0">
+            <a:spAutoFit/>
+          </a:bodyPr>
+          <a:lstStyle/>
+          <a:p>
+            <a:pPr algn="r"/>
+            <a:r>
+              <a:rPr sz="950" b="1" i="0">
                 <a:solidFill>
                   <a:srgbClr val="102D5E"/>
                 </a:solidFill>
                 <a:latin typeface="Garamond"/>
               </a:rPr>
-              <a:t>54,077</a:t>
-            </a:r>
-          </a:p>
-        </p:txBody>
-      </p:sp>
-      <p:sp>
-        <p:nvSpPr>
-          <p:cNvPr id="47" name="TextBox 46"/>
-          <p:cNvSpPr txBox="1"/>
-          <p:nvPr/>
-        </p:nvSpPr>
-        <p:spPr>
-          <a:xfrm>
-            <a:off x="502920" y="2627985"/>
-            <a:ext cx="1188720" cy="192024"/>
+              <a:t>75,982</a:t>
+            </a:r>
+          </a:p>
+        </p:txBody>
+      </p:sp>
+      <p:sp>
+        <p:nvSpPr>
+          <p:cNvPr id="59" name="TextBox 58"/>
+          <p:cNvSpPr txBox="1"/>
+          <p:nvPr/>
+        </p:nvSpPr>
+        <p:spPr>
+          <a:xfrm>
+            <a:off x="457200" y="2538374"/>
+            <a:ext cx="914400" cy="173736"/>
           </a:xfrm>
           <a:prstGeom prst="rect">
             <a:avLst/>
@@ -9460,7 +9880,7 @@
           <a:p>
             <a:pPr algn="l"/>
             <a:r>
-              <a:rPr sz="1050" b="0" i="0">
+              <a:rPr sz="950" b="0" i="0">
                 <a:solidFill>
                   <a:srgbClr val="212529"/>
                 </a:solidFill>
@@ -9473,29 +9893,29 @@
       </p:sp>
       <p:sp>
         <p:nvSpPr>
-          <p:cNvPr id="48" name="TextBox 47"/>
-          <p:cNvSpPr txBox="1"/>
-          <p:nvPr/>
-        </p:nvSpPr>
-        <p:spPr>
-          <a:xfrm>
-            <a:off x="1691640" y="2627985"/>
-            <a:ext cx="731520" cy="192024"/>
-          </a:xfrm>
-          <a:prstGeom prst="rect">
-            <a:avLst/>
-          </a:prstGeom>
-          <a:noFill/>
-        </p:spPr>
-        <p:txBody>
-          <a:bodyPr wrap="square" lIns="0" rIns="0" tIns="0" bIns="0">
-            <a:spAutoFit/>
-          </a:bodyPr>
-          <a:lstStyle/>
-          <a:p>
-            <a:pPr algn="r"/>
-            <a:r>
-              <a:rPr sz="1050" b="0" i="0">
+          <p:cNvPr id="60" name="TextBox 59"/>
+          <p:cNvSpPr txBox="1"/>
+          <p:nvPr/>
+        </p:nvSpPr>
+        <p:spPr>
+          <a:xfrm>
+            <a:off x="1371600" y="2538374"/>
+            <a:ext cx="694944" cy="173736"/>
+          </a:xfrm>
+          <a:prstGeom prst="rect">
+            <a:avLst/>
+          </a:prstGeom>
+          <a:noFill/>
+        </p:spPr>
+        <p:txBody>
+          <a:bodyPr wrap="square" lIns="0" rIns="0" tIns="0" bIns="0">
+            <a:spAutoFit/>
+          </a:bodyPr>
+          <a:lstStyle/>
+          <a:p>
+            <a:pPr algn="r"/>
+            <a:r>
+              <a:rPr sz="950" b="0" i="0">
                 <a:solidFill>
                   <a:srgbClr val="212529"/>
                 </a:solidFill>
@@ -9508,29 +9928,64 @@
       </p:sp>
       <p:sp>
         <p:nvSpPr>
-          <p:cNvPr id="49" name="TextBox 48"/>
-          <p:cNvSpPr txBox="1"/>
-          <p:nvPr/>
-        </p:nvSpPr>
-        <p:spPr>
-          <a:xfrm>
-            <a:off x="2423160" y="2627985"/>
-            <a:ext cx="868680" cy="192024"/>
-          </a:xfrm>
-          <a:prstGeom prst="rect">
-            <a:avLst/>
-          </a:prstGeom>
-          <a:noFill/>
-        </p:spPr>
-        <p:txBody>
-          <a:bodyPr wrap="square" lIns="0" rIns="0" tIns="0" bIns="0">
-            <a:spAutoFit/>
-          </a:bodyPr>
-          <a:lstStyle/>
-          <a:p>
-            <a:pPr algn="r"/>
-            <a:r>
-              <a:rPr sz="1050" b="0" i="0">
+          <p:cNvPr id="61" name="TextBox 60"/>
+          <p:cNvSpPr txBox="1"/>
+          <p:nvPr/>
+        </p:nvSpPr>
+        <p:spPr>
+          <a:xfrm>
+            <a:off x="2066543" y="2538374"/>
+            <a:ext cx="841248" cy="173736"/>
+          </a:xfrm>
+          <a:prstGeom prst="rect">
+            <a:avLst/>
+          </a:prstGeom>
+          <a:noFill/>
+        </p:spPr>
+        <p:txBody>
+          <a:bodyPr wrap="square" lIns="0" rIns="0" tIns="0" bIns="0">
+            <a:spAutoFit/>
+          </a:bodyPr>
+          <a:lstStyle/>
+          <a:p>
+            <a:pPr algn="r"/>
+            <a:r>
+              <a:rPr sz="950" b="0" i="0">
+                <a:solidFill>
+                  <a:srgbClr val="212529"/>
+                </a:solidFill>
+                <a:latin typeface="Garamond"/>
+              </a:rPr>
+              <a:t>73,339</a:t>
+            </a:r>
+          </a:p>
+        </p:txBody>
+      </p:sp>
+      <p:sp>
+        <p:nvSpPr>
+          <p:cNvPr id="62" name="TextBox 61"/>
+          <p:cNvSpPr txBox="1"/>
+          <p:nvPr/>
+        </p:nvSpPr>
+        <p:spPr>
+          <a:xfrm>
+            <a:off x="2907791" y="2538374"/>
+            <a:ext cx="786384" cy="173736"/>
+          </a:xfrm>
+          <a:prstGeom prst="rect">
+            <a:avLst/>
+          </a:prstGeom>
+          <a:noFill/>
+        </p:spPr>
+        <p:txBody>
+          <a:bodyPr wrap="square" lIns="0" rIns="0" tIns="0" bIns="0">
+            <a:spAutoFit/>
+          </a:bodyPr>
+          <a:lstStyle/>
+          <a:p>
+            <a:pPr algn="r"/>
+            <a:r>
+              <a:rPr sz="950" b="0" i="0">
                 <a:solidFill>
                   <a:srgbClr val="212529"/>
                 </a:solidFill>
@@ -9543,64 +9998,64 @@
       </p:sp>
       <p:sp>
         <p:nvSpPr>
-          <p:cNvPr id="50" name="TextBox 49"/>
-          <p:cNvSpPr txBox="1"/>
-          <p:nvPr/>
-        </p:nvSpPr>
-        <p:spPr>
-          <a:xfrm>
-            <a:off x="3291840" y="2627985"/>
-            <a:ext cx="868680" cy="192024"/>
-          </a:xfrm>
-          <a:prstGeom prst="rect">
-            <a:avLst/>
-          </a:prstGeom>
-          <a:noFill/>
-        </p:spPr>
-        <p:txBody>
-          <a:bodyPr wrap="square" lIns="0" rIns="0" tIns="0" bIns="0">
-            <a:spAutoFit/>
-          </a:bodyPr>
-          <a:lstStyle/>
-          <a:p>
-            <a:pPr algn="r"/>
-            <a:r>
-              <a:rPr sz="1050" b="0" i="0">
-                <a:solidFill>
-                  <a:srgbClr val="212529"/>
-                </a:solidFill>
-                <a:latin typeface="Garamond"/>
-              </a:rPr>
-              <a:t>73,339</a:t>
-            </a:r>
-          </a:p>
-        </p:txBody>
-      </p:sp>
-      <p:sp>
-        <p:nvSpPr>
-          <p:cNvPr id="51" name="TextBox 50"/>
-          <p:cNvSpPr txBox="1"/>
-          <p:nvPr/>
-        </p:nvSpPr>
-        <p:spPr>
-          <a:xfrm>
-            <a:off x="4471416" y="2627985"/>
-            <a:ext cx="731520" cy="192024"/>
-          </a:xfrm>
-          <a:prstGeom prst="rect">
-            <a:avLst/>
-          </a:prstGeom>
-          <a:noFill/>
-        </p:spPr>
-        <p:txBody>
-          <a:bodyPr wrap="square" lIns="0" rIns="0" tIns="0" bIns="0">
-            <a:spAutoFit/>
-          </a:bodyPr>
-          <a:lstStyle/>
-          <a:p>
-            <a:pPr algn="r"/>
-            <a:r>
-              <a:rPr sz="1050" b="0" i="0">
+          <p:cNvPr id="63" name="TextBox 62"/>
+          <p:cNvSpPr txBox="1"/>
+          <p:nvPr/>
+        </p:nvSpPr>
+        <p:spPr>
+          <a:xfrm>
+            <a:off x="3694176" y="2538374"/>
+            <a:ext cx="786384" cy="173736"/>
+          </a:xfrm>
+          <a:prstGeom prst="rect">
+            <a:avLst/>
+          </a:prstGeom>
+          <a:noFill/>
+        </p:spPr>
+        <p:txBody>
+          <a:bodyPr wrap="square" lIns="0" rIns="0" tIns="0" bIns="0">
+            <a:spAutoFit/>
+          </a:bodyPr>
+          <a:lstStyle/>
+          <a:p>
+            <a:pPr algn="r"/>
+            <a:r>
+              <a:rPr sz="950" b="0" i="0">
+                <a:solidFill>
+                  <a:srgbClr val="212529"/>
+                </a:solidFill>
+                <a:latin typeface="Garamond"/>
+              </a:rPr>
+              <a:t>101,714</a:t>
+            </a:r>
+          </a:p>
+        </p:txBody>
+      </p:sp>
+      <p:sp>
+        <p:nvSpPr>
+          <p:cNvPr id="64" name="TextBox 63"/>
+          <p:cNvSpPr txBox="1"/>
+          <p:nvPr/>
+        </p:nvSpPr>
+        <p:spPr>
+          <a:xfrm>
+            <a:off x="4700016" y="2538374"/>
+            <a:ext cx="694944" cy="173736"/>
+          </a:xfrm>
+          <a:prstGeom prst="rect">
+            <a:avLst/>
+          </a:prstGeom>
+          <a:noFill/>
+        </p:spPr>
+        <p:txBody>
+          <a:bodyPr wrap="square" lIns="0" rIns="0" tIns="0" bIns="0">
+            <a:spAutoFit/>
+          </a:bodyPr>
+          <a:lstStyle/>
+          <a:p>
+            <a:pPr algn="r"/>
+            <a:r>
+              <a:rPr sz="950" b="0" i="0">
                 <a:solidFill>
                   <a:srgbClr val="212529"/>
                 </a:solidFill>
@@ -9613,29 +10068,64 @@
       </p:sp>
       <p:sp>
         <p:nvSpPr>
-          <p:cNvPr id="52" name="TextBox 51"/>
-          <p:cNvSpPr txBox="1"/>
-          <p:nvPr/>
-        </p:nvSpPr>
-        <p:spPr>
-          <a:xfrm>
-            <a:off x="5202936" y="2627985"/>
-            <a:ext cx="868680" cy="192024"/>
-          </a:xfrm>
-          <a:prstGeom prst="rect">
-            <a:avLst/>
-          </a:prstGeom>
-          <a:noFill/>
-        </p:spPr>
-        <p:txBody>
-          <a:bodyPr wrap="square" lIns="0" rIns="0" tIns="0" bIns="0">
-            <a:spAutoFit/>
-          </a:bodyPr>
-          <a:lstStyle/>
-          <a:p>
-            <a:pPr algn="r"/>
-            <a:r>
-              <a:rPr sz="1050" b="0" i="0">
+          <p:cNvPr id="65" name="TextBox 64"/>
+          <p:cNvSpPr txBox="1"/>
+          <p:nvPr/>
+        </p:nvSpPr>
+        <p:spPr>
+          <a:xfrm>
+            <a:off x="5394959" y="2538374"/>
+            <a:ext cx="841248" cy="173736"/>
+          </a:xfrm>
+          <a:prstGeom prst="rect">
+            <a:avLst/>
+          </a:prstGeom>
+          <a:noFill/>
+        </p:spPr>
+        <p:txBody>
+          <a:bodyPr wrap="square" lIns="0" rIns="0" tIns="0" bIns="0">
+            <a:spAutoFit/>
+          </a:bodyPr>
+          <a:lstStyle/>
+          <a:p>
+            <a:pPr algn="r"/>
+            <a:r>
+              <a:rPr sz="950" b="0" i="0">
+                <a:solidFill>
+                  <a:srgbClr val="212529"/>
+                </a:solidFill>
+                <a:latin typeface="Garamond"/>
+              </a:rPr>
+              <a:t>72,657</a:t>
+            </a:r>
+          </a:p>
+        </p:txBody>
+      </p:sp>
+      <p:sp>
+        <p:nvSpPr>
+          <p:cNvPr id="66" name="TextBox 65"/>
+          <p:cNvSpPr txBox="1"/>
+          <p:nvPr/>
+        </p:nvSpPr>
+        <p:spPr>
+          <a:xfrm>
+            <a:off x="6236207" y="2538374"/>
+            <a:ext cx="786384" cy="173736"/>
+          </a:xfrm>
+          <a:prstGeom prst="rect">
+            <a:avLst/>
+          </a:prstGeom>
+          <a:noFill/>
+        </p:spPr>
+        <p:txBody>
+          <a:bodyPr wrap="square" lIns="0" rIns="0" tIns="0" bIns="0">
+            <a:spAutoFit/>
+          </a:bodyPr>
+          <a:lstStyle/>
+          <a:p>
+            <a:pPr algn="r"/>
+            <a:r>
+              <a:rPr sz="950" b="0" i="0">
                 <a:solidFill>
                   <a:srgbClr val="212529"/>
                 </a:solidFill>
@@ -9648,64 +10138,64 @@
       </p:sp>
       <p:sp>
         <p:nvSpPr>
-          <p:cNvPr id="53" name="TextBox 52"/>
-          <p:cNvSpPr txBox="1"/>
-          <p:nvPr/>
-        </p:nvSpPr>
-        <p:spPr>
-          <a:xfrm>
-            <a:off x="6071616" y="2627985"/>
-            <a:ext cx="868680" cy="192024"/>
-          </a:xfrm>
-          <a:prstGeom prst="rect">
-            <a:avLst/>
-          </a:prstGeom>
-          <a:noFill/>
-        </p:spPr>
-        <p:txBody>
-          <a:bodyPr wrap="square" lIns="0" rIns="0" tIns="0" bIns="0">
-            <a:spAutoFit/>
-          </a:bodyPr>
-          <a:lstStyle/>
-          <a:p>
-            <a:pPr algn="r"/>
-            <a:r>
-              <a:rPr sz="1050" b="0" i="0">
-                <a:solidFill>
-                  <a:srgbClr val="212529"/>
-                </a:solidFill>
-                <a:latin typeface="Garamond"/>
-              </a:rPr>
-              <a:t>72,657</a:t>
-            </a:r>
-          </a:p>
-        </p:txBody>
-      </p:sp>
-      <p:sp>
-        <p:nvSpPr>
-          <p:cNvPr id="54" name="TextBox 53"/>
-          <p:cNvSpPr txBox="1"/>
-          <p:nvPr/>
-        </p:nvSpPr>
-        <p:spPr>
-          <a:xfrm>
-            <a:off x="7251192" y="2627985"/>
-            <a:ext cx="731520" cy="192024"/>
-          </a:xfrm>
-          <a:prstGeom prst="rect">
-            <a:avLst/>
-          </a:prstGeom>
-          <a:noFill/>
-        </p:spPr>
-        <p:txBody>
-          <a:bodyPr wrap="square" lIns="0" rIns="0" tIns="0" bIns="0">
-            <a:spAutoFit/>
-          </a:bodyPr>
-          <a:lstStyle/>
-          <a:p>
-            <a:pPr algn="r"/>
-            <a:r>
-              <a:rPr sz="1050" b="0" i="0">
+          <p:cNvPr id="67" name="TextBox 66"/>
+          <p:cNvSpPr txBox="1"/>
+          <p:nvPr/>
+        </p:nvSpPr>
+        <p:spPr>
+          <a:xfrm>
+            <a:off x="7022592" y="2538374"/>
+            <a:ext cx="786384" cy="173736"/>
+          </a:xfrm>
+          <a:prstGeom prst="rect">
+            <a:avLst/>
+          </a:prstGeom>
+          <a:noFill/>
+        </p:spPr>
+        <p:txBody>
+          <a:bodyPr wrap="square" lIns="0" rIns="0" tIns="0" bIns="0">
+            <a:spAutoFit/>
+          </a:bodyPr>
+          <a:lstStyle/>
+          <a:p>
+            <a:pPr algn="r"/>
+            <a:r>
+              <a:rPr sz="950" b="0" i="0">
+                <a:solidFill>
+                  <a:srgbClr val="212529"/>
+                </a:solidFill>
+                <a:latin typeface="Garamond"/>
+              </a:rPr>
+              <a:t>101,417</a:t>
+            </a:r>
+          </a:p>
+        </p:txBody>
+      </p:sp>
+      <p:sp>
+        <p:nvSpPr>
+          <p:cNvPr id="68" name="TextBox 67"/>
+          <p:cNvSpPr txBox="1"/>
+          <p:nvPr/>
+        </p:nvSpPr>
+        <p:spPr>
+          <a:xfrm>
+            <a:off x="8028431" y="2538374"/>
+            <a:ext cx="694944" cy="173736"/>
+          </a:xfrm>
+          <a:prstGeom prst="rect">
+            <a:avLst/>
+          </a:prstGeom>
+          <a:noFill/>
+        </p:spPr>
+        <p:txBody>
+          <a:bodyPr wrap="square" lIns="0" rIns="0" tIns="0" bIns="0">
+            <a:spAutoFit/>
+          </a:bodyPr>
+          <a:lstStyle/>
+          <a:p>
+            <a:pPr algn="r"/>
+            <a:r>
+              <a:rPr sz="950" b="0" i="0">
                 <a:solidFill>
                   <a:srgbClr val="212529"/>
                 </a:solidFill>
@@ -9718,29 +10208,64 @@
       </p:sp>
       <p:sp>
         <p:nvSpPr>
-          <p:cNvPr id="55" name="TextBox 54"/>
-          <p:cNvSpPr txBox="1"/>
-          <p:nvPr/>
-        </p:nvSpPr>
-        <p:spPr>
-          <a:xfrm>
-            <a:off x="7982712" y="2627985"/>
-            <a:ext cx="868680" cy="192024"/>
-          </a:xfrm>
-          <a:prstGeom prst="rect">
-            <a:avLst/>
-          </a:prstGeom>
-          <a:noFill/>
-        </p:spPr>
-        <p:txBody>
-          <a:bodyPr wrap="square" lIns="0" rIns="0" tIns="0" bIns="0">
-            <a:spAutoFit/>
-          </a:bodyPr>
-          <a:lstStyle/>
-          <a:p>
-            <a:pPr algn="r"/>
-            <a:r>
-              <a:rPr sz="1050" b="0" i="0">
+          <p:cNvPr id="69" name="TextBox 68"/>
+          <p:cNvSpPr txBox="1"/>
+          <p:nvPr/>
+        </p:nvSpPr>
+        <p:spPr>
+          <a:xfrm>
+            <a:off x="8723376" y="2538374"/>
+            <a:ext cx="841248" cy="173736"/>
+          </a:xfrm>
+          <a:prstGeom prst="rect">
+            <a:avLst/>
+          </a:prstGeom>
+          <a:noFill/>
+        </p:spPr>
+        <p:txBody>
+          <a:bodyPr wrap="square" lIns="0" rIns="0" tIns="0" bIns="0">
+            <a:spAutoFit/>
+          </a:bodyPr>
+          <a:lstStyle/>
+          <a:p>
+            <a:pPr algn="r"/>
+            <a:r>
+              <a:rPr sz="950" b="0" i="0">
+                <a:solidFill>
+                  <a:srgbClr val="212529"/>
+                </a:solidFill>
+                <a:latin typeface="Garamond"/>
+              </a:rPr>
+              <a:t>55,044</a:t>
+            </a:r>
+          </a:p>
+        </p:txBody>
+      </p:sp>
+      <p:sp>
+        <p:nvSpPr>
+          <p:cNvPr id="70" name="TextBox 69"/>
+          <p:cNvSpPr txBox="1"/>
+          <p:nvPr/>
+        </p:nvSpPr>
+        <p:spPr>
+          <a:xfrm>
+            <a:off x="9564624" y="2538374"/>
+            <a:ext cx="786384" cy="173736"/>
+          </a:xfrm>
+          <a:prstGeom prst="rect">
+            <a:avLst/>
+          </a:prstGeom>
+          <a:noFill/>
+        </p:spPr>
+        <p:txBody>
+          <a:bodyPr wrap="square" lIns="0" rIns="0" tIns="0" bIns="0">
+            <a:spAutoFit/>
+          </a:bodyPr>
+          <a:lstStyle/>
+          <a:p>
+            <a:pPr algn="r"/>
+            <a:r>
+              <a:rPr sz="950" b="0" i="0">
                 <a:solidFill>
                   <a:srgbClr val="212529"/>
                 </a:solidFill>
@@ -9753,49 +10278,49 @@
       </p:sp>
       <p:sp>
         <p:nvSpPr>
-          <p:cNvPr id="56" name="TextBox 55"/>
-          <p:cNvSpPr txBox="1"/>
-          <p:nvPr/>
-        </p:nvSpPr>
-        <p:spPr>
-          <a:xfrm>
-            <a:off x="8851392" y="2627985"/>
-            <a:ext cx="868680" cy="192024"/>
-          </a:xfrm>
-          <a:prstGeom prst="rect">
-            <a:avLst/>
-          </a:prstGeom>
-          <a:noFill/>
-        </p:spPr>
-        <p:txBody>
-          <a:bodyPr wrap="square" lIns="0" rIns="0" tIns="0" bIns="0">
-            <a:spAutoFit/>
-          </a:bodyPr>
-          <a:lstStyle/>
-          <a:p>
-            <a:pPr algn="r"/>
-            <a:r>
-              <a:rPr sz="1050" b="0" i="0">
-                <a:solidFill>
-                  <a:srgbClr val="212529"/>
-                </a:solidFill>
-                <a:latin typeface="Garamond"/>
-              </a:rPr>
-              <a:t>55,044</a:t>
-            </a:r>
-          </a:p>
-        </p:txBody>
-      </p:sp>
-      <p:sp>
-        <p:nvSpPr>
-          <p:cNvPr id="57" name="TextBox 56"/>
-          <p:cNvSpPr txBox="1"/>
-          <p:nvPr/>
-        </p:nvSpPr>
-        <p:spPr>
-          <a:xfrm>
-            <a:off x="502920" y="2845612"/>
-            <a:ext cx="1188720" cy="192024"/>
+          <p:cNvPr id="71" name="TextBox 70"/>
+          <p:cNvSpPr txBox="1"/>
+          <p:nvPr/>
+        </p:nvSpPr>
+        <p:spPr>
+          <a:xfrm>
+            <a:off x="10351007" y="2538374"/>
+            <a:ext cx="786384" cy="173736"/>
+          </a:xfrm>
+          <a:prstGeom prst="rect">
+            <a:avLst/>
+          </a:prstGeom>
+          <a:noFill/>
+        </p:spPr>
+        <p:txBody>
+          <a:bodyPr wrap="square" lIns="0" rIns="0" tIns="0" bIns="0">
+            <a:spAutoFit/>
+          </a:bodyPr>
+          <a:lstStyle/>
+          <a:p>
+            <a:pPr algn="r"/>
+            <a:r>
+              <a:rPr sz="950" b="0" i="0">
+                <a:solidFill>
+                  <a:srgbClr val="212529"/>
+                </a:solidFill>
+                <a:latin typeface="Garamond"/>
+              </a:rPr>
+              <a:t>78,906</a:t>
+            </a:r>
+          </a:p>
+        </p:txBody>
+      </p:sp>
+      <p:sp>
+        <p:nvSpPr>
+          <p:cNvPr id="72" name="TextBox 71"/>
+          <p:cNvSpPr txBox="1"/>
+          <p:nvPr/>
+        </p:nvSpPr>
+        <p:spPr>
+          <a:xfrm>
+            <a:off x="457200" y="2750515"/>
+            <a:ext cx="914400" cy="173736"/>
           </a:xfrm>
           <a:prstGeom prst="rect">
             <a:avLst/>
@@ -9810,7 +10335,7 @@
           <a:p>
             <a:pPr algn="l"/>
             <a:r>
-              <a:rPr sz="1050" b="0" i="0">
+              <a:rPr sz="950" b="0" i="0">
                 <a:solidFill>
                   <a:srgbClr val="212529"/>
                 </a:solidFill>
@@ -9823,29 +10348,29 @@
       </p:sp>
       <p:sp>
         <p:nvSpPr>
-          <p:cNvPr id="58" name="TextBox 57"/>
-          <p:cNvSpPr txBox="1"/>
-          <p:nvPr/>
-        </p:nvSpPr>
-        <p:spPr>
-          <a:xfrm>
-            <a:off x="1691640" y="2845612"/>
-            <a:ext cx="731520" cy="192024"/>
-          </a:xfrm>
-          <a:prstGeom prst="rect">
-            <a:avLst/>
-          </a:prstGeom>
-          <a:noFill/>
-        </p:spPr>
-        <p:txBody>
-          <a:bodyPr wrap="square" lIns="0" rIns="0" tIns="0" bIns="0">
-            <a:spAutoFit/>
-          </a:bodyPr>
-          <a:lstStyle/>
-          <a:p>
-            <a:pPr algn="r"/>
-            <a:r>
-              <a:rPr sz="1050" b="0" i="0">
+          <p:cNvPr id="73" name="TextBox 72"/>
+          <p:cNvSpPr txBox="1"/>
+          <p:nvPr/>
+        </p:nvSpPr>
+        <p:spPr>
+          <a:xfrm>
+            <a:off x="1371600" y="2750515"/>
+            <a:ext cx="694944" cy="173736"/>
+          </a:xfrm>
+          <a:prstGeom prst="rect">
+            <a:avLst/>
+          </a:prstGeom>
+          <a:noFill/>
+        </p:spPr>
+        <p:txBody>
+          <a:bodyPr wrap="square" lIns="0" rIns="0" tIns="0" bIns="0">
+            <a:spAutoFit/>
+          </a:bodyPr>
+          <a:lstStyle/>
+          <a:p>
+            <a:pPr algn="r"/>
+            <a:r>
+              <a:rPr sz="950" b="0" i="0">
                 <a:solidFill>
                   <a:srgbClr val="212529"/>
                 </a:solidFill>
@@ -9858,29 +10383,64 @@
       </p:sp>
       <p:sp>
         <p:nvSpPr>
-          <p:cNvPr id="59" name="TextBox 58"/>
-          <p:cNvSpPr txBox="1"/>
-          <p:nvPr/>
-        </p:nvSpPr>
-        <p:spPr>
-          <a:xfrm>
-            <a:off x="2423160" y="2845612"/>
-            <a:ext cx="868680" cy="192024"/>
-          </a:xfrm>
-          <a:prstGeom prst="rect">
-            <a:avLst/>
-          </a:prstGeom>
-          <a:noFill/>
-        </p:spPr>
-        <p:txBody>
-          <a:bodyPr wrap="square" lIns="0" rIns="0" tIns="0" bIns="0">
-            <a:spAutoFit/>
-          </a:bodyPr>
-          <a:lstStyle/>
-          <a:p>
-            <a:pPr algn="r"/>
-            <a:r>
-              <a:rPr sz="1050" b="0" i="0">
+          <p:cNvPr id="74" name="TextBox 73"/>
+          <p:cNvSpPr txBox="1"/>
+          <p:nvPr/>
+        </p:nvSpPr>
+        <p:spPr>
+          <a:xfrm>
+            <a:off x="2066543" y="2750515"/>
+            <a:ext cx="841248" cy="173736"/>
+          </a:xfrm>
+          <a:prstGeom prst="rect">
+            <a:avLst/>
+          </a:prstGeom>
+          <a:noFill/>
+        </p:spPr>
+        <p:txBody>
+          <a:bodyPr wrap="square" lIns="0" rIns="0" tIns="0" bIns="0">
+            <a:spAutoFit/>
+          </a:bodyPr>
+          <a:lstStyle/>
+          <a:p>
+            <a:pPr algn="r"/>
+            <a:r>
+              <a:rPr sz="950" b="0" i="0">
+                <a:solidFill>
+                  <a:srgbClr val="212529"/>
+                </a:solidFill>
+                <a:latin typeface="Garamond"/>
+              </a:rPr>
+              <a:t>73,089</a:t>
+            </a:r>
+          </a:p>
+        </p:txBody>
+      </p:sp>
+      <p:sp>
+        <p:nvSpPr>
+          <p:cNvPr id="75" name="TextBox 74"/>
+          <p:cNvSpPr txBox="1"/>
+          <p:nvPr/>
+        </p:nvSpPr>
+        <p:spPr>
+          <a:xfrm>
+            <a:off x="2907791" y="2750515"/>
+            <a:ext cx="786384" cy="173736"/>
+          </a:xfrm>
+          <a:prstGeom prst="rect">
+            <a:avLst/>
+          </a:prstGeom>
+          <a:noFill/>
+        </p:spPr>
+        <p:txBody>
+          <a:bodyPr wrap="square" lIns="0" rIns="0" tIns="0" bIns="0">
+            <a:spAutoFit/>
+          </a:bodyPr>
+          <a:lstStyle/>
+          <a:p>
+            <a:pPr algn="r"/>
+            <a:r>
+              <a:rPr sz="950" b="0" i="0">
                 <a:solidFill>
                   <a:srgbClr val="212529"/>
                 </a:solidFill>
@@ -9893,64 +10453,64 @@
       </p:sp>
       <p:sp>
         <p:nvSpPr>
-          <p:cNvPr id="60" name="TextBox 59"/>
-          <p:cNvSpPr txBox="1"/>
-          <p:nvPr/>
-        </p:nvSpPr>
-        <p:spPr>
-          <a:xfrm>
-            <a:off x="3291840" y="2845612"/>
-            <a:ext cx="868680" cy="192024"/>
-          </a:xfrm>
-          <a:prstGeom prst="rect">
-            <a:avLst/>
-          </a:prstGeom>
-          <a:noFill/>
-        </p:spPr>
-        <p:txBody>
-          <a:bodyPr wrap="square" lIns="0" rIns="0" tIns="0" bIns="0">
-            <a:spAutoFit/>
-          </a:bodyPr>
-          <a:lstStyle/>
-          <a:p>
-            <a:pPr algn="r"/>
-            <a:r>
-              <a:rPr sz="1050" b="0" i="0">
-                <a:solidFill>
-                  <a:srgbClr val="212529"/>
-                </a:solidFill>
-                <a:latin typeface="Garamond"/>
-              </a:rPr>
-              <a:t>73,089</a:t>
-            </a:r>
-          </a:p>
-        </p:txBody>
-      </p:sp>
-      <p:sp>
-        <p:nvSpPr>
-          <p:cNvPr id="61" name="TextBox 60"/>
-          <p:cNvSpPr txBox="1"/>
-          <p:nvPr/>
-        </p:nvSpPr>
-        <p:spPr>
-          <a:xfrm>
-            <a:off x="4471416" y="2845612"/>
-            <a:ext cx="731520" cy="192024"/>
-          </a:xfrm>
-          <a:prstGeom prst="rect">
-            <a:avLst/>
-          </a:prstGeom>
-          <a:noFill/>
-        </p:spPr>
-        <p:txBody>
-          <a:bodyPr wrap="square" lIns="0" rIns="0" tIns="0" bIns="0">
-            <a:spAutoFit/>
-          </a:bodyPr>
-          <a:lstStyle/>
-          <a:p>
-            <a:pPr algn="r"/>
-            <a:r>
-              <a:rPr sz="1050" b="0" i="0">
+          <p:cNvPr id="76" name="TextBox 75"/>
+          <p:cNvSpPr txBox="1"/>
+          <p:nvPr/>
+        </p:nvSpPr>
+        <p:spPr>
+          <a:xfrm>
+            <a:off x="3694176" y="2750515"/>
+            <a:ext cx="786384" cy="173736"/>
+          </a:xfrm>
+          <a:prstGeom prst="rect">
+            <a:avLst/>
+          </a:prstGeom>
+          <a:noFill/>
+        </p:spPr>
+        <p:txBody>
+          <a:bodyPr wrap="square" lIns="0" rIns="0" tIns="0" bIns="0">
+            <a:spAutoFit/>
+          </a:bodyPr>
+          <a:lstStyle/>
+          <a:p>
+            <a:pPr algn="r"/>
+            <a:r>
+              <a:rPr sz="950" b="0" i="0">
+                <a:solidFill>
+                  <a:srgbClr val="212529"/>
+                </a:solidFill>
+                <a:latin typeface="Garamond"/>
+              </a:rPr>
+              <a:t>101,426</a:t>
+            </a:r>
+          </a:p>
+        </p:txBody>
+      </p:sp>
+      <p:sp>
+        <p:nvSpPr>
+          <p:cNvPr id="77" name="TextBox 76"/>
+          <p:cNvSpPr txBox="1"/>
+          <p:nvPr/>
+        </p:nvSpPr>
+        <p:spPr>
+          <a:xfrm>
+            <a:off x="4700016" y="2750515"/>
+            <a:ext cx="694944" cy="173736"/>
+          </a:xfrm>
+          <a:prstGeom prst="rect">
+            <a:avLst/>
+          </a:prstGeom>
+          <a:noFill/>
+        </p:spPr>
+        <p:txBody>
+          <a:bodyPr wrap="square" lIns="0" rIns="0" tIns="0" bIns="0">
+            <a:spAutoFit/>
+          </a:bodyPr>
+          <a:lstStyle/>
+          <a:p>
+            <a:pPr algn="r"/>
+            <a:r>
+              <a:rPr sz="950" b="0" i="0">
                 <a:solidFill>
                   <a:srgbClr val="212529"/>
                 </a:solidFill>
@@ -9963,29 +10523,64 @@
       </p:sp>
       <p:sp>
         <p:nvSpPr>
-          <p:cNvPr id="62" name="TextBox 61"/>
-          <p:cNvSpPr txBox="1"/>
-          <p:nvPr/>
-        </p:nvSpPr>
-        <p:spPr>
-          <a:xfrm>
-            <a:off x="5202936" y="2845612"/>
-            <a:ext cx="868680" cy="192024"/>
-          </a:xfrm>
-          <a:prstGeom prst="rect">
-            <a:avLst/>
-          </a:prstGeom>
-          <a:noFill/>
-        </p:spPr>
-        <p:txBody>
-          <a:bodyPr wrap="square" lIns="0" rIns="0" tIns="0" bIns="0">
-            <a:spAutoFit/>
-          </a:bodyPr>
-          <a:lstStyle/>
-          <a:p>
-            <a:pPr algn="r"/>
-            <a:r>
-              <a:rPr sz="1050" b="0" i="0">
+          <p:cNvPr id="78" name="TextBox 77"/>
+          <p:cNvSpPr txBox="1"/>
+          <p:nvPr/>
+        </p:nvSpPr>
+        <p:spPr>
+          <a:xfrm>
+            <a:off x="5394959" y="2750515"/>
+            <a:ext cx="841248" cy="173736"/>
+          </a:xfrm>
+          <a:prstGeom prst="rect">
+            <a:avLst/>
+          </a:prstGeom>
+          <a:noFill/>
+        </p:spPr>
+        <p:txBody>
+          <a:bodyPr wrap="square" lIns="0" rIns="0" tIns="0" bIns="0">
+            <a:spAutoFit/>
+          </a:bodyPr>
+          <a:lstStyle/>
+          <a:p>
+            <a:pPr algn="r"/>
+            <a:r>
+              <a:rPr sz="950" b="0" i="0">
+                <a:solidFill>
+                  <a:srgbClr val="212529"/>
+                </a:solidFill>
+                <a:latin typeface="Garamond"/>
+              </a:rPr>
+              <a:t>72,279</a:t>
+            </a:r>
+          </a:p>
+        </p:txBody>
+      </p:sp>
+      <p:sp>
+        <p:nvSpPr>
+          <p:cNvPr id="79" name="TextBox 78"/>
+          <p:cNvSpPr txBox="1"/>
+          <p:nvPr/>
+        </p:nvSpPr>
+        <p:spPr>
+          <a:xfrm>
+            <a:off x="6236207" y="2750515"/>
+            <a:ext cx="786384" cy="173736"/>
+          </a:xfrm>
+          <a:prstGeom prst="rect">
+            <a:avLst/>
+          </a:prstGeom>
+          <a:noFill/>
+        </p:spPr>
+        <p:txBody>
+          <a:bodyPr wrap="square" lIns="0" rIns="0" tIns="0" bIns="0">
+            <a:spAutoFit/>
+          </a:bodyPr>
+          <a:lstStyle/>
+          <a:p>
+            <a:pPr algn="r"/>
+            <a:r>
+              <a:rPr sz="950" b="0" i="0">
                 <a:solidFill>
                   <a:srgbClr val="212529"/>
                 </a:solidFill>
@@ -9998,64 +10593,64 @@
       </p:sp>
       <p:sp>
         <p:nvSpPr>
-          <p:cNvPr id="63" name="TextBox 62"/>
-          <p:cNvSpPr txBox="1"/>
-          <p:nvPr/>
-        </p:nvSpPr>
-        <p:spPr>
-          <a:xfrm>
-            <a:off x="6071616" y="2845612"/>
-            <a:ext cx="868680" cy="192024"/>
-          </a:xfrm>
-          <a:prstGeom prst="rect">
-            <a:avLst/>
-          </a:prstGeom>
-          <a:noFill/>
-        </p:spPr>
-        <p:txBody>
-          <a:bodyPr wrap="square" lIns="0" rIns="0" tIns="0" bIns="0">
-            <a:spAutoFit/>
-          </a:bodyPr>
-          <a:lstStyle/>
-          <a:p>
-            <a:pPr algn="r"/>
-            <a:r>
-              <a:rPr sz="1050" b="0" i="0">
-                <a:solidFill>
-                  <a:srgbClr val="212529"/>
-                </a:solidFill>
-                <a:latin typeface="Garamond"/>
-              </a:rPr>
-              <a:t>72,279</a:t>
-            </a:r>
-          </a:p>
-        </p:txBody>
-      </p:sp>
-      <p:sp>
-        <p:nvSpPr>
-          <p:cNvPr id="64" name="TextBox 63"/>
-          <p:cNvSpPr txBox="1"/>
-          <p:nvPr/>
-        </p:nvSpPr>
-        <p:spPr>
-          <a:xfrm>
-            <a:off x="7251192" y="2845612"/>
-            <a:ext cx="731520" cy="192024"/>
-          </a:xfrm>
-          <a:prstGeom prst="rect">
-            <a:avLst/>
-          </a:prstGeom>
-          <a:noFill/>
-        </p:spPr>
-        <p:txBody>
-          <a:bodyPr wrap="square" lIns="0" rIns="0" tIns="0" bIns="0">
-            <a:spAutoFit/>
-          </a:bodyPr>
-          <a:lstStyle/>
-          <a:p>
-            <a:pPr algn="r"/>
-            <a:r>
-              <a:rPr sz="1050" b="0" i="0">
+          <p:cNvPr id="80" name="TextBox 79"/>
+          <p:cNvSpPr txBox="1"/>
+          <p:nvPr/>
+        </p:nvSpPr>
+        <p:spPr>
+          <a:xfrm>
+            <a:off x="7022592" y="2750515"/>
+            <a:ext cx="786384" cy="173736"/>
+          </a:xfrm>
+          <a:prstGeom prst="rect">
+            <a:avLst/>
+          </a:prstGeom>
+          <a:noFill/>
+        </p:spPr>
+        <p:txBody>
+          <a:bodyPr wrap="square" lIns="0" rIns="0" tIns="0" bIns="0">
+            <a:spAutoFit/>
+          </a:bodyPr>
+          <a:lstStyle/>
+          <a:p>
+            <a:pPr algn="r"/>
+            <a:r>
+              <a:rPr sz="950" b="0" i="0">
+                <a:solidFill>
+                  <a:srgbClr val="212529"/>
+                </a:solidFill>
+                <a:latin typeface="Garamond"/>
+              </a:rPr>
+              <a:t>100,803</a:t>
+            </a:r>
+          </a:p>
+        </p:txBody>
+      </p:sp>
+      <p:sp>
+        <p:nvSpPr>
+          <p:cNvPr id="81" name="TextBox 80"/>
+          <p:cNvSpPr txBox="1"/>
+          <p:nvPr/>
+        </p:nvSpPr>
+        <p:spPr>
+          <a:xfrm>
+            <a:off x="8028431" y="2750515"/>
+            <a:ext cx="694944" cy="173736"/>
+          </a:xfrm>
+          <a:prstGeom prst="rect">
+            <a:avLst/>
+          </a:prstGeom>
+          <a:noFill/>
+        </p:spPr>
+        <p:txBody>
+          <a:bodyPr wrap="square" lIns="0" rIns="0" tIns="0" bIns="0">
+            <a:spAutoFit/>
+          </a:bodyPr>
+          <a:lstStyle/>
+          <a:p>
+            <a:pPr algn="r"/>
+            <a:r>
+              <a:rPr sz="950" b="0" i="0">
                 <a:solidFill>
                   <a:srgbClr val="212529"/>
                 </a:solidFill>
@@ -10068,29 +10663,64 @@
       </p:sp>
       <p:sp>
         <p:nvSpPr>
-          <p:cNvPr id="65" name="TextBox 64"/>
-          <p:cNvSpPr txBox="1"/>
-          <p:nvPr/>
-        </p:nvSpPr>
-        <p:spPr>
-          <a:xfrm>
-            <a:off x="7982712" y="2845612"/>
-            <a:ext cx="868680" cy="192024"/>
-          </a:xfrm>
-          <a:prstGeom prst="rect">
-            <a:avLst/>
-          </a:prstGeom>
-          <a:noFill/>
-        </p:spPr>
-        <p:txBody>
-          <a:bodyPr wrap="square" lIns="0" rIns="0" tIns="0" bIns="0">
-            <a:spAutoFit/>
-          </a:bodyPr>
-          <a:lstStyle/>
-          <a:p>
-            <a:pPr algn="r"/>
-            <a:r>
-              <a:rPr sz="1050" b="0" i="0">
+          <p:cNvPr id="82" name="TextBox 81"/>
+          <p:cNvSpPr txBox="1"/>
+          <p:nvPr/>
+        </p:nvSpPr>
+        <p:spPr>
+          <a:xfrm>
+            <a:off x="8723376" y="2750515"/>
+            <a:ext cx="841248" cy="173736"/>
+          </a:xfrm>
+          <a:prstGeom prst="rect">
+            <a:avLst/>
+          </a:prstGeom>
+          <a:noFill/>
+        </p:spPr>
+        <p:txBody>
+          <a:bodyPr wrap="square" lIns="0" rIns="0" tIns="0" bIns="0">
+            <a:spAutoFit/>
+          </a:bodyPr>
+          <a:lstStyle/>
+          <a:p>
+            <a:pPr algn="r"/>
+            <a:r>
+              <a:rPr sz="950" b="0" i="0">
+                <a:solidFill>
+                  <a:srgbClr val="212529"/>
+                </a:solidFill>
+                <a:latin typeface="Garamond"/>
+              </a:rPr>
+              <a:t>55,915</a:t>
+            </a:r>
+          </a:p>
+        </p:txBody>
+      </p:sp>
+      <p:sp>
+        <p:nvSpPr>
+          <p:cNvPr id="83" name="TextBox 82"/>
+          <p:cNvSpPr txBox="1"/>
+          <p:nvPr/>
+        </p:nvSpPr>
+        <p:spPr>
+          <a:xfrm>
+            <a:off x="9564624" y="2750515"/>
+            <a:ext cx="786384" cy="173736"/>
+          </a:xfrm>
+          <a:prstGeom prst="rect">
+            <a:avLst/>
+          </a:prstGeom>
+          <a:noFill/>
+        </p:spPr>
+        <p:txBody>
+          <a:bodyPr wrap="square" lIns="0" rIns="0" tIns="0" bIns="0">
+            <a:spAutoFit/>
+          </a:bodyPr>
+          <a:lstStyle/>
+          <a:p>
+            <a:pPr algn="r"/>
+            <a:r>
+              <a:rPr sz="950" b="0" i="0">
                 <a:solidFill>
                   <a:srgbClr val="212529"/>
                 </a:solidFill>
@@ -10103,49 +10733,49 @@
       </p:sp>
       <p:sp>
         <p:nvSpPr>
-          <p:cNvPr id="66" name="TextBox 65"/>
-          <p:cNvSpPr txBox="1"/>
-          <p:nvPr/>
-        </p:nvSpPr>
-        <p:spPr>
-          <a:xfrm>
-            <a:off x="8851392" y="2845612"/>
-            <a:ext cx="868680" cy="192024"/>
-          </a:xfrm>
-          <a:prstGeom prst="rect">
-            <a:avLst/>
-          </a:prstGeom>
-          <a:noFill/>
-        </p:spPr>
-        <p:txBody>
-          <a:bodyPr wrap="square" lIns="0" rIns="0" tIns="0" bIns="0">
-            <a:spAutoFit/>
-          </a:bodyPr>
-          <a:lstStyle/>
-          <a:p>
-            <a:pPr algn="r"/>
-            <a:r>
-              <a:rPr sz="1050" b="0" i="0">
-                <a:solidFill>
-                  <a:srgbClr val="212529"/>
-                </a:solidFill>
-                <a:latin typeface="Garamond"/>
-              </a:rPr>
-              <a:t>55,915</a:t>
-            </a:r>
-          </a:p>
-        </p:txBody>
-      </p:sp>
-      <p:sp>
-        <p:nvSpPr>
-          <p:cNvPr id="67" name="TextBox 66"/>
-          <p:cNvSpPr txBox="1"/>
-          <p:nvPr/>
-        </p:nvSpPr>
-        <p:spPr>
-          <a:xfrm>
-            <a:off x="502920" y="3063240"/>
-            <a:ext cx="1188720" cy="192024"/>
+          <p:cNvPr id="84" name="TextBox 83"/>
+          <p:cNvSpPr txBox="1"/>
+          <p:nvPr/>
+        </p:nvSpPr>
+        <p:spPr>
+          <a:xfrm>
+            <a:off x="10351007" y="2750515"/>
+            <a:ext cx="786384" cy="173736"/>
+          </a:xfrm>
+          <a:prstGeom prst="rect">
+            <a:avLst/>
+          </a:prstGeom>
+          <a:noFill/>
+        </p:spPr>
+        <p:txBody>
+          <a:bodyPr wrap="square" lIns="0" rIns="0" tIns="0" bIns="0">
+            <a:spAutoFit/>
+          </a:bodyPr>
+          <a:lstStyle/>
+          <a:p>
+            <a:pPr algn="r"/>
+            <a:r>
+              <a:rPr sz="950" b="0" i="0">
+                <a:solidFill>
+                  <a:srgbClr val="212529"/>
+                </a:solidFill>
+                <a:latin typeface="Garamond"/>
+              </a:rPr>
+              <a:t>79,350</a:t>
+            </a:r>
+          </a:p>
+        </p:txBody>
+      </p:sp>
+      <p:sp>
+        <p:nvSpPr>
+          <p:cNvPr id="85" name="TextBox 84"/>
+          <p:cNvSpPr txBox="1"/>
+          <p:nvPr/>
+        </p:nvSpPr>
+        <p:spPr>
+          <a:xfrm>
+            <a:off x="457200" y="2962656"/>
+            <a:ext cx="914400" cy="173736"/>
           </a:xfrm>
           <a:prstGeom prst="rect">
             <a:avLst/>
@@ -10160,7 +10790,7 @@
           <a:p>
             <a:pPr algn="l"/>
             <a:r>
-              <a:rPr sz="1050" b="0" i="0">
+              <a:rPr sz="950" b="0" i="0">
                 <a:solidFill>
                   <a:srgbClr val="212529"/>
                 </a:solidFill>
@@ -10173,29 +10803,29 @@
       </p:sp>
       <p:sp>
         <p:nvSpPr>
-          <p:cNvPr id="68" name="TextBox 67"/>
-          <p:cNvSpPr txBox="1"/>
-          <p:nvPr/>
-        </p:nvSpPr>
-        <p:spPr>
-          <a:xfrm>
-            <a:off x="1691640" y="3063240"/>
-            <a:ext cx="731520" cy="192024"/>
-          </a:xfrm>
-          <a:prstGeom prst="rect">
-            <a:avLst/>
-          </a:prstGeom>
-          <a:noFill/>
-        </p:spPr>
-        <p:txBody>
-          <a:bodyPr wrap="square" lIns="0" rIns="0" tIns="0" bIns="0">
-            <a:spAutoFit/>
-          </a:bodyPr>
-          <a:lstStyle/>
-          <a:p>
-            <a:pPr algn="r"/>
-            <a:r>
-              <a:rPr sz="1050" b="0" i="0">
+          <p:cNvPr id="86" name="TextBox 85"/>
+          <p:cNvSpPr txBox="1"/>
+          <p:nvPr/>
+        </p:nvSpPr>
+        <p:spPr>
+          <a:xfrm>
+            <a:off x="1371600" y="2962656"/>
+            <a:ext cx="694944" cy="173736"/>
+          </a:xfrm>
+          <a:prstGeom prst="rect">
+            <a:avLst/>
+          </a:prstGeom>
+          <a:noFill/>
+        </p:spPr>
+        <p:txBody>
+          <a:bodyPr wrap="square" lIns="0" rIns="0" tIns="0" bIns="0">
+            <a:spAutoFit/>
+          </a:bodyPr>
+          <a:lstStyle/>
+          <a:p>
+            <a:pPr algn="r"/>
+            <a:r>
+              <a:rPr sz="950" b="0" i="0">
                 <a:solidFill>
                   <a:srgbClr val="212529"/>
                 </a:solidFill>
@@ -10208,29 +10838,64 @@
       </p:sp>
       <p:sp>
         <p:nvSpPr>
-          <p:cNvPr id="69" name="TextBox 68"/>
-          <p:cNvSpPr txBox="1"/>
-          <p:nvPr/>
-        </p:nvSpPr>
-        <p:spPr>
-          <a:xfrm>
-            <a:off x="2423160" y="3063240"/>
-            <a:ext cx="868680" cy="192024"/>
-          </a:xfrm>
-          <a:prstGeom prst="rect">
-            <a:avLst/>
-          </a:prstGeom>
-          <a:noFill/>
-        </p:spPr>
-        <p:txBody>
-          <a:bodyPr wrap="square" lIns="0" rIns="0" tIns="0" bIns="0">
-            <a:spAutoFit/>
-          </a:bodyPr>
-          <a:lstStyle/>
-          <a:p>
-            <a:pPr algn="r"/>
-            <a:r>
-              <a:rPr sz="1050" b="0" i="0">
+          <p:cNvPr id="87" name="TextBox 86"/>
+          <p:cNvSpPr txBox="1"/>
+          <p:nvPr/>
+        </p:nvSpPr>
+        <p:spPr>
+          <a:xfrm>
+            <a:off x="2066543" y="2962656"/>
+            <a:ext cx="841248" cy="173736"/>
+          </a:xfrm>
+          <a:prstGeom prst="rect">
+            <a:avLst/>
+          </a:prstGeom>
+          <a:noFill/>
+        </p:spPr>
+        <p:txBody>
+          <a:bodyPr wrap="square" lIns="0" rIns="0" tIns="0" bIns="0">
+            <a:spAutoFit/>
+          </a:bodyPr>
+          <a:lstStyle/>
+          <a:p>
+            <a:pPr algn="r"/>
+            <a:r>
+              <a:rPr sz="950" b="0" i="0">
+                <a:solidFill>
+                  <a:srgbClr val="212529"/>
+                </a:solidFill>
+                <a:latin typeface="Garamond"/>
+              </a:rPr>
+              <a:t>72,986</a:t>
+            </a:r>
+          </a:p>
+        </p:txBody>
+      </p:sp>
+      <p:sp>
+        <p:nvSpPr>
+          <p:cNvPr id="88" name="TextBox 87"/>
+          <p:cNvSpPr txBox="1"/>
+          <p:nvPr/>
+        </p:nvSpPr>
+        <p:spPr>
+          <a:xfrm>
+            <a:off x="2907791" y="2962656"/>
+            <a:ext cx="786384" cy="173736"/>
+          </a:xfrm>
+          <a:prstGeom prst="rect">
+            <a:avLst/>
+          </a:prstGeom>
+          <a:noFill/>
+        </p:spPr>
+        <p:txBody>
+          <a:bodyPr wrap="square" lIns="0" rIns="0" tIns="0" bIns="0">
+            <a:spAutoFit/>
+          </a:bodyPr>
+          <a:lstStyle/>
+          <a:p>
+            <a:pPr algn="r"/>
+            <a:r>
+              <a:rPr sz="950" b="0" i="0">
                 <a:solidFill>
                   <a:srgbClr val="212529"/>
                 </a:solidFill>
@@ -10243,64 +10908,64 @@
       </p:sp>
       <p:sp>
         <p:nvSpPr>
-          <p:cNvPr id="70" name="TextBox 69"/>
-          <p:cNvSpPr txBox="1"/>
-          <p:nvPr/>
-        </p:nvSpPr>
-        <p:spPr>
-          <a:xfrm>
-            <a:off x="3291840" y="3063240"/>
-            <a:ext cx="868680" cy="192024"/>
-          </a:xfrm>
-          <a:prstGeom prst="rect">
-            <a:avLst/>
-          </a:prstGeom>
-          <a:noFill/>
-        </p:spPr>
-        <p:txBody>
-          <a:bodyPr wrap="square" lIns="0" rIns="0" tIns="0" bIns="0">
-            <a:spAutoFit/>
-          </a:bodyPr>
-          <a:lstStyle/>
-          <a:p>
-            <a:pPr algn="r"/>
-            <a:r>
-              <a:rPr sz="1050" b="0" i="0">
-                <a:solidFill>
-                  <a:srgbClr val="212529"/>
-                </a:solidFill>
-                <a:latin typeface="Garamond"/>
-              </a:rPr>
-              <a:t>72,986</a:t>
-            </a:r>
-          </a:p>
-        </p:txBody>
-      </p:sp>
-      <p:sp>
-        <p:nvSpPr>
-          <p:cNvPr id="71" name="TextBox 70"/>
-          <p:cNvSpPr txBox="1"/>
-          <p:nvPr/>
-        </p:nvSpPr>
-        <p:spPr>
-          <a:xfrm>
-            <a:off x="4471416" y="3063240"/>
-            <a:ext cx="731520" cy="192024"/>
-          </a:xfrm>
-          <a:prstGeom prst="rect">
-            <a:avLst/>
-          </a:prstGeom>
-          <a:noFill/>
-        </p:spPr>
-        <p:txBody>
-          <a:bodyPr wrap="square" lIns="0" rIns="0" tIns="0" bIns="0">
-            <a:spAutoFit/>
-          </a:bodyPr>
-          <a:lstStyle/>
-          <a:p>
-            <a:pPr algn="r"/>
-            <a:r>
-              <a:rPr sz="1050" b="0" i="0">
+          <p:cNvPr id="89" name="TextBox 88"/>
+          <p:cNvSpPr txBox="1"/>
+          <p:nvPr/>
+        </p:nvSpPr>
+        <p:spPr>
+          <a:xfrm>
+            <a:off x="3694176" y="2962656"/>
+            <a:ext cx="786384" cy="173736"/>
+          </a:xfrm>
+          <a:prstGeom prst="rect">
+            <a:avLst/>
+          </a:prstGeom>
+          <a:noFill/>
+        </p:spPr>
+        <p:txBody>
+          <a:bodyPr wrap="square" lIns="0" rIns="0" tIns="0" bIns="0">
+            <a:spAutoFit/>
+          </a:bodyPr>
+          <a:lstStyle/>
+          <a:p>
+            <a:pPr algn="r"/>
+            <a:r>
+              <a:rPr sz="950" b="0" i="0">
+                <a:solidFill>
+                  <a:srgbClr val="212529"/>
+                </a:solidFill>
+                <a:latin typeface="Garamond"/>
+              </a:rPr>
+              <a:t>101,494</a:t>
+            </a:r>
+          </a:p>
+        </p:txBody>
+      </p:sp>
+      <p:sp>
+        <p:nvSpPr>
+          <p:cNvPr id="90" name="TextBox 89"/>
+          <p:cNvSpPr txBox="1"/>
+          <p:nvPr/>
+        </p:nvSpPr>
+        <p:spPr>
+          <a:xfrm>
+            <a:off x="4700016" y="2962656"/>
+            <a:ext cx="694944" cy="173736"/>
+          </a:xfrm>
+          <a:prstGeom prst="rect">
+            <a:avLst/>
+          </a:prstGeom>
+          <a:noFill/>
+        </p:spPr>
+        <p:txBody>
+          <a:bodyPr wrap="square" lIns="0" rIns="0" tIns="0" bIns="0">
+            <a:spAutoFit/>
+          </a:bodyPr>
+          <a:lstStyle/>
+          <a:p>
+            <a:pPr algn="r"/>
+            <a:r>
+              <a:rPr sz="950" b="0" i="0">
                 <a:solidFill>
                   <a:srgbClr val="212529"/>
                 </a:solidFill>
@@ -10313,29 +10978,64 @@
       </p:sp>
       <p:sp>
         <p:nvSpPr>
-          <p:cNvPr id="72" name="TextBox 71"/>
-          <p:cNvSpPr txBox="1"/>
-          <p:nvPr/>
-        </p:nvSpPr>
-        <p:spPr>
-          <a:xfrm>
-            <a:off x="5202936" y="3063240"/>
-            <a:ext cx="868680" cy="192024"/>
-          </a:xfrm>
-          <a:prstGeom prst="rect">
-            <a:avLst/>
-          </a:prstGeom>
-          <a:noFill/>
-        </p:spPr>
-        <p:txBody>
-          <a:bodyPr wrap="square" lIns="0" rIns="0" tIns="0" bIns="0">
-            <a:spAutoFit/>
-          </a:bodyPr>
-          <a:lstStyle/>
-          <a:p>
-            <a:pPr algn="r"/>
-            <a:r>
-              <a:rPr sz="1050" b="0" i="0">
+          <p:cNvPr id="91" name="TextBox 90"/>
+          <p:cNvSpPr txBox="1"/>
+          <p:nvPr/>
+        </p:nvSpPr>
+        <p:spPr>
+          <a:xfrm>
+            <a:off x="5394959" y="2962656"/>
+            <a:ext cx="841248" cy="173736"/>
+          </a:xfrm>
+          <a:prstGeom prst="rect">
+            <a:avLst/>
+          </a:prstGeom>
+          <a:noFill/>
+        </p:spPr>
+        <p:txBody>
+          <a:bodyPr wrap="square" lIns="0" rIns="0" tIns="0" bIns="0">
+            <a:spAutoFit/>
+          </a:bodyPr>
+          <a:lstStyle/>
+          <a:p>
+            <a:pPr algn="r"/>
+            <a:r>
+              <a:rPr sz="950" b="0" i="0">
+                <a:solidFill>
+                  <a:srgbClr val="212529"/>
+                </a:solidFill>
+                <a:latin typeface="Garamond"/>
+              </a:rPr>
+              <a:t>71,715</a:t>
+            </a:r>
+          </a:p>
+        </p:txBody>
+      </p:sp>
+      <p:sp>
+        <p:nvSpPr>
+          <p:cNvPr id="92" name="TextBox 91"/>
+          <p:cNvSpPr txBox="1"/>
+          <p:nvPr/>
+        </p:nvSpPr>
+        <p:spPr>
+          <a:xfrm>
+            <a:off x="6236207" y="2962656"/>
+            <a:ext cx="786384" cy="173736"/>
+          </a:xfrm>
+          <a:prstGeom prst="rect">
+            <a:avLst/>
+          </a:prstGeom>
+          <a:noFill/>
+        </p:spPr>
+        <p:txBody>
+          <a:bodyPr wrap="square" lIns="0" rIns="0" tIns="0" bIns="0">
+            <a:spAutoFit/>
+          </a:bodyPr>
+          <a:lstStyle/>
+          <a:p>
+            <a:pPr algn="r"/>
+            <a:r>
+              <a:rPr sz="950" b="0" i="0">
                 <a:solidFill>
                   <a:srgbClr val="212529"/>
                 </a:solidFill>
@@ -10348,64 +11048,64 @@
       </p:sp>
       <p:sp>
         <p:nvSpPr>
-          <p:cNvPr id="73" name="TextBox 72"/>
-          <p:cNvSpPr txBox="1"/>
-          <p:nvPr/>
-        </p:nvSpPr>
-        <p:spPr>
-          <a:xfrm>
-            <a:off x="6071616" y="3063240"/>
-            <a:ext cx="868680" cy="192024"/>
-          </a:xfrm>
-          <a:prstGeom prst="rect">
-            <a:avLst/>
-          </a:prstGeom>
-          <a:noFill/>
-        </p:spPr>
-        <p:txBody>
-          <a:bodyPr wrap="square" lIns="0" rIns="0" tIns="0" bIns="0">
-            <a:spAutoFit/>
-          </a:bodyPr>
-          <a:lstStyle/>
-          <a:p>
-            <a:pPr algn="r"/>
-            <a:r>
-              <a:rPr sz="1050" b="0" i="0">
-                <a:solidFill>
-                  <a:srgbClr val="212529"/>
-                </a:solidFill>
-                <a:latin typeface="Garamond"/>
-              </a:rPr>
-              <a:t>71,715</a:t>
-            </a:r>
-          </a:p>
-        </p:txBody>
-      </p:sp>
-      <p:sp>
-        <p:nvSpPr>
-          <p:cNvPr id="74" name="TextBox 73"/>
-          <p:cNvSpPr txBox="1"/>
-          <p:nvPr/>
-        </p:nvSpPr>
-        <p:spPr>
-          <a:xfrm>
-            <a:off x="7251192" y="3063240"/>
-            <a:ext cx="731520" cy="192024"/>
-          </a:xfrm>
-          <a:prstGeom prst="rect">
-            <a:avLst/>
-          </a:prstGeom>
-          <a:noFill/>
-        </p:spPr>
-        <p:txBody>
-          <a:bodyPr wrap="square" lIns="0" rIns="0" tIns="0" bIns="0">
-            <a:spAutoFit/>
-          </a:bodyPr>
-          <a:lstStyle/>
-          <a:p>
-            <a:pPr algn="r"/>
-            <a:r>
-              <a:rPr sz="1050" b="0" i="0">
+          <p:cNvPr id="93" name="TextBox 92"/>
+          <p:cNvSpPr txBox="1"/>
+          <p:nvPr/>
+        </p:nvSpPr>
+        <p:spPr>
+          <a:xfrm>
+            <a:off x="7022592" y="2962656"/>
+            <a:ext cx="786384" cy="173736"/>
+          </a:xfrm>
+          <a:prstGeom prst="rect">
+            <a:avLst/>
+          </a:prstGeom>
+          <a:noFill/>
+        </p:spPr>
+        <p:txBody>
+          <a:bodyPr wrap="square" lIns="0" rIns="0" tIns="0" bIns="0">
+            <a:spAutoFit/>
+          </a:bodyPr>
+          <a:lstStyle/>
+          <a:p>
+            <a:pPr algn="r"/>
+            <a:r>
+              <a:rPr sz="950" b="0" i="0">
+                <a:solidFill>
+                  <a:srgbClr val="212529"/>
+                </a:solidFill>
+                <a:latin typeface="Garamond"/>
+              </a:rPr>
+              <a:t>99,308</a:t>
+            </a:r>
+          </a:p>
+        </p:txBody>
+      </p:sp>
+      <p:sp>
+        <p:nvSpPr>
+          <p:cNvPr id="94" name="TextBox 93"/>
+          <p:cNvSpPr txBox="1"/>
+          <p:nvPr/>
+        </p:nvSpPr>
+        <p:spPr>
+          <a:xfrm>
+            <a:off x="8028431" y="2962656"/>
+            <a:ext cx="694944" cy="173736"/>
+          </a:xfrm>
+          <a:prstGeom prst="rect">
+            <a:avLst/>
+          </a:prstGeom>
+          <a:noFill/>
+        </p:spPr>
+        <p:txBody>
+          <a:bodyPr wrap="square" lIns="0" rIns="0" tIns="0" bIns="0">
+            <a:spAutoFit/>
+          </a:bodyPr>
+          <a:lstStyle/>
+          <a:p>
+            <a:pPr algn="r"/>
+            <a:r>
+              <a:rPr sz="950" b="0" i="0">
                 <a:solidFill>
                   <a:srgbClr val="212529"/>
                 </a:solidFill>
@@ -10418,29 +11118,64 @@
       </p:sp>
       <p:sp>
         <p:nvSpPr>
-          <p:cNvPr id="75" name="TextBox 74"/>
-          <p:cNvSpPr txBox="1"/>
-          <p:nvPr/>
-        </p:nvSpPr>
-        <p:spPr>
-          <a:xfrm>
-            <a:off x="7982712" y="3063240"/>
-            <a:ext cx="868680" cy="192024"/>
-          </a:xfrm>
-          <a:prstGeom prst="rect">
-            <a:avLst/>
-          </a:prstGeom>
-          <a:noFill/>
-        </p:spPr>
-        <p:txBody>
-          <a:bodyPr wrap="square" lIns="0" rIns="0" tIns="0" bIns="0">
-            <a:spAutoFit/>
-          </a:bodyPr>
-          <a:lstStyle/>
-          <a:p>
-            <a:pPr algn="r"/>
-            <a:r>
-              <a:rPr sz="1050" b="0" i="0">
+          <p:cNvPr id="95" name="TextBox 94"/>
+          <p:cNvSpPr txBox="1"/>
+          <p:nvPr/>
+        </p:nvSpPr>
+        <p:spPr>
+          <a:xfrm>
+            <a:off x="8723376" y="2962656"/>
+            <a:ext cx="841248" cy="173736"/>
+          </a:xfrm>
+          <a:prstGeom prst="rect">
+            <a:avLst/>
+          </a:prstGeom>
+          <a:noFill/>
+        </p:spPr>
+        <p:txBody>
+          <a:bodyPr wrap="square" lIns="0" rIns="0" tIns="0" bIns="0">
+            <a:spAutoFit/>
+          </a:bodyPr>
+          <a:lstStyle/>
+          <a:p>
+            <a:pPr algn="r"/>
+            <a:r>
+              <a:rPr sz="950" b="0" i="0">
+                <a:solidFill>
+                  <a:srgbClr val="212529"/>
+                </a:solidFill>
+                <a:latin typeface="Garamond"/>
+              </a:rPr>
+              <a:t>55,709</a:t>
+            </a:r>
+          </a:p>
+        </p:txBody>
+      </p:sp>
+      <p:sp>
+        <p:nvSpPr>
+          <p:cNvPr id="96" name="TextBox 95"/>
+          <p:cNvSpPr txBox="1"/>
+          <p:nvPr/>
+        </p:nvSpPr>
+        <p:spPr>
+          <a:xfrm>
+            <a:off x="9564624" y="2962656"/>
+            <a:ext cx="786384" cy="173736"/>
+          </a:xfrm>
+          <a:prstGeom prst="rect">
+            <a:avLst/>
+          </a:prstGeom>
+          <a:noFill/>
+        </p:spPr>
+        <p:txBody>
+          <a:bodyPr wrap="square" lIns="0" rIns="0" tIns="0" bIns="0">
+            <a:spAutoFit/>
+          </a:bodyPr>
+          <a:lstStyle/>
+          <a:p>
+            <a:pPr algn="r"/>
+            <a:r>
+              <a:rPr sz="950" b="0" i="0">
                 <a:solidFill>
                   <a:srgbClr val="212529"/>
                 </a:solidFill>
@@ -10453,49 +11188,49 @@
       </p:sp>
       <p:sp>
         <p:nvSpPr>
-          <p:cNvPr id="76" name="TextBox 75"/>
-          <p:cNvSpPr txBox="1"/>
-          <p:nvPr/>
-        </p:nvSpPr>
-        <p:spPr>
-          <a:xfrm>
-            <a:off x="8851392" y="3063240"/>
-            <a:ext cx="868680" cy="192024"/>
-          </a:xfrm>
-          <a:prstGeom prst="rect">
-            <a:avLst/>
-          </a:prstGeom>
-          <a:noFill/>
-        </p:spPr>
-        <p:txBody>
-          <a:bodyPr wrap="square" lIns="0" rIns="0" tIns="0" bIns="0">
-            <a:spAutoFit/>
-          </a:bodyPr>
-          <a:lstStyle/>
-          <a:p>
-            <a:pPr algn="r"/>
-            <a:r>
-              <a:rPr sz="1050" b="0" i="0">
-                <a:solidFill>
-                  <a:srgbClr val="212529"/>
-                </a:solidFill>
-                <a:latin typeface="Garamond"/>
-              </a:rPr>
-              <a:t>55,709</a:t>
-            </a:r>
-          </a:p>
-        </p:txBody>
-      </p:sp>
-      <p:sp>
-        <p:nvSpPr>
-          <p:cNvPr id="77" name="TextBox 76"/>
-          <p:cNvSpPr txBox="1"/>
-          <p:nvPr/>
-        </p:nvSpPr>
-        <p:spPr>
-          <a:xfrm>
-            <a:off x="502920" y="3280867"/>
-            <a:ext cx="1188720" cy="192024"/>
+          <p:cNvPr id="97" name="TextBox 96"/>
+          <p:cNvSpPr txBox="1"/>
+          <p:nvPr/>
+        </p:nvSpPr>
+        <p:spPr>
+          <a:xfrm>
+            <a:off x="10351007" y="2962656"/>
+            <a:ext cx="786384" cy="173736"/>
+          </a:xfrm>
+          <a:prstGeom prst="rect">
+            <a:avLst/>
+          </a:prstGeom>
+          <a:noFill/>
+        </p:spPr>
+        <p:txBody>
+          <a:bodyPr wrap="square" lIns="0" rIns="0" tIns="0" bIns="0">
+            <a:spAutoFit/>
+          </a:bodyPr>
+          <a:lstStyle/>
+          <a:p>
+            <a:pPr algn="r"/>
+            <a:r>
+              <a:rPr sz="950" b="0" i="0">
+                <a:solidFill>
+                  <a:srgbClr val="212529"/>
+                </a:solidFill>
+                <a:latin typeface="Garamond"/>
+              </a:rPr>
+              <a:t>78,480</a:t>
+            </a:r>
+          </a:p>
+        </p:txBody>
+      </p:sp>
+      <p:sp>
+        <p:nvSpPr>
+          <p:cNvPr id="98" name="TextBox 97"/>
+          <p:cNvSpPr txBox="1"/>
+          <p:nvPr/>
+        </p:nvSpPr>
+        <p:spPr>
+          <a:xfrm>
+            <a:off x="457200" y="3174796"/>
+            <a:ext cx="914400" cy="173736"/>
           </a:xfrm>
           <a:prstGeom prst="rect">
             <a:avLst/>
@@ -10510,7 +11245,7 @@
           <a:p>
             <a:pPr algn="l"/>
             <a:r>
-              <a:rPr sz="1050" b="0" i="0">
+              <a:rPr sz="950" b="0" i="0">
                 <a:solidFill>
                   <a:srgbClr val="212529"/>
                 </a:solidFill>
@@ -10523,29 +11258,29 @@
       </p:sp>
       <p:sp>
         <p:nvSpPr>
-          <p:cNvPr id="78" name="TextBox 77"/>
-          <p:cNvSpPr txBox="1"/>
-          <p:nvPr/>
-        </p:nvSpPr>
-        <p:spPr>
-          <a:xfrm>
-            <a:off x="1691640" y="3280867"/>
-            <a:ext cx="731520" cy="192024"/>
-          </a:xfrm>
-          <a:prstGeom prst="rect">
-            <a:avLst/>
-          </a:prstGeom>
-          <a:noFill/>
-        </p:spPr>
-        <p:txBody>
-          <a:bodyPr wrap="square" lIns="0" rIns="0" tIns="0" bIns="0">
-            <a:spAutoFit/>
-          </a:bodyPr>
-          <a:lstStyle/>
-          <a:p>
-            <a:pPr algn="r"/>
-            <a:r>
-              <a:rPr sz="1050" b="0" i="0">
+          <p:cNvPr id="99" name="TextBox 98"/>
+          <p:cNvSpPr txBox="1"/>
+          <p:nvPr/>
+        </p:nvSpPr>
+        <p:spPr>
+          <a:xfrm>
+            <a:off x="1371600" y="3174796"/>
+            <a:ext cx="694944" cy="173736"/>
+          </a:xfrm>
+          <a:prstGeom prst="rect">
+            <a:avLst/>
+          </a:prstGeom>
+          <a:noFill/>
+        </p:spPr>
+        <p:txBody>
+          <a:bodyPr wrap="square" lIns="0" rIns="0" tIns="0" bIns="0">
+            <a:spAutoFit/>
+          </a:bodyPr>
+          <a:lstStyle/>
+          <a:p>
+            <a:pPr algn="r"/>
+            <a:r>
+              <a:rPr sz="950" b="0" i="0">
                 <a:solidFill>
                   <a:srgbClr val="212529"/>
                 </a:solidFill>
@@ -10558,29 +11293,64 @@
       </p:sp>
       <p:sp>
         <p:nvSpPr>
-          <p:cNvPr id="79" name="TextBox 78"/>
-          <p:cNvSpPr txBox="1"/>
-          <p:nvPr/>
-        </p:nvSpPr>
-        <p:spPr>
-          <a:xfrm>
-            <a:off x="2423160" y="3280867"/>
-            <a:ext cx="868680" cy="192024"/>
-          </a:xfrm>
-          <a:prstGeom prst="rect">
-            <a:avLst/>
-          </a:prstGeom>
-          <a:noFill/>
-        </p:spPr>
-        <p:txBody>
-          <a:bodyPr wrap="square" lIns="0" rIns="0" tIns="0" bIns="0">
-            <a:spAutoFit/>
-          </a:bodyPr>
-          <a:lstStyle/>
-          <a:p>
-            <a:pPr algn="r"/>
-            <a:r>
-              <a:rPr sz="1050" b="0" i="0">
+          <p:cNvPr id="100" name="TextBox 99"/>
+          <p:cNvSpPr txBox="1"/>
+          <p:nvPr/>
+        </p:nvSpPr>
+        <p:spPr>
+          <a:xfrm>
+            <a:off x="2066543" y="3174796"/>
+            <a:ext cx="841248" cy="173736"/>
+          </a:xfrm>
+          <a:prstGeom prst="rect">
+            <a:avLst/>
+          </a:prstGeom>
+          <a:noFill/>
+        </p:spPr>
+        <p:txBody>
+          <a:bodyPr wrap="square" lIns="0" rIns="0" tIns="0" bIns="0">
+            <a:spAutoFit/>
+          </a:bodyPr>
+          <a:lstStyle/>
+          <a:p>
+            <a:pPr algn="r"/>
+            <a:r>
+              <a:rPr sz="950" b="0" i="0">
+                <a:solidFill>
+                  <a:srgbClr val="212529"/>
+                </a:solidFill>
+                <a:latin typeface="Garamond"/>
+              </a:rPr>
+              <a:t>73,591</a:t>
+            </a:r>
+          </a:p>
+        </p:txBody>
+      </p:sp>
+      <p:sp>
+        <p:nvSpPr>
+          <p:cNvPr id="101" name="TextBox 100"/>
+          <p:cNvSpPr txBox="1"/>
+          <p:nvPr/>
+        </p:nvSpPr>
+        <p:spPr>
+          <a:xfrm>
+            <a:off x="2907791" y="3174796"/>
+            <a:ext cx="786384" cy="173736"/>
+          </a:xfrm>
+          <a:prstGeom prst="rect">
+            <a:avLst/>
+          </a:prstGeom>
+          <a:noFill/>
+        </p:spPr>
+        <p:txBody>
+          <a:bodyPr wrap="square" lIns="0" rIns="0" tIns="0" bIns="0">
+            <a:spAutoFit/>
+          </a:bodyPr>
+          <a:lstStyle/>
+          <a:p>
+            <a:pPr algn="r"/>
+            <a:r>
+              <a:rPr sz="950" b="0" i="0">
                 <a:solidFill>
                   <a:srgbClr val="212529"/>
                 </a:solidFill>
@@ -10593,64 +11363,64 @@
       </p:sp>
       <p:sp>
         <p:nvSpPr>
-          <p:cNvPr id="80" name="TextBox 79"/>
-          <p:cNvSpPr txBox="1"/>
-          <p:nvPr/>
-        </p:nvSpPr>
-        <p:spPr>
-          <a:xfrm>
-            <a:off x="3291840" y="3280867"/>
-            <a:ext cx="868680" cy="192024"/>
-          </a:xfrm>
-          <a:prstGeom prst="rect">
-            <a:avLst/>
-          </a:prstGeom>
-          <a:noFill/>
-        </p:spPr>
-        <p:txBody>
-          <a:bodyPr wrap="square" lIns="0" rIns="0" tIns="0" bIns="0">
-            <a:spAutoFit/>
-          </a:bodyPr>
-          <a:lstStyle/>
-          <a:p>
-            <a:pPr algn="r"/>
-            <a:r>
-              <a:rPr sz="1050" b="0" i="0">
-                <a:solidFill>
-                  <a:srgbClr val="212529"/>
-                </a:solidFill>
-                <a:latin typeface="Garamond"/>
-              </a:rPr>
-              <a:t>73,591</a:t>
-            </a:r>
-          </a:p>
-        </p:txBody>
-      </p:sp>
-      <p:sp>
-        <p:nvSpPr>
-          <p:cNvPr id="81" name="TextBox 80"/>
-          <p:cNvSpPr txBox="1"/>
-          <p:nvPr/>
-        </p:nvSpPr>
-        <p:spPr>
-          <a:xfrm>
-            <a:off x="4471416" y="3280867"/>
-            <a:ext cx="731520" cy="192024"/>
-          </a:xfrm>
-          <a:prstGeom prst="rect">
-            <a:avLst/>
-          </a:prstGeom>
-          <a:noFill/>
-        </p:spPr>
-        <p:txBody>
-          <a:bodyPr wrap="square" lIns="0" rIns="0" tIns="0" bIns="0">
-            <a:spAutoFit/>
-          </a:bodyPr>
-          <a:lstStyle/>
-          <a:p>
-            <a:pPr algn="r"/>
-            <a:r>
-              <a:rPr sz="1050" b="0" i="0">
+          <p:cNvPr id="102" name="TextBox 101"/>
+          <p:cNvSpPr txBox="1"/>
+          <p:nvPr/>
+        </p:nvSpPr>
+        <p:spPr>
+          <a:xfrm>
+            <a:off x="3694176" y="3174796"/>
+            <a:ext cx="786384" cy="173736"/>
+          </a:xfrm>
+          <a:prstGeom prst="rect">
+            <a:avLst/>
+          </a:prstGeom>
+          <a:noFill/>
+        </p:spPr>
+        <p:txBody>
+          <a:bodyPr wrap="square" lIns="0" rIns="0" tIns="0" bIns="0">
+            <a:spAutoFit/>
+          </a:bodyPr>
+          <a:lstStyle/>
+          <a:p>
+            <a:pPr algn="r"/>
+            <a:r>
+              <a:rPr sz="950" b="0" i="0">
+                <a:solidFill>
+                  <a:srgbClr val="212529"/>
+                </a:solidFill>
+                <a:latin typeface="Garamond"/>
+              </a:rPr>
+              <a:t>102,295</a:t>
+            </a:r>
+          </a:p>
+        </p:txBody>
+      </p:sp>
+      <p:sp>
+        <p:nvSpPr>
+          <p:cNvPr id="103" name="TextBox 102"/>
+          <p:cNvSpPr txBox="1"/>
+          <p:nvPr/>
+        </p:nvSpPr>
+        <p:spPr>
+          <a:xfrm>
+            <a:off x="4700016" y="3174796"/>
+            <a:ext cx="694944" cy="173736"/>
+          </a:xfrm>
+          <a:prstGeom prst="rect">
+            <a:avLst/>
+          </a:prstGeom>
+          <a:noFill/>
+        </p:spPr>
+        <p:txBody>
+          <a:bodyPr wrap="square" lIns="0" rIns="0" tIns="0" bIns="0">
+            <a:spAutoFit/>
+          </a:bodyPr>
+          <a:lstStyle/>
+          <a:p>
+            <a:pPr algn="r"/>
+            <a:r>
+              <a:rPr sz="950" b="0" i="0">
                 <a:solidFill>
                   <a:srgbClr val="212529"/>
                 </a:solidFill>
@@ -10663,29 +11433,64 @@
       </p:sp>
       <p:sp>
         <p:nvSpPr>
-          <p:cNvPr id="82" name="TextBox 81"/>
-          <p:cNvSpPr txBox="1"/>
-          <p:nvPr/>
-        </p:nvSpPr>
-        <p:spPr>
-          <a:xfrm>
-            <a:off x="5202936" y="3280867"/>
-            <a:ext cx="868680" cy="192024"/>
-          </a:xfrm>
-          <a:prstGeom prst="rect">
-            <a:avLst/>
-          </a:prstGeom>
-          <a:noFill/>
-        </p:spPr>
-        <p:txBody>
-          <a:bodyPr wrap="square" lIns="0" rIns="0" tIns="0" bIns="0">
-            <a:spAutoFit/>
-          </a:bodyPr>
-          <a:lstStyle/>
-          <a:p>
-            <a:pPr algn="r"/>
-            <a:r>
-              <a:rPr sz="1050" b="0" i="0">
+          <p:cNvPr id="104" name="TextBox 103"/>
+          <p:cNvSpPr txBox="1"/>
+          <p:nvPr/>
+        </p:nvSpPr>
+        <p:spPr>
+          <a:xfrm>
+            <a:off x="5394959" y="3174796"/>
+            <a:ext cx="841248" cy="173736"/>
+          </a:xfrm>
+          <a:prstGeom prst="rect">
+            <a:avLst/>
+          </a:prstGeom>
+          <a:noFill/>
+        </p:spPr>
+        <p:txBody>
+          <a:bodyPr wrap="square" lIns="0" rIns="0" tIns="0" bIns="0">
+            <a:spAutoFit/>
+          </a:bodyPr>
+          <a:lstStyle/>
+          <a:p>
+            <a:pPr algn="r"/>
+            <a:r>
+              <a:rPr sz="950" b="0" i="0">
+                <a:solidFill>
+                  <a:srgbClr val="212529"/>
+                </a:solidFill>
+                <a:latin typeface="Garamond"/>
+              </a:rPr>
+              <a:t>70,510</a:t>
+            </a:r>
+          </a:p>
+        </p:txBody>
+      </p:sp>
+      <p:sp>
+        <p:nvSpPr>
+          <p:cNvPr id="105" name="TextBox 104"/>
+          <p:cNvSpPr txBox="1"/>
+          <p:nvPr/>
+        </p:nvSpPr>
+        <p:spPr>
+          <a:xfrm>
+            <a:off x="6236207" y="3174796"/>
+            <a:ext cx="786384" cy="173736"/>
+          </a:xfrm>
+          <a:prstGeom prst="rect">
+            <a:avLst/>
+          </a:prstGeom>
+          <a:noFill/>
+        </p:spPr>
+        <p:txBody>
+          <a:bodyPr wrap="square" lIns="0" rIns="0" tIns="0" bIns="0">
+            <a:spAutoFit/>
+          </a:bodyPr>
+          <a:lstStyle/>
+          <a:p>
+            <a:pPr algn="r"/>
+            <a:r>
+              <a:rPr sz="950" b="0" i="0">
                 <a:solidFill>
                   <a:srgbClr val="212529"/>
                 </a:solidFill>
@@ -10698,64 +11503,64 @@
       </p:sp>
       <p:sp>
         <p:nvSpPr>
-          <p:cNvPr id="83" name="TextBox 82"/>
-          <p:cNvSpPr txBox="1"/>
-          <p:nvPr/>
-        </p:nvSpPr>
-        <p:spPr>
-          <a:xfrm>
-            <a:off x="6071616" y="3280867"/>
-            <a:ext cx="868680" cy="192024"/>
-          </a:xfrm>
-          <a:prstGeom prst="rect">
-            <a:avLst/>
-          </a:prstGeom>
-          <a:noFill/>
-        </p:spPr>
-        <p:txBody>
-          <a:bodyPr wrap="square" lIns="0" rIns="0" tIns="0" bIns="0">
-            <a:spAutoFit/>
-          </a:bodyPr>
-          <a:lstStyle/>
-          <a:p>
-            <a:pPr algn="r"/>
-            <a:r>
-              <a:rPr sz="1050" b="0" i="0">
-                <a:solidFill>
-                  <a:srgbClr val="212529"/>
-                </a:solidFill>
-                <a:latin typeface="Garamond"/>
-              </a:rPr>
-              <a:t>70,510</a:t>
-            </a:r>
-          </a:p>
-        </p:txBody>
-      </p:sp>
-      <p:sp>
-        <p:nvSpPr>
-          <p:cNvPr id="84" name="TextBox 83"/>
-          <p:cNvSpPr txBox="1"/>
-          <p:nvPr/>
-        </p:nvSpPr>
-        <p:spPr>
-          <a:xfrm>
-            <a:off x="7251192" y="3280867"/>
-            <a:ext cx="731520" cy="192024"/>
-          </a:xfrm>
-          <a:prstGeom prst="rect">
-            <a:avLst/>
-          </a:prstGeom>
-          <a:noFill/>
-        </p:spPr>
-        <p:txBody>
-          <a:bodyPr wrap="square" lIns="0" rIns="0" tIns="0" bIns="0">
-            <a:spAutoFit/>
-          </a:bodyPr>
-          <a:lstStyle/>
-          <a:p>
-            <a:pPr algn="r"/>
-            <a:r>
-              <a:rPr sz="1050" b="0" i="0">
+          <p:cNvPr id="106" name="TextBox 105"/>
+          <p:cNvSpPr txBox="1"/>
+          <p:nvPr/>
+        </p:nvSpPr>
+        <p:spPr>
+          <a:xfrm>
+            <a:off x="7022592" y="3174796"/>
+            <a:ext cx="786384" cy="173736"/>
+          </a:xfrm>
+          <a:prstGeom prst="rect">
+            <a:avLst/>
+          </a:prstGeom>
+          <a:noFill/>
+        </p:spPr>
+        <p:txBody>
+          <a:bodyPr wrap="square" lIns="0" rIns="0" tIns="0" bIns="0">
+            <a:spAutoFit/>
+          </a:bodyPr>
+          <a:lstStyle/>
+          <a:p>
+            <a:pPr algn="r"/>
+            <a:r>
+              <a:rPr sz="950" b="0" i="0">
+                <a:solidFill>
+                  <a:srgbClr val="212529"/>
+                </a:solidFill>
+                <a:latin typeface="Garamond"/>
+              </a:rPr>
+              <a:t>99,233</a:t>
+            </a:r>
+          </a:p>
+        </p:txBody>
+      </p:sp>
+      <p:sp>
+        <p:nvSpPr>
+          <p:cNvPr id="107" name="TextBox 106"/>
+          <p:cNvSpPr txBox="1"/>
+          <p:nvPr/>
+        </p:nvSpPr>
+        <p:spPr>
+          <a:xfrm>
+            <a:off x="8028431" y="3174796"/>
+            <a:ext cx="694944" cy="173736"/>
+          </a:xfrm>
+          <a:prstGeom prst="rect">
+            <a:avLst/>
+          </a:prstGeom>
+          <a:noFill/>
+        </p:spPr>
+        <p:txBody>
+          <a:bodyPr wrap="square" lIns="0" rIns="0" tIns="0" bIns="0">
+            <a:spAutoFit/>
+          </a:bodyPr>
+          <a:lstStyle/>
+          <a:p>
+            <a:pPr algn="r"/>
+            <a:r>
+              <a:rPr sz="950" b="0" i="0">
                 <a:solidFill>
                   <a:srgbClr val="212529"/>
                 </a:solidFill>
@@ -10768,29 +11573,64 @@
       </p:sp>
       <p:sp>
         <p:nvSpPr>
-          <p:cNvPr id="85" name="TextBox 84"/>
-          <p:cNvSpPr txBox="1"/>
-          <p:nvPr/>
-        </p:nvSpPr>
-        <p:spPr>
-          <a:xfrm>
-            <a:off x="7982712" y="3280867"/>
-            <a:ext cx="868680" cy="192024"/>
-          </a:xfrm>
-          <a:prstGeom prst="rect">
-            <a:avLst/>
-          </a:prstGeom>
-          <a:noFill/>
-        </p:spPr>
-        <p:txBody>
-          <a:bodyPr wrap="square" lIns="0" rIns="0" tIns="0" bIns="0">
-            <a:spAutoFit/>
-          </a:bodyPr>
-          <a:lstStyle/>
-          <a:p>
-            <a:pPr algn="r"/>
-            <a:r>
-              <a:rPr sz="1050" b="0" i="0">
+          <p:cNvPr id="108" name="TextBox 107"/>
+          <p:cNvSpPr txBox="1"/>
+          <p:nvPr/>
+        </p:nvSpPr>
+        <p:spPr>
+          <a:xfrm>
+            <a:off x="8723376" y="3174796"/>
+            <a:ext cx="841248" cy="173736"/>
+          </a:xfrm>
+          <a:prstGeom prst="rect">
+            <a:avLst/>
+          </a:prstGeom>
+          <a:noFill/>
+        </p:spPr>
+        <p:txBody>
+          <a:bodyPr wrap="square" lIns="0" rIns="0" tIns="0" bIns="0">
+            <a:spAutoFit/>
+          </a:bodyPr>
+          <a:lstStyle/>
+          <a:p>
+            <a:pPr algn="r"/>
+            <a:r>
+              <a:rPr sz="950" b="0" i="0">
+                <a:solidFill>
+                  <a:srgbClr val="212529"/>
+                </a:solidFill>
+                <a:latin typeface="Garamond"/>
+              </a:rPr>
+              <a:t>55,485</a:t>
+            </a:r>
+          </a:p>
+        </p:txBody>
+      </p:sp>
+      <p:sp>
+        <p:nvSpPr>
+          <p:cNvPr id="109" name="TextBox 108"/>
+          <p:cNvSpPr txBox="1"/>
+          <p:nvPr/>
+        </p:nvSpPr>
+        <p:spPr>
+          <a:xfrm>
+            <a:off x="9564624" y="3174796"/>
+            <a:ext cx="786384" cy="173736"/>
+          </a:xfrm>
+          <a:prstGeom prst="rect">
+            <a:avLst/>
+          </a:prstGeom>
+          <a:noFill/>
+        </p:spPr>
+        <p:txBody>
+          <a:bodyPr wrap="square" lIns="0" rIns="0" tIns="0" bIns="0">
+            <a:spAutoFit/>
+          </a:bodyPr>
+          <a:lstStyle/>
+          <a:p>
+            <a:pPr algn="r"/>
+            <a:r>
+              <a:rPr sz="950" b="0" i="0">
                 <a:solidFill>
                   <a:srgbClr val="212529"/>
                 </a:solidFill>
@@ -10803,49 +11643,49 @@
       </p:sp>
       <p:sp>
         <p:nvSpPr>
-          <p:cNvPr id="86" name="TextBox 85"/>
-          <p:cNvSpPr txBox="1"/>
-          <p:nvPr/>
-        </p:nvSpPr>
-        <p:spPr>
-          <a:xfrm>
-            <a:off x="8851392" y="3280867"/>
-            <a:ext cx="868680" cy="192024"/>
-          </a:xfrm>
-          <a:prstGeom prst="rect">
-            <a:avLst/>
-          </a:prstGeom>
-          <a:noFill/>
-        </p:spPr>
-        <p:txBody>
-          <a:bodyPr wrap="square" lIns="0" rIns="0" tIns="0" bIns="0">
-            <a:spAutoFit/>
-          </a:bodyPr>
-          <a:lstStyle/>
-          <a:p>
-            <a:pPr algn="r"/>
-            <a:r>
-              <a:rPr sz="1050" b="0" i="0">
-                <a:solidFill>
-                  <a:srgbClr val="212529"/>
-                </a:solidFill>
-                <a:latin typeface="Garamond"/>
-              </a:rPr>
-              <a:t>55,485</a:t>
-            </a:r>
-          </a:p>
-        </p:txBody>
-      </p:sp>
-      <p:sp>
-        <p:nvSpPr>
-          <p:cNvPr id="87" name="TextBox 86"/>
-          <p:cNvSpPr txBox="1"/>
-          <p:nvPr/>
-        </p:nvSpPr>
-        <p:spPr>
-          <a:xfrm>
-            <a:off x="502920" y="3498494"/>
-            <a:ext cx="1188720" cy="192024"/>
+          <p:cNvPr id="110" name="TextBox 109"/>
+          <p:cNvSpPr txBox="1"/>
+          <p:nvPr/>
+        </p:nvSpPr>
+        <p:spPr>
+          <a:xfrm>
+            <a:off x="10351007" y="3174796"/>
+            <a:ext cx="786384" cy="173736"/>
+          </a:xfrm>
+          <a:prstGeom prst="rect">
+            <a:avLst/>
+          </a:prstGeom>
+          <a:noFill/>
+        </p:spPr>
+        <p:txBody>
+          <a:bodyPr wrap="square" lIns="0" rIns="0" tIns="0" bIns="0">
+            <a:spAutoFit/>
+          </a:bodyPr>
+          <a:lstStyle/>
+          <a:p>
+            <a:pPr algn="r"/>
+            <a:r>
+              <a:rPr sz="950" b="0" i="0">
+                <a:solidFill>
+                  <a:srgbClr val="212529"/>
+                </a:solidFill>
+                <a:latin typeface="Garamond"/>
+              </a:rPr>
+              <a:t>78,952</a:t>
+            </a:r>
+          </a:p>
+        </p:txBody>
+      </p:sp>
+      <p:sp>
+        <p:nvSpPr>
+          <p:cNvPr id="111" name="TextBox 110"/>
+          <p:cNvSpPr txBox="1"/>
+          <p:nvPr/>
+        </p:nvSpPr>
+        <p:spPr>
+          <a:xfrm>
+            <a:off x="457200" y="3386937"/>
+            <a:ext cx="914400" cy="173736"/>
           </a:xfrm>
           <a:prstGeom prst="rect">
             <a:avLst/>
@@ -10860,7 +11700,7 @@
           <a:p>
             <a:pPr algn="l"/>
             <a:r>
-              <a:rPr sz="1050" b="0" i="0">
+              <a:rPr sz="950" b="0" i="0">
                 <a:solidFill>
                   <a:srgbClr val="212529"/>
                 </a:solidFill>
@@ -10873,29 +11713,29 @@
       </p:sp>
       <p:sp>
         <p:nvSpPr>
-          <p:cNvPr id="88" name="TextBox 87"/>
-          <p:cNvSpPr txBox="1"/>
-          <p:nvPr/>
-        </p:nvSpPr>
-        <p:spPr>
-          <a:xfrm>
-            <a:off x="1691640" y="3498494"/>
-            <a:ext cx="731520" cy="192024"/>
-          </a:xfrm>
-          <a:prstGeom prst="rect">
-            <a:avLst/>
-          </a:prstGeom>
-          <a:noFill/>
-        </p:spPr>
-        <p:txBody>
-          <a:bodyPr wrap="square" lIns="0" rIns="0" tIns="0" bIns="0">
-            <a:spAutoFit/>
-          </a:bodyPr>
-          <a:lstStyle/>
-          <a:p>
-            <a:pPr algn="r"/>
-            <a:r>
-              <a:rPr sz="1050" b="0" i="0">
+          <p:cNvPr id="112" name="TextBox 111"/>
+          <p:cNvSpPr txBox="1"/>
+          <p:nvPr/>
+        </p:nvSpPr>
+        <p:spPr>
+          <a:xfrm>
+            <a:off x="1371600" y="3386937"/>
+            <a:ext cx="694944" cy="173736"/>
+          </a:xfrm>
+          <a:prstGeom prst="rect">
+            <a:avLst/>
+          </a:prstGeom>
+          <a:noFill/>
+        </p:spPr>
+        <p:txBody>
+          <a:bodyPr wrap="square" lIns="0" rIns="0" tIns="0" bIns="0">
+            <a:spAutoFit/>
+          </a:bodyPr>
+          <a:lstStyle/>
+          <a:p>
+            <a:pPr algn="r"/>
+            <a:r>
+              <a:rPr sz="950" b="0" i="0">
                 <a:solidFill>
                   <a:srgbClr val="212529"/>
                 </a:solidFill>
@@ -10908,29 +11748,64 @@
       </p:sp>
       <p:sp>
         <p:nvSpPr>
-          <p:cNvPr id="89" name="TextBox 88"/>
-          <p:cNvSpPr txBox="1"/>
-          <p:nvPr/>
-        </p:nvSpPr>
-        <p:spPr>
-          <a:xfrm>
-            <a:off x="2423160" y="3498494"/>
-            <a:ext cx="868680" cy="192024"/>
-          </a:xfrm>
-          <a:prstGeom prst="rect">
-            <a:avLst/>
-          </a:prstGeom>
-          <a:noFill/>
-        </p:spPr>
-        <p:txBody>
-          <a:bodyPr wrap="square" lIns="0" rIns="0" tIns="0" bIns="0">
-            <a:spAutoFit/>
-          </a:bodyPr>
-          <a:lstStyle/>
-          <a:p>
-            <a:pPr algn="r"/>
-            <a:r>
-              <a:rPr sz="1050" b="0" i="0">
+          <p:cNvPr id="113" name="TextBox 112"/>
+          <p:cNvSpPr txBox="1"/>
+          <p:nvPr/>
+        </p:nvSpPr>
+        <p:spPr>
+          <a:xfrm>
+            <a:off x="2066543" y="3386937"/>
+            <a:ext cx="841248" cy="173736"/>
+          </a:xfrm>
+          <a:prstGeom prst="rect">
+            <a:avLst/>
+          </a:prstGeom>
+          <a:noFill/>
+        </p:spPr>
+        <p:txBody>
+          <a:bodyPr wrap="square" lIns="0" rIns="0" tIns="0" bIns="0">
+            <a:spAutoFit/>
+          </a:bodyPr>
+          <a:lstStyle/>
+          <a:p>
+            <a:pPr algn="r"/>
+            <a:r>
+              <a:rPr sz="950" b="0" i="0">
+                <a:solidFill>
+                  <a:srgbClr val="212529"/>
+                </a:solidFill>
+                <a:latin typeface="Garamond"/>
+              </a:rPr>
+              <a:t>74,178</a:t>
+            </a:r>
+          </a:p>
+        </p:txBody>
+      </p:sp>
+      <p:sp>
+        <p:nvSpPr>
+          <p:cNvPr id="114" name="TextBox 113"/>
+          <p:cNvSpPr txBox="1"/>
+          <p:nvPr/>
+        </p:nvSpPr>
+        <p:spPr>
+          <a:xfrm>
+            <a:off x="2907791" y="3386937"/>
+            <a:ext cx="786384" cy="173736"/>
+          </a:xfrm>
+          <a:prstGeom prst="rect">
+            <a:avLst/>
+          </a:prstGeom>
+          <a:noFill/>
+        </p:spPr>
+        <p:txBody>
+          <a:bodyPr wrap="square" lIns="0" rIns="0" tIns="0" bIns="0">
+            <a:spAutoFit/>
+          </a:bodyPr>
+          <a:lstStyle/>
+          <a:p>
+            <a:pPr algn="r"/>
+            <a:r>
+              <a:rPr sz="950" b="0" i="0">
                 <a:solidFill>
                   <a:srgbClr val="212529"/>
                 </a:solidFill>
@@ -10943,64 +11818,64 @@
       </p:sp>
       <p:sp>
         <p:nvSpPr>
-          <p:cNvPr id="90" name="TextBox 89"/>
-          <p:cNvSpPr txBox="1"/>
-          <p:nvPr/>
-        </p:nvSpPr>
-        <p:spPr>
-          <a:xfrm>
-            <a:off x="3291840" y="3498494"/>
-            <a:ext cx="868680" cy="192024"/>
-          </a:xfrm>
-          <a:prstGeom prst="rect">
-            <a:avLst/>
-          </a:prstGeom>
-          <a:noFill/>
-        </p:spPr>
-        <p:txBody>
-          <a:bodyPr wrap="square" lIns="0" rIns="0" tIns="0" bIns="0">
-            <a:spAutoFit/>
-          </a:bodyPr>
-          <a:lstStyle/>
-          <a:p>
-            <a:pPr algn="r"/>
-            <a:r>
-              <a:rPr sz="1050" b="0" i="0">
-                <a:solidFill>
-                  <a:srgbClr val="212529"/>
-                </a:solidFill>
-                <a:latin typeface="Garamond"/>
-              </a:rPr>
-              <a:t>74,178</a:t>
-            </a:r>
-          </a:p>
-        </p:txBody>
-      </p:sp>
-      <p:sp>
-        <p:nvSpPr>
-          <p:cNvPr id="91" name="TextBox 90"/>
-          <p:cNvSpPr txBox="1"/>
-          <p:nvPr/>
-        </p:nvSpPr>
-        <p:spPr>
-          <a:xfrm>
-            <a:off x="4471416" y="3498494"/>
-            <a:ext cx="731520" cy="192024"/>
-          </a:xfrm>
-          <a:prstGeom prst="rect">
-            <a:avLst/>
-          </a:prstGeom>
-          <a:noFill/>
-        </p:spPr>
-        <p:txBody>
-          <a:bodyPr wrap="square" lIns="0" rIns="0" tIns="0" bIns="0">
-            <a:spAutoFit/>
-          </a:bodyPr>
-          <a:lstStyle/>
-          <a:p>
-            <a:pPr algn="r"/>
-            <a:r>
-              <a:rPr sz="1050" b="0" i="0">
+          <p:cNvPr id="115" name="TextBox 114"/>
+          <p:cNvSpPr txBox="1"/>
+          <p:nvPr/>
+        </p:nvSpPr>
+        <p:spPr>
+          <a:xfrm>
+            <a:off x="3694176" y="3386937"/>
+            <a:ext cx="786384" cy="173736"/>
+          </a:xfrm>
+          <a:prstGeom prst="rect">
+            <a:avLst/>
+          </a:prstGeom>
+          <a:noFill/>
+        </p:spPr>
+        <p:txBody>
+          <a:bodyPr wrap="square" lIns="0" rIns="0" tIns="0" bIns="0">
+            <a:spAutoFit/>
+          </a:bodyPr>
+          <a:lstStyle/>
+          <a:p>
+            <a:pPr algn="r"/>
+            <a:r>
+              <a:rPr sz="950" b="0" i="0">
+                <a:solidFill>
+                  <a:srgbClr val="212529"/>
+                </a:solidFill>
+                <a:latin typeface="Garamond"/>
+              </a:rPr>
+              <a:t>102,937</a:t>
+            </a:r>
+          </a:p>
+        </p:txBody>
+      </p:sp>
+      <p:sp>
+        <p:nvSpPr>
+          <p:cNvPr id="116" name="TextBox 115"/>
+          <p:cNvSpPr txBox="1"/>
+          <p:nvPr/>
+        </p:nvSpPr>
+        <p:spPr>
+          <a:xfrm>
+            <a:off x="4700016" y="3386937"/>
+            <a:ext cx="694944" cy="173736"/>
+          </a:xfrm>
+          <a:prstGeom prst="rect">
+            <a:avLst/>
+          </a:prstGeom>
+          <a:noFill/>
+        </p:spPr>
+        <p:txBody>
+          <a:bodyPr wrap="square" lIns="0" rIns="0" tIns="0" bIns="0">
+            <a:spAutoFit/>
+          </a:bodyPr>
+          <a:lstStyle/>
+          <a:p>
+            <a:pPr algn="r"/>
+            <a:r>
+              <a:rPr sz="950" b="0" i="0">
                 <a:solidFill>
                   <a:srgbClr val="212529"/>
                 </a:solidFill>
@@ -11013,29 +11888,64 @@
       </p:sp>
       <p:sp>
         <p:nvSpPr>
-          <p:cNvPr id="92" name="TextBox 91"/>
-          <p:cNvSpPr txBox="1"/>
-          <p:nvPr/>
-        </p:nvSpPr>
-        <p:spPr>
-          <a:xfrm>
-            <a:off x="5202936" y="3498494"/>
-            <a:ext cx="868680" cy="192024"/>
-          </a:xfrm>
-          <a:prstGeom prst="rect">
-            <a:avLst/>
-          </a:prstGeom>
-          <a:noFill/>
-        </p:spPr>
-        <p:txBody>
-          <a:bodyPr wrap="square" lIns="0" rIns="0" tIns="0" bIns="0">
-            <a:spAutoFit/>
-          </a:bodyPr>
-          <a:lstStyle/>
-          <a:p>
-            <a:pPr algn="r"/>
-            <a:r>
-              <a:rPr sz="1050" b="0" i="0">
+          <p:cNvPr id="117" name="TextBox 116"/>
+          <p:cNvSpPr txBox="1"/>
+          <p:nvPr/>
+        </p:nvSpPr>
+        <p:spPr>
+          <a:xfrm>
+            <a:off x="5394959" y="3386937"/>
+            <a:ext cx="841248" cy="173736"/>
+          </a:xfrm>
+          <a:prstGeom prst="rect">
+            <a:avLst/>
+          </a:prstGeom>
+          <a:noFill/>
+        </p:spPr>
+        <p:txBody>
+          <a:bodyPr wrap="square" lIns="0" rIns="0" tIns="0" bIns="0">
+            <a:spAutoFit/>
+          </a:bodyPr>
+          <a:lstStyle/>
+          <a:p>
+            <a:pPr algn="r"/>
+            <a:r>
+              <a:rPr sz="950" b="0" i="0">
+                <a:solidFill>
+                  <a:srgbClr val="212529"/>
+                </a:solidFill>
+                <a:latin typeface="Garamond"/>
+              </a:rPr>
+              <a:t>71,588</a:t>
+            </a:r>
+          </a:p>
+        </p:txBody>
+      </p:sp>
+      <p:sp>
+        <p:nvSpPr>
+          <p:cNvPr id="118" name="TextBox 117"/>
+          <p:cNvSpPr txBox="1"/>
+          <p:nvPr/>
+        </p:nvSpPr>
+        <p:spPr>
+          <a:xfrm>
+            <a:off x="6236207" y="3386937"/>
+            <a:ext cx="786384" cy="173736"/>
+          </a:xfrm>
+          <a:prstGeom prst="rect">
+            <a:avLst/>
+          </a:prstGeom>
+          <a:noFill/>
+        </p:spPr>
+        <p:txBody>
+          <a:bodyPr wrap="square" lIns="0" rIns="0" tIns="0" bIns="0">
+            <a:spAutoFit/>
+          </a:bodyPr>
+          <a:lstStyle/>
+          <a:p>
+            <a:pPr algn="r"/>
+            <a:r>
+              <a:rPr sz="950" b="0" i="0">
                 <a:solidFill>
                   <a:srgbClr val="212529"/>
                 </a:solidFill>
@@ -11048,64 +11958,64 @@
       </p:sp>
       <p:sp>
         <p:nvSpPr>
-          <p:cNvPr id="93" name="TextBox 92"/>
-          <p:cNvSpPr txBox="1"/>
-          <p:nvPr/>
-        </p:nvSpPr>
-        <p:spPr>
-          <a:xfrm>
-            <a:off x="6071616" y="3498494"/>
-            <a:ext cx="868680" cy="192024"/>
-          </a:xfrm>
-          <a:prstGeom prst="rect">
-            <a:avLst/>
-          </a:prstGeom>
-          <a:noFill/>
-        </p:spPr>
-        <p:txBody>
-          <a:bodyPr wrap="square" lIns="0" rIns="0" tIns="0" bIns="0">
-            <a:spAutoFit/>
-          </a:bodyPr>
-          <a:lstStyle/>
-          <a:p>
-            <a:pPr algn="r"/>
-            <a:r>
-              <a:rPr sz="1050" b="0" i="0">
-                <a:solidFill>
-                  <a:srgbClr val="212529"/>
-                </a:solidFill>
-                <a:latin typeface="Garamond"/>
-              </a:rPr>
-              <a:t>71,588</a:t>
-            </a:r>
-          </a:p>
-        </p:txBody>
-      </p:sp>
-      <p:sp>
-        <p:nvSpPr>
-          <p:cNvPr id="94" name="TextBox 93"/>
-          <p:cNvSpPr txBox="1"/>
-          <p:nvPr/>
-        </p:nvSpPr>
-        <p:spPr>
-          <a:xfrm>
-            <a:off x="7251192" y="3498494"/>
-            <a:ext cx="731520" cy="192024"/>
-          </a:xfrm>
-          <a:prstGeom prst="rect">
-            <a:avLst/>
-          </a:prstGeom>
-          <a:noFill/>
-        </p:spPr>
-        <p:txBody>
-          <a:bodyPr wrap="square" lIns="0" rIns="0" tIns="0" bIns="0">
-            <a:spAutoFit/>
-          </a:bodyPr>
-          <a:lstStyle/>
-          <a:p>
-            <a:pPr algn="r"/>
-            <a:r>
-              <a:rPr sz="1050" b="0" i="0">
+          <p:cNvPr id="119" name="TextBox 118"/>
+          <p:cNvSpPr txBox="1"/>
+          <p:nvPr/>
+        </p:nvSpPr>
+        <p:spPr>
+          <a:xfrm>
+            <a:off x="7022592" y="3386937"/>
+            <a:ext cx="786384" cy="173736"/>
+          </a:xfrm>
+          <a:prstGeom prst="rect">
+            <a:avLst/>
+          </a:prstGeom>
+          <a:noFill/>
+        </p:spPr>
+        <p:txBody>
+          <a:bodyPr wrap="square" lIns="0" rIns="0" tIns="0" bIns="0">
+            <a:spAutoFit/>
+          </a:bodyPr>
+          <a:lstStyle/>
+          <a:p>
+            <a:pPr algn="r"/>
+            <a:r>
+              <a:rPr sz="950" b="0" i="0">
+                <a:solidFill>
+                  <a:srgbClr val="212529"/>
+                </a:solidFill>
+                <a:latin typeface="Garamond"/>
+              </a:rPr>
+              <a:t>99,894</a:t>
+            </a:r>
+          </a:p>
+        </p:txBody>
+      </p:sp>
+      <p:sp>
+        <p:nvSpPr>
+          <p:cNvPr id="120" name="TextBox 119"/>
+          <p:cNvSpPr txBox="1"/>
+          <p:nvPr/>
+        </p:nvSpPr>
+        <p:spPr>
+          <a:xfrm>
+            <a:off x="8028431" y="3386937"/>
+            <a:ext cx="694944" cy="173736"/>
+          </a:xfrm>
+          <a:prstGeom prst="rect">
+            <a:avLst/>
+          </a:prstGeom>
+          <a:noFill/>
+        </p:spPr>
+        <p:txBody>
+          <a:bodyPr wrap="square" lIns="0" rIns="0" tIns="0" bIns="0">
+            <a:spAutoFit/>
+          </a:bodyPr>
+          <a:lstStyle/>
+          <a:p>
+            <a:pPr algn="r"/>
+            <a:r>
+              <a:rPr sz="950" b="0" i="0">
                 <a:solidFill>
                   <a:srgbClr val="212529"/>
                 </a:solidFill>
@@ -11118,29 +12028,64 @@
       </p:sp>
       <p:sp>
         <p:nvSpPr>
-          <p:cNvPr id="95" name="TextBox 94"/>
-          <p:cNvSpPr txBox="1"/>
-          <p:nvPr/>
-        </p:nvSpPr>
-        <p:spPr>
-          <a:xfrm>
-            <a:off x="7982712" y="3498494"/>
-            <a:ext cx="868680" cy="192024"/>
-          </a:xfrm>
-          <a:prstGeom prst="rect">
-            <a:avLst/>
-          </a:prstGeom>
-          <a:noFill/>
-        </p:spPr>
-        <p:txBody>
-          <a:bodyPr wrap="square" lIns="0" rIns="0" tIns="0" bIns="0">
-            <a:spAutoFit/>
-          </a:bodyPr>
-          <a:lstStyle/>
-          <a:p>
-            <a:pPr algn="r"/>
-            <a:r>
-              <a:rPr sz="1050" b="0" i="0">
+          <p:cNvPr id="121" name="TextBox 120"/>
+          <p:cNvSpPr txBox="1"/>
+          <p:nvPr/>
+        </p:nvSpPr>
+        <p:spPr>
+          <a:xfrm>
+            <a:off x="8723376" y="3386937"/>
+            <a:ext cx="841248" cy="173736"/>
+          </a:xfrm>
+          <a:prstGeom prst="rect">
+            <a:avLst/>
+          </a:prstGeom>
+          <a:noFill/>
+        </p:spPr>
+        <p:txBody>
+          <a:bodyPr wrap="square" lIns="0" rIns="0" tIns="0" bIns="0">
+            <a:spAutoFit/>
+          </a:bodyPr>
+          <a:lstStyle/>
+          <a:p>
+            <a:pPr algn="r"/>
+            <a:r>
+              <a:rPr sz="950" b="0" i="0">
+                <a:solidFill>
+                  <a:srgbClr val="212529"/>
+                </a:solidFill>
+                <a:latin typeface="Garamond"/>
+              </a:rPr>
+              <a:t>55,728</a:t>
+            </a:r>
+          </a:p>
+        </p:txBody>
+      </p:sp>
+      <p:sp>
+        <p:nvSpPr>
+          <p:cNvPr id="122" name="TextBox 121"/>
+          <p:cNvSpPr txBox="1"/>
+          <p:nvPr/>
+        </p:nvSpPr>
+        <p:spPr>
+          <a:xfrm>
+            <a:off x="9564624" y="3386937"/>
+            <a:ext cx="786384" cy="173736"/>
+          </a:xfrm>
+          <a:prstGeom prst="rect">
+            <a:avLst/>
+          </a:prstGeom>
+          <a:noFill/>
+        </p:spPr>
+        <p:txBody>
+          <a:bodyPr wrap="square" lIns="0" rIns="0" tIns="0" bIns="0">
+            <a:spAutoFit/>
+          </a:bodyPr>
+          <a:lstStyle/>
+          <a:p>
+            <a:pPr algn="r"/>
+            <a:r>
+              <a:rPr sz="950" b="0" i="0">
                 <a:solidFill>
                   <a:srgbClr val="212529"/>
                 </a:solidFill>
@@ -11153,49 +12098,49 @@
       </p:sp>
       <p:sp>
         <p:nvSpPr>
-          <p:cNvPr id="96" name="TextBox 95"/>
-          <p:cNvSpPr txBox="1"/>
-          <p:nvPr/>
-        </p:nvSpPr>
-        <p:spPr>
-          <a:xfrm>
-            <a:off x="8851392" y="3498494"/>
-            <a:ext cx="868680" cy="192024"/>
-          </a:xfrm>
-          <a:prstGeom prst="rect">
-            <a:avLst/>
-          </a:prstGeom>
-          <a:noFill/>
-        </p:spPr>
-        <p:txBody>
-          <a:bodyPr wrap="square" lIns="0" rIns="0" tIns="0" bIns="0">
-            <a:spAutoFit/>
-          </a:bodyPr>
-          <a:lstStyle/>
-          <a:p>
-            <a:pPr algn="r"/>
-            <a:r>
-              <a:rPr sz="1050" b="0" i="0">
-                <a:solidFill>
-                  <a:srgbClr val="212529"/>
-                </a:solidFill>
-                <a:latin typeface="Garamond"/>
-              </a:rPr>
-              <a:t>55,728</a:t>
-            </a:r>
-          </a:p>
-        </p:txBody>
-      </p:sp>
-      <p:sp>
-        <p:nvSpPr>
-          <p:cNvPr id="97" name="TextBox 96"/>
-          <p:cNvSpPr txBox="1"/>
-          <p:nvPr/>
-        </p:nvSpPr>
-        <p:spPr>
-          <a:xfrm>
-            <a:off x="502920" y="3716121"/>
-            <a:ext cx="1188720" cy="192024"/>
+          <p:cNvPr id="123" name="TextBox 122"/>
+          <p:cNvSpPr txBox="1"/>
+          <p:nvPr/>
+        </p:nvSpPr>
+        <p:spPr>
+          <a:xfrm>
+            <a:off x="10351007" y="3386937"/>
+            <a:ext cx="786384" cy="173736"/>
+          </a:xfrm>
+          <a:prstGeom prst="rect">
+            <a:avLst/>
+          </a:prstGeom>
+          <a:noFill/>
+        </p:spPr>
+        <p:txBody>
+          <a:bodyPr wrap="square" lIns="0" rIns="0" tIns="0" bIns="0">
+            <a:spAutoFit/>
+          </a:bodyPr>
+          <a:lstStyle/>
+          <a:p>
+            <a:pPr algn="r"/>
+            <a:r>
+              <a:rPr sz="950" b="0" i="0">
+                <a:solidFill>
+                  <a:srgbClr val="212529"/>
+                </a:solidFill>
+                <a:latin typeface="Garamond"/>
+              </a:rPr>
+              <a:t>79,714</a:t>
+            </a:r>
+          </a:p>
+        </p:txBody>
+      </p:sp>
+      <p:sp>
+        <p:nvSpPr>
+          <p:cNvPr id="124" name="TextBox 123"/>
+          <p:cNvSpPr txBox="1"/>
+          <p:nvPr/>
+        </p:nvSpPr>
+        <p:spPr>
+          <a:xfrm>
+            <a:off x="457200" y="3599078"/>
+            <a:ext cx="914400" cy="173736"/>
           </a:xfrm>
           <a:prstGeom prst="rect">
             <a:avLst/>
@@ -11210,7 +12155,7 @@
           <a:p>
             <a:pPr algn="l"/>
             <a:r>
-              <a:rPr sz="1050" b="0" i="0">
+              <a:rPr sz="950" b="0" i="0">
                 <a:solidFill>
                   <a:srgbClr val="212529"/>
                 </a:solidFill>
@@ -11223,29 +12168,29 @@
       </p:sp>
       <p:sp>
         <p:nvSpPr>
-          <p:cNvPr id="98" name="TextBox 97"/>
-          <p:cNvSpPr txBox="1"/>
-          <p:nvPr/>
-        </p:nvSpPr>
-        <p:spPr>
-          <a:xfrm>
-            <a:off x="1691640" y="3716121"/>
-            <a:ext cx="731520" cy="192024"/>
-          </a:xfrm>
-          <a:prstGeom prst="rect">
-            <a:avLst/>
-          </a:prstGeom>
-          <a:noFill/>
-        </p:spPr>
-        <p:txBody>
-          <a:bodyPr wrap="square" lIns="0" rIns="0" tIns="0" bIns="0">
-            <a:spAutoFit/>
-          </a:bodyPr>
-          <a:lstStyle/>
-          <a:p>
-            <a:pPr algn="r"/>
-            <a:r>
-              <a:rPr sz="1050" b="0" i="0">
+          <p:cNvPr id="125" name="TextBox 124"/>
+          <p:cNvSpPr txBox="1"/>
+          <p:nvPr/>
+        </p:nvSpPr>
+        <p:spPr>
+          <a:xfrm>
+            <a:off x="1371600" y="3599078"/>
+            <a:ext cx="694944" cy="173736"/>
+          </a:xfrm>
+          <a:prstGeom prst="rect">
+            <a:avLst/>
+          </a:prstGeom>
+          <a:noFill/>
+        </p:spPr>
+        <p:txBody>
+          <a:bodyPr wrap="square" lIns="0" rIns="0" tIns="0" bIns="0">
+            <a:spAutoFit/>
+          </a:bodyPr>
+          <a:lstStyle/>
+          <a:p>
+            <a:pPr algn="r"/>
+            <a:r>
+              <a:rPr sz="950" b="0" i="0">
                 <a:solidFill>
                   <a:srgbClr val="212529"/>
                 </a:solidFill>
@@ -11258,29 +12203,64 @@
       </p:sp>
       <p:sp>
         <p:nvSpPr>
-          <p:cNvPr id="99" name="TextBox 98"/>
-          <p:cNvSpPr txBox="1"/>
-          <p:nvPr/>
-        </p:nvSpPr>
-        <p:spPr>
-          <a:xfrm>
-            <a:off x="2423160" y="3716121"/>
-            <a:ext cx="868680" cy="192024"/>
-          </a:xfrm>
-          <a:prstGeom prst="rect">
-            <a:avLst/>
-          </a:prstGeom>
-          <a:noFill/>
-        </p:spPr>
-        <p:txBody>
-          <a:bodyPr wrap="square" lIns="0" rIns="0" tIns="0" bIns="0">
-            <a:spAutoFit/>
-          </a:bodyPr>
-          <a:lstStyle/>
-          <a:p>
-            <a:pPr algn="r"/>
-            <a:r>
-              <a:rPr sz="1050" b="0" i="0">
+          <p:cNvPr id="126" name="TextBox 125"/>
+          <p:cNvSpPr txBox="1"/>
+          <p:nvPr/>
+        </p:nvSpPr>
+        <p:spPr>
+          <a:xfrm>
+            <a:off x="2066543" y="3599078"/>
+            <a:ext cx="841248" cy="173736"/>
+          </a:xfrm>
+          <a:prstGeom prst="rect">
+            <a:avLst/>
+          </a:prstGeom>
+          <a:noFill/>
+        </p:spPr>
+        <p:txBody>
+          <a:bodyPr wrap="square" lIns="0" rIns="0" tIns="0" bIns="0">
+            <a:spAutoFit/>
+          </a:bodyPr>
+          <a:lstStyle/>
+          <a:p>
+            <a:pPr algn="r"/>
+            <a:r>
+              <a:rPr sz="950" b="0" i="0">
+                <a:solidFill>
+                  <a:srgbClr val="212529"/>
+                </a:solidFill>
+                <a:latin typeface="Garamond"/>
+              </a:rPr>
+              <a:t>73,730</a:t>
+            </a:r>
+          </a:p>
+        </p:txBody>
+      </p:sp>
+      <p:sp>
+        <p:nvSpPr>
+          <p:cNvPr id="127" name="TextBox 126"/>
+          <p:cNvSpPr txBox="1"/>
+          <p:nvPr/>
+        </p:nvSpPr>
+        <p:spPr>
+          <a:xfrm>
+            <a:off x="2907791" y="3599078"/>
+            <a:ext cx="786384" cy="173736"/>
+          </a:xfrm>
+          <a:prstGeom prst="rect">
+            <a:avLst/>
+          </a:prstGeom>
+          <a:noFill/>
+        </p:spPr>
+        <p:txBody>
+          <a:bodyPr wrap="square" lIns="0" rIns="0" tIns="0" bIns="0">
+            <a:spAutoFit/>
+          </a:bodyPr>
+          <a:lstStyle/>
+          <a:p>
+            <a:pPr algn="r"/>
+            <a:r>
+              <a:rPr sz="950" b="0" i="0">
                 <a:solidFill>
                   <a:srgbClr val="212529"/>
                 </a:solidFill>
@@ -11293,64 +12273,64 @@
       </p:sp>
       <p:sp>
         <p:nvSpPr>
-          <p:cNvPr id="100" name="TextBox 99"/>
-          <p:cNvSpPr txBox="1"/>
-          <p:nvPr/>
-        </p:nvSpPr>
-        <p:spPr>
-          <a:xfrm>
-            <a:off x="3291840" y="3716121"/>
-            <a:ext cx="868680" cy="192024"/>
-          </a:xfrm>
-          <a:prstGeom prst="rect">
-            <a:avLst/>
-          </a:prstGeom>
-          <a:noFill/>
-        </p:spPr>
-        <p:txBody>
-          <a:bodyPr wrap="square" lIns="0" rIns="0" tIns="0" bIns="0">
-            <a:spAutoFit/>
-          </a:bodyPr>
-          <a:lstStyle/>
-          <a:p>
-            <a:pPr algn="r"/>
-            <a:r>
-              <a:rPr sz="1050" b="0" i="0">
-                <a:solidFill>
-                  <a:srgbClr val="212529"/>
-                </a:solidFill>
-                <a:latin typeface="Garamond"/>
-              </a:rPr>
-              <a:t>73,730</a:t>
-            </a:r>
-          </a:p>
-        </p:txBody>
-      </p:sp>
-      <p:sp>
-        <p:nvSpPr>
-          <p:cNvPr id="101" name="TextBox 100"/>
-          <p:cNvSpPr txBox="1"/>
-          <p:nvPr/>
-        </p:nvSpPr>
-        <p:spPr>
-          <a:xfrm>
-            <a:off x="4471416" y="3716121"/>
-            <a:ext cx="731520" cy="192024"/>
-          </a:xfrm>
-          <a:prstGeom prst="rect">
-            <a:avLst/>
-          </a:prstGeom>
-          <a:noFill/>
-        </p:spPr>
-        <p:txBody>
-          <a:bodyPr wrap="square" lIns="0" rIns="0" tIns="0" bIns="0">
-            <a:spAutoFit/>
-          </a:bodyPr>
-          <a:lstStyle/>
-          <a:p>
-            <a:pPr algn="r"/>
-            <a:r>
-              <a:rPr sz="1050" b="0" i="0">
+          <p:cNvPr id="128" name="TextBox 127"/>
+          <p:cNvSpPr txBox="1"/>
+          <p:nvPr/>
+        </p:nvSpPr>
+        <p:spPr>
+          <a:xfrm>
+            <a:off x="3694176" y="3599078"/>
+            <a:ext cx="786384" cy="173736"/>
+          </a:xfrm>
+          <a:prstGeom prst="rect">
+            <a:avLst/>
+          </a:prstGeom>
+          <a:noFill/>
+        </p:spPr>
+        <p:txBody>
+          <a:bodyPr wrap="square" lIns="0" rIns="0" tIns="0" bIns="0">
+            <a:spAutoFit/>
+          </a:bodyPr>
+          <a:lstStyle/>
+          <a:p>
+            <a:pPr algn="r"/>
+            <a:r>
+              <a:rPr sz="950" b="0" i="0">
+                <a:solidFill>
+                  <a:srgbClr val="212529"/>
+                </a:solidFill>
+                <a:latin typeface="Garamond"/>
+              </a:rPr>
+              <a:t>102,209</a:t>
+            </a:r>
+          </a:p>
+        </p:txBody>
+      </p:sp>
+      <p:sp>
+        <p:nvSpPr>
+          <p:cNvPr id="129" name="TextBox 128"/>
+          <p:cNvSpPr txBox="1"/>
+          <p:nvPr/>
+        </p:nvSpPr>
+        <p:spPr>
+          <a:xfrm>
+            <a:off x="4700016" y="3599078"/>
+            <a:ext cx="694944" cy="173736"/>
+          </a:xfrm>
+          <a:prstGeom prst="rect">
+            <a:avLst/>
+          </a:prstGeom>
+          <a:noFill/>
+        </p:spPr>
+        <p:txBody>
+          <a:bodyPr wrap="square" lIns="0" rIns="0" tIns="0" bIns="0">
+            <a:spAutoFit/>
+          </a:bodyPr>
+          <a:lstStyle/>
+          <a:p>
+            <a:pPr algn="r"/>
+            <a:r>
+              <a:rPr sz="950" b="0" i="0">
                 <a:solidFill>
                   <a:srgbClr val="212529"/>
                 </a:solidFill>
@@ -11363,29 +12343,64 @@
       </p:sp>
       <p:sp>
         <p:nvSpPr>
-          <p:cNvPr id="102" name="TextBox 101"/>
-          <p:cNvSpPr txBox="1"/>
-          <p:nvPr/>
-        </p:nvSpPr>
-        <p:spPr>
-          <a:xfrm>
-            <a:off x="5202936" y="3716121"/>
-            <a:ext cx="868680" cy="192024"/>
-          </a:xfrm>
-          <a:prstGeom prst="rect">
-            <a:avLst/>
-          </a:prstGeom>
-          <a:noFill/>
-        </p:spPr>
-        <p:txBody>
-          <a:bodyPr wrap="square" lIns="0" rIns="0" tIns="0" bIns="0">
-            <a:spAutoFit/>
-          </a:bodyPr>
-          <a:lstStyle/>
-          <a:p>
-            <a:pPr algn="r"/>
-            <a:r>
-              <a:rPr sz="1050" b="0" i="0">
+          <p:cNvPr id="130" name="TextBox 129"/>
+          <p:cNvSpPr txBox="1"/>
+          <p:nvPr/>
+        </p:nvSpPr>
+        <p:spPr>
+          <a:xfrm>
+            <a:off x="5394959" y="3599078"/>
+            <a:ext cx="841248" cy="173736"/>
+          </a:xfrm>
+          <a:prstGeom prst="rect">
+            <a:avLst/>
+          </a:prstGeom>
+          <a:noFill/>
+        </p:spPr>
+        <p:txBody>
+          <a:bodyPr wrap="square" lIns="0" rIns="0" tIns="0" bIns="0">
+            <a:spAutoFit/>
+          </a:bodyPr>
+          <a:lstStyle/>
+          <a:p>
+            <a:pPr algn="r"/>
+            <a:r>
+              <a:rPr sz="950" b="0" i="0">
+                <a:solidFill>
+                  <a:srgbClr val="212529"/>
+                </a:solidFill>
+                <a:latin typeface="Garamond"/>
+              </a:rPr>
+              <a:t>71,694</a:t>
+            </a:r>
+          </a:p>
+        </p:txBody>
+      </p:sp>
+      <p:sp>
+        <p:nvSpPr>
+          <p:cNvPr id="131" name="TextBox 130"/>
+          <p:cNvSpPr txBox="1"/>
+          <p:nvPr/>
+        </p:nvSpPr>
+        <p:spPr>
+          <a:xfrm>
+            <a:off x="6236207" y="3599078"/>
+            <a:ext cx="786384" cy="173736"/>
+          </a:xfrm>
+          <a:prstGeom prst="rect">
+            <a:avLst/>
+          </a:prstGeom>
+          <a:noFill/>
+        </p:spPr>
+        <p:txBody>
+          <a:bodyPr wrap="square" lIns="0" rIns="0" tIns="0" bIns="0">
+            <a:spAutoFit/>
+          </a:bodyPr>
+          <a:lstStyle/>
+          <a:p>
+            <a:pPr algn="r"/>
+            <a:r>
+              <a:rPr sz="950" b="0" i="0">
                 <a:solidFill>
                   <a:srgbClr val="212529"/>
                 </a:solidFill>
@@ -11398,64 +12413,64 @@
       </p:sp>
       <p:sp>
         <p:nvSpPr>
-          <p:cNvPr id="103" name="TextBox 102"/>
-          <p:cNvSpPr txBox="1"/>
-          <p:nvPr/>
-        </p:nvSpPr>
-        <p:spPr>
-          <a:xfrm>
-            <a:off x="6071616" y="3716121"/>
-            <a:ext cx="868680" cy="192024"/>
-          </a:xfrm>
-          <a:prstGeom prst="rect">
-            <a:avLst/>
-          </a:prstGeom>
-          <a:noFill/>
-        </p:spPr>
-        <p:txBody>
-          <a:bodyPr wrap="square" lIns="0" rIns="0" tIns="0" bIns="0">
-            <a:spAutoFit/>
-          </a:bodyPr>
-          <a:lstStyle/>
-          <a:p>
-            <a:pPr algn="r"/>
-            <a:r>
-              <a:rPr sz="1050" b="0" i="0">
-                <a:solidFill>
-                  <a:srgbClr val="212529"/>
-                </a:solidFill>
-                <a:latin typeface="Garamond"/>
-              </a:rPr>
-              <a:t>71,694</a:t>
-            </a:r>
-          </a:p>
-        </p:txBody>
-      </p:sp>
-      <p:sp>
-        <p:nvSpPr>
-          <p:cNvPr id="104" name="TextBox 103"/>
-          <p:cNvSpPr txBox="1"/>
-          <p:nvPr/>
-        </p:nvSpPr>
-        <p:spPr>
-          <a:xfrm>
-            <a:off x="7251192" y="3716121"/>
-            <a:ext cx="731520" cy="192024"/>
-          </a:xfrm>
-          <a:prstGeom prst="rect">
-            <a:avLst/>
-          </a:prstGeom>
-          <a:noFill/>
-        </p:spPr>
-        <p:txBody>
-          <a:bodyPr wrap="square" lIns="0" rIns="0" tIns="0" bIns="0">
-            <a:spAutoFit/>
-          </a:bodyPr>
-          <a:lstStyle/>
-          <a:p>
-            <a:pPr algn="r"/>
-            <a:r>
-              <a:rPr sz="1050" b="0" i="0">
+          <p:cNvPr id="132" name="TextBox 131"/>
+          <p:cNvSpPr txBox="1"/>
+          <p:nvPr/>
+        </p:nvSpPr>
+        <p:spPr>
+          <a:xfrm>
+            <a:off x="7022592" y="3599078"/>
+            <a:ext cx="786384" cy="173736"/>
+          </a:xfrm>
+          <a:prstGeom prst="rect">
+            <a:avLst/>
+          </a:prstGeom>
+          <a:noFill/>
+        </p:spPr>
+        <p:txBody>
+          <a:bodyPr wrap="square" lIns="0" rIns="0" tIns="0" bIns="0">
+            <a:spAutoFit/>
+          </a:bodyPr>
+          <a:lstStyle/>
+          <a:p>
+            <a:pPr algn="r"/>
+            <a:r>
+              <a:rPr sz="950" b="0" i="0">
+                <a:solidFill>
+                  <a:srgbClr val="212529"/>
+                </a:solidFill>
+                <a:latin typeface="Garamond"/>
+              </a:rPr>
+              <a:t>99,807</a:t>
+            </a:r>
+          </a:p>
+        </p:txBody>
+      </p:sp>
+      <p:sp>
+        <p:nvSpPr>
+          <p:cNvPr id="133" name="TextBox 132"/>
+          <p:cNvSpPr txBox="1"/>
+          <p:nvPr/>
+        </p:nvSpPr>
+        <p:spPr>
+          <a:xfrm>
+            <a:off x="8028431" y="3599078"/>
+            <a:ext cx="694944" cy="173736"/>
+          </a:xfrm>
+          <a:prstGeom prst="rect">
+            <a:avLst/>
+          </a:prstGeom>
+          <a:noFill/>
+        </p:spPr>
+        <p:txBody>
+          <a:bodyPr wrap="square" lIns="0" rIns="0" tIns="0" bIns="0">
+            <a:spAutoFit/>
+          </a:bodyPr>
+          <a:lstStyle/>
+          <a:p>
+            <a:pPr algn="r"/>
+            <a:r>
+              <a:rPr sz="950" b="0" i="0">
                 <a:solidFill>
                   <a:srgbClr val="212529"/>
                 </a:solidFill>
@@ -11468,29 +12483,64 @@
       </p:sp>
       <p:sp>
         <p:nvSpPr>
-          <p:cNvPr id="105" name="TextBox 104"/>
-          <p:cNvSpPr txBox="1"/>
-          <p:nvPr/>
-        </p:nvSpPr>
-        <p:spPr>
-          <a:xfrm>
-            <a:off x="7982712" y="3716121"/>
-            <a:ext cx="868680" cy="192024"/>
-          </a:xfrm>
-          <a:prstGeom prst="rect">
-            <a:avLst/>
-          </a:prstGeom>
-          <a:noFill/>
-        </p:spPr>
-        <p:txBody>
-          <a:bodyPr wrap="square" lIns="0" rIns="0" tIns="0" bIns="0">
-            <a:spAutoFit/>
-          </a:bodyPr>
-          <a:lstStyle/>
-          <a:p>
-            <a:pPr algn="r"/>
-            <a:r>
-              <a:rPr sz="1050" b="0" i="0">
+          <p:cNvPr id="134" name="TextBox 133"/>
+          <p:cNvSpPr txBox="1"/>
+          <p:nvPr/>
+        </p:nvSpPr>
+        <p:spPr>
+          <a:xfrm>
+            <a:off x="8723376" y="3599078"/>
+            <a:ext cx="841248" cy="173736"/>
+          </a:xfrm>
+          <a:prstGeom prst="rect">
+            <a:avLst/>
+          </a:prstGeom>
+          <a:noFill/>
+        </p:spPr>
+        <p:txBody>
+          <a:bodyPr wrap="square" lIns="0" rIns="0" tIns="0" bIns="0">
+            <a:spAutoFit/>
+          </a:bodyPr>
+          <a:lstStyle/>
+          <a:p>
+            <a:pPr algn="r"/>
+            <a:r>
+              <a:rPr sz="950" b="0" i="0">
+                <a:solidFill>
+                  <a:srgbClr val="212529"/>
+                </a:solidFill>
+                <a:latin typeface="Garamond"/>
+              </a:rPr>
+              <a:t>56,093</a:t>
+            </a:r>
+          </a:p>
+        </p:txBody>
+      </p:sp>
+      <p:sp>
+        <p:nvSpPr>
+          <p:cNvPr id="135" name="TextBox 134"/>
+          <p:cNvSpPr txBox="1"/>
+          <p:nvPr/>
+        </p:nvSpPr>
+        <p:spPr>
+          <a:xfrm>
+            <a:off x="9564624" y="3599078"/>
+            <a:ext cx="786384" cy="173736"/>
+          </a:xfrm>
+          <a:prstGeom prst="rect">
+            <a:avLst/>
+          </a:prstGeom>
+          <a:noFill/>
+        </p:spPr>
+        <p:txBody>
+          <a:bodyPr wrap="square" lIns="0" rIns="0" tIns="0" bIns="0">
+            <a:spAutoFit/>
+          </a:bodyPr>
+          <a:lstStyle/>
+          <a:p>
+            <a:pPr algn="r"/>
+            <a:r>
+              <a:rPr sz="950" b="0" i="0">
                 <a:solidFill>
                   <a:srgbClr val="212529"/>
                 </a:solidFill>
@@ -11503,49 +12553,49 @@
       </p:sp>
       <p:sp>
         <p:nvSpPr>
-          <p:cNvPr id="106" name="TextBox 105"/>
-          <p:cNvSpPr txBox="1"/>
-          <p:nvPr/>
-        </p:nvSpPr>
-        <p:spPr>
-          <a:xfrm>
-            <a:off x="8851392" y="3716121"/>
-            <a:ext cx="868680" cy="192024"/>
-          </a:xfrm>
-          <a:prstGeom prst="rect">
-            <a:avLst/>
-          </a:prstGeom>
-          <a:noFill/>
-        </p:spPr>
-        <p:txBody>
-          <a:bodyPr wrap="square" lIns="0" rIns="0" tIns="0" bIns="0">
-            <a:spAutoFit/>
-          </a:bodyPr>
-          <a:lstStyle/>
-          <a:p>
-            <a:pPr algn="r"/>
-            <a:r>
-              <a:rPr sz="1050" b="0" i="0">
-                <a:solidFill>
-                  <a:srgbClr val="212529"/>
-                </a:solidFill>
-                <a:latin typeface="Garamond"/>
-              </a:rPr>
-              <a:t>56,093</a:t>
-            </a:r>
-          </a:p>
-        </p:txBody>
-      </p:sp>
-      <p:sp>
-        <p:nvSpPr>
-          <p:cNvPr id="107" name="TextBox 106"/>
-          <p:cNvSpPr txBox="1"/>
-          <p:nvPr/>
-        </p:nvSpPr>
-        <p:spPr>
-          <a:xfrm>
-            <a:off x="502920" y="3933748"/>
-            <a:ext cx="1188720" cy="192024"/>
+          <p:cNvPr id="136" name="TextBox 135"/>
+          <p:cNvSpPr txBox="1"/>
+          <p:nvPr/>
+        </p:nvSpPr>
+        <p:spPr>
+          <a:xfrm>
+            <a:off x="10351007" y="3599078"/>
+            <a:ext cx="786384" cy="173736"/>
+          </a:xfrm>
+          <a:prstGeom prst="rect">
+            <a:avLst/>
+          </a:prstGeom>
+          <a:noFill/>
+        </p:spPr>
+        <p:txBody>
+          <a:bodyPr wrap="square" lIns="0" rIns="0" tIns="0" bIns="0">
+            <a:spAutoFit/>
+          </a:bodyPr>
+          <a:lstStyle/>
+          <a:p>
+            <a:pPr algn="r"/>
+            <a:r>
+              <a:rPr sz="950" b="0" i="0">
+                <a:solidFill>
+                  <a:srgbClr val="212529"/>
+                </a:solidFill>
+                <a:latin typeface="Garamond"/>
+              </a:rPr>
+              <a:t>79,087</a:t>
+            </a:r>
+          </a:p>
+        </p:txBody>
+      </p:sp>
+      <p:sp>
+        <p:nvSpPr>
+          <p:cNvPr id="137" name="TextBox 136"/>
+          <p:cNvSpPr txBox="1"/>
+          <p:nvPr/>
+        </p:nvSpPr>
+        <p:spPr>
+          <a:xfrm>
+            <a:off x="457200" y="3811219"/>
+            <a:ext cx="914400" cy="173736"/>
           </a:xfrm>
           <a:prstGeom prst="rect">
             <a:avLst/>
@@ -11560,7 +12610,7 @@
           <a:p>
             <a:pPr algn="l"/>
             <a:r>
-              <a:rPr sz="1050" b="0" i="0">
+              <a:rPr sz="950" b="0" i="0">
                 <a:solidFill>
                   <a:srgbClr val="212529"/>
                 </a:solidFill>
@@ -11573,29 +12623,29 @@
       </p:sp>
       <p:sp>
         <p:nvSpPr>
-          <p:cNvPr id="108" name="TextBox 107"/>
-          <p:cNvSpPr txBox="1"/>
-          <p:nvPr/>
-        </p:nvSpPr>
-        <p:spPr>
-          <a:xfrm>
-            <a:off x="1691640" y="3933748"/>
-            <a:ext cx="731520" cy="192024"/>
-          </a:xfrm>
-          <a:prstGeom prst="rect">
-            <a:avLst/>
-          </a:prstGeom>
-          <a:noFill/>
-        </p:spPr>
-        <p:txBody>
-          <a:bodyPr wrap="square" lIns="0" rIns="0" tIns="0" bIns="0">
-            <a:spAutoFit/>
-          </a:bodyPr>
-          <a:lstStyle/>
-          <a:p>
-            <a:pPr algn="r"/>
-            <a:r>
-              <a:rPr sz="1050" b="0" i="0">
+          <p:cNvPr id="138" name="TextBox 137"/>
+          <p:cNvSpPr txBox="1"/>
+          <p:nvPr/>
+        </p:nvSpPr>
+        <p:spPr>
+          <a:xfrm>
+            <a:off x="1371600" y="3811219"/>
+            <a:ext cx="694944" cy="173736"/>
+          </a:xfrm>
+          <a:prstGeom prst="rect">
+            <a:avLst/>
+          </a:prstGeom>
+          <a:noFill/>
+        </p:spPr>
+        <p:txBody>
+          <a:bodyPr wrap="square" lIns="0" rIns="0" tIns="0" bIns="0">
+            <a:spAutoFit/>
+          </a:bodyPr>
+          <a:lstStyle/>
+          <a:p>
+            <a:pPr algn="r"/>
+            <a:r>
+              <a:rPr sz="950" b="0" i="0">
                 <a:solidFill>
                   <a:srgbClr val="212529"/>
                 </a:solidFill>
@@ -11608,29 +12658,64 @@
       </p:sp>
       <p:sp>
         <p:nvSpPr>
-          <p:cNvPr id="109" name="TextBox 108"/>
-          <p:cNvSpPr txBox="1"/>
-          <p:nvPr/>
-        </p:nvSpPr>
-        <p:spPr>
-          <a:xfrm>
-            <a:off x="2423160" y="3933748"/>
-            <a:ext cx="868680" cy="192024"/>
-          </a:xfrm>
-          <a:prstGeom prst="rect">
-            <a:avLst/>
-          </a:prstGeom>
-          <a:noFill/>
-        </p:spPr>
-        <p:txBody>
-          <a:bodyPr wrap="square" lIns="0" rIns="0" tIns="0" bIns="0">
-            <a:spAutoFit/>
-          </a:bodyPr>
-          <a:lstStyle/>
-          <a:p>
-            <a:pPr algn="r"/>
-            <a:r>
-              <a:rPr sz="1050" b="0" i="0">
+          <p:cNvPr id="139" name="TextBox 138"/>
+          <p:cNvSpPr txBox="1"/>
+          <p:nvPr/>
+        </p:nvSpPr>
+        <p:spPr>
+          <a:xfrm>
+            <a:off x="2066543" y="3811219"/>
+            <a:ext cx="841248" cy="173736"/>
+          </a:xfrm>
+          <a:prstGeom prst="rect">
+            <a:avLst/>
+          </a:prstGeom>
+          <a:noFill/>
+        </p:spPr>
+        <p:txBody>
+          <a:bodyPr wrap="square" lIns="0" rIns="0" tIns="0" bIns="0">
+            <a:spAutoFit/>
+          </a:bodyPr>
+          <a:lstStyle/>
+          <a:p>
+            <a:pPr algn="r"/>
+            <a:r>
+              <a:rPr sz="950" b="0" i="0">
+                <a:solidFill>
+                  <a:srgbClr val="212529"/>
+                </a:solidFill>
+                <a:latin typeface="Garamond"/>
+              </a:rPr>
+              <a:t>84,310</a:t>
+            </a:r>
+          </a:p>
+        </p:txBody>
+      </p:sp>
+      <p:sp>
+        <p:nvSpPr>
+          <p:cNvPr id="140" name="TextBox 139"/>
+          <p:cNvSpPr txBox="1"/>
+          <p:nvPr/>
+        </p:nvSpPr>
+        <p:spPr>
+          <a:xfrm>
+            <a:off x="2907791" y="3811219"/>
+            <a:ext cx="786384" cy="173736"/>
+          </a:xfrm>
+          <a:prstGeom prst="rect">
+            <a:avLst/>
+          </a:prstGeom>
+          <a:noFill/>
+        </p:spPr>
+        <p:txBody>
+          <a:bodyPr wrap="square" lIns="0" rIns="0" tIns="0" bIns="0">
+            <a:spAutoFit/>
+          </a:bodyPr>
+          <a:lstStyle/>
+          <a:p>
+            <a:pPr algn="r"/>
+            <a:r>
+              <a:rPr sz="950" b="0" i="0">
                 <a:solidFill>
                   <a:srgbClr val="212529"/>
                 </a:solidFill>
@@ -11643,64 +12728,64 @@
       </p:sp>
       <p:sp>
         <p:nvSpPr>
-          <p:cNvPr id="110" name="TextBox 109"/>
-          <p:cNvSpPr txBox="1"/>
-          <p:nvPr/>
-        </p:nvSpPr>
-        <p:spPr>
-          <a:xfrm>
-            <a:off x="3291840" y="3933748"/>
-            <a:ext cx="868680" cy="192024"/>
-          </a:xfrm>
-          <a:prstGeom prst="rect">
-            <a:avLst/>
-          </a:prstGeom>
-          <a:noFill/>
-        </p:spPr>
-        <p:txBody>
-          <a:bodyPr wrap="square" lIns="0" rIns="0" tIns="0" bIns="0">
-            <a:spAutoFit/>
-          </a:bodyPr>
-          <a:lstStyle/>
-          <a:p>
-            <a:pPr algn="r"/>
-            <a:r>
-              <a:rPr sz="1050" b="0" i="0">
-                <a:solidFill>
-                  <a:srgbClr val="212529"/>
-                </a:solidFill>
-                <a:latin typeface="Garamond"/>
-              </a:rPr>
-              <a:t>84,310</a:t>
-            </a:r>
-          </a:p>
-        </p:txBody>
-      </p:sp>
-      <p:sp>
-        <p:nvSpPr>
-          <p:cNvPr id="111" name="TextBox 110"/>
-          <p:cNvSpPr txBox="1"/>
-          <p:nvPr/>
-        </p:nvSpPr>
-        <p:spPr>
-          <a:xfrm>
-            <a:off x="4471416" y="3933748"/>
-            <a:ext cx="731520" cy="192024"/>
-          </a:xfrm>
-          <a:prstGeom prst="rect">
-            <a:avLst/>
-          </a:prstGeom>
-          <a:noFill/>
-        </p:spPr>
-        <p:txBody>
-          <a:bodyPr wrap="square" lIns="0" rIns="0" tIns="0" bIns="0">
-            <a:spAutoFit/>
-          </a:bodyPr>
-          <a:lstStyle/>
-          <a:p>
-            <a:pPr algn="r"/>
-            <a:r>
-              <a:rPr sz="1050" b="0" i="0">
+          <p:cNvPr id="141" name="TextBox 140"/>
+          <p:cNvSpPr txBox="1"/>
+          <p:nvPr/>
+        </p:nvSpPr>
+        <p:spPr>
+          <a:xfrm>
+            <a:off x="3694176" y="3811219"/>
+            <a:ext cx="786384" cy="173736"/>
+          </a:xfrm>
+          <a:prstGeom prst="rect">
+            <a:avLst/>
+          </a:prstGeom>
+          <a:noFill/>
+        </p:spPr>
+        <p:txBody>
+          <a:bodyPr wrap="square" lIns="0" rIns="0" tIns="0" bIns="0">
+            <a:spAutoFit/>
+          </a:bodyPr>
+          <a:lstStyle/>
+          <a:p>
+            <a:pPr algn="r"/>
+            <a:r>
+              <a:rPr sz="950" b="0" i="0">
+                <a:solidFill>
+                  <a:srgbClr val="212529"/>
+                </a:solidFill>
+                <a:latin typeface="Garamond"/>
+              </a:rPr>
+              <a:t>102,181</a:t>
+            </a:r>
+          </a:p>
+        </p:txBody>
+      </p:sp>
+      <p:sp>
+        <p:nvSpPr>
+          <p:cNvPr id="142" name="TextBox 141"/>
+          <p:cNvSpPr txBox="1"/>
+          <p:nvPr/>
+        </p:nvSpPr>
+        <p:spPr>
+          <a:xfrm>
+            <a:off x="4700016" y="3811219"/>
+            <a:ext cx="694944" cy="173736"/>
+          </a:xfrm>
+          <a:prstGeom prst="rect">
+            <a:avLst/>
+          </a:prstGeom>
+          <a:noFill/>
+        </p:spPr>
+        <p:txBody>
+          <a:bodyPr wrap="square" lIns="0" rIns="0" tIns="0" bIns="0">
+            <a:spAutoFit/>
+          </a:bodyPr>
+          <a:lstStyle/>
+          <a:p>
+            <a:pPr algn="r"/>
+            <a:r>
+              <a:rPr sz="950" b="0" i="0">
                 <a:solidFill>
                   <a:srgbClr val="212529"/>
                 </a:solidFill>
@@ -11713,29 +12798,64 @@
       </p:sp>
       <p:sp>
         <p:nvSpPr>
-          <p:cNvPr id="112" name="TextBox 111"/>
-          <p:cNvSpPr txBox="1"/>
-          <p:nvPr/>
-        </p:nvSpPr>
-        <p:spPr>
-          <a:xfrm>
-            <a:off x="5202936" y="3933748"/>
-            <a:ext cx="868680" cy="192024"/>
-          </a:xfrm>
-          <a:prstGeom prst="rect">
-            <a:avLst/>
-          </a:prstGeom>
-          <a:noFill/>
-        </p:spPr>
-        <p:txBody>
-          <a:bodyPr wrap="square" lIns="0" rIns="0" tIns="0" bIns="0">
-            <a:spAutoFit/>
-          </a:bodyPr>
-          <a:lstStyle/>
-          <a:p>
-            <a:pPr algn="r"/>
-            <a:r>
-              <a:rPr sz="1050" b="0" i="0">
+          <p:cNvPr id="143" name="TextBox 142"/>
+          <p:cNvSpPr txBox="1"/>
+          <p:nvPr/>
+        </p:nvSpPr>
+        <p:spPr>
+          <a:xfrm>
+            <a:off x="5394959" y="3811219"/>
+            <a:ext cx="841248" cy="173736"/>
+          </a:xfrm>
+          <a:prstGeom prst="rect">
+            <a:avLst/>
+          </a:prstGeom>
+          <a:noFill/>
+        </p:spPr>
+        <p:txBody>
+          <a:bodyPr wrap="square" lIns="0" rIns="0" tIns="0" bIns="0">
+            <a:spAutoFit/>
+          </a:bodyPr>
+          <a:lstStyle/>
+          <a:p>
+            <a:pPr algn="r"/>
+            <a:r>
+              <a:rPr sz="950" b="0" i="0">
+                <a:solidFill>
+                  <a:srgbClr val="212529"/>
+                </a:solidFill>
+                <a:latin typeface="Garamond"/>
+              </a:rPr>
+              <a:t>82,021</a:t>
+            </a:r>
+          </a:p>
+        </p:txBody>
+      </p:sp>
+      <p:sp>
+        <p:nvSpPr>
+          <p:cNvPr id="144" name="TextBox 143"/>
+          <p:cNvSpPr txBox="1"/>
+          <p:nvPr/>
+        </p:nvSpPr>
+        <p:spPr>
+          <a:xfrm>
+            <a:off x="6236207" y="3811219"/>
+            <a:ext cx="786384" cy="173736"/>
+          </a:xfrm>
+          <a:prstGeom prst="rect">
+            <a:avLst/>
+          </a:prstGeom>
+          <a:noFill/>
+        </p:spPr>
+        <p:txBody>
+          <a:bodyPr wrap="square" lIns="0" rIns="0" tIns="0" bIns="0">
+            <a:spAutoFit/>
+          </a:bodyPr>
+          <a:lstStyle/>
+          <a:p>
+            <a:pPr algn="r"/>
+            <a:r>
+              <a:rPr sz="950" b="0" i="0">
                 <a:solidFill>
                   <a:srgbClr val="212529"/>
                 </a:solidFill>
@@ -11748,64 +12868,64 @@
       </p:sp>
       <p:sp>
         <p:nvSpPr>
-          <p:cNvPr id="113" name="TextBox 112"/>
-          <p:cNvSpPr txBox="1"/>
-          <p:nvPr/>
-        </p:nvSpPr>
-        <p:spPr>
-          <a:xfrm>
-            <a:off x="6071616" y="3933748"/>
-            <a:ext cx="868680" cy="192024"/>
-          </a:xfrm>
-          <a:prstGeom prst="rect">
-            <a:avLst/>
-          </a:prstGeom>
-          <a:noFill/>
-        </p:spPr>
-        <p:txBody>
-          <a:bodyPr wrap="square" lIns="0" rIns="0" tIns="0" bIns="0">
-            <a:spAutoFit/>
-          </a:bodyPr>
-          <a:lstStyle/>
-          <a:p>
-            <a:pPr algn="r"/>
-            <a:r>
-              <a:rPr sz="1050" b="0" i="0">
-                <a:solidFill>
-                  <a:srgbClr val="212529"/>
-                </a:solidFill>
-                <a:latin typeface="Garamond"/>
-              </a:rPr>
-              <a:t>82,021</a:t>
-            </a:r>
-          </a:p>
-        </p:txBody>
-      </p:sp>
-      <p:sp>
-        <p:nvSpPr>
-          <p:cNvPr id="114" name="TextBox 113"/>
-          <p:cNvSpPr txBox="1"/>
-          <p:nvPr/>
-        </p:nvSpPr>
-        <p:spPr>
-          <a:xfrm>
-            <a:off x="7251192" y="3933748"/>
-            <a:ext cx="731520" cy="192024"/>
-          </a:xfrm>
-          <a:prstGeom prst="rect">
-            <a:avLst/>
-          </a:prstGeom>
-          <a:noFill/>
-        </p:spPr>
-        <p:txBody>
-          <a:bodyPr wrap="square" lIns="0" rIns="0" tIns="0" bIns="0">
-            <a:spAutoFit/>
-          </a:bodyPr>
-          <a:lstStyle/>
-          <a:p>
-            <a:pPr algn="r"/>
-            <a:r>
-              <a:rPr sz="1050" b="0" i="0">
+          <p:cNvPr id="145" name="TextBox 144"/>
+          <p:cNvSpPr txBox="1"/>
+          <p:nvPr/>
+        </p:nvSpPr>
+        <p:spPr>
+          <a:xfrm>
+            <a:off x="7022592" y="3811219"/>
+            <a:ext cx="786384" cy="173736"/>
+          </a:xfrm>
+          <a:prstGeom prst="rect">
+            <a:avLst/>
+          </a:prstGeom>
+          <a:noFill/>
+        </p:spPr>
+        <p:txBody>
+          <a:bodyPr wrap="square" lIns="0" rIns="0" tIns="0" bIns="0">
+            <a:spAutoFit/>
+          </a:bodyPr>
+          <a:lstStyle/>
+          <a:p>
+            <a:pPr algn="r"/>
+            <a:r>
+              <a:rPr sz="950" b="0" i="0">
+                <a:solidFill>
+                  <a:srgbClr val="212529"/>
+                </a:solidFill>
+                <a:latin typeface="Garamond"/>
+              </a:rPr>
+              <a:t>100,437</a:t>
+            </a:r>
+          </a:p>
+        </p:txBody>
+      </p:sp>
+      <p:sp>
+        <p:nvSpPr>
+          <p:cNvPr id="146" name="TextBox 145"/>
+          <p:cNvSpPr txBox="1"/>
+          <p:nvPr/>
+        </p:nvSpPr>
+        <p:spPr>
+          <a:xfrm>
+            <a:off x="8028431" y="3811219"/>
+            <a:ext cx="694944" cy="173736"/>
+          </a:xfrm>
+          <a:prstGeom prst="rect">
+            <a:avLst/>
+          </a:prstGeom>
+          <a:noFill/>
+        </p:spPr>
+        <p:txBody>
+          <a:bodyPr wrap="square" lIns="0" rIns="0" tIns="0" bIns="0">
+            <a:spAutoFit/>
+          </a:bodyPr>
+          <a:lstStyle/>
+          <a:p>
+            <a:pPr algn="r"/>
+            <a:r>
+              <a:rPr sz="950" b="0" i="0">
                 <a:solidFill>
                   <a:srgbClr val="212529"/>
                 </a:solidFill>
@@ -11818,29 +12938,64 @@
       </p:sp>
       <p:sp>
         <p:nvSpPr>
-          <p:cNvPr id="115" name="TextBox 114"/>
-          <p:cNvSpPr txBox="1"/>
-          <p:nvPr/>
-        </p:nvSpPr>
-        <p:spPr>
-          <a:xfrm>
-            <a:off x="7982712" y="3933748"/>
-            <a:ext cx="868680" cy="192024"/>
-          </a:xfrm>
-          <a:prstGeom prst="rect">
-            <a:avLst/>
-          </a:prstGeom>
-          <a:noFill/>
-        </p:spPr>
-        <p:txBody>
-          <a:bodyPr wrap="square" lIns="0" rIns="0" tIns="0" bIns="0">
-            <a:spAutoFit/>
-          </a:bodyPr>
-          <a:lstStyle/>
-          <a:p>
-            <a:pPr algn="r"/>
-            <a:r>
-              <a:rPr sz="1050" b="0" i="0">
+          <p:cNvPr id="147" name="TextBox 146"/>
+          <p:cNvSpPr txBox="1"/>
+          <p:nvPr/>
+        </p:nvSpPr>
+        <p:spPr>
+          <a:xfrm>
+            <a:off x="8723376" y="3811219"/>
+            <a:ext cx="841248" cy="173736"/>
+          </a:xfrm>
+          <a:prstGeom prst="rect">
+            <a:avLst/>
+          </a:prstGeom>
+          <a:noFill/>
+        </p:spPr>
+        <p:txBody>
+          <a:bodyPr wrap="square" lIns="0" rIns="0" tIns="0" bIns="0">
+            <a:spAutoFit/>
+          </a:bodyPr>
+          <a:lstStyle/>
+          <a:p>
+            <a:pPr algn="r"/>
+            <a:r>
+              <a:rPr sz="950" b="0" i="0">
+                <a:solidFill>
+                  <a:srgbClr val="212529"/>
+                </a:solidFill>
+                <a:latin typeface="Garamond"/>
+              </a:rPr>
+              <a:t>64,024</a:t>
+            </a:r>
+          </a:p>
+        </p:txBody>
+      </p:sp>
+      <p:sp>
+        <p:nvSpPr>
+          <p:cNvPr id="148" name="TextBox 147"/>
+          <p:cNvSpPr txBox="1"/>
+          <p:nvPr/>
+        </p:nvSpPr>
+        <p:spPr>
+          <a:xfrm>
+            <a:off x="9564624" y="3811219"/>
+            <a:ext cx="786384" cy="173736"/>
+          </a:xfrm>
+          <a:prstGeom prst="rect">
+            <a:avLst/>
+          </a:prstGeom>
+          <a:noFill/>
+        </p:spPr>
+        <p:txBody>
+          <a:bodyPr wrap="square" lIns="0" rIns="0" tIns="0" bIns="0">
+            <a:spAutoFit/>
+          </a:bodyPr>
+          <a:lstStyle/>
+          <a:p>
+            <a:pPr algn="r"/>
+            <a:r>
+              <a:rPr sz="950" b="0" i="0">
                 <a:solidFill>
                   <a:srgbClr val="212529"/>
                 </a:solidFill>
@@ -11853,49 +13008,49 @@
       </p:sp>
       <p:sp>
         <p:nvSpPr>
-          <p:cNvPr id="116" name="TextBox 115"/>
-          <p:cNvSpPr txBox="1"/>
-          <p:nvPr/>
-        </p:nvSpPr>
-        <p:spPr>
-          <a:xfrm>
-            <a:off x="8851392" y="3933748"/>
-            <a:ext cx="868680" cy="192024"/>
-          </a:xfrm>
-          <a:prstGeom prst="rect">
-            <a:avLst/>
-          </a:prstGeom>
-          <a:noFill/>
-        </p:spPr>
-        <p:txBody>
-          <a:bodyPr wrap="square" lIns="0" rIns="0" tIns="0" bIns="0">
-            <a:spAutoFit/>
-          </a:bodyPr>
-          <a:lstStyle/>
-          <a:p>
-            <a:pPr algn="r"/>
-            <a:r>
-              <a:rPr sz="1050" b="0" i="0">
-                <a:solidFill>
-                  <a:srgbClr val="212529"/>
-                </a:solidFill>
-                <a:latin typeface="Garamond"/>
-              </a:rPr>
-              <a:t>64,024</a:t>
-            </a:r>
-          </a:p>
-        </p:txBody>
-      </p:sp>
-      <p:sp>
-        <p:nvSpPr>
-          <p:cNvPr id="117" name="TextBox 116"/>
-          <p:cNvSpPr txBox="1"/>
-          <p:nvPr/>
-        </p:nvSpPr>
-        <p:spPr>
-          <a:xfrm>
-            <a:off x="502920" y="4151375"/>
-            <a:ext cx="1188720" cy="192024"/>
+          <p:cNvPr id="149" name="TextBox 148"/>
+          <p:cNvSpPr txBox="1"/>
+          <p:nvPr/>
+        </p:nvSpPr>
+        <p:spPr>
+          <a:xfrm>
+            <a:off x="10351007" y="3811219"/>
+            <a:ext cx="786384" cy="173736"/>
+          </a:xfrm>
+          <a:prstGeom prst="rect">
+            <a:avLst/>
+          </a:prstGeom>
+          <a:noFill/>
+        </p:spPr>
+        <p:txBody>
+          <a:bodyPr wrap="square" lIns="0" rIns="0" tIns="0" bIns="0">
+            <a:spAutoFit/>
+          </a:bodyPr>
+          <a:lstStyle/>
+          <a:p>
+            <a:pPr algn="r"/>
+            <a:r>
+              <a:rPr sz="950" b="0" i="0">
+                <a:solidFill>
+                  <a:srgbClr val="212529"/>
+                </a:solidFill>
+                <a:latin typeface="Garamond"/>
+              </a:rPr>
+              <a:t>79,058</a:t>
+            </a:r>
+          </a:p>
+        </p:txBody>
+      </p:sp>
+      <p:sp>
+        <p:nvSpPr>
+          <p:cNvPr id="150" name="TextBox 149"/>
+          <p:cNvSpPr txBox="1"/>
+          <p:nvPr/>
+        </p:nvSpPr>
+        <p:spPr>
+          <a:xfrm>
+            <a:off x="457200" y="4023360"/>
+            <a:ext cx="914400" cy="173736"/>
           </a:xfrm>
           <a:prstGeom prst="rect">
             <a:avLst/>
@@ -11910,7 +13065,7 @@
           <a:p>
             <a:pPr algn="l"/>
             <a:r>
-              <a:rPr sz="1050" b="0" i="0">
+              <a:rPr sz="950" b="0" i="0">
                 <a:solidFill>
                   <a:srgbClr val="212529"/>
                 </a:solidFill>
@@ -11923,29 +13078,29 @@
       </p:sp>
       <p:sp>
         <p:nvSpPr>
-          <p:cNvPr id="118" name="TextBox 117"/>
-          <p:cNvSpPr txBox="1"/>
-          <p:nvPr/>
-        </p:nvSpPr>
-        <p:spPr>
-          <a:xfrm>
-            <a:off x="1691640" y="4151375"/>
-            <a:ext cx="731520" cy="192024"/>
-          </a:xfrm>
-          <a:prstGeom prst="rect">
-            <a:avLst/>
-          </a:prstGeom>
-          <a:noFill/>
-        </p:spPr>
-        <p:txBody>
-          <a:bodyPr wrap="square" lIns="0" rIns="0" tIns="0" bIns="0">
-            <a:spAutoFit/>
-          </a:bodyPr>
-          <a:lstStyle/>
-          <a:p>
-            <a:pPr algn="r"/>
-            <a:r>
-              <a:rPr sz="1050" b="0" i="0">
+          <p:cNvPr id="151" name="TextBox 150"/>
+          <p:cNvSpPr txBox="1"/>
+          <p:nvPr/>
+        </p:nvSpPr>
+        <p:spPr>
+          <a:xfrm>
+            <a:off x="1371600" y="4023360"/>
+            <a:ext cx="694944" cy="173736"/>
+          </a:xfrm>
+          <a:prstGeom prst="rect">
+            <a:avLst/>
+          </a:prstGeom>
+          <a:noFill/>
+        </p:spPr>
+        <p:txBody>
+          <a:bodyPr wrap="square" lIns="0" rIns="0" tIns="0" bIns="0">
+            <a:spAutoFit/>
+          </a:bodyPr>
+          <a:lstStyle/>
+          <a:p>
+            <a:pPr algn="r"/>
+            <a:r>
+              <a:rPr sz="950" b="0" i="0">
                 <a:solidFill>
                   <a:srgbClr val="212529"/>
                 </a:solidFill>
@@ -11958,29 +13113,64 @@
       </p:sp>
       <p:sp>
         <p:nvSpPr>
-          <p:cNvPr id="119" name="TextBox 118"/>
-          <p:cNvSpPr txBox="1"/>
-          <p:nvPr/>
-        </p:nvSpPr>
-        <p:spPr>
-          <a:xfrm>
-            <a:off x="2423160" y="4151375"/>
-            <a:ext cx="868680" cy="192024"/>
-          </a:xfrm>
-          <a:prstGeom prst="rect">
-            <a:avLst/>
-          </a:prstGeom>
-          <a:noFill/>
-        </p:spPr>
-        <p:txBody>
-          <a:bodyPr wrap="square" lIns="0" rIns="0" tIns="0" bIns="0">
-            <a:spAutoFit/>
-          </a:bodyPr>
-          <a:lstStyle/>
-          <a:p>
-            <a:pPr algn="r"/>
-            <a:r>
-              <a:rPr sz="1050" b="0" i="0">
+          <p:cNvPr id="152" name="TextBox 151"/>
+          <p:cNvSpPr txBox="1"/>
+          <p:nvPr/>
+        </p:nvSpPr>
+        <p:spPr>
+          <a:xfrm>
+            <a:off x="2066543" y="4023360"/>
+            <a:ext cx="841248" cy="173736"/>
+          </a:xfrm>
+          <a:prstGeom prst="rect">
+            <a:avLst/>
+          </a:prstGeom>
+          <a:noFill/>
+        </p:spPr>
+        <p:txBody>
+          <a:bodyPr wrap="square" lIns="0" rIns="0" tIns="0" bIns="0">
+            <a:spAutoFit/>
+          </a:bodyPr>
+          <a:lstStyle/>
+          <a:p>
+            <a:pPr algn="r"/>
+            <a:r>
+              <a:rPr sz="950" b="0" i="0">
+                <a:solidFill>
+                  <a:srgbClr val="212529"/>
+                </a:solidFill>
+                <a:latin typeface="Garamond"/>
+              </a:rPr>
+              <a:t>84,631</a:t>
+            </a:r>
+          </a:p>
+        </p:txBody>
+      </p:sp>
+      <p:sp>
+        <p:nvSpPr>
+          <p:cNvPr id="153" name="TextBox 152"/>
+          <p:cNvSpPr txBox="1"/>
+          <p:nvPr/>
+        </p:nvSpPr>
+        <p:spPr>
+          <a:xfrm>
+            <a:off x="2907791" y="4023360"/>
+            <a:ext cx="786384" cy="173736"/>
+          </a:xfrm>
+          <a:prstGeom prst="rect">
+            <a:avLst/>
+          </a:prstGeom>
+          <a:noFill/>
+        </p:spPr>
+        <p:txBody>
+          <a:bodyPr wrap="square" lIns="0" rIns="0" tIns="0" bIns="0">
+            <a:spAutoFit/>
+          </a:bodyPr>
+          <a:lstStyle/>
+          <a:p>
+            <a:pPr algn="r"/>
+            <a:r>
+              <a:rPr sz="950" b="0" i="0">
                 <a:solidFill>
                   <a:srgbClr val="212529"/>
                 </a:solidFill>
@@ -11993,64 +13183,64 @@
       </p:sp>
       <p:sp>
         <p:nvSpPr>
-          <p:cNvPr id="120" name="TextBox 119"/>
-          <p:cNvSpPr txBox="1"/>
-          <p:nvPr/>
-        </p:nvSpPr>
-        <p:spPr>
-          <a:xfrm>
-            <a:off x="3291840" y="4151375"/>
-            <a:ext cx="868680" cy="192024"/>
-          </a:xfrm>
-          <a:prstGeom prst="rect">
-            <a:avLst/>
-          </a:prstGeom>
-          <a:noFill/>
-        </p:spPr>
-        <p:txBody>
-          <a:bodyPr wrap="square" lIns="0" rIns="0" tIns="0" bIns="0">
-            <a:spAutoFit/>
-          </a:bodyPr>
-          <a:lstStyle/>
-          <a:p>
-            <a:pPr algn="r"/>
-            <a:r>
-              <a:rPr sz="1050" b="0" i="0">
-                <a:solidFill>
-                  <a:srgbClr val="212529"/>
-                </a:solidFill>
-                <a:latin typeface="Garamond"/>
-              </a:rPr>
-              <a:t>84,631</a:t>
-            </a:r>
-          </a:p>
-        </p:txBody>
-      </p:sp>
-      <p:sp>
-        <p:nvSpPr>
-          <p:cNvPr id="121" name="TextBox 120"/>
-          <p:cNvSpPr txBox="1"/>
-          <p:nvPr/>
-        </p:nvSpPr>
-        <p:spPr>
-          <a:xfrm>
-            <a:off x="4471416" y="4151375"/>
-            <a:ext cx="731520" cy="192024"/>
-          </a:xfrm>
-          <a:prstGeom prst="rect">
-            <a:avLst/>
-          </a:prstGeom>
-          <a:noFill/>
-        </p:spPr>
-        <p:txBody>
-          <a:bodyPr wrap="square" lIns="0" rIns="0" tIns="0" bIns="0">
-            <a:spAutoFit/>
-          </a:bodyPr>
-          <a:lstStyle/>
-          <a:p>
-            <a:pPr algn="r"/>
-            <a:r>
-              <a:rPr sz="1050" b="0" i="0">
+          <p:cNvPr id="154" name="TextBox 153"/>
+          <p:cNvSpPr txBox="1"/>
+          <p:nvPr/>
+        </p:nvSpPr>
+        <p:spPr>
+          <a:xfrm>
+            <a:off x="3694176" y="4023360"/>
+            <a:ext cx="786384" cy="173736"/>
+          </a:xfrm>
+          <a:prstGeom prst="rect">
+            <a:avLst/>
+          </a:prstGeom>
+          <a:noFill/>
+        </p:spPr>
+        <p:txBody>
+          <a:bodyPr wrap="square" lIns="0" rIns="0" tIns="0" bIns="0">
+            <a:spAutoFit/>
+          </a:bodyPr>
+          <a:lstStyle/>
+          <a:p>
+            <a:pPr algn="r"/>
+            <a:r>
+              <a:rPr sz="950" b="0" i="0">
+                <a:solidFill>
+                  <a:srgbClr val="212529"/>
+                </a:solidFill>
+                <a:latin typeface="Garamond"/>
+              </a:rPr>
+              <a:t>102,110</a:t>
+            </a:r>
+          </a:p>
+        </p:txBody>
+      </p:sp>
+      <p:sp>
+        <p:nvSpPr>
+          <p:cNvPr id="155" name="TextBox 154"/>
+          <p:cNvSpPr txBox="1"/>
+          <p:nvPr/>
+        </p:nvSpPr>
+        <p:spPr>
+          <a:xfrm>
+            <a:off x="4700016" y="4023360"/>
+            <a:ext cx="694944" cy="173736"/>
+          </a:xfrm>
+          <a:prstGeom prst="rect">
+            <a:avLst/>
+          </a:prstGeom>
+          <a:noFill/>
+        </p:spPr>
+        <p:txBody>
+          <a:bodyPr wrap="square" lIns="0" rIns="0" tIns="0" bIns="0">
+            <a:spAutoFit/>
+          </a:bodyPr>
+          <a:lstStyle/>
+          <a:p>
+            <a:pPr algn="r"/>
+            <a:r>
+              <a:rPr sz="950" b="0" i="0">
                 <a:solidFill>
                   <a:srgbClr val="212529"/>
                 </a:solidFill>
@@ -12063,29 +13253,64 @@
       </p:sp>
       <p:sp>
         <p:nvSpPr>
-          <p:cNvPr id="122" name="TextBox 121"/>
-          <p:cNvSpPr txBox="1"/>
-          <p:nvPr/>
-        </p:nvSpPr>
-        <p:spPr>
-          <a:xfrm>
-            <a:off x="5202936" y="4151375"/>
-            <a:ext cx="868680" cy="192024"/>
-          </a:xfrm>
-          <a:prstGeom prst="rect">
-            <a:avLst/>
-          </a:prstGeom>
-          <a:noFill/>
-        </p:spPr>
-        <p:txBody>
-          <a:bodyPr wrap="square" lIns="0" rIns="0" tIns="0" bIns="0">
-            <a:spAutoFit/>
-          </a:bodyPr>
-          <a:lstStyle/>
-          <a:p>
-            <a:pPr algn="r"/>
-            <a:r>
-              <a:rPr sz="1050" b="0" i="0">
+          <p:cNvPr id="156" name="TextBox 155"/>
+          <p:cNvSpPr txBox="1"/>
+          <p:nvPr/>
+        </p:nvSpPr>
+        <p:spPr>
+          <a:xfrm>
+            <a:off x="5394959" y="4023360"/>
+            <a:ext cx="841248" cy="173736"/>
+          </a:xfrm>
+          <a:prstGeom prst="rect">
+            <a:avLst/>
+          </a:prstGeom>
+          <a:noFill/>
+        </p:spPr>
+        <p:txBody>
+          <a:bodyPr wrap="square" lIns="0" rIns="0" tIns="0" bIns="0">
+            <a:spAutoFit/>
+          </a:bodyPr>
+          <a:lstStyle/>
+          <a:p>
+            <a:pPr algn="r"/>
+            <a:r>
+              <a:rPr sz="950" b="0" i="0">
+                <a:solidFill>
+                  <a:srgbClr val="212529"/>
+                </a:solidFill>
+                <a:latin typeface="Garamond"/>
+              </a:rPr>
+              <a:t>83,121</a:t>
+            </a:r>
+          </a:p>
+        </p:txBody>
+      </p:sp>
+      <p:sp>
+        <p:nvSpPr>
+          <p:cNvPr id="157" name="TextBox 156"/>
+          <p:cNvSpPr txBox="1"/>
+          <p:nvPr/>
+        </p:nvSpPr>
+        <p:spPr>
+          <a:xfrm>
+            <a:off x="6236207" y="4023360"/>
+            <a:ext cx="786384" cy="173736"/>
+          </a:xfrm>
+          <a:prstGeom prst="rect">
+            <a:avLst/>
+          </a:prstGeom>
+          <a:noFill/>
+        </p:spPr>
+        <p:txBody>
+          <a:bodyPr wrap="square" lIns="0" rIns="0" tIns="0" bIns="0">
+            <a:spAutoFit/>
+          </a:bodyPr>
+          <a:lstStyle/>
+          <a:p>
+            <a:pPr algn="r"/>
+            <a:r>
+              <a:rPr sz="950" b="0" i="0">
                 <a:solidFill>
                   <a:srgbClr val="212529"/>
                 </a:solidFill>
@@ -12098,64 +13323,64 @@
       </p:sp>
       <p:sp>
         <p:nvSpPr>
-          <p:cNvPr id="123" name="TextBox 122"/>
-          <p:cNvSpPr txBox="1"/>
-          <p:nvPr/>
-        </p:nvSpPr>
-        <p:spPr>
-          <a:xfrm>
-            <a:off x="6071616" y="4151375"/>
-            <a:ext cx="868680" cy="192024"/>
-          </a:xfrm>
-          <a:prstGeom prst="rect">
-            <a:avLst/>
-          </a:prstGeom>
-          <a:noFill/>
-        </p:spPr>
-        <p:txBody>
-          <a:bodyPr wrap="square" lIns="0" rIns="0" tIns="0" bIns="0">
-            <a:spAutoFit/>
-          </a:bodyPr>
-          <a:lstStyle/>
-          <a:p>
-            <a:pPr algn="r"/>
-            <a:r>
-              <a:rPr sz="1050" b="0" i="0">
-                <a:solidFill>
-                  <a:srgbClr val="212529"/>
-                </a:solidFill>
-                <a:latin typeface="Garamond"/>
-              </a:rPr>
-              <a:t>83,121</a:t>
-            </a:r>
-          </a:p>
-        </p:txBody>
-      </p:sp>
-      <p:sp>
-        <p:nvSpPr>
-          <p:cNvPr id="124" name="TextBox 123"/>
-          <p:cNvSpPr txBox="1"/>
-          <p:nvPr/>
-        </p:nvSpPr>
-        <p:spPr>
-          <a:xfrm>
-            <a:off x="7251192" y="4151375"/>
-            <a:ext cx="731520" cy="192024"/>
-          </a:xfrm>
-          <a:prstGeom prst="rect">
-            <a:avLst/>
-          </a:prstGeom>
-          <a:noFill/>
-        </p:spPr>
-        <p:txBody>
-          <a:bodyPr wrap="square" lIns="0" rIns="0" tIns="0" bIns="0">
-            <a:spAutoFit/>
-          </a:bodyPr>
-          <a:lstStyle/>
-          <a:p>
-            <a:pPr algn="r"/>
-            <a:r>
-              <a:rPr sz="1050" b="0" i="0">
+          <p:cNvPr id="158" name="TextBox 157"/>
+          <p:cNvSpPr txBox="1"/>
+          <p:nvPr/>
+        </p:nvSpPr>
+        <p:spPr>
+          <a:xfrm>
+            <a:off x="7022592" y="4023360"/>
+            <a:ext cx="786384" cy="173736"/>
+          </a:xfrm>
+          <a:prstGeom prst="rect">
+            <a:avLst/>
+          </a:prstGeom>
+          <a:noFill/>
+        </p:spPr>
+        <p:txBody>
+          <a:bodyPr wrap="square" lIns="0" rIns="0" tIns="0" bIns="0">
+            <a:spAutoFit/>
+          </a:bodyPr>
+          <a:lstStyle/>
+          <a:p>
+            <a:pPr algn="r"/>
+            <a:r>
+              <a:rPr sz="950" b="0" i="0">
+                <a:solidFill>
+                  <a:srgbClr val="212529"/>
+                </a:solidFill>
+                <a:latin typeface="Garamond"/>
+              </a:rPr>
+              <a:t>100,497</a:t>
+            </a:r>
+          </a:p>
+        </p:txBody>
+      </p:sp>
+      <p:sp>
+        <p:nvSpPr>
+          <p:cNvPr id="159" name="TextBox 158"/>
+          <p:cNvSpPr txBox="1"/>
+          <p:nvPr/>
+        </p:nvSpPr>
+        <p:spPr>
+          <a:xfrm>
+            <a:off x="8028431" y="4023360"/>
+            <a:ext cx="694944" cy="173736"/>
+          </a:xfrm>
+          <a:prstGeom prst="rect">
+            <a:avLst/>
+          </a:prstGeom>
+          <a:noFill/>
+        </p:spPr>
+        <p:txBody>
+          <a:bodyPr wrap="square" lIns="0" rIns="0" tIns="0" bIns="0">
+            <a:spAutoFit/>
+          </a:bodyPr>
+          <a:lstStyle/>
+          <a:p>
+            <a:pPr algn="r"/>
+            <a:r>
+              <a:rPr sz="950" b="0" i="0">
                 <a:solidFill>
                   <a:srgbClr val="212529"/>
                 </a:solidFill>
@@ -12168,29 +13393,64 @@
       </p:sp>
       <p:sp>
         <p:nvSpPr>
-          <p:cNvPr id="125" name="TextBox 124"/>
-          <p:cNvSpPr txBox="1"/>
-          <p:nvPr/>
-        </p:nvSpPr>
-        <p:spPr>
-          <a:xfrm>
-            <a:off x="7982712" y="4151375"/>
-            <a:ext cx="868680" cy="192024"/>
-          </a:xfrm>
-          <a:prstGeom prst="rect">
-            <a:avLst/>
-          </a:prstGeom>
-          <a:noFill/>
-        </p:spPr>
-        <p:txBody>
-          <a:bodyPr wrap="square" lIns="0" rIns="0" tIns="0" bIns="0">
-            <a:spAutoFit/>
-          </a:bodyPr>
-          <a:lstStyle/>
-          <a:p>
-            <a:pPr algn="r"/>
-            <a:r>
-              <a:rPr sz="1050" b="0" i="0">
+          <p:cNvPr id="160" name="TextBox 159"/>
+          <p:cNvSpPr txBox="1"/>
+          <p:nvPr/>
+        </p:nvSpPr>
+        <p:spPr>
+          <a:xfrm>
+            <a:off x="8723376" y="4023360"/>
+            <a:ext cx="841248" cy="173736"/>
+          </a:xfrm>
+          <a:prstGeom prst="rect">
+            <a:avLst/>
+          </a:prstGeom>
+          <a:noFill/>
+        </p:spPr>
+        <p:txBody>
+          <a:bodyPr wrap="square" lIns="0" rIns="0" tIns="0" bIns="0">
+            <a:spAutoFit/>
+          </a:bodyPr>
+          <a:lstStyle/>
+          <a:p>
+            <a:pPr algn="r"/>
+            <a:r>
+              <a:rPr sz="950" b="0" i="0">
+                <a:solidFill>
+                  <a:srgbClr val="212529"/>
+                </a:solidFill>
+                <a:latin typeface="Garamond"/>
+              </a:rPr>
+              <a:t>64,493</a:t>
+            </a:r>
+          </a:p>
+        </p:txBody>
+      </p:sp>
+      <p:sp>
+        <p:nvSpPr>
+          <p:cNvPr id="161" name="TextBox 160"/>
+          <p:cNvSpPr txBox="1"/>
+          <p:nvPr/>
+        </p:nvSpPr>
+        <p:spPr>
+          <a:xfrm>
+            <a:off x="9564624" y="4023360"/>
+            <a:ext cx="786384" cy="173736"/>
+          </a:xfrm>
+          <a:prstGeom prst="rect">
+            <a:avLst/>
+          </a:prstGeom>
+          <a:noFill/>
+        </p:spPr>
+        <p:txBody>
+          <a:bodyPr wrap="square" lIns="0" rIns="0" tIns="0" bIns="0">
+            <a:spAutoFit/>
+          </a:bodyPr>
+          <a:lstStyle/>
+          <a:p>
+            <a:pPr algn="r"/>
+            <a:r>
+              <a:rPr sz="950" b="0" i="0">
                 <a:solidFill>
                   <a:srgbClr val="212529"/>
                 </a:solidFill>
@@ -12203,49 +13463,49 @@
       </p:sp>
       <p:sp>
         <p:nvSpPr>
-          <p:cNvPr id="126" name="TextBox 125"/>
-          <p:cNvSpPr txBox="1"/>
-          <p:nvPr/>
-        </p:nvSpPr>
-        <p:spPr>
-          <a:xfrm>
-            <a:off x="8851392" y="4151375"/>
-            <a:ext cx="868680" cy="192024"/>
-          </a:xfrm>
-          <a:prstGeom prst="rect">
-            <a:avLst/>
-          </a:prstGeom>
-          <a:noFill/>
-        </p:spPr>
-        <p:txBody>
-          <a:bodyPr wrap="square" lIns="0" rIns="0" tIns="0" bIns="0">
-            <a:spAutoFit/>
-          </a:bodyPr>
-          <a:lstStyle/>
-          <a:p>
-            <a:pPr algn="r"/>
-            <a:r>
-              <a:rPr sz="1050" b="0" i="0">
-                <a:solidFill>
-                  <a:srgbClr val="212529"/>
-                </a:solidFill>
-                <a:latin typeface="Garamond"/>
-              </a:rPr>
-              <a:t>64,493</a:t>
-            </a:r>
-          </a:p>
-        </p:txBody>
-      </p:sp>
-      <p:sp>
-        <p:nvSpPr>
-          <p:cNvPr id="127" name="TextBox 126"/>
-          <p:cNvSpPr txBox="1"/>
-          <p:nvPr/>
-        </p:nvSpPr>
-        <p:spPr>
-          <a:xfrm>
-            <a:off x="502920" y="4369003"/>
-            <a:ext cx="1188720" cy="192024"/>
+          <p:cNvPr id="162" name="TextBox 161"/>
+          <p:cNvSpPr txBox="1"/>
+          <p:nvPr/>
+        </p:nvSpPr>
+        <p:spPr>
+          <a:xfrm>
+            <a:off x="10351007" y="4023360"/>
+            <a:ext cx="786384" cy="173736"/>
+          </a:xfrm>
+          <a:prstGeom prst="rect">
+            <a:avLst/>
+          </a:prstGeom>
+          <a:noFill/>
+        </p:spPr>
+        <p:txBody>
+          <a:bodyPr wrap="square" lIns="0" rIns="0" tIns="0" bIns="0">
+            <a:spAutoFit/>
+          </a:bodyPr>
+          <a:lstStyle/>
+          <a:p>
+            <a:pPr algn="r"/>
+            <a:r>
+              <a:rPr sz="950" b="0" i="0">
+                <a:solidFill>
+                  <a:srgbClr val="212529"/>
+                </a:solidFill>
+                <a:latin typeface="Garamond"/>
+              </a:rPr>
+              <a:t>78,982</a:t>
+            </a:r>
+          </a:p>
+        </p:txBody>
+      </p:sp>
+      <p:sp>
+        <p:nvSpPr>
+          <p:cNvPr id="163" name="TextBox 162"/>
+          <p:cNvSpPr txBox="1"/>
+          <p:nvPr/>
+        </p:nvSpPr>
+        <p:spPr>
+          <a:xfrm>
+            <a:off x="457200" y="4235500"/>
+            <a:ext cx="914400" cy="173736"/>
           </a:xfrm>
           <a:prstGeom prst="rect">
             <a:avLst/>
@@ -12260,7 +13520,7 @@
           <a:p>
             <a:pPr algn="l"/>
             <a:r>
-              <a:rPr sz="1050" b="0" i="0">
+              <a:rPr sz="950" b="0" i="0">
                 <a:solidFill>
                   <a:srgbClr val="212529"/>
                 </a:solidFill>
@@ -12273,29 +13533,29 @@
       </p:sp>
       <p:sp>
         <p:nvSpPr>
-          <p:cNvPr id="128" name="TextBox 127"/>
-          <p:cNvSpPr txBox="1"/>
-          <p:nvPr/>
-        </p:nvSpPr>
-        <p:spPr>
-          <a:xfrm>
-            <a:off x="1691640" y="4369003"/>
-            <a:ext cx="731520" cy="192024"/>
-          </a:xfrm>
-          <a:prstGeom prst="rect">
-            <a:avLst/>
-          </a:prstGeom>
-          <a:noFill/>
-        </p:spPr>
-        <p:txBody>
-          <a:bodyPr wrap="square" lIns="0" rIns="0" tIns="0" bIns="0">
-            <a:spAutoFit/>
-          </a:bodyPr>
-          <a:lstStyle/>
-          <a:p>
-            <a:pPr algn="r"/>
-            <a:r>
-              <a:rPr sz="1050" b="0" i="0">
+          <p:cNvPr id="164" name="TextBox 163"/>
+          <p:cNvSpPr txBox="1"/>
+          <p:nvPr/>
+        </p:nvSpPr>
+        <p:spPr>
+          <a:xfrm>
+            <a:off x="1371600" y="4235500"/>
+            <a:ext cx="694944" cy="173736"/>
+          </a:xfrm>
+          <a:prstGeom prst="rect">
+            <a:avLst/>
+          </a:prstGeom>
+          <a:noFill/>
+        </p:spPr>
+        <p:txBody>
+          <a:bodyPr wrap="square" lIns="0" rIns="0" tIns="0" bIns="0">
+            <a:spAutoFit/>
+          </a:bodyPr>
+          <a:lstStyle/>
+          <a:p>
+            <a:pPr algn="r"/>
+            <a:r>
+              <a:rPr sz="950" b="0" i="0">
                 <a:solidFill>
                   <a:srgbClr val="212529"/>
                 </a:solidFill>
@@ -12308,29 +13568,64 @@
       </p:sp>
       <p:sp>
         <p:nvSpPr>
-          <p:cNvPr id="129" name="TextBox 128"/>
-          <p:cNvSpPr txBox="1"/>
-          <p:nvPr/>
-        </p:nvSpPr>
-        <p:spPr>
-          <a:xfrm>
-            <a:off x="2423160" y="4369003"/>
-            <a:ext cx="868680" cy="192024"/>
-          </a:xfrm>
-          <a:prstGeom prst="rect">
-            <a:avLst/>
-          </a:prstGeom>
-          <a:noFill/>
-        </p:spPr>
-        <p:txBody>
-          <a:bodyPr wrap="square" lIns="0" rIns="0" tIns="0" bIns="0">
-            <a:spAutoFit/>
-          </a:bodyPr>
-          <a:lstStyle/>
-          <a:p>
-            <a:pPr algn="r"/>
-            <a:r>
-              <a:rPr sz="1050" b="0" i="0">
+          <p:cNvPr id="165" name="TextBox 164"/>
+          <p:cNvSpPr txBox="1"/>
+          <p:nvPr/>
+        </p:nvSpPr>
+        <p:spPr>
+          <a:xfrm>
+            <a:off x="2066543" y="4235500"/>
+            <a:ext cx="841248" cy="173736"/>
+          </a:xfrm>
+          <a:prstGeom prst="rect">
+            <a:avLst/>
+          </a:prstGeom>
+          <a:noFill/>
+        </p:spPr>
+        <p:txBody>
+          <a:bodyPr wrap="square" lIns="0" rIns="0" tIns="0" bIns="0">
+            <a:spAutoFit/>
+          </a:bodyPr>
+          <a:lstStyle/>
+          <a:p>
+            <a:pPr algn="r"/>
+            <a:r>
+              <a:rPr sz="950" b="0" i="0">
+                <a:solidFill>
+                  <a:srgbClr val="212529"/>
+                </a:solidFill>
+                <a:latin typeface="Garamond"/>
+              </a:rPr>
+              <a:t>84,906</a:t>
+            </a:r>
+          </a:p>
+        </p:txBody>
+      </p:sp>
+      <p:sp>
+        <p:nvSpPr>
+          <p:cNvPr id="166" name="TextBox 165"/>
+          <p:cNvSpPr txBox="1"/>
+          <p:nvPr/>
+        </p:nvSpPr>
+        <p:spPr>
+          <a:xfrm>
+            <a:off x="2907791" y="4235500"/>
+            <a:ext cx="786384" cy="173736"/>
+          </a:xfrm>
+          <a:prstGeom prst="rect">
+            <a:avLst/>
+          </a:prstGeom>
+          <a:noFill/>
+        </p:spPr>
+        <p:txBody>
+          <a:bodyPr wrap="square" lIns="0" rIns="0" tIns="0" bIns="0">
+            <a:spAutoFit/>
+          </a:bodyPr>
+          <a:lstStyle/>
+          <a:p>
+            <a:pPr algn="r"/>
+            <a:r>
+              <a:rPr sz="950" b="0" i="0">
                 <a:solidFill>
                   <a:srgbClr val="212529"/>
                 </a:solidFill>
@@ -12343,64 +13638,64 @@
       </p:sp>
       <p:sp>
         <p:nvSpPr>
-          <p:cNvPr id="130" name="TextBox 129"/>
-          <p:cNvSpPr txBox="1"/>
-          <p:nvPr/>
-        </p:nvSpPr>
-        <p:spPr>
-          <a:xfrm>
-            <a:off x="3291840" y="4369003"/>
-            <a:ext cx="868680" cy="192024"/>
-          </a:xfrm>
-          <a:prstGeom prst="rect">
-            <a:avLst/>
-          </a:prstGeom>
-          <a:noFill/>
-        </p:spPr>
-        <p:txBody>
-          <a:bodyPr wrap="square" lIns="0" rIns="0" tIns="0" bIns="0">
-            <a:spAutoFit/>
-          </a:bodyPr>
-          <a:lstStyle/>
-          <a:p>
-            <a:pPr algn="r"/>
-            <a:r>
-              <a:rPr sz="1050" b="0" i="0">
-                <a:solidFill>
-                  <a:srgbClr val="212529"/>
-                </a:solidFill>
-                <a:latin typeface="Garamond"/>
-              </a:rPr>
-              <a:t>84,906</a:t>
-            </a:r>
-          </a:p>
-        </p:txBody>
-      </p:sp>
-      <p:sp>
-        <p:nvSpPr>
-          <p:cNvPr id="131" name="TextBox 130"/>
-          <p:cNvSpPr txBox="1"/>
-          <p:nvPr/>
-        </p:nvSpPr>
-        <p:spPr>
-          <a:xfrm>
-            <a:off x="4471416" y="4369003"/>
-            <a:ext cx="731520" cy="192024"/>
-          </a:xfrm>
-          <a:prstGeom prst="rect">
-            <a:avLst/>
-          </a:prstGeom>
-          <a:noFill/>
-        </p:spPr>
-        <p:txBody>
-          <a:bodyPr wrap="square" lIns="0" rIns="0" tIns="0" bIns="0">
-            <a:spAutoFit/>
-          </a:bodyPr>
-          <a:lstStyle/>
-          <a:p>
-            <a:pPr algn="r"/>
-            <a:r>
-              <a:rPr sz="1050" b="0" i="0">
+          <p:cNvPr id="167" name="TextBox 166"/>
+          <p:cNvSpPr txBox="1"/>
+          <p:nvPr/>
+        </p:nvSpPr>
+        <p:spPr>
+          <a:xfrm>
+            <a:off x="3694176" y="4235500"/>
+            <a:ext cx="786384" cy="173736"/>
+          </a:xfrm>
+          <a:prstGeom prst="rect">
+            <a:avLst/>
+          </a:prstGeom>
+          <a:noFill/>
+        </p:spPr>
+        <p:txBody>
+          <a:bodyPr wrap="square" lIns="0" rIns="0" tIns="0" bIns="0">
+            <a:spAutoFit/>
+          </a:bodyPr>
+          <a:lstStyle/>
+          <a:p>
+            <a:pPr algn="r"/>
+            <a:r>
+              <a:rPr sz="950" b="0" i="0">
+                <a:solidFill>
+                  <a:srgbClr val="212529"/>
+                </a:solidFill>
+                <a:latin typeface="Garamond"/>
+              </a:rPr>
+              <a:t>101,517</a:t>
+            </a:r>
+          </a:p>
+        </p:txBody>
+      </p:sp>
+      <p:sp>
+        <p:nvSpPr>
+          <p:cNvPr id="168" name="TextBox 167"/>
+          <p:cNvSpPr txBox="1"/>
+          <p:nvPr/>
+        </p:nvSpPr>
+        <p:spPr>
+          <a:xfrm>
+            <a:off x="4700016" y="4235500"/>
+            <a:ext cx="694944" cy="173736"/>
+          </a:xfrm>
+          <a:prstGeom prst="rect">
+            <a:avLst/>
+          </a:prstGeom>
+          <a:noFill/>
+        </p:spPr>
+        <p:txBody>
+          <a:bodyPr wrap="square" lIns="0" rIns="0" tIns="0" bIns="0">
+            <a:spAutoFit/>
+          </a:bodyPr>
+          <a:lstStyle/>
+          <a:p>
+            <a:pPr algn="r"/>
+            <a:r>
+              <a:rPr sz="950" b="0" i="0">
                 <a:solidFill>
                   <a:srgbClr val="212529"/>
                 </a:solidFill>
@@ -12413,29 +13708,64 @@
       </p:sp>
       <p:sp>
         <p:nvSpPr>
-          <p:cNvPr id="132" name="TextBox 131"/>
-          <p:cNvSpPr txBox="1"/>
-          <p:nvPr/>
-        </p:nvSpPr>
-        <p:spPr>
-          <a:xfrm>
-            <a:off x="5202936" y="4369003"/>
-            <a:ext cx="868680" cy="192024"/>
-          </a:xfrm>
-          <a:prstGeom prst="rect">
-            <a:avLst/>
-          </a:prstGeom>
-          <a:noFill/>
-        </p:spPr>
-        <p:txBody>
-          <a:bodyPr wrap="square" lIns="0" rIns="0" tIns="0" bIns="0">
-            <a:spAutoFit/>
-          </a:bodyPr>
-          <a:lstStyle/>
-          <a:p>
-            <a:pPr algn="r"/>
-            <a:r>
-              <a:rPr sz="1050" b="0" i="0">
+          <p:cNvPr id="169" name="TextBox 168"/>
+          <p:cNvSpPr txBox="1"/>
+          <p:nvPr/>
+        </p:nvSpPr>
+        <p:spPr>
+          <a:xfrm>
+            <a:off x="5394959" y="4235500"/>
+            <a:ext cx="841248" cy="173736"/>
+          </a:xfrm>
+          <a:prstGeom prst="rect">
+            <a:avLst/>
+          </a:prstGeom>
+          <a:noFill/>
+        </p:spPr>
+        <p:txBody>
+          <a:bodyPr wrap="square" lIns="0" rIns="0" tIns="0" bIns="0">
+            <a:spAutoFit/>
+          </a:bodyPr>
+          <a:lstStyle/>
+          <a:p>
+            <a:pPr algn="r"/>
+            <a:r>
+              <a:rPr sz="950" b="0" i="0">
+                <a:solidFill>
+                  <a:srgbClr val="212529"/>
+                </a:solidFill>
+                <a:latin typeface="Garamond"/>
+              </a:rPr>
+              <a:t>82,730</a:t>
+            </a:r>
+          </a:p>
+        </p:txBody>
+      </p:sp>
+      <p:sp>
+        <p:nvSpPr>
+          <p:cNvPr id="170" name="TextBox 169"/>
+          <p:cNvSpPr txBox="1"/>
+          <p:nvPr/>
+        </p:nvSpPr>
+        <p:spPr>
+          <a:xfrm>
+            <a:off x="6236207" y="4235500"/>
+            <a:ext cx="786384" cy="173736"/>
+          </a:xfrm>
+          <a:prstGeom prst="rect">
+            <a:avLst/>
+          </a:prstGeom>
+          <a:noFill/>
+        </p:spPr>
+        <p:txBody>
+          <a:bodyPr wrap="square" lIns="0" rIns="0" tIns="0" bIns="0">
+            <a:spAutoFit/>
+          </a:bodyPr>
+          <a:lstStyle/>
+          <a:p>
+            <a:pPr algn="r"/>
+            <a:r>
+              <a:rPr sz="950" b="0" i="0">
                 <a:solidFill>
                   <a:srgbClr val="212529"/>
                 </a:solidFill>
@@ -12448,64 +13778,64 @@
       </p:sp>
       <p:sp>
         <p:nvSpPr>
-          <p:cNvPr id="133" name="TextBox 132"/>
-          <p:cNvSpPr txBox="1"/>
-          <p:nvPr/>
-        </p:nvSpPr>
-        <p:spPr>
-          <a:xfrm>
-            <a:off x="6071616" y="4369003"/>
-            <a:ext cx="868680" cy="192024"/>
-          </a:xfrm>
-          <a:prstGeom prst="rect">
-            <a:avLst/>
-          </a:prstGeom>
-          <a:noFill/>
-        </p:spPr>
-        <p:txBody>
-          <a:bodyPr wrap="square" lIns="0" rIns="0" tIns="0" bIns="0">
-            <a:spAutoFit/>
-          </a:bodyPr>
-          <a:lstStyle/>
-          <a:p>
-            <a:pPr algn="r"/>
-            <a:r>
-              <a:rPr sz="1050" b="0" i="0">
-                <a:solidFill>
-                  <a:srgbClr val="212529"/>
-                </a:solidFill>
-                <a:latin typeface="Garamond"/>
-              </a:rPr>
-              <a:t>82,730</a:t>
-            </a:r>
-          </a:p>
-        </p:txBody>
-      </p:sp>
-      <p:sp>
-        <p:nvSpPr>
-          <p:cNvPr id="134" name="TextBox 133"/>
-          <p:cNvSpPr txBox="1"/>
-          <p:nvPr/>
-        </p:nvSpPr>
-        <p:spPr>
-          <a:xfrm>
-            <a:off x="7251192" y="4369003"/>
-            <a:ext cx="731520" cy="192024"/>
-          </a:xfrm>
-          <a:prstGeom prst="rect">
-            <a:avLst/>
-          </a:prstGeom>
-          <a:noFill/>
-        </p:spPr>
-        <p:txBody>
-          <a:bodyPr wrap="square" lIns="0" rIns="0" tIns="0" bIns="0">
-            <a:spAutoFit/>
-          </a:bodyPr>
-          <a:lstStyle/>
-          <a:p>
-            <a:pPr algn="r"/>
-            <a:r>
-              <a:rPr sz="1050" b="0" i="0">
+          <p:cNvPr id="171" name="TextBox 170"/>
+          <p:cNvSpPr txBox="1"/>
+          <p:nvPr/>
+        </p:nvSpPr>
+        <p:spPr>
+          <a:xfrm>
+            <a:off x="7022592" y="4235500"/>
+            <a:ext cx="786384" cy="173736"/>
+          </a:xfrm>
+          <a:prstGeom prst="rect">
+            <a:avLst/>
+          </a:prstGeom>
+          <a:noFill/>
+        </p:spPr>
+        <p:txBody>
+          <a:bodyPr wrap="square" lIns="0" rIns="0" tIns="0" bIns="0">
+            <a:spAutoFit/>
+          </a:bodyPr>
+          <a:lstStyle/>
+          <a:p>
+            <a:pPr algn="r"/>
+            <a:r>
+              <a:rPr sz="950" b="0" i="0">
+                <a:solidFill>
+                  <a:srgbClr val="212529"/>
+                </a:solidFill>
+                <a:latin typeface="Garamond"/>
+              </a:rPr>
+              <a:t>99,587</a:t>
+            </a:r>
+          </a:p>
+        </p:txBody>
+      </p:sp>
+      <p:sp>
+        <p:nvSpPr>
+          <p:cNvPr id="172" name="TextBox 171"/>
+          <p:cNvSpPr txBox="1"/>
+          <p:nvPr/>
+        </p:nvSpPr>
+        <p:spPr>
+          <a:xfrm>
+            <a:off x="8028431" y="4235500"/>
+            <a:ext cx="694944" cy="173736"/>
+          </a:xfrm>
+          <a:prstGeom prst="rect">
+            <a:avLst/>
+          </a:prstGeom>
+          <a:noFill/>
+        </p:spPr>
+        <p:txBody>
+          <a:bodyPr wrap="square" lIns="0" rIns="0" tIns="0" bIns="0">
+            <a:spAutoFit/>
+          </a:bodyPr>
+          <a:lstStyle/>
+          <a:p>
+            <a:pPr algn="r"/>
+            <a:r>
+              <a:rPr sz="950" b="0" i="0">
                 <a:solidFill>
                   <a:srgbClr val="212529"/>
                 </a:solidFill>
@@ -12518,29 +13848,64 @@
       </p:sp>
       <p:sp>
         <p:nvSpPr>
-          <p:cNvPr id="135" name="TextBox 134"/>
-          <p:cNvSpPr txBox="1"/>
-          <p:nvPr/>
-        </p:nvSpPr>
-        <p:spPr>
-          <a:xfrm>
-            <a:off x="7982712" y="4369003"/>
-            <a:ext cx="868680" cy="192024"/>
-          </a:xfrm>
-          <a:prstGeom prst="rect">
-            <a:avLst/>
-          </a:prstGeom>
-          <a:noFill/>
-        </p:spPr>
-        <p:txBody>
-          <a:bodyPr wrap="square" lIns="0" rIns="0" tIns="0" bIns="0">
-            <a:spAutoFit/>
-          </a:bodyPr>
-          <a:lstStyle/>
-          <a:p>
-            <a:pPr algn="r"/>
-            <a:r>
-              <a:rPr sz="1050" b="0" i="0">
+          <p:cNvPr id="173" name="TextBox 172"/>
+          <p:cNvSpPr txBox="1"/>
+          <p:nvPr/>
+        </p:nvSpPr>
+        <p:spPr>
+          <a:xfrm>
+            <a:off x="8723376" y="4235500"/>
+            <a:ext cx="841248" cy="173736"/>
+          </a:xfrm>
+          <a:prstGeom prst="rect">
+            <a:avLst/>
+          </a:prstGeom>
+          <a:noFill/>
+        </p:spPr>
+        <p:txBody>
+          <a:bodyPr wrap="square" lIns="0" rIns="0" tIns="0" bIns="0">
+            <a:spAutoFit/>
+          </a:bodyPr>
+          <a:lstStyle/>
+          <a:p>
+            <a:pPr algn="r"/>
+            <a:r>
+              <a:rPr sz="950" b="0" i="0">
+                <a:solidFill>
+                  <a:srgbClr val="212529"/>
+                </a:solidFill>
+                <a:latin typeface="Garamond"/>
+              </a:rPr>
+              <a:t>64,761</a:t>
+            </a:r>
+          </a:p>
+        </p:txBody>
+      </p:sp>
+      <p:sp>
+        <p:nvSpPr>
+          <p:cNvPr id="174" name="TextBox 173"/>
+          <p:cNvSpPr txBox="1"/>
+          <p:nvPr/>
+        </p:nvSpPr>
+        <p:spPr>
+          <a:xfrm>
+            <a:off x="9564624" y="4235500"/>
+            <a:ext cx="786384" cy="173736"/>
+          </a:xfrm>
+          <a:prstGeom prst="rect">
+            <a:avLst/>
+          </a:prstGeom>
+          <a:noFill/>
+        </p:spPr>
+        <p:txBody>
+          <a:bodyPr wrap="square" lIns="0" rIns="0" tIns="0" bIns="0">
+            <a:spAutoFit/>
+          </a:bodyPr>
+          <a:lstStyle/>
+          <a:p>
+            <a:pPr algn="r"/>
+            <a:r>
+              <a:rPr sz="950" b="0" i="0">
                 <a:solidFill>
                   <a:srgbClr val="212529"/>
                 </a:solidFill>
@@ -12553,49 +13918,49 @@
       </p:sp>
       <p:sp>
         <p:nvSpPr>
-          <p:cNvPr id="136" name="TextBox 135"/>
-          <p:cNvSpPr txBox="1"/>
-          <p:nvPr/>
-        </p:nvSpPr>
-        <p:spPr>
-          <a:xfrm>
-            <a:off x="8851392" y="4369003"/>
-            <a:ext cx="868680" cy="192024"/>
-          </a:xfrm>
-          <a:prstGeom prst="rect">
-            <a:avLst/>
-          </a:prstGeom>
-          <a:noFill/>
-        </p:spPr>
-        <p:txBody>
-          <a:bodyPr wrap="square" lIns="0" rIns="0" tIns="0" bIns="0">
-            <a:spAutoFit/>
-          </a:bodyPr>
-          <a:lstStyle/>
-          <a:p>
-            <a:pPr algn="r"/>
-            <a:r>
-              <a:rPr sz="1050" b="0" i="0">
-                <a:solidFill>
-                  <a:srgbClr val="212529"/>
-                </a:solidFill>
-                <a:latin typeface="Garamond"/>
-              </a:rPr>
-              <a:t>64,761</a:t>
+          <p:cNvPr id="175" name="TextBox 174"/>
+          <p:cNvSpPr txBox="1"/>
+          <p:nvPr/>
+        </p:nvSpPr>
+        <p:spPr>
+          <a:xfrm>
+            <a:off x="10351007" y="4235500"/>
+            <a:ext cx="786384" cy="173736"/>
+          </a:xfrm>
+          <a:prstGeom prst="rect">
+            <a:avLst/>
+          </a:prstGeom>
+          <a:noFill/>
+        </p:spPr>
+        <p:txBody>
+          <a:bodyPr wrap="square" lIns="0" rIns="0" tIns="0" bIns="0">
+            <a:spAutoFit/>
+          </a:bodyPr>
+          <a:lstStyle/>
+          <a:p>
+            <a:pPr algn="r"/>
+            <a:r>
+              <a:rPr sz="950" b="0" i="0">
+                <a:solidFill>
+                  <a:srgbClr val="212529"/>
+                </a:solidFill>
+                <a:latin typeface="Garamond"/>
+              </a:rPr>
+              <a:t>78,629</a:t>
             </a:r>
           </a:p>
         </p:txBody>
       </p:sp>
       <p:cxnSp>
         <p:nvCxnSpPr>
-          <p:cNvPr id="137" name="Connector 136"/>
+          <p:cNvPr id="176" name="Connector 175"/>
           <p:cNvCxnSpPr/>
           <p:nvPr/>
         </p:nvCxnSpPr>
         <p:spPr>
           <a:xfrm>
-            <a:off x="502920" y="4604918"/>
-            <a:ext cx="9217152" cy="0"/>
+            <a:off x="457200" y="4465929"/>
+            <a:ext cx="10680191" cy="0"/>
           </a:xfrm>
           <a:prstGeom prst="line">
             <a:avLst/>
@@ -12624,14 +13989,14 @@
       </p:cxnSp>
       <p:sp>
         <p:nvSpPr>
-          <p:cNvPr id="138" name="TextBox 137"/>
-          <p:cNvSpPr txBox="1"/>
-          <p:nvPr/>
-        </p:nvSpPr>
-        <p:spPr>
-          <a:xfrm>
-            <a:off x="502920" y="4659782"/>
-            <a:ext cx="1188720" cy="192024"/>
+          <p:cNvPr id="177" name="TextBox 176"/>
+          <p:cNvSpPr txBox="1"/>
+          <p:nvPr/>
+        </p:nvSpPr>
+        <p:spPr>
+          <a:xfrm>
+            <a:off x="457200" y="4520793"/>
+            <a:ext cx="914400" cy="173736"/>
           </a:xfrm>
           <a:prstGeom prst="rect">
             <a:avLst/>
@@ -12646,7 +14011,7 @@
           <a:p>
             <a:pPr algn="l"/>
             <a:r>
-              <a:rPr sz="1050" b="1" i="0">
+              <a:rPr sz="950" b="1" i="0">
                 <a:solidFill>
                   <a:srgbClr val="212529"/>
                 </a:solidFill>
@@ -12659,29 +14024,29 @@
       </p:sp>
       <p:sp>
         <p:nvSpPr>
-          <p:cNvPr id="139" name="TextBox 138"/>
-          <p:cNvSpPr txBox="1"/>
-          <p:nvPr/>
-        </p:nvSpPr>
-        <p:spPr>
-          <a:xfrm>
-            <a:off x="1691640" y="4659782"/>
-            <a:ext cx="731520" cy="192024"/>
-          </a:xfrm>
-          <a:prstGeom prst="rect">
-            <a:avLst/>
-          </a:prstGeom>
-          <a:noFill/>
-        </p:spPr>
-        <p:txBody>
-          <a:bodyPr wrap="square" lIns="0" rIns="0" tIns="0" bIns="0">
-            <a:spAutoFit/>
-          </a:bodyPr>
-          <a:lstStyle/>
-          <a:p>
-            <a:pPr algn="r"/>
-            <a:r>
-              <a:rPr sz="1050" b="1" i="0">
+          <p:cNvPr id="178" name="TextBox 177"/>
+          <p:cNvSpPr txBox="1"/>
+          <p:nvPr/>
+        </p:nvSpPr>
+        <p:spPr>
+          <a:xfrm>
+            <a:off x="1371600" y="4520793"/>
+            <a:ext cx="694944" cy="173736"/>
+          </a:xfrm>
+          <a:prstGeom prst="rect">
+            <a:avLst/>
+          </a:prstGeom>
+          <a:noFill/>
+        </p:spPr>
+        <p:txBody>
+          <a:bodyPr wrap="square" lIns="0" rIns="0" tIns="0" bIns="0">
+            <a:spAutoFit/>
+          </a:bodyPr>
+          <a:lstStyle/>
+          <a:p>
+            <a:pPr algn="r"/>
+            <a:r>
+              <a:rPr sz="950" b="1" i="0">
                 <a:solidFill>
                   <a:srgbClr val="212529"/>
                 </a:solidFill>
@@ -12694,29 +14059,64 @@
       </p:sp>
       <p:sp>
         <p:nvSpPr>
-          <p:cNvPr id="140" name="TextBox 139"/>
-          <p:cNvSpPr txBox="1"/>
-          <p:nvPr/>
-        </p:nvSpPr>
-        <p:spPr>
-          <a:xfrm>
-            <a:off x="2423160" y="4659782"/>
-            <a:ext cx="868680" cy="192024"/>
-          </a:xfrm>
-          <a:prstGeom prst="rect">
-            <a:avLst/>
-          </a:prstGeom>
-          <a:noFill/>
-        </p:spPr>
-        <p:txBody>
-          <a:bodyPr wrap="square" lIns="0" rIns="0" tIns="0" bIns="0">
-            <a:spAutoFit/>
-          </a:bodyPr>
-          <a:lstStyle/>
-          <a:p>
-            <a:pPr algn="r"/>
-            <a:r>
-              <a:rPr sz="1050" b="1" i="0">
+          <p:cNvPr id="179" name="TextBox 178"/>
+          <p:cNvSpPr txBox="1"/>
+          <p:nvPr/>
+        </p:nvSpPr>
+        <p:spPr>
+          <a:xfrm>
+            <a:off x="2066543" y="4520793"/>
+            <a:ext cx="841248" cy="173736"/>
+          </a:xfrm>
+          <a:prstGeom prst="rect">
+            <a:avLst/>
+          </a:prstGeom>
+          <a:noFill/>
+        </p:spPr>
+        <p:txBody>
+          <a:bodyPr wrap="square" lIns="0" rIns="0" tIns="0" bIns="0">
+            <a:spAutoFit/>
+          </a:bodyPr>
+          <a:lstStyle/>
+          <a:p>
+            <a:pPr algn="r"/>
+            <a:r>
+              <a:rPr sz="950" b="1" i="0">
+                <a:solidFill>
+                  <a:srgbClr val="212529"/>
+                </a:solidFill>
+                <a:latin typeface="Garamond"/>
+              </a:rPr>
+              <a:t>839,825</a:t>
+            </a:r>
+          </a:p>
+        </p:txBody>
+      </p:sp>
+      <p:sp>
+        <p:nvSpPr>
+          <p:cNvPr id="180" name="TextBox 179"/>
+          <p:cNvSpPr txBox="1"/>
+          <p:nvPr/>
+        </p:nvSpPr>
+        <p:spPr>
+          <a:xfrm>
+            <a:off x="2907791" y="4520793"/>
+            <a:ext cx="786384" cy="173736"/>
+          </a:xfrm>
+          <a:prstGeom prst="rect">
+            <a:avLst/>
+          </a:prstGeom>
+          <a:noFill/>
+        </p:spPr>
+        <p:txBody>
+          <a:bodyPr wrap="square" lIns="0" rIns="0" tIns="0" bIns="0">
+            <a:spAutoFit/>
+          </a:bodyPr>
+          <a:lstStyle/>
+          <a:p>
+            <a:pPr algn="r"/>
+            <a:r>
+              <a:rPr sz="950" b="1" i="0">
                 <a:solidFill>
                   <a:srgbClr val="212529"/>
                 </a:solidFill>
@@ -12729,64 +14129,64 @@
       </p:sp>
       <p:sp>
         <p:nvSpPr>
-          <p:cNvPr id="141" name="TextBox 140"/>
-          <p:cNvSpPr txBox="1"/>
-          <p:nvPr/>
-        </p:nvSpPr>
-        <p:spPr>
-          <a:xfrm>
-            <a:off x="3291840" y="4659782"/>
-            <a:ext cx="868680" cy="192024"/>
-          </a:xfrm>
-          <a:prstGeom prst="rect">
-            <a:avLst/>
-          </a:prstGeom>
-          <a:noFill/>
-        </p:spPr>
-        <p:txBody>
-          <a:bodyPr wrap="square" lIns="0" rIns="0" tIns="0" bIns="0">
-            <a:spAutoFit/>
-          </a:bodyPr>
-          <a:lstStyle/>
-          <a:p>
-            <a:pPr algn="r"/>
-            <a:r>
-              <a:rPr sz="1050" b="1" i="0">
-                <a:solidFill>
-                  <a:srgbClr val="212529"/>
-                </a:solidFill>
-                <a:latin typeface="Garamond"/>
-              </a:rPr>
-              <a:t>839,825</a:t>
-            </a:r>
-          </a:p>
-        </p:txBody>
-      </p:sp>
-      <p:sp>
-        <p:nvSpPr>
-          <p:cNvPr id="142" name="TextBox 141"/>
-          <p:cNvSpPr txBox="1"/>
-          <p:nvPr/>
-        </p:nvSpPr>
-        <p:spPr>
-          <a:xfrm>
-            <a:off x="4471416" y="4659782"/>
-            <a:ext cx="731520" cy="192024"/>
-          </a:xfrm>
-          <a:prstGeom prst="rect">
-            <a:avLst/>
-          </a:prstGeom>
-          <a:noFill/>
-        </p:spPr>
-        <p:txBody>
-          <a:bodyPr wrap="square" lIns="0" rIns="0" tIns="0" bIns="0">
-            <a:spAutoFit/>
-          </a:bodyPr>
-          <a:lstStyle/>
-          <a:p>
-            <a:pPr algn="r"/>
-            <a:r>
-              <a:rPr sz="1050" b="1" i="0">
+          <p:cNvPr id="181" name="TextBox 180"/>
+          <p:cNvSpPr txBox="1"/>
+          <p:nvPr/>
+        </p:nvSpPr>
+        <p:spPr>
+          <a:xfrm>
+            <a:off x="3694176" y="4520793"/>
+            <a:ext cx="786384" cy="173736"/>
+          </a:xfrm>
+          <a:prstGeom prst="rect">
+            <a:avLst/>
+          </a:prstGeom>
+          <a:noFill/>
+        </p:spPr>
+        <p:txBody>
+          <a:bodyPr wrap="square" lIns="0" rIns="0" tIns="0" bIns="0">
+            <a:spAutoFit/>
+          </a:bodyPr>
+          <a:lstStyle/>
+          <a:p>
+            <a:pPr algn="r"/>
+            <a:r>
+              <a:rPr sz="950" b="1" i="0">
+                <a:solidFill>
+                  <a:srgbClr val="212529"/>
+                </a:solidFill>
+                <a:latin typeface="Garamond"/>
+              </a:rPr>
+              <a:t>1,221,832</a:t>
+            </a:r>
+          </a:p>
+        </p:txBody>
+      </p:sp>
+      <p:sp>
+        <p:nvSpPr>
+          <p:cNvPr id="182" name="TextBox 181"/>
+          <p:cNvSpPr txBox="1"/>
+          <p:nvPr/>
+        </p:nvSpPr>
+        <p:spPr>
+          <a:xfrm>
+            <a:off x="4700016" y="4520793"/>
+            <a:ext cx="694944" cy="173736"/>
+          </a:xfrm>
+          <a:prstGeom prst="rect">
+            <a:avLst/>
+          </a:prstGeom>
+          <a:noFill/>
+        </p:spPr>
+        <p:txBody>
+          <a:bodyPr wrap="square" lIns="0" rIns="0" tIns="0" bIns="0">
+            <a:spAutoFit/>
+          </a:bodyPr>
+          <a:lstStyle/>
+          <a:p>
+            <a:pPr algn="r"/>
+            <a:r>
+              <a:rPr sz="950" b="1" i="0">
                 <a:solidFill>
                   <a:srgbClr val="212529"/>
                 </a:solidFill>
@@ -12799,29 +14199,64 @@
       </p:sp>
       <p:sp>
         <p:nvSpPr>
-          <p:cNvPr id="143" name="TextBox 142"/>
-          <p:cNvSpPr txBox="1"/>
-          <p:nvPr/>
-        </p:nvSpPr>
-        <p:spPr>
-          <a:xfrm>
-            <a:off x="5202936" y="4659782"/>
-            <a:ext cx="868680" cy="192024"/>
-          </a:xfrm>
-          <a:prstGeom prst="rect">
-            <a:avLst/>
-          </a:prstGeom>
-          <a:noFill/>
-        </p:spPr>
-        <p:txBody>
-          <a:bodyPr wrap="square" lIns="0" rIns="0" tIns="0" bIns="0">
-            <a:spAutoFit/>
-          </a:bodyPr>
-          <a:lstStyle/>
-          <a:p>
-            <a:pPr algn="r"/>
-            <a:r>
-              <a:rPr sz="1050" b="1" i="0">
+          <p:cNvPr id="183" name="TextBox 182"/>
+          <p:cNvSpPr txBox="1"/>
+          <p:nvPr/>
+        </p:nvSpPr>
+        <p:spPr>
+          <a:xfrm>
+            <a:off x="5394959" y="4520793"/>
+            <a:ext cx="841248" cy="173736"/>
+          </a:xfrm>
+          <a:prstGeom prst="rect">
+            <a:avLst/>
+          </a:prstGeom>
+          <a:noFill/>
+        </p:spPr>
+        <p:txBody>
+          <a:bodyPr wrap="square" lIns="0" rIns="0" tIns="0" bIns="0">
+            <a:spAutoFit/>
+          </a:bodyPr>
+          <a:lstStyle/>
+          <a:p>
+            <a:pPr algn="r"/>
+            <a:r>
+              <a:rPr sz="950" b="1" i="0">
+                <a:solidFill>
+                  <a:srgbClr val="212529"/>
+                </a:solidFill>
+                <a:latin typeface="Garamond"/>
+              </a:rPr>
+              <a:t>821,894</a:t>
+            </a:r>
+          </a:p>
+        </p:txBody>
+      </p:sp>
+      <p:sp>
+        <p:nvSpPr>
+          <p:cNvPr id="184" name="TextBox 183"/>
+          <p:cNvSpPr txBox="1"/>
+          <p:nvPr/>
+        </p:nvSpPr>
+        <p:spPr>
+          <a:xfrm>
+            <a:off x="6236207" y="4520793"/>
+            <a:ext cx="786384" cy="173736"/>
+          </a:xfrm>
+          <a:prstGeom prst="rect">
+            <a:avLst/>
+          </a:prstGeom>
+          <a:noFill/>
+        </p:spPr>
+        <p:txBody>
+          <a:bodyPr wrap="square" lIns="0" rIns="0" tIns="0" bIns="0">
+            <a:spAutoFit/>
+          </a:bodyPr>
+          <a:lstStyle/>
+          <a:p>
+            <a:pPr algn="r"/>
+            <a:r>
+              <a:rPr sz="950" b="1" i="0">
                 <a:solidFill>
                   <a:srgbClr val="212529"/>
                 </a:solidFill>
@@ -12834,64 +14269,64 @@
       </p:sp>
       <p:sp>
         <p:nvSpPr>
-          <p:cNvPr id="144" name="TextBox 143"/>
-          <p:cNvSpPr txBox="1"/>
-          <p:nvPr/>
-        </p:nvSpPr>
-        <p:spPr>
-          <a:xfrm>
-            <a:off x="6071616" y="4659782"/>
-            <a:ext cx="868680" cy="192024"/>
-          </a:xfrm>
-          <a:prstGeom prst="rect">
-            <a:avLst/>
-          </a:prstGeom>
-          <a:noFill/>
-        </p:spPr>
-        <p:txBody>
-          <a:bodyPr wrap="square" lIns="0" rIns="0" tIns="0" bIns="0">
-            <a:spAutoFit/>
-          </a:bodyPr>
-          <a:lstStyle/>
-          <a:p>
-            <a:pPr algn="r"/>
-            <a:r>
-              <a:rPr sz="1050" b="1" i="0">
-                <a:solidFill>
-                  <a:srgbClr val="212529"/>
-                </a:solidFill>
-                <a:latin typeface="Garamond"/>
-              </a:rPr>
-              <a:t>821,894</a:t>
-            </a:r>
-          </a:p>
-        </p:txBody>
-      </p:sp>
-      <p:sp>
-        <p:nvSpPr>
-          <p:cNvPr id="145" name="TextBox 144"/>
-          <p:cNvSpPr txBox="1"/>
-          <p:nvPr/>
-        </p:nvSpPr>
-        <p:spPr>
-          <a:xfrm>
-            <a:off x="7251192" y="4659782"/>
-            <a:ext cx="731520" cy="192024"/>
-          </a:xfrm>
-          <a:prstGeom prst="rect">
-            <a:avLst/>
-          </a:prstGeom>
-          <a:noFill/>
-        </p:spPr>
-        <p:txBody>
-          <a:bodyPr wrap="square" lIns="0" rIns="0" tIns="0" bIns="0">
-            <a:spAutoFit/>
-          </a:bodyPr>
-          <a:lstStyle/>
-          <a:p>
-            <a:pPr algn="r"/>
-            <a:r>
-              <a:rPr sz="1050" b="1" i="0">
+          <p:cNvPr id="185" name="TextBox 184"/>
+          <p:cNvSpPr txBox="1"/>
+          <p:nvPr/>
+        </p:nvSpPr>
+        <p:spPr>
+          <a:xfrm>
+            <a:off x="7022592" y="4520793"/>
+            <a:ext cx="786384" cy="173736"/>
+          </a:xfrm>
+          <a:prstGeom prst="rect">
+            <a:avLst/>
+          </a:prstGeom>
+          <a:noFill/>
+        </p:spPr>
+        <p:txBody>
+          <a:bodyPr wrap="square" lIns="0" rIns="0" tIns="0" bIns="0">
+            <a:spAutoFit/>
+          </a:bodyPr>
+          <a:lstStyle/>
+          <a:p>
+            <a:pPr algn="r"/>
+            <a:r>
+              <a:rPr sz="950" b="1" i="0">
+                <a:solidFill>
+                  <a:srgbClr val="212529"/>
+                </a:solidFill>
+                <a:latin typeface="Garamond"/>
+              </a:rPr>
+              <a:t>1,203,862</a:t>
+            </a:r>
+          </a:p>
+        </p:txBody>
+      </p:sp>
+      <p:sp>
+        <p:nvSpPr>
+          <p:cNvPr id="186" name="TextBox 185"/>
+          <p:cNvSpPr txBox="1"/>
+          <p:nvPr/>
+        </p:nvSpPr>
+        <p:spPr>
+          <a:xfrm>
+            <a:off x="8028431" y="4520793"/>
+            <a:ext cx="694944" cy="173736"/>
+          </a:xfrm>
+          <a:prstGeom prst="rect">
+            <a:avLst/>
+          </a:prstGeom>
+          <a:noFill/>
+        </p:spPr>
+        <p:txBody>
+          <a:bodyPr wrap="square" lIns="0" rIns="0" tIns="0" bIns="0">
+            <a:spAutoFit/>
+          </a:bodyPr>
+          <a:lstStyle/>
+          <a:p>
+            <a:pPr algn="r"/>
+            <a:r>
+              <a:rPr sz="950" b="1" i="0">
                 <a:solidFill>
                   <a:srgbClr val="212529"/>
                 </a:solidFill>
@@ -12904,29 +14339,64 @@
       </p:sp>
       <p:sp>
         <p:nvSpPr>
-          <p:cNvPr id="146" name="TextBox 145"/>
-          <p:cNvSpPr txBox="1"/>
-          <p:nvPr/>
-        </p:nvSpPr>
-        <p:spPr>
-          <a:xfrm>
-            <a:off x="7982712" y="4659782"/>
-            <a:ext cx="868680" cy="192024"/>
-          </a:xfrm>
-          <a:prstGeom prst="rect">
-            <a:avLst/>
-          </a:prstGeom>
-          <a:noFill/>
-        </p:spPr>
-        <p:txBody>
-          <a:bodyPr wrap="square" lIns="0" rIns="0" tIns="0" bIns="0">
-            <a:spAutoFit/>
-          </a:bodyPr>
-          <a:lstStyle/>
-          <a:p>
-            <a:pPr algn="r"/>
-            <a:r>
-              <a:rPr sz="1050" b="1" i="0">
+          <p:cNvPr id="187" name="TextBox 186"/>
+          <p:cNvSpPr txBox="1"/>
+          <p:nvPr/>
+        </p:nvSpPr>
+        <p:spPr>
+          <a:xfrm>
+            <a:off x="8723376" y="4520793"/>
+            <a:ext cx="841248" cy="173736"/>
+          </a:xfrm>
+          <a:prstGeom prst="rect">
+            <a:avLst/>
+          </a:prstGeom>
+          <a:noFill/>
+        </p:spPr>
+        <p:txBody>
+          <a:bodyPr wrap="square" lIns="0" rIns="0" tIns="0" bIns="0">
+            <a:spAutoFit/>
+          </a:bodyPr>
+          <a:lstStyle/>
+          <a:p>
+            <a:pPr algn="r"/>
+            <a:r>
+              <a:rPr sz="950" b="1" i="0">
+                <a:solidFill>
+                  <a:srgbClr val="212529"/>
+                </a:solidFill>
+                <a:latin typeface="Garamond"/>
+              </a:rPr>
+              <a:t>634,658</a:t>
+            </a:r>
+          </a:p>
+        </p:txBody>
+      </p:sp>
+      <p:sp>
+        <p:nvSpPr>
+          <p:cNvPr id="188" name="TextBox 187"/>
+          <p:cNvSpPr txBox="1"/>
+          <p:nvPr/>
+        </p:nvSpPr>
+        <p:spPr>
+          <a:xfrm>
+            <a:off x="9564624" y="4520793"/>
+            <a:ext cx="786384" cy="173736"/>
+          </a:xfrm>
+          <a:prstGeom prst="rect">
+            <a:avLst/>
+          </a:prstGeom>
+          <a:noFill/>
+        </p:spPr>
+        <p:txBody>
+          <a:bodyPr wrap="square" lIns="0" rIns="0" tIns="0" bIns="0">
+            <a:spAutoFit/>
+          </a:bodyPr>
+          <a:lstStyle/>
+          <a:p>
+            <a:pPr algn="r"/>
+            <a:r>
+              <a:rPr sz="950" b="1" i="0">
                 <a:solidFill>
                   <a:srgbClr val="212529"/>
                 </a:solidFill>
@@ -12939,49 +14409,49 @@
       </p:sp>
       <p:sp>
         <p:nvSpPr>
-          <p:cNvPr id="147" name="TextBox 146"/>
-          <p:cNvSpPr txBox="1"/>
-          <p:nvPr/>
-        </p:nvSpPr>
-        <p:spPr>
-          <a:xfrm>
-            <a:off x="8851392" y="4659782"/>
-            <a:ext cx="868680" cy="192024"/>
-          </a:xfrm>
-          <a:prstGeom prst="rect">
-            <a:avLst/>
-          </a:prstGeom>
-          <a:noFill/>
-        </p:spPr>
-        <p:txBody>
-          <a:bodyPr wrap="square" lIns="0" rIns="0" tIns="0" bIns="0">
-            <a:spAutoFit/>
-          </a:bodyPr>
-          <a:lstStyle/>
-          <a:p>
-            <a:pPr algn="r"/>
-            <a:r>
-              <a:rPr sz="1050" b="1" i="0">
-                <a:solidFill>
-                  <a:srgbClr val="212529"/>
-                </a:solidFill>
-                <a:latin typeface="Garamond"/>
-              </a:rPr>
-              <a:t>634,658</a:t>
-            </a:r>
-          </a:p>
-        </p:txBody>
-      </p:sp>
-      <p:sp>
-        <p:nvSpPr>
-          <p:cNvPr id="148" name="TextBox 147"/>
-          <p:cNvSpPr txBox="1"/>
-          <p:nvPr/>
-        </p:nvSpPr>
-        <p:spPr>
-          <a:xfrm>
-            <a:off x="502920" y="4897526"/>
-            <a:ext cx="3200400" cy="192024"/>
+          <p:cNvPr id="189" name="TextBox 188"/>
+          <p:cNvSpPr txBox="1"/>
+          <p:nvPr/>
+        </p:nvSpPr>
+        <p:spPr>
+          <a:xfrm>
+            <a:off x="10351007" y="4520793"/>
+            <a:ext cx="786384" cy="173736"/>
+          </a:xfrm>
+          <a:prstGeom prst="rect">
+            <a:avLst/>
+          </a:prstGeom>
+          <a:noFill/>
+        </p:spPr>
+        <p:txBody>
+          <a:bodyPr wrap="square" lIns="0" rIns="0" tIns="0" bIns="0">
+            <a:spAutoFit/>
+          </a:bodyPr>
+          <a:lstStyle/>
+          <a:p>
+            <a:pPr algn="r"/>
+            <a:r>
+              <a:rPr sz="950" b="1" i="0">
+                <a:solidFill>
+                  <a:srgbClr val="212529"/>
+                </a:solidFill>
+                <a:latin typeface="Garamond"/>
+              </a:rPr>
+              <a:t>944,897</a:t>
+            </a:r>
+          </a:p>
+        </p:txBody>
+      </p:sp>
+      <p:sp>
+        <p:nvSpPr>
+          <p:cNvPr id="190" name="TextBox 189"/>
+          <p:cNvSpPr txBox="1"/>
+          <p:nvPr/>
+        </p:nvSpPr>
+        <p:spPr>
+          <a:xfrm>
+            <a:off x="457200" y="4749393"/>
+            <a:ext cx="3291840" cy="173736"/>
           </a:xfrm>
           <a:prstGeom prst="rect">
             <a:avLst/>
@@ -12996,42 +14466,42 @@
           <a:p>
             <a:pPr algn="l"/>
             <a:r>
-              <a:rPr sz="1050" b="1" i="0">
-                <a:solidFill>
-                  <a:srgbClr val="212529"/>
-                </a:solidFill>
-                <a:latin typeface="Garamond"/>
-              </a:rPr>
-              <a:t>Distinct persons (new + from last year)</a:t>
-            </a:r>
-          </a:p>
-        </p:txBody>
-      </p:sp>
-      <p:sp>
-        <p:nvSpPr>
-          <p:cNvPr id="149" name="TextBox 148"/>
-          <p:cNvSpPr txBox="1"/>
-          <p:nvPr/>
-        </p:nvSpPr>
-        <p:spPr>
-          <a:xfrm>
-            <a:off x="1691640" y="4897526"/>
-            <a:ext cx="2468880" cy="192024"/>
-          </a:xfrm>
-          <a:prstGeom prst="rect">
-            <a:avLst/>
-          </a:prstGeom>
-          <a:noFill/>
-        </p:spPr>
-        <p:txBody>
-          <a:bodyPr wrap="square" lIns="0" rIns="0" tIns="0" bIns="0">
-            <a:spAutoFit/>
-          </a:bodyPr>
-          <a:lstStyle/>
-          <a:p>
-            <a:pPr algn="r"/>
-            <a:r>
-              <a:rPr sz="1050" b="1" i="0">
+              <a:rPr sz="950" b="1" i="0">
+                <a:solidFill>
+                  <a:srgbClr val="212529"/>
+                </a:solidFill>
+                <a:latin typeface="Garamond"/>
+              </a:rPr>
+              <a:t>Distinct persons (New + Last year)</a:t>
+            </a:r>
+          </a:p>
+        </p:txBody>
+      </p:sp>
+      <p:sp>
+        <p:nvSpPr>
+          <p:cNvPr id="191" name="TextBox 190"/>
+          <p:cNvSpPr txBox="1"/>
+          <p:nvPr/>
+        </p:nvSpPr>
+        <p:spPr>
+          <a:xfrm>
+            <a:off x="1371600" y="4749393"/>
+            <a:ext cx="3108960" cy="173736"/>
+          </a:xfrm>
+          <a:prstGeom prst="rect">
+            <a:avLst/>
+          </a:prstGeom>
+          <a:noFill/>
+        </p:spPr>
+        <p:txBody>
+          <a:bodyPr wrap="square" lIns="0" rIns="0" tIns="0" bIns="0">
+            <a:spAutoFit/>
+          </a:bodyPr>
+          <a:lstStyle/>
+          <a:p>
+            <a:pPr algn="r"/>
+            <a:r>
+              <a:rPr sz="950" b="1" i="0">
                 <a:solidFill>
                   <a:srgbClr val="212529"/>
                 </a:solidFill>
@@ -13044,29 +14514,29 @@
       </p:sp>
       <p:sp>
         <p:nvSpPr>
-          <p:cNvPr id="150" name="TextBox 149"/>
-          <p:cNvSpPr txBox="1"/>
-          <p:nvPr/>
-        </p:nvSpPr>
-        <p:spPr>
-          <a:xfrm>
-            <a:off x="4471416" y="4897526"/>
-            <a:ext cx="2468880" cy="192024"/>
-          </a:xfrm>
-          <a:prstGeom prst="rect">
-            <a:avLst/>
-          </a:prstGeom>
-          <a:noFill/>
-        </p:spPr>
-        <p:txBody>
-          <a:bodyPr wrap="square" lIns="0" rIns="0" tIns="0" bIns="0">
-            <a:spAutoFit/>
-          </a:bodyPr>
-          <a:lstStyle/>
-          <a:p>
-            <a:pPr algn="r"/>
-            <a:r>
-              <a:rPr sz="1050" b="1" i="0">
+          <p:cNvPr id="192" name="TextBox 191"/>
+          <p:cNvSpPr txBox="1"/>
+          <p:nvPr/>
+        </p:nvSpPr>
+        <p:spPr>
+          <a:xfrm>
+            <a:off x="4700016" y="4749393"/>
+            <a:ext cx="3108960" cy="173736"/>
+          </a:xfrm>
+          <a:prstGeom prst="rect">
+            <a:avLst/>
+          </a:prstGeom>
+          <a:noFill/>
+        </p:spPr>
+        <p:txBody>
+          <a:bodyPr wrap="square" lIns="0" rIns="0" tIns="0" bIns="0">
+            <a:spAutoFit/>
+          </a:bodyPr>
+          <a:lstStyle/>
+          <a:p>
+            <a:pPr algn="r"/>
+            <a:r>
+              <a:rPr sz="950" b="1" i="0">
                 <a:solidFill>
                   <a:srgbClr val="212529"/>
                 </a:solidFill>
@@ -13079,29 +14549,29 @@
       </p:sp>
       <p:sp>
         <p:nvSpPr>
-          <p:cNvPr id="151" name="TextBox 150"/>
-          <p:cNvSpPr txBox="1"/>
-          <p:nvPr/>
-        </p:nvSpPr>
-        <p:spPr>
-          <a:xfrm>
-            <a:off x="7251192" y="4897526"/>
-            <a:ext cx="2468880" cy="192024"/>
-          </a:xfrm>
-          <a:prstGeom prst="rect">
-            <a:avLst/>
-          </a:prstGeom>
-          <a:noFill/>
-        </p:spPr>
-        <p:txBody>
-          <a:bodyPr wrap="square" lIns="0" rIns="0" tIns="0" bIns="0">
-            <a:spAutoFit/>
-          </a:bodyPr>
-          <a:lstStyle/>
-          <a:p>
-            <a:pPr algn="r"/>
-            <a:r>
-              <a:rPr sz="1050" b="1" i="0">
+          <p:cNvPr id="193" name="TextBox 192"/>
+          <p:cNvSpPr txBox="1"/>
+          <p:nvPr/>
+        </p:nvSpPr>
+        <p:spPr>
+          <a:xfrm>
+            <a:off x="8028431" y="4749393"/>
+            <a:ext cx="3108960" cy="173736"/>
+          </a:xfrm>
+          <a:prstGeom prst="rect">
+            <a:avLst/>
+          </a:prstGeom>
+          <a:noFill/>
+        </p:spPr>
+        <p:txBody>
+          <a:bodyPr wrap="square" lIns="0" rIns="0" tIns="0" bIns="0">
+            <a:spAutoFit/>
+          </a:bodyPr>
+          <a:lstStyle/>
+          <a:p>
+            <a:pPr algn="r"/>
+            <a:r>
+              <a:rPr sz="950" b="1" i="0">
                 <a:solidFill>
                   <a:srgbClr val="212529"/>
                 </a:solidFill>
@@ -13114,14 +14584,14 @@
       </p:sp>
       <p:sp>
         <p:nvSpPr>
-          <p:cNvPr id="152" name="TextBox 151"/>
-          <p:cNvSpPr txBox="1"/>
-          <p:nvPr/>
-        </p:nvSpPr>
-        <p:spPr>
-          <a:xfrm>
-            <a:off x="502920" y="5135270"/>
-            <a:ext cx="3200400" cy="192024"/>
+          <p:cNvPr id="194" name="TextBox 193"/>
+          <p:cNvSpPr txBox="1"/>
+          <p:nvPr/>
+        </p:nvSpPr>
+        <p:spPr>
+          <a:xfrm>
+            <a:off x="457200" y="4977993"/>
+            <a:ext cx="3291840" cy="173736"/>
           </a:xfrm>
           <a:prstGeom prst="rect">
             <a:avLst/>
@@ -13136,42 +14606,42 @@
           <a:p>
             <a:pPr algn="l"/>
             <a:r>
-              <a:rPr sz="1050" b="1" i="0">
+              <a:rPr sz="950" b="1" i="0">
                 <a:solidFill>
                   <a:srgbClr val="102D5E"/>
                 </a:solidFill>
                 <a:latin typeface="Garamond"/>
               </a:rPr>
-              <a:t>March supplement (ASEC)</a:t>
-            </a:r>
-          </a:p>
-        </p:txBody>
-      </p:sp>
-      <p:sp>
-        <p:nvSpPr>
-          <p:cNvPr id="153" name="TextBox 152"/>
-          <p:cNvSpPr txBox="1"/>
-          <p:nvPr/>
-        </p:nvSpPr>
-        <p:spPr>
-          <a:xfrm>
-            <a:off x="1691640" y="5135270"/>
-            <a:ext cx="2468880" cy="192024"/>
-          </a:xfrm>
-          <a:prstGeom prst="rect">
-            <a:avLst/>
-          </a:prstGeom>
-          <a:noFill/>
-        </p:spPr>
-        <p:txBody>
-          <a:bodyPr wrap="square" lIns="0" rIns="0" tIns="0" bIns="0">
-            <a:spAutoFit/>
-          </a:bodyPr>
-          <a:lstStyle/>
-          <a:p>
-            <a:pPr algn="r"/>
-            <a:r>
-              <a:rPr sz="1050" b="1" i="0">
+              <a:t>March supplement (ASEC), each person once</a:t>
+            </a:r>
+          </a:p>
+        </p:txBody>
+      </p:sp>
+      <p:sp>
+        <p:nvSpPr>
+          <p:cNvPr id="195" name="TextBox 194"/>
+          <p:cNvSpPr txBox="1"/>
+          <p:nvPr/>
+        </p:nvSpPr>
+        <p:spPr>
+          <a:xfrm>
+            <a:off x="1371600" y="4977993"/>
+            <a:ext cx="3108960" cy="173736"/>
+          </a:xfrm>
+          <a:prstGeom prst="rect">
+            <a:avLst/>
+          </a:prstGeom>
+          <a:noFill/>
+        </p:spPr>
+        <p:txBody>
+          <a:bodyPr wrap="square" lIns="0" rIns="0" tIns="0" bIns="0">
+            <a:spAutoFit/>
+          </a:bodyPr>
+          <a:lstStyle/>
+          <a:p>
+            <a:pPr algn="r"/>
+            <a:r>
+              <a:rPr sz="950" b="1" i="0">
                 <a:solidFill>
                   <a:srgbClr val="102D5E"/>
                 </a:solidFill>
@@ -13184,29 +14654,29 @@
       </p:sp>
       <p:sp>
         <p:nvSpPr>
-          <p:cNvPr id="154" name="TextBox 153"/>
-          <p:cNvSpPr txBox="1"/>
-          <p:nvPr/>
-        </p:nvSpPr>
-        <p:spPr>
-          <a:xfrm>
-            <a:off x="4471416" y="5135270"/>
-            <a:ext cx="2468880" cy="192024"/>
-          </a:xfrm>
-          <a:prstGeom prst="rect">
-            <a:avLst/>
-          </a:prstGeom>
-          <a:noFill/>
-        </p:spPr>
-        <p:txBody>
-          <a:bodyPr wrap="square" lIns="0" rIns="0" tIns="0" bIns="0">
-            <a:spAutoFit/>
-          </a:bodyPr>
-          <a:lstStyle/>
-          <a:p>
-            <a:pPr algn="r"/>
-            <a:r>
-              <a:rPr sz="1050" b="1" i="0">
+          <p:cNvPr id="196" name="TextBox 195"/>
+          <p:cNvSpPr txBox="1"/>
+          <p:nvPr/>
+        </p:nvSpPr>
+        <p:spPr>
+          <a:xfrm>
+            <a:off x="4700016" y="4977993"/>
+            <a:ext cx="3108960" cy="173736"/>
+          </a:xfrm>
+          <a:prstGeom prst="rect">
+            <a:avLst/>
+          </a:prstGeom>
+          <a:noFill/>
+        </p:spPr>
+        <p:txBody>
+          <a:bodyPr wrap="square" lIns="0" rIns="0" tIns="0" bIns="0">
+            <a:spAutoFit/>
+          </a:bodyPr>
+          <a:lstStyle/>
+          <a:p>
+            <a:pPr algn="r"/>
+            <a:r>
+              <a:rPr sz="950" b="1" i="0">
                 <a:solidFill>
                   <a:srgbClr val="102D5E"/>
                 </a:solidFill>
@@ -13219,29 +14689,29 @@
       </p:sp>
       <p:sp>
         <p:nvSpPr>
-          <p:cNvPr id="155" name="TextBox 154"/>
-          <p:cNvSpPr txBox="1"/>
-          <p:nvPr/>
-        </p:nvSpPr>
-        <p:spPr>
-          <a:xfrm>
-            <a:off x="7251192" y="5135270"/>
-            <a:ext cx="2468880" cy="192024"/>
-          </a:xfrm>
-          <a:prstGeom prst="rect">
-            <a:avLst/>
-          </a:prstGeom>
-          <a:noFill/>
-        </p:spPr>
-        <p:txBody>
-          <a:bodyPr wrap="square" lIns="0" rIns="0" tIns="0" bIns="0">
-            <a:spAutoFit/>
-          </a:bodyPr>
-          <a:lstStyle/>
-          <a:p>
-            <a:pPr algn="r"/>
-            <a:r>
-              <a:rPr sz="1050" b="1" i="0">
+          <p:cNvPr id="197" name="TextBox 196"/>
+          <p:cNvSpPr txBox="1"/>
+          <p:nvPr/>
+        </p:nvSpPr>
+        <p:spPr>
+          <a:xfrm>
+            <a:off x="8028431" y="4977993"/>
+            <a:ext cx="3108960" cy="173736"/>
+          </a:xfrm>
+          <a:prstGeom prst="rect">
+            <a:avLst/>
+          </a:prstGeom>
+          <a:noFill/>
+        </p:spPr>
+        <p:txBody>
+          <a:bodyPr wrap="square" lIns="0" rIns="0" tIns="0" bIns="0">
+            <a:spAutoFit/>
+          </a:bodyPr>
+          <a:lstStyle/>
+          <a:p>
+            <a:pPr algn="r"/>
+            <a:r>
+              <a:rPr sz="950" b="1" i="0">
                 <a:solidFill>
                   <a:srgbClr val="102D5E"/>
                 </a:solidFill>
@@ -13254,14 +14724,14 @@
       </p:sp>
       <p:cxnSp>
         <p:nvCxnSpPr>
-          <p:cNvPr id="156" name="Connector 155"/>
+          <p:cNvPr id="198" name="Connector 197"/>
           <p:cNvCxnSpPr/>
           <p:nvPr/>
         </p:nvCxnSpPr>
         <p:spPr>
           <a:xfrm>
-            <a:off x="502920" y="5373014"/>
-            <a:ext cx="9217152" cy="0"/>
+            <a:off x="457200" y="5206593"/>
+            <a:ext cx="10680191" cy="0"/>
           </a:xfrm>
           <a:prstGeom prst="line">
             <a:avLst/>
@@ -13290,14 +14760,14 @@
       </p:cxnSp>
       <p:sp>
         <p:nvSpPr>
-          <p:cNvPr id="157" name="TextBox 156"/>
-          <p:cNvSpPr txBox="1"/>
-          <p:nvPr/>
-        </p:nvSpPr>
-        <p:spPr>
-          <a:xfrm>
-            <a:off x="502920" y="5501030"/>
-            <a:ext cx="10972800" cy="173736"/>
+          <p:cNvPr id="199" name="TextBox 198"/>
+          <p:cNvSpPr txBox="1"/>
+          <p:nvPr/>
+        </p:nvSpPr>
+        <p:spPr>
+          <a:xfrm>
+            <a:off x="457200" y="5325465"/>
+            <a:ext cx="11247120" cy="173736"/>
           </a:xfrm>
           <a:prstGeom prst="rect">
             <a:avLst/>
@@ -13318,14 +14788,14 @@
                 </a:solidFill>
                 <a:latin typeface="Garamond"/>
               </a:rPr>
-              <a:t>Adults (18+). New: first interview ever. From last year: back after being interviewed the previous year (first time this year). From this year: already interviewed in an earlier month of the year. Each distinct person is counted once in New or From last year, so those two sums give the year's distinct persons; adding the From-this-year repeats gives the interviews. The ASEC interviews each person once: the March respondents plus the February–April oversamples, 1.45× a single March.</a:t>
-            </a:r>
-          </a:p>
-        </p:txBody>
-      </p:sp>
-      <p:sp>
-        <p:nvSpPr>
-          <p:cNvPr id="158" name="Rounded Rectangle 157">
+              <a:t>Adults (18+); every cell counts persons. Within a month: New + Earlier this year + Last year = Total, the month’s interviews (≈100k in the 2000s). Down a column: the Totals sum to the year’s interviews (2006: 1,221,832), while New + Last year counts each person exactly once → distinct persons (2006: 203,820 + 178,187 = 382,007). The ASEC = the March respondents + the February–April oversamples: 38% of the distinct persons, 12% of the interviews, 1.45× a single March.</a:t>
+            </a:r>
+          </a:p>
+        </p:txBody>
+      </p:sp>
+      <p:sp>
+        <p:nvSpPr>
+          <p:cNvPr id="200" name="Rounded Rectangle 199">
             <a:hlinkClick action="ppaction://hlinksldjump" r:id="rId2"/>
           </p:cNvPr>
           <p:cNvSpPr/>

--- a/report/data_cluster/sample_sizes_slides.pptx
+++ b/report/data_cluster/sample_sizes_slides.pptx
@@ -7897,7 +7897,7 @@
         <p:spPr>
           <a:xfrm>
             <a:off x="457200" y="1106424"/>
-            <a:ext cx="10680191" cy="0"/>
+            <a:ext cx="10844784" cy="0"/>
           </a:xfrm>
           <a:prstGeom prst="line">
             <a:avLst/>
@@ -7933,7 +7933,7 @@
         <p:spPr>
           <a:xfrm>
             <a:off x="1371600" y="1152144"/>
-            <a:ext cx="3108960" cy="219456"/>
+            <a:ext cx="3163824" cy="219456"/>
           </a:xfrm>
           <a:prstGeom prst="rect">
             <a:avLst/>
@@ -7968,7 +7968,7 @@
         <p:spPr>
           <a:xfrm>
             <a:off x="1371600" y="1399032"/>
-            <a:ext cx="694944" cy="164592"/>
+            <a:ext cx="603504" cy="164592"/>
           </a:xfrm>
           <a:prstGeom prst="rect">
             <a:avLst/>
@@ -8002,8 +8002,8 @@
         </p:nvSpPr>
         <p:spPr>
           <a:xfrm>
-            <a:off x="2066543" y="1399032"/>
-            <a:ext cx="841248" cy="164592"/>
+            <a:off x="1975104" y="1399032"/>
+            <a:ext cx="914400" cy="164592"/>
           </a:xfrm>
           <a:prstGeom prst="rect">
             <a:avLst/>
@@ -8024,8 +8024,7 @@
                 </a:solidFill>
                 <a:latin typeface="Garamond"/>
               </a:rPr>
-              <a:t>Earlier
-this year</a:t>
+              <a:t>Seen this yr</a:t>
             </a:r>
           </a:p>
         </p:txBody>
@@ -8038,8 +8037,8 @@
         </p:nvSpPr>
         <p:spPr>
           <a:xfrm>
-            <a:off x="2907791" y="1399032"/>
-            <a:ext cx="786384" cy="164592"/>
+            <a:off x="2889504" y="1399032"/>
+            <a:ext cx="914400" cy="164592"/>
           </a:xfrm>
           <a:prstGeom prst="rect">
             <a:avLst/>
@@ -8060,8 +8059,7 @@
                 </a:solidFill>
                 <a:latin typeface="Garamond"/>
               </a:rPr>
-              <a:t>Last
-year</a:t>
+              <a:t>Seen last yr</a:t>
             </a:r>
           </a:p>
         </p:txBody>
@@ -8074,8 +8072,8 @@
         </p:nvSpPr>
         <p:spPr>
           <a:xfrm>
-            <a:off x="3694176" y="1399032"/>
-            <a:ext cx="786384" cy="164592"/>
+            <a:off x="3803904" y="1399032"/>
+            <a:ext cx="731520" cy="164592"/>
           </a:xfrm>
           <a:prstGeom prst="rect">
             <a:avLst/>
@@ -8109,8 +8107,8 @@
         </p:nvSpPr>
         <p:spPr>
           <a:xfrm>
-            <a:off x="4700016" y="1152144"/>
-            <a:ext cx="3108960" cy="219456"/>
+            <a:off x="4754880" y="1152144"/>
+            <a:ext cx="3163824" cy="219456"/>
           </a:xfrm>
           <a:prstGeom prst="rect">
             <a:avLst/>
@@ -8144,8 +8142,8 @@
         </p:nvSpPr>
         <p:spPr>
           <a:xfrm>
-            <a:off x="4700016" y="1399032"/>
-            <a:ext cx="694944" cy="164592"/>
+            <a:off x="4754880" y="1399032"/>
+            <a:ext cx="603504" cy="164592"/>
           </a:xfrm>
           <a:prstGeom prst="rect">
             <a:avLst/>
@@ -8179,8 +8177,8 @@
         </p:nvSpPr>
         <p:spPr>
           <a:xfrm>
-            <a:off x="5394959" y="1399032"/>
-            <a:ext cx="841248" cy="164592"/>
+            <a:off x="5358384" y="1399032"/>
+            <a:ext cx="914400" cy="164592"/>
           </a:xfrm>
           <a:prstGeom prst="rect">
             <a:avLst/>
@@ -8201,8 +8199,7 @@
                 </a:solidFill>
                 <a:latin typeface="Garamond"/>
               </a:rPr>
-              <a:t>Earlier
-this year</a:t>
+              <a:t>Seen this yr</a:t>
             </a:r>
           </a:p>
         </p:txBody>
@@ -8215,8 +8212,8 @@
         </p:nvSpPr>
         <p:spPr>
           <a:xfrm>
-            <a:off x="6236207" y="1399032"/>
-            <a:ext cx="786384" cy="164592"/>
+            <a:off x="6272784" y="1399032"/>
+            <a:ext cx="914400" cy="164592"/>
           </a:xfrm>
           <a:prstGeom prst="rect">
             <a:avLst/>
@@ -8237,8 +8234,7 @@
                 </a:solidFill>
                 <a:latin typeface="Garamond"/>
               </a:rPr>
-              <a:t>Last
-year</a:t>
+              <a:t>Seen last yr</a:t>
             </a:r>
           </a:p>
         </p:txBody>
@@ -8251,8 +8247,8 @@
         </p:nvSpPr>
         <p:spPr>
           <a:xfrm>
-            <a:off x="7022592" y="1399032"/>
-            <a:ext cx="786384" cy="164592"/>
+            <a:off x="7187184" y="1399032"/>
+            <a:ext cx="731520" cy="164592"/>
           </a:xfrm>
           <a:prstGeom prst="rect">
             <a:avLst/>
@@ -8286,8 +8282,8 @@
         </p:nvSpPr>
         <p:spPr>
           <a:xfrm>
-            <a:off x="8028431" y="1152144"/>
-            <a:ext cx="3108960" cy="219456"/>
+            <a:off x="8138160" y="1152144"/>
+            <a:ext cx="3163824" cy="219456"/>
           </a:xfrm>
           <a:prstGeom prst="rect">
             <a:avLst/>
@@ -8321,8 +8317,8 @@
         </p:nvSpPr>
         <p:spPr>
           <a:xfrm>
-            <a:off x="8028431" y="1399032"/>
-            <a:ext cx="694944" cy="164592"/>
+            <a:off x="8138160" y="1399032"/>
+            <a:ext cx="603504" cy="164592"/>
           </a:xfrm>
           <a:prstGeom prst="rect">
             <a:avLst/>
@@ -8356,8 +8352,8 @@
         </p:nvSpPr>
         <p:spPr>
           <a:xfrm>
-            <a:off x="8723376" y="1399032"/>
-            <a:ext cx="841248" cy="164592"/>
+            <a:off x="8741664" y="1399032"/>
+            <a:ext cx="914400" cy="164592"/>
           </a:xfrm>
           <a:prstGeom prst="rect">
             <a:avLst/>
@@ -8378,8 +8374,7 @@
                 </a:solidFill>
                 <a:latin typeface="Garamond"/>
               </a:rPr>
-              <a:t>Earlier
-this year</a:t>
+              <a:t>Seen this yr</a:t>
             </a:r>
           </a:p>
         </p:txBody>
@@ -8392,8 +8387,8 @@
         </p:nvSpPr>
         <p:spPr>
           <a:xfrm>
-            <a:off x="9564624" y="1399032"/>
-            <a:ext cx="786384" cy="164592"/>
+            <a:off x="9656064" y="1399032"/>
+            <a:ext cx="914400" cy="164592"/>
           </a:xfrm>
           <a:prstGeom prst="rect">
             <a:avLst/>
@@ -8414,8 +8409,7 @@
                 </a:solidFill>
                 <a:latin typeface="Garamond"/>
               </a:rPr>
-              <a:t>Last
-year</a:t>
+              <a:t>Seen last yr</a:t>
             </a:r>
           </a:p>
         </p:txBody>
@@ -8428,8 +8422,8 @@
         </p:nvSpPr>
         <p:spPr>
           <a:xfrm>
-            <a:off x="10351007" y="1399032"/>
-            <a:ext cx="786384" cy="164592"/>
+            <a:off x="10570464" y="1399032"/>
+            <a:ext cx="731520" cy="164592"/>
           </a:xfrm>
           <a:prstGeom prst="rect">
             <a:avLst/>
@@ -8463,8 +8457,8 @@
         </p:nvCxnSpPr>
         <p:spPr>
           <a:xfrm>
-            <a:off x="457200" y="1828800"/>
-            <a:ext cx="10680191" cy="0"/>
+            <a:off x="457200" y="1664208"/>
+            <a:ext cx="10844784" cy="0"/>
           </a:xfrm>
           <a:prstGeom prst="line">
             <a:avLst/>
@@ -8499,7 +8493,7 @@
         </p:nvSpPr>
         <p:spPr>
           <a:xfrm>
-            <a:off x="457200" y="1901952"/>
+            <a:off x="457200" y="1737360"/>
             <a:ext cx="914400" cy="173736"/>
           </a:xfrm>
           <a:prstGeom prst="rect">
@@ -8534,8 +8528,8 @@
         </p:nvSpPr>
         <p:spPr>
           <a:xfrm>
-            <a:off x="1371600" y="1901952"/>
-            <a:ext cx="694944" cy="173736"/>
+            <a:off x="1371600" y="1737360"/>
+            <a:ext cx="603504" cy="173736"/>
           </a:xfrm>
           <a:prstGeom prst="rect">
             <a:avLst/>
@@ -8569,8 +8563,8 @@
         </p:nvSpPr>
         <p:spPr>
           <a:xfrm>
-            <a:off x="2066543" y="1901952"/>
-            <a:ext cx="841248" cy="173736"/>
+            <a:off x="1975104" y="1737360"/>
+            <a:ext cx="914400" cy="173736"/>
           </a:xfrm>
           <a:prstGeom prst="rect">
             <a:avLst/>
@@ -8604,8 +8598,8 @@
         </p:nvSpPr>
         <p:spPr>
           <a:xfrm>
-            <a:off x="2907791" y="1901952"/>
-            <a:ext cx="786384" cy="173736"/>
+            <a:off x="2889504" y="1737360"/>
+            <a:ext cx="914400" cy="173736"/>
           </a:xfrm>
           <a:prstGeom prst="rect">
             <a:avLst/>
@@ -8639,8 +8633,8 @@
         </p:nvSpPr>
         <p:spPr>
           <a:xfrm>
-            <a:off x="3694176" y="1901952"/>
-            <a:ext cx="786384" cy="173736"/>
+            <a:off x="3803904" y="1737360"/>
+            <a:ext cx="731520" cy="173736"/>
           </a:xfrm>
           <a:prstGeom prst="rect">
             <a:avLst/>
@@ -8674,8 +8668,8 @@
         </p:nvSpPr>
         <p:spPr>
           <a:xfrm>
-            <a:off x="4700016" y="1901952"/>
-            <a:ext cx="694944" cy="173736"/>
+            <a:off x="4754880" y="1737360"/>
+            <a:ext cx="603504" cy="173736"/>
           </a:xfrm>
           <a:prstGeom prst="rect">
             <a:avLst/>
@@ -8709,8 +8703,8 @@
         </p:nvSpPr>
         <p:spPr>
           <a:xfrm>
-            <a:off x="5394959" y="1901952"/>
-            <a:ext cx="841248" cy="173736"/>
+            <a:off x="5358384" y="1737360"/>
+            <a:ext cx="914400" cy="173736"/>
           </a:xfrm>
           <a:prstGeom prst="rect">
             <a:avLst/>
@@ -8744,8 +8738,8 @@
         </p:nvSpPr>
         <p:spPr>
           <a:xfrm>
-            <a:off x="6236207" y="1901952"/>
-            <a:ext cx="786384" cy="173736"/>
+            <a:off x="6272784" y="1737360"/>
+            <a:ext cx="914400" cy="173736"/>
           </a:xfrm>
           <a:prstGeom prst="rect">
             <a:avLst/>
@@ -8779,8 +8773,8 @@
         </p:nvSpPr>
         <p:spPr>
           <a:xfrm>
-            <a:off x="7022592" y="1901952"/>
-            <a:ext cx="786384" cy="173736"/>
+            <a:off x="7187184" y="1737360"/>
+            <a:ext cx="731520" cy="173736"/>
           </a:xfrm>
           <a:prstGeom prst="rect">
             <a:avLst/>
@@ -8814,8 +8808,8 @@
         </p:nvSpPr>
         <p:spPr>
           <a:xfrm>
-            <a:off x="8028431" y="1901952"/>
-            <a:ext cx="694944" cy="173736"/>
+            <a:off x="8138160" y="1737360"/>
+            <a:ext cx="603504" cy="173736"/>
           </a:xfrm>
           <a:prstGeom prst="rect">
             <a:avLst/>
@@ -8849,8 +8843,8 @@
         </p:nvSpPr>
         <p:spPr>
           <a:xfrm>
-            <a:off x="8723376" y="1901952"/>
-            <a:ext cx="841248" cy="173736"/>
+            <a:off x="8741664" y="1737360"/>
+            <a:ext cx="914400" cy="173736"/>
           </a:xfrm>
           <a:prstGeom prst="rect">
             <a:avLst/>
@@ -8884,8 +8878,8 @@
         </p:nvSpPr>
         <p:spPr>
           <a:xfrm>
-            <a:off x="9564624" y="1901952"/>
-            <a:ext cx="786384" cy="173736"/>
+            <a:off x="9656064" y="1737360"/>
+            <a:ext cx="914400" cy="173736"/>
           </a:xfrm>
           <a:prstGeom prst="rect">
             <a:avLst/>
@@ -8919,8 +8913,8 @@
         </p:nvSpPr>
         <p:spPr>
           <a:xfrm>
-            <a:off x="10351007" y="1901952"/>
-            <a:ext cx="786384" cy="173736"/>
+            <a:off x="10570464" y="1737360"/>
+            <a:ext cx="731520" cy="173736"/>
           </a:xfrm>
           <a:prstGeom prst="rect">
             <a:avLst/>
@@ -8954,7 +8948,7 @@
         </p:nvSpPr>
         <p:spPr>
           <a:xfrm>
-            <a:off x="457200" y="2114092"/>
+            <a:off x="457200" y="1949500"/>
             <a:ext cx="914400" cy="173736"/>
           </a:xfrm>
           <a:prstGeom prst="rect">
@@ -8989,8 +8983,8 @@
         </p:nvSpPr>
         <p:spPr>
           <a:xfrm>
-            <a:off x="1371600" y="2114092"/>
-            <a:ext cx="694944" cy="173736"/>
+            <a:off x="1371600" y="1949500"/>
+            <a:ext cx="603504" cy="173736"/>
           </a:xfrm>
           <a:prstGeom prst="rect">
             <a:avLst/>
@@ -9024,8 +9018,8 @@
         </p:nvSpPr>
         <p:spPr>
           <a:xfrm>
-            <a:off x="2066543" y="2114092"/>
-            <a:ext cx="841248" cy="173736"/>
+            <a:off x="1975104" y="1949500"/>
+            <a:ext cx="914400" cy="173736"/>
           </a:xfrm>
           <a:prstGeom prst="rect">
             <a:avLst/>
@@ -9059,8 +9053,8 @@
         </p:nvSpPr>
         <p:spPr>
           <a:xfrm>
-            <a:off x="2907791" y="2114092"/>
-            <a:ext cx="786384" cy="173736"/>
+            <a:off x="2889504" y="1949500"/>
+            <a:ext cx="914400" cy="173736"/>
           </a:xfrm>
           <a:prstGeom prst="rect">
             <a:avLst/>
@@ -9094,8 +9088,8 @@
         </p:nvSpPr>
         <p:spPr>
           <a:xfrm>
-            <a:off x="3694176" y="2114092"/>
-            <a:ext cx="786384" cy="173736"/>
+            <a:off x="3803904" y="1949500"/>
+            <a:ext cx="731520" cy="173736"/>
           </a:xfrm>
           <a:prstGeom prst="rect">
             <a:avLst/>
@@ -9129,8 +9123,8 @@
         </p:nvSpPr>
         <p:spPr>
           <a:xfrm>
-            <a:off x="4700016" y="2114092"/>
-            <a:ext cx="694944" cy="173736"/>
+            <a:off x="4754880" y="1949500"/>
+            <a:ext cx="603504" cy="173736"/>
           </a:xfrm>
           <a:prstGeom prst="rect">
             <a:avLst/>
@@ -9164,8 +9158,8 @@
         </p:nvSpPr>
         <p:spPr>
           <a:xfrm>
-            <a:off x="5394959" y="2114092"/>
-            <a:ext cx="841248" cy="173736"/>
+            <a:off x="5358384" y="1949500"/>
+            <a:ext cx="914400" cy="173736"/>
           </a:xfrm>
           <a:prstGeom prst="rect">
             <a:avLst/>
@@ -9199,8 +9193,8 @@
         </p:nvSpPr>
         <p:spPr>
           <a:xfrm>
-            <a:off x="6236207" y="2114092"/>
-            <a:ext cx="786384" cy="173736"/>
+            <a:off x="6272784" y="1949500"/>
+            <a:ext cx="914400" cy="173736"/>
           </a:xfrm>
           <a:prstGeom prst="rect">
             <a:avLst/>
@@ -9234,8 +9228,8 @@
         </p:nvSpPr>
         <p:spPr>
           <a:xfrm>
-            <a:off x="7022592" y="2114092"/>
-            <a:ext cx="786384" cy="173736"/>
+            <a:off x="7187184" y="1949500"/>
+            <a:ext cx="731520" cy="173736"/>
           </a:xfrm>
           <a:prstGeom prst="rect">
             <a:avLst/>
@@ -9269,8 +9263,8 @@
         </p:nvSpPr>
         <p:spPr>
           <a:xfrm>
-            <a:off x="8028431" y="2114092"/>
-            <a:ext cx="694944" cy="173736"/>
+            <a:off x="8138160" y="1949500"/>
+            <a:ext cx="603504" cy="173736"/>
           </a:xfrm>
           <a:prstGeom prst="rect">
             <a:avLst/>
@@ -9304,8 +9298,8 @@
         </p:nvSpPr>
         <p:spPr>
           <a:xfrm>
-            <a:off x="8723376" y="2114092"/>
-            <a:ext cx="841248" cy="173736"/>
+            <a:off x="8741664" y="1949500"/>
+            <a:ext cx="914400" cy="173736"/>
           </a:xfrm>
           <a:prstGeom prst="rect">
             <a:avLst/>
@@ -9339,8 +9333,8 @@
         </p:nvSpPr>
         <p:spPr>
           <a:xfrm>
-            <a:off x="9564624" y="2114092"/>
-            <a:ext cx="786384" cy="173736"/>
+            <a:off x="9656064" y="1949500"/>
+            <a:ext cx="914400" cy="173736"/>
           </a:xfrm>
           <a:prstGeom prst="rect">
             <a:avLst/>
@@ -9374,8 +9368,8 @@
         </p:nvSpPr>
         <p:spPr>
           <a:xfrm>
-            <a:off x="10351007" y="2114092"/>
-            <a:ext cx="786384" cy="173736"/>
+            <a:off x="10570464" y="1949500"/>
+            <a:ext cx="731520" cy="173736"/>
           </a:xfrm>
           <a:prstGeom prst="rect">
             <a:avLst/>
@@ -9409,7 +9403,7 @@
         </p:nvSpPr>
         <p:spPr>
           <a:xfrm>
-            <a:off x="457200" y="2326233"/>
+            <a:off x="457200" y="2161641"/>
             <a:ext cx="914400" cy="173736"/>
           </a:xfrm>
           <a:prstGeom prst="rect">
@@ -9444,8 +9438,8 @@
         </p:nvSpPr>
         <p:spPr>
           <a:xfrm>
-            <a:off x="1371600" y="2326233"/>
-            <a:ext cx="694944" cy="173736"/>
+            <a:off x="1371600" y="2161641"/>
+            <a:ext cx="603504" cy="173736"/>
           </a:xfrm>
           <a:prstGeom prst="rect">
             <a:avLst/>
@@ -9479,8 +9473,8 @@
         </p:nvSpPr>
         <p:spPr>
           <a:xfrm>
-            <a:off x="2066543" y="2326233"/>
-            <a:ext cx="841248" cy="173736"/>
+            <a:off x="1975104" y="2161641"/>
+            <a:ext cx="914400" cy="173736"/>
           </a:xfrm>
           <a:prstGeom prst="rect">
             <a:avLst/>
@@ -9514,8 +9508,8 @@
         </p:nvSpPr>
         <p:spPr>
           <a:xfrm>
-            <a:off x="2907791" y="2326233"/>
-            <a:ext cx="786384" cy="173736"/>
+            <a:off x="2889504" y="2161641"/>
+            <a:ext cx="914400" cy="173736"/>
           </a:xfrm>
           <a:prstGeom prst="rect">
             <a:avLst/>
@@ -9549,8 +9543,8 @@
         </p:nvSpPr>
         <p:spPr>
           <a:xfrm>
-            <a:off x="3694176" y="2326233"/>
-            <a:ext cx="786384" cy="173736"/>
+            <a:off x="3803904" y="2161641"/>
+            <a:ext cx="731520" cy="173736"/>
           </a:xfrm>
           <a:prstGeom prst="rect">
             <a:avLst/>
@@ -9584,8 +9578,8 @@
         </p:nvSpPr>
         <p:spPr>
           <a:xfrm>
-            <a:off x="4700016" y="2326233"/>
-            <a:ext cx="694944" cy="173736"/>
+            <a:off x="4754880" y="2161641"/>
+            <a:ext cx="603504" cy="173736"/>
           </a:xfrm>
           <a:prstGeom prst="rect">
             <a:avLst/>
@@ -9619,8 +9613,8 @@
         </p:nvSpPr>
         <p:spPr>
           <a:xfrm>
-            <a:off x="5394959" y="2326233"/>
-            <a:ext cx="841248" cy="173736"/>
+            <a:off x="5358384" y="2161641"/>
+            <a:ext cx="914400" cy="173736"/>
           </a:xfrm>
           <a:prstGeom prst="rect">
             <a:avLst/>
@@ -9654,8 +9648,8 @@
         </p:nvSpPr>
         <p:spPr>
           <a:xfrm>
-            <a:off x="6236207" y="2326233"/>
-            <a:ext cx="786384" cy="173736"/>
+            <a:off x="6272784" y="2161641"/>
+            <a:ext cx="914400" cy="173736"/>
           </a:xfrm>
           <a:prstGeom prst="rect">
             <a:avLst/>
@@ -9689,8 +9683,8 @@
         </p:nvSpPr>
         <p:spPr>
           <a:xfrm>
-            <a:off x="7022592" y="2326233"/>
-            <a:ext cx="786384" cy="173736"/>
+            <a:off x="7187184" y="2161641"/>
+            <a:ext cx="731520" cy="173736"/>
           </a:xfrm>
           <a:prstGeom prst="rect">
             <a:avLst/>
@@ -9724,8 +9718,8 @@
         </p:nvSpPr>
         <p:spPr>
           <a:xfrm>
-            <a:off x="8028431" y="2326233"/>
-            <a:ext cx="694944" cy="173736"/>
+            <a:off x="8138160" y="2161641"/>
+            <a:ext cx="603504" cy="173736"/>
           </a:xfrm>
           <a:prstGeom prst="rect">
             <a:avLst/>
@@ -9759,8 +9753,8 @@
         </p:nvSpPr>
         <p:spPr>
           <a:xfrm>
-            <a:off x="8723376" y="2326233"/>
-            <a:ext cx="841248" cy="173736"/>
+            <a:off x="8741664" y="2161641"/>
+            <a:ext cx="914400" cy="173736"/>
           </a:xfrm>
           <a:prstGeom prst="rect">
             <a:avLst/>
@@ -9794,8 +9788,8 @@
         </p:nvSpPr>
         <p:spPr>
           <a:xfrm>
-            <a:off x="9564624" y="2326233"/>
-            <a:ext cx="786384" cy="173736"/>
+            <a:off x="9656064" y="2161641"/>
+            <a:ext cx="914400" cy="173736"/>
           </a:xfrm>
           <a:prstGeom prst="rect">
             <a:avLst/>
@@ -9829,8 +9823,8 @@
         </p:nvSpPr>
         <p:spPr>
           <a:xfrm>
-            <a:off x="10351007" y="2326233"/>
-            <a:ext cx="786384" cy="173736"/>
+            <a:off x="10570464" y="2161641"/>
+            <a:ext cx="731520" cy="173736"/>
           </a:xfrm>
           <a:prstGeom prst="rect">
             <a:avLst/>
@@ -9864,7 +9858,7 @@
         </p:nvSpPr>
         <p:spPr>
           <a:xfrm>
-            <a:off x="457200" y="2538374"/>
+            <a:off x="457200" y="2373782"/>
             <a:ext cx="914400" cy="173736"/>
           </a:xfrm>
           <a:prstGeom prst="rect">
@@ -9899,8 +9893,8 @@
         </p:nvSpPr>
         <p:spPr>
           <a:xfrm>
-            <a:off x="1371600" y="2538374"/>
-            <a:ext cx="694944" cy="173736"/>
+            <a:off x="1371600" y="2373782"/>
+            <a:ext cx="603504" cy="173736"/>
           </a:xfrm>
           <a:prstGeom prst="rect">
             <a:avLst/>
@@ -9934,8 +9928,8 @@
         </p:nvSpPr>
         <p:spPr>
           <a:xfrm>
-            <a:off x="2066543" y="2538374"/>
-            <a:ext cx="841248" cy="173736"/>
+            <a:off x="1975104" y="2373782"/>
+            <a:ext cx="914400" cy="173736"/>
           </a:xfrm>
           <a:prstGeom prst="rect">
             <a:avLst/>
@@ -9969,8 +9963,8 @@
         </p:nvSpPr>
         <p:spPr>
           <a:xfrm>
-            <a:off x="2907791" y="2538374"/>
-            <a:ext cx="786384" cy="173736"/>
+            <a:off x="2889504" y="2373782"/>
+            <a:ext cx="914400" cy="173736"/>
           </a:xfrm>
           <a:prstGeom prst="rect">
             <a:avLst/>
@@ -10004,8 +9998,8 @@
         </p:nvSpPr>
         <p:spPr>
           <a:xfrm>
-            <a:off x="3694176" y="2538374"/>
-            <a:ext cx="786384" cy="173736"/>
+            <a:off x="3803904" y="2373782"/>
+            <a:ext cx="731520" cy="173736"/>
           </a:xfrm>
           <a:prstGeom prst="rect">
             <a:avLst/>
@@ -10039,8 +10033,8 @@
         </p:nvSpPr>
         <p:spPr>
           <a:xfrm>
-            <a:off x="4700016" y="2538374"/>
-            <a:ext cx="694944" cy="173736"/>
+            <a:off x="4754880" y="2373782"/>
+            <a:ext cx="603504" cy="173736"/>
           </a:xfrm>
           <a:prstGeom prst="rect">
             <a:avLst/>
@@ -10074,8 +10068,8 @@
         </p:nvSpPr>
         <p:spPr>
           <a:xfrm>
-            <a:off x="5394959" y="2538374"/>
-            <a:ext cx="841248" cy="173736"/>
+            <a:off x="5358384" y="2373782"/>
+            <a:ext cx="914400" cy="173736"/>
           </a:xfrm>
           <a:prstGeom prst="rect">
             <a:avLst/>
@@ -10109,8 +10103,8 @@
         </p:nvSpPr>
         <p:spPr>
           <a:xfrm>
-            <a:off x="6236207" y="2538374"/>
-            <a:ext cx="786384" cy="173736"/>
+            <a:off x="6272784" y="2373782"/>
+            <a:ext cx="914400" cy="173736"/>
           </a:xfrm>
           <a:prstGeom prst="rect">
             <a:avLst/>
@@ -10144,8 +10138,8 @@
         </p:nvSpPr>
         <p:spPr>
           <a:xfrm>
-            <a:off x="7022592" y="2538374"/>
-            <a:ext cx="786384" cy="173736"/>
+            <a:off x="7187184" y="2373782"/>
+            <a:ext cx="731520" cy="173736"/>
           </a:xfrm>
           <a:prstGeom prst="rect">
             <a:avLst/>
@@ -10179,8 +10173,8 @@
         </p:nvSpPr>
         <p:spPr>
           <a:xfrm>
-            <a:off x="8028431" y="2538374"/>
-            <a:ext cx="694944" cy="173736"/>
+            <a:off x="8138160" y="2373782"/>
+            <a:ext cx="603504" cy="173736"/>
           </a:xfrm>
           <a:prstGeom prst="rect">
             <a:avLst/>
@@ -10214,8 +10208,8 @@
         </p:nvSpPr>
         <p:spPr>
           <a:xfrm>
-            <a:off x="8723376" y="2538374"/>
-            <a:ext cx="841248" cy="173736"/>
+            <a:off x="8741664" y="2373782"/>
+            <a:ext cx="914400" cy="173736"/>
           </a:xfrm>
           <a:prstGeom prst="rect">
             <a:avLst/>
@@ -10249,8 +10243,8 @@
         </p:nvSpPr>
         <p:spPr>
           <a:xfrm>
-            <a:off x="9564624" y="2538374"/>
-            <a:ext cx="786384" cy="173736"/>
+            <a:off x="9656064" y="2373782"/>
+            <a:ext cx="914400" cy="173736"/>
           </a:xfrm>
           <a:prstGeom prst="rect">
             <a:avLst/>
@@ -10284,8 +10278,8 @@
         </p:nvSpPr>
         <p:spPr>
           <a:xfrm>
-            <a:off x="10351007" y="2538374"/>
-            <a:ext cx="786384" cy="173736"/>
+            <a:off x="10570464" y="2373782"/>
+            <a:ext cx="731520" cy="173736"/>
           </a:xfrm>
           <a:prstGeom prst="rect">
             <a:avLst/>
@@ -10319,7 +10313,7 @@
         </p:nvSpPr>
         <p:spPr>
           <a:xfrm>
-            <a:off x="457200" y="2750515"/>
+            <a:off x="457200" y="2585923"/>
             <a:ext cx="914400" cy="173736"/>
           </a:xfrm>
           <a:prstGeom prst="rect">
@@ -10354,8 +10348,8 @@
         </p:nvSpPr>
         <p:spPr>
           <a:xfrm>
-            <a:off x="1371600" y="2750515"/>
-            <a:ext cx="694944" cy="173736"/>
+            <a:off x="1371600" y="2585923"/>
+            <a:ext cx="603504" cy="173736"/>
           </a:xfrm>
           <a:prstGeom prst="rect">
             <a:avLst/>
@@ -10389,8 +10383,8 @@
         </p:nvSpPr>
         <p:spPr>
           <a:xfrm>
-            <a:off x="2066543" y="2750515"/>
-            <a:ext cx="841248" cy="173736"/>
+            <a:off x="1975104" y="2585923"/>
+            <a:ext cx="914400" cy="173736"/>
           </a:xfrm>
           <a:prstGeom prst="rect">
             <a:avLst/>
@@ -10424,8 +10418,8 @@
         </p:nvSpPr>
         <p:spPr>
           <a:xfrm>
-            <a:off x="2907791" y="2750515"/>
-            <a:ext cx="786384" cy="173736"/>
+            <a:off x="2889504" y="2585923"/>
+            <a:ext cx="914400" cy="173736"/>
           </a:xfrm>
           <a:prstGeom prst="rect">
             <a:avLst/>
@@ -10459,8 +10453,8 @@
         </p:nvSpPr>
         <p:spPr>
           <a:xfrm>
-            <a:off x="3694176" y="2750515"/>
-            <a:ext cx="786384" cy="173736"/>
+            <a:off x="3803904" y="2585923"/>
+            <a:ext cx="731520" cy="173736"/>
           </a:xfrm>
           <a:prstGeom prst="rect">
             <a:avLst/>
@@ -10494,8 +10488,8 @@
         </p:nvSpPr>
         <p:spPr>
           <a:xfrm>
-            <a:off x="4700016" y="2750515"/>
-            <a:ext cx="694944" cy="173736"/>
+            <a:off x="4754880" y="2585923"/>
+            <a:ext cx="603504" cy="173736"/>
           </a:xfrm>
           <a:prstGeom prst="rect">
             <a:avLst/>
@@ -10529,8 +10523,8 @@
         </p:nvSpPr>
         <p:spPr>
           <a:xfrm>
-            <a:off x="5394959" y="2750515"/>
-            <a:ext cx="841248" cy="173736"/>
+            <a:off x="5358384" y="2585923"/>
+            <a:ext cx="914400" cy="173736"/>
           </a:xfrm>
           <a:prstGeom prst="rect">
             <a:avLst/>
@@ -10564,8 +10558,8 @@
         </p:nvSpPr>
         <p:spPr>
           <a:xfrm>
-            <a:off x="6236207" y="2750515"/>
-            <a:ext cx="786384" cy="173736"/>
+            <a:off x="6272784" y="2585923"/>
+            <a:ext cx="914400" cy="173736"/>
           </a:xfrm>
           <a:prstGeom prst="rect">
             <a:avLst/>
@@ -10599,8 +10593,8 @@
         </p:nvSpPr>
         <p:spPr>
           <a:xfrm>
-            <a:off x="7022592" y="2750515"/>
-            <a:ext cx="786384" cy="173736"/>
+            <a:off x="7187184" y="2585923"/>
+            <a:ext cx="731520" cy="173736"/>
           </a:xfrm>
           <a:prstGeom prst="rect">
             <a:avLst/>
@@ -10634,8 +10628,8 @@
         </p:nvSpPr>
         <p:spPr>
           <a:xfrm>
-            <a:off x="8028431" y="2750515"/>
-            <a:ext cx="694944" cy="173736"/>
+            <a:off x="8138160" y="2585923"/>
+            <a:ext cx="603504" cy="173736"/>
           </a:xfrm>
           <a:prstGeom prst="rect">
             <a:avLst/>
@@ -10669,8 +10663,8 @@
         </p:nvSpPr>
         <p:spPr>
           <a:xfrm>
-            <a:off x="8723376" y="2750515"/>
-            <a:ext cx="841248" cy="173736"/>
+            <a:off x="8741664" y="2585923"/>
+            <a:ext cx="914400" cy="173736"/>
           </a:xfrm>
           <a:prstGeom prst="rect">
             <a:avLst/>
@@ -10704,8 +10698,8 @@
         </p:nvSpPr>
         <p:spPr>
           <a:xfrm>
-            <a:off x="9564624" y="2750515"/>
-            <a:ext cx="786384" cy="173736"/>
+            <a:off x="9656064" y="2585923"/>
+            <a:ext cx="914400" cy="173736"/>
           </a:xfrm>
           <a:prstGeom prst="rect">
             <a:avLst/>
@@ -10739,8 +10733,8 @@
         </p:nvSpPr>
         <p:spPr>
           <a:xfrm>
-            <a:off x="10351007" y="2750515"/>
-            <a:ext cx="786384" cy="173736"/>
+            <a:off x="10570464" y="2585923"/>
+            <a:ext cx="731520" cy="173736"/>
           </a:xfrm>
           <a:prstGeom prst="rect">
             <a:avLst/>
@@ -10774,7 +10768,7 @@
         </p:nvSpPr>
         <p:spPr>
           <a:xfrm>
-            <a:off x="457200" y="2962656"/>
+            <a:off x="457200" y="2798064"/>
             <a:ext cx="914400" cy="173736"/>
           </a:xfrm>
           <a:prstGeom prst="rect">
@@ -10809,8 +10803,8 @@
         </p:nvSpPr>
         <p:spPr>
           <a:xfrm>
-            <a:off x="1371600" y="2962656"/>
-            <a:ext cx="694944" cy="173736"/>
+            <a:off x="1371600" y="2798064"/>
+            <a:ext cx="603504" cy="173736"/>
           </a:xfrm>
           <a:prstGeom prst="rect">
             <a:avLst/>
@@ -10844,8 +10838,8 @@
         </p:nvSpPr>
         <p:spPr>
           <a:xfrm>
-            <a:off x="2066543" y="2962656"/>
-            <a:ext cx="841248" cy="173736"/>
+            <a:off x="1975104" y="2798064"/>
+            <a:ext cx="914400" cy="173736"/>
           </a:xfrm>
           <a:prstGeom prst="rect">
             <a:avLst/>
@@ -10879,8 +10873,8 @@
         </p:nvSpPr>
         <p:spPr>
           <a:xfrm>
-            <a:off x="2907791" y="2962656"/>
-            <a:ext cx="786384" cy="173736"/>
+            <a:off x="2889504" y="2798064"/>
+            <a:ext cx="914400" cy="173736"/>
           </a:xfrm>
           <a:prstGeom prst="rect">
             <a:avLst/>
@@ -10914,8 +10908,8 @@
         </p:nvSpPr>
         <p:spPr>
           <a:xfrm>
-            <a:off x="3694176" y="2962656"/>
-            <a:ext cx="786384" cy="173736"/>
+            <a:off x="3803904" y="2798064"/>
+            <a:ext cx="731520" cy="173736"/>
           </a:xfrm>
           <a:prstGeom prst="rect">
             <a:avLst/>
@@ -10949,8 +10943,8 @@
         </p:nvSpPr>
         <p:spPr>
           <a:xfrm>
-            <a:off x="4700016" y="2962656"/>
-            <a:ext cx="694944" cy="173736"/>
+            <a:off x="4754880" y="2798064"/>
+            <a:ext cx="603504" cy="173736"/>
           </a:xfrm>
           <a:prstGeom prst="rect">
             <a:avLst/>
@@ -10984,8 +10978,8 @@
         </p:nvSpPr>
         <p:spPr>
           <a:xfrm>
-            <a:off x="5394959" y="2962656"/>
-            <a:ext cx="841248" cy="173736"/>
+            <a:off x="5358384" y="2798064"/>
+            <a:ext cx="914400" cy="173736"/>
           </a:xfrm>
           <a:prstGeom prst="rect">
             <a:avLst/>
@@ -11019,8 +11013,8 @@
         </p:nvSpPr>
         <p:spPr>
           <a:xfrm>
-            <a:off x="6236207" y="2962656"/>
-            <a:ext cx="786384" cy="173736"/>
+            <a:off x="6272784" y="2798064"/>
+            <a:ext cx="914400" cy="173736"/>
           </a:xfrm>
           <a:prstGeom prst="rect">
             <a:avLst/>
@@ -11054,8 +11048,8 @@
         </p:nvSpPr>
         <p:spPr>
           <a:xfrm>
-            <a:off x="7022592" y="2962656"/>
-            <a:ext cx="786384" cy="173736"/>
+            <a:off x="7187184" y="2798064"/>
+            <a:ext cx="731520" cy="173736"/>
           </a:xfrm>
           <a:prstGeom prst="rect">
             <a:avLst/>
@@ -11089,8 +11083,8 @@
         </p:nvSpPr>
         <p:spPr>
           <a:xfrm>
-            <a:off x="8028431" y="2962656"/>
-            <a:ext cx="694944" cy="173736"/>
+            <a:off x="8138160" y="2798064"/>
+            <a:ext cx="603504" cy="173736"/>
           </a:xfrm>
           <a:prstGeom prst="rect">
             <a:avLst/>
@@ -11124,8 +11118,8 @@
         </p:nvSpPr>
         <p:spPr>
           <a:xfrm>
-            <a:off x="8723376" y="2962656"/>
-            <a:ext cx="841248" cy="173736"/>
+            <a:off x="8741664" y="2798064"/>
+            <a:ext cx="914400" cy="173736"/>
           </a:xfrm>
           <a:prstGeom prst="rect">
             <a:avLst/>
@@ -11159,8 +11153,8 @@
         </p:nvSpPr>
         <p:spPr>
           <a:xfrm>
-            <a:off x="9564624" y="2962656"/>
-            <a:ext cx="786384" cy="173736"/>
+            <a:off x="9656064" y="2798064"/>
+            <a:ext cx="914400" cy="173736"/>
           </a:xfrm>
           <a:prstGeom prst="rect">
             <a:avLst/>
@@ -11194,8 +11188,8 @@
         </p:nvSpPr>
         <p:spPr>
           <a:xfrm>
-            <a:off x="10351007" y="2962656"/>
-            <a:ext cx="786384" cy="173736"/>
+            <a:off x="10570464" y="2798064"/>
+            <a:ext cx="731520" cy="173736"/>
           </a:xfrm>
           <a:prstGeom prst="rect">
             <a:avLst/>
@@ -11229,7 +11223,7 @@
         </p:nvSpPr>
         <p:spPr>
           <a:xfrm>
-            <a:off x="457200" y="3174796"/>
+            <a:off x="457200" y="3010204"/>
             <a:ext cx="914400" cy="173736"/>
           </a:xfrm>
           <a:prstGeom prst="rect">
@@ -11264,8 +11258,8 @@
         </p:nvSpPr>
         <p:spPr>
           <a:xfrm>
-            <a:off x="1371600" y="3174796"/>
-            <a:ext cx="694944" cy="173736"/>
+            <a:off x="1371600" y="3010204"/>
+            <a:ext cx="603504" cy="173736"/>
           </a:xfrm>
           <a:prstGeom prst="rect">
             <a:avLst/>
@@ -11299,8 +11293,8 @@
         </p:nvSpPr>
         <p:spPr>
           <a:xfrm>
-            <a:off x="2066543" y="3174796"/>
-            <a:ext cx="841248" cy="173736"/>
+            <a:off x="1975104" y="3010204"/>
+            <a:ext cx="914400" cy="173736"/>
           </a:xfrm>
           <a:prstGeom prst="rect">
             <a:avLst/>
@@ -11334,8 +11328,8 @@
         </p:nvSpPr>
         <p:spPr>
           <a:xfrm>
-            <a:off x="2907791" y="3174796"/>
-            <a:ext cx="786384" cy="173736"/>
+            <a:off x="2889504" y="3010204"/>
+            <a:ext cx="914400" cy="173736"/>
           </a:xfrm>
           <a:prstGeom prst="rect">
             <a:avLst/>
@@ -11369,8 +11363,8 @@
         </p:nvSpPr>
         <p:spPr>
           <a:xfrm>
-            <a:off x="3694176" y="3174796"/>
-            <a:ext cx="786384" cy="173736"/>
+            <a:off x="3803904" y="3010204"/>
+            <a:ext cx="731520" cy="173736"/>
           </a:xfrm>
           <a:prstGeom prst="rect">
             <a:avLst/>
@@ -11404,8 +11398,8 @@
         </p:nvSpPr>
         <p:spPr>
           <a:xfrm>
-            <a:off x="4700016" y="3174796"/>
-            <a:ext cx="694944" cy="173736"/>
+            <a:off x="4754880" y="3010204"/>
+            <a:ext cx="603504" cy="173736"/>
           </a:xfrm>
           <a:prstGeom prst="rect">
             <a:avLst/>
@@ -11439,8 +11433,8 @@
         </p:nvSpPr>
         <p:spPr>
           <a:xfrm>
-            <a:off x="5394959" y="3174796"/>
-            <a:ext cx="841248" cy="173736"/>
+            <a:off x="5358384" y="3010204"/>
+            <a:ext cx="914400" cy="173736"/>
           </a:xfrm>
           <a:prstGeom prst="rect">
             <a:avLst/>
@@ -11474,8 +11468,8 @@
         </p:nvSpPr>
         <p:spPr>
           <a:xfrm>
-            <a:off x="6236207" y="3174796"/>
-            <a:ext cx="786384" cy="173736"/>
+            <a:off x="6272784" y="3010204"/>
+            <a:ext cx="914400" cy="173736"/>
           </a:xfrm>
           <a:prstGeom prst="rect">
             <a:avLst/>
@@ -11509,8 +11503,8 @@
         </p:nvSpPr>
         <p:spPr>
           <a:xfrm>
-            <a:off x="7022592" y="3174796"/>
-            <a:ext cx="786384" cy="173736"/>
+            <a:off x="7187184" y="3010204"/>
+            <a:ext cx="731520" cy="173736"/>
           </a:xfrm>
           <a:prstGeom prst="rect">
             <a:avLst/>
@@ -11544,8 +11538,8 @@
         </p:nvSpPr>
         <p:spPr>
           <a:xfrm>
-            <a:off x="8028431" y="3174796"/>
-            <a:ext cx="694944" cy="173736"/>
+            <a:off x="8138160" y="3010204"/>
+            <a:ext cx="603504" cy="173736"/>
           </a:xfrm>
           <a:prstGeom prst="rect">
             <a:avLst/>
@@ -11579,8 +11573,8 @@
         </p:nvSpPr>
         <p:spPr>
           <a:xfrm>
-            <a:off x="8723376" y="3174796"/>
-            <a:ext cx="841248" cy="173736"/>
+            <a:off x="8741664" y="3010204"/>
+            <a:ext cx="914400" cy="173736"/>
           </a:xfrm>
           <a:prstGeom prst="rect">
             <a:avLst/>
@@ -11614,8 +11608,8 @@
         </p:nvSpPr>
         <p:spPr>
           <a:xfrm>
-            <a:off x="9564624" y="3174796"/>
-            <a:ext cx="786384" cy="173736"/>
+            <a:off x="9656064" y="3010204"/>
+            <a:ext cx="914400" cy="173736"/>
           </a:xfrm>
           <a:prstGeom prst="rect">
             <a:avLst/>
@@ -11649,8 +11643,8 @@
         </p:nvSpPr>
         <p:spPr>
           <a:xfrm>
-            <a:off x="10351007" y="3174796"/>
-            <a:ext cx="786384" cy="173736"/>
+            <a:off x="10570464" y="3010204"/>
+            <a:ext cx="731520" cy="173736"/>
           </a:xfrm>
           <a:prstGeom prst="rect">
             <a:avLst/>
@@ -11684,7 +11678,7 @@
         </p:nvSpPr>
         <p:spPr>
           <a:xfrm>
-            <a:off x="457200" y="3386937"/>
+            <a:off x="457200" y="3222345"/>
             <a:ext cx="914400" cy="173736"/>
           </a:xfrm>
           <a:prstGeom prst="rect">
@@ -11719,8 +11713,8 @@
         </p:nvSpPr>
         <p:spPr>
           <a:xfrm>
-            <a:off x="1371600" y="3386937"/>
-            <a:ext cx="694944" cy="173736"/>
+            <a:off x="1371600" y="3222345"/>
+            <a:ext cx="603504" cy="173736"/>
           </a:xfrm>
           <a:prstGeom prst="rect">
             <a:avLst/>
@@ -11754,8 +11748,8 @@
         </p:nvSpPr>
         <p:spPr>
           <a:xfrm>
-            <a:off x="2066543" y="3386937"/>
-            <a:ext cx="841248" cy="173736"/>
+            <a:off x="1975104" y="3222345"/>
+            <a:ext cx="914400" cy="173736"/>
           </a:xfrm>
           <a:prstGeom prst="rect">
             <a:avLst/>
@@ -11789,8 +11783,8 @@
         </p:nvSpPr>
         <p:spPr>
           <a:xfrm>
-            <a:off x="2907791" y="3386937"/>
-            <a:ext cx="786384" cy="173736"/>
+            <a:off x="2889504" y="3222345"/>
+            <a:ext cx="914400" cy="173736"/>
           </a:xfrm>
           <a:prstGeom prst="rect">
             <a:avLst/>
@@ -11824,8 +11818,8 @@
         </p:nvSpPr>
         <p:spPr>
           <a:xfrm>
-            <a:off x="3694176" y="3386937"/>
-            <a:ext cx="786384" cy="173736"/>
+            <a:off x="3803904" y="3222345"/>
+            <a:ext cx="731520" cy="173736"/>
           </a:xfrm>
           <a:prstGeom prst="rect">
             <a:avLst/>
@@ -11859,8 +11853,8 @@
         </p:nvSpPr>
         <p:spPr>
           <a:xfrm>
-            <a:off x="4700016" y="3386937"/>
-            <a:ext cx="694944" cy="173736"/>
+            <a:off x="4754880" y="3222345"/>
+            <a:ext cx="603504" cy="173736"/>
           </a:xfrm>
           <a:prstGeom prst="rect">
             <a:avLst/>
@@ -11894,8 +11888,8 @@
         </p:nvSpPr>
         <p:spPr>
           <a:xfrm>
-            <a:off x="5394959" y="3386937"/>
-            <a:ext cx="841248" cy="173736"/>
+            <a:off x="5358384" y="3222345"/>
+            <a:ext cx="914400" cy="173736"/>
           </a:xfrm>
           <a:prstGeom prst="rect">
             <a:avLst/>
@@ -11929,8 +11923,8 @@
         </p:nvSpPr>
         <p:spPr>
           <a:xfrm>
-            <a:off x="6236207" y="3386937"/>
-            <a:ext cx="786384" cy="173736"/>
+            <a:off x="6272784" y="3222345"/>
+            <a:ext cx="914400" cy="173736"/>
           </a:xfrm>
           <a:prstGeom prst="rect">
             <a:avLst/>
@@ -11964,8 +11958,8 @@
         </p:nvSpPr>
         <p:spPr>
           <a:xfrm>
-            <a:off x="7022592" y="3386937"/>
-            <a:ext cx="786384" cy="173736"/>
+            <a:off x="7187184" y="3222345"/>
+            <a:ext cx="731520" cy="173736"/>
           </a:xfrm>
           <a:prstGeom prst="rect">
             <a:avLst/>
@@ -11999,8 +11993,8 @@
         </p:nvSpPr>
         <p:spPr>
           <a:xfrm>
-            <a:off x="8028431" y="3386937"/>
-            <a:ext cx="694944" cy="173736"/>
+            <a:off x="8138160" y="3222345"/>
+            <a:ext cx="603504" cy="173736"/>
           </a:xfrm>
           <a:prstGeom prst="rect">
             <a:avLst/>
@@ -12034,8 +12028,8 @@
         </p:nvSpPr>
         <p:spPr>
           <a:xfrm>
-            <a:off x="8723376" y="3386937"/>
-            <a:ext cx="841248" cy="173736"/>
+            <a:off x="8741664" y="3222345"/>
+            <a:ext cx="914400" cy="173736"/>
           </a:xfrm>
           <a:prstGeom prst="rect">
             <a:avLst/>
@@ -12069,8 +12063,8 @@
         </p:nvSpPr>
         <p:spPr>
           <a:xfrm>
-            <a:off x="9564624" y="3386937"/>
-            <a:ext cx="786384" cy="173736"/>
+            <a:off x="9656064" y="3222345"/>
+            <a:ext cx="914400" cy="173736"/>
           </a:xfrm>
           <a:prstGeom prst="rect">
             <a:avLst/>
@@ -12104,8 +12098,8 @@
         </p:nvSpPr>
         <p:spPr>
           <a:xfrm>
-            <a:off x="10351007" y="3386937"/>
-            <a:ext cx="786384" cy="173736"/>
+            <a:off x="10570464" y="3222345"/>
+            <a:ext cx="731520" cy="173736"/>
           </a:xfrm>
           <a:prstGeom prst="rect">
             <a:avLst/>
@@ -12139,7 +12133,7 @@
         </p:nvSpPr>
         <p:spPr>
           <a:xfrm>
-            <a:off x="457200" y="3599078"/>
+            <a:off x="457200" y="3434486"/>
             <a:ext cx="914400" cy="173736"/>
           </a:xfrm>
           <a:prstGeom prst="rect">
@@ -12174,8 +12168,8 @@
         </p:nvSpPr>
         <p:spPr>
           <a:xfrm>
-            <a:off x="1371600" y="3599078"/>
-            <a:ext cx="694944" cy="173736"/>
+            <a:off x="1371600" y="3434486"/>
+            <a:ext cx="603504" cy="173736"/>
           </a:xfrm>
           <a:prstGeom prst="rect">
             <a:avLst/>
@@ -12209,8 +12203,8 @@
         </p:nvSpPr>
         <p:spPr>
           <a:xfrm>
-            <a:off x="2066543" y="3599078"/>
-            <a:ext cx="841248" cy="173736"/>
+            <a:off x="1975104" y="3434486"/>
+            <a:ext cx="914400" cy="173736"/>
           </a:xfrm>
           <a:prstGeom prst="rect">
             <a:avLst/>
@@ -12244,8 +12238,8 @@
         </p:nvSpPr>
         <p:spPr>
           <a:xfrm>
-            <a:off x="2907791" y="3599078"/>
-            <a:ext cx="786384" cy="173736"/>
+            <a:off x="2889504" y="3434486"/>
+            <a:ext cx="914400" cy="173736"/>
           </a:xfrm>
           <a:prstGeom prst="rect">
             <a:avLst/>
@@ -12279,8 +12273,8 @@
         </p:nvSpPr>
         <p:spPr>
           <a:xfrm>
-            <a:off x="3694176" y="3599078"/>
-            <a:ext cx="786384" cy="173736"/>
+            <a:off x="3803904" y="3434486"/>
+            <a:ext cx="731520" cy="173736"/>
           </a:xfrm>
           <a:prstGeom prst="rect">
             <a:avLst/>
@@ -12314,8 +12308,8 @@
         </p:nvSpPr>
         <p:spPr>
           <a:xfrm>
-            <a:off x="4700016" y="3599078"/>
-            <a:ext cx="694944" cy="173736"/>
+            <a:off x="4754880" y="3434486"/>
+            <a:ext cx="603504" cy="173736"/>
           </a:xfrm>
           <a:prstGeom prst="rect">
             <a:avLst/>
@@ -12349,8 +12343,8 @@
         </p:nvSpPr>
         <p:spPr>
           <a:xfrm>
-            <a:off x="5394959" y="3599078"/>
-            <a:ext cx="841248" cy="173736"/>
+            <a:off x="5358384" y="3434486"/>
+            <a:ext cx="914400" cy="173736"/>
           </a:xfrm>
           <a:prstGeom prst="rect">
             <a:avLst/>
@@ -12384,8 +12378,8 @@
         </p:nvSpPr>
         <p:spPr>
           <a:xfrm>
-            <a:off x="6236207" y="3599078"/>
-            <a:ext cx="786384" cy="173736"/>
+            <a:off x="6272784" y="3434486"/>
+            <a:ext cx="914400" cy="173736"/>
           </a:xfrm>
           <a:prstGeom prst="rect">
             <a:avLst/>
@@ -12419,8 +12413,8 @@
         </p:nvSpPr>
         <p:spPr>
           <a:xfrm>
-            <a:off x="7022592" y="3599078"/>
-            <a:ext cx="786384" cy="173736"/>
+            <a:off x="7187184" y="3434486"/>
+            <a:ext cx="731520" cy="173736"/>
           </a:xfrm>
           <a:prstGeom prst="rect">
             <a:avLst/>
@@ -12454,8 +12448,8 @@
         </p:nvSpPr>
         <p:spPr>
           <a:xfrm>
-            <a:off x="8028431" y="3599078"/>
-            <a:ext cx="694944" cy="173736"/>
+            <a:off x="8138160" y="3434486"/>
+            <a:ext cx="603504" cy="173736"/>
           </a:xfrm>
           <a:prstGeom prst="rect">
             <a:avLst/>
@@ -12489,8 +12483,8 @@
         </p:nvSpPr>
         <p:spPr>
           <a:xfrm>
-            <a:off x="8723376" y="3599078"/>
-            <a:ext cx="841248" cy="173736"/>
+            <a:off x="8741664" y="3434486"/>
+            <a:ext cx="914400" cy="173736"/>
           </a:xfrm>
           <a:prstGeom prst="rect">
             <a:avLst/>
@@ -12524,8 +12518,8 @@
         </p:nvSpPr>
         <p:spPr>
           <a:xfrm>
-            <a:off x="9564624" y="3599078"/>
-            <a:ext cx="786384" cy="173736"/>
+            <a:off x="9656064" y="3434486"/>
+            <a:ext cx="914400" cy="173736"/>
           </a:xfrm>
           <a:prstGeom prst="rect">
             <a:avLst/>
@@ -12559,8 +12553,8 @@
         </p:nvSpPr>
         <p:spPr>
           <a:xfrm>
-            <a:off x="10351007" y="3599078"/>
-            <a:ext cx="786384" cy="173736"/>
+            <a:off x="10570464" y="3434486"/>
+            <a:ext cx="731520" cy="173736"/>
           </a:xfrm>
           <a:prstGeom prst="rect">
             <a:avLst/>
@@ -12594,7 +12588,7 @@
         </p:nvSpPr>
         <p:spPr>
           <a:xfrm>
-            <a:off x="457200" y="3811219"/>
+            <a:off x="457200" y="3646627"/>
             <a:ext cx="914400" cy="173736"/>
           </a:xfrm>
           <a:prstGeom prst="rect">
@@ -12629,8 +12623,8 @@
         </p:nvSpPr>
         <p:spPr>
           <a:xfrm>
-            <a:off x="1371600" y="3811219"/>
-            <a:ext cx="694944" cy="173736"/>
+            <a:off x="1371600" y="3646627"/>
+            <a:ext cx="603504" cy="173736"/>
           </a:xfrm>
           <a:prstGeom prst="rect">
             <a:avLst/>
@@ -12664,8 +12658,8 @@
         </p:nvSpPr>
         <p:spPr>
           <a:xfrm>
-            <a:off x="2066543" y="3811219"/>
-            <a:ext cx="841248" cy="173736"/>
+            <a:off x="1975104" y="3646627"/>
+            <a:ext cx="914400" cy="173736"/>
           </a:xfrm>
           <a:prstGeom prst="rect">
             <a:avLst/>
@@ -12699,8 +12693,8 @@
         </p:nvSpPr>
         <p:spPr>
           <a:xfrm>
-            <a:off x="2907791" y="3811219"/>
-            <a:ext cx="786384" cy="173736"/>
+            <a:off x="2889504" y="3646627"/>
+            <a:ext cx="914400" cy="173736"/>
           </a:xfrm>
           <a:prstGeom prst="rect">
             <a:avLst/>
@@ -12734,8 +12728,8 @@
         </p:nvSpPr>
         <p:spPr>
           <a:xfrm>
-            <a:off x="3694176" y="3811219"/>
-            <a:ext cx="786384" cy="173736"/>
+            <a:off x="3803904" y="3646627"/>
+            <a:ext cx="731520" cy="173736"/>
           </a:xfrm>
           <a:prstGeom prst="rect">
             <a:avLst/>
@@ -12769,8 +12763,8 @@
         </p:nvSpPr>
         <p:spPr>
           <a:xfrm>
-            <a:off x="4700016" y="3811219"/>
-            <a:ext cx="694944" cy="173736"/>
+            <a:off x="4754880" y="3646627"/>
+            <a:ext cx="603504" cy="173736"/>
           </a:xfrm>
           <a:prstGeom prst="rect">
             <a:avLst/>
@@ -12804,8 +12798,8 @@
         </p:nvSpPr>
         <p:spPr>
           <a:xfrm>
-            <a:off x="5394959" y="3811219"/>
-            <a:ext cx="841248" cy="173736"/>
+            <a:off x="5358384" y="3646627"/>
+            <a:ext cx="914400" cy="173736"/>
           </a:xfrm>
           <a:prstGeom prst="rect">
             <a:avLst/>
@@ -12839,8 +12833,8 @@
         </p:nvSpPr>
         <p:spPr>
           <a:xfrm>
-            <a:off x="6236207" y="3811219"/>
-            <a:ext cx="786384" cy="173736"/>
+            <a:off x="6272784" y="3646627"/>
+            <a:ext cx="914400" cy="173736"/>
           </a:xfrm>
           <a:prstGeom prst="rect">
             <a:avLst/>
@@ -12874,8 +12868,8 @@
         </p:nvSpPr>
         <p:spPr>
           <a:xfrm>
-            <a:off x="7022592" y="3811219"/>
-            <a:ext cx="786384" cy="173736"/>
+            <a:off x="7187184" y="3646627"/>
+            <a:ext cx="731520" cy="173736"/>
           </a:xfrm>
           <a:prstGeom prst="rect">
             <a:avLst/>
@@ -12909,8 +12903,8 @@
         </p:nvSpPr>
         <p:spPr>
           <a:xfrm>
-            <a:off x="8028431" y="3811219"/>
-            <a:ext cx="694944" cy="173736"/>
+            <a:off x="8138160" y="3646627"/>
+            <a:ext cx="603504" cy="173736"/>
           </a:xfrm>
           <a:prstGeom prst="rect">
             <a:avLst/>
@@ -12944,8 +12938,8 @@
         </p:nvSpPr>
         <p:spPr>
           <a:xfrm>
-            <a:off x="8723376" y="3811219"/>
-            <a:ext cx="841248" cy="173736"/>
+            <a:off x="8741664" y="3646627"/>
+            <a:ext cx="914400" cy="173736"/>
           </a:xfrm>
           <a:prstGeom prst="rect">
             <a:avLst/>
@@ -12979,8 +12973,8 @@
         </p:nvSpPr>
         <p:spPr>
           <a:xfrm>
-            <a:off x="9564624" y="3811219"/>
-            <a:ext cx="786384" cy="173736"/>
+            <a:off x="9656064" y="3646627"/>
+            <a:ext cx="914400" cy="173736"/>
           </a:xfrm>
           <a:prstGeom prst="rect">
             <a:avLst/>
@@ -13014,8 +13008,8 @@
         </p:nvSpPr>
         <p:spPr>
           <a:xfrm>
-            <a:off x="10351007" y="3811219"/>
-            <a:ext cx="786384" cy="173736"/>
+            <a:off x="10570464" y="3646627"/>
+            <a:ext cx="731520" cy="173736"/>
           </a:xfrm>
           <a:prstGeom prst="rect">
             <a:avLst/>
@@ -13049,7 +13043,7 @@
         </p:nvSpPr>
         <p:spPr>
           <a:xfrm>
-            <a:off x="457200" y="4023360"/>
+            <a:off x="457200" y="3858768"/>
             <a:ext cx="914400" cy="173736"/>
           </a:xfrm>
           <a:prstGeom prst="rect">
@@ -13084,8 +13078,8 @@
         </p:nvSpPr>
         <p:spPr>
           <a:xfrm>
-            <a:off x="1371600" y="4023360"/>
-            <a:ext cx="694944" cy="173736"/>
+            <a:off x="1371600" y="3858768"/>
+            <a:ext cx="603504" cy="173736"/>
           </a:xfrm>
           <a:prstGeom prst="rect">
             <a:avLst/>
@@ -13119,8 +13113,8 @@
         </p:nvSpPr>
         <p:spPr>
           <a:xfrm>
-            <a:off x="2066543" y="4023360"/>
-            <a:ext cx="841248" cy="173736"/>
+            <a:off x="1975104" y="3858768"/>
+            <a:ext cx="914400" cy="173736"/>
           </a:xfrm>
           <a:prstGeom prst="rect">
             <a:avLst/>
@@ -13154,8 +13148,8 @@
         </p:nvSpPr>
         <p:spPr>
           <a:xfrm>
-            <a:off x="2907791" y="4023360"/>
-            <a:ext cx="786384" cy="173736"/>
+            <a:off x="2889504" y="3858768"/>
+            <a:ext cx="914400" cy="173736"/>
           </a:xfrm>
           <a:prstGeom prst="rect">
             <a:avLst/>
@@ -13189,8 +13183,8 @@
         </p:nvSpPr>
         <p:spPr>
           <a:xfrm>
-            <a:off x="3694176" y="4023360"/>
-            <a:ext cx="786384" cy="173736"/>
+            <a:off x="3803904" y="3858768"/>
+            <a:ext cx="731520" cy="173736"/>
           </a:xfrm>
           <a:prstGeom prst="rect">
             <a:avLst/>
@@ -13224,8 +13218,8 @@
         </p:nvSpPr>
         <p:spPr>
           <a:xfrm>
-            <a:off x="4700016" y="4023360"/>
-            <a:ext cx="694944" cy="173736"/>
+            <a:off x="4754880" y="3858768"/>
+            <a:ext cx="603504" cy="173736"/>
           </a:xfrm>
           <a:prstGeom prst="rect">
             <a:avLst/>
@@ -13259,8 +13253,8 @@
         </p:nvSpPr>
         <p:spPr>
           <a:xfrm>
-            <a:off x="5394959" y="4023360"/>
-            <a:ext cx="841248" cy="173736"/>
+            <a:off x="5358384" y="3858768"/>
+            <a:ext cx="914400" cy="173736"/>
           </a:xfrm>
           <a:prstGeom prst="rect">
             <a:avLst/>
@@ -13294,8 +13288,8 @@
         </p:nvSpPr>
         <p:spPr>
           <a:xfrm>
-            <a:off x="6236207" y="4023360"/>
-            <a:ext cx="786384" cy="173736"/>
+            <a:off x="6272784" y="3858768"/>
+            <a:ext cx="914400" cy="173736"/>
           </a:xfrm>
           <a:prstGeom prst="rect">
             <a:avLst/>
@@ -13329,8 +13323,8 @@
         </p:nvSpPr>
         <p:spPr>
           <a:xfrm>
-            <a:off x="7022592" y="4023360"/>
-            <a:ext cx="786384" cy="173736"/>
+            <a:off x="7187184" y="3858768"/>
+            <a:ext cx="731520" cy="173736"/>
           </a:xfrm>
           <a:prstGeom prst="rect">
             <a:avLst/>
@@ -13364,8 +13358,8 @@
         </p:nvSpPr>
         <p:spPr>
           <a:xfrm>
-            <a:off x="8028431" y="4023360"/>
-            <a:ext cx="694944" cy="173736"/>
+            <a:off x="8138160" y="3858768"/>
+            <a:ext cx="603504" cy="173736"/>
           </a:xfrm>
           <a:prstGeom prst="rect">
             <a:avLst/>
@@ -13399,8 +13393,8 @@
         </p:nvSpPr>
         <p:spPr>
           <a:xfrm>
-            <a:off x="8723376" y="4023360"/>
-            <a:ext cx="841248" cy="173736"/>
+            <a:off x="8741664" y="3858768"/>
+            <a:ext cx="914400" cy="173736"/>
           </a:xfrm>
           <a:prstGeom prst="rect">
             <a:avLst/>
@@ -13434,8 +13428,8 @@
         </p:nvSpPr>
         <p:spPr>
           <a:xfrm>
-            <a:off x="9564624" y="4023360"/>
-            <a:ext cx="786384" cy="173736"/>
+            <a:off x="9656064" y="3858768"/>
+            <a:ext cx="914400" cy="173736"/>
           </a:xfrm>
           <a:prstGeom prst="rect">
             <a:avLst/>
@@ -13469,8 +13463,8 @@
         </p:nvSpPr>
         <p:spPr>
           <a:xfrm>
-            <a:off x="10351007" y="4023360"/>
-            <a:ext cx="786384" cy="173736"/>
+            <a:off x="10570464" y="3858768"/>
+            <a:ext cx="731520" cy="173736"/>
           </a:xfrm>
           <a:prstGeom prst="rect">
             <a:avLst/>
@@ -13504,7 +13498,7 @@
         </p:nvSpPr>
         <p:spPr>
           <a:xfrm>
-            <a:off x="457200" y="4235500"/>
+            <a:off x="457200" y="4070908"/>
             <a:ext cx="914400" cy="173736"/>
           </a:xfrm>
           <a:prstGeom prst="rect">
@@ -13539,8 +13533,8 @@
         </p:nvSpPr>
         <p:spPr>
           <a:xfrm>
-            <a:off x="1371600" y="4235500"/>
-            <a:ext cx="694944" cy="173736"/>
+            <a:off x="1371600" y="4070908"/>
+            <a:ext cx="603504" cy="173736"/>
           </a:xfrm>
           <a:prstGeom prst="rect">
             <a:avLst/>
@@ -13574,8 +13568,8 @@
         </p:nvSpPr>
         <p:spPr>
           <a:xfrm>
-            <a:off x="2066543" y="4235500"/>
-            <a:ext cx="841248" cy="173736"/>
+            <a:off x="1975104" y="4070908"/>
+            <a:ext cx="914400" cy="173736"/>
           </a:xfrm>
           <a:prstGeom prst="rect">
             <a:avLst/>
@@ -13609,8 +13603,8 @@
         </p:nvSpPr>
         <p:spPr>
           <a:xfrm>
-            <a:off x="2907791" y="4235500"/>
-            <a:ext cx="786384" cy="173736"/>
+            <a:off x="2889504" y="4070908"/>
+            <a:ext cx="914400" cy="173736"/>
           </a:xfrm>
           <a:prstGeom prst="rect">
             <a:avLst/>
@@ -13644,8 +13638,8 @@
         </p:nvSpPr>
         <p:spPr>
           <a:xfrm>
-            <a:off x="3694176" y="4235500"/>
-            <a:ext cx="786384" cy="173736"/>
+            <a:off x="3803904" y="4070908"/>
+            <a:ext cx="731520" cy="173736"/>
           </a:xfrm>
           <a:prstGeom prst="rect">
             <a:avLst/>
@@ -13679,8 +13673,8 @@
         </p:nvSpPr>
         <p:spPr>
           <a:xfrm>
-            <a:off x="4700016" y="4235500"/>
-            <a:ext cx="694944" cy="173736"/>
+            <a:off x="4754880" y="4070908"/>
+            <a:ext cx="603504" cy="173736"/>
           </a:xfrm>
           <a:prstGeom prst="rect">
             <a:avLst/>
@@ -13714,8 +13708,8 @@
         </p:nvSpPr>
         <p:spPr>
           <a:xfrm>
-            <a:off x="5394959" y="4235500"/>
-            <a:ext cx="841248" cy="173736"/>
+            <a:off x="5358384" y="4070908"/>
+            <a:ext cx="914400" cy="173736"/>
           </a:xfrm>
           <a:prstGeom prst="rect">
             <a:avLst/>
@@ -13749,8 +13743,8 @@
         </p:nvSpPr>
         <p:spPr>
           <a:xfrm>
-            <a:off x="6236207" y="4235500"/>
-            <a:ext cx="786384" cy="173736"/>
+            <a:off x="6272784" y="4070908"/>
+            <a:ext cx="914400" cy="173736"/>
           </a:xfrm>
           <a:prstGeom prst="rect">
             <a:avLst/>
@@ -13784,8 +13778,8 @@
         </p:nvSpPr>
         <p:spPr>
           <a:xfrm>
-            <a:off x="7022592" y="4235500"/>
-            <a:ext cx="786384" cy="173736"/>
+            <a:off x="7187184" y="4070908"/>
+            <a:ext cx="731520" cy="173736"/>
           </a:xfrm>
           <a:prstGeom prst="rect">
             <a:avLst/>
@@ -13819,8 +13813,8 @@
         </p:nvSpPr>
         <p:spPr>
           <a:xfrm>
-            <a:off x="8028431" y="4235500"/>
-            <a:ext cx="694944" cy="173736"/>
+            <a:off x="8138160" y="4070908"/>
+            <a:ext cx="603504" cy="173736"/>
           </a:xfrm>
           <a:prstGeom prst="rect">
             <a:avLst/>
@@ -13854,8 +13848,8 @@
         </p:nvSpPr>
         <p:spPr>
           <a:xfrm>
-            <a:off x="8723376" y="4235500"/>
-            <a:ext cx="841248" cy="173736"/>
+            <a:off x="8741664" y="4070908"/>
+            <a:ext cx="914400" cy="173736"/>
           </a:xfrm>
           <a:prstGeom prst="rect">
             <a:avLst/>
@@ -13889,8 +13883,8 @@
         </p:nvSpPr>
         <p:spPr>
           <a:xfrm>
-            <a:off x="9564624" y="4235500"/>
-            <a:ext cx="786384" cy="173736"/>
+            <a:off x="9656064" y="4070908"/>
+            <a:ext cx="914400" cy="173736"/>
           </a:xfrm>
           <a:prstGeom prst="rect">
             <a:avLst/>
@@ -13924,8 +13918,8 @@
         </p:nvSpPr>
         <p:spPr>
           <a:xfrm>
-            <a:off x="10351007" y="4235500"/>
-            <a:ext cx="786384" cy="173736"/>
+            <a:off x="10570464" y="4070908"/>
+            <a:ext cx="731520" cy="173736"/>
           </a:xfrm>
           <a:prstGeom prst="rect">
             <a:avLst/>
@@ -13959,8 +13953,8 @@
         </p:nvCxnSpPr>
         <p:spPr>
           <a:xfrm>
-            <a:off x="457200" y="4465929"/>
-            <a:ext cx="10680191" cy="0"/>
+            <a:off x="457200" y="4301337"/>
+            <a:ext cx="10844784" cy="0"/>
           </a:xfrm>
           <a:prstGeom prst="line">
             <a:avLst/>
@@ -13995,7 +13989,7 @@
         </p:nvSpPr>
         <p:spPr>
           <a:xfrm>
-            <a:off x="457200" y="4520793"/>
+            <a:off x="457200" y="4356201"/>
             <a:ext cx="914400" cy="173736"/>
           </a:xfrm>
           <a:prstGeom prst="rect">
@@ -14030,8 +14024,8 @@
         </p:nvSpPr>
         <p:spPr>
           <a:xfrm>
-            <a:off x="1371600" y="4520793"/>
-            <a:ext cx="694944" cy="173736"/>
+            <a:off x="1371600" y="4356201"/>
+            <a:ext cx="603504" cy="173736"/>
           </a:xfrm>
           <a:prstGeom prst="rect">
             <a:avLst/>
@@ -14065,8 +14059,8 @@
         </p:nvSpPr>
         <p:spPr>
           <a:xfrm>
-            <a:off x="2066543" y="4520793"/>
-            <a:ext cx="841248" cy="173736"/>
+            <a:off x="1975104" y="4356201"/>
+            <a:ext cx="914400" cy="173736"/>
           </a:xfrm>
           <a:prstGeom prst="rect">
             <a:avLst/>
@@ -14100,8 +14094,8 @@
         </p:nvSpPr>
         <p:spPr>
           <a:xfrm>
-            <a:off x="2907791" y="4520793"/>
-            <a:ext cx="786384" cy="173736"/>
+            <a:off x="2889504" y="4356201"/>
+            <a:ext cx="914400" cy="173736"/>
           </a:xfrm>
           <a:prstGeom prst="rect">
             <a:avLst/>
@@ -14135,8 +14129,8 @@
         </p:nvSpPr>
         <p:spPr>
           <a:xfrm>
-            <a:off x="3694176" y="4520793"/>
-            <a:ext cx="786384" cy="173736"/>
+            <a:off x="3803904" y="4356201"/>
+            <a:ext cx="731520" cy="173736"/>
           </a:xfrm>
           <a:prstGeom prst="rect">
             <a:avLst/>
@@ -14170,8 +14164,8 @@
         </p:nvSpPr>
         <p:spPr>
           <a:xfrm>
-            <a:off x="4700016" y="4520793"/>
-            <a:ext cx="694944" cy="173736"/>
+            <a:off x="4754880" y="4356201"/>
+            <a:ext cx="603504" cy="173736"/>
           </a:xfrm>
           <a:prstGeom prst="rect">
             <a:avLst/>
@@ -14205,8 +14199,8 @@
         </p:nvSpPr>
         <p:spPr>
           <a:xfrm>
-            <a:off x="5394959" y="4520793"/>
-            <a:ext cx="841248" cy="173736"/>
+            <a:off x="5358384" y="4356201"/>
+            <a:ext cx="914400" cy="173736"/>
           </a:xfrm>
           <a:prstGeom prst="rect">
             <a:avLst/>
@@ -14240,8 +14234,8 @@
         </p:nvSpPr>
         <p:spPr>
           <a:xfrm>
-            <a:off x="6236207" y="4520793"/>
-            <a:ext cx="786384" cy="173736"/>
+            <a:off x="6272784" y="4356201"/>
+            <a:ext cx="914400" cy="173736"/>
           </a:xfrm>
           <a:prstGeom prst="rect">
             <a:avLst/>
@@ -14275,8 +14269,8 @@
         </p:nvSpPr>
         <p:spPr>
           <a:xfrm>
-            <a:off x="7022592" y="4520793"/>
-            <a:ext cx="786384" cy="173736"/>
+            <a:off x="7187184" y="4356201"/>
+            <a:ext cx="731520" cy="173736"/>
           </a:xfrm>
           <a:prstGeom prst="rect">
             <a:avLst/>
@@ -14310,8 +14304,8 @@
         </p:nvSpPr>
         <p:spPr>
           <a:xfrm>
-            <a:off x="8028431" y="4520793"/>
-            <a:ext cx="694944" cy="173736"/>
+            <a:off x="8138160" y="4356201"/>
+            <a:ext cx="603504" cy="173736"/>
           </a:xfrm>
           <a:prstGeom prst="rect">
             <a:avLst/>
@@ -14345,8 +14339,8 @@
         </p:nvSpPr>
         <p:spPr>
           <a:xfrm>
-            <a:off x="8723376" y="4520793"/>
-            <a:ext cx="841248" cy="173736"/>
+            <a:off x="8741664" y="4356201"/>
+            <a:ext cx="914400" cy="173736"/>
           </a:xfrm>
           <a:prstGeom prst="rect">
             <a:avLst/>
@@ -14380,8 +14374,8 @@
         </p:nvSpPr>
         <p:spPr>
           <a:xfrm>
-            <a:off x="9564624" y="4520793"/>
-            <a:ext cx="786384" cy="173736"/>
+            <a:off x="9656064" y="4356201"/>
+            <a:ext cx="914400" cy="173736"/>
           </a:xfrm>
           <a:prstGeom prst="rect">
             <a:avLst/>
@@ -14415,8 +14409,8 @@
         </p:nvSpPr>
         <p:spPr>
           <a:xfrm>
-            <a:off x="10351007" y="4520793"/>
-            <a:ext cx="786384" cy="173736"/>
+            <a:off x="10570464" y="4356201"/>
+            <a:ext cx="731520" cy="173736"/>
           </a:xfrm>
           <a:prstGeom prst="rect">
             <a:avLst/>
@@ -14450,7 +14444,7 @@
         </p:nvSpPr>
         <p:spPr>
           <a:xfrm>
-            <a:off x="457200" y="4749393"/>
+            <a:off x="457200" y="4584801"/>
             <a:ext cx="3291840" cy="173736"/>
           </a:xfrm>
           <a:prstGeom prst="rect">
@@ -14472,7 +14466,7 @@
                 </a:solidFill>
                 <a:latin typeface="Garamond"/>
               </a:rPr>
-              <a:t>Distinct persons (New + Last year)</a:t>
+              <a:t>Distinct persons (New + Seen last yr)</a:t>
             </a:r>
           </a:p>
         </p:txBody>
@@ -14485,8 +14479,8 @@
         </p:nvSpPr>
         <p:spPr>
           <a:xfrm>
-            <a:off x="1371600" y="4749393"/>
-            <a:ext cx="3108960" cy="173736"/>
+            <a:off x="1371600" y="4584801"/>
+            <a:ext cx="3163824" cy="173736"/>
           </a:xfrm>
           <a:prstGeom prst="rect">
             <a:avLst/>
@@ -14520,8 +14514,8 @@
         </p:nvSpPr>
         <p:spPr>
           <a:xfrm>
-            <a:off x="4700016" y="4749393"/>
-            <a:ext cx="3108960" cy="173736"/>
+            <a:off x="4754880" y="4584801"/>
+            <a:ext cx="3163824" cy="173736"/>
           </a:xfrm>
           <a:prstGeom prst="rect">
             <a:avLst/>
@@ -14555,8 +14549,8 @@
         </p:nvSpPr>
         <p:spPr>
           <a:xfrm>
-            <a:off x="8028431" y="4749393"/>
-            <a:ext cx="3108960" cy="173736"/>
+            <a:off x="8138160" y="4584801"/>
+            <a:ext cx="3163824" cy="173736"/>
           </a:xfrm>
           <a:prstGeom prst="rect">
             <a:avLst/>
@@ -14590,7 +14584,7 @@
         </p:nvSpPr>
         <p:spPr>
           <a:xfrm>
-            <a:off x="457200" y="4977993"/>
+            <a:off x="457200" y="4813401"/>
             <a:ext cx="3291840" cy="173736"/>
           </a:xfrm>
           <a:prstGeom prst="rect">
@@ -14625,8 +14619,8 @@
         </p:nvSpPr>
         <p:spPr>
           <a:xfrm>
-            <a:off x="1371600" y="4977993"/>
-            <a:ext cx="3108960" cy="173736"/>
+            <a:off x="1371600" y="4813401"/>
+            <a:ext cx="3163824" cy="173736"/>
           </a:xfrm>
           <a:prstGeom prst="rect">
             <a:avLst/>
@@ -14660,8 +14654,8 @@
         </p:nvSpPr>
         <p:spPr>
           <a:xfrm>
-            <a:off x="4700016" y="4977993"/>
-            <a:ext cx="3108960" cy="173736"/>
+            <a:off x="4754880" y="4813401"/>
+            <a:ext cx="3163824" cy="173736"/>
           </a:xfrm>
           <a:prstGeom prst="rect">
             <a:avLst/>
@@ -14695,8 +14689,8 @@
         </p:nvSpPr>
         <p:spPr>
           <a:xfrm>
-            <a:off x="8028431" y="4977993"/>
-            <a:ext cx="3108960" cy="173736"/>
+            <a:off x="8138160" y="4813401"/>
+            <a:ext cx="3163824" cy="173736"/>
           </a:xfrm>
           <a:prstGeom prst="rect">
             <a:avLst/>
@@ -14730,8 +14724,8 @@
         </p:nvCxnSpPr>
         <p:spPr>
           <a:xfrm>
-            <a:off x="457200" y="5206593"/>
-            <a:ext cx="10680191" cy="0"/>
+            <a:off x="457200" y="5042001"/>
+            <a:ext cx="10844784" cy="0"/>
           </a:xfrm>
           <a:prstGeom prst="line">
             <a:avLst/>
@@ -14766,7 +14760,7 @@
         </p:nvSpPr>
         <p:spPr>
           <a:xfrm>
-            <a:off x="457200" y="5325465"/>
+            <a:off x="457200" y="5160873"/>
             <a:ext cx="11247120" cy="173736"/>
           </a:xfrm>
           <a:prstGeom prst="rect">
@@ -14788,7 +14782,7 @@
                 </a:solidFill>
                 <a:latin typeface="Garamond"/>
               </a:rPr>
-              <a:t>Adults (18+); every cell counts persons. Within a month: New + Earlier this year + Last year = Total, the month’s interviews (≈100k in the 2000s). Down a column: the Totals sum to the year’s interviews (2006: 1,221,832), while New + Last year counts each person exactly once → distinct persons (2006: 203,820 + 178,187 = 382,007). The ASEC = the March respondents + the February–April oversamples: 38% of the distinct persons, 12% of the interviews, 1.45× a single March.</a:t>
+              <a:t>Adults (18+); every cell counts persons. Within a month: New + Seen this yr + Seen last yr = Total, the month’s interviews (≈100k in the 2000s). Down a column: the Totals sum to the year’s interviews (2006: 1,221,832), while New + Seen last yr counts each person exactly once → distinct persons (2006: 203,820 + 178,187 = 382,007). The ASEC = the March respondents + the February–April oversamples: 38% of the distinct persons, 12% of the interviews, 1.45× a single March.</a:t>
             </a:r>
           </a:p>
         </p:txBody>

--- a/report/data_cluster/sample_sizes_slides.pptx
+++ b/report/data_cluster/sample_sizes_slides.pptx
@@ -3131,13 +3131,13 @@
         </p:nvCxnSpPr>
         <p:spPr>
           <a:xfrm>
-            <a:off x="685800" y="1252728"/>
+            <a:off x="685800" y="1234439"/>
             <a:ext cx="4206240" cy="0"/>
           </a:xfrm>
           <a:prstGeom prst="line">
             <a:avLst/>
           </a:prstGeom>
-          <a:ln w="12700">
+          <a:ln w="17780">
             <a:solidFill>
               <a:srgbClr val="212529"/>
             </a:solidFill>
@@ -3307,13 +3307,13 @@
         </p:nvCxnSpPr>
         <p:spPr>
           <a:xfrm>
-            <a:off x="685800" y="1536192"/>
+            <a:off x="685800" y="1545336"/>
             <a:ext cx="4206240" cy="0"/>
           </a:xfrm>
           <a:prstGeom prst="line">
             <a:avLst/>
           </a:prstGeom>
-          <a:ln w="12700">
+          <a:ln w="7620">
             <a:solidFill>
               <a:srgbClr val="212529"/>
             </a:solidFill>
@@ -5303,13 +5303,13 @@
         </p:nvCxnSpPr>
         <p:spPr>
           <a:xfrm>
-            <a:off x="685800" y="5100523"/>
+            <a:off x="685800" y="5109667"/>
             <a:ext cx="4206240" cy="0"/>
           </a:xfrm>
           <a:prstGeom prst="line">
             <a:avLst/>
           </a:prstGeom>
-          <a:ln w="12700">
+          <a:ln w="17780">
             <a:solidFill>
               <a:srgbClr val="212529"/>
             </a:solidFill>
@@ -5339,13 +5339,13 @@
         </p:nvCxnSpPr>
         <p:spPr>
           <a:xfrm>
-            <a:off x="6583680" y="1252728"/>
+            <a:off x="6583680" y="1234439"/>
             <a:ext cx="4206240" cy="0"/>
           </a:xfrm>
           <a:prstGeom prst="line">
             <a:avLst/>
           </a:prstGeom>
-          <a:ln w="12700">
+          <a:ln w="17780">
             <a:solidFill>
               <a:srgbClr val="212529"/>
             </a:solidFill>
@@ -5515,13 +5515,13 @@
         </p:nvCxnSpPr>
         <p:spPr>
           <a:xfrm>
-            <a:off x="6583680" y="1536192"/>
+            <a:off x="6583680" y="1545336"/>
             <a:ext cx="4206240" cy="0"/>
           </a:xfrm>
           <a:prstGeom prst="line">
             <a:avLst/>
           </a:prstGeom>
-          <a:ln w="12700">
+          <a:ln w="7620">
             <a:solidFill>
               <a:srgbClr val="212529"/>
             </a:solidFill>
@@ -7511,13 +7511,13 @@
         </p:nvCxnSpPr>
         <p:spPr>
           <a:xfrm>
-            <a:off x="6583680" y="5100523"/>
+            <a:off x="6583680" y="5109667"/>
             <a:ext cx="4206240" cy="0"/>
           </a:xfrm>
           <a:prstGeom prst="line">
             <a:avLst/>
           </a:prstGeom>
-          <a:ln w="12700">
+          <a:ln w="17780">
             <a:solidFill>
               <a:srgbClr val="212529"/>
             </a:solidFill>
@@ -7896,13 +7896,13 @@
         </p:nvCxnSpPr>
         <p:spPr>
           <a:xfrm>
-            <a:off x="457200" y="1106424"/>
+            <a:off x="457200" y="1088136"/>
             <a:ext cx="10844784" cy="0"/>
           </a:xfrm>
           <a:prstGeom prst="line">
             <a:avLst/>
           </a:prstGeom>
-          <a:ln w="12700">
+          <a:ln w="17780">
             <a:solidFill>
               <a:srgbClr val="212529"/>
             </a:solidFill>
@@ -8463,7 +8463,7 @@
           <a:prstGeom prst="line">
             <a:avLst/>
           </a:prstGeom>
-          <a:ln w="12700">
+          <a:ln w="7620">
             <a:solidFill>
               <a:srgbClr val="212529"/>
             </a:solidFill>
@@ -13959,7 +13959,7 @@
           <a:prstGeom prst="line">
             <a:avLst/>
           </a:prstGeom>
-          <a:ln w="12700">
+          <a:ln w="7620">
             <a:solidFill>
               <a:srgbClr val="212529"/>
             </a:solidFill>
@@ -14730,7 +14730,7 @@
           <a:prstGeom prst="line">
             <a:avLst/>
           </a:prstGeom>
-          <a:ln w="12700">
+          <a:ln w="17780">
             <a:solidFill>
               <a:srgbClr val="212529"/>
             </a:solidFill>

--- a/report/data_cluster/sample_sizes_slides.pptx
+++ b/report/data_cluster/sample_sizes_slides.pptx
@@ -3131,8 +3131,8 @@
         </p:nvCxnSpPr>
         <p:spPr>
           <a:xfrm>
-            <a:off x="685800" y="1234439"/>
-            <a:ext cx="4206240" cy="0"/>
+            <a:off x="640080" y="1143000"/>
+            <a:ext cx="3950208" cy="0"/>
           </a:xfrm>
           <a:prstGeom prst="line">
             <a:avLst/>
@@ -3167,8 +3167,78 @@
         </p:nvSpPr>
         <p:spPr>
           <a:xfrm>
-            <a:off x="685800" y="1298448"/>
-            <a:ext cx="713232" cy="219456"/>
+            <a:off x="1115568" y="1207008"/>
+            <a:ext cx="1700784" cy="210312"/>
+          </a:xfrm>
+          <a:prstGeom prst="rect">
+            <a:avLst/>
+          </a:prstGeom>
+          <a:noFill/>
+        </p:spPr>
+        <p:txBody>
+          <a:bodyPr wrap="square" lIns="0" rIns="0" tIns="0" bIns="0">
+            <a:spAutoFit/>
+          </a:bodyPr>
+          <a:lstStyle/>
+          <a:p>
+            <a:pPr algn="ctr"/>
+            <a:r>
+              <a:rPr sz="1150" b="1" i="0">
+                <a:solidFill>
+                  <a:srgbClr val="212529"/>
+                </a:solidFill>
+                <a:latin typeface="Garamond"/>
+              </a:rPr>
+              <a:t>March suppl.</a:t>
+            </a:r>
+          </a:p>
+        </p:txBody>
+      </p:sp>
+      <p:sp>
+        <p:nvSpPr>
+          <p:cNvPr id="5" name="TextBox 4"/>
+          <p:cNvSpPr txBox="1"/>
+          <p:nvPr/>
+        </p:nvSpPr>
+        <p:spPr>
+          <a:xfrm>
+            <a:off x="2816352" y="1207008"/>
+            <a:ext cx="1773936" cy="210312"/>
+          </a:xfrm>
+          <a:prstGeom prst="rect">
+            <a:avLst/>
+          </a:prstGeom>
+          <a:noFill/>
+        </p:spPr>
+        <p:txBody>
+          <a:bodyPr wrap="square" lIns="0" rIns="0" tIns="0" bIns="0">
+            <a:spAutoFit/>
+          </a:bodyPr>
+          <a:lstStyle/>
+          <a:p>
+            <a:pPr algn="ctr"/>
+            <a:r>
+              <a:rPr sz="1150" b="1" i="0">
+                <a:solidFill>
+                  <a:srgbClr val="212529"/>
+                </a:solidFill>
+                <a:latin typeface="Garamond"/>
+              </a:rPr>
+              <a:t>All 12 months*</a:t>
+            </a:r>
+          </a:p>
+        </p:txBody>
+      </p:sp>
+      <p:sp>
+        <p:nvSpPr>
+          <p:cNvPr id="6" name="TextBox 5"/>
+          <p:cNvSpPr txBox="1"/>
+          <p:nvPr/>
+        </p:nvSpPr>
+        <p:spPr>
+          <a:xfrm>
+            <a:off x="640080" y="1444752"/>
+            <a:ext cx="475488" cy="210312"/>
           </a:xfrm>
           <a:prstGeom prst="rect">
             <a:avLst/>
@@ -3183,7 +3253,7 @@
           <a:p>
             <a:pPr algn="l"/>
             <a:r>
-              <a:rPr sz="1200" b="1" i="0">
+              <a:rPr sz="1150" b="1" i="0">
                 <a:solidFill>
                   <a:srgbClr val="212529"/>
                 </a:solidFill>
@@ -3196,66 +3266,66 @@
       </p:sp>
       <p:sp>
         <p:nvSpPr>
-          <p:cNvPr id="5" name="TextBox 4"/>
-          <p:cNvSpPr txBox="1"/>
-          <p:nvPr/>
-        </p:nvSpPr>
-        <p:spPr>
-          <a:xfrm>
-            <a:off x="1399032" y="1298448"/>
-            <a:ext cx="1170432" cy="219456"/>
-          </a:xfrm>
-          <a:prstGeom prst="rect">
-            <a:avLst/>
-          </a:prstGeom>
-          <a:noFill/>
-        </p:spPr>
-        <p:txBody>
-          <a:bodyPr wrap="square" lIns="0" rIns="0" tIns="0" bIns="0">
-            <a:spAutoFit/>
-          </a:bodyPr>
-          <a:lstStyle/>
-          <a:p>
-            <a:pPr algn="r"/>
-            <a:r>
-              <a:rPr sz="1200" b="1" i="0">
-                <a:solidFill>
-                  <a:srgbClr val="212529"/>
-                </a:solidFill>
-                <a:latin typeface="Garamond"/>
-              </a:rPr>
-              <a:t>March suppl.</a:t>
-            </a:r>
-          </a:p>
-        </p:txBody>
-      </p:sp>
-      <p:sp>
-        <p:nvSpPr>
-          <p:cNvPr id="6" name="TextBox 5"/>
-          <p:cNvSpPr txBox="1"/>
-          <p:nvPr/>
-        </p:nvSpPr>
-        <p:spPr>
-          <a:xfrm>
-            <a:off x="2569464" y="1298448"/>
-            <a:ext cx="914400" cy="219456"/>
-          </a:xfrm>
-          <a:prstGeom prst="rect">
-            <a:avLst/>
-          </a:prstGeom>
-          <a:noFill/>
-        </p:spPr>
-        <p:txBody>
-          <a:bodyPr wrap="square" lIns="0" rIns="0" tIns="0" bIns="0">
-            <a:spAutoFit/>
-          </a:bodyPr>
-          <a:lstStyle/>
-          <a:p>
-            <a:pPr algn="r"/>
-            <a:r>
-              <a:rPr sz="1200" b="1" i="0">
-                <a:solidFill>
-                  <a:srgbClr val="212529"/>
+          <p:cNvPr id="7" name="TextBox 6"/>
+          <p:cNvSpPr txBox="1"/>
+          <p:nvPr/>
+        </p:nvSpPr>
+        <p:spPr>
+          <a:xfrm>
+            <a:off x="1115568" y="1444752"/>
+            <a:ext cx="950976" cy="192024"/>
+          </a:xfrm>
+          <a:prstGeom prst="rect">
+            <a:avLst/>
+          </a:prstGeom>
+          <a:noFill/>
+        </p:spPr>
+        <p:txBody>
+          <a:bodyPr wrap="square" lIns="0" rIns="0" tIns="0" bIns="0">
+            <a:spAutoFit/>
+          </a:bodyPr>
+          <a:lstStyle/>
+          <a:p>
+            <a:pPr algn="r"/>
+            <a:r>
+              <a:rPr sz="1050" b="1" i="0">
+                <a:solidFill>
+                  <a:srgbClr val="6B7480"/>
+                </a:solidFill>
+                <a:latin typeface="Garamond"/>
+              </a:rPr>
+              <a:t>Persons</a:t>
+            </a:r>
+          </a:p>
+        </p:txBody>
+      </p:sp>
+      <p:sp>
+        <p:nvSpPr>
+          <p:cNvPr id="8" name="TextBox 7"/>
+          <p:cNvSpPr txBox="1"/>
+          <p:nvPr/>
+        </p:nvSpPr>
+        <p:spPr>
+          <a:xfrm>
+            <a:off x="2066543" y="1444752"/>
+            <a:ext cx="749808" cy="192024"/>
+          </a:xfrm>
+          <a:prstGeom prst="rect">
+            <a:avLst/>
+          </a:prstGeom>
+          <a:noFill/>
+        </p:spPr>
+        <p:txBody>
+          <a:bodyPr wrap="square" lIns="0" rIns="0" tIns="0" bIns="0">
+            <a:spAutoFit/>
+          </a:bodyPr>
+          <a:lstStyle/>
+          <a:p>
+            <a:pPr algn="r"/>
+            <a:r>
+              <a:rPr sz="1050" b="1" i="0">
+                <a:solidFill>
+                  <a:srgbClr val="6B7480"/>
                 </a:solidFill>
                 <a:latin typeface="Garamond"/>
               </a:rPr>
@@ -3266,49 +3336,84 @@
       </p:sp>
       <p:sp>
         <p:nvSpPr>
-          <p:cNvPr id="7" name="TextBox 6"/>
-          <p:cNvSpPr txBox="1"/>
-          <p:nvPr/>
-        </p:nvSpPr>
-        <p:spPr>
-          <a:xfrm>
-            <a:off x="3483864" y="1298448"/>
-            <a:ext cx="1316736" cy="219456"/>
-          </a:xfrm>
-          <a:prstGeom prst="rect">
-            <a:avLst/>
-          </a:prstGeom>
-          <a:noFill/>
-        </p:spPr>
-        <p:txBody>
-          <a:bodyPr wrap="square" lIns="0" rIns="0" tIns="0" bIns="0">
-            <a:spAutoFit/>
-          </a:bodyPr>
-          <a:lstStyle/>
-          <a:p>
-            <a:pPr algn="r"/>
-            <a:r>
-              <a:rPr sz="1200" b="1" i="0">
-                <a:solidFill>
-                  <a:srgbClr val="212529"/>
-                </a:solidFill>
-                <a:latin typeface="Garamond"/>
-              </a:rPr>
-              <a:t>All 12 months</a:t>
+          <p:cNvPr id="9" name="TextBox 8"/>
+          <p:cNvSpPr txBox="1"/>
+          <p:nvPr/>
+        </p:nvSpPr>
+        <p:spPr>
+          <a:xfrm>
+            <a:off x="2816352" y="1444752"/>
+            <a:ext cx="1005840" cy="192024"/>
+          </a:xfrm>
+          <a:prstGeom prst="rect">
+            <a:avLst/>
+          </a:prstGeom>
+          <a:noFill/>
+        </p:spPr>
+        <p:txBody>
+          <a:bodyPr wrap="square" lIns="0" rIns="0" tIns="0" bIns="0">
+            <a:spAutoFit/>
+          </a:bodyPr>
+          <a:lstStyle/>
+          <a:p>
+            <a:pPr algn="r"/>
+            <a:r>
+              <a:rPr sz="1050" b="1" i="0">
+                <a:solidFill>
+                  <a:srgbClr val="6B7480"/>
+                </a:solidFill>
+                <a:latin typeface="Garamond"/>
+              </a:rPr>
+              <a:t>Persons</a:t>
+            </a:r>
+          </a:p>
+        </p:txBody>
+      </p:sp>
+      <p:sp>
+        <p:nvSpPr>
+          <p:cNvPr id="10" name="TextBox 9"/>
+          <p:cNvSpPr txBox="1"/>
+          <p:nvPr/>
+        </p:nvSpPr>
+        <p:spPr>
+          <a:xfrm>
+            <a:off x="3822191" y="1444752"/>
+            <a:ext cx="768096" cy="192024"/>
+          </a:xfrm>
+          <a:prstGeom prst="rect">
+            <a:avLst/>
+          </a:prstGeom>
+          <a:noFill/>
+        </p:spPr>
+        <p:txBody>
+          <a:bodyPr wrap="square" lIns="0" rIns="0" tIns="0" bIns="0">
+            <a:spAutoFit/>
+          </a:bodyPr>
+          <a:lstStyle/>
+          <a:p>
+            <a:pPr algn="r"/>
+            <a:r>
+              <a:rPr sz="1050" b="1" i="0">
+                <a:solidFill>
+                  <a:srgbClr val="6B7480"/>
+                </a:solidFill>
+                <a:latin typeface="Garamond"/>
+              </a:rPr>
+              <a:t>Teachers</a:t>
             </a:r>
           </a:p>
         </p:txBody>
       </p:sp>
       <p:cxnSp>
         <p:nvCxnSpPr>
-          <p:cNvPr id="8" name="Connector 7"/>
+          <p:cNvPr id="11" name="Connector 10"/>
           <p:cNvCxnSpPr/>
           <p:nvPr/>
         </p:nvCxnSpPr>
         <p:spPr>
           <a:xfrm>
-            <a:off x="685800" y="1545336"/>
-            <a:ext cx="4206240" cy="0"/>
+            <a:off x="640080" y="1664208"/>
+            <a:ext cx="3950208" cy="0"/>
           </a:xfrm>
           <a:prstGeom prst="line">
             <a:avLst/>
@@ -3337,14 +3442,14 @@
       </p:cxnSp>
       <p:sp>
         <p:nvSpPr>
-          <p:cNvPr id="9" name="TextBox 8"/>
-          <p:cNvSpPr txBox="1"/>
-          <p:nvPr/>
-        </p:nvSpPr>
-        <p:spPr>
-          <a:xfrm>
-            <a:off x="685800" y="1600200"/>
-            <a:ext cx="713232" cy="219456"/>
+          <p:cNvPr id="12" name="TextBox 11"/>
+          <p:cNvSpPr txBox="1"/>
+          <p:nvPr/>
+        </p:nvSpPr>
+        <p:spPr>
+          <a:xfrm>
+            <a:off x="640080" y="1737360"/>
+            <a:ext cx="475488" cy="210312"/>
           </a:xfrm>
           <a:prstGeom prst="rect">
             <a:avLst/>
@@ -3359,7 +3464,7 @@
           <a:p>
             <a:pPr algn="l"/>
             <a:r>
-              <a:rPr sz="1200" b="0" i="0">
+              <a:rPr sz="1150" b="0" i="0">
                 <a:solidFill>
                   <a:srgbClr val="212529"/>
                 </a:solidFill>
@@ -3372,29 +3477,29 @@
       </p:sp>
       <p:sp>
         <p:nvSpPr>
-          <p:cNvPr id="10" name="TextBox 9"/>
-          <p:cNvSpPr txBox="1"/>
-          <p:nvPr/>
-        </p:nvSpPr>
-        <p:spPr>
-          <a:xfrm>
-            <a:off x="1399032" y="1600200"/>
-            <a:ext cx="1170432" cy="219456"/>
-          </a:xfrm>
-          <a:prstGeom prst="rect">
-            <a:avLst/>
-          </a:prstGeom>
-          <a:noFill/>
-        </p:spPr>
-        <p:txBody>
-          <a:bodyPr wrap="square" lIns="0" rIns="0" tIns="0" bIns="0">
-            <a:spAutoFit/>
-          </a:bodyPr>
-          <a:lstStyle/>
-          <a:p>
-            <a:pPr algn="r"/>
-            <a:r>
-              <a:rPr sz="1200" b="0" i="0">
+          <p:cNvPr id="13" name="TextBox 12"/>
+          <p:cNvSpPr txBox="1"/>
+          <p:nvPr/>
+        </p:nvSpPr>
+        <p:spPr>
+          <a:xfrm>
+            <a:off x="1115568" y="1737360"/>
+            <a:ext cx="950976" cy="210312"/>
+          </a:xfrm>
+          <a:prstGeom prst="rect">
+            <a:avLst/>
+          </a:prstGeom>
+          <a:noFill/>
+        </p:spPr>
+        <p:txBody>
+          <a:bodyPr wrap="square" lIns="0" rIns="0" tIns="0" bIns="0">
+            <a:spAutoFit/>
+          </a:bodyPr>
+          <a:lstStyle/>
+          <a:p>
+            <a:pPr algn="r"/>
+            <a:r>
+              <a:rPr sz="1150" b="0" i="0">
                 <a:solidFill>
                   <a:srgbClr val="212529"/>
                 </a:solidFill>
@@ -3407,29 +3512,29 @@
       </p:sp>
       <p:sp>
         <p:nvSpPr>
-          <p:cNvPr id="11" name="TextBox 10"/>
-          <p:cNvSpPr txBox="1"/>
-          <p:nvPr/>
-        </p:nvSpPr>
-        <p:spPr>
-          <a:xfrm>
-            <a:off x="2569464" y="1600200"/>
-            <a:ext cx="914400" cy="219456"/>
-          </a:xfrm>
-          <a:prstGeom prst="rect">
-            <a:avLst/>
-          </a:prstGeom>
-          <a:noFill/>
-        </p:spPr>
-        <p:txBody>
-          <a:bodyPr wrap="square" lIns="0" rIns="0" tIns="0" bIns="0">
-            <a:spAutoFit/>
-          </a:bodyPr>
-          <a:lstStyle/>
-          <a:p>
-            <a:pPr algn="r"/>
-            <a:r>
-              <a:rPr sz="1200" b="0" i="0">
+          <p:cNvPr id="14" name="TextBox 13"/>
+          <p:cNvSpPr txBox="1"/>
+          <p:nvPr/>
+        </p:nvSpPr>
+        <p:spPr>
+          <a:xfrm>
+            <a:off x="2066543" y="1737360"/>
+            <a:ext cx="749808" cy="210312"/>
+          </a:xfrm>
+          <a:prstGeom prst="rect">
+            <a:avLst/>
+          </a:prstGeom>
+          <a:noFill/>
+        </p:spPr>
+        <p:txBody>
+          <a:bodyPr wrap="square" lIns="0" rIns="0" tIns="0" bIns="0">
+            <a:spAutoFit/>
+          </a:bodyPr>
+          <a:lstStyle/>
+          <a:p>
+            <a:pPr algn="r"/>
+            <a:r>
+              <a:rPr sz="1150" b="0" i="0">
                 <a:solidFill>
                   <a:srgbClr val="212529"/>
                 </a:solidFill>
@@ -3442,29 +3547,29 @@
       </p:sp>
       <p:sp>
         <p:nvSpPr>
-          <p:cNvPr id="12" name="TextBox 11"/>
-          <p:cNvSpPr txBox="1"/>
-          <p:nvPr/>
-        </p:nvSpPr>
-        <p:spPr>
-          <a:xfrm>
-            <a:off x="3483864" y="1600200"/>
-            <a:ext cx="1316736" cy="219456"/>
-          </a:xfrm>
-          <a:prstGeom prst="rect">
-            <a:avLst/>
-          </a:prstGeom>
-          <a:noFill/>
-        </p:spPr>
-        <p:txBody>
-          <a:bodyPr wrap="square" lIns="0" rIns="0" tIns="0" bIns="0">
-            <a:spAutoFit/>
-          </a:bodyPr>
-          <a:lstStyle/>
-          <a:p>
-            <a:pPr algn="r"/>
-            <a:r>
-              <a:rPr sz="1200" b="0" i="0">
+          <p:cNvPr id="15" name="TextBox 14"/>
+          <p:cNvSpPr txBox="1"/>
+          <p:nvPr/>
+        </p:nvSpPr>
+        <p:spPr>
+          <a:xfrm>
+            <a:off x="2816352" y="1737360"/>
+            <a:ext cx="1005840" cy="210312"/>
+          </a:xfrm>
+          <a:prstGeom prst="rect">
+            <a:avLst/>
+          </a:prstGeom>
+          <a:noFill/>
+        </p:spPr>
+        <p:txBody>
+          <a:bodyPr wrap="square" lIns="0" rIns="0" tIns="0" bIns="0">
+            <a:spAutoFit/>
+          </a:bodyPr>
+          <a:lstStyle/>
+          <a:p>
+            <a:pPr algn="r"/>
+            <a:r>
+              <a:rPr sz="1150" b="0" i="0">
                 <a:solidFill>
                   <a:srgbClr val="212529"/>
                 </a:solidFill>
@@ -3477,14 +3582,49 @@
       </p:sp>
       <p:sp>
         <p:nvSpPr>
-          <p:cNvPr id="13" name="TextBox 12"/>
-          <p:cNvSpPr txBox="1"/>
-          <p:nvPr/>
-        </p:nvSpPr>
-        <p:spPr>
-          <a:xfrm>
-            <a:off x="685800" y="1848916"/>
-            <a:ext cx="713232" cy="219456"/>
+          <p:cNvPr id="16" name="TextBox 15"/>
+          <p:cNvSpPr txBox="1"/>
+          <p:nvPr/>
+        </p:nvSpPr>
+        <p:spPr>
+          <a:xfrm>
+            <a:off x="3822191" y="1737360"/>
+            <a:ext cx="768096" cy="210312"/>
+          </a:xfrm>
+          <a:prstGeom prst="rect">
+            <a:avLst/>
+          </a:prstGeom>
+          <a:noFill/>
+        </p:spPr>
+        <p:txBody>
+          <a:bodyPr wrap="square" lIns="0" rIns="0" tIns="0" bIns="0">
+            <a:spAutoFit/>
+          </a:bodyPr>
+          <a:lstStyle/>
+          <a:p>
+            <a:pPr algn="r"/>
+            <a:r>
+              <a:rPr sz="1150" b="0" i="0">
+                <a:solidFill>
+                  <a:srgbClr val="212529"/>
+                </a:solidFill>
+                <a:latin typeface="Garamond"/>
+              </a:rPr>
+              <a:t>–</a:t>
+            </a:r>
+          </a:p>
+        </p:txBody>
+      </p:sp>
+      <p:sp>
+        <p:nvSpPr>
+          <p:cNvPr id="17" name="TextBox 16"/>
+          <p:cNvSpPr txBox="1"/>
+          <p:nvPr/>
+        </p:nvSpPr>
+        <p:spPr>
+          <a:xfrm>
+            <a:off x="640080" y="1982419"/>
+            <a:ext cx="475488" cy="210312"/>
           </a:xfrm>
           <a:prstGeom prst="rect">
             <a:avLst/>
@@ -3499,7 +3639,7 @@
           <a:p>
             <a:pPr algn="l"/>
             <a:r>
-              <a:rPr sz="1200" b="0" i="0">
+              <a:rPr sz="1150" b="0" i="0">
                 <a:solidFill>
                   <a:srgbClr val="212529"/>
                 </a:solidFill>
@@ -3512,29 +3652,29 @@
       </p:sp>
       <p:sp>
         <p:nvSpPr>
-          <p:cNvPr id="14" name="TextBox 13"/>
-          <p:cNvSpPr txBox="1"/>
-          <p:nvPr/>
-        </p:nvSpPr>
-        <p:spPr>
-          <a:xfrm>
-            <a:off x="1399032" y="1848916"/>
-            <a:ext cx="1170432" cy="219456"/>
-          </a:xfrm>
-          <a:prstGeom prst="rect">
-            <a:avLst/>
-          </a:prstGeom>
-          <a:noFill/>
-        </p:spPr>
-        <p:txBody>
-          <a:bodyPr wrap="square" lIns="0" rIns="0" tIns="0" bIns="0">
-            <a:spAutoFit/>
-          </a:bodyPr>
-          <a:lstStyle/>
-          <a:p>
-            <a:pPr algn="r"/>
-            <a:r>
-              <a:rPr sz="1200" b="0" i="0">
+          <p:cNvPr id="18" name="TextBox 17"/>
+          <p:cNvSpPr txBox="1"/>
+          <p:nvPr/>
+        </p:nvSpPr>
+        <p:spPr>
+          <a:xfrm>
+            <a:off x="1115568" y="1982419"/>
+            <a:ext cx="950976" cy="210312"/>
+          </a:xfrm>
+          <a:prstGeom prst="rect">
+            <a:avLst/>
+          </a:prstGeom>
+          <a:noFill/>
+        </p:spPr>
+        <p:txBody>
+          <a:bodyPr wrap="square" lIns="0" rIns="0" tIns="0" bIns="0">
+            <a:spAutoFit/>
+          </a:bodyPr>
+          <a:lstStyle/>
+          <a:p>
+            <a:pPr algn="r"/>
+            <a:r>
+              <a:rPr sz="1150" b="0" i="0">
                 <a:solidFill>
                   <a:srgbClr val="212529"/>
                 </a:solidFill>
@@ -3547,29 +3687,29 @@
       </p:sp>
       <p:sp>
         <p:nvSpPr>
-          <p:cNvPr id="15" name="TextBox 14"/>
-          <p:cNvSpPr txBox="1"/>
-          <p:nvPr/>
-        </p:nvSpPr>
-        <p:spPr>
-          <a:xfrm>
-            <a:off x="2569464" y="1848916"/>
-            <a:ext cx="914400" cy="219456"/>
-          </a:xfrm>
-          <a:prstGeom prst="rect">
-            <a:avLst/>
-          </a:prstGeom>
-          <a:noFill/>
-        </p:spPr>
-        <p:txBody>
-          <a:bodyPr wrap="square" lIns="0" rIns="0" tIns="0" bIns="0">
-            <a:spAutoFit/>
-          </a:bodyPr>
-          <a:lstStyle/>
-          <a:p>
-            <a:pPr algn="r"/>
-            <a:r>
-              <a:rPr sz="1200" b="0" i="0">
+          <p:cNvPr id="19" name="TextBox 18"/>
+          <p:cNvSpPr txBox="1"/>
+          <p:nvPr/>
+        </p:nvSpPr>
+        <p:spPr>
+          <a:xfrm>
+            <a:off x="2066543" y="1982419"/>
+            <a:ext cx="749808" cy="210312"/>
+          </a:xfrm>
+          <a:prstGeom prst="rect">
+            <a:avLst/>
+          </a:prstGeom>
+          <a:noFill/>
+        </p:spPr>
+        <p:txBody>
+          <a:bodyPr wrap="square" lIns="0" rIns="0" tIns="0" bIns="0">
+            <a:spAutoFit/>
+          </a:bodyPr>
+          <a:lstStyle/>
+          <a:p>
+            <a:pPr algn="r"/>
+            <a:r>
+              <a:rPr sz="1150" b="0" i="0">
                 <a:solidFill>
                   <a:srgbClr val="212529"/>
                 </a:solidFill>
@@ -3582,29 +3722,29 @@
       </p:sp>
       <p:sp>
         <p:nvSpPr>
-          <p:cNvPr id="16" name="TextBox 15"/>
-          <p:cNvSpPr txBox="1"/>
-          <p:nvPr/>
-        </p:nvSpPr>
-        <p:spPr>
-          <a:xfrm>
-            <a:off x="3483864" y="1848916"/>
-            <a:ext cx="1316736" cy="219456"/>
-          </a:xfrm>
-          <a:prstGeom prst="rect">
-            <a:avLst/>
-          </a:prstGeom>
-          <a:noFill/>
-        </p:spPr>
-        <p:txBody>
-          <a:bodyPr wrap="square" lIns="0" rIns="0" tIns="0" bIns="0">
-            <a:spAutoFit/>
-          </a:bodyPr>
-          <a:lstStyle/>
-          <a:p>
-            <a:pPr algn="r"/>
-            <a:r>
-              <a:rPr sz="1200" b="0" i="0">
+          <p:cNvPr id="20" name="TextBox 19"/>
+          <p:cNvSpPr txBox="1"/>
+          <p:nvPr/>
+        </p:nvSpPr>
+        <p:spPr>
+          <a:xfrm>
+            <a:off x="2816352" y="1982419"/>
+            <a:ext cx="1005840" cy="210312"/>
+          </a:xfrm>
+          <a:prstGeom prst="rect">
+            <a:avLst/>
+          </a:prstGeom>
+          <a:noFill/>
+        </p:spPr>
+        <p:txBody>
+          <a:bodyPr wrap="square" lIns="0" rIns="0" tIns="0" bIns="0">
+            <a:spAutoFit/>
+          </a:bodyPr>
+          <a:lstStyle/>
+          <a:p>
+            <a:pPr algn="r"/>
+            <a:r>
+              <a:rPr sz="1150" b="0" i="0">
                 <a:solidFill>
                   <a:srgbClr val="212529"/>
                 </a:solidFill>
@@ -3617,14 +3757,49 @@
       </p:sp>
       <p:sp>
         <p:nvSpPr>
-          <p:cNvPr id="17" name="TextBox 16"/>
-          <p:cNvSpPr txBox="1"/>
-          <p:nvPr/>
-        </p:nvSpPr>
-        <p:spPr>
-          <a:xfrm>
-            <a:off x="685800" y="2097633"/>
-            <a:ext cx="713232" cy="219456"/>
+          <p:cNvPr id="21" name="TextBox 20"/>
+          <p:cNvSpPr txBox="1"/>
+          <p:nvPr/>
+        </p:nvSpPr>
+        <p:spPr>
+          <a:xfrm>
+            <a:off x="3822191" y="1982419"/>
+            <a:ext cx="768096" cy="210312"/>
+          </a:xfrm>
+          <a:prstGeom prst="rect">
+            <a:avLst/>
+          </a:prstGeom>
+          <a:noFill/>
+        </p:spPr>
+        <p:txBody>
+          <a:bodyPr wrap="square" lIns="0" rIns="0" tIns="0" bIns="0">
+            <a:spAutoFit/>
+          </a:bodyPr>
+          <a:lstStyle/>
+          <a:p>
+            <a:pPr algn="r"/>
+            <a:r>
+              <a:rPr sz="1150" b="0" i="0">
+                <a:solidFill>
+                  <a:srgbClr val="212529"/>
+                </a:solidFill>
+                <a:latin typeface="Garamond"/>
+              </a:rPr>
+              <a:t>–</a:t>
+            </a:r>
+          </a:p>
+        </p:txBody>
+      </p:sp>
+      <p:sp>
+        <p:nvSpPr>
+          <p:cNvPr id="22" name="TextBox 21"/>
+          <p:cNvSpPr txBox="1"/>
+          <p:nvPr/>
+        </p:nvSpPr>
+        <p:spPr>
+          <a:xfrm>
+            <a:off x="640080" y="2227478"/>
+            <a:ext cx="475488" cy="210312"/>
           </a:xfrm>
           <a:prstGeom prst="rect">
             <a:avLst/>
@@ -3639,7 +3814,7 @@
           <a:p>
             <a:pPr algn="l"/>
             <a:r>
-              <a:rPr sz="1200" b="0" i="0">
+              <a:rPr sz="1150" b="0" i="0">
                 <a:solidFill>
                   <a:srgbClr val="212529"/>
                 </a:solidFill>
@@ -3652,29 +3827,29 @@
       </p:sp>
       <p:sp>
         <p:nvSpPr>
-          <p:cNvPr id="18" name="TextBox 17"/>
-          <p:cNvSpPr txBox="1"/>
-          <p:nvPr/>
-        </p:nvSpPr>
-        <p:spPr>
-          <a:xfrm>
-            <a:off x="1399032" y="2097633"/>
-            <a:ext cx="1170432" cy="219456"/>
-          </a:xfrm>
-          <a:prstGeom prst="rect">
-            <a:avLst/>
-          </a:prstGeom>
-          <a:noFill/>
-        </p:spPr>
-        <p:txBody>
-          <a:bodyPr wrap="square" lIns="0" rIns="0" tIns="0" bIns="0">
-            <a:spAutoFit/>
-          </a:bodyPr>
-          <a:lstStyle/>
-          <a:p>
-            <a:pPr algn="r"/>
-            <a:r>
-              <a:rPr sz="1200" b="0" i="0">
+          <p:cNvPr id="23" name="TextBox 22"/>
+          <p:cNvSpPr txBox="1"/>
+          <p:nvPr/>
+        </p:nvSpPr>
+        <p:spPr>
+          <a:xfrm>
+            <a:off x="1115568" y="2227478"/>
+            <a:ext cx="950976" cy="210312"/>
+          </a:xfrm>
+          <a:prstGeom prst="rect">
+            <a:avLst/>
+          </a:prstGeom>
+          <a:noFill/>
+        </p:spPr>
+        <p:txBody>
+          <a:bodyPr wrap="square" lIns="0" rIns="0" tIns="0" bIns="0">
+            <a:spAutoFit/>
+          </a:bodyPr>
+          <a:lstStyle/>
+          <a:p>
+            <a:pPr algn="r"/>
+            <a:r>
+              <a:rPr sz="1150" b="0" i="0">
                 <a:solidFill>
                   <a:srgbClr val="212529"/>
                 </a:solidFill>
@@ -3687,29 +3862,29 @@
       </p:sp>
       <p:sp>
         <p:nvSpPr>
-          <p:cNvPr id="19" name="TextBox 18"/>
-          <p:cNvSpPr txBox="1"/>
-          <p:nvPr/>
-        </p:nvSpPr>
-        <p:spPr>
-          <a:xfrm>
-            <a:off x="2569464" y="2097633"/>
-            <a:ext cx="914400" cy="219456"/>
-          </a:xfrm>
-          <a:prstGeom prst="rect">
-            <a:avLst/>
-          </a:prstGeom>
-          <a:noFill/>
-        </p:spPr>
-        <p:txBody>
-          <a:bodyPr wrap="square" lIns="0" rIns="0" tIns="0" bIns="0">
-            <a:spAutoFit/>
-          </a:bodyPr>
-          <a:lstStyle/>
-          <a:p>
-            <a:pPr algn="r"/>
-            <a:r>
-              <a:rPr sz="1200" b="0" i="0">
+          <p:cNvPr id="24" name="TextBox 23"/>
+          <p:cNvSpPr txBox="1"/>
+          <p:nvPr/>
+        </p:nvSpPr>
+        <p:spPr>
+          <a:xfrm>
+            <a:off x="2066543" y="2227478"/>
+            <a:ext cx="749808" cy="210312"/>
+          </a:xfrm>
+          <a:prstGeom prst="rect">
+            <a:avLst/>
+          </a:prstGeom>
+          <a:noFill/>
+        </p:spPr>
+        <p:txBody>
+          <a:bodyPr wrap="square" lIns="0" rIns="0" tIns="0" bIns="0">
+            <a:spAutoFit/>
+          </a:bodyPr>
+          <a:lstStyle/>
+          <a:p>
+            <a:pPr algn="r"/>
+            <a:r>
+              <a:rPr sz="1150" b="0" i="0">
                 <a:solidFill>
                   <a:srgbClr val="212529"/>
                 </a:solidFill>
@@ -3722,29 +3897,29 @@
       </p:sp>
       <p:sp>
         <p:nvSpPr>
-          <p:cNvPr id="20" name="TextBox 19"/>
-          <p:cNvSpPr txBox="1"/>
-          <p:nvPr/>
-        </p:nvSpPr>
-        <p:spPr>
-          <a:xfrm>
-            <a:off x="3483864" y="2097633"/>
-            <a:ext cx="1316736" cy="219456"/>
-          </a:xfrm>
-          <a:prstGeom prst="rect">
-            <a:avLst/>
-          </a:prstGeom>
-          <a:noFill/>
-        </p:spPr>
-        <p:txBody>
-          <a:bodyPr wrap="square" lIns="0" rIns="0" tIns="0" bIns="0">
-            <a:spAutoFit/>
-          </a:bodyPr>
-          <a:lstStyle/>
-          <a:p>
-            <a:pPr algn="r"/>
-            <a:r>
-              <a:rPr sz="1200" b="0" i="0">
+          <p:cNvPr id="25" name="TextBox 24"/>
+          <p:cNvSpPr txBox="1"/>
+          <p:nvPr/>
+        </p:nvSpPr>
+        <p:spPr>
+          <a:xfrm>
+            <a:off x="2816352" y="2227478"/>
+            <a:ext cx="1005840" cy="210312"/>
+          </a:xfrm>
+          <a:prstGeom prst="rect">
+            <a:avLst/>
+          </a:prstGeom>
+          <a:noFill/>
+        </p:spPr>
+        <p:txBody>
+          <a:bodyPr wrap="square" lIns="0" rIns="0" tIns="0" bIns="0">
+            <a:spAutoFit/>
+          </a:bodyPr>
+          <a:lstStyle/>
+          <a:p>
+            <a:pPr algn="r"/>
+            <a:r>
+              <a:rPr sz="1150" b="0" i="0">
                 <a:solidFill>
                   <a:srgbClr val="212529"/>
                 </a:solidFill>
@@ -3757,14 +3932,49 @@
       </p:sp>
       <p:sp>
         <p:nvSpPr>
-          <p:cNvPr id="21" name="TextBox 20"/>
-          <p:cNvSpPr txBox="1"/>
-          <p:nvPr/>
-        </p:nvSpPr>
-        <p:spPr>
-          <a:xfrm>
-            <a:off x="685800" y="2346350"/>
-            <a:ext cx="713232" cy="219456"/>
+          <p:cNvPr id="26" name="TextBox 25"/>
+          <p:cNvSpPr txBox="1"/>
+          <p:nvPr/>
+        </p:nvSpPr>
+        <p:spPr>
+          <a:xfrm>
+            <a:off x="3822191" y="2227478"/>
+            <a:ext cx="768096" cy="210312"/>
+          </a:xfrm>
+          <a:prstGeom prst="rect">
+            <a:avLst/>
+          </a:prstGeom>
+          <a:noFill/>
+        </p:spPr>
+        <p:txBody>
+          <a:bodyPr wrap="square" lIns="0" rIns="0" tIns="0" bIns="0">
+            <a:spAutoFit/>
+          </a:bodyPr>
+          <a:lstStyle/>
+          <a:p>
+            <a:pPr algn="r"/>
+            <a:r>
+              <a:rPr sz="1150" b="0" i="0">
+                <a:solidFill>
+                  <a:srgbClr val="212529"/>
+                </a:solidFill>
+                <a:latin typeface="Garamond"/>
+              </a:rPr>
+              <a:t>–</a:t>
+            </a:r>
+          </a:p>
+        </p:txBody>
+      </p:sp>
+      <p:sp>
+        <p:nvSpPr>
+          <p:cNvPr id="27" name="TextBox 26"/>
+          <p:cNvSpPr txBox="1"/>
+          <p:nvPr/>
+        </p:nvSpPr>
+        <p:spPr>
+          <a:xfrm>
+            <a:off x="640080" y="2472537"/>
+            <a:ext cx="475488" cy="210312"/>
           </a:xfrm>
           <a:prstGeom prst="rect">
             <a:avLst/>
@@ -3779,7 +3989,7 @@
           <a:p>
             <a:pPr algn="l"/>
             <a:r>
-              <a:rPr sz="1200" b="0" i="0">
+              <a:rPr sz="1150" b="0" i="0">
                 <a:solidFill>
                   <a:srgbClr val="212529"/>
                 </a:solidFill>
@@ -3792,29 +4002,29 @@
       </p:sp>
       <p:sp>
         <p:nvSpPr>
-          <p:cNvPr id="22" name="TextBox 21"/>
-          <p:cNvSpPr txBox="1"/>
-          <p:nvPr/>
-        </p:nvSpPr>
-        <p:spPr>
-          <a:xfrm>
-            <a:off x="1399032" y="2346350"/>
-            <a:ext cx="1170432" cy="219456"/>
-          </a:xfrm>
-          <a:prstGeom prst="rect">
-            <a:avLst/>
-          </a:prstGeom>
-          <a:noFill/>
-        </p:spPr>
-        <p:txBody>
-          <a:bodyPr wrap="square" lIns="0" rIns="0" tIns="0" bIns="0">
-            <a:spAutoFit/>
-          </a:bodyPr>
-          <a:lstStyle/>
-          <a:p>
-            <a:pPr algn="r"/>
-            <a:r>
-              <a:rPr sz="1200" b="0" i="0">
+          <p:cNvPr id="28" name="TextBox 27"/>
+          <p:cNvSpPr txBox="1"/>
+          <p:nvPr/>
+        </p:nvSpPr>
+        <p:spPr>
+          <a:xfrm>
+            <a:off x="1115568" y="2472537"/>
+            <a:ext cx="950976" cy="210312"/>
+          </a:xfrm>
+          <a:prstGeom prst="rect">
+            <a:avLst/>
+          </a:prstGeom>
+          <a:noFill/>
+        </p:spPr>
+        <p:txBody>
+          <a:bodyPr wrap="square" lIns="0" rIns="0" tIns="0" bIns="0">
+            <a:spAutoFit/>
+          </a:bodyPr>
+          <a:lstStyle/>
+          <a:p>
+            <a:pPr algn="r"/>
+            <a:r>
+              <a:rPr sz="1150" b="0" i="0">
                 <a:solidFill>
                   <a:srgbClr val="212529"/>
                 </a:solidFill>
@@ -3827,29 +4037,29 @@
       </p:sp>
       <p:sp>
         <p:nvSpPr>
-          <p:cNvPr id="23" name="TextBox 22"/>
-          <p:cNvSpPr txBox="1"/>
-          <p:nvPr/>
-        </p:nvSpPr>
-        <p:spPr>
-          <a:xfrm>
-            <a:off x="2569464" y="2346350"/>
-            <a:ext cx="914400" cy="219456"/>
-          </a:xfrm>
-          <a:prstGeom prst="rect">
-            <a:avLst/>
-          </a:prstGeom>
-          <a:noFill/>
-        </p:spPr>
-        <p:txBody>
-          <a:bodyPr wrap="square" lIns="0" rIns="0" tIns="0" bIns="0">
-            <a:spAutoFit/>
-          </a:bodyPr>
-          <a:lstStyle/>
-          <a:p>
-            <a:pPr algn="r"/>
-            <a:r>
-              <a:rPr sz="1200" b="0" i="0">
+          <p:cNvPr id="29" name="TextBox 28"/>
+          <p:cNvSpPr txBox="1"/>
+          <p:nvPr/>
+        </p:nvSpPr>
+        <p:spPr>
+          <a:xfrm>
+            <a:off x="2066543" y="2472537"/>
+            <a:ext cx="749808" cy="210312"/>
+          </a:xfrm>
+          <a:prstGeom prst="rect">
+            <a:avLst/>
+          </a:prstGeom>
+          <a:noFill/>
+        </p:spPr>
+        <p:txBody>
+          <a:bodyPr wrap="square" lIns="0" rIns="0" tIns="0" bIns="0">
+            <a:spAutoFit/>
+          </a:bodyPr>
+          <a:lstStyle/>
+          <a:p>
+            <a:pPr algn="r"/>
+            <a:r>
+              <a:rPr sz="1150" b="0" i="0">
                 <a:solidFill>
                   <a:srgbClr val="212529"/>
                 </a:solidFill>
@@ -3862,29 +4072,29 @@
       </p:sp>
       <p:sp>
         <p:nvSpPr>
-          <p:cNvPr id="24" name="TextBox 23"/>
-          <p:cNvSpPr txBox="1"/>
-          <p:nvPr/>
-        </p:nvSpPr>
-        <p:spPr>
-          <a:xfrm>
-            <a:off x="3483864" y="2346350"/>
-            <a:ext cx="1316736" cy="219456"/>
-          </a:xfrm>
-          <a:prstGeom prst="rect">
-            <a:avLst/>
-          </a:prstGeom>
-          <a:noFill/>
-        </p:spPr>
-        <p:txBody>
-          <a:bodyPr wrap="square" lIns="0" rIns="0" tIns="0" bIns="0">
-            <a:spAutoFit/>
-          </a:bodyPr>
-          <a:lstStyle/>
-          <a:p>
-            <a:pPr algn="r"/>
-            <a:r>
-              <a:rPr sz="1200" b="0" i="0">
+          <p:cNvPr id="30" name="TextBox 29"/>
+          <p:cNvSpPr txBox="1"/>
+          <p:nvPr/>
+        </p:nvSpPr>
+        <p:spPr>
+          <a:xfrm>
+            <a:off x="2816352" y="2472537"/>
+            <a:ext cx="1005840" cy="210312"/>
+          </a:xfrm>
+          <a:prstGeom prst="rect">
+            <a:avLst/>
+          </a:prstGeom>
+          <a:noFill/>
+        </p:spPr>
+        <p:txBody>
+          <a:bodyPr wrap="square" lIns="0" rIns="0" tIns="0" bIns="0">
+            <a:spAutoFit/>
+          </a:bodyPr>
+          <a:lstStyle/>
+          <a:p>
+            <a:pPr algn="r"/>
+            <a:r>
+              <a:rPr sz="1150" b="0" i="0">
                 <a:solidFill>
                   <a:srgbClr val="212529"/>
                 </a:solidFill>
@@ -3897,14 +4107,49 @@
       </p:sp>
       <p:sp>
         <p:nvSpPr>
-          <p:cNvPr id="25" name="TextBox 24"/>
-          <p:cNvSpPr txBox="1"/>
-          <p:nvPr/>
-        </p:nvSpPr>
-        <p:spPr>
-          <a:xfrm>
-            <a:off x="685800" y="2595067"/>
-            <a:ext cx="713232" cy="219456"/>
+          <p:cNvPr id="31" name="TextBox 30"/>
+          <p:cNvSpPr txBox="1"/>
+          <p:nvPr/>
+        </p:nvSpPr>
+        <p:spPr>
+          <a:xfrm>
+            <a:off x="3822191" y="2472537"/>
+            <a:ext cx="768096" cy="210312"/>
+          </a:xfrm>
+          <a:prstGeom prst="rect">
+            <a:avLst/>
+          </a:prstGeom>
+          <a:noFill/>
+        </p:spPr>
+        <p:txBody>
+          <a:bodyPr wrap="square" lIns="0" rIns="0" tIns="0" bIns="0">
+            <a:spAutoFit/>
+          </a:bodyPr>
+          <a:lstStyle/>
+          <a:p>
+            <a:pPr algn="r"/>
+            <a:r>
+              <a:rPr sz="1150" b="0" i="0">
+                <a:solidFill>
+                  <a:srgbClr val="212529"/>
+                </a:solidFill>
+                <a:latin typeface="Garamond"/>
+              </a:rPr>
+              <a:t>–</a:t>
+            </a:r>
+          </a:p>
+        </p:txBody>
+      </p:sp>
+      <p:sp>
+        <p:nvSpPr>
+          <p:cNvPr id="32" name="TextBox 31"/>
+          <p:cNvSpPr txBox="1"/>
+          <p:nvPr/>
+        </p:nvSpPr>
+        <p:spPr>
+          <a:xfrm>
+            <a:off x="640080" y="2717596"/>
+            <a:ext cx="475488" cy="210312"/>
           </a:xfrm>
           <a:prstGeom prst="rect">
             <a:avLst/>
@@ -3919,7 +4164,7 @@
           <a:p>
             <a:pPr algn="l"/>
             <a:r>
-              <a:rPr sz="1200" b="0" i="0">
+              <a:rPr sz="1150" b="0" i="0">
                 <a:solidFill>
                   <a:srgbClr val="212529"/>
                 </a:solidFill>
@@ -3932,29 +4177,29 @@
       </p:sp>
       <p:sp>
         <p:nvSpPr>
-          <p:cNvPr id="26" name="TextBox 25"/>
-          <p:cNvSpPr txBox="1"/>
-          <p:nvPr/>
-        </p:nvSpPr>
-        <p:spPr>
-          <a:xfrm>
-            <a:off x="1399032" y="2595067"/>
-            <a:ext cx="1170432" cy="219456"/>
-          </a:xfrm>
-          <a:prstGeom prst="rect">
-            <a:avLst/>
-          </a:prstGeom>
-          <a:noFill/>
-        </p:spPr>
-        <p:txBody>
-          <a:bodyPr wrap="square" lIns="0" rIns="0" tIns="0" bIns="0">
-            <a:spAutoFit/>
-          </a:bodyPr>
-          <a:lstStyle/>
-          <a:p>
-            <a:pPr algn="r"/>
-            <a:r>
-              <a:rPr sz="1200" b="0" i="0">
+          <p:cNvPr id="33" name="TextBox 32"/>
+          <p:cNvSpPr txBox="1"/>
+          <p:nvPr/>
+        </p:nvSpPr>
+        <p:spPr>
+          <a:xfrm>
+            <a:off x="1115568" y="2717596"/>
+            <a:ext cx="950976" cy="210312"/>
+          </a:xfrm>
+          <a:prstGeom prst="rect">
+            <a:avLst/>
+          </a:prstGeom>
+          <a:noFill/>
+        </p:spPr>
+        <p:txBody>
+          <a:bodyPr wrap="square" lIns="0" rIns="0" tIns="0" bIns="0">
+            <a:spAutoFit/>
+          </a:bodyPr>
+          <a:lstStyle/>
+          <a:p>
+            <a:pPr algn="r"/>
+            <a:r>
+              <a:rPr sz="1150" b="0" i="0">
                 <a:solidFill>
                   <a:srgbClr val="212529"/>
                 </a:solidFill>
@@ -3967,29 +4212,29 @@
       </p:sp>
       <p:sp>
         <p:nvSpPr>
-          <p:cNvPr id="27" name="TextBox 26"/>
-          <p:cNvSpPr txBox="1"/>
-          <p:nvPr/>
-        </p:nvSpPr>
-        <p:spPr>
-          <a:xfrm>
-            <a:off x="2569464" y="2595067"/>
-            <a:ext cx="914400" cy="219456"/>
-          </a:xfrm>
-          <a:prstGeom prst="rect">
-            <a:avLst/>
-          </a:prstGeom>
-          <a:noFill/>
-        </p:spPr>
-        <p:txBody>
-          <a:bodyPr wrap="square" lIns="0" rIns="0" tIns="0" bIns="0">
-            <a:spAutoFit/>
-          </a:bodyPr>
-          <a:lstStyle/>
-          <a:p>
-            <a:pPr algn="r"/>
-            <a:r>
-              <a:rPr sz="1200" b="0" i="0">
+          <p:cNvPr id="34" name="TextBox 33"/>
+          <p:cNvSpPr txBox="1"/>
+          <p:nvPr/>
+        </p:nvSpPr>
+        <p:spPr>
+          <a:xfrm>
+            <a:off x="2066543" y="2717596"/>
+            <a:ext cx="749808" cy="210312"/>
+          </a:xfrm>
+          <a:prstGeom prst="rect">
+            <a:avLst/>
+          </a:prstGeom>
+          <a:noFill/>
+        </p:spPr>
+        <p:txBody>
+          <a:bodyPr wrap="square" lIns="0" rIns="0" tIns="0" bIns="0">
+            <a:spAutoFit/>
+          </a:bodyPr>
+          <a:lstStyle/>
+          <a:p>
+            <a:pPr algn="r"/>
+            <a:r>
+              <a:rPr sz="1150" b="0" i="0">
                 <a:solidFill>
                   <a:srgbClr val="212529"/>
                 </a:solidFill>
@@ -4002,29 +4247,29 @@
       </p:sp>
       <p:sp>
         <p:nvSpPr>
-          <p:cNvPr id="28" name="TextBox 27"/>
-          <p:cNvSpPr txBox="1"/>
-          <p:nvPr/>
-        </p:nvSpPr>
-        <p:spPr>
-          <a:xfrm>
-            <a:off x="3483864" y="2595067"/>
-            <a:ext cx="1316736" cy="219456"/>
-          </a:xfrm>
-          <a:prstGeom prst="rect">
-            <a:avLst/>
-          </a:prstGeom>
-          <a:noFill/>
-        </p:spPr>
-        <p:txBody>
-          <a:bodyPr wrap="square" lIns="0" rIns="0" tIns="0" bIns="0">
-            <a:spAutoFit/>
-          </a:bodyPr>
-          <a:lstStyle/>
-          <a:p>
-            <a:pPr algn="r"/>
-            <a:r>
-              <a:rPr sz="1200" b="0" i="0">
+          <p:cNvPr id="35" name="TextBox 34"/>
+          <p:cNvSpPr txBox="1"/>
+          <p:nvPr/>
+        </p:nvSpPr>
+        <p:spPr>
+          <a:xfrm>
+            <a:off x="2816352" y="2717596"/>
+            <a:ext cx="1005840" cy="210312"/>
+          </a:xfrm>
+          <a:prstGeom prst="rect">
+            <a:avLst/>
+          </a:prstGeom>
+          <a:noFill/>
+        </p:spPr>
+        <p:txBody>
+          <a:bodyPr wrap="square" lIns="0" rIns="0" tIns="0" bIns="0">
+            <a:spAutoFit/>
+          </a:bodyPr>
+          <a:lstStyle/>
+          <a:p>
+            <a:pPr algn="r"/>
+            <a:r>
+              <a:rPr sz="1150" b="0" i="0">
                 <a:solidFill>
                   <a:srgbClr val="212529"/>
                 </a:solidFill>
@@ -4037,14 +4282,49 @@
       </p:sp>
       <p:sp>
         <p:nvSpPr>
-          <p:cNvPr id="29" name="TextBox 28"/>
-          <p:cNvSpPr txBox="1"/>
-          <p:nvPr/>
-        </p:nvSpPr>
-        <p:spPr>
-          <a:xfrm>
-            <a:off x="685800" y="2843784"/>
-            <a:ext cx="713232" cy="219456"/>
+          <p:cNvPr id="36" name="TextBox 35"/>
+          <p:cNvSpPr txBox="1"/>
+          <p:nvPr/>
+        </p:nvSpPr>
+        <p:spPr>
+          <a:xfrm>
+            <a:off x="3822191" y="2717596"/>
+            <a:ext cx="768096" cy="210312"/>
+          </a:xfrm>
+          <a:prstGeom prst="rect">
+            <a:avLst/>
+          </a:prstGeom>
+          <a:noFill/>
+        </p:spPr>
+        <p:txBody>
+          <a:bodyPr wrap="square" lIns="0" rIns="0" tIns="0" bIns="0">
+            <a:spAutoFit/>
+          </a:bodyPr>
+          <a:lstStyle/>
+          <a:p>
+            <a:pPr algn="r"/>
+            <a:r>
+              <a:rPr sz="1150" b="0" i="0">
+                <a:solidFill>
+                  <a:srgbClr val="212529"/>
+                </a:solidFill>
+                <a:latin typeface="Garamond"/>
+              </a:rPr>
+              <a:t>–</a:t>
+            </a:r>
+          </a:p>
+        </p:txBody>
+      </p:sp>
+      <p:sp>
+        <p:nvSpPr>
+          <p:cNvPr id="37" name="TextBox 36"/>
+          <p:cNvSpPr txBox="1"/>
+          <p:nvPr/>
+        </p:nvSpPr>
+        <p:spPr>
+          <a:xfrm>
+            <a:off x="640080" y="2962655"/>
+            <a:ext cx="475488" cy="210312"/>
           </a:xfrm>
           <a:prstGeom prst="rect">
             <a:avLst/>
@@ -4059,7 +4339,7 @@
           <a:p>
             <a:pPr algn="l"/>
             <a:r>
-              <a:rPr sz="1200" b="0" i="0">
+              <a:rPr sz="1150" b="0" i="0">
                 <a:solidFill>
                   <a:srgbClr val="212529"/>
                 </a:solidFill>
@@ -4072,29 +4352,29 @@
       </p:sp>
       <p:sp>
         <p:nvSpPr>
-          <p:cNvPr id="30" name="TextBox 29"/>
-          <p:cNvSpPr txBox="1"/>
-          <p:nvPr/>
-        </p:nvSpPr>
-        <p:spPr>
-          <a:xfrm>
-            <a:off x="1399032" y="2843784"/>
-            <a:ext cx="1170432" cy="219456"/>
-          </a:xfrm>
-          <a:prstGeom prst="rect">
-            <a:avLst/>
-          </a:prstGeom>
-          <a:noFill/>
-        </p:spPr>
-        <p:txBody>
-          <a:bodyPr wrap="square" lIns="0" rIns="0" tIns="0" bIns="0">
-            <a:spAutoFit/>
-          </a:bodyPr>
-          <a:lstStyle/>
-          <a:p>
-            <a:pPr algn="r"/>
-            <a:r>
-              <a:rPr sz="1200" b="0" i="0">
+          <p:cNvPr id="38" name="TextBox 37"/>
+          <p:cNvSpPr txBox="1"/>
+          <p:nvPr/>
+        </p:nvSpPr>
+        <p:spPr>
+          <a:xfrm>
+            <a:off x="1115568" y="2962655"/>
+            <a:ext cx="950976" cy="210312"/>
+          </a:xfrm>
+          <a:prstGeom prst="rect">
+            <a:avLst/>
+          </a:prstGeom>
+          <a:noFill/>
+        </p:spPr>
+        <p:txBody>
+          <a:bodyPr wrap="square" lIns="0" rIns="0" tIns="0" bIns="0">
+            <a:spAutoFit/>
+          </a:bodyPr>
+          <a:lstStyle/>
+          <a:p>
+            <a:pPr algn="r"/>
+            <a:r>
+              <a:rPr sz="1150" b="0" i="0">
                 <a:solidFill>
                   <a:srgbClr val="212529"/>
                 </a:solidFill>
@@ -4107,29 +4387,29 @@
       </p:sp>
       <p:sp>
         <p:nvSpPr>
-          <p:cNvPr id="31" name="TextBox 30"/>
-          <p:cNvSpPr txBox="1"/>
-          <p:nvPr/>
-        </p:nvSpPr>
-        <p:spPr>
-          <a:xfrm>
-            <a:off x="2569464" y="2843784"/>
-            <a:ext cx="914400" cy="219456"/>
-          </a:xfrm>
-          <a:prstGeom prst="rect">
-            <a:avLst/>
-          </a:prstGeom>
-          <a:noFill/>
-        </p:spPr>
-        <p:txBody>
-          <a:bodyPr wrap="square" lIns="0" rIns="0" tIns="0" bIns="0">
-            <a:spAutoFit/>
-          </a:bodyPr>
-          <a:lstStyle/>
-          <a:p>
-            <a:pPr algn="r"/>
-            <a:r>
-              <a:rPr sz="1200" b="0" i="0">
+          <p:cNvPr id="39" name="TextBox 38"/>
+          <p:cNvSpPr txBox="1"/>
+          <p:nvPr/>
+        </p:nvSpPr>
+        <p:spPr>
+          <a:xfrm>
+            <a:off x="2066543" y="2962655"/>
+            <a:ext cx="749808" cy="210312"/>
+          </a:xfrm>
+          <a:prstGeom prst="rect">
+            <a:avLst/>
+          </a:prstGeom>
+          <a:noFill/>
+        </p:spPr>
+        <p:txBody>
+          <a:bodyPr wrap="square" lIns="0" rIns="0" tIns="0" bIns="0">
+            <a:spAutoFit/>
+          </a:bodyPr>
+          <a:lstStyle/>
+          <a:p>
+            <a:pPr algn="r"/>
+            <a:r>
+              <a:rPr sz="1150" b="0" i="0">
                 <a:solidFill>
                   <a:srgbClr val="212529"/>
                 </a:solidFill>
@@ -4142,29 +4422,29 @@
       </p:sp>
       <p:sp>
         <p:nvSpPr>
-          <p:cNvPr id="32" name="TextBox 31"/>
-          <p:cNvSpPr txBox="1"/>
-          <p:nvPr/>
-        </p:nvSpPr>
-        <p:spPr>
-          <a:xfrm>
-            <a:off x="3483864" y="2843784"/>
-            <a:ext cx="1316736" cy="219456"/>
-          </a:xfrm>
-          <a:prstGeom prst="rect">
-            <a:avLst/>
-          </a:prstGeom>
-          <a:noFill/>
-        </p:spPr>
-        <p:txBody>
-          <a:bodyPr wrap="square" lIns="0" rIns="0" tIns="0" bIns="0">
-            <a:spAutoFit/>
-          </a:bodyPr>
-          <a:lstStyle/>
-          <a:p>
-            <a:pPr algn="r"/>
-            <a:r>
-              <a:rPr sz="1200" b="0" i="0">
+          <p:cNvPr id="40" name="TextBox 39"/>
+          <p:cNvSpPr txBox="1"/>
+          <p:nvPr/>
+        </p:nvSpPr>
+        <p:spPr>
+          <a:xfrm>
+            <a:off x="2816352" y="2962655"/>
+            <a:ext cx="1005840" cy="210312"/>
+          </a:xfrm>
+          <a:prstGeom prst="rect">
+            <a:avLst/>
+          </a:prstGeom>
+          <a:noFill/>
+        </p:spPr>
+        <p:txBody>
+          <a:bodyPr wrap="square" lIns="0" rIns="0" tIns="0" bIns="0">
+            <a:spAutoFit/>
+          </a:bodyPr>
+          <a:lstStyle/>
+          <a:p>
+            <a:pPr algn="r"/>
+            <a:r>
+              <a:rPr sz="1150" b="0" i="0">
                 <a:solidFill>
                   <a:srgbClr val="212529"/>
                 </a:solidFill>
@@ -4177,14 +4457,49 @@
       </p:sp>
       <p:sp>
         <p:nvSpPr>
-          <p:cNvPr id="33" name="TextBox 32"/>
-          <p:cNvSpPr txBox="1"/>
-          <p:nvPr/>
-        </p:nvSpPr>
-        <p:spPr>
-          <a:xfrm>
-            <a:off x="685800" y="3092500"/>
-            <a:ext cx="713232" cy="219456"/>
+          <p:cNvPr id="41" name="TextBox 40"/>
+          <p:cNvSpPr txBox="1"/>
+          <p:nvPr/>
+        </p:nvSpPr>
+        <p:spPr>
+          <a:xfrm>
+            <a:off x="3822191" y="2962655"/>
+            <a:ext cx="768096" cy="210312"/>
+          </a:xfrm>
+          <a:prstGeom prst="rect">
+            <a:avLst/>
+          </a:prstGeom>
+          <a:noFill/>
+        </p:spPr>
+        <p:txBody>
+          <a:bodyPr wrap="square" lIns="0" rIns="0" tIns="0" bIns="0">
+            <a:spAutoFit/>
+          </a:bodyPr>
+          <a:lstStyle/>
+          <a:p>
+            <a:pPr algn="r"/>
+            <a:r>
+              <a:rPr sz="1150" b="0" i="0">
+                <a:solidFill>
+                  <a:srgbClr val="212529"/>
+                </a:solidFill>
+                <a:latin typeface="Garamond"/>
+              </a:rPr>
+              <a:t>–</a:t>
+            </a:r>
+          </a:p>
+        </p:txBody>
+      </p:sp>
+      <p:sp>
+        <p:nvSpPr>
+          <p:cNvPr id="42" name="TextBox 41"/>
+          <p:cNvSpPr txBox="1"/>
+          <p:nvPr/>
+        </p:nvSpPr>
+        <p:spPr>
+          <a:xfrm>
+            <a:off x="640080" y="3207715"/>
+            <a:ext cx="475488" cy="210312"/>
           </a:xfrm>
           <a:prstGeom prst="rect">
             <a:avLst/>
@@ -4199,7 +4514,7 @@
           <a:p>
             <a:pPr algn="l"/>
             <a:r>
-              <a:rPr sz="1200" b="0" i="0">
+              <a:rPr sz="1150" b="0" i="0">
                 <a:solidFill>
                   <a:srgbClr val="212529"/>
                 </a:solidFill>
@@ -4212,29 +4527,29 @@
       </p:sp>
       <p:sp>
         <p:nvSpPr>
-          <p:cNvPr id="34" name="TextBox 33"/>
-          <p:cNvSpPr txBox="1"/>
-          <p:nvPr/>
-        </p:nvSpPr>
-        <p:spPr>
-          <a:xfrm>
-            <a:off x="1399032" y="3092500"/>
-            <a:ext cx="1170432" cy="219456"/>
-          </a:xfrm>
-          <a:prstGeom prst="rect">
-            <a:avLst/>
-          </a:prstGeom>
-          <a:noFill/>
-        </p:spPr>
-        <p:txBody>
-          <a:bodyPr wrap="square" lIns="0" rIns="0" tIns="0" bIns="0">
-            <a:spAutoFit/>
-          </a:bodyPr>
-          <a:lstStyle/>
-          <a:p>
-            <a:pPr algn="r"/>
-            <a:r>
-              <a:rPr sz="1200" b="0" i="0">
+          <p:cNvPr id="43" name="TextBox 42"/>
+          <p:cNvSpPr txBox="1"/>
+          <p:nvPr/>
+        </p:nvSpPr>
+        <p:spPr>
+          <a:xfrm>
+            <a:off x="1115568" y="3207715"/>
+            <a:ext cx="950976" cy="210312"/>
+          </a:xfrm>
+          <a:prstGeom prst="rect">
+            <a:avLst/>
+          </a:prstGeom>
+          <a:noFill/>
+        </p:spPr>
+        <p:txBody>
+          <a:bodyPr wrap="square" lIns="0" rIns="0" tIns="0" bIns="0">
+            <a:spAutoFit/>
+          </a:bodyPr>
+          <a:lstStyle/>
+          <a:p>
+            <a:pPr algn="r"/>
+            <a:r>
+              <a:rPr sz="1150" b="0" i="0">
                 <a:solidFill>
                   <a:srgbClr val="212529"/>
                 </a:solidFill>
@@ -4247,29 +4562,29 @@
       </p:sp>
       <p:sp>
         <p:nvSpPr>
-          <p:cNvPr id="35" name="TextBox 34"/>
-          <p:cNvSpPr txBox="1"/>
-          <p:nvPr/>
-        </p:nvSpPr>
-        <p:spPr>
-          <a:xfrm>
-            <a:off x="2569464" y="3092500"/>
-            <a:ext cx="914400" cy="219456"/>
-          </a:xfrm>
-          <a:prstGeom prst="rect">
-            <a:avLst/>
-          </a:prstGeom>
-          <a:noFill/>
-        </p:spPr>
-        <p:txBody>
-          <a:bodyPr wrap="square" lIns="0" rIns="0" tIns="0" bIns="0">
-            <a:spAutoFit/>
-          </a:bodyPr>
-          <a:lstStyle/>
-          <a:p>
-            <a:pPr algn="r"/>
-            <a:r>
-              <a:rPr sz="1200" b="0" i="0">
+          <p:cNvPr id="44" name="TextBox 43"/>
+          <p:cNvSpPr txBox="1"/>
+          <p:nvPr/>
+        </p:nvSpPr>
+        <p:spPr>
+          <a:xfrm>
+            <a:off x="2066543" y="3207715"/>
+            <a:ext cx="749808" cy="210312"/>
+          </a:xfrm>
+          <a:prstGeom prst="rect">
+            <a:avLst/>
+          </a:prstGeom>
+          <a:noFill/>
+        </p:spPr>
+        <p:txBody>
+          <a:bodyPr wrap="square" lIns="0" rIns="0" tIns="0" bIns="0">
+            <a:spAutoFit/>
+          </a:bodyPr>
+          <a:lstStyle/>
+          <a:p>
+            <a:pPr algn="r"/>
+            <a:r>
+              <a:rPr sz="1150" b="0" i="0">
                 <a:solidFill>
                   <a:srgbClr val="212529"/>
                 </a:solidFill>
@@ -4282,29 +4597,29 @@
       </p:sp>
       <p:sp>
         <p:nvSpPr>
-          <p:cNvPr id="36" name="TextBox 35"/>
-          <p:cNvSpPr txBox="1"/>
-          <p:nvPr/>
-        </p:nvSpPr>
-        <p:spPr>
-          <a:xfrm>
-            <a:off x="3483864" y="3092500"/>
-            <a:ext cx="1316736" cy="219456"/>
-          </a:xfrm>
-          <a:prstGeom prst="rect">
-            <a:avLst/>
-          </a:prstGeom>
-          <a:noFill/>
-        </p:spPr>
-        <p:txBody>
-          <a:bodyPr wrap="square" lIns="0" rIns="0" tIns="0" bIns="0">
-            <a:spAutoFit/>
-          </a:bodyPr>
-          <a:lstStyle/>
-          <a:p>
-            <a:pPr algn="r"/>
-            <a:r>
-              <a:rPr sz="1200" b="0" i="0">
+          <p:cNvPr id="45" name="TextBox 44"/>
+          <p:cNvSpPr txBox="1"/>
+          <p:nvPr/>
+        </p:nvSpPr>
+        <p:spPr>
+          <a:xfrm>
+            <a:off x="2816352" y="3207715"/>
+            <a:ext cx="1005840" cy="210312"/>
+          </a:xfrm>
+          <a:prstGeom prst="rect">
+            <a:avLst/>
+          </a:prstGeom>
+          <a:noFill/>
+        </p:spPr>
+        <p:txBody>
+          <a:bodyPr wrap="square" lIns="0" rIns="0" tIns="0" bIns="0">
+            <a:spAutoFit/>
+          </a:bodyPr>
+          <a:lstStyle/>
+          <a:p>
+            <a:pPr algn="r"/>
+            <a:r>
+              <a:rPr sz="1150" b="0" i="0">
                 <a:solidFill>
                   <a:srgbClr val="212529"/>
                 </a:solidFill>
@@ -4317,14 +4632,49 @@
       </p:sp>
       <p:sp>
         <p:nvSpPr>
-          <p:cNvPr id="37" name="TextBox 36"/>
-          <p:cNvSpPr txBox="1"/>
-          <p:nvPr/>
-        </p:nvSpPr>
-        <p:spPr>
-          <a:xfrm>
-            <a:off x="685800" y="3341217"/>
-            <a:ext cx="713232" cy="219456"/>
+          <p:cNvPr id="46" name="TextBox 45"/>
+          <p:cNvSpPr txBox="1"/>
+          <p:nvPr/>
+        </p:nvSpPr>
+        <p:spPr>
+          <a:xfrm>
+            <a:off x="3822191" y="3207715"/>
+            <a:ext cx="768096" cy="210312"/>
+          </a:xfrm>
+          <a:prstGeom prst="rect">
+            <a:avLst/>
+          </a:prstGeom>
+          <a:noFill/>
+        </p:spPr>
+        <p:txBody>
+          <a:bodyPr wrap="square" lIns="0" rIns="0" tIns="0" bIns="0">
+            <a:spAutoFit/>
+          </a:bodyPr>
+          <a:lstStyle/>
+          <a:p>
+            <a:pPr algn="r"/>
+            <a:r>
+              <a:rPr sz="1150" b="0" i="0">
+                <a:solidFill>
+                  <a:srgbClr val="212529"/>
+                </a:solidFill>
+                <a:latin typeface="Garamond"/>
+              </a:rPr>
+              <a:t>–</a:t>
+            </a:r>
+          </a:p>
+        </p:txBody>
+      </p:sp>
+      <p:sp>
+        <p:nvSpPr>
+          <p:cNvPr id="47" name="TextBox 46"/>
+          <p:cNvSpPr txBox="1"/>
+          <p:nvPr/>
+        </p:nvSpPr>
+        <p:spPr>
+          <a:xfrm>
+            <a:off x="640080" y="3452774"/>
+            <a:ext cx="475488" cy="210312"/>
           </a:xfrm>
           <a:prstGeom prst="rect">
             <a:avLst/>
@@ -4339,7 +4689,7 @@
           <a:p>
             <a:pPr algn="l"/>
             <a:r>
-              <a:rPr sz="1200" b="0" i="0">
+              <a:rPr sz="1150" b="0" i="0">
                 <a:solidFill>
                   <a:srgbClr val="212529"/>
                 </a:solidFill>
@@ -4352,29 +4702,29 @@
       </p:sp>
       <p:sp>
         <p:nvSpPr>
-          <p:cNvPr id="38" name="TextBox 37"/>
-          <p:cNvSpPr txBox="1"/>
-          <p:nvPr/>
-        </p:nvSpPr>
-        <p:spPr>
-          <a:xfrm>
-            <a:off x="1399032" y="3341217"/>
-            <a:ext cx="1170432" cy="219456"/>
-          </a:xfrm>
-          <a:prstGeom prst="rect">
-            <a:avLst/>
-          </a:prstGeom>
-          <a:noFill/>
-        </p:spPr>
-        <p:txBody>
-          <a:bodyPr wrap="square" lIns="0" rIns="0" tIns="0" bIns="0">
-            <a:spAutoFit/>
-          </a:bodyPr>
-          <a:lstStyle/>
-          <a:p>
-            <a:pPr algn="r"/>
-            <a:r>
-              <a:rPr sz="1200" b="0" i="0">
+          <p:cNvPr id="48" name="TextBox 47"/>
+          <p:cNvSpPr txBox="1"/>
+          <p:nvPr/>
+        </p:nvSpPr>
+        <p:spPr>
+          <a:xfrm>
+            <a:off x="1115568" y="3452774"/>
+            <a:ext cx="950976" cy="210312"/>
+          </a:xfrm>
+          <a:prstGeom prst="rect">
+            <a:avLst/>
+          </a:prstGeom>
+          <a:noFill/>
+        </p:spPr>
+        <p:txBody>
+          <a:bodyPr wrap="square" lIns="0" rIns="0" tIns="0" bIns="0">
+            <a:spAutoFit/>
+          </a:bodyPr>
+          <a:lstStyle/>
+          <a:p>
+            <a:pPr algn="r"/>
+            <a:r>
+              <a:rPr sz="1150" b="0" i="0">
                 <a:solidFill>
                   <a:srgbClr val="212529"/>
                 </a:solidFill>
@@ -4387,29 +4737,29 @@
       </p:sp>
       <p:sp>
         <p:nvSpPr>
-          <p:cNvPr id="39" name="TextBox 38"/>
-          <p:cNvSpPr txBox="1"/>
-          <p:nvPr/>
-        </p:nvSpPr>
-        <p:spPr>
-          <a:xfrm>
-            <a:off x="2569464" y="3341217"/>
-            <a:ext cx="914400" cy="219456"/>
-          </a:xfrm>
-          <a:prstGeom prst="rect">
-            <a:avLst/>
-          </a:prstGeom>
-          <a:noFill/>
-        </p:spPr>
-        <p:txBody>
-          <a:bodyPr wrap="square" lIns="0" rIns="0" tIns="0" bIns="0">
-            <a:spAutoFit/>
-          </a:bodyPr>
-          <a:lstStyle/>
-          <a:p>
-            <a:pPr algn="r"/>
-            <a:r>
-              <a:rPr sz="1200" b="0" i="0">
+          <p:cNvPr id="49" name="TextBox 48"/>
+          <p:cNvSpPr txBox="1"/>
+          <p:nvPr/>
+        </p:nvSpPr>
+        <p:spPr>
+          <a:xfrm>
+            <a:off x="2066543" y="3452774"/>
+            <a:ext cx="749808" cy="210312"/>
+          </a:xfrm>
+          <a:prstGeom prst="rect">
+            <a:avLst/>
+          </a:prstGeom>
+          <a:noFill/>
+        </p:spPr>
+        <p:txBody>
+          <a:bodyPr wrap="square" lIns="0" rIns="0" tIns="0" bIns="0">
+            <a:spAutoFit/>
+          </a:bodyPr>
+          <a:lstStyle/>
+          <a:p>
+            <a:pPr algn="r"/>
+            <a:r>
+              <a:rPr sz="1150" b="0" i="0">
                 <a:solidFill>
                   <a:srgbClr val="212529"/>
                 </a:solidFill>
@@ -4422,29 +4772,29 @@
       </p:sp>
       <p:sp>
         <p:nvSpPr>
-          <p:cNvPr id="40" name="TextBox 39"/>
-          <p:cNvSpPr txBox="1"/>
-          <p:nvPr/>
-        </p:nvSpPr>
-        <p:spPr>
-          <a:xfrm>
-            <a:off x="3483864" y="3341217"/>
-            <a:ext cx="1316736" cy="219456"/>
-          </a:xfrm>
-          <a:prstGeom prst="rect">
-            <a:avLst/>
-          </a:prstGeom>
-          <a:noFill/>
-        </p:spPr>
-        <p:txBody>
-          <a:bodyPr wrap="square" lIns="0" rIns="0" tIns="0" bIns="0">
-            <a:spAutoFit/>
-          </a:bodyPr>
-          <a:lstStyle/>
-          <a:p>
-            <a:pPr algn="r"/>
-            <a:r>
-              <a:rPr sz="1200" b="0" i="0">
+          <p:cNvPr id="50" name="TextBox 49"/>
+          <p:cNvSpPr txBox="1"/>
+          <p:nvPr/>
+        </p:nvSpPr>
+        <p:spPr>
+          <a:xfrm>
+            <a:off x="2816352" y="3452774"/>
+            <a:ext cx="1005840" cy="210312"/>
+          </a:xfrm>
+          <a:prstGeom prst="rect">
+            <a:avLst/>
+          </a:prstGeom>
+          <a:noFill/>
+        </p:spPr>
+        <p:txBody>
+          <a:bodyPr wrap="square" lIns="0" rIns="0" tIns="0" bIns="0">
+            <a:spAutoFit/>
+          </a:bodyPr>
+          <a:lstStyle/>
+          <a:p>
+            <a:pPr algn="r"/>
+            <a:r>
+              <a:rPr sz="1150" b="0" i="0">
                 <a:solidFill>
                   <a:srgbClr val="212529"/>
                 </a:solidFill>
@@ -4457,14 +4807,49 @@
       </p:sp>
       <p:sp>
         <p:nvSpPr>
-          <p:cNvPr id="41" name="TextBox 40"/>
-          <p:cNvSpPr txBox="1"/>
-          <p:nvPr/>
-        </p:nvSpPr>
-        <p:spPr>
-          <a:xfrm>
-            <a:off x="685800" y="3589934"/>
-            <a:ext cx="713232" cy="219456"/>
+          <p:cNvPr id="51" name="TextBox 50"/>
+          <p:cNvSpPr txBox="1"/>
+          <p:nvPr/>
+        </p:nvSpPr>
+        <p:spPr>
+          <a:xfrm>
+            <a:off x="3822191" y="3452774"/>
+            <a:ext cx="768096" cy="210312"/>
+          </a:xfrm>
+          <a:prstGeom prst="rect">
+            <a:avLst/>
+          </a:prstGeom>
+          <a:noFill/>
+        </p:spPr>
+        <p:txBody>
+          <a:bodyPr wrap="square" lIns="0" rIns="0" tIns="0" bIns="0">
+            <a:spAutoFit/>
+          </a:bodyPr>
+          <a:lstStyle/>
+          <a:p>
+            <a:pPr algn="r"/>
+            <a:r>
+              <a:rPr sz="1150" b="0" i="0">
+                <a:solidFill>
+                  <a:srgbClr val="212529"/>
+                </a:solidFill>
+                <a:latin typeface="Garamond"/>
+              </a:rPr>
+              <a:t>11,207</a:t>
+            </a:r>
+          </a:p>
+        </p:txBody>
+      </p:sp>
+      <p:sp>
+        <p:nvSpPr>
+          <p:cNvPr id="52" name="TextBox 51"/>
+          <p:cNvSpPr txBox="1"/>
+          <p:nvPr/>
+        </p:nvSpPr>
+        <p:spPr>
+          <a:xfrm>
+            <a:off x="640080" y="3697833"/>
+            <a:ext cx="475488" cy="210312"/>
           </a:xfrm>
           <a:prstGeom prst="rect">
             <a:avLst/>
@@ -4479,7 +4864,7 @@
           <a:p>
             <a:pPr algn="l"/>
             <a:r>
-              <a:rPr sz="1200" b="0" i="0">
+              <a:rPr sz="1150" b="0" i="0">
                 <a:solidFill>
                   <a:srgbClr val="212529"/>
                 </a:solidFill>
@@ -4492,29 +4877,29 @@
       </p:sp>
       <p:sp>
         <p:nvSpPr>
-          <p:cNvPr id="42" name="TextBox 41"/>
-          <p:cNvSpPr txBox="1"/>
-          <p:nvPr/>
-        </p:nvSpPr>
-        <p:spPr>
-          <a:xfrm>
-            <a:off x="1399032" y="3589934"/>
-            <a:ext cx="1170432" cy="219456"/>
-          </a:xfrm>
-          <a:prstGeom prst="rect">
-            <a:avLst/>
-          </a:prstGeom>
-          <a:noFill/>
-        </p:spPr>
-        <p:txBody>
-          <a:bodyPr wrap="square" lIns="0" rIns="0" tIns="0" bIns="0">
-            <a:spAutoFit/>
-          </a:bodyPr>
-          <a:lstStyle/>
-          <a:p>
-            <a:pPr algn="r"/>
-            <a:r>
-              <a:rPr sz="1200" b="0" i="0">
+          <p:cNvPr id="53" name="TextBox 52"/>
+          <p:cNvSpPr txBox="1"/>
+          <p:nvPr/>
+        </p:nvSpPr>
+        <p:spPr>
+          <a:xfrm>
+            <a:off x="1115568" y="3697833"/>
+            <a:ext cx="950976" cy="210312"/>
+          </a:xfrm>
+          <a:prstGeom prst="rect">
+            <a:avLst/>
+          </a:prstGeom>
+          <a:noFill/>
+        </p:spPr>
+        <p:txBody>
+          <a:bodyPr wrap="square" lIns="0" rIns="0" tIns="0" bIns="0">
+            <a:spAutoFit/>
+          </a:bodyPr>
+          <a:lstStyle/>
+          <a:p>
+            <a:pPr algn="r"/>
+            <a:r>
+              <a:rPr sz="1150" b="0" i="0">
                 <a:solidFill>
                   <a:srgbClr val="212529"/>
                 </a:solidFill>
@@ -4527,29 +4912,29 @@
       </p:sp>
       <p:sp>
         <p:nvSpPr>
-          <p:cNvPr id="43" name="TextBox 42"/>
-          <p:cNvSpPr txBox="1"/>
-          <p:nvPr/>
-        </p:nvSpPr>
-        <p:spPr>
-          <a:xfrm>
-            <a:off x="2569464" y="3589934"/>
-            <a:ext cx="914400" cy="219456"/>
-          </a:xfrm>
-          <a:prstGeom prst="rect">
-            <a:avLst/>
-          </a:prstGeom>
-          <a:noFill/>
-        </p:spPr>
-        <p:txBody>
-          <a:bodyPr wrap="square" lIns="0" rIns="0" tIns="0" bIns="0">
-            <a:spAutoFit/>
-          </a:bodyPr>
-          <a:lstStyle/>
-          <a:p>
-            <a:pPr algn="r"/>
-            <a:r>
-              <a:rPr sz="1200" b="0" i="0">
+          <p:cNvPr id="54" name="TextBox 53"/>
+          <p:cNvSpPr txBox="1"/>
+          <p:nvPr/>
+        </p:nvSpPr>
+        <p:spPr>
+          <a:xfrm>
+            <a:off x="2066543" y="3697833"/>
+            <a:ext cx="749808" cy="210312"/>
+          </a:xfrm>
+          <a:prstGeom prst="rect">
+            <a:avLst/>
+          </a:prstGeom>
+          <a:noFill/>
+        </p:spPr>
+        <p:txBody>
+          <a:bodyPr wrap="square" lIns="0" rIns="0" tIns="0" bIns="0">
+            <a:spAutoFit/>
+          </a:bodyPr>
+          <a:lstStyle/>
+          <a:p>
+            <a:pPr algn="r"/>
+            <a:r>
+              <a:rPr sz="1150" b="0" i="0">
                 <a:solidFill>
                   <a:srgbClr val="212529"/>
                 </a:solidFill>
@@ -4562,29 +4947,29 @@
       </p:sp>
       <p:sp>
         <p:nvSpPr>
-          <p:cNvPr id="44" name="TextBox 43"/>
-          <p:cNvSpPr txBox="1"/>
-          <p:nvPr/>
-        </p:nvSpPr>
-        <p:spPr>
-          <a:xfrm>
-            <a:off x="3483864" y="3589934"/>
-            <a:ext cx="1316736" cy="219456"/>
-          </a:xfrm>
-          <a:prstGeom prst="rect">
-            <a:avLst/>
-          </a:prstGeom>
-          <a:noFill/>
-        </p:spPr>
-        <p:txBody>
-          <a:bodyPr wrap="square" lIns="0" rIns="0" tIns="0" bIns="0">
-            <a:spAutoFit/>
-          </a:bodyPr>
-          <a:lstStyle/>
-          <a:p>
-            <a:pPr algn="r"/>
-            <a:r>
-              <a:rPr sz="1200" b="0" i="0">
+          <p:cNvPr id="55" name="TextBox 54"/>
+          <p:cNvSpPr txBox="1"/>
+          <p:nvPr/>
+        </p:nvSpPr>
+        <p:spPr>
+          <a:xfrm>
+            <a:off x="2816352" y="3697833"/>
+            <a:ext cx="1005840" cy="210312"/>
+          </a:xfrm>
+          <a:prstGeom prst="rect">
+            <a:avLst/>
+          </a:prstGeom>
+          <a:noFill/>
+        </p:spPr>
+        <p:txBody>
+          <a:bodyPr wrap="square" lIns="0" rIns="0" tIns="0" bIns="0">
+            <a:spAutoFit/>
+          </a:bodyPr>
+          <a:lstStyle/>
+          <a:p>
+            <a:pPr algn="r"/>
+            <a:r>
+              <a:rPr sz="1150" b="0" i="0">
                 <a:solidFill>
                   <a:srgbClr val="212529"/>
                 </a:solidFill>
@@ -4597,14 +4982,49 @@
       </p:sp>
       <p:sp>
         <p:nvSpPr>
-          <p:cNvPr id="45" name="TextBox 44"/>
-          <p:cNvSpPr txBox="1"/>
-          <p:nvPr/>
-        </p:nvSpPr>
-        <p:spPr>
-          <a:xfrm>
-            <a:off x="685800" y="3838651"/>
-            <a:ext cx="713232" cy="219456"/>
+          <p:cNvPr id="56" name="TextBox 55"/>
+          <p:cNvSpPr txBox="1"/>
+          <p:nvPr/>
+        </p:nvSpPr>
+        <p:spPr>
+          <a:xfrm>
+            <a:off x="3822191" y="3697833"/>
+            <a:ext cx="768096" cy="210312"/>
+          </a:xfrm>
+          <a:prstGeom prst="rect">
+            <a:avLst/>
+          </a:prstGeom>
+          <a:noFill/>
+        </p:spPr>
+        <p:txBody>
+          <a:bodyPr wrap="square" lIns="0" rIns="0" tIns="0" bIns="0">
+            <a:spAutoFit/>
+          </a:bodyPr>
+          <a:lstStyle/>
+          <a:p>
+            <a:pPr algn="r"/>
+            <a:r>
+              <a:rPr sz="1150" b="0" i="0">
+                <a:solidFill>
+                  <a:srgbClr val="212529"/>
+                </a:solidFill>
+                <a:latin typeface="Garamond"/>
+              </a:rPr>
+              <a:t>10,914</a:t>
+            </a:r>
+          </a:p>
+        </p:txBody>
+      </p:sp>
+      <p:sp>
+        <p:nvSpPr>
+          <p:cNvPr id="57" name="TextBox 56"/>
+          <p:cNvSpPr txBox="1"/>
+          <p:nvPr/>
+        </p:nvSpPr>
+        <p:spPr>
+          <a:xfrm>
+            <a:off x="640080" y="3942892"/>
+            <a:ext cx="475488" cy="210312"/>
           </a:xfrm>
           <a:prstGeom prst="rect">
             <a:avLst/>
@@ -4619,7 +5039,7 @@
           <a:p>
             <a:pPr algn="l"/>
             <a:r>
-              <a:rPr sz="1200" b="0" i="0">
+              <a:rPr sz="1150" b="0" i="0">
                 <a:solidFill>
                   <a:srgbClr val="212529"/>
                 </a:solidFill>
@@ -4632,29 +5052,29 @@
       </p:sp>
       <p:sp>
         <p:nvSpPr>
-          <p:cNvPr id="46" name="TextBox 45"/>
-          <p:cNvSpPr txBox="1"/>
-          <p:nvPr/>
-        </p:nvSpPr>
-        <p:spPr>
-          <a:xfrm>
-            <a:off x="1399032" y="3838651"/>
-            <a:ext cx="1170432" cy="219456"/>
-          </a:xfrm>
-          <a:prstGeom prst="rect">
-            <a:avLst/>
-          </a:prstGeom>
-          <a:noFill/>
-        </p:spPr>
-        <p:txBody>
-          <a:bodyPr wrap="square" lIns="0" rIns="0" tIns="0" bIns="0">
-            <a:spAutoFit/>
-          </a:bodyPr>
-          <a:lstStyle/>
-          <a:p>
-            <a:pPr algn="r"/>
-            <a:r>
-              <a:rPr sz="1200" b="0" i="0">
+          <p:cNvPr id="58" name="TextBox 57"/>
+          <p:cNvSpPr txBox="1"/>
+          <p:nvPr/>
+        </p:nvSpPr>
+        <p:spPr>
+          <a:xfrm>
+            <a:off x="1115568" y="3942892"/>
+            <a:ext cx="950976" cy="210312"/>
+          </a:xfrm>
+          <a:prstGeom prst="rect">
+            <a:avLst/>
+          </a:prstGeom>
+          <a:noFill/>
+        </p:spPr>
+        <p:txBody>
+          <a:bodyPr wrap="square" lIns="0" rIns="0" tIns="0" bIns="0">
+            <a:spAutoFit/>
+          </a:bodyPr>
+          <a:lstStyle/>
+          <a:p>
+            <a:pPr algn="r"/>
+            <a:r>
+              <a:rPr sz="1150" b="0" i="0">
                 <a:solidFill>
                   <a:srgbClr val="212529"/>
                 </a:solidFill>
@@ -4667,29 +5087,29 @@
       </p:sp>
       <p:sp>
         <p:nvSpPr>
-          <p:cNvPr id="47" name="TextBox 46"/>
-          <p:cNvSpPr txBox="1"/>
-          <p:nvPr/>
-        </p:nvSpPr>
-        <p:spPr>
-          <a:xfrm>
-            <a:off x="2569464" y="3838651"/>
-            <a:ext cx="914400" cy="219456"/>
-          </a:xfrm>
-          <a:prstGeom prst="rect">
-            <a:avLst/>
-          </a:prstGeom>
-          <a:noFill/>
-        </p:spPr>
-        <p:txBody>
-          <a:bodyPr wrap="square" lIns="0" rIns="0" tIns="0" bIns="0">
-            <a:spAutoFit/>
-          </a:bodyPr>
-          <a:lstStyle/>
-          <a:p>
-            <a:pPr algn="r"/>
-            <a:r>
-              <a:rPr sz="1200" b="0" i="0">
+          <p:cNvPr id="59" name="TextBox 58"/>
+          <p:cNvSpPr txBox="1"/>
+          <p:nvPr/>
+        </p:nvSpPr>
+        <p:spPr>
+          <a:xfrm>
+            <a:off x="2066543" y="3942892"/>
+            <a:ext cx="749808" cy="210312"/>
+          </a:xfrm>
+          <a:prstGeom prst="rect">
+            <a:avLst/>
+          </a:prstGeom>
+          <a:noFill/>
+        </p:spPr>
+        <p:txBody>
+          <a:bodyPr wrap="square" lIns="0" rIns="0" tIns="0" bIns="0">
+            <a:spAutoFit/>
+          </a:bodyPr>
+          <a:lstStyle/>
+          <a:p>
+            <a:pPr algn="r"/>
+            <a:r>
+              <a:rPr sz="1150" b="0" i="0">
                 <a:solidFill>
                   <a:srgbClr val="212529"/>
                 </a:solidFill>
@@ -4702,29 +5122,29 @@
       </p:sp>
       <p:sp>
         <p:nvSpPr>
-          <p:cNvPr id="48" name="TextBox 47"/>
-          <p:cNvSpPr txBox="1"/>
-          <p:nvPr/>
-        </p:nvSpPr>
-        <p:spPr>
-          <a:xfrm>
-            <a:off x="3483864" y="3838651"/>
-            <a:ext cx="1316736" cy="219456"/>
-          </a:xfrm>
-          <a:prstGeom prst="rect">
-            <a:avLst/>
-          </a:prstGeom>
-          <a:noFill/>
-        </p:spPr>
-        <p:txBody>
-          <a:bodyPr wrap="square" lIns="0" rIns="0" tIns="0" bIns="0">
-            <a:spAutoFit/>
-          </a:bodyPr>
-          <a:lstStyle/>
-          <a:p>
-            <a:pPr algn="r"/>
-            <a:r>
-              <a:rPr sz="1200" b="0" i="0">
+          <p:cNvPr id="60" name="TextBox 59"/>
+          <p:cNvSpPr txBox="1"/>
+          <p:nvPr/>
+        </p:nvSpPr>
+        <p:spPr>
+          <a:xfrm>
+            <a:off x="2816352" y="3942892"/>
+            <a:ext cx="1005840" cy="210312"/>
+          </a:xfrm>
+          <a:prstGeom prst="rect">
+            <a:avLst/>
+          </a:prstGeom>
+          <a:noFill/>
+        </p:spPr>
+        <p:txBody>
+          <a:bodyPr wrap="square" lIns="0" rIns="0" tIns="0" bIns="0">
+            <a:spAutoFit/>
+          </a:bodyPr>
+          <a:lstStyle/>
+          <a:p>
+            <a:pPr algn="r"/>
+            <a:r>
+              <a:rPr sz="1150" b="0" i="0">
                 <a:solidFill>
                   <a:srgbClr val="212529"/>
                 </a:solidFill>
@@ -4737,14 +5157,49 @@
       </p:sp>
       <p:sp>
         <p:nvSpPr>
-          <p:cNvPr id="49" name="TextBox 48"/>
-          <p:cNvSpPr txBox="1"/>
-          <p:nvPr/>
-        </p:nvSpPr>
-        <p:spPr>
-          <a:xfrm>
-            <a:off x="685800" y="4087368"/>
-            <a:ext cx="713232" cy="219456"/>
+          <p:cNvPr id="61" name="TextBox 60"/>
+          <p:cNvSpPr txBox="1"/>
+          <p:nvPr/>
+        </p:nvSpPr>
+        <p:spPr>
+          <a:xfrm>
+            <a:off x="3822191" y="3942892"/>
+            <a:ext cx="768096" cy="210312"/>
+          </a:xfrm>
+          <a:prstGeom prst="rect">
+            <a:avLst/>
+          </a:prstGeom>
+          <a:noFill/>
+        </p:spPr>
+        <p:txBody>
+          <a:bodyPr wrap="square" lIns="0" rIns="0" tIns="0" bIns="0">
+            <a:spAutoFit/>
+          </a:bodyPr>
+          <a:lstStyle/>
+          <a:p>
+            <a:pPr algn="r"/>
+            <a:r>
+              <a:rPr sz="1150" b="0" i="0">
+                <a:solidFill>
+                  <a:srgbClr val="212529"/>
+                </a:solidFill>
+                <a:latin typeface="Garamond"/>
+              </a:rPr>
+              <a:t>11,183</a:t>
+            </a:r>
+          </a:p>
+        </p:txBody>
+      </p:sp>
+      <p:sp>
+        <p:nvSpPr>
+          <p:cNvPr id="62" name="TextBox 61"/>
+          <p:cNvSpPr txBox="1"/>
+          <p:nvPr/>
+        </p:nvSpPr>
+        <p:spPr>
+          <a:xfrm>
+            <a:off x="640080" y="4187951"/>
+            <a:ext cx="475488" cy="210312"/>
           </a:xfrm>
           <a:prstGeom prst="rect">
             <a:avLst/>
@@ -4759,7 +5214,7 @@
           <a:p>
             <a:pPr algn="l"/>
             <a:r>
-              <a:rPr sz="1200" b="0" i="0">
+              <a:rPr sz="1150" b="0" i="0">
                 <a:solidFill>
                   <a:srgbClr val="212529"/>
                 </a:solidFill>
@@ -4772,29 +5227,29 @@
       </p:sp>
       <p:sp>
         <p:nvSpPr>
-          <p:cNvPr id="50" name="TextBox 49"/>
-          <p:cNvSpPr txBox="1"/>
-          <p:nvPr/>
-        </p:nvSpPr>
-        <p:spPr>
-          <a:xfrm>
-            <a:off x="1399032" y="4087368"/>
-            <a:ext cx="1170432" cy="219456"/>
-          </a:xfrm>
-          <a:prstGeom prst="rect">
-            <a:avLst/>
-          </a:prstGeom>
-          <a:noFill/>
-        </p:spPr>
-        <p:txBody>
-          <a:bodyPr wrap="square" lIns="0" rIns="0" tIns="0" bIns="0">
-            <a:spAutoFit/>
-          </a:bodyPr>
-          <a:lstStyle/>
-          <a:p>
-            <a:pPr algn="r"/>
-            <a:r>
-              <a:rPr sz="1200" b="0" i="0">
+          <p:cNvPr id="63" name="TextBox 62"/>
+          <p:cNvSpPr txBox="1"/>
+          <p:nvPr/>
+        </p:nvSpPr>
+        <p:spPr>
+          <a:xfrm>
+            <a:off x="1115568" y="4187951"/>
+            <a:ext cx="950976" cy="210312"/>
+          </a:xfrm>
+          <a:prstGeom prst="rect">
+            <a:avLst/>
+          </a:prstGeom>
+          <a:noFill/>
+        </p:spPr>
+        <p:txBody>
+          <a:bodyPr wrap="square" lIns="0" rIns="0" tIns="0" bIns="0">
+            <a:spAutoFit/>
+          </a:bodyPr>
+          <a:lstStyle/>
+          <a:p>
+            <a:pPr algn="r"/>
+            <a:r>
+              <a:rPr sz="1150" b="0" i="0">
                 <a:solidFill>
                   <a:srgbClr val="212529"/>
                 </a:solidFill>
@@ -4807,29 +5262,29 @@
       </p:sp>
       <p:sp>
         <p:nvSpPr>
-          <p:cNvPr id="51" name="TextBox 50"/>
-          <p:cNvSpPr txBox="1"/>
-          <p:nvPr/>
-        </p:nvSpPr>
-        <p:spPr>
-          <a:xfrm>
-            <a:off x="2569464" y="4087368"/>
-            <a:ext cx="914400" cy="219456"/>
-          </a:xfrm>
-          <a:prstGeom prst="rect">
-            <a:avLst/>
-          </a:prstGeom>
-          <a:noFill/>
-        </p:spPr>
-        <p:txBody>
-          <a:bodyPr wrap="square" lIns="0" rIns="0" tIns="0" bIns="0">
-            <a:spAutoFit/>
-          </a:bodyPr>
-          <a:lstStyle/>
-          <a:p>
-            <a:pPr algn="r"/>
-            <a:r>
-              <a:rPr sz="1200" b="0" i="0">
+          <p:cNvPr id="64" name="TextBox 63"/>
+          <p:cNvSpPr txBox="1"/>
+          <p:nvPr/>
+        </p:nvSpPr>
+        <p:spPr>
+          <a:xfrm>
+            <a:off x="2066543" y="4187951"/>
+            <a:ext cx="749808" cy="210312"/>
+          </a:xfrm>
+          <a:prstGeom prst="rect">
+            <a:avLst/>
+          </a:prstGeom>
+          <a:noFill/>
+        </p:spPr>
+        <p:txBody>
+          <a:bodyPr wrap="square" lIns="0" rIns="0" tIns="0" bIns="0">
+            <a:spAutoFit/>
+          </a:bodyPr>
+          <a:lstStyle/>
+          <a:p>
+            <a:pPr algn="r"/>
+            <a:r>
+              <a:rPr sz="1150" b="0" i="0">
                 <a:solidFill>
                   <a:srgbClr val="212529"/>
                 </a:solidFill>
@@ -4842,29 +5297,29 @@
       </p:sp>
       <p:sp>
         <p:nvSpPr>
-          <p:cNvPr id="52" name="TextBox 51"/>
-          <p:cNvSpPr txBox="1"/>
-          <p:nvPr/>
-        </p:nvSpPr>
-        <p:spPr>
-          <a:xfrm>
-            <a:off x="3483864" y="4087368"/>
-            <a:ext cx="1316736" cy="219456"/>
-          </a:xfrm>
-          <a:prstGeom prst="rect">
-            <a:avLst/>
-          </a:prstGeom>
-          <a:noFill/>
-        </p:spPr>
-        <p:txBody>
-          <a:bodyPr wrap="square" lIns="0" rIns="0" tIns="0" bIns="0">
-            <a:spAutoFit/>
-          </a:bodyPr>
-          <a:lstStyle/>
-          <a:p>
-            <a:pPr algn="r"/>
-            <a:r>
-              <a:rPr sz="1200" b="0" i="0">
+          <p:cNvPr id="65" name="TextBox 64"/>
+          <p:cNvSpPr txBox="1"/>
+          <p:nvPr/>
+        </p:nvSpPr>
+        <p:spPr>
+          <a:xfrm>
+            <a:off x="2816352" y="4187951"/>
+            <a:ext cx="1005840" cy="210312"/>
+          </a:xfrm>
+          <a:prstGeom prst="rect">
+            <a:avLst/>
+          </a:prstGeom>
+          <a:noFill/>
+        </p:spPr>
+        <p:txBody>
+          <a:bodyPr wrap="square" lIns="0" rIns="0" tIns="0" bIns="0">
+            <a:spAutoFit/>
+          </a:bodyPr>
+          <a:lstStyle/>
+          <a:p>
+            <a:pPr algn="r"/>
+            <a:r>
+              <a:rPr sz="1150" b="0" i="0">
                 <a:solidFill>
                   <a:srgbClr val="212529"/>
                 </a:solidFill>
@@ -4877,14 +5332,49 @@
       </p:sp>
       <p:sp>
         <p:nvSpPr>
-          <p:cNvPr id="53" name="TextBox 52"/>
-          <p:cNvSpPr txBox="1"/>
-          <p:nvPr/>
-        </p:nvSpPr>
-        <p:spPr>
-          <a:xfrm>
-            <a:off x="685800" y="4336084"/>
-            <a:ext cx="713232" cy="219456"/>
+          <p:cNvPr id="66" name="TextBox 65"/>
+          <p:cNvSpPr txBox="1"/>
+          <p:nvPr/>
+        </p:nvSpPr>
+        <p:spPr>
+          <a:xfrm>
+            <a:off x="3822191" y="4187951"/>
+            <a:ext cx="768096" cy="210312"/>
+          </a:xfrm>
+          <a:prstGeom prst="rect">
+            <a:avLst/>
+          </a:prstGeom>
+          <a:noFill/>
+        </p:spPr>
+        <p:txBody>
+          <a:bodyPr wrap="square" lIns="0" rIns="0" tIns="0" bIns="0">
+            <a:spAutoFit/>
+          </a:bodyPr>
+          <a:lstStyle/>
+          <a:p>
+            <a:pPr algn="r"/>
+            <a:r>
+              <a:rPr sz="1150" b="0" i="0">
+                <a:solidFill>
+                  <a:srgbClr val="212529"/>
+                </a:solidFill>
+                <a:latin typeface="Garamond"/>
+              </a:rPr>
+              <a:t>11,250</a:t>
+            </a:r>
+          </a:p>
+        </p:txBody>
+      </p:sp>
+      <p:sp>
+        <p:nvSpPr>
+          <p:cNvPr id="67" name="TextBox 66"/>
+          <p:cNvSpPr txBox="1"/>
+          <p:nvPr/>
+        </p:nvSpPr>
+        <p:spPr>
+          <a:xfrm>
+            <a:off x="640080" y="4433011"/>
+            <a:ext cx="475488" cy="210312"/>
           </a:xfrm>
           <a:prstGeom prst="rect">
             <a:avLst/>
@@ -4899,7 +5389,7 @@
           <a:p>
             <a:pPr algn="l"/>
             <a:r>
-              <a:rPr sz="1200" b="0" i="0">
+              <a:rPr sz="1150" b="0" i="0">
                 <a:solidFill>
                   <a:srgbClr val="212529"/>
                 </a:solidFill>
@@ -4912,29 +5402,29 @@
       </p:sp>
       <p:sp>
         <p:nvSpPr>
-          <p:cNvPr id="54" name="TextBox 53"/>
-          <p:cNvSpPr txBox="1"/>
-          <p:nvPr/>
-        </p:nvSpPr>
-        <p:spPr>
-          <a:xfrm>
-            <a:off x="1399032" y="4336084"/>
-            <a:ext cx="1170432" cy="219456"/>
-          </a:xfrm>
-          <a:prstGeom prst="rect">
-            <a:avLst/>
-          </a:prstGeom>
-          <a:noFill/>
-        </p:spPr>
-        <p:txBody>
-          <a:bodyPr wrap="square" lIns="0" rIns="0" tIns="0" bIns="0">
-            <a:spAutoFit/>
-          </a:bodyPr>
-          <a:lstStyle/>
-          <a:p>
-            <a:pPr algn="r"/>
-            <a:r>
-              <a:rPr sz="1200" b="0" i="0">
+          <p:cNvPr id="68" name="TextBox 67"/>
+          <p:cNvSpPr txBox="1"/>
+          <p:nvPr/>
+        </p:nvSpPr>
+        <p:spPr>
+          <a:xfrm>
+            <a:off x="1115568" y="4433011"/>
+            <a:ext cx="950976" cy="210312"/>
+          </a:xfrm>
+          <a:prstGeom prst="rect">
+            <a:avLst/>
+          </a:prstGeom>
+          <a:noFill/>
+        </p:spPr>
+        <p:txBody>
+          <a:bodyPr wrap="square" lIns="0" rIns="0" tIns="0" bIns="0">
+            <a:spAutoFit/>
+          </a:bodyPr>
+          <a:lstStyle/>
+          <a:p>
+            <a:pPr algn="r"/>
+            <a:r>
+              <a:rPr sz="1150" b="0" i="0">
                 <a:solidFill>
                   <a:srgbClr val="212529"/>
                 </a:solidFill>
@@ -4947,29 +5437,29 @@
       </p:sp>
       <p:sp>
         <p:nvSpPr>
-          <p:cNvPr id="55" name="TextBox 54"/>
-          <p:cNvSpPr txBox="1"/>
-          <p:nvPr/>
-        </p:nvSpPr>
-        <p:spPr>
-          <a:xfrm>
-            <a:off x="2569464" y="4336084"/>
-            <a:ext cx="914400" cy="219456"/>
-          </a:xfrm>
-          <a:prstGeom prst="rect">
-            <a:avLst/>
-          </a:prstGeom>
-          <a:noFill/>
-        </p:spPr>
-        <p:txBody>
-          <a:bodyPr wrap="square" lIns="0" rIns="0" tIns="0" bIns="0">
-            <a:spAutoFit/>
-          </a:bodyPr>
-          <a:lstStyle/>
-          <a:p>
-            <a:pPr algn="r"/>
-            <a:r>
-              <a:rPr sz="1200" b="0" i="0">
+          <p:cNvPr id="69" name="TextBox 68"/>
+          <p:cNvSpPr txBox="1"/>
+          <p:nvPr/>
+        </p:nvSpPr>
+        <p:spPr>
+          <a:xfrm>
+            <a:off x="2066543" y="4433011"/>
+            <a:ext cx="749808" cy="210312"/>
+          </a:xfrm>
+          <a:prstGeom prst="rect">
+            <a:avLst/>
+          </a:prstGeom>
+          <a:noFill/>
+        </p:spPr>
+        <p:txBody>
+          <a:bodyPr wrap="square" lIns="0" rIns="0" tIns="0" bIns="0">
+            <a:spAutoFit/>
+          </a:bodyPr>
+          <a:lstStyle/>
+          <a:p>
+            <a:pPr algn="r"/>
+            <a:r>
+              <a:rPr sz="1150" b="0" i="0">
                 <a:solidFill>
                   <a:srgbClr val="212529"/>
                 </a:solidFill>
@@ -4982,29 +5472,29 @@
       </p:sp>
       <p:sp>
         <p:nvSpPr>
-          <p:cNvPr id="56" name="TextBox 55"/>
-          <p:cNvSpPr txBox="1"/>
-          <p:nvPr/>
-        </p:nvSpPr>
-        <p:spPr>
-          <a:xfrm>
-            <a:off x="3483864" y="4336084"/>
-            <a:ext cx="1316736" cy="219456"/>
-          </a:xfrm>
-          <a:prstGeom prst="rect">
-            <a:avLst/>
-          </a:prstGeom>
-          <a:noFill/>
-        </p:spPr>
-        <p:txBody>
-          <a:bodyPr wrap="square" lIns="0" rIns="0" tIns="0" bIns="0">
-            <a:spAutoFit/>
-          </a:bodyPr>
-          <a:lstStyle/>
-          <a:p>
-            <a:pPr algn="r"/>
-            <a:r>
-              <a:rPr sz="1200" b="0" i="0">
+          <p:cNvPr id="70" name="TextBox 69"/>
+          <p:cNvSpPr txBox="1"/>
+          <p:nvPr/>
+        </p:nvSpPr>
+        <p:spPr>
+          <a:xfrm>
+            <a:off x="2816352" y="4433011"/>
+            <a:ext cx="1005840" cy="210312"/>
+          </a:xfrm>
+          <a:prstGeom prst="rect">
+            <a:avLst/>
+          </a:prstGeom>
+          <a:noFill/>
+        </p:spPr>
+        <p:txBody>
+          <a:bodyPr wrap="square" lIns="0" rIns="0" tIns="0" bIns="0">
+            <a:spAutoFit/>
+          </a:bodyPr>
+          <a:lstStyle/>
+          <a:p>
+            <a:pPr algn="r"/>
+            <a:r>
+              <a:rPr sz="1150" b="0" i="0">
                 <a:solidFill>
                   <a:srgbClr val="212529"/>
                 </a:solidFill>
@@ -5017,14 +5507,49 @@
       </p:sp>
       <p:sp>
         <p:nvSpPr>
-          <p:cNvPr id="57" name="TextBox 56"/>
-          <p:cNvSpPr txBox="1"/>
-          <p:nvPr/>
-        </p:nvSpPr>
-        <p:spPr>
-          <a:xfrm>
-            <a:off x="685800" y="4584801"/>
-            <a:ext cx="713232" cy="219456"/>
+          <p:cNvPr id="71" name="TextBox 70"/>
+          <p:cNvSpPr txBox="1"/>
+          <p:nvPr/>
+        </p:nvSpPr>
+        <p:spPr>
+          <a:xfrm>
+            <a:off x="3822191" y="4433011"/>
+            <a:ext cx="768096" cy="210312"/>
+          </a:xfrm>
+          <a:prstGeom prst="rect">
+            <a:avLst/>
+          </a:prstGeom>
+          <a:noFill/>
+        </p:spPr>
+        <p:txBody>
+          <a:bodyPr wrap="square" lIns="0" rIns="0" tIns="0" bIns="0">
+            <a:spAutoFit/>
+          </a:bodyPr>
+          <a:lstStyle/>
+          <a:p>
+            <a:pPr algn="r"/>
+            <a:r>
+              <a:rPr sz="1150" b="0" i="0">
+                <a:solidFill>
+                  <a:srgbClr val="212529"/>
+                </a:solidFill>
+                <a:latin typeface="Garamond"/>
+              </a:rPr>
+              <a:t>11,186</a:t>
+            </a:r>
+          </a:p>
+        </p:txBody>
+      </p:sp>
+      <p:sp>
+        <p:nvSpPr>
+          <p:cNvPr id="72" name="TextBox 71"/>
+          <p:cNvSpPr txBox="1"/>
+          <p:nvPr/>
+        </p:nvSpPr>
+        <p:spPr>
+          <a:xfrm>
+            <a:off x="640080" y="4678070"/>
+            <a:ext cx="475488" cy="210312"/>
           </a:xfrm>
           <a:prstGeom prst="rect">
             <a:avLst/>
@@ -5039,7 +5564,7 @@
           <a:p>
             <a:pPr algn="l"/>
             <a:r>
-              <a:rPr sz="1200" b="0" i="0">
+              <a:rPr sz="1150" b="0" i="0">
                 <a:solidFill>
                   <a:srgbClr val="212529"/>
                 </a:solidFill>
@@ -5052,29 +5577,29 @@
       </p:sp>
       <p:sp>
         <p:nvSpPr>
-          <p:cNvPr id="58" name="TextBox 57"/>
-          <p:cNvSpPr txBox="1"/>
-          <p:nvPr/>
-        </p:nvSpPr>
-        <p:spPr>
-          <a:xfrm>
-            <a:off x="1399032" y="4584801"/>
-            <a:ext cx="1170432" cy="219456"/>
-          </a:xfrm>
-          <a:prstGeom prst="rect">
-            <a:avLst/>
-          </a:prstGeom>
-          <a:noFill/>
-        </p:spPr>
-        <p:txBody>
-          <a:bodyPr wrap="square" lIns="0" rIns="0" tIns="0" bIns="0">
-            <a:spAutoFit/>
-          </a:bodyPr>
-          <a:lstStyle/>
-          <a:p>
-            <a:pPr algn="r"/>
-            <a:r>
-              <a:rPr sz="1200" b="0" i="0">
+          <p:cNvPr id="73" name="TextBox 72"/>
+          <p:cNvSpPr txBox="1"/>
+          <p:nvPr/>
+        </p:nvSpPr>
+        <p:spPr>
+          <a:xfrm>
+            <a:off x="1115568" y="4678070"/>
+            <a:ext cx="950976" cy="210312"/>
+          </a:xfrm>
+          <a:prstGeom prst="rect">
+            <a:avLst/>
+          </a:prstGeom>
+          <a:noFill/>
+        </p:spPr>
+        <p:txBody>
+          <a:bodyPr wrap="square" lIns="0" rIns="0" tIns="0" bIns="0">
+            <a:spAutoFit/>
+          </a:bodyPr>
+          <a:lstStyle/>
+          <a:p>
+            <a:pPr algn="r"/>
+            <a:r>
+              <a:rPr sz="1150" b="0" i="0">
                 <a:solidFill>
                   <a:srgbClr val="212529"/>
                 </a:solidFill>
@@ -5087,29 +5612,29 @@
       </p:sp>
       <p:sp>
         <p:nvSpPr>
-          <p:cNvPr id="59" name="TextBox 58"/>
-          <p:cNvSpPr txBox="1"/>
-          <p:nvPr/>
-        </p:nvSpPr>
-        <p:spPr>
-          <a:xfrm>
-            <a:off x="2569464" y="4584801"/>
-            <a:ext cx="914400" cy="219456"/>
-          </a:xfrm>
-          <a:prstGeom prst="rect">
-            <a:avLst/>
-          </a:prstGeom>
-          <a:noFill/>
-        </p:spPr>
-        <p:txBody>
-          <a:bodyPr wrap="square" lIns="0" rIns="0" tIns="0" bIns="0">
-            <a:spAutoFit/>
-          </a:bodyPr>
-          <a:lstStyle/>
-          <a:p>
-            <a:pPr algn="r"/>
-            <a:r>
-              <a:rPr sz="1200" b="0" i="0">
+          <p:cNvPr id="74" name="TextBox 73"/>
+          <p:cNvSpPr txBox="1"/>
+          <p:nvPr/>
+        </p:nvSpPr>
+        <p:spPr>
+          <a:xfrm>
+            <a:off x="2066543" y="4678070"/>
+            <a:ext cx="749808" cy="210312"/>
+          </a:xfrm>
+          <a:prstGeom prst="rect">
+            <a:avLst/>
+          </a:prstGeom>
+          <a:noFill/>
+        </p:spPr>
+        <p:txBody>
+          <a:bodyPr wrap="square" lIns="0" rIns="0" tIns="0" bIns="0">
+            <a:spAutoFit/>
+          </a:bodyPr>
+          <a:lstStyle/>
+          <a:p>
+            <a:pPr algn="r"/>
+            <a:r>
+              <a:rPr sz="1150" b="0" i="0">
                 <a:solidFill>
                   <a:srgbClr val="212529"/>
                 </a:solidFill>
@@ -5122,29 +5647,29 @@
       </p:sp>
       <p:sp>
         <p:nvSpPr>
-          <p:cNvPr id="60" name="TextBox 59"/>
-          <p:cNvSpPr txBox="1"/>
-          <p:nvPr/>
-        </p:nvSpPr>
-        <p:spPr>
-          <a:xfrm>
-            <a:off x="3483864" y="4584801"/>
-            <a:ext cx="1316736" cy="219456"/>
-          </a:xfrm>
-          <a:prstGeom prst="rect">
-            <a:avLst/>
-          </a:prstGeom>
-          <a:noFill/>
-        </p:spPr>
-        <p:txBody>
-          <a:bodyPr wrap="square" lIns="0" rIns="0" tIns="0" bIns="0">
-            <a:spAutoFit/>
-          </a:bodyPr>
-          <a:lstStyle/>
-          <a:p>
-            <a:pPr algn="r"/>
-            <a:r>
-              <a:rPr sz="1200" b="0" i="0">
+          <p:cNvPr id="75" name="TextBox 74"/>
+          <p:cNvSpPr txBox="1"/>
+          <p:nvPr/>
+        </p:nvSpPr>
+        <p:spPr>
+          <a:xfrm>
+            <a:off x="2816352" y="4678070"/>
+            <a:ext cx="1005840" cy="210312"/>
+          </a:xfrm>
+          <a:prstGeom prst="rect">
+            <a:avLst/>
+          </a:prstGeom>
+          <a:noFill/>
+        </p:spPr>
+        <p:txBody>
+          <a:bodyPr wrap="square" lIns="0" rIns="0" tIns="0" bIns="0">
+            <a:spAutoFit/>
+          </a:bodyPr>
+          <a:lstStyle/>
+          <a:p>
+            <a:pPr algn="r"/>
+            <a:r>
+              <a:rPr sz="1150" b="0" i="0">
                 <a:solidFill>
                   <a:srgbClr val="212529"/>
                 </a:solidFill>
@@ -5157,14 +5682,49 @@
       </p:sp>
       <p:sp>
         <p:nvSpPr>
-          <p:cNvPr id="61" name="TextBox 60"/>
-          <p:cNvSpPr txBox="1"/>
-          <p:nvPr/>
-        </p:nvSpPr>
-        <p:spPr>
-          <a:xfrm>
-            <a:off x="685800" y="4833518"/>
-            <a:ext cx="713232" cy="219456"/>
+          <p:cNvPr id="76" name="TextBox 75"/>
+          <p:cNvSpPr txBox="1"/>
+          <p:nvPr/>
+        </p:nvSpPr>
+        <p:spPr>
+          <a:xfrm>
+            <a:off x="3822191" y="4678070"/>
+            <a:ext cx="768096" cy="210312"/>
+          </a:xfrm>
+          <a:prstGeom prst="rect">
+            <a:avLst/>
+          </a:prstGeom>
+          <a:noFill/>
+        </p:spPr>
+        <p:txBody>
+          <a:bodyPr wrap="square" lIns="0" rIns="0" tIns="0" bIns="0">
+            <a:spAutoFit/>
+          </a:bodyPr>
+          <a:lstStyle/>
+          <a:p>
+            <a:pPr algn="r"/>
+            <a:r>
+              <a:rPr sz="1150" b="0" i="0">
+                <a:solidFill>
+                  <a:srgbClr val="212529"/>
+                </a:solidFill>
+                <a:latin typeface="Garamond"/>
+              </a:rPr>
+              <a:t>11,221</a:t>
+            </a:r>
+          </a:p>
+        </p:txBody>
+      </p:sp>
+      <p:sp>
+        <p:nvSpPr>
+          <p:cNvPr id="77" name="TextBox 76"/>
+          <p:cNvSpPr txBox="1"/>
+          <p:nvPr/>
+        </p:nvSpPr>
+        <p:spPr>
+          <a:xfrm>
+            <a:off x="640080" y="4923129"/>
+            <a:ext cx="475488" cy="210312"/>
           </a:xfrm>
           <a:prstGeom prst="rect">
             <a:avLst/>
@@ -5179,7 +5739,7 @@
           <a:p>
             <a:pPr algn="l"/>
             <a:r>
-              <a:rPr sz="1200" b="0" i="0">
+              <a:rPr sz="1150" b="0" i="0">
                 <a:solidFill>
                   <a:srgbClr val="212529"/>
                 </a:solidFill>
@@ -5192,29 +5752,29 @@
       </p:sp>
       <p:sp>
         <p:nvSpPr>
-          <p:cNvPr id="62" name="TextBox 61"/>
-          <p:cNvSpPr txBox="1"/>
-          <p:nvPr/>
-        </p:nvSpPr>
-        <p:spPr>
-          <a:xfrm>
-            <a:off x="1399032" y="4833518"/>
-            <a:ext cx="1170432" cy="219456"/>
-          </a:xfrm>
-          <a:prstGeom prst="rect">
-            <a:avLst/>
-          </a:prstGeom>
-          <a:noFill/>
-        </p:spPr>
-        <p:txBody>
-          <a:bodyPr wrap="square" lIns="0" rIns="0" tIns="0" bIns="0">
-            <a:spAutoFit/>
-          </a:bodyPr>
-          <a:lstStyle/>
-          <a:p>
-            <a:pPr algn="r"/>
-            <a:r>
-              <a:rPr sz="1200" b="0" i="0">
+          <p:cNvPr id="78" name="TextBox 77"/>
+          <p:cNvSpPr txBox="1"/>
+          <p:nvPr/>
+        </p:nvSpPr>
+        <p:spPr>
+          <a:xfrm>
+            <a:off x="1115568" y="4923129"/>
+            <a:ext cx="950976" cy="210312"/>
+          </a:xfrm>
+          <a:prstGeom prst="rect">
+            <a:avLst/>
+          </a:prstGeom>
+          <a:noFill/>
+        </p:spPr>
+        <p:txBody>
+          <a:bodyPr wrap="square" lIns="0" rIns="0" tIns="0" bIns="0">
+            <a:spAutoFit/>
+          </a:bodyPr>
+          <a:lstStyle/>
+          <a:p>
+            <a:pPr algn="r"/>
+            <a:r>
+              <a:rPr sz="1150" b="0" i="0">
                 <a:solidFill>
                   <a:srgbClr val="212529"/>
                 </a:solidFill>
@@ -5227,29 +5787,29 @@
       </p:sp>
       <p:sp>
         <p:nvSpPr>
-          <p:cNvPr id="63" name="TextBox 62"/>
-          <p:cNvSpPr txBox="1"/>
-          <p:nvPr/>
-        </p:nvSpPr>
-        <p:spPr>
-          <a:xfrm>
-            <a:off x="2569464" y="4833518"/>
-            <a:ext cx="914400" cy="219456"/>
-          </a:xfrm>
-          <a:prstGeom prst="rect">
-            <a:avLst/>
-          </a:prstGeom>
-          <a:noFill/>
-        </p:spPr>
-        <p:txBody>
-          <a:bodyPr wrap="square" lIns="0" rIns="0" tIns="0" bIns="0">
-            <a:spAutoFit/>
-          </a:bodyPr>
-          <a:lstStyle/>
-          <a:p>
-            <a:pPr algn="r"/>
-            <a:r>
-              <a:rPr sz="1200" b="0" i="0">
+          <p:cNvPr id="79" name="TextBox 78"/>
+          <p:cNvSpPr txBox="1"/>
+          <p:nvPr/>
+        </p:nvSpPr>
+        <p:spPr>
+          <a:xfrm>
+            <a:off x="2066543" y="4923129"/>
+            <a:ext cx="749808" cy="210312"/>
+          </a:xfrm>
+          <a:prstGeom prst="rect">
+            <a:avLst/>
+          </a:prstGeom>
+          <a:noFill/>
+        </p:spPr>
+        <p:txBody>
+          <a:bodyPr wrap="square" lIns="0" rIns="0" tIns="0" bIns="0">
+            <a:spAutoFit/>
+          </a:bodyPr>
+          <a:lstStyle/>
+          <a:p>
+            <a:pPr algn="r"/>
+            <a:r>
+              <a:rPr sz="1150" b="0" i="0">
                 <a:solidFill>
                   <a:srgbClr val="212529"/>
                 </a:solidFill>
@@ -5262,49 +5822,84 @@
       </p:sp>
       <p:sp>
         <p:nvSpPr>
-          <p:cNvPr id="64" name="TextBox 63"/>
-          <p:cNvSpPr txBox="1"/>
-          <p:nvPr/>
-        </p:nvSpPr>
-        <p:spPr>
-          <a:xfrm>
-            <a:off x="3483864" y="4833518"/>
-            <a:ext cx="1316736" cy="219456"/>
-          </a:xfrm>
-          <a:prstGeom prst="rect">
-            <a:avLst/>
-          </a:prstGeom>
-          <a:noFill/>
-        </p:spPr>
-        <p:txBody>
-          <a:bodyPr wrap="square" lIns="0" rIns="0" tIns="0" bIns="0">
-            <a:spAutoFit/>
-          </a:bodyPr>
-          <a:lstStyle/>
-          <a:p>
-            <a:pPr algn="r"/>
-            <a:r>
-              <a:rPr sz="1200" b="0" i="0">
+          <p:cNvPr id="80" name="TextBox 79"/>
+          <p:cNvSpPr txBox="1"/>
+          <p:nvPr/>
+        </p:nvSpPr>
+        <p:spPr>
+          <a:xfrm>
+            <a:off x="2816352" y="4923129"/>
+            <a:ext cx="1005840" cy="210312"/>
+          </a:xfrm>
+          <a:prstGeom prst="rect">
+            <a:avLst/>
+          </a:prstGeom>
+          <a:noFill/>
+        </p:spPr>
+        <p:txBody>
+          <a:bodyPr wrap="square" lIns="0" rIns="0" tIns="0" bIns="0">
+            <a:spAutoFit/>
+          </a:bodyPr>
+          <a:lstStyle/>
+          <a:p>
+            <a:pPr algn="r"/>
+            <a:r>
+              <a:rPr sz="1150" b="0" i="0">
                 <a:solidFill>
                   <a:srgbClr val="212529"/>
                 </a:solidFill>
                 <a:latin typeface="Garamond"/>
               </a:rPr>
               <a:t>379,927</a:t>
+            </a:r>
+          </a:p>
+        </p:txBody>
+      </p:sp>
+      <p:sp>
+        <p:nvSpPr>
+          <p:cNvPr id="81" name="TextBox 80"/>
+          <p:cNvSpPr txBox="1"/>
+          <p:nvPr/>
+        </p:nvSpPr>
+        <p:spPr>
+          <a:xfrm>
+            <a:off x="3822191" y="4923129"/>
+            <a:ext cx="768096" cy="210312"/>
+          </a:xfrm>
+          <a:prstGeom prst="rect">
+            <a:avLst/>
+          </a:prstGeom>
+          <a:noFill/>
+        </p:spPr>
+        <p:txBody>
+          <a:bodyPr wrap="square" lIns="0" rIns="0" tIns="0" bIns="0">
+            <a:spAutoFit/>
+          </a:bodyPr>
+          <a:lstStyle/>
+          <a:p>
+            <a:pPr algn="r"/>
+            <a:r>
+              <a:rPr sz="1150" b="0" i="0">
+                <a:solidFill>
+                  <a:srgbClr val="212529"/>
+                </a:solidFill>
+                <a:latin typeface="Garamond"/>
+              </a:rPr>
+              <a:t>11,092</a:t>
             </a:r>
           </a:p>
         </p:txBody>
       </p:sp>
       <p:cxnSp>
         <p:nvCxnSpPr>
-          <p:cNvPr id="65" name="Connector 64"/>
+          <p:cNvPr id="82" name="Connector 81"/>
           <p:cNvCxnSpPr/>
           <p:nvPr/>
         </p:nvCxnSpPr>
         <p:spPr>
           <a:xfrm>
-            <a:off x="685800" y="5109667"/>
-            <a:ext cx="4206240" cy="0"/>
+            <a:off x="640080" y="5195620"/>
+            <a:ext cx="3950208" cy="0"/>
           </a:xfrm>
           <a:prstGeom prst="line">
             <a:avLst/>
@@ -5333,14 +5928,14 @@
       </p:cxnSp>
       <p:cxnSp>
         <p:nvCxnSpPr>
-          <p:cNvPr id="66" name="Connector 65"/>
+          <p:cNvPr id="83" name="Connector 82"/>
           <p:cNvCxnSpPr/>
           <p:nvPr/>
         </p:nvCxnSpPr>
         <p:spPr>
           <a:xfrm>
-            <a:off x="6583680" y="1234439"/>
-            <a:ext cx="4206240" cy="0"/>
+            <a:off x="6583680" y="1143000"/>
+            <a:ext cx="3950208" cy="0"/>
           </a:xfrm>
           <a:prstGeom prst="line">
             <a:avLst/>
@@ -5369,14 +5964,84 @@
       </p:cxnSp>
       <p:sp>
         <p:nvSpPr>
-          <p:cNvPr id="67" name="TextBox 66"/>
-          <p:cNvSpPr txBox="1"/>
-          <p:nvPr/>
-        </p:nvSpPr>
-        <p:spPr>
-          <a:xfrm>
-            <a:off x="6583680" y="1298448"/>
-            <a:ext cx="713232" cy="219456"/>
+          <p:cNvPr id="84" name="TextBox 83"/>
+          <p:cNvSpPr txBox="1"/>
+          <p:nvPr/>
+        </p:nvSpPr>
+        <p:spPr>
+          <a:xfrm>
+            <a:off x="7059168" y="1207008"/>
+            <a:ext cx="1700784" cy="210312"/>
+          </a:xfrm>
+          <a:prstGeom prst="rect">
+            <a:avLst/>
+          </a:prstGeom>
+          <a:noFill/>
+        </p:spPr>
+        <p:txBody>
+          <a:bodyPr wrap="square" lIns="0" rIns="0" tIns="0" bIns="0">
+            <a:spAutoFit/>
+          </a:bodyPr>
+          <a:lstStyle/>
+          <a:p>
+            <a:pPr algn="ctr"/>
+            <a:r>
+              <a:rPr sz="1150" b="1" i="0">
+                <a:solidFill>
+                  <a:srgbClr val="212529"/>
+                </a:solidFill>
+                <a:latin typeface="Garamond"/>
+              </a:rPr>
+              <a:t>March suppl.</a:t>
+            </a:r>
+          </a:p>
+        </p:txBody>
+      </p:sp>
+      <p:sp>
+        <p:nvSpPr>
+          <p:cNvPr id="85" name="TextBox 84"/>
+          <p:cNvSpPr txBox="1"/>
+          <p:nvPr/>
+        </p:nvSpPr>
+        <p:spPr>
+          <a:xfrm>
+            <a:off x="8759952" y="1207008"/>
+            <a:ext cx="1773936" cy="210312"/>
+          </a:xfrm>
+          <a:prstGeom prst="rect">
+            <a:avLst/>
+          </a:prstGeom>
+          <a:noFill/>
+        </p:spPr>
+        <p:txBody>
+          <a:bodyPr wrap="square" lIns="0" rIns="0" tIns="0" bIns="0">
+            <a:spAutoFit/>
+          </a:bodyPr>
+          <a:lstStyle/>
+          <a:p>
+            <a:pPr algn="ctr"/>
+            <a:r>
+              <a:rPr sz="1150" b="1" i="0">
+                <a:solidFill>
+                  <a:srgbClr val="212529"/>
+                </a:solidFill>
+                <a:latin typeface="Garamond"/>
+              </a:rPr>
+              <a:t>All 12 months*</a:t>
+            </a:r>
+          </a:p>
+        </p:txBody>
+      </p:sp>
+      <p:sp>
+        <p:nvSpPr>
+          <p:cNvPr id="86" name="TextBox 85"/>
+          <p:cNvSpPr txBox="1"/>
+          <p:nvPr/>
+        </p:nvSpPr>
+        <p:spPr>
+          <a:xfrm>
+            <a:off x="6583680" y="1444752"/>
+            <a:ext cx="475488" cy="210312"/>
           </a:xfrm>
           <a:prstGeom prst="rect">
             <a:avLst/>
@@ -5391,7 +6056,7 @@
           <a:p>
             <a:pPr algn="l"/>
             <a:r>
-              <a:rPr sz="1200" b="1" i="0">
+              <a:rPr sz="1150" b="1" i="0">
                 <a:solidFill>
                   <a:srgbClr val="212529"/>
                 </a:solidFill>
@@ -5404,66 +6069,66 @@
       </p:sp>
       <p:sp>
         <p:nvSpPr>
-          <p:cNvPr id="68" name="TextBox 67"/>
-          <p:cNvSpPr txBox="1"/>
-          <p:nvPr/>
-        </p:nvSpPr>
-        <p:spPr>
-          <a:xfrm>
-            <a:off x="7296912" y="1298448"/>
-            <a:ext cx="1170432" cy="219456"/>
-          </a:xfrm>
-          <a:prstGeom prst="rect">
-            <a:avLst/>
-          </a:prstGeom>
-          <a:noFill/>
-        </p:spPr>
-        <p:txBody>
-          <a:bodyPr wrap="square" lIns="0" rIns="0" tIns="0" bIns="0">
-            <a:spAutoFit/>
-          </a:bodyPr>
-          <a:lstStyle/>
-          <a:p>
-            <a:pPr algn="r"/>
-            <a:r>
-              <a:rPr sz="1200" b="1" i="0">
-                <a:solidFill>
-                  <a:srgbClr val="212529"/>
-                </a:solidFill>
-                <a:latin typeface="Garamond"/>
-              </a:rPr>
-              <a:t>March suppl.</a:t>
-            </a:r>
-          </a:p>
-        </p:txBody>
-      </p:sp>
-      <p:sp>
-        <p:nvSpPr>
-          <p:cNvPr id="69" name="TextBox 68"/>
-          <p:cNvSpPr txBox="1"/>
-          <p:nvPr/>
-        </p:nvSpPr>
-        <p:spPr>
-          <a:xfrm>
-            <a:off x="8467344" y="1298448"/>
-            <a:ext cx="914400" cy="219456"/>
-          </a:xfrm>
-          <a:prstGeom prst="rect">
-            <a:avLst/>
-          </a:prstGeom>
-          <a:noFill/>
-        </p:spPr>
-        <p:txBody>
-          <a:bodyPr wrap="square" lIns="0" rIns="0" tIns="0" bIns="0">
-            <a:spAutoFit/>
-          </a:bodyPr>
-          <a:lstStyle/>
-          <a:p>
-            <a:pPr algn="r"/>
-            <a:r>
-              <a:rPr sz="1200" b="1" i="0">
-                <a:solidFill>
-                  <a:srgbClr val="212529"/>
+          <p:cNvPr id="87" name="TextBox 86"/>
+          <p:cNvSpPr txBox="1"/>
+          <p:nvPr/>
+        </p:nvSpPr>
+        <p:spPr>
+          <a:xfrm>
+            <a:off x="7059168" y="1444752"/>
+            <a:ext cx="950976" cy="192024"/>
+          </a:xfrm>
+          <a:prstGeom prst="rect">
+            <a:avLst/>
+          </a:prstGeom>
+          <a:noFill/>
+        </p:spPr>
+        <p:txBody>
+          <a:bodyPr wrap="square" lIns="0" rIns="0" tIns="0" bIns="0">
+            <a:spAutoFit/>
+          </a:bodyPr>
+          <a:lstStyle/>
+          <a:p>
+            <a:pPr algn="r"/>
+            <a:r>
+              <a:rPr sz="1050" b="1" i="0">
+                <a:solidFill>
+                  <a:srgbClr val="6B7480"/>
+                </a:solidFill>
+                <a:latin typeface="Garamond"/>
+              </a:rPr>
+              <a:t>Persons</a:t>
+            </a:r>
+          </a:p>
+        </p:txBody>
+      </p:sp>
+      <p:sp>
+        <p:nvSpPr>
+          <p:cNvPr id="88" name="TextBox 87"/>
+          <p:cNvSpPr txBox="1"/>
+          <p:nvPr/>
+        </p:nvSpPr>
+        <p:spPr>
+          <a:xfrm>
+            <a:off x="8010144" y="1444752"/>
+            <a:ext cx="749808" cy="192024"/>
+          </a:xfrm>
+          <a:prstGeom prst="rect">
+            <a:avLst/>
+          </a:prstGeom>
+          <a:noFill/>
+        </p:spPr>
+        <p:txBody>
+          <a:bodyPr wrap="square" lIns="0" rIns="0" tIns="0" bIns="0">
+            <a:spAutoFit/>
+          </a:bodyPr>
+          <a:lstStyle/>
+          <a:p>
+            <a:pPr algn="r"/>
+            <a:r>
+              <a:rPr sz="1050" b="1" i="0">
+                <a:solidFill>
+                  <a:srgbClr val="6B7480"/>
                 </a:solidFill>
                 <a:latin typeface="Garamond"/>
               </a:rPr>
@@ -5474,49 +6139,84 @@
       </p:sp>
       <p:sp>
         <p:nvSpPr>
-          <p:cNvPr id="70" name="TextBox 69"/>
-          <p:cNvSpPr txBox="1"/>
-          <p:nvPr/>
-        </p:nvSpPr>
-        <p:spPr>
-          <a:xfrm>
-            <a:off x="9381744" y="1298448"/>
-            <a:ext cx="1316736" cy="219456"/>
-          </a:xfrm>
-          <a:prstGeom prst="rect">
-            <a:avLst/>
-          </a:prstGeom>
-          <a:noFill/>
-        </p:spPr>
-        <p:txBody>
-          <a:bodyPr wrap="square" lIns="0" rIns="0" tIns="0" bIns="0">
-            <a:spAutoFit/>
-          </a:bodyPr>
-          <a:lstStyle/>
-          <a:p>
-            <a:pPr algn="r"/>
-            <a:r>
-              <a:rPr sz="1200" b="1" i="0">
-                <a:solidFill>
-                  <a:srgbClr val="212529"/>
-                </a:solidFill>
-                <a:latin typeface="Garamond"/>
-              </a:rPr>
-              <a:t>All 12 months</a:t>
+          <p:cNvPr id="89" name="TextBox 88"/>
+          <p:cNvSpPr txBox="1"/>
+          <p:nvPr/>
+        </p:nvSpPr>
+        <p:spPr>
+          <a:xfrm>
+            <a:off x="8759952" y="1444752"/>
+            <a:ext cx="1005840" cy="192024"/>
+          </a:xfrm>
+          <a:prstGeom prst="rect">
+            <a:avLst/>
+          </a:prstGeom>
+          <a:noFill/>
+        </p:spPr>
+        <p:txBody>
+          <a:bodyPr wrap="square" lIns="0" rIns="0" tIns="0" bIns="0">
+            <a:spAutoFit/>
+          </a:bodyPr>
+          <a:lstStyle/>
+          <a:p>
+            <a:pPr algn="r"/>
+            <a:r>
+              <a:rPr sz="1050" b="1" i="0">
+                <a:solidFill>
+                  <a:srgbClr val="6B7480"/>
+                </a:solidFill>
+                <a:latin typeface="Garamond"/>
+              </a:rPr>
+              <a:t>Persons</a:t>
+            </a:r>
+          </a:p>
+        </p:txBody>
+      </p:sp>
+      <p:sp>
+        <p:nvSpPr>
+          <p:cNvPr id="90" name="TextBox 89"/>
+          <p:cNvSpPr txBox="1"/>
+          <p:nvPr/>
+        </p:nvSpPr>
+        <p:spPr>
+          <a:xfrm>
+            <a:off x="9765792" y="1444752"/>
+            <a:ext cx="768096" cy="192024"/>
+          </a:xfrm>
+          <a:prstGeom prst="rect">
+            <a:avLst/>
+          </a:prstGeom>
+          <a:noFill/>
+        </p:spPr>
+        <p:txBody>
+          <a:bodyPr wrap="square" lIns="0" rIns="0" tIns="0" bIns="0">
+            <a:spAutoFit/>
+          </a:bodyPr>
+          <a:lstStyle/>
+          <a:p>
+            <a:pPr algn="r"/>
+            <a:r>
+              <a:rPr sz="1050" b="1" i="0">
+                <a:solidFill>
+                  <a:srgbClr val="6B7480"/>
+                </a:solidFill>
+                <a:latin typeface="Garamond"/>
+              </a:rPr>
+              <a:t>Teachers</a:t>
             </a:r>
           </a:p>
         </p:txBody>
       </p:sp>
       <p:cxnSp>
         <p:nvCxnSpPr>
-          <p:cNvPr id="71" name="Connector 70"/>
+          <p:cNvPr id="91" name="Connector 90"/>
           <p:cNvCxnSpPr/>
           <p:nvPr/>
         </p:nvCxnSpPr>
         <p:spPr>
           <a:xfrm>
-            <a:off x="6583680" y="1545336"/>
-            <a:ext cx="4206240" cy="0"/>
+            <a:off x="6583680" y="1664208"/>
+            <a:ext cx="3950208" cy="0"/>
           </a:xfrm>
           <a:prstGeom prst="line">
             <a:avLst/>
@@ -5545,14 +6245,14 @@
       </p:cxnSp>
       <p:sp>
         <p:nvSpPr>
-          <p:cNvPr id="72" name="TextBox 71"/>
-          <p:cNvSpPr txBox="1"/>
-          <p:nvPr/>
-        </p:nvSpPr>
-        <p:spPr>
-          <a:xfrm>
-            <a:off x="6583680" y="1600200"/>
-            <a:ext cx="713232" cy="219456"/>
+          <p:cNvPr id="92" name="TextBox 91"/>
+          <p:cNvSpPr txBox="1"/>
+          <p:nvPr/>
+        </p:nvSpPr>
+        <p:spPr>
+          <a:xfrm>
+            <a:off x="6583680" y="1737360"/>
+            <a:ext cx="475488" cy="210312"/>
           </a:xfrm>
           <a:prstGeom prst="rect">
             <a:avLst/>
@@ -5567,7 +6267,7 @@
           <a:p>
             <a:pPr algn="l"/>
             <a:r>
-              <a:rPr sz="1200" b="0" i="0">
+              <a:rPr sz="1150" b="0" i="0">
                 <a:solidFill>
                   <a:srgbClr val="212529"/>
                 </a:solidFill>
@@ -5580,29 +6280,29 @@
       </p:sp>
       <p:sp>
         <p:nvSpPr>
-          <p:cNvPr id="73" name="TextBox 72"/>
-          <p:cNvSpPr txBox="1"/>
-          <p:nvPr/>
-        </p:nvSpPr>
-        <p:spPr>
-          <a:xfrm>
-            <a:off x="7296912" y="1600200"/>
-            <a:ext cx="1170432" cy="219456"/>
-          </a:xfrm>
-          <a:prstGeom prst="rect">
-            <a:avLst/>
-          </a:prstGeom>
-          <a:noFill/>
-        </p:spPr>
-        <p:txBody>
-          <a:bodyPr wrap="square" lIns="0" rIns="0" tIns="0" bIns="0">
-            <a:spAutoFit/>
-          </a:bodyPr>
-          <a:lstStyle/>
-          <a:p>
-            <a:pPr algn="r"/>
-            <a:r>
-              <a:rPr sz="1200" b="0" i="0">
+          <p:cNvPr id="93" name="TextBox 92"/>
+          <p:cNvSpPr txBox="1"/>
+          <p:nvPr/>
+        </p:nvSpPr>
+        <p:spPr>
+          <a:xfrm>
+            <a:off x="7059168" y="1737360"/>
+            <a:ext cx="950976" cy="210312"/>
+          </a:xfrm>
+          <a:prstGeom prst="rect">
+            <a:avLst/>
+          </a:prstGeom>
+          <a:noFill/>
+        </p:spPr>
+        <p:txBody>
+          <a:bodyPr wrap="square" lIns="0" rIns="0" tIns="0" bIns="0">
+            <a:spAutoFit/>
+          </a:bodyPr>
+          <a:lstStyle/>
+          <a:p>
+            <a:pPr algn="r"/>
+            <a:r>
+              <a:rPr sz="1150" b="0" i="0">
                 <a:solidFill>
                   <a:srgbClr val="212529"/>
                 </a:solidFill>
@@ -5615,29 +6315,29 @@
       </p:sp>
       <p:sp>
         <p:nvSpPr>
-          <p:cNvPr id="74" name="TextBox 73"/>
-          <p:cNvSpPr txBox="1"/>
-          <p:nvPr/>
-        </p:nvSpPr>
-        <p:spPr>
-          <a:xfrm>
-            <a:off x="8467344" y="1600200"/>
-            <a:ext cx="914400" cy="219456"/>
-          </a:xfrm>
-          <a:prstGeom prst="rect">
-            <a:avLst/>
-          </a:prstGeom>
-          <a:noFill/>
-        </p:spPr>
-        <p:txBody>
-          <a:bodyPr wrap="square" lIns="0" rIns="0" tIns="0" bIns="0">
-            <a:spAutoFit/>
-          </a:bodyPr>
-          <a:lstStyle/>
-          <a:p>
-            <a:pPr algn="r"/>
-            <a:r>
-              <a:rPr sz="1200" b="0" i="0">
+          <p:cNvPr id="94" name="TextBox 93"/>
+          <p:cNvSpPr txBox="1"/>
+          <p:nvPr/>
+        </p:nvSpPr>
+        <p:spPr>
+          <a:xfrm>
+            <a:off x="8010144" y="1737360"/>
+            <a:ext cx="749808" cy="210312"/>
+          </a:xfrm>
+          <a:prstGeom prst="rect">
+            <a:avLst/>
+          </a:prstGeom>
+          <a:noFill/>
+        </p:spPr>
+        <p:txBody>
+          <a:bodyPr wrap="square" lIns="0" rIns="0" tIns="0" bIns="0">
+            <a:spAutoFit/>
+          </a:bodyPr>
+          <a:lstStyle/>
+          <a:p>
+            <a:pPr algn="r"/>
+            <a:r>
+              <a:rPr sz="1150" b="0" i="0">
                 <a:solidFill>
                   <a:srgbClr val="212529"/>
                 </a:solidFill>
@@ -5650,29 +6350,29 @@
       </p:sp>
       <p:sp>
         <p:nvSpPr>
-          <p:cNvPr id="75" name="TextBox 74"/>
-          <p:cNvSpPr txBox="1"/>
-          <p:nvPr/>
-        </p:nvSpPr>
-        <p:spPr>
-          <a:xfrm>
-            <a:off x="9381744" y="1600200"/>
-            <a:ext cx="1316736" cy="219456"/>
-          </a:xfrm>
-          <a:prstGeom prst="rect">
-            <a:avLst/>
-          </a:prstGeom>
-          <a:noFill/>
-        </p:spPr>
-        <p:txBody>
-          <a:bodyPr wrap="square" lIns="0" rIns="0" tIns="0" bIns="0">
-            <a:spAutoFit/>
-          </a:bodyPr>
-          <a:lstStyle/>
-          <a:p>
-            <a:pPr algn="r"/>
-            <a:r>
-              <a:rPr sz="1200" b="0" i="0">
+          <p:cNvPr id="95" name="TextBox 94"/>
+          <p:cNvSpPr txBox="1"/>
+          <p:nvPr/>
+        </p:nvSpPr>
+        <p:spPr>
+          <a:xfrm>
+            <a:off x="8759952" y="1737360"/>
+            <a:ext cx="1005840" cy="210312"/>
+          </a:xfrm>
+          <a:prstGeom prst="rect">
+            <a:avLst/>
+          </a:prstGeom>
+          <a:noFill/>
+        </p:spPr>
+        <p:txBody>
+          <a:bodyPr wrap="square" lIns="0" rIns="0" tIns="0" bIns="0">
+            <a:spAutoFit/>
+          </a:bodyPr>
+          <a:lstStyle/>
+          <a:p>
+            <a:pPr algn="r"/>
+            <a:r>
+              <a:rPr sz="1150" b="0" i="0">
                 <a:solidFill>
                   <a:srgbClr val="212529"/>
                 </a:solidFill>
@@ -5685,14 +6385,49 @@
       </p:sp>
       <p:sp>
         <p:nvSpPr>
-          <p:cNvPr id="76" name="TextBox 75"/>
-          <p:cNvSpPr txBox="1"/>
-          <p:nvPr/>
-        </p:nvSpPr>
-        <p:spPr>
-          <a:xfrm>
-            <a:off x="6583680" y="1848916"/>
-            <a:ext cx="713232" cy="219456"/>
+          <p:cNvPr id="96" name="TextBox 95"/>
+          <p:cNvSpPr txBox="1"/>
+          <p:nvPr/>
+        </p:nvSpPr>
+        <p:spPr>
+          <a:xfrm>
+            <a:off x="9765792" y="1737360"/>
+            <a:ext cx="768096" cy="210312"/>
+          </a:xfrm>
+          <a:prstGeom prst="rect">
+            <a:avLst/>
+          </a:prstGeom>
+          <a:noFill/>
+        </p:spPr>
+        <p:txBody>
+          <a:bodyPr wrap="square" lIns="0" rIns="0" tIns="0" bIns="0">
+            <a:spAutoFit/>
+          </a:bodyPr>
+          <a:lstStyle/>
+          <a:p>
+            <a:pPr algn="r"/>
+            <a:r>
+              <a:rPr sz="1150" b="0" i="0">
+                <a:solidFill>
+                  <a:srgbClr val="212529"/>
+                </a:solidFill>
+                <a:latin typeface="Garamond"/>
+              </a:rPr>
+              <a:t>11,012</a:t>
+            </a:r>
+          </a:p>
+        </p:txBody>
+      </p:sp>
+      <p:sp>
+        <p:nvSpPr>
+          <p:cNvPr id="97" name="TextBox 96"/>
+          <p:cNvSpPr txBox="1"/>
+          <p:nvPr/>
+        </p:nvSpPr>
+        <p:spPr>
+          <a:xfrm>
+            <a:off x="6583680" y="1982419"/>
+            <a:ext cx="475488" cy="210312"/>
           </a:xfrm>
           <a:prstGeom prst="rect">
             <a:avLst/>
@@ -5707,7 +6442,7 @@
           <a:p>
             <a:pPr algn="l"/>
             <a:r>
-              <a:rPr sz="1200" b="0" i="0">
+              <a:rPr sz="1150" b="0" i="0">
                 <a:solidFill>
                   <a:srgbClr val="212529"/>
                 </a:solidFill>
@@ -5720,29 +6455,29 @@
       </p:sp>
       <p:sp>
         <p:nvSpPr>
-          <p:cNvPr id="77" name="TextBox 76"/>
-          <p:cNvSpPr txBox="1"/>
-          <p:nvPr/>
-        </p:nvSpPr>
-        <p:spPr>
-          <a:xfrm>
-            <a:off x="7296912" y="1848916"/>
-            <a:ext cx="1170432" cy="219456"/>
-          </a:xfrm>
-          <a:prstGeom prst="rect">
-            <a:avLst/>
-          </a:prstGeom>
-          <a:noFill/>
-        </p:spPr>
-        <p:txBody>
-          <a:bodyPr wrap="square" lIns="0" rIns="0" tIns="0" bIns="0">
-            <a:spAutoFit/>
-          </a:bodyPr>
-          <a:lstStyle/>
-          <a:p>
-            <a:pPr algn="r"/>
-            <a:r>
-              <a:rPr sz="1200" b="0" i="0">
+          <p:cNvPr id="98" name="TextBox 97"/>
+          <p:cNvSpPr txBox="1"/>
+          <p:nvPr/>
+        </p:nvSpPr>
+        <p:spPr>
+          <a:xfrm>
+            <a:off x="7059168" y="1982419"/>
+            <a:ext cx="950976" cy="210312"/>
+          </a:xfrm>
+          <a:prstGeom prst="rect">
+            <a:avLst/>
+          </a:prstGeom>
+          <a:noFill/>
+        </p:spPr>
+        <p:txBody>
+          <a:bodyPr wrap="square" lIns="0" rIns="0" tIns="0" bIns="0">
+            <a:spAutoFit/>
+          </a:bodyPr>
+          <a:lstStyle/>
+          <a:p>
+            <a:pPr algn="r"/>
+            <a:r>
+              <a:rPr sz="1150" b="0" i="0">
                 <a:solidFill>
                   <a:srgbClr val="212529"/>
                 </a:solidFill>
@@ -5755,29 +6490,29 @@
       </p:sp>
       <p:sp>
         <p:nvSpPr>
-          <p:cNvPr id="78" name="TextBox 77"/>
-          <p:cNvSpPr txBox="1"/>
-          <p:nvPr/>
-        </p:nvSpPr>
-        <p:spPr>
-          <a:xfrm>
-            <a:off x="8467344" y="1848916"/>
-            <a:ext cx="914400" cy="219456"/>
-          </a:xfrm>
-          <a:prstGeom prst="rect">
-            <a:avLst/>
-          </a:prstGeom>
-          <a:noFill/>
-        </p:spPr>
-        <p:txBody>
-          <a:bodyPr wrap="square" lIns="0" rIns="0" tIns="0" bIns="0">
-            <a:spAutoFit/>
-          </a:bodyPr>
-          <a:lstStyle/>
-          <a:p>
-            <a:pPr algn="r"/>
-            <a:r>
-              <a:rPr sz="1200" b="0" i="0">
+          <p:cNvPr id="99" name="TextBox 98"/>
+          <p:cNvSpPr txBox="1"/>
+          <p:nvPr/>
+        </p:nvSpPr>
+        <p:spPr>
+          <a:xfrm>
+            <a:off x="8010144" y="1982419"/>
+            <a:ext cx="749808" cy="210312"/>
+          </a:xfrm>
+          <a:prstGeom prst="rect">
+            <a:avLst/>
+          </a:prstGeom>
+          <a:noFill/>
+        </p:spPr>
+        <p:txBody>
+          <a:bodyPr wrap="square" lIns="0" rIns="0" tIns="0" bIns="0">
+            <a:spAutoFit/>
+          </a:bodyPr>
+          <a:lstStyle/>
+          <a:p>
+            <a:pPr algn="r"/>
+            <a:r>
+              <a:rPr sz="1150" b="0" i="0">
                 <a:solidFill>
                   <a:srgbClr val="212529"/>
                 </a:solidFill>
@@ -5790,29 +6525,29 @@
       </p:sp>
       <p:sp>
         <p:nvSpPr>
-          <p:cNvPr id="79" name="TextBox 78"/>
-          <p:cNvSpPr txBox="1"/>
-          <p:nvPr/>
-        </p:nvSpPr>
-        <p:spPr>
-          <a:xfrm>
-            <a:off x="9381744" y="1848916"/>
-            <a:ext cx="1316736" cy="219456"/>
-          </a:xfrm>
-          <a:prstGeom prst="rect">
-            <a:avLst/>
-          </a:prstGeom>
-          <a:noFill/>
-        </p:spPr>
-        <p:txBody>
-          <a:bodyPr wrap="square" lIns="0" rIns="0" tIns="0" bIns="0">
-            <a:spAutoFit/>
-          </a:bodyPr>
-          <a:lstStyle/>
-          <a:p>
-            <a:pPr algn="r"/>
-            <a:r>
-              <a:rPr sz="1200" b="0" i="0">
+          <p:cNvPr id="100" name="TextBox 99"/>
+          <p:cNvSpPr txBox="1"/>
+          <p:nvPr/>
+        </p:nvSpPr>
+        <p:spPr>
+          <a:xfrm>
+            <a:off x="8759952" y="1982419"/>
+            <a:ext cx="1005840" cy="210312"/>
+          </a:xfrm>
+          <a:prstGeom prst="rect">
+            <a:avLst/>
+          </a:prstGeom>
+          <a:noFill/>
+        </p:spPr>
+        <p:txBody>
+          <a:bodyPr wrap="square" lIns="0" rIns="0" tIns="0" bIns="0">
+            <a:spAutoFit/>
+          </a:bodyPr>
+          <a:lstStyle/>
+          <a:p>
+            <a:pPr algn="r"/>
+            <a:r>
+              <a:rPr sz="1150" b="0" i="0">
                 <a:solidFill>
                   <a:srgbClr val="212529"/>
                 </a:solidFill>
@@ -5825,14 +6560,49 @@
       </p:sp>
       <p:sp>
         <p:nvSpPr>
-          <p:cNvPr id="80" name="TextBox 79"/>
-          <p:cNvSpPr txBox="1"/>
-          <p:nvPr/>
-        </p:nvSpPr>
-        <p:spPr>
-          <a:xfrm>
-            <a:off x="6583680" y="2097633"/>
-            <a:ext cx="713232" cy="219456"/>
+          <p:cNvPr id="101" name="TextBox 100"/>
+          <p:cNvSpPr txBox="1"/>
+          <p:nvPr/>
+        </p:nvSpPr>
+        <p:spPr>
+          <a:xfrm>
+            <a:off x="9765792" y="1982419"/>
+            <a:ext cx="768096" cy="210312"/>
+          </a:xfrm>
+          <a:prstGeom prst="rect">
+            <a:avLst/>
+          </a:prstGeom>
+          <a:noFill/>
+        </p:spPr>
+        <p:txBody>
+          <a:bodyPr wrap="square" lIns="0" rIns="0" tIns="0" bIns="0">
+            <a:spAutoFit/>
+          </a:bodyPr>
+          <a:lstStyle/>
+          <a:p>
+            <a:pPr algn="r"/>
+            <a:r>
+              <a:rPr sz="1150" b="0" i="0">
+                <a:solidFill>
+                  <a:srgbClr val="212529"/>
+                </a:solidFill>
+                <a:latin typeface="Garamond"/>
+              </a:rPr>
+              <a:t>10,947</a:t>
+            </a:r>
+          </a:p>
+        </p:txBody>
+      </p:sp>
+      <p:sp>
+        <p:nvSpPr>
+          <p:cNvPr id="102" name="TextBox 101"/>
+          <p:cNvSpPr txBox="1"/>
+          <p:nvPr/>
+        </p:nvSpPr>
+        <p:spPr>
+          <a:xfrm>
+            <a:off x="6583680" y="2227478"/>
+            <a:ext cx="475488" cy="210312"/>
           </a:xfrm>
           <a:prstGeom prst="rect">
             <a:avLst/>
@@ -5847,7 +6617,7 @@
           <a:p>
             <a:pPr algn="l"/>
             <a:r>
-              <a:rPr sz="1200" b="0" i="0">
+              <a:rPr sz="1150" b="0" i="0">
                 <a:solidFill>
                   <a:srgbClr val="212529"/>
                 </a:solidFill>
@@ -5860,29 +6630,29 @@
       </p:sp>
       <p:sp>
         <p:nvSpPr>
-          <p:cNvPr id="81" name="TextBox 80"/>
-          <p:cNvSpPr txBox="1"/>
-          <p:nvPr/>
-        </p:nvSpPr>
-        <p:spPr>
-          <a:xfrm>
-            <a:off x="7296912" y="2097633"/>
-            <a:ext cx="1170432" cy="219456"/>
-          </a:xfrm>
-          <a:prstGeom prst="rect">
-            <a:avLst/>
-          </a:prstGeom>
-          <a:noFill/>
-        </p:spPr>
-        <p:txBody>
-          <a:bodyPr wrap="square" lIns="0" rIns="0" tIns="0" bIns="0">
-            <a:spAutoFit/>
-          </a:bodyPr>
-          <a:lstStyle/>
-          <a:p>
-            <a:pPr algn="r"/>
-            <a:r>
-              <a:rPr sz="1200" b="0" i="0">
+          <p:cNvPr id="103" name="TextBox 102"/>
+          <p:cNvSpPr txBox="1"/>
+          <p:nvPr/>
+        </p:nvSpPr>
+        <p:spPr>
+          <a:xfrm>
+            <a:off x="7059168" y="2227478"/>
+            <a:ext cx="950976" cy="210312"/>
+          </a:xfrm>
+          <a:prstGeom prst="rect">
+            <a:avLst/>
+          </a:prstGeom>
+          <a:noFill/>
+        </p:spPr>
+        <p:txBody>
+          <a:bodyPr wrap="square" lIns="0" rIns="0" tIns="0" bIns="0">
+            <a:spAutoFit/>
+          </a:bodyPr>
+          <a:lstStyle/>
+          <a:p>
+            <a:pPr algn="r"/>
+            <a:r>
+              <a:rPr sz="1150" b="0" i="0">
                 <a:solidFill>
                   <a:srgbClr val="212529"/>
                 </a:solidFill>
@@ -5895,29 +6665,29 @@
       </p:sp>
       <p:sp>
         <p:nvSpPr>
-          <p:cNvPr id="82" name="TextBox 81"/>
-          <p:cNvSpPr txBox="1"/>
-          <p:nvPr/>
-        </p:nvSpPr>
-        <p:spPr>
-          <a:xfrm>
-            <a:off x="8467344" y="2097633"/>
-            <a:ext cx="914400" cy="219456"/>
-          </a:xfrm>
-          <a:prstGeom prst="rect">
-            <a:avLst/>
-          </a:prstGeom>
-          <a:noFill/>
-        </p:spPr>
-        <p:txBody>
-          <a:bodyPr wrap="square" lIns="0" rIns="0" tIns="0" bIns="0">
-            <a:spAutoFit/>
-          </a:bodyPr>
-          <a:lstStyle/>
-          <a:p>
-            <a:pPr algn="r"/>
-            <a:r>
-              <a:rPr sz="1200" b="0" i="0">
+          <p:cNvPr id="104" name="TextBox 103"/>
+          <p:cNvSpPr txBox="1"/>
+          <p:nvPr/>
+        </p:nvSpPr>
+        <p:spPr>
+          <a:xfrm>
+            <a:off x="8010144" y="2227478"/>
+            <a:ext cx="749808" cy="210312"/>
+          </a:xfrm>
+          <a:prstGeom prst="rect">
+            <a:avLst/>
+          </a:prstGeom>
+          <a:noFill/>
+        </p:spPr>
+        <p:txBody>
+          <a:bodyPr wrap="square" lIns="0" rIns="0" tIns="0" bIns="0">
+            <a:spAutoFit/>
+          </a:bodyPr>
+          <a:lstStyle/>
+          <a:p>
+            <a:pPr algn="r"/>
+            <a:r>
+              <a:rPr sz="1150" b="0" i="0">
                 <a:solidFill>
                   <a:srgbClr val="212529"/>
                 </a:solidFill>
@@ -5930,29 +6700,29 @@
       </p:sp>
       <p:sp>
         <p:nvSpPr>
-          <p:cNvPr id="83" name="TextBox 82"/>
-          <p:cNvSpPr txBox="1"/>
-          <p:nvPr/>
-        </p:nvSpPr>
-        <p:spPr>
-          <a:xfrm>
-            <a:off x="9381744" y="2097633"/>
-            <a:ext cx="1316736" cy="219456"/>
-          </a:xfrm>
-          <a:prstGeom prst="rect">
-            <a:avLst/>
-          </a:prstGeom>
-          <a:noFill/>
-        </p:spPr>
-        <p:txBody>
-          <a:bodyPr wrap="square" lIns="0" rIns="0" tIns="0" bIns="0">
-            <a:spAutoFit/>
-          </a:bodyPr>
-          <a:lstStyle/>
-          <a:p>
-            <a:pPr algn="r"/>
-            <a:r>
-              <a:rPr sz="1200" b="0" i="0">
+          <p:cNvPr id="105" name="TextBox 104"/>
+          <p:cNvSpPr txBox="1"/>
+          <p:nvPr/>
+        </p:nvSpPr>
+        <p:spPr>
+          <a:xfrm>
+            <a:off x="8759952" y="2227478"/>
+            <a:ext cx="1005840" cy="210312"/>
+          </a:xfrm>
+          <a:prstGeom prst="rect">
+            <a:avLst/>
+          </a:prstGeom>
+          <a:noFill/>
+        </p:spPr>
+        <p:txBody>
+          <a:bodyPr wrap="square" lIns="0" rIns="0" tIns="0" bIns="0">
+            <a:spAutoFit/>
+          </a:bodyPr>
+          <a:lstStyle/>
+          <a:p>
+            <a:pPr algn="r"/>
+            <a:r>
+              <a:rPr sz="1150" b="0" i="0">
                 <a:solidFill>
                   <a:srgbClr val="212529"/>
                 </a:solidFill>
@@ -5965,14 +6735,49 @@
       </p:sp>
       <p:sp>
         <p:nvSpPr>
-          <p:cNvPr id="84" name="TextBox 83"/>
-          <p:cNvSpPr txBox="1"/>
-          <p:nvPr/>
-        </p:nvSpPr>
-        <p:spPr>
-          <a:xfrm>
-            <a:off x="6583680" y="2346350"/>
-            <a:ext cx="713232" cy="219456"/>
+          <p:cNvPr id="106" name="TextBox 105"/>
+          <p:cNvSpPr txBox="1"/>
+          <p:nvPr/>
+        </p:nvSpPr>
+        <p:spPr>
+          <a:xfrm>
+            <a:off x="9765792" y="2227478"/>
+            <a:ext cx="768096" cy="210312"/>
+          </a:xfrm>
+          <a:prstGeom prst="rect">
+            <a:avLst/>
+          </a:prstGeom>
+          <a:noFill/>
+        </p:spPr>
+        <p:txBody>
+          <a:bodyPr wrap="square" lIns="0" rIns="0" tIns="0" bIns="0">
+            <a:spAutoFit/>
+          </a:bodyPr>
+          <a:lstStyle/>
+          <a:p>
+            <a:pPr algn="r"/>
+            <a:r>
+              <a:rPr sz="1150" b="0" i="0">
+                <a:solidFill>
+                  <a:srgbClr val="212529"/>
+                </a:solidFill>
+                <a:latin typeface="Garamond"/>
+              </a:rPr>
+              <a:t>11,199</a:t>
+            </a:r>
+          </a:p>
+        </p:txBody>
+      </p:sp>
+      <p:sp>
+        <p:nvSpPr>
+          <p:cNvPr id="107" name="TextBox 106"/>
+          <p:cNvSpPr txBox="1"/>
+          <p:nvPr/>
+        </p:nvSpPr>
+        <p:spPr>
+          <a:xfrm>
+            <a:off x="6583680" y="2472537"/>
+            <a:ext cx="475488" cy="210312"/>
           </a:xfrm>
           <a:prstGeom prst="rect">
             <a:avLst/>
@@ -5987,7 +6792,7 @@
           <a:p>
             <a:pPr algn="l"/>
             <a:r>
-              <a:rPr sz="1200" b="0" i="0">
+              <a:rPr sz="1150" b="0" i="0">
                 <a:solidFill>
                   <a:srgbClr val="212529"/>
                 </a:solidFill>
@@ -6000,29 +6805,29 @@
       </p:sp>
       <p:sp>
         <p:nvSpPr>
-          <p:cNvPr id="85" name="TextBox 84"/>
-          <p:cNvSpPr txBox="1"/>
-          <p:nvPr/>
-        </p:nvSpPr>
-        <p:spPr>
-          <a:xfrm>
-            <a:off x="7296912" y="2346350"/>
-            <a:ext cx="1170432" cy="219456"/>
-          </a:xfrm>
-          <a:prstGeom prst="rect">
-            <a:avLst/>
-          </a:prstGeom>
-          <a:noFill/>
-        </p:spPr>
-        <p:txBody>
-          <a:bodyPr wrap="square" lIns="0" rIns="0" tIns="0" bIns="0">
-            <a:spAutoFit/>
-          </a:bodyPr>
-          <a:lstStyle/>
-          <a:p>
-            <a:pPr algn="r"/>
-            <a:r>
-              <a:rPr sz="1200" b="0" i="0">
+          <p:cNvPr id="108" name="TextBox 107"/>
+          <p:cNvSpPr txBox="1"/>
+          <p:nvPr/>
+        </p:nvSpPr>
+        <p:spPr>
+          <a:xfrm>
+            <a:off x="7059168" y="2472537"/>
+            <a:ext cx="950976" cy="210312"/>
+          </a:xfrm>
+          <a:prstGeom prst="rect">
+            <a:avLst/>
+          </a:prstGeom>
+          <a:noFill/>
+        </p:spPr>
+        <p:txBody>
+          <a:bodyPr wrap="square" lIns="0" rIns="0" tIns="0" bIns="0">
+            <a:spAutoFit/>
+          </a:bodyPr>
+          <a:lstStyle/>
+          <a:p>
+            <a:pPr algn="r"/>
+            <a:r>
+              <a:rPr sz="1150" b="0" i="0">
                 <a:solidFill>
                   <a:srgbClr val="212529"/>
                 </a:solidFill>
@@ -6035,29 +6840,29 @@
       </p:sp>
       <p:sp>
         <p:nvSpPr>
-          <p:cNvPr id="86" name="TextBox 85"/>
-          <p:cNvSpPr txBox="1"/>
-          <p:nvPr/>
-        </p:nvSpPr>
-        <p:spPr>
-          <a:xfrm>
-            <a:off x="8467344" y="2346350"/>
-            <a:ext cx="914400" cy="219456"/>
-          </a:xfrm>
-          <a:prstGeom prst="rect">
-            <a:avLst/>
-          </a:prstGeom>
-          <a:noFill/>
-        </p:spPr>
-        <p:txBody>
-          <a:bodyPr wrap="square" lIns="0" rIns="0" tIns="0" bIns="0">
-            <a:spAutoFit/>
-          </a:bodyPr>
-          <a:lstStyle/>
-          <a:p>
-            <a:pPr algn="r"/>
-            <a:r>
-              <a:rPr sz="1200" b="0" i="0">
+          <p:cNvPr id="109" name="TextBox 108"/>
+          <p:cNvSpPr txBox="1"/>
+          <p:nvPr/>
+        </p:nvSpPr>
+        <p:spPr>
+          <a:xfrm>
+            <a:off x="8010144" y="2472537"/>
+            <a:ext cx="749808" cy="210312"/>
+          </a:xfrm>
+          <a:prstGeom prst="rect">
+            <a:avLst/>
+          </a:prstGeom>
+          <a:noFill/>
+        </p:spPr>
+        <p:txBody>
+          <a:bodyPr wrap="square" lIns="0" rIns="0" tIns="0" bIns="0">
+            <a:spAutoFit/>
+          </a:bodyPr>
+          <a:lstStyle/>
+          <a:p>
+            <a:pPr algn="r"/>
+            <a:r>
+              <a:rPr sz="1150" b="0" i="0">
                 <a:solidFill>
                   <a:srgbClr val="212529"/>
                 </a:solidFill>
@@ -6070,29 +6875,29 @@
       </p:sp>
       <p:sp>
         <p:nvSpPr>
-          <p:cNvPr id="87" name="TextBox 86"/>
-          <p:cNvSpPr txBox="1"/>
-          <p:nvPr/>
-        </p:nvSpPr>
-        <p:spPr>
-          <a:xfrm>
-            <a:off x="9381744" y="2346350"/>
-            <a:ext cx="1316736" cy="219456"/>
-          </a:xfrm>
-          <a:prstGeom prst="rect">
-            <a:avLst/>
-          </a:prstGeom>
-          <a:noFill/>
-        </p:spPr>
-        <p:txBody>
-          <a:bodyPr wrap="square" lIns="0" rIns="0" tIns="0" bIns="0">
-            <a:spAutoFit/>
-          </a:bodyPr>
-          <a:lstStyle/>
-          <a:p>
-            <a:pPr algn="r"/>
-            <a:r>
-              <a:rPr sz="1200" b="0" i="0">
+          <p:cNvPr id="110" name="TextBox 109"/>
+          <p:cNvSpPr txBox="1"/>
+          <p:nvPr/>
+        </p:nvSpPr>
+        <p:spPr>
+          <a:xfrm>
+            <a:off x="8759952" y="2472537"/>
+            <a:ext cx="1005840" cy="210312"/>
+          </a:xfrm>
+          <a:prstGeom prst="rect">
+            <a:avLst/>
+          </a:prstGeom>
+          <a:noFill/>
+        </p:spPr>
+        <p:txBody>
+          <a:bodyPr wrap="square" lIns="0" rIns="0" tIns="0" bIns="0">
+            <a:spAutoFit/>
+          </a:bodyPr>
+          <a:lstStyle/>
+          <a:p>
+            <a:pPr algn="r"/>
+            <a:r>
+              <a:rPr sz="1150" b="0" i="0">
                 <a:solidFill>
                   <a:srgbClr val="212529"/>
                 </a:solidFill>
@@ -6105,14 +6910,49 @@
       </p:sp>
       <p:sp>
         <p:nvSpPr>
-          <p:cNvPr id="88" name="TextBox 87"/>
-          <p:cNvSpPr txBox="1"/>
-          <p:nvPr/>
-        </p:nvSpPr>
-        <p:spPr>
-          <a:xfrm>
-            <a:off x="6583680" y="2595067"/>
-            <a:ext cx="713232" cy="219456"/>
+          <p:cNvPr id="111" name="TextBox 110"/>
+          <p:cNvSpPr txBox="1"/>
+          <p:nvPr/>
+        </p:nvSpPr>
+        <p:spPr>
+          <a:xfrm>
+            <a:off x="9765792" y="2472537"/>
+            <a:ext cx="768096" cy="210312"/>
+          </a:xfrm>
+          <a:prstGeom prst="rect">
+            <a:avLst/>
+          </a:prstGeom>
+          <a:noFill/>
+        </p:spPr>
+        <p:txBody>
+          <a:bodyPr wrap="square" lIns="0" rIns="0" tIns="0" bIns="0">
+            <a:spAutoFit/>
+          </a:bodyPr>
+          <a:lstStyle/>
+          <a:p>
+            <a:pPr algn="r"/>
+            <a:r>
+              <a:rPr sz="1150" b="0" i="0">
+                <a:solidFill>
+                  <a:srgbClr val="212529"/>
+                </a:solidFill>
+                <a:latin typeface="Garamond"/>
+              </a:rPr>
+              <a:t>11,396</a:t>
+            </a:r>
+          </a:p>
+        </p:txBody>
+      </p:sp>
+      <p:sp>
+        <p:nvSpPr>
+          <p:cNvPr id="112" name="TextBox 111"/>
+          <p:cNvSpPr txBox="1"/>
+          <p:nvPr/>
+        </p:nvSpPr>
+        <p:spPr>
+          <a:xfrm>
+            <a:off x="6583680" y="2717596"/>
+            <a:ext cx="475488" cy="210312"/>
           </a:xfrm>
           <a:prstGeom prst="rect">
             <a:avLst/>
@@ -6127,7 +6967,7 @@
           <a:p>
             <a:pPr algn="l"/>
             <a:r>
-              <a:rPr sz="1200" b="0" i="0">
+              <a:rPr sz="1150" b="0" i="0">
                 <a:solidFill>
                   <a:srgbClr val="212529"/>
                 </a:solidFill>
@@ -6140,29 +6980,29 @@
       </p:sp>
       <p:sp>
         <p:nvSpPr>
-          <p:cNvPr id="89" name="TextBox 88"/>
-          <p:cNvSpPr txBox="1"/>
-          <p:nvPr/>
-        </p:nvSpPr>
-        <p:spPr>
-          <a:xfrm>
-            <a:off x="7296912" y="2595067"/>
-            <a:ext cx="1170432" cy="219456"/>
-          </a:xfrm>
-          <a:prstGeom prst="rect">
-            <a:avLst/>
-          </a:prstGeom>
-          <a:noFill/>
-        </p:spPr>
-        <p:txBody>
-          <a:bodyPr wrap="square" lIns="0" rIns="0" tIns="0" bIns="0">
-            <a:spAutoFit/>
-          </a:bodyPr>
-          <a:lstStyle/>
-          <a:p>
-            <a:pPr algn="r"/>
-            <a:r>
-              <a:rPr sz="1200" b="0" i="0">
+          <p:cNvPr id="113" name="TextBox 112"/>
+          <p:cNvSpPr txBox="1"/>
+          <p:nvPr/>
+        </p:nvSpPr>
+        <p:spPr>
+          <a:xfrm>
+            <a:off x="7059168" y="2717596"/>
+            <a:ext cx="950976" cy="210312"/>
+          </a:xfrm>
+          <a:prstGeom prst="rect">
+            <a:avLst/>
+          </a:prstGeom>
+          <a:noFill/>
+        </p:spPr>
+        <p:txBody>
+          <a:bodyPr wrap="square" lIns="0" rIns="0" tIns="0" bIns="0">
+            <a:spAutoFit/>
+          </a:bodyPr>
+          <a:lstStyle/>
+          <a:p>
+            <a:pPr algn="r"/>
+            <a:r>
+              <a:rPr sz="1150" b="0" i="0">
                 <a:solidFill>
                   <a:srgbClr val="212529"/>
                 </a:solidFill>
@@ -6175,29 +7015,29 @@
       </p:sp>
       <p:sp>
         <p:nvSpPr>
-          <p:cNvPr id="90" name="TextBox 89"/>
-          <p:cNvSpPr txBox="1"/>
-          <p:nvPr/>
-        </p:nvSpPr>
-        <p:spPr>
-          <a:xfrm>
-            <a:off x="8467344" y="2595067"/>
-            <a:ext cx="914400" cy="219456"/>
-          </a:xfrm>
-          <a:prstGeom prst="rect">
-            <a:avLst/>
-          </a:prstGeom>
-          <a:noFill/>
-        </p:spPr>
-        <p:txBody>
-          <a:bodyPr wrap="square" lIns="0" rIns="0" tIns="0" bIns="0">
-            <a:spAutoFit/>
-          </a:bodyPr>
-          <a:lstStyle/>
-          <a:p>
-            <a:pPr algn="r"/>
-            <a:r>
-              <a:rPr sz="1200" b="0" i="0">
+          <p:cNvPr id="114" name="TextBox 113"/>
+          <p:cNvSpPr txBox="1"/>
+          <p:nvPr/>
+        </p:nvSpPr>
+        <p:spPr>
+          <a:xfrm>
+            <a:off x="8010144" y="2717596"/>
+            <a:ext cx="749808" cy="210312"/>
+          </a:xfrm>
+          <a:prstGeom prst="rect">
+            <a:avLst/>
+          </a:prstGeom>
+          <a:noFill/>
+        </p:spPr>
+        <p:txBody>
+          <a:bodyPr wrap="square" lIns="0" rIns="0" tIns="0" bIns="0">
+            <a:spAutoFit/>
+          </a:bodyPr>
+          <a:lstStyle/>
+          <a:p>
+            <a:pPr algn="r"/>
+            <a:r>
+              <a:rPr sz="1150" b="0" i="0">
                 <a:solidFill>
                   <a:srgbClr val="212529"/>
                 </a:solidFill>
@@ -6210,29 +7050,29 @@
       </p:sp>
       <p:sp>
         <p:nvSpPr>
-          <p:cNvPr id="91" name="TextBox 90"/>
-          <p:cNvSpPr txBox="1"/>
-          <p:nvPr/>
-        </p:nvSpPr>
-        <p:spPr>
-          <a:xfrm>
-            <a:off x="9381744" y="2595067"/>
-            <a:ext cx="1316736" cy="219456"/>
-          </a:xfrm>
-          <a:prstGeom prst="rect">
-            <a:avLst/>
-          </a:prstGeom>
-          <a:noFill/>
-        </p:spPr>
-        <p:txBody>
-          <a:bodyPr wrap="square" lIns="0" rIns="0" tIns="0" bIns="0">
-            <a:spAutoFit/>
-          </a:bodyPr>
-          <a:lstStyle/>
-          <a:p>
-            <a:pPr algn="r"/>
-            <a:r>
-              <a:rPr sz="1200" b="0" i="0">
+          <p:cNvPr id="115" name="TextBox 114"/>
+          <p:cNvSpPr txBox="1"/>
+          <p:nvPr/>
+        </p:nvSpPr>
+        <p:spPr>
+          <a:xfrm>
+            <a:off x="8759952" y="2717596"/>
+            <a:ext cx="1005840" cy="210312"/>
+          </a:xfrm>
+          <a:prstGeom prst="rect">
+            <a:avLst/>
+          </a:prstGeom>
+          <a:noFill/>
+        </p:spPr>
+        <p:txBody>
+          <a:bodyPr wrap="square" lIns="0" rIns="0" tIns="0" bIns="0">
+            <a:spAutoFit/>
+          </a:bodyPr>
+          <a:lstStyle/>
+          <a:p>
+            <a:pPr algn="r"/>
+            <a:r>
+              <a:rPr sz="1150" b="0" i="0">
                 <a:solidFill>
                   <a:srgbClr val="212529"/>
                 </a:solidFill>
@@ -6245,14 +7085,49 @@
       </p:sp>
       <p:sp>
         <p:nvSpPr>
-          <p:cNvPr id="92" name="TextBox 91"/>
-          <p:cNvSpPr txBox="1"/>
-          <p:nvPr/>
-        </p:nvSpPr>
-        <p:spPr>
-          <a:xfrm>
-            <a:off x="6583680" y="2843784"/>
-            <a:ext cx="713232" cy="219456"/>
+          <p:cNvPr id="116" name="TextBox 115"/>
+          <p:cNvSpPr txBox="1"/>
+          <p:nvPr/>
+        </p:nvSpPr>
+        <p:spPr>
+          <a:xfrm>
+            <a:off x="9765792" y="2717596"/>
+            <a:ext cx="768096" cy="210312"/>
+          </a:xfrm>
+          <a:prstGeom prst="rect">
+            <a:avLst/>
+          </a:prstGeom>
+          <a:noFill/>
+        </p:spPr>
+        <p:txBody>
+          <a:bodyPr wrap="square" lIns="0" rIns="0" tIns="0" bIns="0">
+            <a:spAutoFit/>
+          </a:bodyPr>
+          <a:lstStyle/>
+          <a:p>
+            <a:pPr algn="r"/>
+            <a:r>
+              <a:rPr sz="1150" b="0" i="0">
+                <a:solidFill>
+                  <a:srgbClr val="212529"/>
+                </a:solidFill>
+                <a:latin typeface="Garamond"/>
+              </a:rPr>
+              <a:t>11,085</a:t>
+            </a:r>
+          </a:p>
+        </p:txBody>
+      </p:sp>
+      <p:sp>
+        <p:nvSpPr>
+          <p:cNvPr id="117" name="TextBox 116"/>
+          <p:cNvSpPr txBox="1"/>
+          <p:nvPr/>
+        </p:nvSpPr>
+        <p:spPr>
+          <a:xfrm>
+            <a:off x="6583680" y="2962655"/>
+            <a:ext cx="475488" cy="210312"/>
           </a:xfrm>
           <a:prstGeom prst="rect">
             <a:avLst/>
@@ -6267,7 +7142,7 @@
           <a:p>
             <a:pPr algn="l"/>
             <a:r>
-              <a:rPr sz="1200" b="0" i="0">
+              <a:rPr sz="1150" b="0" i="0">
                 <a:solidFill>
                   <a:srgbClr val="212529"/>
                 </a:solidFill>
@@ -6280,29 +7155,29 @@
       </p:sp>
       <p:sp>
         <p:nvSpPr>
-          <p:cNvPr id="93" name="TextBox 92"/>
-          <p:cNvSpPr txBox="1"/>
-          <p:nvPr/>
-        </p:nvSpPr>
-        <p:spPr>
-          <a:xfrm>
-            <a:off x="7296912" y="2843784"/>
-            <a:ext cx="1170432" cy="219456"/>
-          </a:xfrm>
-          <a:prstGeom prst="rect">
-            <a:avLst/>
-          </a:prstGeom>
-          <a:noFill/>
-        </p:spPr>
-        <p:txBody>
-          <a:bodyPr wrap="square" lIns="0" rIns="0" tIns="0" bIns="0">
-            <a:spAutoFit/>
-          </a:bodyPr>
-          <a:lstStyle/>
-          <a:p>
-            <a:pPr algn="r"/>
-            <a:r>
-              <a:rPr sz="1200" b="0" i="0">
+          <p:cNvPr id="118" name="TextBox 117"/>
+          <p:cNvSpPr txBox="1"/>
+          <p:nvPr/>
+        </p:nvSpPr>
+        <p:spPr>
+          <a:xfrm>
+            <a:off x="7059168" y="2962655"/>
+            <a:ext cx="950976" cy="210312"/>
+          </a:xfrm>
+          <a:prstGeom prst="rect">
+            <a:avLst/>
+          </a:prstGeom>
+          <a:noFill/>
+        </p:spPr>
+        <p:txBody>
+          <a:bodyPr wrap="square" lIns="0" rIns="0" tIns="0" bIns="0">
+            <a:spAutoFit/>
+          </a:bodyPr>
+          <a:lstStyle/>
+          <a:p>
+            <a:pPr algn="r"/>
+            <a:r>
+              <a:rPr sz="1150" b="0" i="0">
                 <a:solidFill>
                   <a:srgbClr val="212529"/>
                 </a:solidFill>
@@ -6315,29 +7190,29 @@
       </p:sp>
       <p:sp>
         <p:nvSpPr>
-          <p:cNvPr id="94" name="TextBox 93"/>
-          <p:cNvSpPr txBox="1"/>
-          <p:nvPr/>
-        </p:nvSpPr>
-        <p:spPr>
-          <a:xfrm>
-            <a:off x="8467344" y="2843784"/>
-            <a:ext cx="914400" cy="219456"/>
-          </a:xfrm>
-          <a:prstGeom prst="rect">
-            <a:avLst/>
-          </a:prstGeom>
-          <a:noFill/>
-        </p:spPr>
-        <p:txBody>
-          <a:bodyPr wrap="square" lIns="0" rIns="0" tIns="0" bIns="0">
-            <a:spAutoFit/>
-          </a:bodyPr>
-          <a:lstStyle/>
-          <a:p>
-            <a:pPr algn="r"/>
-            <a:r>
-              <a:rPr sz="1200" b="0" i="0">
+          <p:cNvPr id="119" name="TextBox 118"/>
+          <p:cNvSpPr txBox="1"/>
+          <p:nvPr/>
+        </p:nvSpPr>
+        <p:spPr>
+          <a:xfrm>
+            <a:off x="8010144" y="2962655"/>
+            <a:ext cx="749808" cy="210312"/>
+          </a:xfrm>
+          <a:prstGeom prst="rect">
+            <a:avLst/>
+          </a:prstGeom>
+          <a:noFill/>
+        </p:spPr>
+        <p:txBody>
+          <a:bodyPr wrap="square" lIns="0" rIns="0" tIns="0" bIns="0">
+            <a:spAutoFit/>
+          </a:bodyPr>
+          <a:lstStyle/>
+          <a:p>
+            <a:pPr algn="r"/>
+            <a:r>
+              <a:rPr sz="1150" b="0" i="0">
                 <a:solidFill>
                   <a:srgbClr val="212529"/>
                 </a:solidFill>
@@ -6350,29 +7225,29 @@
       </p:sp>
       <p:sp>
         <p:nvSpPr>
-          <p:cNvPr id="95" name="TextBox 94"/>
-          <p:cNvSpPr txBox="1"/>
-          <p:nvPr/>
-        </p:nvSpPr>
-        <p:spPr>
-          <a:xfrm>
-            <a:off x="9381744" y="2843784"/>
-            <a:ext cx="1316736" cy="219456"/>
-          </a:xfrm>
-          <a:prstGeom prst="rect">
-            <a:avLst/>
-          </a:prstGeom>
-          <a:noFill/>
-        </p:spPr>
-        <p:txBody>
-          <a:bodyPr wrap="square" lIns="0" rIns="0" tIns="0" bIns="0">
-            <a:spAutoFit/>
-          </a:bodyPr>
-          <a:lstStyle/>
-          <a:p>
-            <a:pPr algn="r"/>
-            <a:r>
-              <a:rPr sz="1200" b="0" i="0">
+          <p:cNvPr id="120" name="TextBox 119"/>
+          <p:cNvSpPr txBox="1"/>
+          <p:nvPr/>
+        </p:nvSpPr>
+        <p:spPr>
+          <a:xfrm>
+            <a:off x="8759952" y="2962655"/>
+            <a:ext cx="1005840" cy="210312"/>
+          </a:xfrm>
+          <a:prstGeom prst="rect">
+            <a:avLst/>
+          </a:prstGeom>
+          <a:noFill/>
+        </p:spPr>
+        <p:txBody>
+          <a:bodyPr wrap="square" lIns="0" rIns="0" tIns="0" bIns="0">
+            <a:spAutoFit/>
+          </a:bodyPr>
+          <a:lstStyle/>
+          <a:p>
+            <a:pPr algn="r"/>
+            <a:r>
+              <a:rPr sz="1150" b="0" i="0">
                 <a:solidFill>
                   <a:srgbClr val="212529"/>
                 </a:solidFill>
@@ -6385,14 +7260,49 @@
       </p:sp>
       <p:sp>
         <p:nvSpPr>
-          <p:cNvPr id="96" name="TextBox 95"/>
-          <p:cNvSpPr txBox="1"/>
-          <p:nvPr/>
-        </p:nvSpPr>
-        <p:spPr>
-          <a:xfrm>
-            <a:off x="6583680" y="3092500"/>
-            <a:ext cx="713232" cy="219456"/>
+          <p:cNvPr id="121" name="TextBox 120"/>
+          <p:cNvSpPr txBox="1"/>
+          <p:nvPr/>
+        </p:nvSpPr>
+        <p:spPr>
+          <a:xfrm>
+            <a:off x="9765792" y="2962655"/>
+            <a:ext cx="768096" cy="210312"/>
+          </a:xfrm>
+          <a:prstGeom prst="rect">
+            <a:avLst/>
+          </a:prstGeom>
+          <a:noFill/>
+        </p:spPr>
+        <p:txBody>
+          <a:bodyPr wrap="square" lIns="0" rIns="0" tIns="0" bIns="0">
+            <a:spAutoFit/>
+          </a:bodyPr>
+          <a:lstStyle/>
+          <a:p>
+            <a:pPr algn="r"/>
+            <a:r>
+              <a:rPr sz="1150" b="0" i="0">
+                <a:solidFill>
+                  <a:srgbClr val="212529"/>
+                </a:solidFill>
+                <a:latin typeface="Garamond"/>
+              </a:rPr>
+              <a:t>11,204</a:t>
+            </a:r>
+          </a:p>
+        </p:txBody>
+      </p:sp>
+      <p:sp>
+        <p:nvSpPr>
+          <p:cNvPr id="122" name="TextBox 121"/>
+          <p:cNvSpPr txBox="1"/>
+          <p:nvPr/>
+        </p:nvSpPr>
+        <p:spPr>
+          <a:xfrm>
+            <a:off x="6583680" y="3207715"/>
+            <a:ext cx="475488" cy="210312"/>
           </a:xfrm>
           <a:prstGeom prst="rect">
             <a:avLst/>
@@ -6407,7 +7317,7 @@
           <a:p>
             <a:pPr algn="l"/>
             <a:r>
-              <a:rPr sz="1200" b="0" i="0">
+              <a:rPr sz="1150" b="0" i="0">
                 <a:solidFill>
                   <a:srgbClr val="212529"/>
                 </a:solidFill>
@@ -6420,29 +7330,29 @@
       </p:sp>
       <p:sp>
         <p:nvSpPr>
-          <p:cNvPr id="97" name="TextBox 96"/>
-          <p:cNvSpPr txBox="1"/>
-          <p:nvPr/>
-        </p:nvSpPr>
-        <p:spPr>
-          <a:xfrm>
-            <a:off x="7296912" y="3092500"/>
-            <a:ext cx="1170432" cy="219456"/>
-          </a:xfrm>
-          <a:prstGeom prst="rect">
-            <a:avLst/>
-          </a:prstGeom>
-          <a:noFill/>
-        </p:spPr>
-        <p:txBody>
-          <a:bodyPr wrap="square" lIns="0" rIns="0" tIns="0" bIns="0">
-            <a:spAutoFit/>
-          </a:bodyPr>
-          <a:lstStyle/>
-          <a:p>
-            <a:pPr algn="r"/>
-            <a:r>
-              <a:rPr sz="1200" b="0" i="0">
+          <p:cNvPr id="123" name="TextBox 122"/>
+          <p:cNvSpPr txBox="1"/>
+          <p:nvPr/>
+        </p:nvSpPr>
+        <p:spPr>
+          <a:xfrm>
+            <a:off x="7059168" y="3207715"/>
+            <a:ext cx="950976" cy="210312"/>
+          </a:xfrm>
+          <a:prstGeom prst="rect">
+            <a:avLst/>
+          </a:prstGeom>
+          <a:noFill/>
+        </p:spPr>
+        <p:txBody>
+          <a:bodyPr wrap="square" lIns="0" rIns="0" tIns="0" bIns="0">
+            <a:spAutoFit/>
+          </a:bodyPr>
+          <a:lstStyle/>
+          <a:p>
+            <a:pPr algn="r"/>
+            <a:r>
+              <a:rPr sz="1150" b="0" i="0">
                 <a:solidFill>
                   <a:srgbClr val="212529"/>
                 </a:solidFill>
@@ -6455,29 +7365,29 @@
       </p:sp>
       <p:sp>
         <p:nvSpPr>
-          <p:cNvPr id="98" name="TextBox 97"/>
-          <p:cNvSpPr txBox="1"/>
-          <p:nvPr/>
-        </p:nvSpPr>
-        <p:spPr>
-          <a:xfrm>
-            <a:off x="8467344" y="3092500"/>
-            <a:ext cx="914400" cy="219456"/>
-          </a:xfrm>
-          <a:prstGeom prst="rect">
-            <a:avLst/>
-          </a:prstGeom>
-          <a:noFill/>
-        </p:spPr>
-        <p:txBody>
-          <a:bodyPr wrap="square" lIns="0" rIns="0" tIns="0" bIns="0">
-            <a:spAutoFit/>
-          </a:bodyPr>
-          <a:lstStyle/>
-          <a:p>
-            <a:pPr algn="r"/>
-            <a:r>
-              <a:rPr sz="1200" b="0" i="0">
+          <p:cNvPr id="124" name="TextBox 123"/>
+          <p:cNvSpPr txBox="1"/>
+          <p:nvPr/>
+        </p:nvSpPr>
+        <p:spPr>
+          <a:xfrm>
+            <a:off x="8010144" y="3207715"/>
+            <a:ext cx="749808" cy="210312"/>
+          </a:xfrm>
+          <a:prstGeom prst="rect">
+            <a:avLst/>
+          </a:prstGeom>
+          <a:noFill/>
+        </p:spPr>
+        <p:txBody>
+          <a:bodyPr wrap="square" lIns="0" rIns="0" tIns="0" bIns="0">
+            <a:spAutoFit/>
+          </a:bodyPr>
+          <a:lstStyle/>
+          <a:p>
+            <a:pPr algn="r"/>
+            <a:r>
+              <a:rPr sz="1150" b="0" i="0">
                 <a:solidFill>
                   <a:srgbClr val="212529"/>
                 </a:solidFill>
@@ -6490,29 +7400,29 @@
       </p:sp>
       <p:sp>
         <p:nvSpPr>
-          <p:cNvPr id="99" name="TextBox 98"/>
-          <p:cNvSpPr txBox="1"/>
-          <p:nvPr/>
-        </p:nvSpPr>
-        <p:spPr>
-          <a:xfrm>
-            <a:off x="9381744" y="3092500"/>
-            <a:ext cx="1316736" cy="219456"/>
-          </a:xfrm>
-          <a:prstGeom prst="rect">
-            <a:avLst/>
-          </a:prstGeom>
-          <a:noFill/>
-        </p:spPr>
-        <p:txBody>
-          <a:bodyPr wrap="square" lIns="0" rIns="0" tIns="0" bIns="0">
-            <a:spAutoFit/>
-          </a:bodyPr>
-          <a:lstStyle/>
-          <a:p>
-            <a:pPr algn="r"/>
-            <a:r>
-              <a:rPr sz="1200" b="0" i="0">
+          <p:cNvPr id="125" name="TextBox 124"/>
+          <p:cNvSpPr txBox="1"/>
+          <p:nvPr/>
+        </p:nvSpPr>
+        <p:spPr>
+          <a:xfrm>
+            <a:off x="8759952" y="3207715"/>
+            <a:ext cx="1005840" cy="210312"/>
+          </a:xfrm>
+          <a:prstGeom prst="rect">
+            <a:avLst/>
+          </a:prstGeom>
+          <a:noFill/>
+        </p:spPr>
+        <p:txBody>
+          <a:bodyPr wrap="square" lIns="0" rIns="0" tIns="0" bIns="0">
+            <a:spAutoFit/>
+          </a:bodyPr>
+          <a:lstStyle/>
+          <a:p>
+            <a:pPr algn="r"/>
+            <a:r>
+              <a:rPr sz="1150" b="0" i="0">
                 <a:solidFill>
                   <a:srgbClr val="212529"/>
                 </a:solidFill>
@@ -6525,14 +7435,49 @@
       </p:sp>
       <p:sp>
         <p:nvSpPr>
-          <p:cNvPr id="100" name="TextBox 99"/>
-          <p:cNvSpPr txBox="1"/>
-          <p:nvPr/>
-        </p:nvSpPr>
-        <p:spPr>
-          <a:xfrm>
-            <a:off x="6583680" y="3341217"/>
-            <a:ext cx="713232" cy="219456"/>
+          <p:cNvPr id="126" name="TextBox 125"/>
+          <p:cNvSpPr txBox="1"/>
+          <p:nvPr/>
+        </p:nvSpPr>
+        <p:spPr>
+          <a:xfrm>
+            <a:off x="9765792" y="3207715"/>
+            <a:ext cx="768096" cy="210312"/>
+          </a:xfrm>
+          <a:prstGeom prst="rect">
+            <a:avLst/>
+          </a:prstGeom>
+          <a:noFill/>
+        </p:spPr>
+        <p:txBody>
+          <a:bodyPr wrap="square" lIns="0" rIns="0" tIns="0" bIns="0">
+            <a:spAutoFit/>
+          </a:bodyPr>
+          <a:lstStyle/>
+          <a:p>
+            <a:pPr algn="r"/>
+            <a:r>
+              <a:rPr sz="1150" b="0" i="0">
+                <a:solidFill>
+                  <a:srgbClr val="212529"/>
+                </a:solidFill>
+                <a:latin typeface="Garamond"/>
+              </a:rPr>
+              <a:t>10,923</a:t>
+            </a:r>
+          </a:p>
+        </p:txBody>
+      </p:sp>
+      <p:sp>
+        <p:nvSpPr>
+          <p:cNvPr id="127" name="TextBox 126"/>
+          <p:cNvSpPr txBox="1"/>
+          <p:nvPr/>
+        </p:nvSpPr>
+        <p:spPr>
+          <a:xfrm>
+            <a:off x="6583680" y="3452774"/>
+            <a:ext cx="475488" cy="210312"/>
           </a:xfrm>
           <a:prstGeom prst="rect">
             <a:avLst/>
@@ -6547,7 +7492,7 @@
           <a:p>
             <a:pPr algn="l"/>
             <a:r>
-              <a:rPr sz="1200" b="0" i="0">
+              <a:rPr sz="1150" b="0" i="0">
                 <a:solidFill>
                   <a:srgbClr val="212529"/>
                 </a:solidFill>
@@ -6560,29 +7505,29 @@
       </p:sp>
       <p:sp>
         <p:nvSpPr>
-          <p:cNvPr id="101" name="TextBox 100"/>
-          <p:cNvSpPr txBox="1"/>
-          <p:nvPr/>
-        </p:nvSpPr>
-        <p:spPr>
-          <a:xfrm>
-            <a:off x="7296912" y="3341217"/>
-            <a:ext cx="1170432" cy="219456"/>
-          </a:xfrm>
-          <a:prstGeom prst="rect">
-            <a:avLst/>
-          </a:prstGeom>
-          <a:noFill/>
-        </p:spPr>
-        <p:txBody>
-          <a:bodyPr wrap="square" lIns="0" rIns="0" tIns="0" bIns="0">
-            <a:spAutoFit/>
-          </a:bodyPr>
-          <a:lstStyle/>
-          <a:p>
-            <a:pPr algn="r"/>
-            <a:r>
-              <a:rPr sz="1200" b="0" i="0">
+          <p:cNvPr id="128" name="TextBox 127"/>
+          <p:cNvSpPr txBox="1"/>
+          <p:nvPr/>
+        </p:nvSpPr>
+        <p:spPr>
+          <a:xfrm>
+            <a:off x="7059168" y="3452774"/>
+            <a:ext cx="950976" cy="210312"/>
+          </a:xfrm>
+          <a:prstGeom prst="rect">
+            <a:avLst/>
+          </a:prstGeom>
+          <a:noFill/>
+        </p:spPr>
+        <p:txBody>
+          <a:bodyPr wrap="square" lIns="0" rIns="0" tIns="0" bIns="0">
+            <a:spAutoFit/>
+          </a:bodyPr>
+          <a:lstStyle/>
+          <a:p>
+            <a:pPr algn="r"/>
+            <a:r>
+              <a:rPr sz="1150" b="0" i="0">
                 <a:solidFill>
                   <a:srgbClr val="212529"/>
                 </a:solidFill>
@@ -6595,29 +7540,29 @@
       </p:sp>
       <p:sp>
         <p:nvSpPr>
-          <p:cNvPr id="102" name="TextBox 101"/>
-          <p:cNvSpPr txBox="1"/>
-          <p:nvPr/>
-        </p:nvSpPr>
-        <p:spPr>
-          <a:xfrm>
-            <a:off x="8467344" y="3341217"/>
-            <a:ext cx="914400" cy="219456"/>
-          </a:xfrm>
-          <a:prstGeom prst="rect">
-            <a:avLst/>
-          </a:prstGeom>
-          <a:noFill/>
-        </p:spPr>
-        <p:txBody>
-          <a:bodyPr wrap="square" lIns="0" rIns="0" tIns="0" bIns="0">
-            <a:spAutoFit/>
-          </a:bodyPr>
-          <a:lstStyle/>
-          <a:p>
-            <a:pPr algn="r"/>
-            <a:r>
-              <a:rPr sz="1200" b="0" i="0">
+          <p:cNvPr id="129" name="TextBox 128"/>
+          <p:cNvSpPr txBox="1"/>
+          <p:nvPr/>
+        </p:nvSpPr>
+        <p:spPr>
+          <a:xfrm>
+            <a:off x="8010144" y="3452774"/>
+            <a:ext cx="749808" cy="210312"/>
+          </a:xfrm>
+          <a:prstGeom prst="rect">
+            <a:avLst/>
+          </a:prstGeom>
+          <a:noFill/>
+        </p:spPr>
+        <p:txBody>
+          <a:bodyPr wrap="square" lIns="0" rIns="0" tIns="0" bIns="0">
+            <a:spAutoFit/>
+          </a:bodyPr>
+          <a:lstStyle/>
+          <a:p>
+            <a:pPr algn="r"/>
+            <a:r>
+              <a:rPr sz="1150" b="0" i="0">
                 <a:solidFill>
                   <a:srgbClr val="212529"/>
                 </a:solidFill>
@@ -6630,29 +7575,29 @@
       </p:sp>
       <p:sp>
         <p:nvSpPr>
-          <p:cNvPr id="103" name="TextBox 102"/>
-          <p:cNvSpPr txBox="1"/>
-          <p:nvPr/>
-        </p:nvSpPr>
-        <p:spPr>
-          <a:xfrm>
-            <a:off x="9381744" y="3341217"/>
-            <a:ext cx="1316736" cy="219456"/>
-          </a:xfrm>
-          <a:prstGeom prst="rect">
-            <a:avLst/>
-          </a:prstGeom>
-          <a:noFill/>
-        </p:spPr>
-        <p:txBody>
-          <a:bodyPr wrap="square" lIns="0" rIns="0" tIns="0" bIns="0">
-            <a:spAutoFit/>
-          </a:bodyPr>
-          <a:lstStyle/>
-          <a:p>
-            <a:pPr algn="r"/>
-            <a:r>
-              <a:rPr sz="1200" b="0" i="0">
+          <p:cNvPr id="130" name="TextBox 129"/>
+          <p:cNvSpPr txBox="1"/>
+          <p:nvPr/>
+        </p:nvSpPr>
+        <p:spPr>
+          <a:xfrm>
+            <a:off x="8759952" y="3452774"/>
+            <a:ext cx="1005840" cy="210312"/>
+          </a:xfrm>
+          <a:prstGeom prst="rect">
+            <a:avLst/>
+          </a:prstGeom>
+          <a:noFill/>
+        </p:spPr>
+        <p:txBody>
+          <a:bodyPr wrap="square" lIns="0" rIns="0" tIns="0" bIns="0">
+            <a:spAutoFit/>
+          </a:bodyPr>
+          <a:lstStyle/>
+          <a:p>
+            <a:pPr algn="r"/>
+            <a:r>
+              <a:rPr sz="1150" b="0" i="0">
                 <a:solidFill>
                   <a:srgbClr val="212529"/>
                 </a:solidFill>
@@ -6665,14 +7610,49 @@
       </p:sp>
       <p:sp>
         <p:nvSpPr>
-          <p:cNvPr id="104" name="TextBox 103"/>
-          <p:cNvSpPr txBox="1"/>
-          <p:nvPr/>
-        </p:nvSpPr>
-        <p:spPr>
-          <a:xfrm>
-            <a:off x="6583680" y="3589934"/>
-            <a:ext cx="713232" cy="219456"/>
+          <p:cNvPr id="131" name="TextBox 130"/>
+          <p:cNvSpPr txBox="1"/>
+          <p:nvPr/>
+        </p:nvSpPr>
+        <p:spPr>
+          <a:xfrm>
+            <a:off x="9765792" y="3452774"/>
+            <a:ext cx="768096" cy="210312"/>
+          </a:xfrm>
+          <a:prstGeom prst="rect">
+            <a:avLst/>
+          </a:prstGeom>
+          <a:noFill/>
+        </p:spPr>
+        <p:txBody>
+          <a:bodyPr wrap="square" lIns="0" rIns="0" tIns="0" bIns="0">
+            <a:spAutoFit/>
+          </a:bodyPr>
+          <a:lstStyle/>
+          <a:p>
+            <a:pPr algn="r"/>
+            <a:r>
+              <a:rPr sz="1150" b="0" i="0">
+                <a:solidFill>
+                  <a:srgbClr val="212529"/>
+                </a:solidFill>
+                <a:latin typeface="Garamond"/>
+              </a:rPr>
+              <a:t>10,729</a:t>
+            </a:r>
+          </a:p>
+        </p:txBody>
+      </p:sp>
+      <p:sp>
+        <p:nvSpPr>
+          <p:cNvPr id="132" name="TextBox 131"/>
+          <p:cNvSpPr txBox="1"/>
+          <p:nvPr/>
+        </p:nvSpPr>
+        <p:spPr>
+          <a:xfrm>
+            <a:off x="6583680" y="3697833"/>
+            <a:ext cx="475488" cy="210312"/>
           </a:xfrm>
           <a:prstGeom prst="rect">
             <a:avLst/>
@@ -6687,7 +7667,7 @@
           <a:p>
             <a:pPr algn="l"/>
             <a:r>
-              <a:rPr sz="1200" b="0" i="0">
+              <a:rPr sz="1150" b="0" i="0">
                 <a:solidFill>
                   <a:srgbClr val="212529"/>
                 </a:solidFill>
@@ -6700,29 +7680,29 @@
       </p:sp>
       <p:sp>
         <p:nvSpPr>
-          <p:cNvPr id="105" name="TextBox 104"/>
-          <p:cNvSpPr txBox="1"/>
-          <p:nvPr/>
-        </p:nvSpPr>
-        <p:spPr>
-          <a:xfrm>
-            <a:off x="7296912" y="3589934"/>
-            <a:ext cx="1170432" cy="219456"/>
-          </a:xfrm>
-          <a:prstGeom prst="rect">
-            <a:avLst/>
-          </a:prstGeom>
-          <a:noFill/>
-        </p:spPr>
-        <p:txBody>
-          <a:bodyPr wrap="square" lIns="0" rIns="0" tIns="0" bIns="0">
-            <a:spAutoFit/>
-          </a:bodyPr>
-          <a:lstStyle/>
-          <a:p>
-            <a:pPr algn="r"/>
-            <a:r>
-              <a:rPr sz="1200" b="0" i="0">
+          <p:cNvPr id="133" name="TextBox 132"/>
+          <p:cNvSpPr txBox="1"/>
+          <p:nvPr/>
+        </p:nvSpPr>
+        <p:spPr>
+          <a:xfrm>
+            <a:off x="7059168" y="3697833"/>
+            <a:ext cx="950976" cy="210312"/>
+          </a:xfrm>
+          <a:prstGeom prst="rect">
+            <a:avLst/>
+          </a:prstGeom>
+          <a:noFill/>
+        </p:spPr>
+        <p:txBody>
+          <a:bodyPr wrap="square" lIns="0" rIns="0" tIns="0" bIns="0">
+            <a:spAutoFit/>
+          </a:bodyPr>
+          <a:lstStyle/>
+          <a:p>
+            <a:pPr algn="r"/>
+            <a:r>
+              <a:rPr sz="1150" b="0" i="0">
                 <a:solidFill>
                   <a:srgbClr val="212529"/>
                 </a:solidFill>
@@ -6735,29 +7715,29 @@
       </p:sp>
       <p:sp>
         <p:nvSpPr>
-          <p:cNvPr id="106" name="TextBox 105"/>
-          <p:cNvSpPr txBox="1"/>
-          <p:nvPr/>
-        </p:nvSpPr>
-        <p:spPr>
-          <a:xfrm>
-            <a:off x="8467344" y="3589934"/>
-            <a:ext cx="914400" cy="219456"/>
-          </a:xfrm>
-          <a:prstGeom prst="rect">
-            <a:avLst/>
-          </a:prstGeom>
-          <a:noFill/>
-        </p:spPr>
-        <p:txBody>
-          <a:bodyPr wrap="square" lIns="0" rIns="0" tIns="0" bIns="0">
-            <a:spAutoFit/>
-          </a:bodyPr>
-          <a:lstStyle/>
-          <a:p>
-            <a:pPr algn="r"/>
-            <a:r>
-              <a:rPr sz="1200" b="0" i="0">
+          <p:cNvPr id="134" name="TextBox 133"/>
+          <p:cNvSpPr txBox="1"/>
+          <p:nvPr/>
+        </p:nvSpPr>
+        <p:spPr>
+          <a:xfrm>
+            <a:off x="8010144" y="3697833"/>
+            <a:ext cx="749808" cy="210312"/>
+          </a:xfrm>
+          <a:prstGeom prst="rect">
+            <a:avLst/>
+          </a:prstGeom>
+          <a:noFill/>
+        </p:spPr>
+        <p:txBody>
+          <a:bodyPr wrap="square" lIns="0" rIns="0" tIns="0" bIns="0">
+            <a:spAutoFit/>
+          </a:bodyPr>
+          <a:lstStyle/>
+          <a:p>
+            <a:pPr algn="r"/>
+            <a:r>
+              <a:rPr sz="1150" b="0" i="0">
                 <a:solidFill>
                   <a:srgbClr val="212529"/>
                 </a:solidFill>
@@ -6770,29 +7750,29 @@
       </p:sp>
       <p:sp>
         <p:nvSpPr>
-          <p:cNvPr id="107" name="TextBox 106"/>
-          <p:cNvSpPr txBox="1"/>
-          <p:nvPr/>
-        </p:nvSpPr>
-        <p:spPr>
-          <a:xfrm>
-            <a:off x="9381744" y="3589934"/>
-            <a:ext cx="1316736" cy="219456"/>
-          </a:xfrm>
-          <a:prstGeom prst="rect">
-            <a:avLst/>
-          </a:prstGeom>
-          <a:noFill/>
-        </p:spPr>
-        <p:txBody>
-          <a:bodyPr wrap="square" lIns="0" rIns="0" tIns="0" bIns="0">
-            <a:spAutoFit/>
-          </a:bodyPr>
-          <a:lstStyle/>
-          <a:p>
-            <a:pPr algn="r"/>
-            <a:r>
-              <a:rPr sz="1200" b="0" i="0">
+          <p:cNvPr id="135" name="TextBox 134"/>
+          <p:cNvSpPr txBox="1"/>
+          <p:nvPr/>
+        </p:nvSpPr>
+        <p:spPr>
+          <a:xfrm>
+            <a:off x="8759952" y="3697833"/>
+            <a:ext cx="1005840" cy="210312"/>
+          </a:xfrm>
+          <a:prstGeom prst="rect">
+            <a:avLst/>
+          </a:prstGeom>
+          <a:noFill/>
+        </p:spPr>
+        <p:txBody>
+          <a:bodyPr wrap="square" lIns="0" rIns="0" tIns="0" bIns="0">
+            <a:spAutoFit/>
+          </a:bodyPr>
+          <a:lstStyle/>
+          <a:p>
+            <a:pPr algn="r"/>
+            <a:r>
+              <a:rPr sz="1150" b="0" i="0">
                 <a:solidFill>
                   <a:srgbClr val="212529"/>
                 </a:solidFill>
@@ -6805,14 +7785,49 @@
       </p:sp>
       <p:sp>
         <p:nvSpPr>
-          <p:cNvPr id="108" name="TextBox 107"/>
-          <p:cNvSpPr txBox="1"/>
-          <p:nvPr/>
-        </p:nvSpPr>
-        <p:spPr>
-          <a:xfrm>
-            <a:off x="6583680" y="3838651"/>
-            <a:ext cx="713232" cy="219456"/>
+          <p:cNvPr id="136" name="TextBox 135"/>
+          <p:cNvSpPr txBox="1"/>
+          <p:nvPr/>
+        </p:nvSpPr>
+        <p:spPr>
+          <a:xfrm>
+            <a:off x="9765792" y="3697833"/>
+            <a:ext cx="768096" cy="210312"/>
+          </a:xfrm>
+          <a:prstGeom prst="rect">
+            <a:avLst/>
+          </a:prstGeom>
+          <a:noFill/>
+        </p:spPr>
+        <p:txBody>
+          <a:bodyPr wrap="square" lIns="0" rIns="0" tIns="0" bIns="0">
+            <a:spAutoFit/>
+          </a:bodyPr>
+          <a:lstStyle/>
+          <a:p>
+            <a:pPr algn="r"/>
+            <a:r>
+              <a:rPr sz="1150" b="0" i="0">
+                <a:solidFill>
+                  <a:srgbClr val="212529"/>
+                </a:solidFill>
+                <a:latin typeface="Garamond"/>
+              </a:rPr>
+              <a:t>9,044</a:t>
+            </a:r>
+          </a:p>
+        </p:txBody>
+      </p:sp>
+      <p:sp>
+        <p:nvSpPr>
+          <p:cNvPr id="137" name="TextBox 136"/>
+          <p:cNvSpPr txBox="1"/>
+          <p:nvPr/>
+        </p:nvSpPr>
+        <p:spPr>
+          <a:xfrm>
+            <a:off x="6583680" y="3942892"/>
+            <a:ext cx="475488" cy="210312"/>
           </a:xfrm>
           <a:prstGeom prst="rect">
             <a:avLst/>
@@ -6827,7 +7842,7 @@
           <a:p>
             <a:pPr algn="l"/>
             <a:r>
-              <a:rPr sz="1200" b="0" i="0">
+              <a:rPr sz="1150" b="0" i="0">
                 <a:solidFill>
                   <a:srgbClr val="212529"/>
                 </a:solidFill>
@@ -6840,29 +7855,29 @@
       </p:sp>
       <p:sp>
         <p:nvSpPr>
-          <p:cNvPr id="109" name="TextBox 108"/>
-          <p:cNvSpPr txBox="1"/>
-          <p:nvPr/>
-        </p:nvSpPr>
-        <p:spPr>
-          <a:xfrm>
-            <a:off x="7296912" y="3838651"/>
-            <a:ext cx="1170432" cy="219456"/>
-          </a:xfrm>
-          <a:prstGeom prst="rect">
-            <a:avLst/>
-          </a:prstGeom>
-          <a:noFill/>
-        </p:spPr>
-        <p:txBody>
-          <a:bodyPr wrap="square" lIns="0" rIns="0" tIns="0" bIns="0">
-            <a:spAutoFit/>
-          </a:bodyPr>
-          <a:lstStyle/>
-          <a:p>
-            <a:pPr algn="r"/>
-            <a:r>
-              <a:rPr sz="1200" b="0" i="0">
+          <p:cNvPr id="138" name="TextBox 137"/>
+          <p:cNvSpPr txBox="1"/>
+          <p:nvPr/>
+        </p:nvSpPr>
+        <p:spPr>
+          <a:xfrm>
+            <a:off x="7059168" y="3942892"/>
+            <a:ext cx="950976" cy="210312"/>
+          </a:xfrm>
+          <a:prstGeom prst="rect">
+            <a:avLst/>
+          </a:prstGeom>
+          <a:noFill/>
+        </p:spPr>
+        <p:txBody>
+          <a:bodyPr wrap="square" lIns="0" rIns="0" tIns="0" bIns="0">
+            <a:spAutoFit/>
+          </a:bodyPr>
+          <a:lstStyle/>
+          <a:p>
+            <a:pPr algn="r"/>
+            <a:r>
+              <a:rPr sz="1150" b="0" i="0">
                 <a:solidFill>
                   <a:srgbClr val="212529"/>
                 </a:solidFill>
@@ -6875,29 +7890,29 @@
       </p:sp>
       <p:sp>
         <p:nvSpPr>
-          <p:cNvPr id="110" name="TextBox 109"/>
-          <p:cNvSpPr txBox="1"/>
-          <p:nvPr/>
-        </p:nvSpPr>
-        <p:spPr>
-          <a:xfrm>
-            <a:off x="8467344" y="3838651"/>
-            <a:ext cx="914400" cy="219456"/>
-          </a:xfrm>
-          <a:prstGeom prst="rect">
-            <a:avLst/>
-          </a:prstGeom>
-          <a:noFill/>
-        </p:spPr>
-        <p:txBody>
-          <a:bodyPr wrap="square" lIns="0" rIns="0" tIns="0" bIns="0">
-            <a:spAutoFit/>
-          </a:bodyPr>
-          <a:lstStyle/>
-          <a:p>
-            <a:pPr algn="r"/>
-            <a:r>
-              <a:rPr sz="1200" b="0" i="0">
+          <p:cNvPr id="139" name="TextBox 138"/>
+          <p:cNvSpPr txBox="1"/>
+          <p:nvPr/>
+        </p:nvSpPr>
+        <p:spPr>
+          <a:xfrm>
+            <a:off x="8010144" y="3942892"/>
+            <a:ext cx="749808" cy="210312"/>
+          </a:xfrm>
+          <a:prstGeom prst="rect">
+            <a:avLst/>
+          </a:prstGeom>
+          <a:noFill/>
+        </p:spPr>
+        <p:txBody>
+          <a:bodyPr wrap="square" lIns="0" rIns="0" tIns="0" bIns="0">
+            <a:spAutoFit/>
+          </a:bodyPr>
+          <a:lstStyle/>
+          <a:p>
+            <a:pPr algn="r"/>
+            <a:r>
+              <a:rPr sz="1150" b="0" i="0">
                 <a:solidFill>
                   <a:srgbClr val="212529"/>
                 </a:solidFill>
@@ -6910,29 +7925,29 @@
       </p:sp>
       <p:sp>
         <p:nvSpPr>
-          <p:cNvPr id="111" name="TextBox 110"/>
-          <p:cNvSpPr txBox="1"/>
-          <p:nvPr/>
-        </p:nvSpPr>
-        <p:spPr>
-          <a:xfrm>
-            <a:off x="9381744" y="3838651"/>
-            <a:ext cx="1316736" cy="219456"/>
-          </a:xfrm>
-          <a:prstGeom prst="rect">
-            <a:avLst/>
-          </a:prstGeom>
-          <a:noFill/>
-        </p:spPr>
-        <p:txBody>
-          <a:bodyPr wrap="square" lIns="0" rIns="0" tIns="0" bIns="0">
-            <a:spAutoFit/>
-          </a:bodyPr>
-          <a:lstStyle/>
-          <a:p>
-            <a:pPr algn="r"/>
-            <a:r>
-              <a:rPr sz="1200" b="0" i="0">
+          <p:cNvPr id="140" name="TextBox 139"/>
+          <p:cNvSpPr txBox="1"/>
+          <p:nvPr/>
+        </p:nvSpPr>
+        <p:spPr>
+          <a:xfrm>
+            <a:off x="8759952" y="3942892"/>
+            <a:ext cx="1005840" cy="210312"/>
+          </a:xfrm>
+          <a:prstGeom prst="rect">
+            <a:avLst/>
+          </a:prstGeom>
+          <a:noFill/>
+        </p:spPr>
+        <p:txBody>
+          <a:bodyPr wrap="square" lIns="0" rIns="0" tIns="0" bIns="0">
+            <a:spAutoFit/>
+          </a:bodyPr>
+          <a:lstStyle/>
+          <a:p>
+            <a:pPr algn="r"/>
+            <a:r>
+              <a:rPr sz="1150" b="0" i="0">
                 <a:solidFill>
                   <a:srgbClr val="212529"/>
                 </a:solidFill>
@@ -6945,14 +7960,49 @@
       </p:sp>
       <p:sp>
         <p:nvSpPr>
-          <p:cNvPr id="112" name="TextBox 111"/>
-          <p:cNvSpPr txBox="1"/>
-          <p:nvPr/>
-        </p:nvSpPr>
-        <p:spPr>
-          <a:xfrm>
-            <a:off x="6583680" y="4087368"/>
-            <a:ext cx="713232" cy="219456"/>
+          <p:cNvPr id="141" name="TextBox 140"/>
+          <p:cNvSpPr txBox="1"/>
+          <p:nvPr/>
+        </p:nvSpPr>
+        <p:spPr>
+          <a:xfrm>
+            <a:off x="9765792" y="3942892"/>
+            <a:ext cx="768096" cy="210312"/>
+          </a:xfrm>
+          <a:prstGeom prst="rect">
+            <a:avLst/>
+          </a:prstGeom>
+          <a:noFill/>
+        </p:spPr>
+        <p:txBody>
+          <a:bodyPr wrap="square" lIns="0" rIns="0" tIns="0" bIns="0">
+            <a:spAutoFit/>
+          </a:bodyPr>
+          <a:lstStyle/>
+          <a:p>
+            <a:pPr algn="r"/>
+            <a:r>
+              <a:rPr sz="1150" b="0" i="0">
+                <a:solidFill>
+                  <a:srgbClr val="212529"/>
+                </a:solidFill>
+                <a:latin typeface="Garamond"/>
+              </a:rPr>
+              <a:t>8,815</a:t>
+            </a:r>
+          </a:p>
+        </p:txBody>
+      </p:sp>
+      <p:sp>
+        <p:nvSpPr>
+          <p:cNvPr id="142" name="TextBox 141"/>
+          <p:cNvSpPr txBox="1"/>
+          <p:nvPr/>
+        </p:nvSpPr>
+        <p:spPr>
+          <a:xfrm>
+            <a:off x="6583680" y="4187951"/>
+            <a:ext cx="475488" cy="210312"/>
           </a:xfrm>
           <a:prstGeom prst="rect">
             <a:avLst/>
@@ -6967,7 +8017,7 @@
           <a:p>
             <a:pPr algn="l"/>
             <a:r>
-              <a:rPr sz="1200" b="0" i="0">
+              <a:rPr sz="1150" b="0" i="0">
                 <a:solidFill>
                   <a:srgbClr val="212529"/>
                 </a:solidFill>
@@ -6980,29 +8030,29 @@
       </p:sp>
       <p:sp>
         <p:nvSpPr>
-          <p:cNvPr id="113" name="TextBox 112"/>
-          <p:cNvSpPr txBox="1"/>
-          <p:nvPr/>
-        </p:nvSpPr>
-        <p:spPr>
-          <a:xfrm>
-            <a:off x="7296912" y="4087368"/>
-            <a:ext cx="1170432" cy="219456"/>
-          </a:xfrm>
-          <a:prstGeom prst="rect">
-            <a:avLst/>
-          </a:prstGeom>
-          <a:noFill/>
-        </p:spPr>
-        <p:txBody>
-          <a:bodyPr wrap="square" lIns="0" rIns="0" tIns="0" bIns="0">
-            <a:spAutoFit/>
-          </a:bodyPr>
-          <a:lstStyle/>
-          <a:p>
-            <a:pPr algn="r"/>
-            <a:r>
-              <a:rPr sz="1200" b="0" i="0">
+          <p:cNvPr id="143" name="TextBox 142"/>
+          <p:cNvSpPr txBox="1"/>
+          <p:nvPr/>
+        </p:nvSpPr>
+        <p:spPr>
+          <a:xfrm>
+            <a:off x="7059168" y="4187951"/>
+            <a:ext cx="950976" cy="210312"/>
+          </a:xfrm>
+          <a:prstGeom prst="rect">
+            <a:avLst/>
+          </a:prstGeom>
+          <a:noFill/>
+        </p:spPr>
+        <p:txBody>
+          <a:bodyPr wrap="square" lIns="0" rIns="0" tIns="0" bIns="0">
+            <a:spAutoFit/>
+          </a:bodyPr>
+          <a:lstStyle/>
+          <a:p>
+            <a:pPr algn="r"/>
+            <a:r>
+              <a:rPr sz="1150" b="0" i="0">
                 <a:solidFill>
                   <a:srgbClr val="212529"/>
                 </a:solidFill>
@@ -7015,29 +8065,29 @@
       </p:sp>
       <p:sp>
         <p:nvSpPr>
-          <p:cNvPr id="114" name="TextBox 113"/>
-          <p:cNvSpPr txBox="1"/>
-          <p:nvPr/>
-        </p:nvSpPr>
-        <p:spPr>
-          <a:xfrm>
-            <a:off x="8467344" y="4087368"/>
-            <a:ext cx="914400" cy="219456"/>
-          </a:xfrm>
-          <a:prstGeom prst="rect">
-            <a:avLst/>
-          </a:prstGeom>
-          <a:noFill/>
-        </p:spPr>
-        <p:txBody>
-          <a:bodyPr wrap="square" lIns="0" rIns="0" tIns="0" bIns="0">
-            <a:spAutoFit/>
-          </a:bodyPr>
-          <a:lstStyle/>
-          <a:p>
-            <a:pPr algn="r"/>
-            <a:r>
-              <a:rPr sz="1200" b="0" i="0">
+          <p:cNvPr id="144" name="TextBox 143"/>
+          <p:cNvSpPr txBox="1"/>
+          <p:nvPr/>
+        </p:nvSpPr>
+        <p:spPr>
+          <a:xfrm>
+            <a:off x="8010144" y="4187951"/>
+            <a:ext cx="749808" cy="210312"/>
+          </a:xfrm>
+          <a:prstGeom prst="rect">
+            <a:avLst/>
+          </a:prstGeom>
+          <a:noFill/>
+        </p:spPr>
+        <p:txBody>
+          <a:bodyPr wrap="square" lIns="0" rIns="0" tIns="0" bIns="0">
+            <a:spAutoFit/>
+          </a:bodyPr>
+          <a:lstStyle/>
+          <a:p>
+            <a:pPr algn="r"/>
+            <a:r>
+              <a:rPr sz="1150" b="0" i="0">
                 <a:solidFill>
                   <a:srgbClr val="212529"/>
                 </a:solidFill>
@@ -7050,29 +8100,29 @@
       </p:sp>
       <p:sp>
         <p:nvSpPr>
-          <p:cNvPr id="115" name="TextBox 114"/>
-          <p:cNvSpPr txBox="1"/>
-          <p:nvPr/>
-        </p:nvSpPr>
-        <p:spPr>
-          <a:xfrm>
-            <a:off x="9381744" y="4087368"/>
-            <a:ext cx="1316736" cy="219456"/>
-          </a:xfrm>
-          <a:prstGeom prst="rect">
-            <a:avLst/>
-          </a:prstGeom>
-          <a:noFill/>
-        </p:spPr>
-        <p:txBody>
-          <a:bodyPr wrap="square" lIns="0" rIns="0" tIns="0" bIns="0">
-            <a:spAutoFit/>
-          </a:bodyPr>
-          <a:lstStyle/>
-          <a:p>
-            <a:pPr algn="r"/>
-            <a:r>
-              <a:rPr sz="1200" b="0" i="0">
+          <p:cNvPr id="145" name="TextBox 144"/>
+          <p:cNvSpPr txBox="1"/>
+          <p:nvPr/>
+        </p:nvSpPr>
+        <p:spPr>
+          <a:xfrm>
+            <a:off x="8759952" y="4187951"/>
+            <a:ext cx="1005840" cy="210312"/>
+          </a:xfrm>
+          <a:prstGeom prst="rect">
+            <a:avLst/>
+          </a:prstGeom>
+          <a:noFill/>
+        </p:spPr>
+        <p:txBody>
+          <a:bodyPr wrap="square" lIns="0" rIns="0" tIns="0" bIns="0">
+            <a:spAutoFit/>
+          </a:bodyPr>
+          <a:lstStyle/>
+          <a:p>
+            <a:pPr algn="r"/>
+            <a:r>
+              <a:rPr sz="1150" b="0" i="0">
                 <a:solidFill>
                   <a:srgbClr val="212529"/>
                 </a:solidFill>
@@ -7085,14 +8135,49 @@
       </p:sp>
       <p:sp>
         <p:nvSpPr>
-          <p:cNvPr id="116" name="TextBox 115"/>
-          <p:cNvSpPr txBox="1"/>
-          <p:nvPr/>
-        </p:nvSpPr>
-        <p:spPr>
-          <a:xfrm>
-            <a:off x="6583680" y="4336084"/>
-            <a:ext cx="713232" cy="219456"/>
+          <p:cNvPr id="146" name="TextBox 145"/>
+          <p:cNvSpPr txBox="1"/>
+          <p:nvPr/>
+        </p:nvSpPr>
+        <p:spPr>
+          <a:xfrm>
+            <a:off x="9765792" y="4187951"/>
+            <a:ext cx="768096" cy="210312"/>
+          </a:xfrm>
+          <a:prstGeom prst="rect">
+            <a:avLst/>
+          </a:prstGeom>
+          <a:noFill/>
+        </p:spPr>
+        <p:txBody>
+          <a:bodyPr wrap="square" lIns="0" rIns="0" tIns="0" bIns="0">
+            <a:spAutoFit/>
+          </a:bodyPr>
+          <a:lstStyle/>
+          <a:p>
+            <a:pPr algn="r"/>
+            <a:r>
+              <a:rPr sz="1150" b="0" i="0">
+                <a:solidFill>
+                  <a:srgbClr val="212529"/>
+                </a:solidFill>
+                <a:latin typeface="Garamond"/>
+              </a:rPr>
+              <a:t>8,544</a:t>
+            </a:r>
+          </a:p>
+        </p:txBody>
+      </p:sp>
+      <p:sp>
+        <p:nvSpPr>
+          <p:cNvPr id="147" name="TextBox 146"/>
+          <p:cNvSpPr txBox="1"/>
+          <p:nvPr/>
+        </p:nvSpPr>
+        <p:spPr>
+          <a:xfrm>
+            <a:off x="6583680" y="4433011"/>
+            <a:ext cx="475488" cy="210312"/>
           </a:xfrm>
           <a:prstGeom prst="rect">
             <a:avLst/>
@@ -7107,7 +8192,7 @@
           <a:p>
             <a:pPr algn="l"/>
             <a:r>
-              <a:rPr sz="1200" b="0" i="0">
+              <a:rPr sz="1150" b="0" i="0">
                 <a:solidFill>
                   <a:srgbClr val="212529"/>
                 </a:solidFill>
@@ -7120,29 +8205,29 @@
       </p:sp>
       <p:sp>
         <p:nvSpPr>
-          <p:cNvPr id="117" name="TextBox 116"/>
-          <p:cNvSpPr txBox="1"/>
-          <p:nvPr/>
-        </p:nvSpPr>
-        <p:spPr>
-          <a:xfrm>
-            <a:off x="7296912" y="4336084"/>
-            <a:ext cx="1170432" cy="219456"/>
-          </a:xfrm>
-          <a:prstGeom prst="rect">
-            <a:avLst/>
-          </a:prstGeom>
-          <a:noFill/>
-        </p:spPr>
-        <p:txBody>
-          <a:bodyPr wrap="square" lIns="0" rIns="0" tIns="0" bIns="0">
-            <a:spAutoFit/>
-          </a:bodyPr>
-          <a:lstStyle/>
-          <a:p>
-            <a:pPr algn="r"/>
-            <a:r>
-              <a:rPr sz="1200" b="0" i="0">
+          <p:cNvPr id="148" name="TextBox 147"/>
+          <p:cNvSpPr txBox="1"/>
+          <p:nvPr/>
+        </p:nvSpPr>
+        <p:spPr>
+          <a:xfrm>
+            <a:off x="7059168" y="4433011"/>
+            <a:ext cx="950976" cy="210312"/>
+          </a:xfrm>
+          <a:prstGeom prst="rect">
+            <a:avLst/>
+          </a:prstGeom>
+          <a:noFill/>
+        </p:spPr>
+        <p:txBody>
+          <a:bodyPr wrap="square" lIns="0" rIns="0" tIns="0" bIns="0">
+            <a:spAutoFit/>
+          </a:bodyPr>
+          <a:lstStyle/>
+          <a:p>
+            <a:pPr algn="r"/>
+            <a:r>
+              <a:rPr sz="1150" b="0" i="0">
                 <a:solidFill>
                   <a:srgbClr val="212529"/>
                 </a:solidFill>
@@ -7155,29 +8240,29 @@
       </p:sp>
       <p:sp>
         <p:nvSpPr>
-          <p:cNvPr id="118" name="TextBox 117"/>
-          <p:cNvSpPr txBox="1"/>
-          <p:nvPr/>
-        </p:nvSpPr>
-        <p:spPr>
-          <a:xfrm>
-            <a:off x="8467344" y="4336084"/>
-            <a:ext cx="914400" cy="219456"/>
-          </a:xfrm>
-          <a:prstGeom prst="rect">
-            <a:avLst/>
-          </a:prstGeom>
-          <a:noFill/>
-        </p:spPr>
-        <p:txBody>
-          <a:bodyPr wrap="square" lIns="0" rIns="0" tIns="0" bIns="0">
-            <a:spAutoFit/>
-          </a:bodyPr>
-          <a:lstStyle/>
-          <a:p>
-            <a:pPr algn="r"/>
-            <a:r>
-              <a:rPr sz="1200" b="0" i="0">
+          <p:cNvPr id="149" name="TextBox 148"/>
+          <p:cNvSpPr txBox="1"/>
+          <p:nvPr/>
+        </p:nvSpPr>
+        <p:spPr>
+          <a:xfrm>
+            <a:off x="8010144" y="4433011"/>
+            <a:ext cx="749808" cy="210312"/>
+          </a:xfrm>
+          <a:prstGeom prst="rect">
+            <a:avLst/>
+          </a:prstGeom>
+          <a:noFill/>
+        </p:spPr>
+        <p:txBody>
+          <a:bodyPr wrap="square" lIns="0" rIns="0" tIns="0" bIns="0">
+            <a:spAutoFit/>
+          </a:bodyPr>
+          <a:lstStyle/>
+          <a:p>
+            <a:pPr algn="r"/>
+            <a:r>
+              <a:rPr sz="1150" b="0" i="0">
                 <a:solidFill>
                   <a:srgbClr val="212529"/>
                 </a:solidFill>
@@ -7190,29 +8275,29 @@
       </p:sp>
       <p:sp>
         <p:nvSpPr>
-          <p:cNvPr id="119" name="TextBox 118"/>
-          <p:cNvSpPr txBox="1"/>
-          <p:nvPr/>
-        </p:nvSpPr>
-        <p:spPr>
-          <a:xfrm>
-            <a:off x="9381744" y="4336084"/>
-            <a:ext cx="1316736" cy="219456"/>
-          </a:xfrm>
-          <a:prstGeom prst="rect">
-            <a:avLst/>
-          </a:prstGeom>
-          <a:noFill/>
-        </p:spPr>
-        <p:txBody>
-          <a:bodyPr wrap="square" lIns="0" rIns="0" tIns="0" bIns="0">
-            <a:spAutoFit/>
-          </a:bodyPr>
-          <a:lstStyle/>
-          <a:p>
-            <a:pPr algn="r"/>
-            <a:r>
-              <a:rPr sz="1200" b="0" i="0">
+          <p:cNvPr id="150" name="TextBox 149"/>
+          <p:cNvSpPr txBox="1"/>
+          <p:nvPr/>
+        </p:nvSpPr>
+        <p:spPr>
+          <a:xfrm>
+            <a:off x="8759952" y="4433011"/>
+            <a:ext cx="1005840" cy="210312"/>
+          </a:xfrm>
+          <a:prstGeom prst="rect">
+            <a:avLst/>
+          </a:prstGeom>
+          <a:noFill/>
+        </p:spPr>
+        <p:txBody>
+          <a:bodyPr wrap="square" lIns="0" rIns="0" tIns="0" bIns="0">
+            <a:spAutoFit/>
+          </a:bodyPr>
+          <a:lstStyle/>
+          <a:p>
+            <a:pPr algn="r"/>
+            <a:r>
+              <a:rPr sz="1150" b="0" i="0">
                 <a:solidFill>
                   <a:srgbClr val="212529"/>
                 </a:solidFill>
@@ -7225,14 +8310,49 @@
       </p:sp>
       <p:sp>
         <p:nvSpPr>
-          <p:cNvPr id="120" name="TextBox 119"/>
-          <p:cNvSpPr txBox="1"/>
-          <p:nvPr/>
-        </p:nvSpPr>
-        <p:spPr>
-          <a:xfrm>
-            <a:off x="6583680" y="4584801"/>
-            <a:ext cx="713232" cy="219456"/>
+          <p:cNvPr id="151" name="TextBox 150"/>
+          <p:cNvSpPr txBox="1"/>
+          <p:nvPr/>
+        </p:nvSpPr>
+        <p:spPr>
+          <a:xfrm>
+            <a:off x="9765792" y="4433011"/>
+            <a:ext cx="768096" cy="210312"/>
+          </a:xfrm>
+          <a:prstGeom prst="rect">
+            <a:avLst/>
+          </a:prstGeom>
+          <a:noFill/>
+        </p:spPr>
+        <p:txBody>
+          <a:bodyPr wrap="square" lIns="0" rIns="0" tIns="0" bIns="0">
+            <a:spAutoFit/>
+          </a:bodyPr>
+          <a:lstStyle/>
+          <a:p>
+            <a:pPr algn="r"/>
+            <a:r>
+              <a:rPr sz="1150" b="0" i="0">
+                <a:solidFill>
+                  <a:srgbClr val="212529"/>
+                </a:solidFill>
+                <a:latin typeface="Garamond"/>
+              </a:rPr>
+              <a:t>8,572</a:t>
+            </a:r>
+          </a:p>
+        </p:txBody>
+      </p:sp>
+      <p:sp>
+        <p:nvSpPr>
+          <p:cNvPr id="152" name="TextBox 151"/>
+          <p:cNvSpPr txBox="1"/>
+          <p:nvPr/>
+        </p:nvSpPr>
+        <p:spPr>
+          <a:xfrm>
+            <a:off x="6583680" y="4678070"/>
+            <a:ext cx="475488" cy="210312"/>
           </a:xfrm>
           <a:prstGeom prst="rect">
             <a:avLst/>
@@ -7247,7 +8367,7 @@
           <a:p>
             <a:pPr algn="l"/>
             <a:r>
-              <a:rPr sz="1200" b="0" i="0">
+              <a:rPr sz="1150" b="0" i="0">
                 <a:solidFill>
                   <a:srgbClr val="212529"/>
                 </a:solidFill>
@@ -7260,29 +8380,29 @@
       </p:sp>
       <p:sp>
         <p:nvSpPr>
-          <p:cNvPr id="121" name="TextBox 120"/>
-          <p:cNvSpPr txBox="1"/>
-          <p:nvPr/>
-        </p:nvSpPr>
-        <p:spPr>
-          <a:xfrm>
-            <a:off x="7296912" y="4584801"/>
-            <a:ext cx="1170432" cy="219456"/>
-          </a:xfrm>
-          <a:prstGeom prst="rect">
-            <a:avLst/>
-          </a:prstGeom>
-          <a:noFill/>
-        </p:spPr>
-        <p:txBody>
-          <a:bodyPr wrap="square" lIns="0" rIns="0" tIns="0" bIns="0">
-            <a:spAutoFit/>
-          </a:bodyPr>
-          <a:lstStyle/>
-          <a:p>
-            <a:pPr algn="r"/>
-            <a:r>
-              <a:rPr sz="1200" b="0" i="0">
+          <p:cNvPr id="153" name="TextBox 152"/>
+          <p:cNvSpPr txBox="1"/>
+          <p:nvPr/>
+        </p:nvSpPr>
+        <p:spPr>
+          <a:xfrm>
+            <a:off x="7059168" y="4678070"/>
+            <a:ext cx="950976" cy="210312"/>
+          </a:xfrm>
+          <a:prstGeom prst="rect">
+            <a:avLst/>
+          </a:prstGeom>
+          <a:noFill/>
+        </p:spPr>
+        <p:txBody>
+          <a:bodyPr wrap="square" lIns="0" rIns="0" tIns="0" bIns="0">
+            <a:spAutoFit/>
+          </a:bodyPr>
+          <a:lstStyle/>
+          <a:p>
+            <a:pPr algn="r"/>
+            <a:r>
+              <a:rPr sz="1150" b="0" i="0">
                 <a:solidFill>
                   <a:srgbClr val="212529"/>
                 </a:solidFill>
@@ -7295,29 +8415,29 @@
       </p:sp>
       <p:sp>
         <p:nvSpPr>
-          <p:cNvPr id="122" name="TextBox 121"/>
-          <p:cNvSpPr txBox="1"/>
-          <p:nvPr/>
-        </p:nvSpPr>
-        <p:spPr>
-          <a:xfrm>
-            <a:off x="8467344" y="4584801"/>
-            <a:ext cx="914400" cy="219456"/>
-          </a:xfrm>
-          <a:prstGeom prst="rect">
-            <a:avLst/>
-          </a:prstGeom>
-          <a:noFill/>
-        </p:spPr>
-        <p:txBody>
-          <a:bodyPr wrap="square" lIns="0" rIns="0" tIns="0" bIns="0">
-            <a:spAutoFit/>
-          </a:bodyPr>
-          <a:lstStyle/>
-          <a:p>
-            <a:pPr algn="r"/>
-            <a:r>
-              <a:rPr sz="1200" b="0" i="0">
+          <p:cNvPr id="154" name="TextBox 153"/>
+          <p:cNvSpPr txBox="1"/>
+          <p:nvPr/>
+        </p:nvSpPr>
+        <p:spPr>
+          <a:xfrm>
+            <a:off x="8010144" y="4678070"/>
+            <a:ext cx="749808" cy="210312"/>
+          </a:xfrm>
+          <a:prstGeom prst="rect">
+            <a:avLst/>
+          </a:prstGeom>
+          <a:noFill/>
+        </p:spPr>
+        <p:txBody>
+          <a:bodyPr wrap="square" lIns="0" rIns="0" tIns="0" bIns="0">
+            <a:spAutoFit/>
+          </a:bodyPr>
+          <a:lstStyle/>
+          <a:p>
+            <a:pPr algn="r"/>
+            <a:r>
+              <a:rPr sz="1150" b="0" i="0">
                 <a:solidFill>
                   <a:srgbClr val="212529"/>
                 </a:solidFill>
@@ -7330,29 +8450,29 @@
       </p:sp>
       <p:sp>
         <p:nvSpPr>
-          <p:cNvPr id="123" name="TextBox 122"/>
-          <p:cNvSpPr txBox="1"/>
-          <p:nvPr/>
-        </p:nvSpPr>
-        <p:spPr>
-          <a:xfrm>
-            <a:off x="9381744" y="4584801"/>
-            <a:ext cx="1316736" cy="219456"/>
-          </a:xfrm>
-          <a:prstGeom prst="rect">
-            <a:avLst/>
-          </a:prstGeom>
-          <a:noFill/>
-        </p:spPr>
-        <p:txBody>
-          <a:bodyPr wrap="square" lIns="0" rIns="0" tIns="0" bIns="0">
-            <a:spAutoFit/>
-          </a:bodyPr>
-          <a:lstStyle/>
-          <a:p>
-            <a:pPr algn="r"/>
-            <a:r>
-              <a:rPr sz="1200" b="0" i="0">
+          <p:cNvPr id="155" name="TextBox 154"/>
+          <p:cNvSpPr txBox="1"/>
+          <p:nvPr/>
+        </p:nvSpPr>
+        <p:spPr>
+          <a:xfrm>
+            <a:off x="8759952" y="4678070"/>
+            <a:ext cx="1005840" cy="210312"/>
+          </a:xfrm>
+          <a:prstGeom prst="rect">
+            <a:avLst/>
+          </a:prstGeom>
+          <a:noFill/>
+        </p:spPr>
+        <p:txBody>
+          <a:bodyPr wrap="square" lIns="0" rIns="0" tIns="0" bIns="0">
+            <a:spAutoFit/>
+          </a:bodyPr>
+          <a:lstStyle/>
+          <a:p>
+            <a:pPr algn="r"/>
+            <a:r>
+              <a:rPr sz="1150" b="0" i="0">
                 <a:solidFill>
                   <a:srgbClr val="212529"/>
                 </a:solidFill>
@@ -7365,14 +8485,49 @@
       </p:sp>
       <p:sp>
         <p:nvSpPr>
-          <p:cNvPr id="124" name="TextBox 123"/>
-          <p:cNvSpPr txBox="1"/>
-          <p:nvPr/>
-        </p:nvSpPr>
-        <p:spPr>
-          <a:xfrm>
-            <a:off x="6583680" y="4833518"/>
-            <a:ext cx="713232" cy="219456"/>
+          <p:cNvPr id="156" name="TextBox 155"/>
+          <p:cNvSpPr txBox="1"/>
+          <p:nvPr/>
+        </p:nvSpPr>
+        <p:spPr>
+          <a:xfrm>
+            <a:off x="9765792" y="4678070"/>
+            <a:ext cx="768096" cy="210312"/>
+          </a:xfrm>
+          <a:prstGeom prst="rect">
+            <a:avLst/>
+          </a:prstGeom>
+          <a:noFill/>
+        </p:spPr>
+        <p:txBody>
+          <a:bodyPr wrap="square" lIns="0" rIns="0" tIns="0" bIns="0">
+            <a:spAutoFit/>
+          </a:bodyPr>
+          <a:lstStyle/>
+          <a:p>
+            <a:pPr algn="r"/>
+            <a:r>
+              <a:rPr sz="1150" b="0" i="0">
+                <a:solidFill>
+                  <a:srgbClr val="212529"/>
+                </a:solidFill>
+                <a:latin typeface="Garamond"/>
+              </a:rPr>
+              <a:t>8,441</a:t>
+            </a:r>
+          </a:p>
+        </p:txBody>
+      </p:sp>
+      <p:sp>
+        <p:nvSpPr>
+          <p:cNvPr id="157" name="TextBox 156"/>
+          <p:cNvSpPr txBox="1"/>
+          <p:nvPr/>
+        </p:nvSpPr>
+        <p:spPr>
+          <a:xfrm>
+            <a:off x="6583680" y="4923129"/>
+            <a:ext cx="475488" cy="210312"/>
           </a:xfrm>
           <a:prstGeom prst="rect">
             <a:avLst/>
@@ -7387,7 +8542,7 @@
           <a:p>
             <a:pPr algn="l"/>
             <a:r>
-              <a:rPr sz="1200" b="0" i="0">
+              <a:rPr sz="1150" b="0" i="0">
                 <a:solidFill>
                   <a:srgbClr val="212529"/>
                 </a:solidFill>
@@ -7400,29 +8555,29 @@
       </p:sp>
       <p:sp>
         <p:nvSpPr>
-          <p:cNvPr id="125" name="TextBox 124"/>
-          <p:cNvSpPr txBox="1"/>
-          <p:nvPr/>
-        </p:nvSpPr>
-        <p:spPr>
-          <a:xfrm>
-            <a:off x="7296912" y="4833518"/>
-            <a:ext cx="1170432" cy="219456"/>
-          </a:xfrm>
-          <a:prstGeom prst="rect">
-            <a:avLst/>
-          </a:prstGeom>
-          <a:noFill/>
-        </p:spPr>
-        <p:txBody>
-          <a:bodyPr wrap="square" lIns="0" rIns="0" tIns="0" bIns="0">
-            <a:spAutoFit/>
-          </a:bodyPr>
-          <a:lstStyle/>
-          <a:p>
-            <a:pPr algn="r"/>
-            <a:r>
-              <a:rPr sz="1200" b="0" i="0">
+          <p:cNvPr id="158" name="TextBox 157"/>
+          <p:cNvSpPr txBox="1"/>
+          <p:nvPr/>
+        </p:nvSpPr>
+        <p:spPr>
+          <a:xfrm>
+            <a:off x="7059168" y="4923129"/>
+            <a:ext cx="950976" cy="210312"/>
+          </a:xfrm>
+          <a:prstGeom prst="rect">
+            <a:avLst/>
+          </a:prstGeom>
+          <a:noFill/>
+        </p:spPr>
+        <p:txBody>
+          <a:bodyPr wrap="square" lIns="0" rIns="0" tIns="0" bIns="0">
+            <a:spAutoFit/>
+          </a:bodyPr>
+          <a:lstStyle/>
+          <a:p>
+            <a:pPr algn="r"/>
+            <a:r>
+              <a:rPr sz="1150" b="0" i="0">
                 <a:solidFill>
                   <a:srgbClr val="212529"/>
                 </a:solidFill>
@@ -7435,29 +8590,29 @@
       </p:sp>
       <p:sp>
         <p:nvSpPr>
-          <p:cNvPr id="126" name="TextBox 125"/>
-          <p:cNvSpPr txBox="1"/>
-          <p:nvPr/>
-        </p:nvSpPr>
-        <p:spPr>
-          <a:xfrm>
-            <a:off x="8467344" y="4833518"/>
-            <a:ext cx="914400" cy="219456"/>
-          </a:xfrm>
-          <a:prstGeom prst="rect">
-            <a:avLst/>
-          </a:prstGeom>
-          <a:noFill/>
-        </p:spPr>
-        <p:txBody>
-          <a:bodyPr wrap="square" lIns="0" rIns="0" tIns="0" bIns="0">
-            <a:spAutoFit/>
-          </a:bodyPr>
-          <a:lstStyle/>
-          <a:p>
-            <a:pPr algn="r"/>
-            <a:r>
-              <a:rPr sz="1200" b="0" i="0">
+          <p:cNvPr id="159" name="TextBox 158"/>
+          <p:cNvSpPr txBox="1"/>
+          <p:nvPr/>
+        </p:nvSpPr>
+        <p:spPr>
+          <a:xfrm>
+            <a:off x="8010144" y="4923129"/>
+            <a:ext cx="749808" cy="210312"/>
+          </a:xfrm>
+          <a:prstGeom prst="rect">
+            <a:avLst/>
+          </a:prstGeom>
+          <a:noFill/>
+        </p:spPr>
+        <p:txBody>
+          <a:bodyPr wrap="square" lIns="0" rIns="0" tIns="0" bIns="0">
+            <a:spAutoFit/>
+          </a:bodyPr>
+          <a:lstStyle/>
+          <a:p>
+            <a:pPr algn="r"/>
+            <a:r>
+              <a:rPr sz="1150" b="0" i="0">
                 <a:solidFill>
                   <a:srgbClr val="212529"/>
                 </a:solidFill>
@@ -7470,49 +8625,84 @@
       </p:sp>
       <p:sp>
         <p:nvSpPr>
-          <p:cNvPr id="127" name="TextBox 126"/>
-          <p:cNvSpPr txBox="1"/>
-          <p:nvPr/>
-        </p:nvSpPr>
-        <p:spPr>
-          <a:xfrm>
-            <a:off x="9381744" y="4833518"/>
-            <a:ext cx="1316736" cy="219456"/>
-          </a:xfrm>
-          <a:prstGeom prst="rect">
-            <a:avLst/>
-          </a:prstGeom>
-          <a:noFill/>
-        </p:spPr>
-        <p:txBody>
-          <a:bodyPr wrap="square" lIns="0" rIns="0" tIns="0" bIns="0">
-            <a:spAutoFit/>
-          </a:bodyPr>
-          <a:lstStyle/>
-          <a:p>
-            <a:pPr algn="r"/>
-            <a:r>
-              <a:rPr sz="1200" b="0" i="0">
+          <p:cNvPr id="160" name="TextBox 159"/>
+          <p:cNvSpPr txBox="1"/>
+          <p:nvPr/>
+        </p:nvSpPr>
+        <p:spPr>
+          <a:xfrm>
+            <a:off x="8759952" y="4923129"/>
+            <a:ext cx="1005840" cy="210312"/>
+          </a:xfrm>
+          <a:prstGeom prst="rect">
+            <a:avLst/>
+          </a:prstGeom>
+          <a:noFill/>
+        </p:spPr>
+        <p:txBody>
+          <a:bodyPr wrap="square" lIns="0" rIns="0" tIns="0" bIns="0">
+            <a:spAutoFit/>
+          </a:bodyPr>
+          <a:lstStyle/>
+          <a:p>
+            <a:pPr algn="r"/>
+            <a:r>
+              <a:rPr sz="1150" b="0" i="0">
                 <a:solidFill>
                   <a:srgbClr val="212529"/>
                 </a:solidFill>
                 <a:latin typeface="Garamond"/>
               </a:rPr>
               <a:t>302,652*</a:t>
+            </a:r>
+          </a:p>
+        </p:txBody>
+      </p:sp>
+      <p:sp>
+        <p:nvSpPr>
+          <p:cNvPr id="161" name="TextBox 160"/>
+          <p:cNvSpPr txBox="1"/>
+          <p:nvPr/>
+        </p:nvSpPr>
+        <p:spPr>
+          <a:xfrm>
+            <a:off x="9765792" y="4923129"/>
+            <a:ext cx="768096" cy="210312"/>
+          </a:xfrm>
+          <a:prstGeom prst="rect">
+            <a:avLst/>
+          </a:prstGeom>
+          <a:noFill/>
+        </p:spPr>
+        <p:txBody>
+          <a:bodyPr wrap="square" lIns="0" rIns="0" tIns="0" bIns="0">
+            <a:spAutoFit/>
+          </a:bodyPr>
+          <a:lstStyle/>
+          <a:p>
+            <a:pPr algn="r"/>
+            <a:r>
+              <a:rPr sz="1150" b="0" i="0">
+                <a:solidFill>
+                  <a:srgbClr val="212529"/>
+                </a:solidFill>
+                <a:latin typeface="Garamond"/>
+              </a:rPr>
+              <a:t>8,028*</a:t>
             </a:r>
           </a:p>
         </p:txBody>
       </p:sp>
       <p:cxnSp>
         <p:nvCxnSpPr>
-          <p:cNvPr id="128" name="Connector 127"/>
+          <p:cNvPr id="162" name="Connector 161"/>
           <p:cNvCxnSpPr/>
           <p:nvPr/>
         </p:nvCxnSpPr>
         <p:spPr>
           <a:xfrm>
-            <a:off x="6583680" y="5109667"/>
-            <a:ext cx="4206240" cy="0"/>
+            <a:off x="6583680" y="5195620"/>
+            <a:ext cx="3950208" cy="0"/>
           </a:xfrm>
           <a:prstGeom prst="line">
             <a:avLst/>
@@ -7541,14 +8731,14 @@
       </p:cxnSp>
       <p:sp>
         <p:nvSpPr>
-          <p:cNvPr id="129" name="TextBox 128"/>
-          <p:cNvSpPr txBox="1"/>
-          <p:nvPr/>
-        </p:nvSpPr>
-        <p:spPr>
-          <a:xfrm>
-            <a:off x="6583680" y="5173675"/>
-            <a:ext cx="5486400" cy="228600"/>
+          <p:cNvPr id="163" name="TextBox 162"/>
+          <p:cNvSpPr txBox="1"/>
+          <p:nvPr/>
+        </p:nvSpPr>
+        <p:spPr>
+          <a:xfrm>
+            <a:off x="6583680" y="5277916"/>
+            <a:ext cx="5486400" cy="219456"/>
           </a:xfrm>
           <a:prstGeom prst="rect">
             <a:avLst/>
@@ -7563,27 +8753,27 @@
           <a:p>
             <a:pPr algn="l"/>
             <a:r>
-              <a:rPr sz="1250" b="1" i="0">
+              <a:rPr sz="1200" b="1" i="0">
                 <a:solidFill>
                   <a:srgbClr val="102D5E"/>
                 </a:solidFill>
                 <a:latin typeface="Garamond"/>
               </a:rPr>
-              <a:t>Total (ASEC)   3,607,763 adults, 103,820 teachers</a:t>
-            </a:r>
-          </a:p>
-        </p:txBody>
-      </p:sp>
-      <p:sp>
-        <p:nvSpPr>
-          <p:cNvPr id="130" name="TextBox 129"/>
-          <p:cNvSpPr txBox="1"/>
-          <p:nvPr/>
-        </p:nvSpPr>
-        <p:spPr>
-          <a:xfrm>
-            <a:off x="685800" y="5173675"/>
-            <a:ext cx="5394960" cy="192024"/>
+              <a:t>Total (ASEC)   3,607,763 persons, 103,820 teachers</a:t>
+            </a:r>
+          </a:p>
+        </p:txBody>
+      </p:sp>
+      <p:sp>
+        <p:nvSpPr>
+          <p:cNvPr id="164" name="TextBox 163"/>
+          <p:cNvSpPr txBox="1"/>
+          <p:nvPr/>
+        </p:nvSpPr>
+        <p:spPr>
+          <a:xfrm>
+            <a:off x="640080" y="5277916"/>
+            <a:ext cx="5577840" cy="173736"/>
           </a:xfrm>
           <a:prstGeom prst="rect">
             <a:avLst/>
@@ -7598,20 +8788,20 @@
           <a:p>
             <a:pPr algn="l"/>
             <a:r>
-              <a:rPr sz="1050" b="0" i="0">
+              <a:rPr sz="950" b="0" i="0">
                 <a:solidFill>
                   <a:srgbClr val="6B7480"/>
                 </a:solidFill>
                 <a:latin typeface="Garamond"/>
               </a:rPr>
-              <a:t>Distinct adults (18+) in both columns. The supplement interviews each person once; the basic survey interviews each adult about three times a year (0.9–1.2 million interviews), so we keep about one person in three and one interview in eight (monthly files cached from 2005; * 2025: eleven months).</a:t>
-            </a:r>
-          </a:p>
-        </p:txBody>
-      </p:sp>
-      <p:sp>
-        <p:nvSpPr>
-          <p:cNvPr id="131" name="Rounded Rectangle 130">
+              <a:t>Distinct adults (18+), each counted once per year. March suppl.: the March respondents plus the February–April oversamples. * All 12 months: people seen across the year's twelve monthly files, interviewed about three times each (files from 2005; 2025: eleven months). Teachers: longest job last year (ASEC); employed in a teaching occupation at any interview (monthly).</a:t>
+            </a:r>
+          </a:p>
+        </p:txBody>
+      </p:sp>
+      <p:sp>
+        <p:nvSpPr>
+          <p:cNvPr id="165" name="Rounded Rectangle 164">
             <a:hlinkClick action="ppaction://hlinksldjump" r:id="rId2"/>
           </p:cNvPr>
           <p:cNvSpPr/>
@@ -7675,7 +8865,7 @@
       </p:sp>
       <p:sp>
         <p:nvSpPr>
-          <p:cNvPr id="132" name="TextBox 131"/>
+          <p:cNvPr id="166" name="TextBox 165"/>
           <p:cNvSpPr txBox="1"/>
           <p:nvPr/>
         </p:nvSpPr>
@@ -7710,7 +8900,7 @@
       </p:sp>
       <p:sp>
         <p:nvSpPr>
-          <p:cNvPr id="133" name="Rounded Rectangle 132">
+          <p:cNvPr id="167" name="Rounded Rectangle 166">
             <a:hlinkClick action="ppaction://hlinksldjump" r:id="rId3"/>
           </p:cNvPr>
           <p:cNvSpPr/>
@@ -7718,7 +8908,7 @@
         </p:nvSpPr>
         <p:spPr>
           <a:xfrm>
-            <a:off x="685800" y="6327648"/>
+            <a:off x="640080" y="6327648"/>
             <a:ext cx="2071116" cy="365760"/>
           </a:xfrm>
           <a:prstGeom prst="roundRect">
@@ -7774,7 +8964,7 @@
       </p:sp>
       <p:sp>
         <p:nvSpPr>
-          <p:cNvPr id="134" name="Rounded Rectangle 133">
+          <p:cNvPr id="168" name="Rounded Rectangle 167">
             <a:hlinkClick action="ppaction://hlinksldjump" r:id="rId2"/>
           </p:cNvPr>
           <p:cNvSpPr/>
@@ -14444,7 +15634,7 @@
         </p:nvSpPr>
         <p:spPr>
           <a:xfrm>
-            <a:off x="457200" y="4584801"/>
+            <a:off x="457200" y="4593945"/>
             <a:ext cx="3291840" cy="173736"/>
           </a:xfrm>
           <a:prstGeom prst="rect">
@@ -14479,7 +15669,7 @@
         </p:nvSpPr>
         <p:spPr>
           <a:xfrm>
-            <a:off x="1371600" y="4584801"/>
+            <a:off x="1371600" y="4593945"/>
             <a:ext cx="3163824" cy="173736"/>
           </a:xfrm>
           <a:prstGeom prst="rect">
@@ -14514,7 +15704,7 @@
         </p:nvSpPr>
         <p:spPr>
           <a:xfrm>
-            <a:off x="4754880" y="4584801"/>
+            <a:off x="4754880" y="4593945"/>
             <a:ext cx="3163824" cy="173736"/>
           </a:xfrm>
           <a:prstGeom prst="rect">
@@ -14549,7 +15739,7 @@
         </p:nvSpPr>
         <p:spPr>
           <a:xfrm>
-            <a:off x="8138160" y="4584801"/>
+            <a:off x="8138160" y="4593945"/>
             <a:ext cx="3163824" cy="173736"/>
           </a:xfrm>
           <a:prstGeom prst="rect">
@@ -14584,7 +15774,7 @@
         </p:nvSpPr>
         <p:spPr>
           <a:xfrm>
-            <a:off x="457200" y="4813401"/>
+            <a:off x="457200" y="4831689"/>
             <a:ext cx="3291840" cy="173736"/>
           </a:xfrm>
           <a:prstGeom prst="rect">
@@ -14619,7 +15809,7 @@
         </p:nvSpPr>
         <p:spPr>
           <a:xfrm>
-            <a:off x="1371600" y="4813401"/>
+            <a:off x="1371600" y="4831689"/>
             <a:ext cx="3163824" cy="173736"/>
           </a:xfrm>
           <a:prstGeom prst="rect">
@@ -14654,7 +15844,7 @@
         </p:nvSpPr>
         <p:spPr>
           <a:xfrm>
-            <a:off x="4754880" y="4813401"/>
+            <a:off x="4754880" y="4831689"/>
             <a:ext cx="3163824" cy="173736"/>
           </a:xfrm>
           <a:prstGeom prst="rect">
@@ -14689,7 +15879,7 @@
         </p:nvSpPr>
         <p:spPr>
           <a:xfrm>
-            <a:off x="8138160" y="4813401"/>
+            <a:off x="8138160" y="4831689"/>
             <a:ext cx="3163824" cy="173736"/>
           </a:xfrm>
           <a:prstGeom prst="rect">
@@ -14724,7 +15914,7 @@
         </p:nvCxnSpPr>
         <p:spPr>
           <a:xfrm>
-            <a:off x="457200" y="5042001"/>
+            <a:off x="457200" y="5069433"/>
             <a:ext cx="10844784" cy="0"/>
           </a:xfrm>
           <a:prstGeom prst="line">
@@ -14760,7 +15950,7 @@
         </p:nvSpPr>
         <p:spPr>
           <a:xfrm>
-            <a:off x="457200" y="5160873"/>
+            <a:off x="457200" y="5197449"/>
             <a:ext cx="11247120" cy="173736"/>
           </a:xfrm>
           <a:prstGeom prst="rect">
@@ -14782,7 +15972,7 @@
                 </a:solidFill>
                 <a:latin typeface="Garamond"/>
               </a:rPr>
-              <a:t>Adults (18+); every cell counts persons. Within a month: New + Seen this yr + Seen last yr = Total, the month’s interviews (≈100k in the 2000s). Down a column: the Totals sum to the year’s interviews (2006: 1,221,832), while New + Seen last yr counts each person exactly once → distinct persons (2006: 203,820 + 178,187 = 382,007). The ASEC = the March respondents + the February–April oversamples: 38% of the distinct persons, 12% of the interviews, 1.45× a single March.</a:t>
+              <a:t>Adults (18+). New: first interview ever. Seen last yr: back after being interviewed the previous year (first time this year). Seen this yr: already interviewed in an earlier month of the year. Within a month the three sum to the Total; down the year, New + Seen last yr counts each person exactly once → the distinct persons. The ASEC interviews each person once: the March respondents plus the February–April oversamples, 1.45× a single March.</a:t>
             </a:r>
           </a:p>
         </p:txBody>

--- a/report/data_cluster/sample_sizes_slides.pptx
+++ b/report/data_cluster/sample_sizes_slides.pptx
@@ -3139,8 +3139,8 @@
         </p:blipFill>
         <p:spPr>
           <a:xfrm>
-            <a:off x="1865647" y="868680"/>
-            <a:ext cx="8430224" cy="5349239"/>
+            <a:off x="2257826" y="868680"/>
+            <a:ext cx="7645866" cy="5349240"/>
           </a:xfrm>
           <a:prstGeom prst="rect">
             <a:avLst/>
@@ -3441,8 +3441,8 @@
         </p:blipFill>
         <p:spPr>
           <a:xfrm>
-            <a:off x="502920" y="1051582"/>
-            <a:ext cx="11155680" cy="4983435"/>
+            <a:off x="1142392" y="868680"/>
+            <a:ext cx="9876735" cy="5349240"/>
           </a:xfrm>
           <a:prstGeom prst="rect">
             <a:avLst/>

--- a/report/data_cluster/sample_sizes_slides.pptx
+++ b/report/data_cluster/sample_sizes_slides.pptx
@@ -3441,8 +3441,8 @@
         </p:blipFill>
         <p:spPr>
           <a:xfrm>
-            <a:off x="1142392" y="868680"/>
-            <a:ext cx="9876735" cy="5349240"/>
+            <a:off x="637908" y="868680"/>
+            <a:ext cx="10885703" cy="5349240"/>
           </a:xfrm>
           <a:prstGeom prst="rect">
             <a:avLst/>
